--- a/TechMeeting202604/techmeeting20260406.pptx
+++ b/TechMeeting202604/techmeeting20260406.pptx
@@ -5,33 +5,35 @@
     <p:sldMasterId id="2147483660" r:id="rId1"/>
   </p:sldMasterIdLst>
   <p:notesMasterIdLst>
-    <p:notesMasterId r:id="rId23"/>
+    <p:notesMasterId r:id="rId25"/>
   </p:notesMasterIdLst>
   <p:handoutMasterIdLst>
-    <p:handoutMasterId r:id="rId24"/>
+    <p:handoutMasterId r:id="rId26"/>
   </p:handoutMasterIdLst>
   <p:sldIdLst>
     <p:sldId id="318" r:id="rId2"/>
     <p:sldId id="281" r:id="rId3"/>
     <p:sldId id="322" r:id="rId4"/>
-    <p:sldId id="312" r:id="rId5"/>
-    <p:sldId id="319" r:id="rId6"/>
-    <p:sldId id="321" r:id="rId7"/>
-    <p:sldId id="320" r:id="rId8"/>
-    <p:sldId id="323" r:id="rId9"/>
-    <p:sldId id="324" r:id="rId10"/>
-    <p:sldId id="325" r:id="rId11"/>
-    <p:sldId id="326" r:id="rId12"/>
-    <p:sldId id="327" r:id="rId13"/>
-    <p:sldId id="328" r:id="rId14"/>
-    <p:sldId id="329" r:id="rId15"/>
-    <p:sldId id="330" r:id="rId16"/>
-    <p:sldId id="331" r:id="rId17"/>
-    <p:sldId id="332" r:id="rId18"/>
-    <p:sldId id="333" r:id="rId19"/>
-    <p:sldId id="336" r:id="rId20"/>
-    <p:sldId id="334" r:id="rId21"/>
-    <p:sldId id="335" r:id="rId22"/>
+    <p:sldId id="337" r:id="rId5"/>
+    <p:sldId id="312" r:id="rId6"/>
+    <p:sldId id="338" r:id="rId7"/>
+    <p:sldId id="319" r:id="rId8"/>
+    <p:sldId id="321" r:id="rId9"/>
+    <p:sldId id="320" r:id="rId10"/>
+    <p:sldId id="324" r:id="rId11"/>
+    <p:sldId id="325" r:id="rId12"/>
+    <p:sldId id="323" r:id="rId13"/>
+    <p:sldId id="326" r:id="rId14"/>
+    <p:sldId id="327" r:id="rId15"/>
+    <p:sldId id="328" r:id="rId16"/>
+    <p:sldId id="329" r:id="rId17"/>
+    <p:sldId id="330" r:id="rId18"/>
+    <p:sldId id="331" r:id="rId19"/>
+    <p:sldId id="332" r:id="rId20"/>
+    <p:sldId id="333" r:id="rId21"/>
+    <p:sldId id="336" r:id="rId22"/>
+    <p:sldId id="334" r:id="rId23"/>
+    <p:sldId id="335" r:id="rId24"/>
   </p:sldIdLst>
   <p:sldSz cx="9906000" cy="6858000" type="A4"/>
   <p:notesSz cx="6735763" cy="9866313"/>
@@ -799,7 +801,7 @@
           <a:p>
             <a:fld id="{FB2DADC9-84AC-47A0-A132-06E0329E8A4A}" type="datetimeFigureOut">
               <a:rPr kumimoji="1" lang="ja-JP" altLang="en-US" smtClean="0"/>
-              <a:t>2026/4/1</a:t>
+              <a:t>2026/4/2</a:t>
             </a:fld>
             <a:endParaRPr kumimoji="1" lang="ja-JP" altLang="en-US"/>
           </a:p>
@@ -976,7 +978,7 @@
           <a:p>
             <a:fld id="{A532AB89-1C3C-45F3-9E77-B76890C91663}" type="datetimeFigureOut">
               <a:rPr kumimoji="1" lang="ja-JP" altLang="en-US" smtClean="0"/>
-              <a:t>2026/4/1</a:t>
+              <a:t>2026/4/2</a:t>
             </a:fld>
             <a:endParaRPr kumimoji="1" lang="ja-JP" altLang="en-US"/>
           </a:p>
@@ -3711,79 +3713,61 @@
           <a:p>
             <a:r>
               <a:rPr kumimoji="1" lang="ja-JP" altLang="en-US" sz="1600" dirty="0"/>
-              <a:t>PR 作成</a:t>
-            </a:r>
-          </a:p>
-          <a:p>
-            <a:pPr lvl="1"/>
+              <a:t>Claude Code で構築した統合 CLI ツール（TypeScript）</a:t>
+            </a:r>
+          </a:p>
+          <a:p>
+            <a:endParaRPr lang="ja-JP" altLang="en-US" dirty="0"/>
+          </a:p>
+          <a:p>
             <a:r>
               <a:rPr kumimoji="1" lang="ja-JP" altLang="en-US" sz="1600" dirty="0"/>
-              <a:t>→ docs-validate.yml</a:t>
-            </a:r>
-          </a:p>
-          <a:p>
-            <a:pPr lvl="2"/>
+              <a:t>docs:check        frontmatter 検証・パス重複チェック</a:t>
+            </a:r>
+          </a:p>
+          <a:p>
             <a:r>
               <a:rPr kumimoji="1" lang="ja-JP" altLang="en-US" sz="1600" dirty="0"/>
-              <a:t>TypeScript 型チェック（tsc --noEmit）</a:t>
-            </a:r>
-          </a:p>
-          <a:p>
-            <a:pPr lvl="2"/>
+              <a:t>docs:publish      Git → GROWI 同期（単体 / 一括 / dry-run）</a:t>
+            </a:r>
+          </a:p>
+          <a:p>
             <a:r>
               <a:rPr kumimoji="1" lang="ja-JP" altLang="en-US" sz="1600" dirty="0"/>
-              <a:t>frontmatter / パス整合性チェック（docs:check）</a:t>
-            </a:r>
+              <a:t>docs:import:page  GROWI → Git 取り込み（画像を Blob に自動移行）</a:t>
+            </a:r>
+          </a:p>
+          <a:p>
+            <a:r>
+              <a:rPr kumimoji="1" lang="ja-JP" altLang="en-US" sz="1600" dirty="0"/>
+              <a:t>docs:import:tree  GROWI ツリー一括取り込み</a:t>
+            </a:r>
+          </a:p>
+          <a:p>
+            <a:r>
+              <a:rPr kumimoji="1" lang="ja-JP" altLang="en-US" sz="1600" dirty="0"/>
+              <a:t>docs:image:paste  クリップボード画像 → Azure Blob → Markdown リンク</a:t>
+            </a:r>
+          </a:p>
+          <a:p>
+            <a:r>
+              <a:rPr kumimoji="1" lang="ja-JP" altLang="en-US" sz="1600" dirty="0"/>
+              <a:t>docs:image:upload ローカル画像ファイル → Azure Blob</a:t>
+            </a:r>
+          </a:p>
+          <a:p>
             <a:endParaRPr lang="ja-JP" altLang="en-US" dirty="0"/>
           </a:p>
           <a:p>
             <a:r>
               <a:rPr kumimoji="1" lang="ja-JP" altLang="en-US" sz="1600" dirty="0"/>
-              <a:t>release ブランチへマージ</a:t>
-            </a:r>
-          </a:p>
-          <a:p>
-            <a:pPr lvl="1"/>
+              <a:t>各 Markdown に frontmatter でメタデータを持たせる（設定ファイル不要）</a:t>
+            </a:r>
+          </a:p>
+          <a:p>
             <a:r>
               <a:rPr kumimoji="1" lang="ja-JP" altLang="en-US" sz="1600" dirty="0"/>
-              <a:t>→ sync-to-growi.yml</a:t>
-            </a:r>
-          </a:p>
-          <a:p>
-            <a:pPr lvl="2"/>
-            <a:r>
-              <a:rPr kumimoji="1" lang="ja-JP" altLang="en-US" sz="1600" dirty="0"/>
-              <a:t>git diff で変更 Markdown を検出</a:t>
-            </a:r>
-          </a:p>
-          <a:p>
-            <a:pPr lvl="2"/>
-            <a:r>
-              <a:rPr kumimoji="1" lang="ja-JP" altLang="en-US" sz="1600" dirty="0"/>
-              <a:t>growi_path の変更を検知 → 事故防止（fail）</a:t>
-            </a:r>
-          </a:p>
-          <a:p>
-            <a:pPr lvl="2"/>
-            <a:r>
-              <a:rPr kumimoji="1" lang="ja-JP" altLang="en-US" sz="1600" dirty="0"/>
-              <a:t>変更ファイルのみを GROWI に publish</a:t>
-            </a:r>
-          </a:p>
-          <a:p>
-            <a:pPr lvl="2"/>
-            <a:r>
-              <a:rPr kumimoji="1" lang="ja-JP" altLang="en-US" sz="1600" dirty="0"/>
-              <a:t>変更なしなら zero-diff skip</a:t>
-            </a:r>
-          </a:p>
-          <a:p>
-            <a:endParaRPr lang="ja-JP" altLang="en-US" dirty="0"/>
-          </a:p>
-          <a:p>
-            <a:r>
-              <a:rPr kumimoji="1" lang="ja-JP" altLang="en-US" sz="1600" dirty="0"/>
-              <a:t>冪等な設計: 再実行しても安全</a:t>
+              <a:t>画像貼り付けは VSCode ショートカット（Ctrl+Alt+V）で完結</a:t>
             </a:r>
           </a:p>
         </p:txBody>
@@ -3805,7 +3789,7 @@
           <a:p>
             <a:r>
               <a:rPr kumimoji="1" lang="ja-JP" altLang="en-US" dirty="0"/>
-              <a:t>演算（Reckoning）— 自動同期パイプライン</a:t>
+              <a:t>演算（Reckoning）— growi-docs CLI</a:t>
             </a:r>
           </a:p>
         </p:txBody>
@@ -3853,81 +3837,80 @@
           <a:lstStyle/>
           <a:p>
             <a:r>
-              <a:rPr kumimoji="1" lang="ja-JP" altLang="en-US" sz="1600" b="1" dirty="0"/>
-              <a:t>効果</a:t>
-            </a:r>
-          </a:p>
-          <a:p>
-            <a:pPr lvl="1"/>
-            <a:r>
               <a:rPr kumimoji="1" lang="ja-JP" altLang="en-US" sz="1600" dirty="0"/>
-              <a:t>仕様ドキュメントを Git 管理（現在 193 ファイル規模）</a:t>
-            </a:r>
-          </a:p>
-          <a:p>
-            <a:pPr lvl="1"/>
-            <a:r>
-              <a:rPr kumimoji="1" lang="ja-JP" altLang="en-US" sz="1600" b="1" dirty="0"/>
-              <a:t>仕様をコードから AI で生成 → 過程でバグも発見</a:t>
-            </a:r>
+              <a:t>PR 作成</a:t>
+            </a:r>
+          </a:p>
+          <a:p>
+            <a:pPr lvl="1"/>
             <a:r>
               <a:rPr kumimoji="1" lang="ja-JP" altLang="en-US" sz="1600" dirty="0"/>
-              <a:t>（SSOT の恩恵）</a:t>
-            </a:r>
-          </a:p>
-          <a:p>
-            <a:pPr lvl="1"/>
+              <a:t>→ docs-validate.yml</a:t>
+            </a:r>
+          </a:p>
+          <a:p>
+            <a:pPr lvl="2"/>
             <a:r>
               <a:rPr kumimoji="1" lang="ja-JP" altLang="en-US" sz="1600" dirty="0"/>
-              <a:t>コミット履歴で貢献が見える（感謝を伝えやすい）</a:t>
-            </a:r>
-          </a:p>
-          <a:p>
-            <a:pPr lvl="1"/>
-            <a:r>
-              <a:rPr kumimoji="1" lang="en-US" altLang="ja-JP" sz="1600" dirty="0"/>
-              <a:t>AI</a:t>
-            </a:r>
+              <a:t>TypeScript 型チェック（tsc --noEmit）</a:t>
+            </a:r>
+          </a:p>
+          <a:p>
+            <a:pPr lvl="2"/>
             <a:r>
               <a:rPr kumimoji="1" lang="ja-JP" altLang="en-US" sz="1600" dirty="0"/>
-              <a:t>エージェントで「時間がない」で届かなかった仕組みづくりに手が届いた</a:t>
-            </a:r>
-          </a:p>
-          <a:p>
+              <a:t>frontmatter / パス整合性チェック（docs:check）</a:t>
+            </a:r>
             <a:endParaRPr lang="ja-JP" altLang="en-US" dirty="0"/>
           </a:p>
           <a:p>
             <a:r>
-              <a:rPr kumimoji="1" lang="ja-JP" altLang="en-US" sz="1600" b="1" dirty="0"/>
-              <a:t>ここで起きていたこと</a:t>
-            </a:r>
-          </a:p>
-          <a:p>
-            <a:pPr lvl="1"/>
-            <a:r>
               <a:rPr kumimoji="1" lang="ja-JP" altLang="en-US" sz="1600" dirty="0"/>
-              <a:t>「何を自動化するか」「どう設計するか」→ 人間が判断</a:t>
+              <a:t>release ブランチへマージ</a:t>
             </a:r>
           </a:p>
           <a:p>
             <a:pPr lvl="1"/>
             <a:r>
               <a:rPr kumimoji="1" lang="ja-JP" altLang="en-US" sz="1600" dirty="0"/>
-              <a:t>「ツール構築」「同期実行」           → AI が演算</a:t>
-            </a:r>
-          </a:p>
-          <a:p>
-            <a:pPr lvl="1"/>
+              <a:t>→ sync-to-growi.yml</a:t>
+            </a:r>
+          </a:p>
+          <a:p>
+            <a:pPr lvl="2"/>
             <a:r>
               <a:rPr kumimoji="1" lang="ja-JP" altLang="en-US" sz="1600" dirty="0"/>
-              <a:t>作り方そのものを設計できた</a:t>
-            </a:r>
-          </a:p>
-          <a:p>
-            <a:pPr lvl="1"/>
+              <a:t>git diff で変更 Markdown を検出</a:t>
+            </a:r>
+          </a:p>
+          <a:p>
+            <a:pPr lvl="2"/>
             <a:r>
               <a:rPr kumimoji="1" lang="ja-JP" altLang="en-US" sz="1600" dirty="0"/>
-              <a:t>— 機能・制約・トレードオフを高速で試せるようになった</a:t>
+              <a:t>growi_path の変更を検知 → 事故防止（fail）</a:t>
+            </a:r>
+          </a:p>
+          <a:p>
+            <a:pPr lvl="2"/>
+            <a:r>
+              <a:rPr kumimoji="1" lang="ja-JP" altLang="en-US" sz="1600" dirty="0"/>
+              <a:t>変更ファイルのみを GROWI に publish</a:t>
+            </a:r>
+          </a:p>
+          <a:p>
+            <a:pPr lvl="2"/>
+            <a:r>
+              <a:rPr kumimoji="1" lang="ja-JP" altLang="en-US" sz="1600" dirty="0"/>
+              <a:t>変更なしなら zero-diff skip</a:t>
+            </a:r>
+          </a:p>
+          <a:p>
+            <a:endParaRPr lang="ja-JP" altLang="en-US" dirty="0"/>
+          </a:p>
+          <a:p>
+            <a:r>
+              <a:rPr kumimoji="1" lang="ja-JP" altLang="en-US" sz="1600" dirty="0"/>
+              <a:t>冪等な設計: 再実行しても安全</a:t>
             </a:r>
           </a:p>
         </p:txBody>
@@ -3949,7 +3932,7 @@
           <a:p>
             <a:r>
               <a:rPr kumimoji="1" lang="ja-JP" altLang="en-US" dirty="0"/>
-              <a:t>効果とここで起きていたこと</a:t>
+              <a:t>演算（Reckoning）— 自動同期パイプライン</a:t>
             </a:r>
           </a:p>
         </p:txBody>
@@ -3981,48 +3964,105 @@
       </p:grpSpPr>
       <p:sp>
         <p:nvSpPr>
-          <p:cNvPr id="2" name="タイトル 1"/>
+          <p:cNvPr id="2" name="コンテンツ プレースホルダー 1"/>
           <p:cNvSpPr>
             <a:spLocks noGrp="1"/>
           </p:cNvSpPr>
           <p:nvPr>
-            <p:ph type="ctrTitle"/>
+            <p:ph idx="1"/>
           </p:nvPr>
         </p:nvSpPr>
         <p:spPr/>
         <p:txBody>
           <a:bodyPr>
-            <a:normAutofit fontScale="90000"/>
+            <a:normAutofit/>
           </a:bodyPr>
           <a:lstStyle/>
           <a:p>
             <a:r>
-              <a:rPr kumimoji="1" lang="ja-JP" altLang="en-US" sz="2600" dirty="0"/>
-              <a:t>事例2　AIレビューワークフロー</a:t>
-            </a:r>
-          </a:p>
-        </p:txBody>
-      </p:sp>
-      <p:sp>
-        <p:nvSpPr>
-          <p:cNvPr id="3" name="字幕 2"/>
+              <a:rPr kumimoji="1" lang="ja-JP" altLang="en-US" sz="1600" b="1" dirty="0"/>
+              <a:t>問い: Wiki をローカル（Git）で管理すれば何が可能になるか？</a:t>
+            </a:r>
+            <a:endParaRPr lang="ja-JP" altLang="en-US" dirty="0"/>
+          </a:p>
+          <a:p>
+            <a:pPr lvl="1"/>
+            <a:r>
+              <a:rPr kumimoji="1" lang="ja-JP" altLang="en-US" sz="1600" dirty="0"/>
+              <a:t>コーディングエージェントはローカル情報に最も効率よくアクセスできる</a:t>
+            </a:r>
+          </a:p>
+          <a:p>
+            <a:pPr lvl="1"/>
+            <a:r>
+              <a:rPr kumimoji="1" lang="ja-JP" altLang="en-US" sz="1600" dirty="0"/>
+              <a:t>Wiki を読んで既存仕様との整合性チェックができる</a:t>
+            </a:r>
+          </a:p>
+          <a:p>
+            <a:pPr lvl="1"/>
+            <a:r>
+              <a:rPr kumimoji="1" lang="ja-JP" altLang="en-US" sz="1600" dirty="0"/>
+              <a:t>Git 管理にすれば GitHub Actions に組み込める</a:t>
+            </a:r>
+            <a:endParaRPr kumimoji="1" lang="en-US" altLang="ja-JP" sz="1600" dirty="0"/>
+          </a:p>
+          <a:p>
+            <a:pPr lvl="1"/>
+            <a:endParaRPr lang="en-US" altLang="ja-JP" sz="1600" dirty="0"/>
+          </a:p>
+          <a:p>
+            <a:pPr lvl="1"/>
+            <a:endParaRPr kumimoji="1" lang="ja-JP" altLang="en-US" sz="1600" dirty="0"/>
+          </a:p>
+          <a:p>
+            <a:r>
+              <a:rPr lang="ja-JP" altLang="en-US" b="1" dirty="0"/>
+              <a:t>問い:</a:t>
+            </a:r>
+            <a:endParaRPr lang="ja-JP" altLang="en-US" dirty="0"/>
+          </a:p>
+          <a:p>
+            <a:pPr lvl="1"/>
+            <a:r>
+              <a:rPr kumimoji="1" lang="ja-JP" altLang="en-US" sz="1600" dirty="0"/>
+              <a:t>GROWI が社内 NW のみ       → selfhost ランナーで解決</a:t>
+            </a:r>
+          </a:p>
+          <a:p>
+            <a:pPr lvl="1"/>
+            <a:r>
+              <a:rPr kumimoji="1" lang="ja-JP" altLang="en-US" sz="1600" dirty="0"/>
+              <a:t>Git 画像でリポジトリが重い   → Azure Blob ストレージ</a:t>
+            </a:r>
+          </a:p>
+          <a:p>
+            <a:pPr lvl="1"/>
+            <a:r>
+              <a:rPr kumimoji="1" lang="ja-JP" altLang="en-US" sz="1600" dirty="0"/>
+              <a:t>Blob に格納する手順が面倒   → CLI スクリプト + ショートカットで実行</a:t>
+            </a:r>
+          </a:p>
+        </p:txBody>
+      </p:sp>
+      <p:sp>
+        <p:nvSpPr>
+          <p:cNvPr id="3" name="タイトル 2"/>
           <p:cNvSpPr>
             <a:spLocks noGrp="1"/>
           </p:cNvSpPr>
           <p:nvPr>
-            <p:ph type="subTitle" idx="1"/>
+            <p:ph type="title"/>
           </p:nvPr>
         </p:nvSpPr>
         <p:spPr/>
         <p:txBody>
-          <a:bodyPr>
-            <a:normAutofit/>
-          </a:bodyPr>
+          <a:bodyPr/>
           <a:lstStyle/>
           <a:p>
             <a:r>
-              <a:rPr kumimoji="1" lang="ja-JP" altLang="en-US" sz="1300" dirty="0"/>
-              <a:t>「判断を構造化し、育てる」</a:t>
+              <a:rPr kumimoji="1" lang="ja-JP" altLang="en-US" dirty="0"/>
+              <a:t>判断（Judgment）—何を判断したか</a:t>
             </a:r>
           </a:p>
         </p:txBody>
@@ -4065,25 +4105,49 @@
         <p:spPr/>
         <p:txBody>
           <a:bodyPr>
-            <a:normAutofit lnSpcReduction="10000"/>
+            <a:normAutofit/>
           </a:bodyPr>
           <a:lstStyle/>
           <a:p>
             <a:r>
-              <a:rPr kumimoji="1" lang="ja-JP" altLang="en-US" sz="1500" dirty="0"/>
-              <a:t>コアメンバー（田中さん）が別チームへ</a:t>
-            </a:r>
-            <a:r>
-              <a:rPr kumimoji="1" lang="en-US" altLang="ja-JP" sz="1500" dirty="0"/>
-              <a:t>…</a:t>
-            </a:r>
-            <a:endParaRPr kumimoji="1" lang="ja-JP" altLang="en-US" sz="1500" dirty="0"/>
-          </a:p>
-          <a:p>
-            <a:pPr lvl="1"/>
-            <a:r>
-              <a:rPr kumimoji="1" lang="ja-JP" altLang="en-US" sz="1500" dirty="0"/>
-              <a:t>→ PdM 1名 / BE+FE 1名（私）/ FE 2名 体制に</a:t>
+              <a:rPr kumimoji="1" lang="ja-JP" altLang="en-US" sz="1600" b="1" dirty="0"/>
+              <a:t>効果</a:t>
+            </a:r>
+          </a:p>
+          <a:p>
+            <a:pPr lvl="1"/>
+            <a:r>
+              <a:rPr kumimoji="1" lang="ja-JP" altLang="en-US" sz="1600" dirty="0"/>
+              <a:t>仕様ドキュメントを Git 管理（現在 193 ファイル規模）</a:t>
+            </a:r>
+          </a:p>
+          <a:p>
+            <a:pPr lvl="1"/>
+            <a:r>
+              <a:rPr kumimoji="1" lang="ja-JP" altLang="en-US" sz="1600" b="1" dirty="0"/>
+              <a:t>仕様をコードから AI で生成 → 過程でバグも発見</a:t>
+            </a:r>
+            <a:r>
+              <a:rPr kumimoji="1" lang="ja-JP" altLang="en-US" sz="1600" dirty="0"/>
+              <a:t>（SSOT の恩恵）</a:t>
+            </a:r>
+          </a:p>
+          <a:p>
+            <a:pPr lvl="1"/>
+            <a:r>
+              <a:rPr kumimoji="1" lang="ja-JP" altLang="en-US" sz="1600" dirty="0"/>
+              <a:t>コミット履歴で貢献が見える（感謝を伝えやすい）</a:t>
+            </a:r>
+          </a:p>
+          <a:p>
+            <a:pPr lvl="1"/>
+            <a:r>
+              <a:rPr kumimoji="1" lang="en-US" altLang="ja-JP" sz="1600" dirty="0"/>
+              <a:t>AI</a:t>
+            </a:r>
+            <a:r>
+              <a:rPr kumimoji="1" lang="ja-JP" altLang="en-US" sz="1600" dirty="0"/>
+              <a:t>エージェントで「時間がない」で届かなかった仕組みづくりに手が届いた</a:t>
             </a:r>
           </a:p>
           <a:p>
@@ -4091,61 +4155,36 @@
           </a:p>
           <a:p>
             <a:r>
-              <a:rPr kumimoji="1" lang="ja-JP" altLang="en-US" sz="1500" dirty="0"/>
-              <a:t>コード自体は AI で早く完成するが、レビューコストが高くなっていた</a:t>
-            </a:r>
-          </a:p>
-          <a:p>
-            <a:endParaRPr lang="ja-JP" altLang="en-US" dirty="0"/>
-          </a:p>
-          <a:p>
-            <a:r>
-              <a:rPr kumimoji="1" lang="ja-JP" altLang="en-US" sz="1500" b="1" dirty="0"/>
-              <a:t>AI にレビューさせるだけでは不十分</a:t>
-            </a:r>
-          </a:p>
-          <a:p>
-            <a:pPr lvl="1"/>
-            <a:r>
-              <a:rPr kumimoji="1" lang="ja-JP" altLang="en-US" sz="1500" dirty="0"/>
-              <a:t>確認してほしいことを確認してくれるとは限らない</a:t>
-            </a:r>
-          </a:p>
-          <a:p>
-            <a:pPr lvl="1"/>
-            <a:r>
-              <a:rPr kumimoji="1" lang="ja-JP" altLang="en-US" sz="1500" dirty="0"/>
-              <a:t>バグ探しを主目的にすると、テスト / Lint / 静的解析と責務が競合する</a:t>
-            </a:r>
-          </a:p>
-          <a:p>
-            <a:pPr lvl="1"/>
-            <a:r>
-              <a:rPr kumimoji="1" lang="ja-JP" altLang="en-US" sz="1500" dirty="0"/>
-              <a:t>AI生成コードは速く増えるが、人間の理解速度は変わらない</a:t>
-            </a:r>
-          </a:p>
-          <a:p>
-            <a:endParaRPr lang="ja-JP" altLang="en-US" dirty="0"/>
-          </a:p>
-          <a:p>
-            <a:r>
-              <a:rPr kumimoji="1" lang="ja-JP" altLang="en-US" sz="1500" b="1" dirty="0"/>
-              <a:t>レビューには 2つの時間軸がある</a:t>
-            </a:r>
-          </a:p>
-          <a:p>
-            <a:pPr lvl="1"/>
-            <a:r>
-              <a:rPr kumimoji="1" lang="ja-JP" altLang="en-US" sz="1500" dirty="0"/>
-              <a:t>短期: この変更をいま組み込むべきかを判断する</a:t>
-            </a:r>
-          </a:p>
-          <a:p>
-            <a:pPr lvl="1"/>
-            <a:r>
-              <a:rPr kumimoji="1" lang="ja-JP" altLang="en-US" sz="1500" dirty="0"/>
-              <a:t>長期: その判断を担える人を増やす</a:t>
+              <a:rPr kumimoji="1" lang="ja-JP" altLang="en-US" sz="1600" b="1" dirty="0"/>
+              <a:t>ここで起きていたこと</a:t>
+            </a:r>
+          </a:p>
+          <a:p>
+            <a:pPr lvl="1"/>
+            <a:r>
+              <a:rPr kumimoji="1" lang="ja-JP" altLang="en-US" sz="1600" dirty="0"/>
+              <a:t>「何を自動化するか」「どう設計するか」→ 人間が判断</a:t>
+            </a:r>
+          </a:p>
+          <a:p>
+            <a:pPr lvl="1"/>
+            <a:r>
+              <a:rPr kumimoji="1" lang="ja-JP" altLang="en-US" sz="1600" dirty="0"/>
+              <a:t>「ツール構築」「同期実行」           → AI が演算</a:t>
+            </a:r>
+          </a:p>
+          <a:p>
+            <a:pPr lvl="1"/>
+            <a:r>
+              <a:rPr kumimoji="1" lang="ja-JP" altLang="en-US" sz="1600" dirty="0"/>
+              <a:t>作り方そのものを設計できた</a:t>
+            </a:r>
+          </a:p>
+          <a:p>
+            <a:pPr lvl="1"/>
+            <a:r>
+              <a:rPr kumimoji="1" lang="ja-JP" altLang="en-US" sz="1600" dirty="0"/>
+              <a:t>— 機能・制約・トレードオフを高速で試せるようになった</a:t>
             </a:r>
           </a:p>
         </p:txBody>
@@ -4167,7 +4206,7 @@
           <a:p>
             <a:r>
               <a:rPr kumimoji="1" lang="ja-JP" altLang="en-US" dirty="0"/>
-              <a:t>課題 — AIレビューだけでは不十分</a:t>
+              <a:t>効果とここで起きていたこと</a:t>
             </a:r>
           </a:p>
         </p:txBody>
@@ -4199,157 +4238,48 @@
       </p:grpSpPr>
       <p:sp>
         <p:nvSpPr>
-          <p:cNvPr id="2" name="コンテンツ プレースホルダー 1"/>
+          <p:cNvPr id="2" name="タイトル 1"/>
           <p:cNvSpPr>
             <a:spLocks noGrp="1"/>
           </p:cNvSpPr>
           <p:nvPr>
-            <p:ph idx="1"/>
+            <p:ph type="ctrTitle"/>
           </p:nvPr>
         </p:nvSpPr>
         <p:spPr/>
         <p:txBody>
           <a:bodyPr>
-            <a:normAutofit fontScale="92500" lnSpcReduction="10000"/>
+            <a:normAutofit fontScale="90000"/>
           </a:bodyPr>
           <a:lstStyle/>
           <a:p>
             <a:r>
-              <a:rPr kumimoji="1" lang="ja-JP" altLang="en-US" sz="1500" b="1" dirty="0"/>
-              <a:t>問い: AI がチェックし、人間が採否を判断するワークフローをどう設計するか？</a:t>
-            </a:r>
-            <a:endParaRPr lang="ja-JP" altLang="en-US" dirty="0"/>
-          </a:p>
-          <a:p>
-            <a:r>
-              <a:rPr kumimoji="1" lang="ja-JP" altLang="en-US" sz="1500" dirty="0"/>
-              <a:t>レビューの前提</a:t>
-            </a:r>
-          </a:p>
-          <a:p>
-            <a:pPr lvl="1"/>
-            <a:r>
-              <a:rPr kumimoji="1" lang="ja-JP" altLang="en-US" sz="1500" dirty="0"/>
-              <a:t>これまでは、コーディングの過程でメンタルモデルが形成されていた</a:t>
-            </a:r>
-            <a:endParaRPr kumimoji="1" lang="en-US" altLang="ja-JP" sz="1500" dirty="0"/>
-          </a:p>
-          <a:p>
-            <a:pPr lvl="2"/>
-            <a:r>
-              <a:rPr kumimoji="1" lang="en-US" altLang="ja-JP" sz="1500" dirty="0"/>
-              <a:t>AI</a:t>
-            </a:r>
-            <a:r>
-              <a:rPr kumimoji="1" lang="ja-JP" altLang="en-US" sz="1500" dirty="0"/>
-              <a:t>によって、メンタルモデルが漠然としていても実装ができてしまう</a:t>
-            </a:r>
-            <a:br>
-              <a:rPr kumimoji="1" lang="en-US" altLang="ja-JP" sz="1500" dirty="0"/>
-            </a:br>
-            <a:r>
-              <a:rPr kumimoji="1" lang="ja-JP" altLang="en-US" sz="1500" dirty="0"/>
-              <a:t>≒コードの細かい仕様やトレードオフを理解せぬまま動いてしまう</a:t>
-            </a:r>
-            <a:endParaRPr kumimoji="1" lang="en-US" altLang="ja-JP" sz="1500" dirty="0"/>
-          </a:p>
-          <a:p>
-            <a:pPr lvl="1"/>
-            <a:r>
-              <a:rPr kumimoji="1" lang="ja-JP" altLang="en-US" sz="1500" dirty="0"/>
-              <a:t>著者が先に自分のメンタルモデルへ統合してからレビューに出す</a:t>
-            </a:r>
-          </a:p>
-          <a:p>
-            <a:pPr lvl="1"/>
-            <a:r>
-              <a:rPr kumimoji="1" lang="ja-JP" altLang="en-US" sz="1500" dirty="0"/>
-              <a:t>「AI が書いたので詳細はよく分からないが、テストは通っている」は出せない</a:t>
-            </a:r>
-            <a:endParaRPr lang="ja-JP" altLang="en-US" dirty="0"/>
-          </a:p>
-          <a:p>
-            <a:r>
-              <a:rPr kumimoji="1" lang="ja-JP" altLang="en-US" sz="1500" dirty="0"/>
-              <a:t>セルフレビュー（著者用）とピアレビュー（レビュワー用）を分離</a:t>
-            </a:r>
-          </a:p>
-          <a:p>
-            <a:pPr lvl="1"/>
-            <a:r>
-              <a:rPr kumimoji="1" lang="ja-JP" altLang="en-US" sz="1500" dirty="0"/>
-              <a:t>セルフ: 網羅的チェック + 意思決定の記録</a:t>
-            </a:r>
-            <a:endParaRPr kumimoji="1" lang="en-US" altLang="ja-JP" sz="1500" dirty="0"/>
-          </a:p>
-          <a:p>
-            <a:pPr lvl="2"/>
-            <a:r>
-              <a:rPr kumimoji="1" lang="ja-JP" altLang="en-US" sz="1500" dirty="0"/>
-              <a:t>著者がコードに責任を持つべき</a:t>
-            </a:r>
-            <a:endParaRPr kumimoji="1" lang="en-US" altLang="ja-JP" sz="1500" dirty="0"/>
-          </a:p>
-          <a:p>
-            <a:pPr lvl="1"/>
-            <a:r>
-              <a:rPr lang="ja-JP" altLang="en-US" sz="1500" dirty="0"/>
-              <a:t>ピア: PR 理解 + 重要指摘のみ質問形式</a:t>
-            </a:r>
-            <a:endParaRPr kumimoji="1" lang="ja-JP" altLang="en-US" sz="1500" dirty="0"/>
-          </a:p>
-          <a:p>
-            <a:pPr lvl="2"/>
-            <a:r>
-              <a:rPr kumimoji="1" lang="ja-JP" altLang="en-US" sz="1500" dirty="0"/>
-              <a:t>レビュワーに細かい指摘たくさんされると辛い</a:t>
-            </a:r>
-            <a:endParaRPr lang="ja-JP" altLang="en-US" dirty="0"/>
-          </a:p>
-          <a:p>
-            <a:r>
-              <a:rPr lang="ja-JP" altLang="en-US" sz="1500" dirty="0"/>
-              <a:t>成長の機会</a:t>
-            </a:r>
-            <a:r>
-              <a:rPr kumimoji="1" lang="ja-JP" altLang="en-US" sz="1500" dirty="0"/>
-              <a:t>は「教えること」ではなく「判断に参加すること」</a:t>
-            </a:r>
-          </a:p>
-          <a:p>
-            <a:pPr lvl="1"/>
-            <a:r>
-              <a:rPr kumimoji="1" lang="ja-JP" altLang="en-US" sz="1500" dirty="0"/>
-              <a:t>著者: 自分は何を採るのかを明示する</a:t>
-            </a:r>
-          </a:p>
-          <a:p>
-            <a:pPr lvl="1"/>
-            <a:r>
-              <a:rPr kumimoji="1" lang="ja-JP" altLang="en-US" sz="1500" dirty="0"/>
-              <a:t>レビュワー: その判断は妥当かを問う・理解する</a:t>
-            </a:r>
-          </a:p>
-        </p:txBody>
-      </p:sp>
-      <p:sp>
-        <p:nvSpPr>
-          <p:cNvPr id="3" name="タイトル 2"/>
+              <a:rPr kumimoji="1" lang="ja-JP" altLang="en-US" sz="2600" dirty="0"/>
+              <a:t>事例2　AIレビューワークフロー</a:t>
+            </a:r>
+          </a:p>
+        </p:txBody>
+      </p:sp>
+      <p:sp>
+        <p:nvSpPr>
+          <p:cNvPr id="3" name="字幕 2"/>
           <p:cNvSpPr>
             <a:spLocks noGrp="1"/>
           </p:cNvSpPr>
           <p:nvPr>
-            <p:ph type="title"/>
+            <p:ph type="subTitle" idx="1"/>
           </p:nvPr>
         </p:nvSpPr>
         <p:spPr/>
         <p:txBody>
-          <a:bodyPr/>
+          <a:bodyPr>
+            <a:normAutofit/>
+          </a:bodyPr>
           <a:lstStyle/>
           <a:p>
             <a:r>
-              <a:rPr kumimoji="1" lang="ja-JP" altLang="en-US" dirty="0"/>
-              <a:t>判断（Judgment）— レビュー制度を設計する</a:t>
+              <a:rPr kumimoji="1" lang="ja-JP" altLang="en-US" sz="1300" dirty="0"/>
+              <a:t>「判断を構造化し、育てる」</a:t>
             </a:r>
           </a:p>
         </p:txBody>
@@ -4392,20 +4322,64 @@
         <p:spPr/>
         <p:txBody>
           <a:bodyPr>
-            <a:normAutofit/>
+            <a:normAutofit lnSpcReduction="10000"/>
           </a:bodyPr>
           <a:lstStyle/>
           <a:p>
             <a:r>
+              <a:rPr kumimoji="1" lang="ja-JP" altLang="en-US" sz="1500" dirty="0"/>
+              <a:t>コアメンバー（田中さん）が別チームへ</a:t>
+            </a:r>
+            <a:r>
+              <a:rPr kumimoji="1" lang="en-US" altLang="ja-JP" sz="1500" dirty="0"/>
+              <a:t>…</a:t>
+            </a:r>
+            <a:endParaRPr kumimoji="1" lang="ja-JP" altLang="en-US" sz="1500" dirty="0"/>
+          </a:p>
+          <a:p>
+            <a:pPr lvl="1"/>
+            <a:r>
+              <a:rPr kumimoji="1" lang="ja-JP" altLang="en-US" sz="1500" dirty="0"/>
+              <a:t>→ PdM 1名 / BE+FE 1名（私）/ FE 2名 体制に</a:t>
+            </a:r>
+          </a:p>
+          <a:p>
+            <a:endParaRPr lang="ja-JP" altLang="en-US" dirty="0"/>
+          </a:p>
+          <a:p>
+            <a:r>
+              <a:rPr kumimoji="1" lang="ja-JP" altLang="en-US" sz="1500" dirty="0"/>
+              <a:t>コード自体は AI で早く完成するが、レビューコストが高くなっていた</a:t>
+            </a:r>
+          </a:p>
+          <a:p>
+            <a:endParaRPr lang="ja-JP" altLang="en-US" dirty="0"/>
+          </a:p>
+          <a:p>
+            <a:r>
               <a:rPr kumimoji="1" lang="ja-JP" altLang="en-US" sz="1500" b="1" dirty="0"/>
-              <a:t>PR で共有すべき 4要素</a:t>
+              <a:t>AI にレビューさせるだけでは不十分</a:t>
             </a:r>
           </a:p>
           <a:p>
             <a:pPr lvl="1"/>
             <a:r>
               <a:rPr kumimoji="1" lang="ja-JP" altLang="en-US" sz="1500" dirty="0"/>
-              <a:t>コード / 設計意図 / トレードオフ / 影響範囲</a:t>
+              <a:t>確認してほしいことを確認してくれるとは限らない</a:t>
+            </a:r>
+          </a:p>
+          <a:p>
+            <a:pPr lvl="1"/>
+            <a:r>
+              <a:rPr kumimoji="1" lang="ja-JP" altLang="en-US" sz="1500" dirty="0"/>
+              <a:t>バグ探しを主目的にすると、テスト / Lint / 静的解析と責務が競合する</a:t>
+            </a:r>
+          </a:p>
+          <a:p>
+            <a:pPr lvl="1"/>
+            <a:r>
+              <a:rPr kumimoji="1" lang="ja-JP" altLang="en-US" sz="1500" dirty="0"/>
+              <a:t>AI生成コードは速く増えるが、人間の理解速度は変わらない</a:t>
             </a:r>
           </a:p>
           <a:p>
@@ -4414,44 +4388,21 @@
           <a:p>
             <a:r>
               <a:rPr kumimoji="1" lang="ja-JP" altLang="en-US" sz="1500" b="1" dirty="0"/>
-              <a:t>9専門エージェント</a:t>
+              <a:t>レビューには 2つの時間軸がある</a:t>
             </a:r>
           </a:p>
           <a:p>
             <a:pPr lvl="1"/>
             <a:r>
               <a:rPr kumimoji="1" lang="ja-JP" altLang="en-US" sz="1500" dirty="0"/>
-              <a:t>FE/BE: bug-hunter / security / performance</a:t>
+              <a:t>短期: この変更をいま組み込むべきかを判断する</a:t>
             </a:r>
           </a:p>
           <a:p>
             <a:pPr lvl="1"/>
             <a:r>
               <a:rPr kumimoji="1" lang="ja-JP" altLang="en-US" sz="1500" dirty="0"/>
-              <a:t>Cross-cutting: architecture / simplicity / spec</a:t>
-            </a:r>
-          </a:p>
-          <a:p>
-            <a:endParaRPr lang="ja-JP" altLang="en-US" dirty="0"/>
-          </a:p>
-          <a:p>
-            <a:r>
-              <a:rPr kumimoji="1" lang="ja-JP" altLang="en-US" sz="1500" b="1" dirty="0"/>
-              <a:t>構造化プロンプト</a:t>
-            </a:r>
-          </a:p>
-          <a:p>
-            <a:pPr lvl="1"/>
-            <a:r>
-              <a:rPr kumimoji="1" lang="ja-JP" altLang="en-US" sz="1500" dirty="0"/>
-              <a:t>Role → Scope → Task → Constraints → Context → Output</a:t>
-            </a:r>
-          </a:p>
-          <a:p>
-            <a:pPr lvl="1"/>
-            <a:r>
-              <a:rPr kumimoji="1" lang="ja-JP" altLang="en-US" sz="1500" dirty="0"/>
-              <a:t>Read-only / 専門外については何も言わない</a:t>
+              <a:t>長期: その判断を担える人を増やす</a:t>
             </a:r>
           </a:p>
         </p:txBody>
@@ -4468,14 +4419,12 @@
         </p:nvSpPr>
         <p:spPr/>
         <p:txBody>
-          <a:bodyPr>
-            <a:normAutofit fontScale="90000"/>
-          </a:bodyPr>
+          <a:bodyPr/>
           <a:lstStyle/>
           <a:p>
             <a:r>
               <a:rPr kumimoji="1" lang="ja-JP" altLang="en-US" dirty="0"/>
-              <a:t>判断（Judgment）— 共有すべきこととエージェント設計</a:t>
+              <a:t>課題 — AIレビューだけでは不十分</a:t>
             </a:r>
           </a:p>
         </p:txBody>
@@ -4518,104 +4467,124 @@
         <p:spPr/>
         <p:txBody>
           <a:bodyPr>
-            <a:normAutofit/>
+            <a:normAutofit fontScale="92500" lnSpcReduction="10000"/>
           </a:bodyPr>
           <a:lstStyle/>
           <a:p>
             <a:r>
               <a:rPr kumimoji="1" lang="ja-JP" altLang="en-US" sz="1500" b="1" dirty="0"/>
-              <a:t>著者</a:t>
-            </a:r>
-          </a:p>
-          <a:p>
-            <a:pPr lvl="1"/>
+              <a:t>問い: AI がチェックし、人間が採否を判断するワークフローをどう設計するか？</a:t>
+            </a:r>
+            <a:endParaRPr lang="ja-JP" altLang="en-US" dirty="0"/>
+          </a:p>
+          <a:p>
             <a:r>
               <a:rPr kumimoji="1" lang="ja-JP" altLang="en-US" sz="1500" dirty="0"/>
-              <a:t>/self-review → 網羅的チェック（Reckoning）</a:t>
+              <a:t>レビューの前提</a:t>
             </a:r>
           </a:p>
           <a:p>
             <a:pPr lvl="1"/>
             <a:r>
               <a:rPr kumimoji="1" lang="ja-JP" altLang="en-US" sz="1500" dirty="0"/>
-              <a:t>意思決定フェーズ → 各 finding に判断（Judgment）</a:t>
-            </a:r>
-          </a:p>
-          <a:p>
-            <a:pPr lvl="1"/>
+              <a:t>これまでは、コーディングの過程でメンタルモデルが形成されていた</a:t>
+            </a:r>
+            <a:endParaRPr kumimoji="1" lang="en-US" altLang="ja-JP" sz="1500" dirty="0"/>
+          </a:p>
+          <a:p>
+            <a:pPr lvl="2"/>
+            <a:r>
+              <a:rPr kumimoji="1" lang="en-US" altLang="ja-JP" sz="1500" dirty="0"/>
+              <a:t>AI</a:t>
+            </a:r>
             <a:r>
               <a:rPr kumimoji="1" lang="ja-JP" altLang="en-US" sz="1500" dirty="0"/>
-              <a:t>/draft-pr → 意思決定記録と設計意図を PR に埋め込む</a:t>
+              <a:t>によって、メンタルモデルが漠然としていても実装ができてしまう</a:t>
+            </a:r>
+            <a:br>
+              <a:rPr kumimoji="1" lang="en-US" altLang="ja-JP" sz="1500" dirty="0"/>
+            </a:br>
+            <a:r>
+              <a:rPr kumimoji="1" lang="ja-JP" altLang="en-US" sz="1500" dirty="0"/>
+              <a:t>≒コードの細かい仕様やトレードオフを理解せぬまま動いてしまう</a:t>
+            </a:r>
+            <a:endParaRPr kumimoji="1" lang="en-US" altLang="ja-JP" sz="1500" dirty="0"/>
+          </a:p>
+          <a:p>
+            <a:pPr lvl="1"/>
+            <a:r>
+              <a:rPr kumimoji="1" lang="ja-JP" altLang="en-US" sz="1500" dirty="0"/>
+              <a:t>著者が先に自分のメンタルモデルへ統合してからレビューに出す</a:t>
+            </a:r>
+          </a:p>
+          <a:p>
+            <a:pPr lvl="1"/>
+            <a:r>
+              <a:rPr kumimoji="1" lang="ja-JP" altLang="en-US" sz="1500" dirty="0"/>
+              <a:t>「AI が書いたので詳細はよく分からないが、テストは通っている」は出せない</a:t>
             </a:r>
             <a:endParaRPr lang="ja-JP" altLang="en-US" dirty="0"/>
           </a:p>
           <a:p>
             <a:r>
-              <a:rPr kumimoji="1" lang="ja-JP" altLang="en-US" sz="1500" b="1" dirty="0"/>
-              <a:t>レビュワー</a:t>
-            </a:r>
-          </a:p>
-          <a:p>
-            <a:pPr lvl="1"/>
-            <a:r>
               <a:rPr kumimoji="1" lang="ja-JP" altLang="en-US" sz="1500" dirty="0"/>
-              <a:t>/peer-review → 検討済み事項をスキップ</a:t>
+              <a:t>セルフレビュー（著者用）とピアレビュー（レビュワー用）を分離</a:t>
             </a:r>
           </a:p>
           <a:p>
             <a:pPr lvl="1"/>
             <a:r>
               <a:rPr kumimoji="1" lang="ja-JP" altLang="en-US" sz="1500" dirty="0"/>
-              <a:t>コメント選択 → 「その判断は妥当か」を問う（Judgment）</a:t>
-            </a:r>
-          </a:p>
-          <a:p>
-            <a:pPr lvl="1"/>
+              <a:t>セルフ: 網羅的チェック + 意思決定の記録</a:t>
+            </a:r>
+            <a:endParaRPr kumimoji="1" lang="en-US" altLang="ja-JP" sz="1500" dirty="0"/>
+          </a:p>
+          <a:p>
+            <a:pPr lvl="2"/>
             <a:r>
               <a:rPr kumimoji="1" lang="ja-JP" altLang="en-US" sz="1500" dirty="0"/>
-              <a:t>/post-review → Pending レビューを投稿</a:t>
-            </a:r>
-          </a:p>
-          <a:p>
-            <a:r>
-              <a:rPr lang="ja-JP" altLang="en-US" sz="1500" b="1" dirty="0"/>
-              <a:t>チームで</a:t>
-            </a:r>
-          </a:p>
-          <a:p>
-            <a:pPr lvl="1"/>
-            <a:r>
-              <a:rPr lang="en-US" altLang="ja-JP" sz="1500" dirty="0"/>
-              <a:t>Claude.md</a:t>
-            </a:r>
+              <a:t>著者がコードに責任を持つべき</a:t>
+            </a:r>
+            <a:endParaRPr kumimoji="1" lang="en-US" altLang="ja-JP" sz="1500" dirty="0"/>
+          </a:p>
+          <a:p>
+            <a:pPr lvl="1"/>
             <a:r>
               <a:rPr lang="ja-JP" altLang="en-US" sz="1500" dirty="0"/>
-              <a:t>や各</a:t>
-            </a:r>
-            <a:r>
-              <a:rPr lang="en-US" altLang="ja-JP" sz="1500" dirty="0"/>
-              <a:t>Agent.md</a:t>
-            </a:r>
+              <a:t>ピア: PR 理解 + 重要指摘のみ質問形式</a:t>
+            </a:r>
+            <a:endParaRPr kumimoji="1" lang="ja-JP" altLang="en-US" sz="1500" dirty="0"/>
+          </a:p>
+          <a:p>
+            <a:pPr lvl="2"/>
+            <a:r>
+              <a:rPr kumimoji="1" lang="ja-JP" altLang="en-US" sz="1500" dirty="0"/>
+              <a:t>レビュワーに細かい指摘たくさんされると辛い</a:t>
+            </a:r>
+            <a:endParaRPr lang="ja-JP" altLang="en-US" dirty="0"/>
+          </a:p>
+          <a:p>
             <a:r>
               <a:rPr lang="ja-JP" altLang="en-US" sz="1500" dirty="0"/>
-              <a:t>に判断・観点を追加していく（Judgment）</a:t>
-            </a:r>
-            <a:endParaRPr lang="en-US" altLang="ja-JP" sz="1500" dirty="0"/>
-          </a:p>
-          <a:p>
-            <a:pPr lvl="1"/>
-            <a:endParaRPr lang="ja-JP" altLang="en-US" dirty="0"/>
-          </a:p>
-          <a:p>
-            <a:r>
-              <a:rPr kumimoji="1" lang="ja-JP" altLang="en-US" sz="1500" b="1" dirty="0"/>
-              <a:t>重要なのは「AI に言われたから」ではなく</a:t>
-            </a:r>
-          </a:p>
-          <a:p>
-            <a:r>
-              <a:rPr kumimoji="1" lang="ja-JP" altLang="en-US" sz="1500" b="1" dirty="0"/>
-              <a:t>「自分はこう判断した」と残すこと</a:t>
+              <a:t>成長の機会</a:t>
+            </a:r>
+            <a:r>
+              <a:rPr kumimoji="1" lang="ja-JP" altLang="en-US" sz="1500" dirty="0"/>
+              <a:t>は「教えること」ではなく「判断に参加すること」</a:t>
+            </a:r>
+          </a:p>
+          <a:p>
+            <a:pPr lvl="1"/>
+            <a:r>
+              <a:rPr kumimoji="1" lang="ja-JP" altLang="en-US" sz="1500" dirty="0"/>
+              <a:t>著者: 自分は何を採るのかを明示する</a:t>
+            </a:r>
+          </a:p>
+          <a:p>
+            <a:pPr lvl="1"/>
+            <a:r>
+              <a:rPr kumimoji="1" lang="ja-JP" altLang="en-US" sz="1500" dirty="0"/>
+              <a:t>レビュワー: その判断は妥当かを問う・理解する</a:t>
             </a:r>
           </a:p>
         </p:txBody>
@@ -4637,7 +4606,7 @@
           <a:p>
             <a:r>
               <a:rPr kumimoji="1" lang="ja-JP" altLang="en-US" dirty="0"/>
-              <a:t>演算（Reckoning）— 判断を通すワークフロー</a:t>
+              <a:t>判断（Judgment）— レビュー制度を設計する</a:t>
             </a:r>
           </a:p>
         </p:txBody>
@@ -4686,21 +4655,37 @@
           <a:p>
             <a:r>
               <a:rPr kumimoji="1" lang="ja-JP" altLang="en-US" sz="1500" b="1" dirty="0"/>
-              <a:t>責務分離</a:t>
+              <a:t>PR で共有すべき 4要素</a:t>
             </a:r>
           </a:p>
           <a:p>
             <a:pPr lvl="1"/>
             <a:r>
               <a:rPr kumimoji="1" lang="ja-JP" altLang="en-US" sz="1500" dirty="0"/>
-              <a:t>自動化可能な欠陥検出は前段へ、レビューは採否判断へ寄せられる</a:t>
+              <a:t>コード / 設計意図 / トレードオフ / 影響範囲</a:t>
+            </a:r>
+          </a:p>
+          <a:p>
+            <a:endParaRPr lang="ja-JP" altLang="en-US" dirty="0"/>
+          </a:p>
+          <a:p>
+            <a:r>
+              <a:rPr kumimoji="1" lang="ja-JP" altLang="en-US" sz="1500" b="1" dirty="0"/>
+              <a:t>9専門エージェント</a:t>
             </a:r>
           </a:p>
           <a:p>
             <a:pPr lvl="1"/>
             <a:r>
               <a:rPr kumimoji="1" lang="ja-JP" altLang="en-US" sz="1500" dirty="0"/>
-              <a:t>最終チェックポイントは人間同士のレビューに残せる</a:t>
+              <a:t>FE/BE: bug-hunter / security / performance</a:t>
+            </a:r>
+          </a:p>
+          <a:p>
+            <a:pPr lvl="1"/>
+            <a:r>
+              <a:rPr kumimoji="1" lang="ja-JP" altLang="en-US" sz="1500" dirty="0"/>
+              <a:t>Cross-cutting: architecture / simplicity / spec</a:t>
             </a:r>
           </a:p>
           <a:p>
@@ -4709,48 +4694,21 @@
           <a:p>
             <a:r>
               <a:rPr kumimoji="1" lang="ja-JP" altLang="en-US" sz="1500" b="1" dirty="0"/>
-              <a:t>変更理解</a:t>
+              <a:t>構造化プロンプト</a:t>
             </a:r>
           </a:p>
           <a:p>
             <a:pPr lvl="1"/>
             <a:r>
               <a:rPr kumimoji="1" lang="ja-JP" altLang="en-US" sz="1500" dirty="0"/>
-              <a:t>著者が読み直してから出すので、ブラックボックスな変更が減る</a:t>
+              <a:t>Role → Scope → Task → Constraints → Context → Output</a:t>
             </a:r>
           </a:p>
           <a:p>
             <a:pPr lvl="1"/>
             <a:r>
               <a:rPr kumimoji="1" lang="ja-JP" altLang="en-US" sz="1500" dirty="0"/>
-              <a:t>コメントが「教える」より「判断の確認」に寄ってくる</a:t>
-            </a:r>
-          </a:p>
-          <a:p>
-            <a:endParaRPr lang="ja-JP" altLang="en-US" dirty="0"/>
-          </a:p>
-          <a:p>
-            <a:r>
-              <a:rPr lang="ja-JP" altLang="en-US" sz="1500" b="1" dirty="0"/>
-              <a:t>仕組み</a:t>
-            </a:r>
-            <a:r>
-              <a:rPr kumimoji="1" lang="ja-JP" altLang="en-US" sz="1500" b="1" dirty="0"/>
-              <a:t>としての効果</a:t>
-            </a:r>
-          </a:p>
-          <a:p>
-            <a:pPr lvl="1"/>
-            <a:r>
-              <a:rPr kumimoji="1" lang="ja-JP" altLang="en-US" sz="1500" dirty="0"/>
-              <a:t>単発のレビューコメントは軽く、Judgment の訓練機会は増える</a:t>
-            </a:r>
-          </a:p>
-          <a:p>
-            <a:pPr lvl="1"/>
-            <a:r>
-              <a:rPr kumimoji="1" lang="ja-JP" altLang="en-US" sz="1500" dirty="0"/>
-              <a:t>Issue 起点で方向性を先に合わせる動機が生まれる</a:t>
+              <a:t>Read-only / 専門外については何も言わない</a:t>
             </a:r>
           </a:p>
         </p:txBody>
@@ -4767,12 +4725,14 @@
         </p:nvSpPr>
         <p:spPr/>
         <p:txBody>
-          <a:bodyPr/>
+          <a:bodyPr>
+            <a:normAutofit fontScale="90000"/>
+          </a:bodyPr>
           <a:lstStyle/>
           <a:p>
             <a:r>
               <a:rPr kumimoji="1" lang="ja-JP" altLang="en-US" dirty="0"/>
-              <a:t>効果 — 判断共有と判断育成</a:t>
+              <a:t>判断（Judgment）— 共有すべきこととエージェント設計</a:t>
             </a:r>
           </a:p>
         </p:txBody>
@@ -4821,75 +4781,98 @@
           <a:p>
             <a:r>
               <a:rPr kumimoji="1" lang="ja-JP" altLang="en-US" sz="1500" b="1" dirty="0"/>
-              <a:t>ドキュメントパイプライン</a:t>
+              <a:t>著者</a:t>
             </a:r>
           </a:p>
           <a:p>
             <a:pPr lvl="1"/>
             <a:r>
               <a:rPr kumimoji="1" lang="ja-JP" altLang="en-US" sz="1500" dirty="0"/>
-              <a:t>Judgment: 何を自動化し・何を</a:t>
+              <a:t>/self-review → 網羅的チェック（Reckoning）</a:t>
+            </a:r>
+          </a:p>
+          <a:p>
+            <a:pPr lvl="1"/>
+            <a:r>
+              <a:rPr kumimoji="1" lang="ja-JP" altLang="en-US" sz="1500" dirty="0"/>
+              <a:t>意思決定フェーズ → 各 finding に判断（Judgment）</a:t>
+            </a:r>
+          </a:p>
+          <a:p>
+            <a:pPr lvl="1"/>
+            <a:r>
+              <a:rPr kumimoji="1" lang="ja-JP" altLang="en-US" sz="1500" dirty="0"/>
+              <a:t>/draft-pr → 意思決定記録と設計意図を PR に埋め込む</a:t>
+            </a:r>
+            <a:endParaRPr lang="ja-JP" altLang="en-US" dirty="0"/>
+          </a:p>
+          <a:p>
+            <a:r>
+              <a:rPr kumimoji="1" lang="ja-JP" altLang="en-US" sz="1500" b="1" dirty="0"/>
+              <a:t>レビュワー</a:t>
+            </a:r>
+          </a:p>
+          <a:p>
+            <a:pPr lvl="1"/>
+            <a:r>
+              <a:rPr kumimoji="1" lang="ja-JP" altLang="en-US" sz="1500" dirty="0"/>
+              <a:t>/peer-review → 検討済み事項をスキップ</a:t>
+            </a:r>
+          </a:p>
+          <a:p>
+            <a:pPr lvl="1"/>
+            <a:r>
+              <a:rPr kumimoji="1" lang="ja-JP" altLang="en-US" sz="1500" dirty="0"/>
+              <a:t>コメント選択 → 「その判断は妥当か」を問う（Judgment）</a:t>
+            </a:r>
+          </a:p>
+          <a:p>
+            <a:pPr lvl="1"/>
+            <a:r>
+              <a:rPr kumimoji="1" lang="ja-JP" altLang="en-US" sz="1500" dirty="0"/>
+              <a:t>/post-review → Pending レビューを投稿</a:t>
+            </a:r>
+          </a:p>
+          <a:p>
+            <a:r>
+              <a:rPr lang="ja-JP" altLang="en-US" sz="1500" b="1" dirty="0"/>
+              <a:t>チームで</a:t>
+            </a:r>
+          </a:p>
+          <a:p>
+            <a:pPr lvl="1"/>
+            <a:r>
+              <a:rPr lang="en-US" altLang="ja-JP" sz="1500" dirty="0"/>
+              <a:t>Claude.md</a:t>
             </a:r>
             <a:r>
               <a:rPr lang="ja-JP" altLang="en-US" sz="1500" dirty="0"/>
-              <a:t>メンバー（人間）に何</a:t>
-            </a:r>
-            <a:r>
-              <a:rPr kumimoji="1" lang="ja-JP" altLang="en-US" sz="1500" dirty="0"/>
-              <a:t>をやってもらうか、どう設計するか</a:t>
-            </a:r>
-          </a:p>
-          <a:p>
-            <a:pPr lvl="1"/>
-            <a:r>
-              <a:rPr kumimoji="1" lang="ja-JP" altLang="en-US" sz="1500" dirty="0"/>
-              <a:t>Reckoning: ツール構築、自動同期</a:t>
-            </a:r>
-          </a:p>
-          <a:p>
+              <a:t>や各</a:t>
+            </a:r>
+            <a:r>
+              <a:rPr lang="en-US" altLang="ja-JP" sz="1500" dirty="0"/>
+              <a:t>Agent.md</a:t>
+            </a:r>
+            <a:r>
+              <a:rPr lang="ja-JP" altLang="en-US" sz="1500" dirty="0"/>
+              <a:t>に判断・観点を追加していく（Judgment）</a:t>
+            </a:r>
+            <a:endParaRPr lang="en-US" altLang="ja-JP" sz="1500" dirty="0"/>
+          </a:p>
+          <a:p>
+            <a:pPr lvl="1"/>
             <a:endParaRPr lang="ja-JP" altLang="en-US" dirty="0"/>
           </a:p>
           <a:p>
             <a:r>
               <a:rPr kumimoji="1" lang="ja-JP" altLang="en-US" sz="1500" b="1" dirty="0"/>
-              <a:t>レビューワークフロー</a:t>
-            </a:r>
-          </a:p>
-          <a:p>
-            <a:pPr lvl="1"/>
-            <a:r>
-              <a:rPr kumimoji="1" lang="ja-JP" altLang="en-US" sz="1500" dirty="0"/>
-              <a:t>Judgment: この変更を組み込むべきか、どの判断を採るか、何を観点とするか</a:t>
-            </a:r>
-          </a:p>
-          <a:p>
-            <a:pPr lvl="1"/>
-            <a:r>
-              <a:rPr kumimoji="1" lang="ja-JP" altLang="en-US" sz="1500" dirty="0"/>
-              <a:t>Reckoning: 網羅分析、要約、観点別チェック</a:t>
-            </a:r>
-          </a:p>
-          <a:p>
-            <a:endParaRPr lang="ja-JP" altLang="en-US" dirty="0"/>
+              <a:t>重要なのは「AI に言われたから」ではなく</a:t>
+            </a:r>
           </a:p>
           <a:p>
             <a:r>
               <a:rPr kumimoji="1" lang="ja-JP" altLang="en-US" sz="1500" b="1" dirty="0"/>
-              <a:t>共通</a:t>
-            </a:r>
-          </a:p>
-          <a:p>
-            <a:pPr lvl="1"/>
-            <a:r>
-              <a:rPr kumimoji="1" lang="ja-JP" altLang="en-US" sz="1500" dirty="0"/>
-              <a:t>人間が枠組みと採否を決め、AI がその範囲で実行する</a:t>
-            </a:r>
-          </a:p>
-          <a:p>
-            <a:pPr lvl="1"/>
-            <a:r>
-              <a:rPr kumimoji="1" lang="ja-JP" altLang="en-US" sz="1500" dirty="0"/>
-              <a:t>事例2ではレビューを「判断共有と判断育成のインフラ」にした</a:t>
+              <a:t>「自分はこう判断した」と残すこと</a:t>
             </a:r>
           </a:p>
         </p:txBody>
@@ -4911,7 +4894,7 @@
           <a:p>
             <a:r>
               <a:rPr kumimoji="1" lang="ja-JP" altLang="en-US" dirty="0"/>
-              <a:t>2つの事例が示すパターン</a:t>
+              <a:t>演算（Reckoning）— 判断を通すワークフロー</a:t>
             </a:r>
           </a:p>
         </p:txBody>
@@ -4943,68 +4926,110 @@
       </p:grpSpPr>
       <p:sp>
         <p:nvSpPr>
-          <p:cNvPr id="2" name="コンテンツ 1"/>
-          <p:cNvSpPr txBox="1">
-            <a:spLocks/>
+          <p:cNvPr id="2" name="コンテンツ プレースホルダー 1"/>
+          <p:cNvSpPr>
+            <a:spLocks noGrp="1"/>
           </p:cNvSpPr>
-          <p:nvPr/>
-        </p:nvSpPr>
-        <p:spPr>
-          <a:xfrm>
-            <a:off x="697186" y="1000000"/>
-            <a:ext cx="8496300" cy="4800000"/>
-          </a:xfrm>
-          <a:prstGeom prst="rect">
-            <a:avLst/>
-          </a:prstGeom>
-        </p:spPr>
-        <p:txBody>
-          <a:bodyPr vert="horz" lIns="91440" tIns="91440" rIns="91440" bIns="91440" rtlCol="0" anchor="ctr">
+          <p:nvPr>
+            <p:ph idx="1"/>
+          </p:nvPr>
+        </p:nvSpPr>
+        <p:spPr/>
+        <p:txBody>
+          <a:bodyPr>
             <a:normAutofit/>
           </a:bodyPr>
-          <a:lstStyle>
-            <a:lvl1pPr algn="ctr">
-              <a:defRPr kumimoji="1" sz="2400">
-                <a:solidFill>
-                  <a:schemeClr val="tx1"/>
-                </a:solidFill>
-                <a:latin typeface="+mn-ea"/>
-              </a:defRPr>
-            </a:lvl1pPr>
-          </a:lstStyle>
-          <a:p>
-            <a:r>
-              <a:rPr kumimoji="1" lang="ja-JP" altLang="en-US" sz="2600" dirty="0"/>
-              <a:t>レビューでは</a:t>
-            </a:r>
-          </a:p>
-          <a:p>
-            <a:r>
-              <a:rPr kumimoji="1" lang="ja-JP" altLang="en-US" sz="2800" b="1" dirty="0"/>
-              <a:t>「場」と「</a:t>
-            </a:r>
-            <a:r>
-              <a:rPr lang="ja-JP" altLang="en-US" sz="2800" b="1" dirty="0"/>
+          <a:lstStyle/>
+          <a:p>
+            <a:r>
+              <a:rPr kumimoji="1" lang="ja-JP" altLang="en-US" sz="1500" b="1" dirty="0"/>
+              <a:t>責務分離</a:t>
+            </a:r>
+          </a:p>
+          <a:p>
+            <a:pPr lvl="1"/>
+            <a:r>
+              <a:rPr kumimoji="1" lang="ja-JP" altLang="en-US" sz="1500" dirty="0"/>
+              <a:t>自動化可能な欠陥検出は前段へ、レビューは採否判断へ寄せられる</a:t>
+            </a:r>
+          </a:p>
+          <a:p>
+            <a:pPr lvl="1"/>
+            <a:r>
+              <a:rPr kumimoji="1" lang="ja-JP" altLang="en-US" sz="1500" dirty="0"/>
+              <a:t>最終チェックポイントは人間同士のレビューに残せる</a:t>
+            </a:r>
+          </a:p>
+          <a:p>
+            <a:endParaRPr lang="ja-JP" altLang="en-US" dirty="0"/>
+          </a:p>
+          <a:p>
+            <a:r>
+              <a:rPr kumimoji="1" lang="ja-JP" altLang="en-US" sz="1500" b="1" dirty="0"/>
+              <a:t>変更理解</a:t>
+            </a:r>
+          </a:p>
+          <a:p>
+            <a:pPr lvl="1"/>
+            <a:r>
+              <a:rPr kumimoji="1" lang="ja-JP" altLang="en-US" sz="1500" dirty="0"/>
+              <a:t>著者が読み直してから出すので、ブラックボックスな変更が減る</a:t>
+            </a:r>
+          </a:p>
+          <a:p>
+            <a:pPr lvl="1"/>
+            <a:r>
+              <a:rPr kumimoji="1" lang="ja-JP" altLang="en-US" sz="1500" dirty="0"/>
+              <a:t>コメントが「教える」より「判断の確認」に寄ってくる</a:t>
+            </a:r>
+          </a:p>
+          <a:p>
+            <a:endParaRPr lang="ja-JP" altLang="en-US" dirty="0"/>
+          </a:p>
+          <a:p>
+            <a:r>
+              <a:rPr lang="ja-JP" altLang="en-US" sz="1500" b="1" dirty="0"/>
               <a:t>仕組み</a:t>
             </a:r>
             <a:r>
-              <a:rPr kumimoji="1" lang="ja-JP" altLang="en-US" sz="2800" b="1" dirty="0"/>
-              <a:t>」を分けて考える</a:t>
-            </a:r>
-          </a:p>
-          <a:p>
-            <a:endParaRPr lang="ja-JP" altLang="en-US" dirty="0"/>
-          </a:p>
-          <a:p>
-            <a:r>
-              <a:rPr kumimoji="1" lang="ja-JP" altLang="en-US" sz="1900" dirty="0"/>
-              <a:t>場: この変更を組み込むか</a:t>
-            </a:r>
-          </a:p>
-          <a:p>
-            <a:r>
-              <a:rPr kumimoji="1" lang="ja-JP" altLang="en-US" sz="1900" dirty="0"/>
-              <a:t>制度: その判断を担える人を増やす</a:t>
+              <a:rPr kumimoji="1" lang="ja-JP" altLang="en-US" sz="1500" b="1" dirty="0"/>
+              <a:t>としての効果</a:t>
+            </a:r>
+          </a:p>
+          <a:p>
+            <a:pPr lvl="1"/>
+            <a:r>
+              <a:rPr kumimoji="1" lang="ja-JP" altLang="en-US" sz="1500" dirty="0"/>
+              <a:t>単発のレビューコメントは軽く、Judgment の訓練機会は増える</a:t>
+            </a:r>
+          </a:p>
+          <a:p>
+            <a:pPr lvl="1"/>
+            <a:r>
+              <a:rPr kumimoji="1" lang="ja-JP" altLang="en-US" sz="1500" dirty="0"/>
+              <a:t>Issue 起点で方向性を先に合わせる動機が生まれる</a:t>
+            </a:r>
+          </a:p>
+        </p:txBody>
+      </p:sp>
+      <p:sp>
+        <p:nvSpPr>
+          <p:cNvPr id="3" name="タイトル 2"/>
+          <p:cNvSpPr>
+            <a:spLocks noGrp="1"/>
+          </p:cNvSpPr>
+          <p:nvPr>
+            <p:ph type="title"/>
+          </p:nvPr>
+        </p:nvSpPr>
+        <p:spPr/>
+        <p:txBody>
+          <a:bodyPr/>
+          <a:lstStyle/>
+          <a:p>
+            <a:r>
+              <a:rPr kumimoji="1" lang="ja-JP" altLang="en-US" dirty="0"/>
+              <a:t>効果 — 判断共有と判断育成</a:t>
             </a:r>
           </a:p>
         </p:txBody>
@@ -5068,17 +5093,19 @@
           <a:p>
             <a:r>
               <a:rPr kumimoji="1" lang="ja-JP" altLang="en-US" sz="2800" dirty="0"/>
-              <a:t>AIは「便利ツール」か？</a:t>
+              <a:t>AI</a:t>
+            </a:r>
+            <a:r>
+              <a:rPr lang="ja-JP" altLang="en-US" sz="2800" dirty="0"/>
+              <a:t>に</a:t>
+            </a:r>
+            <a:r>
+              <a:rPr kumimoji="1" lang="ja-JP" altLang="en-US" sz="2800" dirty="0"/>
+              <a:t>「何ができて、何をやらせるべき」か？</a:t>
             </a:r>
           </a:p>
           <a:p>
             <a:endParaRPr lang="ja-JP" altLang="en-US" dirty="0"/>
-          </a:p>
-          <a:p>
-            <a:r>
-              <a:rPr kumimoji="1" lang="ja-JP" altLang="en-US" sz="2000" dirty="0"/>
-              <a:t>今日の問い：</a:t>
-            </a:r>
           </a:p>
           <a:p>
             <a:endParaRPr lang="ja-JP" altLang="en-US" dirty="0"/>
@@ -5088,6 +5115,7 @@
               <a:rPr kumimoji="1" lang="ja-JP" altLang="en-US" sz="3200" b="1" dirty="0"/>
               <a:t>AI時代に仕事をどう設計するか</a:t>
             </a:r>
+            <a:endParaRPr kumimoji="1" lang="en-US" altLang="ja-JP" sz="3200" b="1" dirty="0"/>
           </a:p>
         </p:txBody>
       </p:sp>
@@ -5135,25 +5163,52 @@
           <a:p>
             <a:r>
               <a:rPr kumimoji="1" lang="ja-JP" altLang="en-US" sz="1500" b="1" dirty="0"/>
-              <a:t>「何を問うか」を引き受けるのは人間</a:t>
+              <a:t>ドキュメントパイプライン</a:t>
             </a:r>
           </a:p>
           <a:p>
             <a:pPr lvl="1"/>
             <a:r>
               <a:rPr kumimoji="1" lang="ja-JP" altLang="en-US" sz="1500" dirty="0"/>
-              <a:t>違和感、十分条件、受け入れるトレードオフを決める</a:t>
-            </a:r>
-          </a:p>
-          <a:p>
-            <a:pPr lvl="1"/>
+              <a:t>Judgment: 何を自動化し・何を</a:t>
+            </a:r>
+            <a:r>
+              <a:rPr lang="ja-JP" altLang="en-US" sz="1500" dirty="0"/>
+              <a:t>メンバー（人間）に何</a:t>
+            </a:r>
+            <a:r>
+              <a:rPr kumimoji="1" lang="ja-JP" altLang="en-US" sz="1500" dirty="0"/>
+              <a:t>をやってもらうか、どう設計するか</a:t>
+            </a:r>
+          </a:p>
+          <a:p>
+            <a:pPr lvl="1"/>
+            <a:r>
+              <a:rPr kumimoji="1" lang="ja-JP" altLang="en-US" sz="1500" dirty="0"/>
+              <a:t>Reckoning: ツール構築、自動同期</a:t>
+            </a:r>
+          </a:p>
+          <a:p>
+            <a:endParaRPr lang="ja-JP" altLang="en-US" dirty="0"/>
+          </a:p>
+          <a:p>
             <a:r>
               <a:rPr kumimoji="1" lang="ja-JP" altLang="en-US" sz="1500" b="1" dirty="0"/>
-              <a:t>問いを立てる能力</a:t>
-            </a:r>
+              <a:t>レビューワークフロー</a:t>
+            </a:r>
+          </a:p>
+          <a:p>
+            <a:pPr lvl="1"/>
             <a:r>
               <a:rPr kumimoji="1" lang="ja-JP" altLang="en-US" sz="1500" dirty="0"/>
-              <a:t>は開発の中で育てる</a:t>
+              <a:t>Judgment: この変更を組み込むべきか、どの判断を採るか、何を観点とするか</a:t>
+            </a:r>
+          </a:p>
+          <a:p>
+            <a:pPr lvl="1"/>
+            <a:r>
+              <a:rPr kumimoji="1" lang="ja-JP" altLang="en-US" sz="1500" dirty="0"/>
+              <a:t>Reckoning: 網羅分析、要約、観点別チェック</a:t>
             </a:r>
           </a:p>
           <a:p>
@@ -5162,68 +5217,21 @@
           <a:p>
             <a:r>
               <a:rPr kumimoji="1" lang="ja-JP" altLang="en-US" sz="1500" b="1" dirty="0"/>
-              <a:t>レビューに出す前の責任</a:t>
-            </a:r>
-          </a:p>
-          <a:p>
-            <a:pPr lvl="1"/>
-            <a:r>
-              <a:rPr kumimoji="1" lang="ja-JP" altLang="en-US" sz="1500" b="1" dirty="0"/>
-              <a:t>変更を自分のメンタルモデルへ統合</a:t>
-            </a:r>
+              <a:t>共通</a:t>
+            </a:r>
+          </a:p>
+          <a:p>
+            <a:pPr lvl="1"/>
             <a:r>
               <a:rPr kumimoji="1" lang="ja-JP" altLang="en-US" sz="1500" dirty="0"/>
-              <a:t>してからレビューに出す</a:t>
+              <a:t>人間が枠組みと採否を決め、AI がその範囲で実行する</a:t>
             </a:r>
           </a:p>
           <a:p>
             <a:pPr lvl="1"/>
             <a:r>
               <a:rPr kumimoji="1" lang="ja-JP" altLang="en-US" sz="1500" dirty="0"/>
-              <a:t>AI が書いたコードでも、自分の言葉で説明できなければならない</a:t>
-            </a:r>
-          </a:p>
-          <a:p>
-            <a:endParaRPr lang="ja-JP" altLang="en-US" dirty="0"/>
-          </a:p>
-          <a:p>
-            <a:r>
-              <a:rPr kumimoji="1" lang="ja-JP" altLang="en-US" sz="1500" b="1" dirty="0"/>
-              <a:t>教育をどこに置くか</a:t>
-            </a:r>
-          </a:p>
-          <a:p>
-            <a:pPr lvl="1"/>
-            <a:r>
-              <a:rPr kumimoji="1" lang="ja-JP" altLang="en-US" sz="1500" dirty="0"/>
-              <a:t>個別のレビューコメントの主目的は教育ではない</a:t>
-            </a:r>
-            <a:r>
-              <a:rPr lang="ja-JP" altLang="en-US" sz="1500" dirty="0"/>
-              <a:t>（メンタルモデルの合意である）</a:t>
-            </a:r>
-            <a:endParaRPr kumimoji="1" lang="ja-JP" altLang="en-US" sz="1500" dirty="0"/>
-          </a:p>
-          <a:p>
-            <a:pPr lvl="1"/>
-            <a:r>
-              <a:rPr kumimoji="1" lang="ja-JP" altLang="en-US" sz="1500" dirty="0"/>
-              <a:t>しかしレビュー</a:t>
-            </a:r>
-            <a:r>
-              <a:rPr kumimoji="1" lang="ja-JP" altLang="en-US" sz="1500" b="1" dirty="0"/>
-              <a:t>制度</a:t>
-            </a:r>
-            <a:r>
-              <a:rPr kumimoji="1" lang="ja-JP" altLang="en-US" sz="1500" dirty="0"/>
-              <a:t>の目的には 判断能力（Judgment） 育成を含めるべき</a:t>
-            </a:r>
-          </a:p>
-          <a:p>
-            <a:pPr lvl="1"/>
-            <a:r>
-              <a:rPr kumimoji="1" lang="ja-JP" altLang="en-US" sz="1500" dirty="0"/>
-              <a:t>教育は「丁寧に教えること」より「判断に参加させること」で起こる</a:t>
+              <a:t>事例2ではレビューを「判断共有と判断育成のインフラ」にした</a:t>
             </a:r>
           </a:p>
         </p:txBody>
@@ -5245,7 +5253,7 @@
           <a:p>
             <a:r>
               <a:rPr kumimoji="1" lang="ja-JP" altLang="en-US" dirty="0"/>
-              <a:t>結び: 人間が引き受けるべきこと</a:t>
+              <a:t>2つの事例が示すパターン</a:t>
             </a:r>
           </a:p>
         </p:txBody>
@@ -5277,6 +5285,258 @@
       </p:grpSpPr>
       <p:sp>
         <p:nvSpPr>
+          <p:cNvPr id="2" name="コンテンツ 1"/>
+          <p:cNvSpPr txBox="1">
+            <a:spLocks/>
+          </p:cNvSpPr>
+          <p:nvPr/>
+        </p:nvSpPr>
+        <p:spPr>
+          <a:xfrm>
+            <a:off x="697186" y="1000000"/>
+            <a:ext cx="8496300" cy="4800000"/>
+          </a:xfrm>
+          <a:prstGeom prst="rect">
+            <a:avLst/>
+          </a:prstGeom>
+        </p:spPr>
+        <p:txBody>
+          <a:bodyPr vert="horz" lIns="91440" tIns="91440" rIns="91440" bIns="91440" rtlCol="0" anchor="ctr">
+            <a:normAutofit/>
+          </a:bodyPr>
+          <a:lstStyle>
+            <a:lvl1pPr algn="ctr">
+              <a:defRPr kumimoji="1" sz="2400">
+                <a:solidFill>
+                  <a:schemeClr val="tx1"/>
+                </a:solidFill>
+                <a:latin typeface="+mn-ea"/>
+              </a:defRPr>
+            </a:lvl1pPr>
+          </a:lstStyle>
+          <a:p>
+            <a:r>
+              <a:rPr kumimoji="1" lang="ja-JP" altLang="en-US" sz="2600" dirty="0"/>
+              <a:t>レビューでは</a:t>
+            </a:r>
+          </a:p>
+          <a:p>
+            <a:r>
+              <a:rPr kumimoji="1" lang="ja-JP" altLang="en-US" sz="2800" b="1" dirty="0"/>
+              <a:t>「場」と「</a:t>
+            </a:r>
+            <a:r>
+              <a:rPr lang="ja-JP" altLang="en-US" sz="2800" b="1" dirty="0"/>
+              <a:t>仕組み</a:t>
+            </a:r>
+            <a:r>
+              <a:rPr kumimoji="1" lang="ja-JP" altLang="en-US" sz="2800" b="1" dirty="0"/>
+              <a:t>」を分けて考える</a:t>
+            </a:r>
+          </a:p>
+          <a:p>
+            <a:endParaRPr lang="ja-JP" altLang="en-US" dirty="0"/>
+          </a:p>
+          <a:p>
+            <a:r>
+              <a:rPr kumimoji="1" lang="ja-JP" altLang="en-US" sz="1900" dirty="0"/>
+              <a:t>場: この変更を組み込むか</a:t>
+            </a:r>
+          </a:p>
+          <a:p>
+            <a:r>
+              <a:rPr kumimoji="1" lang="ja-JP" altLang="en-US" sz="1900" dirty="0"/>
+              <a:t>制度: その判断を担える人を増やす</a:t>
+            </a:r>
+          </a:p>
+        </p:txBody>
+      </p:sp>
+    </p:spTree>
+  </p:cSld>
+  <p:clrMapOvr>
+    <a:masterClrMapping/>
+  </p:clrMapOvr>
+</p:sld>
+</file>
+
+<file path=ppt/slides/slide22.xml><?xml version="1.0" encoding="utf-8"?>
+<p:sld xmlns:a="http://schemas.openxmlformats.org/drawingml/2006/main" xmlns:r="http://schemas.openxmlformats.org/officeDocument/2006/relationships" xmlns:p="http://schemas.openxmlformats.org/presentationml/2006/main">
+  <p:cSld>
+    <p:spTree>
+      <p:nvGrpSpPr>
+        <p:cNvPr id="1" name=""/>
+        <p:cNvGrpSpPr/>
+        <p:nvPr/>
+      </p:nvGrpSpPr>
+      <p:grpSpPr>
+        <a:xfrm>
+          <a:off x="0" y="0"/>
+          <a:ext cx="0" cy="0"/>
+          <a:chOff x="0" y="0"/>
+          <a:chExt cx="0" cy="0"/>
+        </a:xfrm>
+      </p:grpSpPr>
+      <p:sp>
+        <p:nvSpPr>
+          <p:cNvPr id="2" name="コンテンツ プレースホルダー 1"/>
+          <p:cNvSpPr>
+            <a:spLocks noGrp="1"/>
+          </p:cNvSpPr>
+          <p:nvPr>
+            <p:ph idx="1"/>
+          </p:nvPr>
+        </p:nvSpPr>
+        <p:spPr/>
+        <p:txBody>
+          <a:bodyPr>
+            <a:normAutofit/>
+          </a:bodyPr>
+          <a:lstStyle/>
+          <a:p>
+            <a:r>
+              <a:rPr kumimoji="1" lang="ja-JP" altLang="en-US" sz="1500" b="1" dirty="0"/>
+              <a:t>「何を問うか」を引き受けるのは人間</a:t>
+            </a:r>
+          </a:p>
+          <a:p>
+            <a:pPr lvl="1"/>
+            <a:r>
+              <a:rPr kumimoji="1" lang="ja-JP" altLang="en-US" sz="1500" dirty="0"/>
+              <a:t>違和感、十分条件、受け入れるトレードオフを決める</a:t>
+            </a:r>
+          </a:p>
+          <a:p>
+            <a:pPr lvl="1"/>
+            <a:r>
+              <a:rPr kumimoji="1" lang="ja-JP" altLang="en-US" sz="1500" b="1" dirty="0"/>
+              <a:t>問いを立てる能力</a:t>
+            </a:r>
+            <a:r>
+              <a:rPr kumimoji="1" lang="ja-JP" altLang="en-US" sz="1500" dirty="0"/>
+              <a:t>は開発の中で育てる</a:t>
+            </a:r>
+          </a:p>
+          <a:p>
+            <a:endParaRPr lang="ja-JP" altLang="en-US" dirty="0"/>
+          </a:p>
+          <a:p>
+            <a:r>
+              <a:rPr kumimoji="1" lang="ja-JP" altLang="en-US" sz="1500" b="1" dirty="0"/>
+              <a:t>レビューに出す前の責任</a:t>
+            </a:r>
+          </a:p>
+          <a:p>
+            <a:pPr lvl="1"/>
+            <a:r>
+              <a:rPr kumimoji="1" lang="ja-JP" altLang="en-US" sz="1500" b="1" dirty="0"/>
+              <a:t>変更を自分のメンタルモデルへ統合</a:t>
+            </a:r>
+            <a:r>
+              <a:rPr kumimoji="1" lang="ja-JP" altLang="en-US" sz="1500" dirty="0"/>
+              <a:t>してからレビューに出す</a:t>
+            </a:r>
+          </a:p>
+          <a:p>
+            <a:pPr lvl="1"/>
+            <a:r>
+              <a:rPr kumimoji="1" lang="ja-JP" altLang="en-US" sz="1500" dirty="0"/>
+              <a:t>AI が書いたコードでも、自分の言葉で説明できなければならない</a:t>
+            </a:r>
+          </a:p>
+          <a:p>
+            <a:endParaRPr lang="ja-JP" altLang="en-US" dirty="0"/>
+          </a:p>
+          <a:p>
+            <a:r>
+              <a:rPr kumimoji="1" lang="ja-JP" altLang="en-US" sz="1500" b="1" dirty="0"/>
+              <a:t>教育をどこに置くか</a:t>
+            </a:r>
+          </a:p>
+          <a:p>
+            <a:pPr lvl="1"/>
+            <a:r>
+              <a:rPr kumimoji="1" lang="ja-JP" altLang="en-US" sz="1500" dirty="0"/>
+              <a:t>個別のレビューコメントの主目的は教育ではない</a:t>
+            </a:r>
+            <a:r>
+              <a:rPr lang="ja-JP" altLang="en-US" sz="1500" dirty="0"/>
+              <a:t>（メンタルモデルの合意である）</a:t>
+            </a:r>
+            <a:endParaRPr kumimoji="1" lang="ja-JP" altLang="en-US" sz="1500" dirty="0"/>
+          </a:p>
+          <a:p>
+            <a:pPr lvl="1"/>
+            <a:r>
+              <a:rPr kumimoji="1" lang="ja-JP" altLang="en-US" sz="1500" dirty="0"/>
+              <a:t>しかしレビュー</a:t>
+            </a:r>
+            <a:r>
+              <a:rPr kumimoji="1" lang="ja-JP" altLang="en-US" sz="1500" b="1" dirty="0"/>
+              <a:t>制度</a:t>
+            </a:r>
+            <a:r>
+              <a:rPr kumimoji="1" lang="ja-JP" altLang="en-US" sz="1500" dirty="0"/>
+              <a:t>の目的には 判断能力（Judgment） 育成を含めるべき</a:t>
+            </a:r>
+          </a:p>
+          <a:p>
+            <a:pPr lvl="1"/>
+            <a:r>
+              <a:rPr kumimoji="1" lang="ja-JP" altLang="en-US" sz="1500" dirty="0"/>
+              <a:t>教育は「丁寧に教えること」より「判断に参加させること」で起こる</a:t>
+            </a:r>
+          </a:p>
+        </p:txBody>
+      </p:sp>
+      <p:sp>
+        <p:nvSpPr>
+          <p:cNvPr id="3" name="タイトル 2"/>
+          <p:cNvSpPr>
+            <a:spLocks noGrp="1"/>
+          </p:cNvSpPr>
+          <p:nvPr>
+            <p:ph type="title"/>
+          </p:nvPr>
+        </p:nvSpPr>
+        <p:spPr/>
+        <p:txBody>
+          <a:bodyPr/>
+          <a:lstStyle/>
+          <a:p>
+            <a:r>
+              <a:rPr kumimoji="1" lang="ja-JP" altLang="en-US" dirty="0"/>
+              <a:t>結び: 人間が引き受けるべきこと</a:t>
+            </a:r>
+          </a:p>
+        </p:txBody>
+      </p:sp>
+    </p:spTree>
+  </p:cSld>
+  <p:clrMapOvr>
+    <a:masterClrMapping/>
+  </p:clrMapOvr>
+</p:sld>
+</file>
+
+<file path=ppt/slides/slide23.xml><?xml version="1.0" encoding="utf-8"?>
+<p:sld xmlns:a="http://schemas.openxmlformats.org/drawingml/2006/main" xmlns:r="http://schemas.openxmlformats.org/officeDocument/2006/relationships" xmlns:p="http://schemas.openxmlformats.org/presentationml/2006/main">
+  <p:cSld>
+    <p:spTree>
+      <p:nvGrpSpPr>
+        <p:cNvPr id="1" name=""/>
+        <p:cNvGrpSpPr/>
+        <p:nvPr/>
+      </p:nvGrpSpPr>
+      <p:grpSpPr>
+        <a:xfrm>
+          <a:off x="0" y="0"/>
+          <a:ext cx="0" cy="0"/>
+          <a:chOff x="0" y="0"/>
+          <a:chExt cx="0" cy="0"/>
+        </a:xfrm>
+      </p:grpSpPr>
+      <p:sp>
+        <p:nvSpPr>
           <p:cNvPr id="2" name="コンテンツ プレースホルダー 1"/>
           <p:cNvSpPr>
             <a:spLocks noGrp="1"/>
@@ -5534,104 +5794,164 @@
             <p:ph idx="1"/>
           </p:nvPr>
         </p:nvSpPr>
-        <p:spPr/>
+        <p:spPr>
+          <a:xfrm>
+            <a:off x="344488" y="1304764"/>
+            <a:ext cx="8496300" cy="4894536"/>
+          </a:xfrm>
+        </p:spPr>
         <p:txBody>
           <a:bodyPr>
-            <a:normAutofit fontScale="92500"/>
+            <a:normAutofit fontScale="92500" lnSpcReduction="20000"/>
           </a:bodyPr>
           <a:lstStyle/>
           <a:p>
             <a:r>
-              <a:rPr kumimoji="1" lang="ja-JP" altLang="en-US" sz="1600" dirty="0"/>
-              <a:t>Brian Cantwell Smith の区分</a:t>
-            </a:r>
-            <a:endParaRPr lang="ja-JP" altLang="en-US" dirty="0"/>
-          </a:p>
-          <a:p>
-            <a:r>
               <a:rPr kumimoji="1" lang="ja-JP" altLang="en-US" sz="1600" b="1" dirty="0"/>
-              <a:t>Judgment（判断）</a:t>
-            </a:r>
-          </a:p>
-          <a:p>
-            <a:pPr lvl="1"/>
-            <a:r>
-              <a:rPr kumimoji="1" lang="ja-JP" altLang="en-US" sz="1600" dirty="0"/>
-              <a:t>何を問うか・何を採るかを引き受けること</a:t>
-            </a:r>
-            <a:endParaRPr lang="ja-JP" altLang="en-US" dirty="0"/>
+              <a:t>計算の哲学・AI哲学・認知科学を横断する研究者</a:t>
+            </a:r>
+            <a:r>
+              <a:rPr kumimoji="1" lang="ja-JP" altLang="en-US" sz="1400" dirty="0"/>
+              <a:t>（1950–2025）</a:t>
+            </a:r>
+            <a:endParaRPr kumimoji="1" lang="en-US" altLang="ja-JP" sz="1400" dirty="0"/>
+          </a:p>
+          <a:p>
+            <a:r>
+              <a:rPr lang="en-US" altLang="ja-JP" sz="1400" dirty="0">
+                <a:hlinkClick r:id="rId2"/>
+              </a:rPr>
+              <a:t>Obituary: Brian Cantwell Smith (1950 to 2025) - Faculty of Information</a:t>
+            </a:r>
+            <a:endParaRPr lang="ja-JP" altLang="en-US" sz="800" dirty="0"/>
           </a:p>
           <a:p>
             <a:r>
               <a:rPr kumimoji="1" lang="ja-JP" altLang="en-US" sz="1600" b="1" dirty="0"/>
-              <a:t>Reckoning（演算）</a:t>
-            </a:r>
-          </a:p>
-          <a:p>
-            <a:pPr lvl="1"/>
-            <a:r>
-              <a:rPr kumimoji="1" lang="ja-JP" altLang="en-US" sz="1600" dirty="0"/>
-              <a:t>与えられた条件で広く計算すること</a:t>
-            </a:r>
-          </a:p>
-          <a:p>
-            <a:endParaRPr lang="ja-JP" altLang="en-US" dirty="0"/>
-          </a:p>
-          <a:p>
-            <a:r>
-              <a:rPr kumimoji="1" lang="ja-JP" altLang="en-US" sz="1600" dirty="0"/>
-              <a:t>現行 LLM の得意領域は Reckoning</a:t>
-            </a:r>
-            <a:r>
-              <a:rPr lang="ja-JP" altLang="en-US" b="1" dirty="0"/>
-              <a:t>（演算）</a:t>
-            </a:r>
-            <a:endParaRPr kumimoji="1" lang="ja-JP" altLang="en-US" sz="1600" dirty="0"/>
-          </a:p>
-          <a:p>
-            <a:pPr lvl="1"/>
-            <a:r>
-              <a:rPr kumimoji="1" lang="ja-JP" altLang="en-US" sz="1600" dirty="0"/>
-              <a:t>ただし、人間が与えた判断基準に沿って演算させることはできる</a:t>
-            </a:r>
-          </a:p>
-          <a:p>
-            <a:endParaRPr lang="ja-JP" altLang="en-US" dirty="0"/>
+              <a:t>学術キャリア</a:t>
+            </a:r>
+          </a:p>
+          <a:p>
+            <a:pPr lvl="1"/>
+            <a:r>
+              <a:rPr kumimoji="1" lang="ja-JP" altLang="en-US" sz="1400" dirty="0"/>
+              <a:t>MIT で博士号取得 — 世界初のリフレクティブ言語 3-Lisp を開発</a:t>
+            </a:r>
+          </a:p>
+          <a:p>
+            <a:pPr lvl="1"/>
+            <a:r>
+              <a:rPr kumimoji="1" lang="ja-JP" altLang="en-US" sz="1400" dirty="0"/>
+              <a:t>Stanford 大学で CSLI（言語情報研究センター）を共同設立</a:t>
+            </a:r>
+          </a:p>
+          <a:p>
+            <a:pPr lvl="1"/>
+            <a:r>
+              <a:rPr kumimoji="1" lang="ja-JP" altLang="en-US" sz="1400" dirty="0"/>
+              <a:t>Computer Professionals for Social Responsibility（CPSR）初代会長</a:t>
+            </a:r>
+          </a:p>
+          <a:p>
+            <a:pPr lvl="1"/>
+            <a:r>
+              <a:rPr kumimoji="1" lang="ja-JP" altLang="en-US" sz="1400" dirty="0"/>
+              <a:t>トロント大学情報学部長を経て Reid Hoffman Chair in AI and the Human を保持</a:t>
+            </a:r>
+            <a:endParaRPr lang="ja-JP" altLang="en-US" sz="800" dirty="0"/>
           </a:p>
           <a:p>
             <a:r>
               <a:rPr kumimoji="1" lang="ja-JP" altLang="en-US" sz="1600" b="1" dirty="0"/>
-              <a:t>本日の主張:</a:t>
-            </a:r>
-          </a:p>
-          <a:p>
-            <a:pPr lvl="1"/>
-            <a:r>
-              <a:rPr kumimoji="1" lang="ja-JP" altLang="en-US" sz="1600" dirty="0"/>
-              <a:t>仕事を「判断」と「演算」に分離し、そのループを回す仕組みを設計しよう</a:t>
-            </a:r>
-          </a:p>
-          <a:p>
-            <a:pPr lvl="1"/>
-            <a:r>
-              <a:rPr kumimoji="1" lang="ja-JP" altLang="en-US" sz="1600" dirty="0"/>
-              <a:t>決定 → 演算 → 決定 → 演算</a:t>
-            </a:r>
-            <a:endParaRPr lang="ja-JP" altLang="en-US" dirty="0"/>
-          </a:p>
-          <a:p>
-            <a:pPr lvl="1"/>
-            <a:r>
-              <a:rPr kumimoji="1" lang="ja-JP" altLang="en-US" sz="1500" dirty="0"/>
-              <a:t>特にレビューでは、「現在の判断」だけでなく「将来その判断を担える人を増やす</a:t>
-            </a:r>
-            <a:r>
-              <a:rPr lang="ja-JP" altLang="en-US" sz="1500" dirty="0"/>
-              <a:t>事</a:t>
-            </a:r>
-            <a:r>
-              <a:rPr kumimoji="1" lang="ja-JP" altLang="en-US" sz="1500" dirty="0"/>
-              <a:t>」まで考える</a:t>
+              <a:t>主著</a:t>
+            </a:r>
+          </a:p>
+          <a:p>
+            <a:pPr lvl="1"/>
+            <a:r>
+              <a:rPr kumimoji="1" lang="ja-JP" altLang="en-US" sz="1400" i="1" dirty="0"/>
+              <a:t>The Promise of Artificial Intelligence: </a:t>
+            </a:r>
+            <a:r>
+              <a:rPr kumimoji="1" lang="ja-JP" altLang="en-US" sz="1400" b="1" i="1" dirty="0"/>
+              <a:t>Reckoning and Judgment</a:t>
+            </a:r>
+            <a:r>
+              <a:rPr kumimoji="1" lang="ja-JP" altLang="en-US" sz="1400" dirty="0"/>
+              <a:t>（2019, MIT Press）</a:t>
+            </a:r>
+            <a:endParaRPr kumimoji="1" lang="en-US" altLang="ja-JP" sz="1400" dirty="0"/>
+          </a:p>
+          <a:p>
+            <a:pPr lvl="2"/>
+            <a:r>
+              <a:rPr lang="ja-JP" altLang="en-US" dirty="0"/>
+              <a:t>人工知能の可能性 機械は人間と同じ思考力を持てるのか　　</a:t>
+            </a:r>
+            <a:r>
+              <a:rPr kumimoji="1" lang="ja-JP" altLang="en-US" sz="1400" dirty="0"/>
+              <a:t>← </a:t>
+            </a:r>
+            <a:r>
+              <a:rPr kumimoji="1" lang="ja-JP" altLang="en-US" sz="1400" b="1" dirty="0"/>
+              <a:t>本発表の枠組み</a:t>
+            </a:r>
+          </a:p>
+          <a:p>
+            <a:pPr lvl="1"/>
+            <a:r>
+              <a:rPr kumimoji="1" lang="ja-JP" altLang="en-US" sz="1400" i="1" dirty="0"/>
+              <a:t>On the Origin of Objects</a:t>
+            </a:r>
+            <a:r>
+              <a:rPr kumimoji="1" lang="ja-JP" altLang="en-US" sz="1400" dirty="0"/>
+              <a:t>（1996）/ </a:t>
+            </a:r>
+            <a:r>
+              <a:rPr kumimoji="1" lang="ja-JP" altLang="en-US" sz="1400" i="1" dirty="0"/>
+              <a:t>Computational Reflections</a:t>
+            </a:r>
+            <a:r>
+              <a:rPr kumimoji="1" lang="ja-JP" altLang="en-US" sz="1400" dirty="0"/>
+              <a:t>（2026, 遺著）</a:t>
+            </a:r>
+          </a:p>
+          <a:p>
+            <a:endParaRPr lang="ja-JP" altLang="en-US" sz="800" dirty="0"/>
+          </a:p>
+          <a:p>
+            <a:r>
+              <a:rPr kumimoji="1" lang="ja-JP" altLang="en-US" sz="1600" b="1" dirty="0"/>
+              <a:t>Smith をリスペクトする人物</a:t>
+            </a:r>
+          </a:p>
+          <a:p>
+            <a:pPr lvl="1"/>
+            <a:r>
+              <a:rPr kumimoji="1" lang="ja-JP" altLang="en-US" sz="1400" b="1" dirty="0"/>
+              <a:t>Reid Hoffman</a:t>
+            </a:r>
+            <a:r>
+              <a:rPr kumimoji="1" lang="ja-JP" altLang="en-US" sz="1400" dirty="0"/>
+              <a:t>（LinkedIn 共同創業者）— Stanford で Smith の「AIの哲学」講義を受講</a:t>
+            </a:r>
+          </a:p>
+          <a:p>
+            <a:pPr lvl="2"/>
+            <a:r>
+              <a:rPr kumimoji="1" lang="ja-JP" altLang="en-US" sz="1400" dirty="0"/>
+              <a:t>トロント大学に 245万ドルを寄付し Smith の名を冠した寄附講座を設立</a:t>
+            </a:r>
+          </a:p>
+          <a:p>
+            <a:pPr lvl="1"/>
+            <a:r>
+              <a:rPr kumimoji="1" lang="ja-JP" altLang="en-US" sz="1400" b="1" dirty="0"/>
+              <a:t>Terry Winograd</a:t>
+            </a:r>
+            <a:r>
+              <a:rPr kumimoji="1" lang="ja-JP" altLang="en-US" sz="1400" dirty="0"/>
+              <a:t>（Stanford HCI/AI 権威）— 長年の学術的協力者</a:t>
             </a:r>
           </a:p>
         </p:txBody>
@@ -5649,17 +5969,58 @@
         <p:spPr/>
         <p:txBody>
           <a:bodyPr>
-            <a:normAutofit fontScale="90000"/>
+            <a:normAutofit/>
           </a:bodyPr>
           <a:lstStyle/>
           <a:p>
             <a:r>
+              <a:rPr kumimoji="1" lang="en-US" altLang="ja-JP" dirty="0"/>
+              <a:t>Brian Cantwell Smith</a:t>
+            </a:r>
+            <a:r>
               <a:rPr kumimoji="1" lang="ja-JP" altLang="en-US" dirty="0"/>
-              <a:t>枠組み: 判断（Judgment）と演算（Reckoning）</a:t>
-            </a:r>
-          </a:p>
-        </p:txBody>
-      </p:sp>
+              <a:t> とは誰か</a:t>
+            </a:r>
+          </a:p>
+        </p:txBody>
+      </p:sp>
+      <p:pic>
+        <p:nvPicPr>
+          <p:cNvPr id="5" name="図 4">
+            <a:extLst>
+              <a:ext uri="{FF2B5EF4-FFF2-40B4-BE49-F238E27FC236}">
+                <a16:creationId xmlns:a16="http://schemas.microsoft.com/office/drawing/2014/main" id="{44692293-D13F-DE3D-EBE6-5B7CEE069D14}"/>
+              </a:ext>
+            </a:extLst>
+          </p:cNvPr>
+          <p:cNvPicPr>
+            <a:picLocks noChangeAspect="1"/>
+          </p:cNvPicPr>
+          <p:nvPr/>
+        </p:nvPicPr>
+        <p:blipFill>
+          <a:blip r:embed="rId3">
+            <a:extLst>
+              <a:ext uri="{28A0092B-C50C-407E-A947-70E740481C1C}">
+                <a14:useLocalDpi xmlns:a14="http://schemas.microsoft.com/office/drawing/2010/main" val="0"/>
+              </a:ext>
+            </a:extLst>
+          </a:blip>
+          <a:srcRect l="14905" t="2673" r="15827"/>
+          <a:stretch>
+            <a:fillRect/>
+          </a:stretch>
+        </p:blipFill>
+        <p:spPr>
+          <a:xfrm>
+            <a:off x="7365268" y="969109"/>
+            <a:ext cx="2540732" cy="2855935"/>
+          </a:xfrm>
+          <a:prstGeom prst="rect">
+            <a:avLst/>
+          </a:prstGeom>
+        </p:spPr>
+      </p:pic>
     </p:spTree>
   </p:cSld>
   <p:clrMapOvr>
@@ -5698,89 +6059,133 @@
         <p:spPr/>
         <p:txBody>
           <a:bodyPr>
-            <a:normAutofit/>
+            <a:normAutofit lnSpcReduction="10000"/>
           </a:bodyPr>
           <a:lstStyle/>
           <a:p>
             <a:r>
+              <a:rPr kumimoji="1" lang="ja-JP" altLang="en-US" sz="1600" b="1" dirty="0"/>
+              <a:t>Judgment（判断）</a:t>
+            </a:r>
+          </a:p>
+          <a:p>
+            <a:pPr lvl="1"/>
+            <a:r>
               <a:rPr kumimoji="1" lang="ja-JP" altLang="en-US" sz="1600" dirty="0"/>
-              <a:t>品質管理クラウドチームで AIエージェントを活用して作った</a:t>
-            </a:r>
+              <a:t>何を問うか・何を採るかを引き受けること</a:t>
+            </a:r>
+            <a:endParaRPr kumimoji="1" lang="en-US" altLang="ja-JP" sz="1600" dirty="0"/>
+          </a:p>
+          <a:p>
+            <a:pPr lvl="1"/>
             <a:endParaRPr lang="ja-JP" altLang="en-US" dirty="0"/>
           </a:p>
           <a:p>
             <a:r>
               <a:rPr kumimoji="1" lang="ja-JP" altLang="en-US" sz="1600" b="1" dirty="0"/>
-              <a:t>事例1: ドキュメントパイプライン</a:t>
+              <a:t>Reckoning（演算）</a:t>
             </a:r>
           </a:p>
           <a:p>
             <a:pPr lvl="1"/>
             <a:r>
               <a:rPr kumimoji="1" lang="ja-JP" altLang="en-US" sz="1600" dirty="0"/>
-              <a:t>Git 上の Markdown（193ファイル）↔ 自動同期 ↔ 社内 Wiki（GROWI）</a:t>
-            </a:r>
-          </a:p>
-          <a:p>
-            <a:pPr lvl="1"/>
+              <a:t>与えられた条件で広く計算すること</a:t>
+            </a:r>
+          </a:p>
+          <a:p>
+            <a:endParaRPr lang="ja-JP" altLang="en-US" dirty="0"/>
+          </a:p>
+          <a:p>
             <a:r>
               <a:rPr kumimoji="1" lang="ja-JP" altLang="en-US" sz="1600" dirty="0"/>
-              <a:t>「成果物の作り方」を設計した</a:t>
-            </a:r>
-          </a:p>
-          <a:p>
-            <a:endParaRPr lang="ja-JP" altLang="en-US" dirty="0"/>
-          </a:p>
-          <a:p>
+              <a:t>現行 LLM の得意領域は Reckoning</a:t>
+            </a:r>
+            <a:r>
+              <a:rPr lang="ja-JP" altLang="en-US" b="1" dirty="0"/>
+              <a:t>（演算）</a:t>
+            </a:r>
+            <a:endParaRPr kumimoji="1" lang="ja-JP" altLang="en-US" sz="1600" dirty="0"/>
+          </a:p>
+          <a:p>
+            <a:pPr lvl="1"/>
+            <a:r>
+              <a:rPr kumimoji="1" lang="ja-JP" altLang="en-US" sz="1600" dirty="0"/>
+              <a:t>人間が与えた判断基準（</a:t>
+            </a:r>
+            <a:r>
+              <a:rPr kumimoji="1" lang="en-US" altLang="ja-JP" sz="1600" b="1" dirty="0"/>
+              <a:t>Context</a:t>
+            </a:r>
+            <a:r>
+              <a:rPr kumimoji="1" lang="ja-JP" altLang="en-US" sz="1600" dirty="0"/>
+              <a:t>）あるいは事前学習に沿って</a:t>
+            </a:r>
+            <a:br>
+              <a:rPr kumimoji="1" lang="en-US" altLang="ja-JP" sz="1600" dirty="0"/>
+            </a:br>
             <a:r>
               <a:rPr kumimoji="1" lang="ja-JP" altLang="en-US" sz="1600" b="1" dirty="0"/>
-              <a:t>事例2: AIレビューワークフロー</a:t>
-            </a:r>
-          </a:p>
-          <a:p>
-            <a:pPr lvl="1"/>
-            <a:r>
-              <a:rPr kumimoji="1" lang="ja-JP" altLang="en-US" sz="1600" dirty="0"/>
-              <a:t>Claude Code スキル/エージェント </a:t>
+              <a:t>演算</a:t>
             </a:r>
             <a:r>
               <a:rPr lang="ja-JP" altLang="en-US" sz="1600" dirty="0"/>
-              <a:t>↔</a:t>
-            </a:r>
-            <a:r>
-              <a:rPr kumimoji="1" lang="ja-JP" altLang="en-US" sz="1600" dirty="0"/>
-              <a:t>構造化レビュー ↔GitHub PR</a:t>
-            </a:r>
-          </a:p>
-          <a:p>
-            <a:pPr lvl="1"/>
-            <a:r>
-              <a:rPr kumimoji="1" lang="ja-JP" altLang="en-US" sz="1600" dirty="0"/>
-              <a:t>「判断の仕方」を構造化し、育てる</a:t>
-            </a:r>
-          </a:p>
-          <a:p>
-            <a:pPr lvl="1"/>
-            <a:r>
-              <a:rPr kumimoji="1" lang="ja-JP" altLang="en-US" sz="1500" dirty="0"/>
-              <a:t>目の前の PR を判断しつつ、判断力そのものも育てたい</a:t>
-            </a:r>
-          </a:p>
-          <a:p>
-            <a:endParaRPr lang="ja-JP" altLang="en-US" dirty="0"/>
-          </a:p>
-          <a:p>
-            <a:r>
-              <a:rPr kumimoji="1" lang="ja-JP" altLang="en-US" sz="1600" b="1" dirty="0"/>
-              <a:t>共通パターン:</a:t>
-            </a:r>
-          </a:p>
-          <a:p>
-            <a:pPr lvl="1"/>
-            <a:r>
-              <a:rPr kumimoji="1" lang="ja-JP" altLang="en-US" sz="1600" dirty="0"/>
-              <a:t>人間が判断の枠組みを作り、AI が演算を担う</a:t>
-            </a:r>
+              <a:t>させているに過ぎない</a:t>
+            </a:r>
+            <a:endParaRPr kumimoji="1" lang="en-US" altLang="ja-JP" sz="1600" dirty="0"/>
+          </a:p>
+          <a:p>
+            <a:pPr lvl="1"/>
+            <a:endParaRPr lang="en-US" altLang="ja-JP" sz="1600" dirty="0"/>
+          </a:p>
+          <a:p>
+            <a:pPr marL="257173" lvl="1" indent="0">
+              <a:buNone/>
+            </a:pPr>
+            <a:r>
+              <a:rPr lang="ja-JP" altLang="en-US" sz="1600" dirty="0"/>
+              <a:t>晩年の</a:t>
+            </a:r>
+            <a:r>
+              <a:rPr lang="en-US" altLang="ja-JP" sz="1600" dirty="0"/>
+              <a:t>Smith</a:t>
+            </a:r>
+            <a:r>
+              <a:rPr lang="ja-JP" altLang="en-US" sz="1600" dirty="0"/>
+              <a:t>は、「</a:t>
+            </a:r>
+            <a:r>
+              <a:rPr lang="en-US" altLang="ja-JP" sz="1600" dirty="0"/>
+              <a:t>AI</a:t>
+            </a:r>
+            <a:r>
+              <a:rPr lang="ja-JP" altLang="en-US" sz="1600" dirty="0"/>
+              <a:t>の圧倒的な演算力を前に、人間が判断の重要性を見失う」</a:t>
+            </a:r>
+            <a:br>
+              <a:rPr lang="en-US" altLang="ja-JP" sz="1600" dirty="0"/>
+            </a:br>
+            <a:r>
+              <a:rPr lang="ja-JP" altLang="en-US" sz="1600" dirty="0"/>
+              <a:t>ことを危惧していた</a:t>
+            </a:r>
+            <a:endParaRPr lang="en-US" altLang="ja-JP" sz="1600" dirty="0"/>
+          </a:p>
+          <a:p>
+            <a:pPr lvl="2"/>
+            <a:r>
+              <a:rPr lang="en-US" altLang="ja-JP" sz="1600" dirty="0">
+                <a:hlinkClick r:id="rId2"/>
+              </a:rPr>
+              <a:t>On Brian Cantwell Smith and the Promise of AI</a:t>
+            </a:r>
+            <a:endParaRPr lang="ja-JP" altLang="en-US" sz="1600" dirty="0"/>
+          </a:p>
+          <a:p>
+            <a:pPr marL="257173" lvl="1" indent="0">
+              <a:buNone/>
+            </a:pPr>
+            <a:endParaRPr kumimoji="1" lang="en-US" altLang="ja-JP" sz="1600" dirty="0"/>
           </a:p>
         </p:txBody>
       </p:sp>
@@ -5796,16 +6201,54 @@
         </p:nvSpPr>
         <p:spPr/>
         <p:txBody>
-          <a:bodyPr/>
+          <a:bodyPr>
+            <a:normAutofit fontScale="90000"/>
+          </a:bodyPr>
           <a:lstStyle/>
           <a:p>
             <a:r>
               <a:rPr kumimoji="1" lang="ja-JP" altLang="en-US" dirty="0"/>
-              <a:t>今日話す2つの仕組み</a:t>
-            </a:r>
-          </a:p>
-        </p:txBody>
-      </p:sp>
+              <a:t>枠組み: 判断（Judgment）と演算（Reckoning）</a:t>
+            </a:r>
+          </a:p>
+        </p:txBody>
+      </p:sp>
+      <p:pic>
+        <p:nvPicPr>
+          <p:cNvPr id="7" name="図 6">
+            <a:extLst>
+              <a:ext uri="{FF2B5EF4-FFF2-40B4-BE49-F238E27FC236}">
+                <a16:creationId xmlns:a16="http://schemas.microsoft.com/office/drawing/2014/main" id="{083A0CFA-A09A-3A63-F9FF-6345B2CAD640}"/>
+              </a:ext>
+            </a:extLst>
+          </p:cNvPr>
+          <p:cNvPicPr>
+            <a:picLocks noChangeAspect="1"/>
+          </p:cNvPicPr>
+          <p:nvPr/>
+        </p:nvPicPr>
+        <p:blipFill>
+          <a:blip r:embed="rId3">
+            <a:extLst>
+              <a:ext uri="{28A0092B-C50C-407E-A947-70E740481C1C}">
+                <a14:useLocalDpi xmlns:a14="http://schemas.microsoft.com/office/drawing/2010/main" val="0"/>
+              </a:ext>
+            </a:extLst>
+          </a:blip>
+          <a:stretch>
+            <a:fillRect/>
+          </a:stretch>
+        </p:blipFill>
+        <p:spPr>
+          <a:xfrm>
+            <a:off x="7581292" y="980728"/>
+            <a:ext cx="2324708" cy="2905885"/>
+          </a:xfrm>
+          <a:prstGeom prst="rect">
+            <a:avLst/>
+          </a:prstGeom>
+        </p:spPr>
+      </p:pic>
     </p:spTree>
   </p:cSld>
   <p:clrMapOvr>
@@ -5819,7 +6262,13 @@
   <p:cSld>
     <p:spTree>
       <p:nvGrpSpPr>
-        <p:cNvPr id="1" name=""/>
+        <p:cNvPr id="1" name="">
+          <a:extLst>
+            <a:ext uri="{FF2B5EF4-FFF2-40B4-BE49-F238E27FC236}">
+              <a16:creationId xmlns:a16="http://schemas.microsoft.com/office/drawing/2014/main" id="{E2B807AA-1893-685C-58DA-275050603BF7}"/>
+            </a:ext>
+          </a:extLst>
+        </p:cNvPr>
         <p:cNvGrpSpPr/>
         <p:nvPr/>
       </p:nvGrpSpPr>
@@ -5833,53 +6282,127 @@
       </p:grpSpPr>
       <p:sp>
         <p:nvSpPr>
-          <p:cNvPr id="2" name="タイトル 1"/>
-          <p:cNvSpPr>
-            <a:spLocks noGrp="1"/>
+          <p:cNvPr id="2" name="コンテンツ 1">
+            <a:extLst>
+              <a:ext uri="{FF2B5EF4-FFF2-40B4-BE49-F238E27FC236}">
+                <a16:creationId xmlns:a16="http://schemas.microsoft.com/office/drawing/2014/main" id="{541267B1-6604-BF94-782E-4ECE098B8A6F}"/>
+              </a:ext>
+            </a:extLst>
+          </p:cNvPr>
+          <p:cNvSpPr txBox="1">
+            <a:spLocks/>
           </p:cNvSpPr>
-          <p:nvPr>
-            <p:ph type="ctrTitle"/>
-          </p:nvPr>
-        </p:nvSpPr>
-        <p:spPr/>
-        <p:txBody>
-          <a:bodyPr>
-            <a:normAutofit fontScale="90000"/>
-          </a:bodyPr>
-          <a:lstStyle/>
-          <a:p>
-            <a:r>
-              <a:rPr kumimoji="1" lang="ja-JP" altLang="en-US" sz="2600" dirty="0"/>
-              <a:t>事例1　ドキュメントパイプライン</a:t>
-            </a:r>
-          </a:p>
-        </p:txBody>
-      </p:sp>
-      <p:sp>
-        <p:nvSpPr>
-          <p:cNvPr id="3" name="字幕 2"/>
-          <p:cNvSpPr>
-            <a:spLocks noGrp="1"/>
-          </p:cNvSpPr>
-          <p:nvPr>
-            <p:ph type="subTitle" idx="1"/>
-          </p:nvPr>
-        </p:nvSpPr>
-        <p:spPr/>
-        <p:txBody>
-          <a:bodyPr>
+          <p:nvPr/>
+        </p:nvSpPr>
+        <p:spPr>
+          <a:xfrm>
+            <a:off x="697186" y="1000000"/>
+            <a:ext cx="8496300" cy="4800000"/>
+          </a:xfrm>
+          <a:prstGeom prst="rect">
+            <a:avLst/>
+          </a:prstGeom>
+        </p:spPr>
+        <p:txBody>
+          <a:bodyPr vert="horz" lIns="91440" tIns="91440" rIns="91440" bIns="91440" rtlCol="0" anchor="ctr">
             <a:normAutofit/>
           </a:bodyPr>
-          <a:lstStyle/>
-          <a:p>
-            <a:r>
-              <a:rPr kumimoji="1" lang="ja-JP" altLang="en-US" sz="1300" dirty="0"/>
-              <a:t>「作り方を作る」</a:t>
+          <a:lstStyle>
+            <a:lvl1pPr algn="ctr">
+              <a:defRPr kumimoji="1" sz="2400">
+                <a:solidFill>
+                  <a:schemeClr val="tx1"/>
+                </a:solidFill>
+                <a:latin typeface="+mn-ea"/>
+              </a:defRPr>
+            </a:lvl1pPr>
+          </a:lstStyle>
+          <a:p>
+            <a:r>
+              <a:rPr lang="ja-JP" altLang="en-US" sz="2800" b="1" dirty="0"/>
+              <a:t>本日の主張:</a:t>
+            </a:r>
+            <a:endParaRPr lang="en-US" altLang="ja-JP" sz="2800" b="1" dirty="0"/>
+          </a:p>
+          <a:p>
+            <a:endParaRPr lang="ja-JP" altLang="en-US" sz="2800" b="1" dirty="0"/>
+          </a:p>
+          <a:p>
+            <a:pPr marL="742950" lvl="1" indent="-285750">
+              <a:buFont typeface="Arial" panose="020B0604020202020204" pitchFamily="34" charset="0"/>
+              <a:buChar char="•"/>
+            </a:pPr>
+            <a:r>
+              <a:rPr lang="ja-JP" altLang="en-US" sz="2800" dirty="0"/>
+              <a:t>設計👷↓↓↓</a:t>
+            </a:r>
+            <a:br>
+              <a:rPr lang="en-US" altLang="ja-JP" sz="2800" dirty="0"/>
+            </a:br>
+            <a:r>
+              <a:rPr lang="ja-JP" altLang="en-US" sz="2800" dirty="0"/>
+              <a:t>「</a:t>
+            </a:r>
+            <a:r>
+              <a:rPr lang="ja-JP" altLang="en-US" sz="2000" dirty="0"/>
+              <a:t>判断 🙆→ 演算 🤖→ 判断🙅 → 演算🤖→判断 🙆」</a:t>
+            </a:r>
+            <a:br>
+              <a:rPr lang="en-US" altLang="ja-JP" dirty="0"/>
+            </a:br>
+            <a:endParaRPr lang="ja-JP" altLang="en-US" sz="2800" dirty="0"/>
+          </a:p>
+          <a:p>
+            <a:pPr marL="742950" lvl="1" indent="-285750">
+              <a:buFont typeface="Arial" panose="020B0604020202020204" pitchFamily="34" charset="0"/>
+              <a:buChar char="•"/>
+            </a:pPr>
+            <a:r>
+              <a:rPr lang="ja-JP" altLang="en-US" sz="2000" dirty="0"/>
+              <a:t>特にレビューでは、「現在の判断」だけでなく</a:t>
+            </a:r>
+            <a:br>
+              <a:rPr lang="en-US" altLang="ja-JP" sz="2000" dirty="0"/>
+            </a:br>
+            <a:r>
+              <a:rPr lang="ja-JP" altLang="en-US" sz="2000" dirty="0"/>
+              <a:t>「将来その</a:t>
+            </a:r>
+            <a:r>
+              <a:rPr lang="ja-JP" altLang="en-US" sz="2000" b="1" dirty="0"/>
+              <a:t>判断</a:t>
+            </a:r>
+            <a:r>
+              <a:rPr lang="ja-JP" altLang="en-US" sz="2000" dirty="0"/>
+              <a:t>を担える人を増やす事」まで考えよう</a:t>
+            </a:r>
+            <a:endParaRPr lang="en-US" altLang="ja-JP" sz="2000" dirty="0"/>
+          </a:p>
+          <a:p>
+            <a:pPr marL="742950" lvl="1" indent="-285750">
+              <a:buFont typeface="Arial" panose="020B0604020202020204" pitchFamily="34" charset="0"/>
+              <a:buChar char="•"/>
+            </a:pPr>
+            <a:endParaRPr lang="en-US" altLang="ja-JP" sz="2000" dirty="0"/>
+          </a:p>
+          <a:p>
+            <a:pPr marL="742950" lvl="1" indent="-285750">
+              <a:buFont typeface="Arial" panose="020B0604020202020204" pitchFamily="34" charset="0"/>
+              <a:buChar char="•"/>
+            </a:pPr>
+            <a:r>
+              <a:rPr lang="ja-JP" altLang="en-US" sz="2000" dirty="0"/>
+              <a:t>判断とメタ判断</a:t>
             </a:r>
           </a:p>
         </p:txBody>
       </p:sp>
     </p:spTree>
+    <p:extLst>
+      <p:ext uri="{BB962C8B-B14F-4D97-AF65-F5344CB8AC3E}">
+        <p14:creationId xmlns:p14="http://schemas.microsoft.com/office/powerpoint/2010/main" val="455247066"/>
+      </p:ext>
+    </p:extLst>
   </p:cSld>
   <p:clrMapOvr>
     <a:masterClrMapping/>
@@ -5923,14 +6446,28 @@
           <a:p>
             <a:r>
               <a:rPr kumimoji="1" lang="ja-JP" altLang="en-US" sz="1600" dirty="0"/>
-              <a:t>実装と Wiki が一致しない（ドキュメントが腐る）</a:t>
+              <a:t>品質管理クラウドチームで AIエージェントを活用して作った</a:t>
+            </a:r>
+            <a:endParaRPr lang="ja-JP" altLang="en-US" dirty="0"/>
+          </a:p>
+          <a:p>
+            <a:r>
+              <a:rPr kumimoji="1" lang="ja-JP" altLang="en-US" sz="1600" b="1" dirty="0"/>
+              <a:t>事例1: ドキュメントパイプライン</a:t>
             </a:r>
           </a:p>
           <a:p>
             <a:pPr lvl="1"/>
             <a:r>
               <a:rPr kumimoji="1" lang="ja-JP" altLang="en-US" sz="1600" dirty="0"/>
-              <a:t>→ 常につきまとう課題</a:t>
+              <a:t>Git 上の Markdown（193ファイル）↔ 自動同期 ↔ 社内 Wiki（GROWI）</a:t>
+            </a:r>
+          </a:p>
+          <a:p>
+            <a:pPr lvl="1"/>
+            <a:r>
+              <a:rPr kumimoji="1" lang="ja-JP" altLang="en-US" sz="1600" dirty="0"/>
+              <a:t>「成果物の作り方」を設計した</a:t>
             </a:r>
           </a:p>
           <a:p>
@@ -5938,83 +6475,53 @@
           </a:p>
           <a:p>
             <a:r>
+              <a:rPr kumimoji="1" lang="ja-JP" altLang="en-US" sz="1600" b="1" dirty="0"/>
+              <a:t>事例2: AIレビューワークフロー</a:t>
+            </a:r>
+          </a:p>
+          <a:p>
+            <a:pPr lvl="1"/>
+            <a:r>
               <a:rPr kumimoji="1" lang="ja-JP" altLang="en-US" sz="1600" dirty="0"/>
-              <a:t>コードを S</a:t>
-            </a:r>
-            <a:r>
-              <a:rPr kumimoji="1" lang="en-US" altLang="ja-JP" sz="1600" dirty="0"/>
-              <a:t>ingle </a:t>
+              <a:t>Claude Code スキル/エージェント </a:t>
+            </a:r>
+            <a:r>
+              <a:rPr lang="ja-JP" altLang="en-US" sz="1600" dirty="0"/>
+              <a:t>↔</a:t>
             </a:r>
             <a:r>
               <a:rPr kumimoji="1" lang="ja-JP" altLang="en-US" sz="1600" dirty="0"/>
-              <a:t>S</a:t>
-            </a:r>
-            <a:r>
-              <a:rPr kumimoji="1" lang="en-US" altLang="ja-JP" sz="1600" dirty="0" err="1"/>
-              <a:t>ource</a:t>
-            </a:r>
-            <a:r>
-              <a:rPr kumimoji="1" lang="en-US" altLang="ja-JP" sz="1600" dirty="0"/>
-              <a:t> </a:t>
-            </a:r>
+              <a:t>構造化レビュー ↔GitHub PR</a:t>
+            </a:r>
+          </a:p>
+          <a:p>
+            <a:pPr lvl="1"/>
             <a:r>
               <a:rPr kumimoji="1" lang="ja-JP" altLang="en-US" sz="1600" dirty="0"/>
-              <a:t>O</a:t>
-            </a:r>
-            <a:r>
-              <a:rPr kumimoji="1" lang="en-US" altLang="ja-JP" sz="1600" dirty="0"/>
-              <a:t>f </a:t>
-            </a:r>
+              <a:t>「判断の仕方」を構造化し、育てる</a:t>
+            </a:r>
+          </a:p>
+          <a:p>
+            <a:pPr lvl="1"/>
+            <a:r>
+              <a:rPr kumimoji="1" lang="ja-JP" altLang="en-US" sz="1500" dirty="0"/>
+              <a:t>目の前の PR を判断しつつ、判断力そのものも育てたい</a:t>
+            </a:r>
+          </a:p>
+          <a:p>
+            <a:endParaRPr lang="ja-JP" altLang="en-US" dirty="0"/>
+          </a:p>
+          <a:p>
+            <a:r>
+              <a:rPr kumimoji="1" lang="ja-JP" altLang="en-US" sz="1600" b="1" dirty="0"/>
+              <a:t>共通パターン:</a:t>
+            </a:r>
+          </a:p>
+          <a:p>
+            <a:pPr lvl="1"/>
             <a:r>
               <a:rPr kumimoji="1" lang="ja-JP" altLang="en-US" sz="1600" dirty="0"/>
-              <a:t>T</a:t>
-            </a:r>
-            <a:r>
-              <a:rPr kumimoji="1" lang="en-US" altLang="ja-JP" sz="1600" dirty="0" err="1"/>
-              <a:t>rueth</a:t>
-            </a:r>
-            <a:r>
-              <a:rPr kumimoji="1" lang="ja-JP" altLang="en-US" sz="1600" dirty="0"/>
-              <a:t>（唯一の真実） にしたいが、</a:t>
-            </a:r>
-            <a:br>
-              <a:rPr kumimoji="1" lang="en-US" altLang="ja-JP" sz="1600" dirty="0"/>
-            </a:br>
-            <a:r>
-              <a:rPr kumimoji="1" lang="ja-JP" altLang="en-US" sz="1600" dirty="0"/>
-              <a:t>他部門連携では Wiki が必要</a:t>
-            </a:r>
-          </a:p>
-          <a:p>
-            <a:endParaRPr lang="ja-JP" altLang="en-US" dirty="0"/>
-          </a:p>
-          <a:p>
-            <a:r>
-              <a:rPr kumimoji="1" lang="ja-JP" altLang="en-US" sz="1600" dirty="0"/>
-              <a:t>Issue / Redmine / 実装 / Wiki</a:t>
-            </a:r>
-          </a:p>
-          <a:p>
-            <a:pPr lvl="1"/>
-            <a:r>
-              <a:rPr kumimoji="1" lang="ja-JP" altLang="en-US" sz="1600" dirty="0"/>
-              <a:t>→ 同じことを何度も書く → どこかで整合しなくなる</a:t>
-            </a:r>
-          </a:p>
-          <a:p>
-            <a:endParaRPr lang="ja-JP" altLang="en-US" dirty="0"/>
-          </a:p>
-          <a:p>
-            <a:r>
-              <a:rPr kumimoji="1" lang="ja-JP" altLang="en-US" sz="1600" dirty="0"/>
-              <a:t>GitHub も Redmine も GROWI も API がある</a:t>
-            </a:r>
-          </a:p>
-          <a:p>
-            <a:pPr lvl="1"/>
-            <a:r>
-              <a:rPr kumimoji="1" lang="ja-JP" altLang="en-US" sz="1600" dirty="0"/>
-              <a:t>→ 連携を簡単にする方向で解決したい</a:t>
+              <a:t>人間が判断の枠組みを作り、AI が演算を担う</a:t>
             </a:r>
           </a:p>
         </p:txBody>
@@ -6036,7 +6543,7 @@
           <a:p>
             <a:r>
               <a:rPr kumimoji="1" lang="ja-JP" altLang="en-US" dirty="0"/>
-              <a:t>課題 — なぜ作ろうと思ったか</a:t>
+              <a:t>今日話す2つの仕組み</a:t>
             </a:r>
           </a:p>
         </p:txBody>
@@ -6068,12 +6575,36 @@
       </p:grpSpPr>
       <p:sp>
         <p:nvSpPr>
-          <p:cNvPr id="2" name="コンテンツ プレースホルダー 1"/>
+          <p:cNvPr id="2" name="タイトル 1"/>
           <p:cNvSpPr>
             <a:spLocks noGrp="1"/>
           </p:cNvSpPr>
           <p:nvPr>
-            <p:ph idx="1"/>
+            <p:ph type="ctrTitle"/>
+          </p:nvPr>
+        </p:nvSpPr>
+        <p:spPr/>
+        <p:txBody>
+          <a:bodyPr>
+            <a:normAutofit fontScale="90000"/>
+          </a:bodyPr>
+          <a:lstStyle/>
+          <a:p>
+            <a:r>
+              <a:rPr kumimoji="1" lang="ja-JP" altLang="en-US" sz="2600" dirty="0"/>
+              <a:t>事例1　ドキュメントパイプライン</a:t>
+            </a:r>
+          </a:p>
+        </p:txBody>
+      </p:sp>
+      <p:sp>
+        <p:nvSpPr>
+          <p:cNvPr id="3" name="字幕 2"/>
+          <p:cNvSpPr>
+            <a:spLocks noGrp="1"/>
+          </p:cNvSpPr>
+          <p:nvPr>
+            <p:ph type="subTitle" idx="1"/>
           </p:nvPr>
         </p:nvSpPr>
         <p:spPr/>
@@ -6084,91 +6615,8 @@
           <a:lstStyle/>
           <a:p>
             <a:r>
-              <a:rPr kumimoji="1" lang="ja-JP" altLang="en-US" sz="1600" b="1" dirty="0"/>
-              <a:t>問い: Wiki をローカル（Git）で管理すれば何が可能になるか？</a:t>
-            </a:r>
-          </a:p>
-          <a:p>
-            <a:endParaRPr lang="ja-JP" altLang="en-US" dirty="0"/>
-          </a:p>
-          <a:p>
-            <a:pPr lvl="1"/>
-            <a:r>
-              <a:rPr kumimoji="1" lang="ja-JP" altLang="en-US" sz="1600" dirty="0"/>
-              <a:t>コーディングエージェントはローカル情報に最も効率よくアクセスできる</a:t>
-            </a:r>
-          </a:p>
-          <a:p>
-            <a:pPr lvl="1"/>
-            <a:r>
-              <a:rPr kumimoji="1" lang="ja-JP" altLang="en-US" sz="1600" dirty="0"/>
-              <a:t>Wiki を読んで既存仕様との整合性チェックができる</a:t>
-            </a:r>
-          </a:p>
-          <a:p>
-            <a:pPr lvl="1"/>
-            <a:r>
-              <a:rPr kumimoji="1" lang="ja-JP" altLang="en-US" sz="1600" dirty="0"/>
-              <a:t>Git 管理にすれば GitHub Actions に組み込める</a:t>
-            </a:r>
-          </a:p>
-          <a:p>
-            <a:r>
-              <a:rPr lang="ja-JP" altLang="en-US" b="1" dirty="0"/>
-              <a:t>問い: どうすれば現状のツールで仕組みを作れるか</a:t>
-            </a:r>
-            <a:endParaRPr lang="ja-JP" altLang="en-US" dirty="0"/>
-          </a:p>
-          <a:p>
-            <a:pPr lvl="1"/>
-            <a:r>
-              <a:rPr kumimoji="1" lang="ja-JP" altLang="en-US" sz="1600" dirty="0"/>
-              <a:t>GROWI が社内 NW のみ       → selfhost ランナーで解決</a:t>
-            </a:r>
-          </a:p>
-          <a:p>
-            <a:pPr lvl="1"/>
-            <a:r>
-              <a:rPr kumimoji="1" lang="ja-JP" altLang="en-US" sz="1600" dirty="0"/>
-              <a:t>Git 画像でリポジトリが重い   → Azure Blob ストレージ</a:t>
-            </a:r>
-          </a:p>
-          <a:p>
-            <a:pPr lvl="1"/>
-            <a:r>
-              <a:rPr kumimoji="1" lang="ja-JP" altLang="en-US" sz="1600" dirty="0"/>
-              <a:t>Blob に格納する手順が面倒   → CLI スクリプト + ショートカットで実行</a:t>
-            </a:r>
-          </a:p>
-          <a:p>
-            <a:endParaRPr lang="ja-JP" altLang="en-US" dirty="0"/>
-          </a:p>
-          <a:p>
-            <a:r>
-              <a:rPr kumimoji="1" lang="ja-JP" altLang="en-US" sz="1600" dirty="0"/>
-              <a:t>これらの判断は meta/ 配下にドキュメントとして記録</a:t>
-            </a:r>
-          </a:p>
-        </p:txBody>
-      </p:sp>
-      <p:sp>
-        <p:nvSpPr>
-          <p:cNvPr id="3" name="タイトル 2"/>
-          <p:cNvSpPr>
-            <a:spLocks noGrp="1"/>
-          </p:cNvSpPr>
-          <p:nvPr>
-            <p:ph type="title"/>
-          </p:nvPr>
-        </p:nvSpPr>
-        <p:spPr/>
-        <p:txBody>
-          <a:bodyPr/>
-          <a:lstStyle/>
-          <a:p>
-            <a:r>
-              <a:rPr kumimoji="1" lang="ja-JP" altLang="en-US" dirty="0"/>
-              <a:t>判断（Judgment）— 何を作るか決める</a:t>
+              <a:rPr kumimoji="1" lang="ja-JP" altLang="en-US" sz="1300" dirty="0"/>
+              <a:t>「作り方を作る」</a:t>
             </a:r>
           </a:p>
         </p:txBody>
@@ -6217,46 +6665,60 @@
           <a:p>
             <a:r>
               <a:rPr kumimoji="1" lang="ja-JP" altLang="en-US" sz="1600" dirty="0"/>
-              <a:t>Claude Code で構築した統合 CLI ツール（TypeScript）</a:t>
-            </a:r>
-          </a:p>
-          <a:p>
+              <a:t>実装と Wiki が一致しない（ドキュメントが腐る）</a:t>
+            </a:r>
             <a:endParaRPr lang="ja-JP" altLang="en-US" dirty="0"/>
           </a:p>
           <a:p>
+            <a:endParaRPr kumimoji="1" lang="en-US" altLang="ja-JP" sz="1600" dirty="0"/>
+          </a:p>
+          <a:p>
             <a:r>
               <a:rPr kumimoji="1" lang="ja-JP" altLang="en-US" sz="1600" dirty="0"/>
-              <a:t>docs:check        frontmatter 検証・パス重複チェック</a:t>
-            </a:r>
-          </a:p>
-          <a:p>
+              <a:t>ソースコードを S</a:t>
+            </a:r>
+            <a:r>
+              <a:rPr kumimoji="1" lang="en-US" altLang="ja-JP" sz="1600" dirty="0"/>
+              <a:t>ingle </a:t>
+            </a:r>
             <a:r>
               <a:rPr kumimoji="1" lang="ja-JP" altLang="en-US" sz="1600" dirty="0"/>
-              <a:t>docs:publish      Git → GROWI 同期（単体 / 一括 / dry-run）</a:t>
-            </a:r>
-          </a:p>
-          <a:p>
+              <a:t>S</a:t>
+            </a:r>
+            <a:r>
+              <a:rPr kumimoji="1" lang="en-US" altLang="ja-JP" sz="1600" dirty="0" err="1"/>
+              <a:t>ource</a:t>
+            </a:r>
+            <a:r>
+              <a:rPr kumimoji="1" lang="en-US" altLang="ja-JP" sz="1600" dirty="0"/>
+              <a:t> </a:t>
+            </a:r>
             <a:r>
               <a:rPr kumimoji="1" lang="ja-JP" altLang="en-US" sz="1600" dirty="0"/>
-              <a:t>docs:import:page  GROWI → Git 取り込み（画像を Blob に自動移行）</a:t>
-            </a:r>
-          </a:p>
-          <a:p>
+              <a:t>O</a:t>
+            </a:r>
+            <a:r>
+              <a:rPr kumimoji="1" lang="en-US" altLang="ja-JP" sz="1600" dirty="0"/>
+              <a:t>f </a:t>
+            </a:r>
             <a:r>
               <a:rPr kumimoji="1" lang="ja-JP" altLang="en-US" sz="1600" dirty="0"/>
-              <a:t>docs:import:tree  GROWI ツリー一括取り込み</a:t>
-            </a:r>
-          </a:p>
-          <a:p>
+              <a:t>T</a:t>
+            </a:r>
+            <a:r>
+              <a:rPr kumimoji="1" lang="en-US" altLang="ja-JP" sz="1600" dirty="0" err="1"/>
+              <a:t>rueth</a:t>
+            </a:r>
             <a:r>
               <a:rPr kumimoji="1" lang="ja-JP" altLang="en-US" sz="1600" dirty="0"/>
-              <a:t>docs:image:paste  クリップボード画像 → Azure Blob → Markdown リンク</a:t>
-            </a:r>
-          </a:p>
-          <a:p>
+              <a:t>（唯一の真実） にしたいが、</a:t>
+            </a:r>
+            <a:br>
+              <a:rPr kumimoji="1" lang="en-US" altLang="ja-JP" sz="1600" dirty="0"/>
+            </a:br>
             <a:r>
               <a:rPr kumimoji="1" lang="ja-JP" altLang="en-US" sz="1600" dirty="0"/>
-              <a:t>docs:image:upload ローカル画像ファイル → Azure Blob</a:t>
+              <a:t>他部門連携では Wiki が必要</a:t>
             </a:r>
           </a:p>
           <a:p>
@@ -6265,14 +6727,73 @@
           <a:p>
             <a:r>
               <a:rPr kumimoji="1" lang="ja-JP" altLang="en-US" sz="1600" dirty="0"/>
-              <a:t>各 Markdown に frontmatter でメタデータを持たせる（設定ファイル不要）</a:t>
-            </a:r>
-          </a:p>
-          <a:p>
+              <a:t>Issue / Redmine / 実装 / Wiki</a:t>
+            </a:r>
+          </a:p>
+          <a:p>
+            <a:pPr lvl="1"/>
             <a:r>
               <a:rPr kumimoji="1" lang="ja-JP" altLang="en-US" sz="1600" dirty="0"/>
-              <a:t>画像貼り付けは VSCode ショートカット（Ctrl+Alt+V）で完結</a:t>
-            </a:r>
+              <a:t>→ 同じことを何度も書く </a:t>
+            </a:r>
+            <a:endParaRPr kumimoji="1" lang="en-US" altLang="ja-JP" sz="1600" dirty="0"/>
+          </a:p>
+          <a:p>
+            <a:pPr lvl="1"/>
+            <a:r>
+              <a:rPr kumimoji="1" lang="ja-JP" altLang="en-US" sz="1600" dirty="0"/>
+              <a:t>→ どこかで整合しなくなる</a:t>
+            </a:r>
+            <a:endParaRPr kumimoji="1" lang="en-US" altLang="ja-JP" sz="1600" dirty="0"/>
+          </a:p>
+          <a:p>
+            <a:pPr lvl="1"/>
+            <a:endParaRPr lang="en-US" altLang="ja-JP" sz="1600" dirty="0"/>
+          </a:p>
+          <a:p>
+            <a:pPr lvl="1"/>
+            <a:endParaRPr lang="en-US" altLang="ja-JP" sz="1600" dirty="0"/>
+          </a:p>
+          <a:p>
+            <a:r>
+              <a:rPr lang="ja-JP" altLang="en-US" b="1" dirty="0"/>
+              <a:t>GitHub も Redmine も GROWI も </a:t>
+            </a:r>
+            <a:r>
+              <a:rPr lang="en-US" altLang="ja-JP" b="1" dirty="0"/>
+              <a:t>CLI</a:t>
+            </a:r>
+            <a:r>
+              <a:rPr lang="ja-JP" altLang="en-US" b="1" dirty="0"/>
+              <a:t>から更新できる ！　</a:t>
+            </a:r>
+            <a:br>
+              <a:rPr lang="en-US" altLang="ja-JP" dirty="0"/>
+            </a:br>
+            <a:r>
+              <a:rPr lang="ja-JP" altLang="en-US" sz="1600" dirty="0"/>
+              <a:t>→ </a:t>
+            </a:r>
+            <a:r>
+              <a:rPr lang="en-US" altLang="ja-JP" sz="1600" dirty="0"/>
+              <a:t>AI</a:t>
+            </a:r>
+            <a:r>
+              <a:rPr lang="ja-JP" altLang="en-US" sz="1600" dirty="0"/>
+              <a:t>エージェント</a:t>
+            </a:r>
+            <a:r>
+              <a:rPr lang="ja-JP" altLang="en-US" dirty="0"/>
+              <a:t>🤖</a:t>
+            </a:r>
+            <a:r>
+              <a:rPr lang="ja-JP" altLang="en-US" sz="1600" dirty="0"/>
+              <a:t>を利用して解決したい</a:t>
+            </a:r>
+          </a:p>
+          <a:p>
+            <a:pPr lvl="1"/>
+            <a:endParaRPr lang="ja-JP" altLang="en-US" dirty="0"/>
           </a:p>
         </p:txBody>
       </p:sp>
@@ -6293,7 +6814,7 @@
           <a:p>
             <a:r>
               <a:rPr kumimoji="1" lang="ja-JP" altLang="en-US" dirty="0"/>
-              <a:t>演算（Reckoning）— growi-docs CLI</a:t>
+              <a:t>課題 — なぜ作ろうと思ったか</a:t>
             </a:r>
           </a:p>
         </p:txBody>

--- a/TechMeeting202604/techmeeting20260406.pptx
+++ b/TechMeeting202604/techmeeting20260406.pptx
@@ -5979,8 +5979,13 @@
             </a:r>
             <a:r>
               <a:rPr kumimoji="1" lang="ja-JP" altLang="en-US" dirty="0"/>
-              <a:t> とは誰か</a:t>
-            </a:r>
+              <a:t> </a:t>
+            </a:r>
+            <a:r>
+              <a:rPr lang="ja-JP" altLang="en-US" dirty="0"/>
+              <a:t>って何者？</a:t>
+            </a:r>
+            <a:endParaRPr kumimoji="1" lang="ja-JP" altLang="en-US" dirty="0"/>
           </a:p>
         </p:txBody>
       </p:sp>
@@ -6167,7 +6172,7 @@
             </a:br>
             <a:r>
               <a:rPr lang="ja-JP" altLang="en-US" sz="1600" dirty="0"/>
-              <a:t>ことを危惧していた</a:t>
+              <a:t>ことを危惧していたそう</a:t>
             </a:r>
             <a:endParaRPr lang="en-US" altLang="ja-JP" sz="1600" dirty="0"/>
           </a:p>
@@ -6334,7 +6339,7 @@
             </a:pPr>
             <a:r>
               <a:rPr lang="ja-JP" altLang="en-US" sz="2800" dirty="0"/>
-              <a:t>設計👷↓↓↓</a:t>
+              <a:t>設計🧑‍💻↓↓↓</a:t>
             </a:r>
             <a:br>
               <a:rPr lang="en-US" altLang="ja-JP" sz="2800" dirty="0"/>
@@ -6445,83 +6450,101 @@
           <a:lstStyle/>
           <a:p>
             <a:r>
+              <a:rPr kumimoji="1" lang="ja-JP" altLang="en-US" sz="1800" b="1" dirty="0"/>
+              <a:t>事例1: ドキュメントパイプライン</a:t>
+            </a:r>
+          </a:p>
+          <a:p>
+            <a:pPr lvl="1"/>
+            <a:r>
+              <a:rPr kumimoji="1" lang="ja-JP" altLang="en-US" sz="1800" dirty="0"/>
+              <a:t>Git 上の Markdown（193ファイル）↔ 社内 Wiki（GROWI）の同期システム</a:t>
+            </a:r>
+          </a:p>
+          <a:p>
+            <a:pPr lvl="1"/>
+            <a:r>
+              <a:rPr kumimoji="1" lang="ja-JP" altLang="en-US" sz="1800" dirty="0"/>
+              <a:t>「</a:t>
+            </a:r>
+            <a:r>
+              <a:rPr lang="ja-JP" altLang="en-US" sz="1800" dirty="0"/>
+              <a:t>作業の進め方」「成果物の作り方」</a:t>
+            </a:r>
+            <a:r>
+              <a:rPr kumimoji="1" lang="ja-JP" altLang="en-US" sz="1800" dirty="0"/>
+              <a:t>を設計した</a:t>
+            </a:r>
+          </a:p>
+          <a:p>
+            <a:endParaRPr lang="ja-JP" altLang="en-US" sz="1800" dirty="0"/>
+          </a:p>
+          <a:p>
+            <a:r>
+              <a:rPr kumimoji="1" lang="ja-JP" altLang="en-US" sz="1800" b="1" dirty="0"/>
+              <a:t>事例2: AIレビューワークフロー</a:t>
+            </a:r>
+          </a:p>
+          <a:p>
+            <a:pPr lvl="1"/>
+            <a:r>
+              <a:rPr kumimoji="1" lang="ja-JP" altLang="en-US" sz="1800" dirty="0"/>
+              <a:t>Claude Code スキル/エージェント </a:t>
+            </a:r>
+            <a:r>
+              <a:rPr lang="ja-JP" altLang="en-US" sz="1800" dirty="0"/>
+              <a:t>↔</a:t>
+            </a:r>
+            <a:r>
+              <a:rPr kumimoji="1" lang="ja-JP" altLang="en-US" sz="1800" dirty="0"/>
+              <a:t>構造化レビュー ↔GitHub PR</a:t>
+            </a:r>
+          </a:p>
+          <a:p>
+            <a:pPr lvl="1"/>
+            <a:r>
               <a:rPr kumimoji="1" lang="ja-JP" altLang="en-US" sz="1600" dirty="0"/>
-              <a:t>品質管理クラウドチームで AIエージェントを活用して作った</a:t>
-            </a:r>
+              <a:t>「人間・</a:t>
+            </a:r>
+            <a:r>
+              <a:rPr kumimoji="1" lang="en-US" altLang="ja-JP" sz="1600" dirty="0"/>
+              <a:t>AI</a:t>
+            </a:r>
+            <a:r>
+              <a:rPr kumimoji="1" lang="ja-JP" altLang="en-US" sz="1600" dirty="0"/>
+              <a:t>・ツールの役割分担」「判断力を持続可能にする仕組み」を設計した</a:t>
+            </a:r>
+          </a:p>
+          <a:p>
             <a:endParaRPr lang="ja-JP" altLang="en-US" dirty="0"/>
           </a:p>
           <a:p>
             <a:r>
-              <a:rPr kumimoji="1" lang="ja-JP" altLang="en-US" sz="1600" b="1" dirty="0"/>
-              <a:t>事例1: ドキュメントパイプライン</a:t>
-            </a:r>
-          </a:p>
-          <a:p>
-            <a:pPr lvl="1"/>
-            <a:r>
-              <a:rPr kumimoji="1" lang="ja-JP" altLang="en-US" sz="1600" dirty="0"/>
-              <a:t>Git 上の Markdown（193ファイル）↔ 自動同期 ↔ 社内 Wiki（GROWI）</a:t>
-            </a:r>
-          </a:p>
-          <a:p>
-            <a:pPr lvl="1"/>
-            <a:r>
-              <a:rPr kumimoji="1" lang="ja-JP" altLang="en-US" sz="1600" dirty="0"/>
-              <a:t>「成果物の作り方」を設計した</a:t>
-            </a:r>
-          </a:p>
-          <a:p>
-            <a:endParaRPr lang="ja-JP" altLang="en-US" dirty="0"/>
-          </a:p>
-          <a:p>
-            <a:r>
-              <a:rPr kumimoji="1" lang="ja-JP" altLang="en-US" sz="1600" b="1" dirty="0"/>
-              <a:t>事例2: AIレビューワークフロー</a:t>
-            </a:r>
-          </a:p>
-          <a:p>
-            <a:pPr lvl="1"/>
-            <a:r>
-              <a:rPr kumimoji="1" lang="ja-JP" altLang="en-US" sz="1600" dirty="0"/>
-              <a:t>Claude Code スキル/エージェント </a:t>
-            </a:r>
-            <a:r>
-              <a:rPr lang="ja-JP" altLang="en-US" sz="1600" dirty="0"/>
-              <a:t>↔</a:t>
-            </a:r>
-            <a:r>
-              <a:rPr kumimoji="1" lang="ja-JP" altLang="en-US" sz="1600" dirty="0"/>
-              <a:t>構造化レビュー ↔GitHub PR</a:t>
-            </a:r>
-          </a:p>
-          <a:p>
-            <a:pPr lvl="1"/>
-            <a:r>
-              <a:rPr kumimoji="1" lang="ja-JP" altLang="en-US" sz="1600" dirty="0"/>
-              <a:t>「判断の仕方」を構造化し、育てる</a:t>
-            </a:r>
-          </a:p>
-          <a:p>
-            <a:pPr lvl="1"/>
-            <a:r>
-              <a:rPr kumimoji="1" lang="ja-JP" altLang="en-US" sz="1500" dirty="0"/>
-              <a:t>目の前の PR を判断しつつ、判断力そのものも育てたい</a:t>
-            </a:r>
-          </a:p>
-          <a:p>
-            <a:endParaRPr lang="ja-JP" altLang="en-US" dirty="0"/>
-          </a:p>
-          <a:p>
-            <a:r>
-              <a:rPr kumimoji="1" lang="ja-JP" altLang="en-US" sz="1600" b="1" dirty="0"/>
+              <a:rPr kumimoji="1" lang="ja-JP" altLang="en-US" sz="2000" b="1" dirty="0"/>
               <a:t>共通パターン:</a:t>
             </a:r>
           </a:p>
           <a:p>
             <a:pPr lvl="1"/>
             <a:r>
-              <a:rPr kumimoji="1" lang="ja-JP" altLang="en-US" sz="1600" dirty="0"/>
-              <a:t>人間が判断の枠組みを作り、AI が演算を担う</a:t>
+              <a:rPr kumimoji="1" lang="ja-JP" altLang="en-US" sz="2000" dirty="0"/>
+              <a:t>人間</a:t>
+            </a:r>
+            <a:r>
+              <a:rPr lang="ja-JP" altLang="en-US" sz="2000" dirty="0"/>
+              <a:t>🧑‍💻</a:t>
+            </a:r>
+            <a:r>
+              <a:rPr kumimoji="1" lang="ja-JP" altLang="en-US" sz="2000" dirty="0"/>
+              <a:t>が判断の枠組みを作り、AI</a:t>
+            </a:r>
+            <a:r>
+              <a:rPr lang="ja-JP" altLang="en-US" sz="2000" dirty="0"/>
+              <a:t>🤖</a:t>
+            </a:r>
+            <a:r>
+              <a:rPr kumimoji="1" lang="ja-JP" altLang="en-US" sz="2000" dirty="0"/>
+              <a:t>が演算を担う</a:t>
             </a:r>
           </a:p>
         </p:txBody>

--- a/TechMeeting202604/techmeeting20260406.pptx
+++ b/TechMeeting202604/techmeeting20260406.pptx
@@ -5,35 +5,40 @@
     <p:sldMasterId id="2147483660" r:id="rId1"/>
   </p:sldMasterIdLst>
   <p:notesMasterIdLst>
-    <p:notesMasterId r:id="rId25"/>
+    <p:notesMasterId r:id="rId30"/>
   </p:notesMasterIdLst>
   <p:handoutMasterIdLst>
-    <p:handoutMasterId r:id="rId26"/>
+    <p:handoutMasterId r:id="rId31"/>
   </p:handoutMasterIdLst>
   <p:sldIdLst>
     <p:sldId id="318" r:id="rId2"/>
     <p:sldId id="281" r:id="rId3"/>
     <p:sldId id="322" r:id="rId4"/>
-    <p:sldId id="337" r:id="rId5"/>
-    <p:sldId id="312" r:id="rId6"/>
-    <p:sldId id="338" r:id="rId7"/>
-    <p:sldId id="319" r:id="rId8"/>
-    <p:sldId id="321" r:id="rId9"/>
-    <p:sldId id="320" r:id="rId10"/>
-    <p:sldId id="324" r:id="rId11"/>
-    <p:sldId id="325" r:id="rId12"/>
-    <p:sldId id="323" r:id="rId13"/>
-    <p:sldId id="326" r:id="rId14"/>
+    <p:sldId id="312" r:id="rId5"/>
+    <p:sldId id="338" r:id="rId6"/>
+    <p:sldId id="319" r:id="rId7"/>
+    <p:sldId id="321" r:id="rId8"/>
+    <p:sldId id="320" r:id="rId9"/>
+    <p:sldId id="324" r:id="rId10"/>
+    <p:sldId id="325" r:id="rId11"/>
+    <p:sldId id="340" r:id="rId12"/>
+    <p:sldId id="326" r:id="rId13"/>
+    <p:sldId id="323" r:id="rId14"/>
     <p:sldId id="327" r:id="rId15"/>
     <p:sldId id="328" r:id="rId16"/>
     <p:sldId id="329" r:id="rId17"/>
     <p:sldId id="330" r:id="rId18"/>
     <p:sldId id="331" r:id="rId19"/>
     <p:sldId id="332" r:id="rId20"/>
-    <p:sldId id="333" r:id="rId21"/>
-    <p:sldId id="336" r:id="rId22"/>
-    <p:sldId id="334" r:id="rId23"/>
-    <p:sldId id="335" r:id="rId24"/>
+    <p:sldId id="343" r:id="rId21"/>
+    <p:sldId id="342" r:id="rId22"/>
+    <p:sldId id="333" r:id="rId23"/>
+    <p:sldId id="337" r:id="rId24"/>
+    <p:sldId id="339" r:id="rId25"/>
+    <p:sldId id="334" r:id="rId26"/>
+    <p:sldId id="341" r:id="rId27"/>
+    <p:sldId id="335" r:id="rId28"/>
+    <p:sldId id="336" r:id="rId29"/>
   </p:sldIdLst>
   <p:sldSz cx="9906000" cy="6858000" type="A4"/>
   <p:notesSz cx="6735763" cy="9866313"/>
@@ -3713,46 +3718,70 @@
           <a:p>
             <a:r>
               <a:rPr kumimoji="1" lang="ja-JP" altLang="en-US" sz="1600" dirty="0"/>
-              <a:t>Claude Code で構築した統合 CLI ツール（TypeScript）</a:t>
-            </a:r>
-          </a:p>
-          <a:p>
+              <a:t>PR 作成</a:t>
+            </a:r>
+          </a:p>
+          <a:p>
+            <a:pPr lvl="1"/>
+            <a:r>
+              <a:rPr kumimoji="1" lang="ja-JP" altLang="en-US" sz="1600" dirty="0"/>
+              <a:t>→ docs-validate.yml</a:t>
+            </a:r>
+          </a:p>
+          <a:p>
+            <a:pPr lvl="2"/>
+            <a:r>
+              <a:rPr kumimoji="1" lang="ja-JP" altLang="en-US" sz="1600" dirty="0"/>
+              <a:t>TypeScript 型チェック（tsc --noEmit）</a:t>
+            </a:r>
+          </a:p>
+          <a:p>
+            <a:pPr lvl="2"/>
+            <a:r>
+              <a:rPr kumimoji="1" lang="ja-JP" altLang="en-US" sz="1600" dirty="0"/>
+              <a:t>frontmatter / パス整合性チェック（docs:check）</a:t>
+            </a:r>
             <a:endParaRPr lang="ja-JP" altLang="en-US" dirty="0"/>
           </a:p>
           <a:p>
             <a:r>
               <a:rPr kumimoji="1" lang="ja-JP" altLang="en-US" sz="1600" dirty="0"/>
-              <a:t>docs:check        frontmatter 検証・パス重複チェック</a:t>
-            </a:r>
-          </a:p>
-          <a:p>
+              <a:t>release ブランチへマージ</a:t>
+            </a:r>
+          </a:p>
+          <a:p>
+            <a:pPr lvl="1"/>
             <a:r>
               <a:rPr kumimoji="1" lang="ja-JP" altLang="en-US" sz="1600" dirty="0"/>
-              <a:t>docs:publish      Git → GROWI 同期（単体 / 一括 / dry-run）</a:t>
-            </a:r>
-          </a:p>
-          <a:p>
+              <a:t>→ sync-to-growi.yml</a:t>
+            </a:r>
+          </a:p>
+          <a:p>
+            <a:pPr lvl="2"/>
             <a:r>
               <a:rPr kumimoji="1" lang="ja-JP" altLang="en-US" sz="1600" dirty="0"/>
-              <a:t>docs:import:page  GROWI → Git 取り込み（画像を Blob に自動移行）</a:t>
-            </a:r>
-          </a:p>
-          <a:p>
+              <a:t>git diff で変更 Markdown を検出</a:t>
+            </a:r>
+          </a:p>
+          <a:p>
+            <a:pPr lvl="2"/>
             <a:r>
               <a:rPr kumimoji="1" lang="ja-JP" altLang="en-US" sz="1600" dirty="0"/>
-              <a:t>docs:import:tree  GROWI ツリー一括取り込み</a:t>
-            </a:r>
-          </a:p>
-          <a:p>
+              <a:t>growi_path の変更を検知 → 事故防止（fail）</a:t>
+            </a:r>
+          </a:p>
+          <a:p>
+            <a:pPr lvl="2"/>
             <a:r>
               <a:rPr kumimoji="1" lang="ja-JP" altLang="en-US" sz="1600" dirty="0"/>
-              <a:t>docs:image:paste  クリップボード画像 → Azure Blob → Markdown リンク</a:t>
-            </a:r>
-          </a:p>
-          <a:p>
+              <a:t>変更ファイルのみを GROWI に publish</a:t>
+            </a:r>
+          </a:p>
+          <a:p>
+            <a:pPr lvl="2"/>
             <a:r>
               <a:rPr kumimoji="1" lang="ja-JP" altLang="en-US" sz="1600" dirty="0"/>
-              <a:t>docs:image:upload ローカル画像ファイル → Azure Blob</a:t>
+              <a:t>変更なしなら zero-diff skip</a:t>
             </a:r>
           </a:p>
           <a:p>
@@ -3761,13 +3790,7 @@
           <a:p>
             <a:r>
               <a:rPr kumimoji="1" lang="ja-JP" altLang="en-US" sz="1600" dirty="0"/>
-              <a:t>各 Markdown に frontmatter でメタデータを持たせる（設定ファイル不要）</a:t>
-            </a:r>
-          </a:p>
-          <a:p>
-            <a:r>
-              <a:rPr kumimoji="1" lang="ja-JP" altLang="en-US" sz="1600" dirty="0"/>
-              <a:t>画像貼り付けは VSCode ショートカット（Ctrl+Alt+V）で完結</a:t>
+              <a:t>冪等な設計: 再実行しても安全</a:t>
             </a:r>
           </a:p>
         </p:txBody>
@@ -3789,7 +3812,7 @@
           <a:p>
             <a:r>
               <a:rPr kumimoji="1" lang="ja-JP" altLang="en-US" dirty="0"/>
-              <a:t>演算（Reckoning）— growi-docs CLI</a:t>
+              <a:t>演算（Reckoning）— 自動同期パイプライン</a:t>
             </a:r>
           </a:p>
         </p:txBody>
@@ -3807,7 +3830,13 @@
   <p:cSld>
     <p:spTree>
       <p:nvGrpSpPr>
-        <p:cNvPr id="1" name=""/>
+        <p:cNvPr id="1" name="">
+          <a:extLst>
+            <a:ext uri="{FF2B5EF4-FFF2-40B4-BE49-F238E27FC236}">
+              <a16:creationId xmlns:a16="http://schemas.microsoft.com/office/drawing/2014/main" id="{D7C9E254-E99D-BA44-F8C7-33C2A2D7A941}"/>
+            </a:ext>
+          </a:extLst>
+        </p:cNvPr>
         <p:cNvGrpSpPr/>
         <p:nvPr/>
       </p:nvGrpSpPr>
@@ -3821,7 +3850,13 @@
       </p:grpSpPr>
       <p:sp>
         <p:nvSpPr>
-          <p:cNvPr id="2" name="コンテンツ プレースホルダー 1"/>
+          <p:cNvPr id="2" name="コンテンツ プレースホルダー 1">
+            <a:extLst>
+              <a:ext uri="{FF2B5EF4-FFF2-40B4-BE49-F238E27FC236}">
+                <a16:creationId xmlns:a16="http://schemas.microsoft.com/office/drawing/2014/main" id="{372BF3A8-DCA0-5EF4-0CB8-F05EC084BE67}"/>
+              </a:ext>
+            </a:extLst>
+          </p:cNvPr>
           <p:cNvSpPr>
             <a:spLocks noGrp="1"/>
           </p:cNvSpPr>
@@ -3837,87 +3872,159 @@
           <a:lstStyle/>
           <a:p>
             <a:r>
-              <a:rPr kumimoji="1" lang="ja-JP" altLang="en-US" sz="1600" dirty="0"/>
-              <a:t>PR 作成</a:t>
-            </a:r>
-          </a:p>
-          <a:p>
-            <a:pPr lvl="1"/>
-            <a:r>
-              <a:rPr kumimoji="1" lang="ja-JP" altLang="en-US" sz="1600" dirty="0"/>
-              <a:t>→ docs-validate.yml</a:t>
-            </a:r>
-          </a:p>
-          <a:p>
-            <a:pPr lvl="2"/>
-            <a:r>
-              <a:rPr kumimoji="1" lang="ja-JP" altLang="en-US" sz="1600" dirty="0"/>
-              <a:t>TypeScript 型チェック（tsc --noEmit）</a:t>
-            </a:r>
-          </a:p>
-          <a:p>
-            <a:pPr lvl="2"/>
-            <a:r>
-              <a:rPr kumimoji="1" lang="ja-JP" altLang="en-US" sz="1600" dirty="0"/>
-              <a:t>frontmatter / パス整合性チェック（docs:check）</a:t>
-            </a:r>
-            <a:endParaRPr lang="ja-JP" altLang="en-US" dirty="0"/>
-          </a:p>
-          <a:p>
-            <a:r>
-              <a:rPr kumimoji="1" lang="ja-JP" altLang="en-US" sz="1600" dirty="0"/>
-              <a:t>release ブランチへマージ</a:t>
-            </a:r>
-          </a:p>
-          <a:p>
-            <a:pPr lvl="1"/>
-            <a:r>
-              <a:rPr kumimoji="1" lang="ja-JP" altLang="en-US" sz="1600" dirty="0"/>
-              <a:t>→ sync-to-growi.yml</a:t>
-            </a:r>
-          </a:p>
-          <a:p>
-            <a:pPr lvl="2"/>
-            <a:r>
-              <a:rPr kumimoji="1" lang="ja-JP" altLang="en-US" sz="1600" dirty="0"/>
-              <a:t>git diff で変更 Markdown を検出</a:t>
-            </a:r>
-          </a:p>
-          <a:p>
-            <a:pPr lvl="2"/>
-            <a:r>
-              <a:rPr kumimoji="1" lang="ja-JP" altLang="en-US" sz="1600" dirty="0"/>
-              <a:t>growi_path の変更を検知 → 事故防止（fail）</a:t>
-            </a:r>
-          </a:p>
-          <a:p>
-            <a:pPr lvl="2"/>
-            <a:r>
-              <a:rPr kumimoji="1" lang="ja-JP" altLang="en-US" sz="1600" dirty="0"/>
-              <a:t>変更ファイルのみを GROWI に publish</a:t>
-            </a:r>
-          </a:p>
-          <a:p>
-            <a:pPr lvl="2"/>
-            <a:r>
-              <a:rPr kumimoji="1" lang="ja-JP" altLang="en-US" sz="1600" dirty="0"/>
-              <a:t>変更なしなら zero-diff skip</a:t>
-            </a:r>
-          </a:p>
-          <a:p>
-            <a:endParaRPr lang="ja-JP" altLang="en-US" dirty="0"/>
-          </a:p>
-          <a:p>
-            <a:r>
-              <a:rPr kumimoji="1" lang="ja-JP" altLang="en-US" sz="1600" dirty="0"/>
-              <a:t>冪等な設計: 再実行しても安全</a:t>
-            </a:r>
-          </a:p>
-        </p:txBody>
-      </p:sp>
-      <p:sp>
-        <p:nvSpPr>
-          <p:cNvPr id="3" name="タイトル 2"/>
+              <a:rPr lang="ja-JP" altLang="en-US" sz="1800" b="1" dirty="0"/>
+              <a:t>制約:</a:t>
+            </a:r>
+            <a:endParaRPr kumimoji="1" lang="en-US" altLang="ja-JP" sz="1800" dirty="0"/>
+          </a:p>
+          <a:p>
+            <a:pPr lvl="1"/>
+            <a:r>
+              <a:rPr kumimoji="1" lang="ja-JP" altLang="en-US" sz="1800" dirty="0"/>
+              <a:t>GROWI </a:t>
+            </a:r>
+            <a:r>
+              <a:rPr lang="ja-JP" altLang="en-US" sz="1800" dirty="0"/>
+              <a:t>は </a:t>
+            </a:r>
+            <a:r>
+              <a:rPr kumimoji="1" lang="ja-JP" altLang="en-US" sz="1800" dirty="0"/>
+              <a:t>社内 </a:t>
+            </a:r>
+            <a:r>
+              <a:rPr lang="ja-JP" altLang="en-US" sz="1800" dirty="0"/>
+              <a:t>ネットワークからしかアクセス不可</a:t>
+            </a:r>
+            <a:r>
+              <a:rPr kumimoji="1" lang="ja-JP" altLang="en-US" sz="1800" dirty="0"/>
+              <a:t>       </a:t>
+            </a:r>
+            <a:br>
+              <a:rPr kumimoji="1" lang="en-US" altLang="ja-JP" sz="1800" dirty="0"/>
+            </a:br>
+            <a:r>
+              <a:rPr lang="ja-JP" altLang="en-US" sz="1800" dirty="0"/>
+              <a:t>🧑‍💻</a:t>
+            </a:r>
+            <a:r>
+              <a:rPr kumimoji="1" lang="ja-JP" altLang="en-US" sz="1800" dirty="0"/>
+              <a:t>判断 → selfhost ランナー</a:t>
+            </a:r>
+          </a:p>
+          <a:p>
+            <a:pPr lvl="1"/>
+            <a:r>
+              <a:rPr kumimoji="1" lang="ja-JP" altLang="en-US" sz="1800" dirty="0"/>
+              <a:t>Git 画像でリポジトリが重い   </a:t>
+            </a:r>
+            <a:br>
+              <a:rPr kumimoji="1" lang="en-US" altLang="ja-JP" sz="1800" dirty="0"/>
+            </a:br>
+            <a:r>
+              <a:rPr lang="ja-JP" altLang="en-US" sz="1800" dirty="0"/>
+              <a:t>🧑‍💻</a:t>
+            </a:r>
+            <a:r>
+              <a:rPr kumimoji="1" lang="ja-JP" altLang="en-US" sz="1800" dirty="0"/>
+              <a:t>判断 → Azure Blob ストレージに保存してリンクを張る</a:t>
+            </a:r>
+          </a:p>
+          <a:p>
+            <a:pPr lvl="1"/>
+            <a:r>
+              <a:rPr kumimoji="1" lang="ja-JP" altLang="en-US" sz="1800" dirty="0"/>
+              <a:t>Blob に格納する手順が面倒   </a:t>
+            </a:r>
+            <a:br>
+              <a:rPr kumimoji="1" lang="en-US" altLang="ja-JP" sz="1800" dirty="0"/>
+            </a:br>
+            <a:r>
+              <a:rPr lang="ja-JP" altLang="en-US" sz="1800" dirty="0"/>
+              <a:t>🧑‍💻</a:t>
+            </a:r>
+            <a:r>
+              <a:rPr kumimoji="1" lang="ja-JP" altLang="en-US" sz="1800" dirty="0"/>
+              <a:t>判断 → CLI スクリプト + ショートカットで実行</a:t>
+            </a:r>
+            <a:endParaRPr kumimoji="1" lang="en-US" altLang="ja-JP" sz="1800" dirty="0"/>
+          </a:p>
+          <a:p>
+            <a:pPr lvl="1"/>
+            <a:r>
+              <a:rPr lang="ja-JP" altLang="en-US" sz="1800" dirty="0"/>
+              <a:t>品質管理部の方が</a:t>
+            </a:r>
+            <a:r>
+              <a:rPr lang="en-US" altLang="ja-JP" sz="1800" dirty="0"/>
+              <a:t>Wiki</a:t>
+            </a:r>
+            <a:r>
+              <a:rPr lang="ja-JP" altLang="en-US" sz="1800" dirty="0"/>
+              <a:t>編集したい場合は？ </a:t>
+            </a:r>
+            <a:br>
+              <a:rPr lang="en-US" altLang="ja-JP" sz="1800" dirty="0"/>
+            </a:br>
+            <a:r>
+              <a:rPr lang="ja-JP" altLang="en-US" sz="1800" dirty="0"/>
+              <a:t>🧑‍💻判断 → </a:t>
+            </a:r>
+            <a:r>
+              <a:rPr lang="en-US" altLang="ja-JP" sz="1800" dirty="0" err="1"/>
+              <a:t>Growi</a:t>
+            </a:r>
+            <a:r>
+              <a:rPr lang="ja-JP" altLang="en-US" sz="1800" dirty="0"/>
+              <a:t>からリポジトリへのの取り込み機能</a:t>
+            </a:r>
+            <a:endParaRPr lang="en-US" altLang="ja-JP" sz="1800" dirty="0"/>
+          </a:p>
+          <a:p>
+            <a:pPr marL="257173" lvl="1" indent="0">
+              <a:buNone/>
+            </a:pPr>
+            <a:endParaRPr lang="en-US" altLang="ja-JP" sz="1800" dirty="0"/>
+          </a:p>
+          <a:p>
+            <a:pPr marL="257173" lvl="1" indent="0">
+              <a:buNone/>
+            </a:pPr>
+            <a:r>
+              <a:rPr lang="ja-JP" altLang="en-US" sz="1800" dirty="0"/>
+              <a:t>決めてしまえば、</a:t>
+            </a:r>
+            <a:r>
+              <a:rPr lang="en-US" altLang="ja-JP" sz="1800" dirty="0"/>
+              <a:t>AI</a:t>
+            </a:r>
+            <a:r>
+              <a:rPr lang="ja-JP" altLang="en-US" sz="1800" dirty="0"/>
+              <a:t>🤖がサクッと実装してくれる</a:t>
+            </a:r>
+            <a:r>
+              <a:rPr lang="en-US" altLang="ja-JP" sz="1800" dirty="0"/>
+              <a:t>(</a:t>
+            </a:r>
+            <a:r>
+              <a:rPr lang="ja-JP" altLang="en-US" sz="1800" dirty="0"/>
+              <a:t>演算）</a:t>
+            </a:r>
+            <a:br>
+              <a:rPr lang="en-US" altLang="ja-JP" sz="1600" dirty="0"/>
+            </a:br>
+            <a:endParaRPr kumimoji="1" lang="en-US" altLang="ja-JP" sz="1600" dirty="0"/>
+          </a:p>
+        </p:txBody>
+      </p:sp>
+      <p:sp>
+        <p:nvSpPr>
+          <p:cNvPr id="3" name="タイトル 2">
+            <a:extLst>
+              <a:ext uri="{FF2B5EF4-FFF2-40B4-BE49-F238E27FC236}">
+                <a16:creationId xmlns:a16="http://schemas.microsoft.com/office/drawing/2014/main" id="{E288EF09-2924-4D6D-BD7E-6B7213BCE29A}"/>
+              </a:ext>
+            </a:extLst>
+          </p:cNvPr>
           <p:cNvSpPr>
             <a:spLocks noGrp="1"/>
           </p:cNvSpPr>
@@ -3932,12 +4039,17 @@
           <a:p>
             <a:r>
               <a:rPr kumimoji="1" lang="ja-JP" altLang="en-US" dirty="0"/>
-              <a:t>演算（Reckoning）— 自動同期パイプライン</a:t>
+              <a:t>制約：何を気にする必要があったか</a:t>
             </a:r>
           </a:p>
         </p:txBody>
       </p:sp>
     </p:spTree>
+    <p:extLst>
+      <p:ext uri="{BB962C8B-B14F-4D97-AF65-F5344CB8AC3E}">
+        <p14:creationId xmlns:p14="http://schemas.microsoft.com/office/powerpoint/2010/main" val="33621053"/>
+      </p:ext>
+    </p:extLst>
   </p:cSld>
   <p:clrMapOvr>
     <a:masterClrMapping/>
@@ -3972,76 +4084,159 @@
             <p:ph idx="1"/>
           </p:nvPr>
         </p:nvSpPr>
-        <p:spPr/>
+        <p:spPr>
+          <a:xfrm>
+            <a:off x="308484" y="1282427"/>
+            <a:ext cx="8892666" cy="4894536"/>
+          </a:xfrm>
+        </p:spPr>
         <p:txBody>
           <a:bodyPr>
             <a:normAutofit/>
           </a:bodyPr>
           <a:lstStyle/>
           <a:p>
-            <a:r>
-              <a:rPr kumimoji="1" lang="ja-JP" altLang="en-US" sz="1600" b="1" dirty="0"/>
-              <a:t>問い: Wiki をローカル（Git）で管理すれば何が可能になるか？</a:t>
-            </a:r>
-            <a:endParaRPr lang="ja-JP" altLang="en-US" dirty="0"/>
-          </a:p>
-          <a:p>
-            <a:pPr lvl="1"/>
-            <a:r>
-              <a:rPr kumimoji="1" lang="ja-JP" altLang="en-US" sz="1600" dirty="0"/>
-              <a:t>コーディングエージェントはローカル情報に最も効率よくアクセスできる</a:t>
-            </a:r>
-          </a:p>
-          <a:p>
-            <a:pPr lvl="1"/>
-            <a:r>
-              <a:rPr kumimoji="1" lang="ja-JP" altLang="en-US" sz="1600" dirty="0"/>
-              <a:t>Wiki を読んで既存仕様との整合性チェックができる</a:t>
-            </a:r>
-          </a:p>
-          <a:p>
-            <a:pPr lvl="1"/>
-            <a:r>
-              <a:rPr kumimoji="1" lang="ja-JP" altLang="en-US" sz="1600" dirty="0"/>
-              <a:t>Git 管理にすれば GitHub Actions に組み込める</a:t>
-            </a:r>
+            <a:pPr lvl="1"/>
+            <a:r>
+              <a:rPr lang="ja-JP" altLang="en-US" sz="1600" b="1" dirty="0"/>
+              <a:t>チームの作業フローを決定</a:t>
+            </a:r>
+            <a:r>
+              <a:rPr lang="ja-JP" altLang="en-US" sz="1600" dirty="0"/>
+              <a:t>する</a:t>
+            </a:r>
+            <a:endParaRPr lang="en-US" altLang="ja-JP" sz="1600" dirty="0"/>
+          </a:p>
+          <a:p>
+            <a:pPr lvl="1"/>
+            <a:r>
+              <a:rPr lang="ja-JP" altLang="en-US" sz="1600" dirty="0"/>
+              <a:t>必要なツール作成の</a:t>
+            </a:r>
+            <a:r>
+              <a:rPr lang="ja-JP" altLang="en-US" sz="1600" b="1" dirty="0"/>
+              <a:t>指示</a:t>
+            </a:r>
+            <a:r>
+              <a:rPr lang="ja-JP" altLang="en-US" sz="1600" dirty="0"/>
+              <a:t>を出す</a:t>
+            </a:r>
+            <a:endParaRPr lang="en-US" altLang="ja-JP" sz="1600" dirty="0"/>
+          </a:p>
+          <a:p>
+            <a:pPr marL="257173" lvl="1" indent="0" algn="ctr">
+              <a:buNone/>
+            </a:pPr>
+            <a:endParaRPr lang="en-US" altLang="ja-JP" sz="1600" dirty="0"/>
+          </a:p>
+          <a:p>
+            <a:pPr marL="257173" lvl="1" indent="0" algn="ctr">
+              <a:buNone/>
+            </a:pPr>
+            <a:endParaRPr lang="en-US" altLang="ja-JP" sz="1600" dirty="0"/>
+          </a:p>
+          <a:p>
+            <a:pPr marL="257173" lvl="1" indent="0">
+              <a:buNone/>
+            </a:pPr>
+            <a:r>
+              <a:rPr lang="ja-JP" altLang="en-US" sz="2000" dirty="0"/>
+              <a:t>　　</a:t>
+            </a:r>
+            <a:r>
+              <a:rPr lang="ja-JP" altLang="en-US" sz="2600" dirty="0"/>
+              <a:t>設計🧑‍💻　　　　   設計🧑‍💻　　     　　   　設計🧑‍💻</a:t>
+            </a:r>
+            <a:br>
+              <a:rPr lang="en-US" altLang="ja-JP" sz="2600" dirty="0"/>
+            </a:br>
+            <a:r>
+              <a:rPr lang="ja-JP" altLang="en-US" sz="2000" dirty="0"/>
+              <a:t>　　 ↓ </a:t>
+            </a:r>
+            <a:r>
+              <a:rPr lang="ja-JP" altLang="en-US" sz="1700" dirty="0"/>
+              <a:t>フローを決める</a:t>
+            </a:r>
+            <a:r>
+              <a:rPr lang="ja-JP" altLang="en-US" sz="2000" dirty="0"/>
+              <a:t>　        ↓指示 　　　　　　　　         ↓指示</a:t>
+            </a:r>
+            <a:endParaRPr lang="en-US" altLang="ja-JP" sz="2000" dirty="0"/>
+          </a:p>
+          <a:p>
+            <a:pPr marL="257173" lvl="1" indent="0">
+              <a:buNone/>
+            </a:pPr>
+            <a:r>
+              <a:rPr lang="ja-JP" altLang="en-US" sz="2000" dirty="0"/>
+              <a:t>　　 ↓　　　　　　            ↓</a:t>
+            </a:r>
+            <a:r>
+              <a:rPr lang="ja-JP" altLang="en-US" sz="1400" dirty="0"/>
+              <a:t>ツールを作成</a:t>
+            </a:r>
+            <a:r>
+              <a:rPr lang="ja-JP" altLang="en-US" sz="1800" dirty="0"/>
+              <a:t>🤖</a:t>
+            </a:r>
+            <a:r>
+              <a:rPr lang="ja-JP" altLang="en-US" sz="1200" dirty="0"/>
+              <a:t>　　　　　　　　</a:t>
+            </a:r>
+            <a:r>
+              <a:rPr lang="ja-JP" altLang="en-US" sz="1900" dirty="0"/>
+              <a:t>          ↓</a:t>
+            </a:r>
+            <a:r>
+              <a:rPr lang="ja-JP" altLang="en-US" sz="1300" dirty="0"/>
+              <a:t>ツールを作成</a:t>
+            </a:r>
+            <a:r>
+              <a:rPr lang="ja-JP" altLang="en-US" sz="1700" dirty="0"/>
+              <a:t>🤖</a:t>
+            </a:r>
+            <a:endParaRPr lang="en-US" altLang="ja-JP" sz="2000" dirty="0"/>
+          </a:p>
+          <a:p>
+            <a:pPr marL="257173" lvl="1" indent="0">
+              <a:buNone/>
+            </a:pPr>
+            <a:r>
+              <a:rPr lang="ja-JP" altLang="en-US" sz="2000" dirty="0"/>
+              <a:t>「</a:t>
+            </a:r>
+            <a:r>
+              <a:rPr lang="ja-JP" altLang="en-US" sz="2400" dirty="0"/>
+              <a:t>🧑‍💻</a:t>
+            </a:r>
+            <a:r>
+              <a:rPr lang="ja-JP" altLang="en-US" sz="1600" dirty="0"/>
+              <a:t>このページを取込みたい→ 取り込み💻→</a:t>
+            </a:r>
+            <a:r>
+              <a:rPr lang="ja-JP" altLang="en-US" sz="2400" dirty="0"/>
+              <a:t>🧑‍💻</a:t>
+            </a:r>
+            <a:r>
+              <a:rPr lang="ja-JP" altLang="en-US" sz="1600" dirty="0"/>
+              <a:t>変更してプッシュ →</a:t>
+            </a:r>
+            <a:r>
+              <a:rPr lang="en-US" altLang="ja-JP" sz="1600" dirty="0" err="1"/>
+              <a:t>Growi</a:t>
+            </a:r>
+            <a:r>
+              <a:rPr lang="ja-JP" altLang="en-US" sz="1600" dirty="0"/>
+              <a:t>同期💻」</a:t>
+            </a:r>
+            <a:endParaRPr lang="en-US" altLang="ja-JP" sz="1600" dirty="0"/>
+          </a:p>
+          <a:p>
+            <a:pPr marL="257173" lvl="1" indent="0">
+              <a:buNone/>
+            </a:pPr>
             <a:endParaRPr kumimoji="1" lang="en-US" altLang="ja-JP" sz="1600" dirty="0"/>
-          </a:p>
-          <a:p>
-            <a:pPr lvl="1"/>
-            <a:endParaRPr lang="en-US" altLang="ja-JP" sz="1600" dirty="0"/>
-          </a:p>
-          <a:p>
-            <a:pPr lvl="1"/>
-            <a:endParaRPr kumimoji="1" lang="ja-JP" altLang="en-US" sz="1600" dirty="0"/>
-          </a:p>
-          <a:p>
-            <a:r>
-              <a:rPr lang="ja-JP" altLang="en-US" b="1" dirty="0"/>
-              <a:t>問い:</a:t>
-            </a:r>
-            <a:endParaRPr lang="ja-JP" altLang="en-US" dirty="0"/>
-          </a:p>
-          <a:p>
-            <a:pPr lvl="1"/>
-            <a:r>
-              <a:rPr kumimoji="1" lang="ja-JP" altLang="en-US" sz="1600" dirty="0"/>
-              <a:t>GROWI が社内 NW のみ       → selfhost ランナーで解決</a:t>
-            </a:r>
-          </a:p>
-          <a:p>
-            <a:pPr lvl="1"/>
-            <a:r>
-              <a:rPr kumimoji="1" lang="ja-JP" altLang="en-US" sz="1600" dirty="0"/>
-              <a:t>Git 画像でリポジトリが重い   → Azure Blob ストレージ</a:t>
-            </a:r>
-          </a:p>
-          <a:p>
-            <a:pPr lvl="1"/>
-            <a:r>
-              <a:rPr kumimoji="1" lang="ja-JP" altLang="en-US" sz="1600" dirty="0"/>
-              <a:t>Blob に格納する手順が面倒   → CLI スクリプト + ショートカットで実行</a:t>
-            </a:r>
           </a:p>
         </p:txBody>
       </p:sp>
@@ -4057,12 +4252,22 @@
         </p:nvSpPr>
         <p:spPr/>
         <p:txBody>
-          <a:bodyPr/>
+          <a:bodyPr>
+            <a:normAutofit/>
+          </a:bodyPr>
           <a:lstStyle/>
           <a:p>
             <a:r>
-              <a:rPr kumimoji="1" lang="ja-JP" altLang="en-US" dirty="0"/>
-              <a:t>判断（Judgment）—何を判断したか</a:t>
+              <a:rPr lang="en-US" altLang="ja-JP" dirty="0" err="1"/>
+              <a:t>Judement</a:t>
+            </a:r>
+            <a:r>
+              <a:rPr lang="en-US" altLang="ja-JP" dirty="0"/>
+              <a:t>!!  </a:t>
+            </a:r>
+            <a:r>
+              <a:rPr lang="ja-JP" altLang="en-US" dirty="0"/>
+              <a:t>～作り方を作る～</a:t>
             </a:r>
           </a:p>
         </p:txBody>
@@ -4111,80 +4316,81 @@
           <a:p>
             <a:r>
               <a:rPr kumimoji="1" lang="ja-JP" altLang="en-US" sz="1600" b="1" dirty="0"/>
-              <a:t>効果</a:t>
-            </a:r>
+              <a:t>問い: Wiki をローカル（Git）で管理すれば何が可能になるか？</a:t>
+            </a:r>
+            <a:endParaRPr lang="ja-JP" altLang="en-US" dirty="0"/>
           </a:p>
           <a:p>
             <a:pPr lvl="1"/>
             <a:r>
               <a:rPr kumimoji="1" lang="ja-JP" altLang="en-US" sz="1600" dirty="0"/>
-              <a:t>仕様ドキュメントを Git 管理（現在 193 ファイル規模）</a:t>
-            </a:r>
-          </a:p>
-          <a:p>
-            <a:pPr lvl="1"/>
-            <a:r>
-              <a:rPr kumimoji="1" lang="ja-JP" altLang="en-US" sz="1600" b="1" dirty="0"/>
+              <a:t>コーディングエージェントはローカル情報に最も効率よくアクセスできる</a:t>
+            </a:r>
+          </a:p>
+          <a:p>
+            <a:pPr lvl="1"/>
+            <a:r>
+              <a:rPr kumimoji="1" lang="ja-JP" altLang="en-US" sz="1600" dirty="0"/>
+              <a:t>Wiki を読んで既存仕様との整合性チェックができる</a:t>
+            </a:r>
+          </a:p>
+          <a:p>
+            <a:pPr lvl="1"/>
+            <a:r>
+              <a:rPr kumimoji="1" lang="ja-JP" altLang="en-US" sz="1600" dirty="0"/>
+              <a:t>Git 管理にすれば GitHub Actions に組み込める</a:t>
+            </a:r>
+            <a:endParaRPr kumimoji="1" lang="en-US" altLang="ja-JP" sz="1600" dirty="0"/>
+          </a:p>
+          <a:p>
+            <a:pPr lvl="1"/>
+            <a:endParaRPr lang="en-US" altLang="ja-JP" sz="1600" dirty="0"/>
+          </a:p>
+          <a:p>
+            <a:pPr lvl="1"/>
+            <a:endParaRPr kumimoji="1" lang="ja-JP" altLang="en-US" sz="1600" dirty="0"/>
+          </a:p>
+          <a:p>
+            <a:r>
+              <a:rPr lang="ja-JP" altLang="en-US" b="1" dirty="0"/>
+              <a:t>判断の結果</a:t>
+            </a:r>
+          </a:p>
+          <a:p>
+            <a:pPr lvl="1"/>
+            <a:r>
+              <a:rPr lang="ja-JP" altLang="en-US" sz="1600" dirty="0"/>
+              <a:t>仕様ドキュメントを Git 管理（現在 193 ファイルが約２人日（片手間）で完了）</a:t>
+            </a:r>
+          </a:p>
+          <a:p>
+            <a:pPr lvl="1"/>
+            <a:r>
+              <a:rPr lang="ja-JP" altLang="en-US" sz="1600" b="1" dirty="0"/>
               <a:t>仕様をコードから AI で生成 → 過程でバグも発見</a:t>
             </a:r>
             <a:r>
-              <a:rPr kumimoji="1" lang="ja-JP" altLang="en-US" sz="1600" dirty="0"/>
+              <a:rPr lang="ja-JP" altLang="en-US" sz="1600" dirty="0"/>
               <a:t>（SSOT の恩恵）</a:t>
             </a:r>
           </a:p>
           <a:p>
             <a:pPr lvl="1"/>
             <a:r>
-              <a:rPr kumimoji="1" lang="ja-JP" altLang="en-US" sz="1600" dirty="0"/>
+              <a:rPr lang="ja-JP" altLang="en-US" sz="1600" dirty="0"/>
               <a:t>コミット履歴で貢献が見える（感謝を伝えやすい）</a:t>
             </a:r>
-          </a:p>
-          <a:p>
-            <a:pPr lvl="1"/>
-            <a:r>
-              <a:rPr kumimoji="1" lang="en-US" altLang="ja-JP" sz="1600" dirty="0"/>
-              <a:t>AI</a:t>
-            </a:r>
-            <a:r>
-              <a:rPr kumimoji="1" lang="ja-JP" altLang="en-US" sz="1600" dirty="0"/>
-              <a:t>エージェントで「時間がない」で届かなかった仕組みづくりに手が届いた</a:t>
-            </a:r>
-          </a:p>
-          <a:p>
-            <a:endParaRPr lang="ja-JP" altLang="en-US" dirty="0"/>
-          </a:p>
-          <a:p>
-            <a:r>
-              <a:rPr kumimoji="1" lang="ja-JP" altLang="en-US" sz="1600" b="1" dirty="0"/>
-              <a:t>ここで起きていたこと</a:t>
-            </a:r>
-          </a:p>
-          <a:p>
-            <a:pPr lvl="1"/>
-            <a:r>
-              <a:rPr kumimoji="1" lang="ja-JP" altLang="en-US" sz="1600" dirty="0"/>
-              <a:t>「何を自動化するか」「どう設計するか」→ 人間が判断</a:t>
-            </a:r>
-          </a:p>
-          <a:p>
-            <a:pPr lvl="1"/>
-            <a:r>
-              <a:rPr kumimoji="1" lang="ja-JP" altLang="en-US" sz="1600" dirty="0"/>
-              <a:t>「ツール構築」「同期実行」           → AI が演算</a:t>
-            </a:r>
-          </a:p>
-          <a:p>
-            <a:pPr lvl="1"/>
-            <a:r>
-              <a:rPr kumimoji="1" lang="ja-JP" altLang="en-US" sz="1600" dirty="0"/>
-              <a:t>作り方そのものを設計できた</a:t>
-            </a:r>
-          </a:p>
-          <a:p>
-            <a:pPr lvl="1"/>
-            <a:r>
-              <a:rPr kumimoji="1" lang="ja-JP" altLang="en-US" sz="1600" dirty="0"/>
-              <a:t>— 機能・制約・トレードオフを高速で試せるようになった</a:t>
+            <a:endParaRPr lang="en-US" altLang="ja-JP" sz="1600" dirty="0"/>
+          </a:p>
+          <a:p>
+            <a:pPr lvl="1"/>
+            <a:endParaRPr lang="en-US" altLang="ja-JP" sz="1600" dirty="0"/>
+          </a:p>
+          <a:p>
+            <a:pPr lvl="1"/>
+            <a:r>
+              <a:rPr lang="ja-JP" altLang="en-US" sz="1600" dirty="0"/>
+              <a:t>困りごとや制約をもとにツールを作っていく過程はエンジニアリングの過程そのもの</a:t>
             </a:r>
           </a:p>
         </p:txBody>
@@ -4205,8 +4411,12 @@
           <a:lstStyle/>
           <a:p>
             <a:r>
+              <a:rPr lang="ja-JP" altLang="en-US" dirty="0"/>
+              <a:t>振り返り：</a:t>
+            </a:r>
+            <a:r>
               <a:rPr kumimoji="1" lang="ja-JP" altLang="en-US" dirty="0"/>
-              <a:t>効果とここで起きていたこと</a:t>
+              <a:t>問いに答える正しい判断だったか？</a:t>
             </a:r>
           </a:p>
         </p:txBody>
@@ -4279,7 +4489,15 @@
           <a:p>
             <a:r>
               <a:rPr kumimoji="1" lang="ja-JP" altLang="en-US" sz="1300" dirty="0"/>
-              <a:t>「判断を構造化し、育てる」</a:t>
+              <a:t>「</a:t>
+            </a:r>
+            <a:r>
+              <a:rPr lang="ja-JP" altLang="en-US" sz="1400" dirty="0"/>
+              <a:t>育て方を作る</a:t>
+            </a:r>
+            <a:r>
+              <a:rPr kumimoji="1" lang="ja-JP" altLang="en-US" sz="1300" dirty="0"/>
+              <a:t>」</a:t>
             </a:r>
           </a:p>
         </p:txBody>
@@ -5132,7 +5350,13 @@
   <p:cSld>
     <p:spTree>
       <p:nvGrpSpPr>
-        <p:cNvPr id="1" name=""/>
+        <p:cNvPr id="1" name="">
+          <a:extLst>
+            <a:ext uri="{FF2B5EF4-FFF2-40B4-BE49-F238E27FC236}">
+              <a16:creationId xmlns:a16="http://schemas.microsoft.com/office/drawing/2014/main" id="{6742A480-17D9-D96D-ABBB-2D2E811968C1}"/>
+            </a:ext>
+          </a:extLst>
+        </p:cNvPr>
         <p:cNvGrpSpPr/>
         <p:nvPr/>
       </p:nvGrpSpPr>
@@ -5146,7 +5370,13 @@
       </p:grpSpPr>
       <p:sp>
         <p:nvSpPr>
-          <p:cNvPr id="2" name="コンテンツ プレースホルダー 1"/>
+          <p:cNvPr id="2" name="コンテンツ プレースホルダー 1">
+            <a:extLst>
+              <a:ext uri="{FF2B5EF4-FFF2-40B4-BE49-F238E27FC236}">
+                <a16:creationId xmlns:a16="http://schemas.microsoft.com/office/drawing/2014/main" id="{A7ED6F00-4B77-5D41-8D72-117D6963CF3D}"/>
+              </a:ext>
+            </a:extLst>
+          </p:cNvPr>
           <p:cNvSpPr>
             <a:spLocks noGrp="1"/>
           </p:cNvSpPr>
@@ -5163,82 +5393,110 @@
           <a:p>
             <a:r>
               <a:rPr kumimoji="1" lang="ja-JP" altLang="en-US" sz="1500" b="1" dirty="0"/>
-              <a:t>ドキュメントパイプライン</a:t>
+              <a:t>「何を問うか」を引き受けるのは人間</a:t>
             </a:r>
           </a:p>
           <a:p>
             <a:pPr lvl="1"/>
             <a:r>
               <a:rPr kumimoji="1" lang="ja-JP" altLang="en-US" sz="1500" dirty="0"/>
-              <a:t>Judgment: 何を自動化し・何を</a:t>
+              <a:t>問いを立てることも</a:t>
+            </a:r>
+            <a:r>
+              <a:rPr kumimoji="1" lang="en-US" altLang="ja-JP" sz="1500" b="1" dirty="0"/>
+              <a:t>Judgement</a:t>
+            </a:r>
+            <a:r>
+              <a:rPr kumimoji="1" lang="ja-JP" altLang="en-US" sz="1500" dirty="0"/>
+              <a:t>である</a:t>
+            </a:r>
+            <a:endParaRPr kumimoji="1" lang="en-US" altLang="ja-JP" sz="1500" dirty="0"/>
+          </a:p>
+          <a:p>
+            <a:pPr lvl="1"/>
+            <a:r>
+              <a:rPr kumimoji="1" lang="ja-JP" altLang="en-US" sz="1500" dirty="0"/>
+              <a:t>責任：違和感を言語化し、満足できる条件を策定し、受け入れるトレードオフを決める</a:t>
+            </a:r>
+          </a:p>
+          <a:p>
+            <a:r>
+              <a:rPr kumimoji="1" lang="ja-JP" altLang="en-US" sz="1500" b="1" dirty="0"/>
+              <a:t>レビューに出す前の責任</a:t>
+            </a:r>
+          </a:p>
+          <a:p>
+            <a:pPr lvl="1"/>
+            <a:r>
+              <a:rPr kumimoji="1" lang="ja-JP" altLang="en-US" sz="1500" b="1" dirty="0"/>
+              <a:t>変更を自分のメンタルモデルへ統合</a:t>
+            </a:r>
+            <a:r>
+              <a:rPr kumimoji="1" lang="ja-JP" altLang="en-US" sz="1500" dirty="0"/>
+              <a:t>してからレビューに出す</a:t>
+            </a:r>
+          </a:p>
+          <a:p>
+            <a:pPr lvl="1"/>
+            <a:r>
+              <a:rPr kumimoji="1" lang="ja-JP" altLang="en-US" sz="1500" dirty="0"/>
+              <a:t>AI が書いたコードでも、自分の言葉で説明できなければならない</a:t>
+            </a:r>
+          </a:p>
+          <a:p>
+            <a:endParaRPr lang="ja-JP" altLang="en-US" dirty="0"/>
+          </a:p>
+          <a:p>
+            <a:r>
+              <a:rPr kumimoji="1" lang="ja-JP" altLang="en-US" sz="1500" b="1" dirty="0"/>
+              <a:t>教育をどこに置くか</a:t>
+            </a:r>
+          </a:p>
+          <a:p>
+            <a:pPr lvl="1"/>
+            <a:r>
+              <a:rPr kumimoji="1" lang="ja-JP" altLang="en-US" sz="1500" dirty="0"/>
+              <a:t>個別のレビューコメントの主目的は教育ではない</a:t>
             </a:r>
             <a:r>
               <a:rPr lang="ja-JP" altLang="en-US" sz="1500" dirty="0"/>
-              <a:t>メンバー（人間）に何</a:t>
-            </a:r>
+              <a:t>（メンタルモデルの合意である）</a:t>
+            </a:r>
+            <a:endParaRPr kumimoji="1" lang="ja-JP" altLang="en-US" sz="1500" dirty="0"/>
+          </a:p>
+          <a:p>
+            <a:pPr lvl="1"/>
             <a:r>
               <a:rPr kumimoji="1" lang="ja-JP" altLang="en-US" sz="1500" dirty="0"/>
-              <a:t>をやってもらうか、どう設計するか</a:t>
-            </a:r>
-          </a:p>
-          <a:p>
-            <a:pPr lvl="1"/>
+              <a:t>しかしレビュー</a:t>
+            </a:r>
+            <a:r>
+              <a:rPr kumimoji="1" lang="ja-JP" altLang="en-US" sz="1500" b="1" dirty="0"/>
+              <a:t>制度</a:t>
+            </a:r>
             <a:r>
               <a:rPr kumimoji="1" lang="ja-JP" altLang="en-US" sz="1500" dirty="0"/>
-              <a:t>Reckoning: ツール構築、自動同期</a:t>
-            </a:r>
-          </a:p>
-          <a:p>
-            <a:endParaRPr lang="ja-JP" altLang="en-US" dirty="0"/>
-          </a:p>
-          <a:p>
-            <a:r>
-              <a:rPr kumimoji="1" lang="ja-JP" altLang="en-US" sz="1500" b="1" dirty="0"/>
-              <a:t>レビューワークフロー</a:t>
+              <a:t>の目的には 判断能力（Judgment） 育成を含めるべき</a:t>
             </a:r>
           </a:p>
           <a:p>
             <a:pPr lvl="1"/>
             <a:r>
               <a:rPr kumimoji="1" lang="ja-JP" altLang="en-US" sz="1500" dirty="0"/>
-              <a:t>Judgment: この変更を組み込むべきか、どの判断を採るか、何を観点とするか</a:t>
-            </a:r>
-          </a:p>
-          <a:p>
-            <a:pPr lvl="1"/>
-            <a:r>
-              <a:rPr kumimoji="1" lang="ja-JP" altLang="en-US" sz="1500" dirty="0"/>
-              <a:t>Reckoning: 網羅分析、要約、観点別チェック</a:t>
-            </a:r>
-          </a:p>
-          <a:p>
-            <a:endParaRPr lang="ja-JP" altLang="en-US" dirty="0"/>
-          </a:p>
-          <a:p>
-            <a:r>
-              <a:rPr kumimoji="1" lang="ja-JP" altLang="en-US" sz="1500" b="1" dirty="0"/>
-              <a:t>共通</a:t>
-            </a:r>
-          </a:p>
-          <a:p>
-            <a:pPr lvl="1"/>
-            <a:r>
-              <a:rPr kumimoji="1" lang="ja-JP" altLang="en-US" sz="1500" dirty="0"/>
-              <a:t>人間が枠組みと採否を決め、AI がその範囲で実行する</a:t>
-            </a:r>
-          </a:p>
-          <a:p>
-            <a:pPr lvl="1"/>
-            <a:r>
-              <a:rPr kumimoji="1" lang="ja-JP" altLang="en-US" sz="1500" dirty="0"/>
-              <a:t>事例2ではレビューを「判断共有と判断育成のインフラ」にした</a:t>
-            </a:r>
-          </a:p>
-        </p:txBody>
-      </p:sp>
-      <p:sp>
-        <p:nvSpPr>
-          <p:cNvPr id="3" name="タイトル 2"/>
+              <a:t>教育は「丁寧に教えること」より「判断に参加させること」で起こる</a:t>
+            </a:r>
+          </a:p>
+        </p:txBody>
+      </p:sp>
+      <p:sp>
+        <p:nvSpPr>
+          <p:cNvPr id="3" name="タイトル 2">
+            <a:extLst>
+              <a:ext uri="{FF2B5EF4-FFF2-40B4-BE49-F238E27FC236}">
+                <a16:creationId xmlns:a16="http://schemas.microsoft.com/office/drawing/2014/main" id="{29AD7D9B-DA65-5172-2F87-0638FD2C6B22}"/>
+              </a:ext>
+            </a:extLst>
+          </p:cNvPr>
           <p:cNvSpPr>
             <a:spLocks noGrp="1"/>
           </p:cNvSpPr>
@@ -5253,12 +5511,17 @@
           <a:p>
             <a:r>
               <a:rPr kumimoji="1" lang="ja-JP" altLang="en-US" dirty="0"/>
-              <a:t>2つの事例が示すパターン</a:t>
+              <a:t>結び: 人間が引き受けるべきこと</a:t>
             </a:r>
           </a:p>
         </p:txBody>
       </p:sp>
     </p:spTree>
+    <p:extLst>
+      <p:ext uri="{BB962C8B-B14F-4D97-AF65-F5344CB8AC3E}">
+        <p14:creationId xmlns:p14="http://schemas.microsoft.com/office/powerpoint/2010/main" val="246466265"/>
+      </p:ext>
+    </p:extLst>
   </p:cSld>
   <p:clrMapOvr>
     <a:masterClrMapping/>
@@ -5271,7 +5534,13 @@
   <p:cSld>
     <p:spTree>
       <p:nvGrpSpPr>
-        <p:cNvPr id="1" name=""/>
+        <p:cNvPr id="1" name="">
+          <a:extLst>
+            <a:ext uri="{FF2B5EF4-FFF2-40B4-BE49-F238E27FC236}">
+              <a16:creationId xmlns:a16="http://schemas.microsoft.com/office/drawing/2014/main" id="{64FC864C-ABF0-D0C1-BF39-0334A096BE4F}"/>
+            </a:ext>
+          </a:extLst>
+        </p:cNvPr>
         <p:cNvGrpSpPr/>
         <p:nvPr/>
       </p:nvGrpSpPr>
@@ -5285,73 +5554,83 @@
       </p:grpSpPr>
       <p:sp>
         <p:nvSpPr>
-          <p:cNvPr id="2" name="コンテンツ 1"/>
-          <p:cNvSpPr txBox="1">
-            <a:spLocks/>
+          <p:cNvPr id="2" name="タイトル 1">
+            <a:extLst>
+              <a:ext uri="{FF2B5EF4-FFF2-40B4-BE49-F238E27FC236}">
+                <a16:creationId xmlns:a16="http://schemas.microsoft.com/office/drawing/2014/main" id="{B8447E06-5663-D993-00F5-27716A086BDF}"/>
+              </a:ext>
+            </a:extLst>
+          </p:cNvPr>
+          <p:cNvSpPr>
+            <a:spLocks noGrp="1"/>
           </p:cNvSpPr>
-          <p:nvPr/>
-        </p:nvSpPr>
-        <p:spPr>
-          <a:xfrm>
-            <a:off x="697186" y="1000000"/>
-            <a:ext cx="8496300" cy="4800000"/>
-          </a:xfrm>
-          <a:prstGeom prst="rect">
-            <a:avLst/>
-          </a:prstGeom>
-        </p:spPr>
-        <p:txBody>
-          <a:bodyPr vert="horz" lIns="91440" tIns="91440" rIns="91440" bIns="91440" rtlCol="0" anchor="ctr">
+          <p:nvPr>
+            <p:ph type="ctrTitle"/>
+          </p:nvPr>
+        </p:nvSpPr>
+        <p:spPr/>
+        <p:txBody>
+          <a:bodyPr>
+            <a:normAutofit fontScale="90000"/>
+          </a:bodyPr>
+          <a:lstStyle/>
+          <a:p>
+            <a:r>
+              <a:rPr lang="ja-JP" altLang="en-US" dirty="0"/>
+              <a:t>判断（Judgment）と</a:t>
+            </a:r>
+            <a:br>
+              <a:rPr lang="en-US" altLang="ja-JP" dirty="0"/>
+            </a:br>
+            <a:r>
+              <a:rPr lang="ja-JP" altLang="en-US" dirty="0"/>
+              <a:t>演算（Reckoning）</a:t>
+            </a:r>
+            <a:endParaRPr kumimoji="1" lang="ja-JP" altLang="en-US" sz="2600" dirty="0"/>
+          </a:p>
+        </p:txBody>
+      </p:sp>
+      <p:sp>
+        <p:nvSpPr>
+          <p:cNvPr id="3" name="字幕 2">
+            <a:extLst>
+              <a:ext uri="{FF2B5EF4-FFF2-40B4-BE49-F238E27FC236}">
+                <a16:creationId xmlns:a16="http://schemas.microsoft.com/office/drawing/2014/main" id="{B85CE312-5905-6B2B-5FD6-24AF00DEF7B3}"/>
+              </a:ext>
+            </a:extLst>
+          </p:cNvPr>
+          <p:cNvSpPr>
+            <a:spLocks noGrp="1"/>
+          </p:cNvSpPr>
+          <p:nvPr>
+            <p:ph type="subTitle" idx="1"/>
+          </p:nvPr>
+        </p:nvSpPr>
+        <p:spPr/>
+        <p:txBody>
+          <a:bodyPr>
             <a:normAutofit/>
           </a:bodyPr>
-          <a:lstStyle>
-            <a:lvl1pPr algn="ctr">
-              <a:defRPr kumimoji="1" sz="2400">
-                <a:solidFill>
-                  <a:schemeClr val="tx1"/>
-                </a:solidFill>
-                <a:latin typeface="+mn-ea"/>
-              </a:defRPr>
-            </a:lvl1pPr>
-          </a:lstStyle>
-          <a:p>
-            <a:r>
-              <a:rPr kumimoji="1" lang="ja-JP" altLang="en-US" sz="2600" dirty="0"/>
-              <a:t>レビューでは</a:t>
-            </a:r>
-          </a:p>
-          <a:p>
-            <a:r>
-              <a:rPr kumimoji="1" lang="ja-JP" altLang="en-US" sz="2800" b="1" dirty="0"/>
-              <a:t>「場」と「</a:t>
-            </a:r>
-            <a:r>
-              <a:rPr lang="ja-JP" altLang="en-US" sz="2800" b="1" dirty="0"/>
-              <a:t>仕組み</a:t>
-            </a:r>
-            <a:r>
-              <a:rPr kumimoji="1" lang="ja-JP" altLang="en-US" sz="2800" b="1" dirty="0"/>
-              <a:t>」を分けて考える</a:t>
-            </a:r>
-          </a:p>
-          <a:p>
-            <a:endParaRPr lang="ja-JP" altLang="en-US" dirty="0"/>
-          </a:p>
-          <a:p>
-            <a:r>
-              <a:rPr kumimoji="1" lang="ja-JP" altLang="en-US" sz="1900" dirty="0"/>
-              <a:t>場: この変更を組み込むか</a:t>
-            </a:r>
-          </a:p>
-          <a:p>
-            <a:r>
-              <a:rPr kumimoji="1" lang="ja-JP" altLang="en-US" sz="1900" dirty="0"/>
-              <a:t>制度: その判断を担える人を増やす</a:t>
-            </a:r>
+          <a:lstStyle/>
+          <a:p>
+            <a:r>
+              <a:rPr lang="ja-JP" altLang="en-US" dirty="0"/>
+              <a:t>偉大なる哲学者であり科学者：</a:t>
+            </a:r>
+            <a:r>
+              <a:rPr lang="en-US" altLang="ja-JP" dirty="0"/>
+              <a:t>Brian Cantwell Smith</a:t>
+            </a:r>
+            <a:endParaRPr kumimoji="1" lang="ja-JP" altLang="en-US" sz="1300" dirty="0"/>
           </a:p>
         </p:txBody>
       </p:sp>
     </p:spTree>
+    <p:extLst>
+      <p:ext uri="{BB962C8B-B14F-4D97-AF65-F5344CB8AC3E}">
+        <p14:creationId xmlns:p14="http://schemas.microsoft.com/office/powerpoint/2010/main" val="2983613242"/>
+      </p:ext>
+    </p:extLst>
   </p:cSld>
   <p:clrMapOvr>
     <a:masterClrMapping/>
@@ -5386,7 +5665,12 @@
             <p:ph idx="1"/>
           </p:nvPr>
         </p:nvSpPr>
-        <p:spPr/>
+        <p:spPr>
+          <a:xfrm>
+            <a:off x="632681" y="1304764"/>
+            <a:ext cx="8640638" cy="4894536"/>
+          </a:xfrm>
+        </p:spPr>
         <p:txBody>
           <a:bodyPr>
             <a:normAutofit/>
@@ -5394,96 +5678,70 @@
           <a:lstStyle/>
           <a:p>
             <a:r>
-              <a:rPr kumimoji="1" lang="ja-JP" altLang="en-US" sz="1500" b="1" dirty="0"/>
-              <a:t>「何を問うか」を引き受けるのは人間</a:t>
-            </a:r>
-          </a:p>
-          <a:p>
-            <a:pPr lvl="1"/>
-            <a:r>
-              <a:rPr kumimoji="1" lang="ja-JP" altLang="en-US" sz="1500" dirty="0"/>
-              <a:t>違和感、十分条件、受け入れるトレードオフを決める</a:t>
-            </a:r>
-          </a:p>
-          <a:p>
-            <a:pPr lvl="1"/>
-            <a:r>
-              <a:rPr kumimoji="1" lang="ja-JP" altLang="en-US" sz="1500" b="1" dirty="0"/>
-              <a:t>問いを立てる能力</a:t>
-            </a:r>
-            <a:r>
-              <a:rPr kumimoji="1" lang="ja-JP" altLang="en-US" sz="1500" dirty="0"/>
-              <a:t>は開発の中で育てる</a:t>
+              <a:rPr kumimoji="1" lang="ja-JP" altLang="en-US" sz="1800" b="1" dirty="0"/>
+              <a:t>ドキュメントパイプライン</a:t>
+            </a:r>
+          </a:p>
+          <a:p>
+            <a:pPr lvl="1"/>
+            <a:r>
+              <a:rPr kumimoji="1" lang="ja-JP" altLang="en-US" sz="1800" dirty="0"/>
+              <a:t>Judgment: 何を自動化し・何を</a:t>
+            </a:r>
+            <a:r>
+              <a:rPr lang="ja-JP" altLang="en-US" sz="1800" dirty="0"/>
+              <a:t>メンバー（人間）に何</a:t>
+            </a:r>
+            <a:r>
+              <a:rPr kumimoji="1" lang="ja-JP" altLang="en-US" sz="1800" dirty="0"/>
+              <a:t>をやってもらうか</a:t>
+            </a:r>
+            <a:br>
+              <a:rPr kumimoji="1" lang="en-US" altLang="ja-JP" sz="1800" dirty="0"/>
+            </a:br>
+            <a:r>
+              <a:rPr kumimoji="1" lang="ja-JP" altLang="en-US" sz="1800" dirty="0"/>
+              <a:t>Reckoning: ツール構築・ツール実行</a:t>
+            </a:r>
+            <a:endParaRPr lang="ja-JP" altLang="en-US" sz="1400" dirty="0"/>
+          </a:p>
+          <a:p>
+            <a:r>
+              <a:rPr kumimoji="1" lang="ja-JP" altLang="en-US" sz="1800" b="1" dirty="0"/>
+              <a:t>レビューワークフロー</a:t>
+            </a:r>
+          </a:p>
+          <a:p>
+            <a:pPr lvl="1"/>
+            <a:r>
+              <a:rPr kumimoji="1" lang="ja-JP" altLang="en-US" sz="1800" dirty="0"/>
+              <a:t>Judgment: この変更を組み込むべきか、どの判断を採るか、何を観点とするか</a:t>
+            </a:r>
+          </a:p>
+          <a:p>
+            <a:pPr lvl="1"/>
+            <a:r>
+              <a:rPr kumimoji="1" lang="ja-JP" altLang="en-US" sz="1800" dirty="0"/>
+              <a:t>Reckoning: 網羅分析、要約、観点別チェック</a:t>
             </a:r>
           </a:p>
           <a:p>
             <a:endParaRPr lang="ja-JP" altLang="en-US" dirty="0"/>
           </a:p>
           <a:p>
-            <a:r>
-              <a:rPr kumimoji="1" lang="ja-JP" altLang="en-US" sz="1500" b="1" dirty="0"/>
-              <a:t>レビューに出す前の責任</a:t>
-            </a:r>
-          </a:p>
-          <a:p>
-            <a:pPr lvl="1"/>
-            <a:r>
-              <a:rPr kumimoji="1" lang="ja-JP" altLang="en-US" sz="1500" b="1" dirty="0"/>
-              <a:t>変更を自分のメンタルモデルへ統合</a:t>
-            </a:r>
-            <a:r>
-              <a:rPr kumimoji="1" lang="ja-JP" altLang="en-US" sz="1500" dirty="0"/>
-              <a:t>してからレビューに出す</a:t>
-            </a:r>
-          </a:p>
-          <a:p>
-            <a:pPr lvl="1"/>
-            <a:r>
-              <a:rPr kumimoji="1" lang="ja-JP" altLang="en-US" sz="1500" dirty="0"/>
-              <a:t>AI が書いたコードでも、自分の言葉で説明できなければならない</a:t>
-            </a:r>
-          </a:p>
-          <a:p>
-            <a:endParaRPr lang="ja-JP" altLang="en-US" dirty="0"/>
-          </a:p>
-          <a:p>
-            <a:r>
-              <a:rPr kumimoji="1" lang="ja-JP" altLang="en-US" sz="1500" b="1" dirty="0"/>
-              <a:t>教育をどこに置くか</a:t>
-            </a:r>
-          </a:p>
-          <a:p>
-            <a:pPr lvl="1"/>
-            <a:r>
-              <a:rPr kumimoji="1" lang="ja-JP" altLang="en-US" sz="1500" dirty="0"/>
-              <a:t>個別のレビューコメントの主目的は教育ではない</a:t>
-            </a:r>
-            <a:r>
-              <a:rPr lang="ja-JP" altLang="en-US" sz="1500" dirty="0"/>
-              <a:t>（メンタルモデルの合意である）</a:t>
-            </a:r>
-            <a:endParaRPr kumimoji="1" lang="ja-JP" altLang="en-US" sz="1500" dirty="0"/>
-          </a:p>
-          <a:p>
-            <a:pPr lvl="1"/>
-            <a:r>
-              <a:rPr kumimoji="1" lang="ja-JP" altLang="en-US" sz="1500" dirty="0"/>
-              <a:t>しかしレビュー</a:t>
-            </a:r>
-            <a:r>
-              <a:rPr kumimoji="1" lang="ja-JP" altLang="en-US" sz="1500" b="1" dirty="0"/>
-              <a:t>制度</a:t>
-            </a:r>
-            <a:r>
-              <a:rPr kumimoji="1" lang="ja-JP" altLang="en-US" sz="1500" dirty="0"/>
-              <a:t>の目的には 判断能力（Judgment） 育成を含めるべき</a:t>
-            </a:r>
-          </a:p>
-          <a:p>
-            <a:pPr lvl="1"/>
-            <a:r>
-              <a:rPr kumimoji="1" lang="ja-JP" altLang="en-US" sz="1500" dirty="0"/>
-              <a:t>教育は「丁寧に教えること」より「判断に参加させること」で起こる</a:t>
+            <a:pPr algn="ctr"/>
+            <a:r>
+              <a:rPr kumimoji="1" lang="ja-JP" altLang="en-US" sz="1800" b="1" dirty="0"/>
+              <a:t>共通</a:t>
+            </a:r>
+          </a:p>
+          <a:p>
+            <a:pPr marL="257173" lvl="1" indent="0" algn="ctr">
+              <a:buNone/>
+            </a:pPr>
+            <a:r>
+              <a:rPr kumimoji="1" lang="ja-JP" altLang="en-US" sz="1800" dirty="0"/>
+              <a:t>人間が枠組みと採否を決め、AI がその範囲で実行する</a:t>
             </a:r>
           </a:p>
         </p:txBody>
@@ -5505,7 +5763,7 @@
           <a:p>
             <a:r>
               <a:rPr kumimoji="1" lang="ja-JP" altLang="en-US" dirty="0"/>
-              <a:t>結び: 人間が引き受けるべきこと</a:t>
+              <a:t>2つの事例が示すパターン</a:t>
             </a:r>
           </a:p>
         </p:txBody>
@@ -5519,255 +5777,6 @@
 </file>
 
 <file path=ppt/slides/slide23.xml><?xml version="1.0" encoding="utf-8"?>
-<p:sld xmlns:a="http://schemas.openxmlformats.org/drawingml/2006/main" xmlns:r="http://schemas.openxmlformats.org/officeDocument/2006/relationships" xmlns:p="http://schemas.openxmlformats.org/presentationml/2006/main">
-  <p:cSld>
-    <p:spTree>
-      <p:nvGrpSpPr>
-        <p:cNvPr id="1" name=""/>
-        <p:cNvGrpSpPr/>
-        <p:nvPr/>
-      </p:nvGrpSpPr>
-      <p:grpSpPr>
-        <a:xfrm>
-          <a:off x="0" y="0"/>
-          <a:ext cx="0" cy="0"/>
-          <a:chOff x="0" y="0"/>
-          <a:chExt cx="0" cy="0"/>
-        </a:xfrm>
-      </p:grpSpPr>
-      <p:sp>
-        <p:nvSpPr>
-          <p:cNvPr id="2" name="コンテンツ プレースホルダー 1"/>
-          <p:cNvSpPr>
-            <a:spLocks noGrp="1"/>
-          </p:cNvSpPr>
-          <p:nvPr>
-            <p:ph idx="1"/>
-          </p:nvPr>
-        </p:nvSpPr>
-        <p:spPr/>
-        <p:txBody>
-          <a:bodyPr>
-            <a:normAutofit/>
-          </a:bodyPr>
-          <a:lstStyle/>
-          <a:p>
-            <a:r>
-              <a:rPr kumimoji="1" lang="ja-JP" altLang="en-US" sz="1500" dirty="0"/>
-              <a:t>Redmine → GitHub Issue → コード → Wiki をつなぐ</a:t>
-            </a:r>
-          </a:p>
-          <a:p>
-            <a:pPr lvl="1"/>
-            <a:r>
-              <a:rPr kumimoji="1" lang="ja-JP" altLang="en-US" sz="1500" dirty="0"/>
-              <a:t>GitHub Agent が全体の整合をガーデニングする</a:t>
-            </a:r>
-          </a:p>
-          <a:p>
-            <a:pPr lvl="1"/>
-            <a:r>
-              <a:rPr kumimoji="1" lang="ja-JP" altLang="en-US" sz="1500" dirty="0"/>
-              <a:t>例: PR 時に Wiki 未更新を指摘する</a:t>
-            </a:r>
-          </a:p>
-          <a:p>
-            <a:endParaRPr lang="ja-JP" altLang="en-US" dirty="0"/>
-          </a:p>
-          <a:p>
-            <a:r>
-              <a:rPr kumimoji="1" lang="ja-JP" altLang="en-US" sz="1500" b="1" dirty="0"/>
-              <a:t>Phase 2</a:t>
-            </a:r>
-          </a:p>
-          <a:p>
-            <a:pPr lvl="1"/>
-            <a:r>
-              <a:rPr kumimoji="1" lang="ja-JP" altLang="en-US" sz="1500" dirty="0"/>
-              <a:t>Claude Code Action による自動ドキュメント生成 PR</a:t>
-            </a:r>
-          </a:p>
-          <a:p>
-            <a:endParaRPr lang="ja-JP" altLang="en-US" dirty="0"/>
-          </a:p>
-          <a:p>
-            <a:r>
-              <a:rPr kumimoji="1" lang="ja-JP" altLang="en-US" sz="1500" b="1" dirty="0"/>
-              <a:t>Judgment → Reckoning → Judgment</a:t>
-            </a:r>
-          </a:p>
-          <a:p>
-            <a:pPr lvl="1"/>
-            <a:r>
-              <a:rPr kumimoji="1" lang="ja-JP" altLang="en-US" sz="1500" dirty="0"/>
-              <a:t>問いを立てる</a:t>
-            </a:r>
-          </a:p>
-          <a:p>
-            <a:pPr lvl="1"/>
-            <a:r>
-              <a:rPr kumimoji="1" lang="ja-JP" altLang="en-US" sz="1500" dirty="0"/>
-              <a:t>AI に演算させる</a:t>
-            </a:r>
-          </a:p>
-          <a:p>
-            <a:pPr lvl="1"/>
-            <a:r>
-              <a:rPr kumimoji="1" lang="ja-JP" altLang="en-US" sz="1500" dirty="0"/>
-              <a:t>採否を決める → また問いを立てる</a:t>
-            </a:r>
-          </a:p>
-        </p:txBody>
-      </p:sp>
-      <p:sp>
-        <p:nvSpPr>
-          <p:cNvPr id="3" name="タイトル 2"/>
-          <p:cNvSpPr>
-            <a:spLocks noGrp="1"/>
-          </p:cNvSpPr>
-          <p:nvPr>
-            <p:ph type="title"/>
-          </p:nvPr>
-        </p:nvSpPr>
-        <p:spPr/>
-        <p:txBody>
-          <a:bodyPr/>
-          <a:lstStyle/>
-          <a:p>
-            <a:r>
-              <a:rPr kumimoji="1" lang="ja-JP" altLang="en-US" dirty="0"/>
-              <a:t>将来の展望と最後のループ</a:t>
-            </a:r>
-          </a:p>
-        </p:txBody>
-      </p:sp>
-    </p:spTree>
-  </p:cSld>
-  <p:clrMapOvr>
-    <a:masterClrMapping/>
-  </p:clrMapOvr>
-</p:sld>
-</file>
-
-<file path=ppt/slides/slide3.xml><?xml version="1.0" encoding="utf-8"?>
-<p:sld xmlns:a="http://schemas.openxmlformats.org/drawingml/2006/main" xmlns:r="http://schemas.openxmlformats.org/officeDocument/2006/relationships" xmlns:p="http://schemas.openxmlformats.org/presentationml/2006/main">
-  <p:cSld>
-    <p:spTree>
-      <p:nvGrpSpPr>
-        <p:cNvPr id="1" name=""/>
-        <p:cNvGrpSpPr/>
-        <p:nvPr/>
-      </p:nvGrpSpPr>
-      <p:grpSpPr>
-        <a:xfrm>
-          <a:off x="0" y="0"/>
-          <a:ext cx="0" cy="0"/>
-          <a:chOff x="0" y="0"/>
-          <a:chExt cx="0" cy="0"/>
-        </a:xfrm>
-      </p:grpSpPr>
-      <p:sp>
-        <p:nvSpPr>
-          <p:cNvPr id="2" name="コンテンツ プレースホルダー 1"/>
-          <p:cNvSpPr>
-            <a:spLocks noGrp="1"/>
-          </p:cNvSpPr>
-          <p:nvPr>
-            <p:ph idx="1"/>
-          </p:nvPr>
-        </p:nvSpPr>
-        <p:spPr/>
-        <p:txBody>
-          <a:bodyPr>
-            <a:normAutofit lnSpcReduction="10000"/>
-          </a:bodyPr>
-          <a:lstStyle/>
-          <a:p>
-            <a:r>
-              <a:rPr kumimoji="1" lang="ja-JP" altLang="en-US" sz="1600" dirty="0"/>
-              <a:t>はじめに — 枠組み: 判断と演算</a:t>
-            </a:r>
-          </a:p>
-          <a:p>
-            <a:r>
-              <a:rPr kumimoji="1" lang="ja-JP" altLang="en-US" sz="1600" dirty="0"/>
-              <a:t>全体像 — 2つの仕組み</a:t>
-            </a:r>
-            <a:endParaRPr lang="ja-JP" altLang="en-US" dirty="0"/>
-          </a:p>
-          <a:p>
-            <a:r>
-              <a:rPr kumimoji="1" lang="ja-JP" altLang="en-US" sz="1600" dirty="0"/>
-              <a:t>事例1: ドキュメントパイプライン</a:t>
-            </a:r>
-          </a:p>
-          <a:p>
-            <a:pPr lvl="1"/>
-            <a:r>
-              <a:rPr kumimoji="1" lang="ja-JP" altLang="en-US" sz="1600" dirty="0"/>
-              <a:t>課題 / 判断 / 演算 / 効果</a:t>
-            </a:r>
-            <a:endParaRPr lang="ja-JP" altLang="en-US" dirty="0"/>
-          </a:p>
-          <a:p>
-            <a:r>
-              <a:rPr kumimoji="1" lang="ja-JP" altLang="en-US" sz="1600" dirty="0"/>
-              <a:t>事例2: AIレビューワークフロー</a:t>
-            </a:r>
-          </a:p>
-          <a:p>
-            <a:pPr lvl="1"/>
-            <a:r>
-              <a:rPr kumimoji="1" lang="ja-JP" altLang="en-US" sz="1600" dirty="0"/>
-              <a:t>課題 / 判断 / 演算 / 効果 / 制度</a:t>
-            </a:r>
-            <a:endParaRPr lang="ja-JP" altLang="en-US" dirty="0"/>
-          </a:p>
-          <a:p>
-            <a:r>
-              <a:rPr kumimoji="1" lang="ja-JP" altLang="en-US" sz="1600" dirty="0"/>
-              <a:t>2つの事例が示すパターン</a:t>
-            </a:r>
-          </a:p>
-          <a:p>
-            <a:r>
-              <a:rPr kumimoji="1" lang="ja-JP" altLang="en-US" sz="1600" dirty="0"/>
-              <a:t>結び / 将来の展望</a:t>
-            </a:r>
-          </a:p>
-        </p:txBody>
-      </p:sp>
-      <p:sp>
-        <p:nvSpPr>
-          <p:cNvPr id="3" name="タイトル 2"/>
-          <p:cNvSpPr>
-            <a:spLocks noGrp="1"/>
-          </p:cNvSpPr>
-          <p:nvPr>
-            <p:ph type="title"/>
-          </p:nvPr>
-        </p:nvSpPr>
-        <p:spPr/>
-        <p:txBody>
-          <a:bodyPr/>
-          <a:lstStyle/>
-          <a:p>
-            <a:r>
-              <a:rPr kumimoji="1" lang="ja-JP" altLang="en-US" dirty="0"/>
-              <a:t>今日話すこと</a:t>
-            </a:r>
-          </a:p>
-        </p:txBody>
-      </p:sp>
-    </p:spTree>
-  </p:cSld>
-  <p:clrMapOvr>
-    <a:masterClrMapping/>
-  </p:clrMapOvr>
-</p:sld>
-</file>
-
-<file path=ppt/slides/slide4.xml><?xml version="1.0" encoding="utf-8"?>
 <p:sld xmlns:a="http://schemas.openxmlformats.org/drawingml/2006/main" xmlns:r="http://schemas.openxmlformats.org/officeDocument/2006/relationships" xmlns:p="http://schemas.openxmlformats.org/presentationml/2006/main">
   <p:cSld>
     <p:spTree>
@@ -6034,12 +6043,18 @@
 </p:sld>
 </file>
 
-<file path=ppt/slides/slide5.xml><?xml version="1.0" encoding="utf-8"?>
+<file path=ppt/slides/slide24.xml><?xml version="1.0" encoding="utf-8"?>
 <p:sld xmlns:a="http://schemas.openxmlformats.org/drawingml/2006/main" xmlns:r="http://schemas.openxmlformats.org/officeDocument/2006/relationships" xmlns:p="http://schemas.openxmlformats.org/presentationml/2006/main">
   <p:cSld>
     <p:spTree>
       <p:nvGrpSpPr>
-        <p:cNvPr id="1" name=""/>
+        <p:cNvPr id="1" name="">
+          <a:extLst>
+            <a:ext uri="{FF2B5EF4-FFF2-40B4-BE49-F238E27FC236}">
+              <a16:creationId xmlns:a16="http://schemas.microsoft.com/office/drawing/2014/main" id="{DEB019F2-1916-EC49-C447-6CFB51CD0B9A}"/>
+            </a:ext>
+          </a:extLst>
+        </p:cNvPr>
         <p:cNvGrpSpPr/>
         <p:nvPr/>
       </p:nvGrpSpPr>
@@ -6053,7 +6068,13 @@
       </p:grpSpPr>
       <p:sp>
         <p:nvSpPr>
-          <p:cNvPr id="2" name="コンテンツ プレースホルダー 1"/>
+          <p:cNvPr id="2" name="コンテンツ プレースホルダー 1">
+            <a:extLst>
+              <a:ext uri="{FF2B5EF4-FFF2-40B4-BE49-F238E27FC236}">
+                <a16:creationId xmlns:a16="http://schemas.microsoft.com/office/drawing/2014/main" id="{5C34B18D-6E76-2900-D135-3A71908B83E8}"/>
+              </a:ext>
+            </a:extLst>
+          </p:cNvPr>
           <p:cNvSpPr>
             <a:spLocks noGrp="1"/>
           </p:cNvSpPr>
@@ -6077,12 +6098,30 @@
             <a:pPr lvl="1"/>
             <a:r>
               <a:rPr kumimoji="1" lang="ja-JP" altLang="en-US" sz="1600" dirty="0"/>
-              <a:t>何を問うか・何を採るかを引き受けること</a:t>
+              <a:t>何を</a:t>
+            </a:r>
+            <a:r>
+              <a:rPr kumimoji="1" lang="ja-JP" altLang="en-US" sz="1600" b="1" dirty="0"/>
+              <a:t>問う</a:t>
+            </a:r>
+            <a:r>
+              <a:rPr kumimoji="1" lang="ja-JP" altLang="en-US" sz="1600" dirty="0"/>
+              <a:t>か・何を</a:t>
+            </a:r>
+            <a:r>
+              <a:rPr kumimoji="1" lang="ja-JP" altLang="en-US" sz="1600" b="1" dirty="0"/>
+              <a:t>採る</a:t>
+            </a:r>
+            <a:r>
+              <a:rPr kumimoji="1" lang="ja-JP" altLang="en-US" sz="1600" dirty="0"/>
+              <a:t>かを引き受けること</a:t>
             </a:r>
             <a:endParaRPr kumimoji="1" lang="en-US" altLang="ja-JP" sz="1600" dirty="0"/>
           </a:p>
           <a:p>
-            <a:pPr lvl="1"/>
+            <a:pPr marL="257173" lvl="1" indent="0">
+              <a:buNone/>
+            </a:pPr>
             <a:endParaRPr lang="ja-JP" altLang="en-US" dirty="0"/>
           </a:p>
           <a:p>
@@ -6160,12 +6199,16 @@
               <a:t>は、「</a:t>
             </a:r>
             <a:r>
-              <a:rPr lang="en-US" altLang="ja-JP" sz="1600" dirty="0"/>
+              <a:rPr lang="en-US" altLang="ja-JP" sz="1600" b="1" dirty="0"/>
               <a:t>AI</a:t>
             </a:r>
             <a:r>
+              <a:rPr lang="ja-JP" altLang="en-US" sz="1600" b="1" dirty="0"/>
+              <a:t>の圧倒的な演算力を前に、人間が判断の重要性を見失う</a:t>
+            </a:r>
+            <a:r>
               <a:rPr lang="ja-JP" altLang="en-US" sz="1600" dirty="0"/>
-              <a:t>の圧倒的な演算力を前に、人間が判断の重要性を見失う」</a:t>
+              <a:t>」</a:t>
             </a:r>
             <a:br>
               <a:rPr lang="en-US" altLang="ja-JP" sz="1600" dirty="0"/>
@@ -6196,7 +6239,13 @@
       </p:sp>
       <p:sp>
         <p:nvSpPr>
-          <p:cNvPr id="3" name="タイトル 2"/>
+          <p:cNvPr id="3" name="タイトル 2">
+            <a:extLst>
+              <a:ext uri="{FF2B5EF4-FFF2-40B4-BE49-F238E27FC236}">
+                <a16:creationId xmlns:a16="http://schemas.microsoft.com/office/drawing/2014/main" id="{4A4BDA9A-4807-9063-214E-28E79A1055C0}"/>
+              </a:ext>
+            </a:extLst>
+          </p:cNvPr>
           <p:cNvSpPr>
             <a:spLocks noGrp="1"/>
           </p:cNvSpPr>
@@ -6223,7 +6272,7 @@
           <p:cNvPr id="7" name="図 6">
             <a:extLst>
               <a:ext uri="{FF2B5EF4-FFF2-40B4-BE49-F238E27FC236}">
-                <a16:creationId xmlns:a16="http://schemas.microsoft.com/office/drawing/2014/main" id="{083A0CFA-A09A-3A63-F9FF-6345B2CAD640}"/>
+                <a16:creationId xmlns:a16="http://schemas.microsoft.com/office/drawing/2014/main" id="{4A22153F-3E1F-BA1D-0DF0-6F902F1C1553}"/>
               </a:ext>
             </a:extLst>
           </p:cNvPr>
@@ -6255,6 +6304,11 @@
         </p:spPr>
       </p:pic>
     </p:spTree>
+    <p:extLst>
+      <p:ext uri="{BB962C8B-B14F-4D97-AF65-F5344CB8AC3E}">
+        <p14:creationId xmlns:p14="http://schemas.microsoft.com/office/powerpoint/2010/main" val="594510954"/>
+      </p:ext>
+    </p:extLst>
   </p:cSld>
   <p:clrMapOvr>
     <a:masterClrMapping/>
@@ -6262,7 +6316,787 @@
 </p:sld>
 </file>
 
-<file path=ppt/slides/slide6.xml><?xml version="1.0" encoding="utf-8"?>
+<file path=ppt/slides/slide25.xml><?xml version="1.0" encoding="utf-8"?>
+<p:sld xmlns:a="http://schemas.openxmlformats.org/drawingml/2006/main" xmlns:r="http://schemas.openxmlformats.org/officeDocument/2006/relationships" xmlns:p="http://schemas.openxmlformats.org/presentationml/2006/main">
+  <p:cSld>
+    <p:spTree>
+      <p:nvGrpSpPr>
+        <p:cNvPr id="1" name=""/>
+        <p:cNvGrpSpPr/>
+        <p:nvPr/>
+      </p:nvGrpSpPr>
+      <p:grpSpPr>
+        <a:xfrm>
+          <a:off x="0" y="0"/>
+          <a:ext cx="0" cy="0"/>
+          <a:chOff x="0" y="0"/>
+          <a:chExt cx="0" cy="0"/>
+        </a:xfrm>
+      </p:grpSpPr>
+      <p:sp>
+        <p:nvSpPr>
+          <p:cNvPr id="2" name="コンテンツ プレースホルダー 1"/>
+          <p:cNvSpPr>
+            <a:spLocks noGrp="1"/>
+          </p:cNvSpPr>
+          <p:nvPr>
+            <p:ph idx="1"/>
+          </p:nvPr>
+        </p:nvSpPr>
+        <p:spPr/>
+        <p:txBody>
+          <a:bodyPr>
+            <a:normAutofit/>
+          </a:bodyPr>
+          <a:lstStyle/>
+          <a:p>
+            <a:r>
+              <a:rPr kumimoji="1" lang="ja-JP" altLang="en-US" sz="2400" b="1" dirty="0"/>
+              <a:t>「何を問うか」を引き受けるのは人間</a:t>
+            </a:r>
+          </a:p>
+          <a:p>
+            <a:pPr lvl="1"/>
+            <a:r>
+              <a:rPr kumimoji="1" lang="ja-JP" altLang="en-US" sz="2400" dirty="0"/>
+              <a:t>問いを立てることも</a:t>
+            </a:r>
+            <a:r>
+              <a:rPr kumimoji="1" lang="en-US" altLang="ja-JP" sz="2400" b="1" dirty="0"/>
+              <a:t>Judgement</a:t>
+            </a:r>
+            <a:r>
+              <a:rPr kumimoji="1" lang="ja-JP" altLang="en-US" sz="2400" dirty="0"/>
+              <a:t>である</a:t>
+            </a:r>
+            <a:endParaRPr kumimoji="1" lang="en-US" altLang="ja-JP" sz="2400" dirty="0"/>
+          </a:p>
+          <a:p>
+            <a:pPr lvl="1"/>
+            <a:r>
+              <a:rPr kumimoji="1" lang="ja-JP" altLang="en-US" sz="2400" dirty="0"/>
+              <a:t>責任：</a:t>
+            </a:r>
+            <a:endParaRPr kumimoji="1" lang="en-US" altLang="ja-JP" sz="2400" dirty="0"/>
+          </a:p>
+          <a:p>
+            <a:pPr lvl="2"/>
+            <a:r>
+              <a:rPr kumimoji="1" lang="ja-JP" altLang="en-US" sz="2400" dirty="0"/>
+              <a:t>違和感を問いとして言語化し、</a:t>
+            </a:r>
+            <a:endParaRPr kumimoji="1" lang="en-US" altLang="ja-JP" sz="2400" dirty="0"/>
+          </a:p>
+          <a:p>
+            <a:pPr lvl="2"/>
+            <a:r>
+              <a:rPr kumimoji="1" lang="ja-JP" altLang="en-US" sz="2400" dirty="0"/>
+              <a:t>満足できる条件を策定し、</a:t>
+            </a:r>
+            <a:endParaRPr kumimoji="1" lang="en-US" altLang="ja-JP" sz="2400" dirty="0"/>
+          </a:p>
+          <a:p>
+            <a:pPr lvl="2"/>
+            <a:r>
+              <a:rPr kumimoji="1" lang="ja-JP" altLang="en-US" sz="2400" dirty="0"/>
+              <a:t>受け入れるトレードオフを決める</a:t>
+            </a:r>
+            <a:endParaRPr kumimoji="1" lang="ja-JP" altLang="en-US" sz="2400" b="1" dirty="0"/>
+          </a:p>
+          <a:p>
+            <a:pPr lvl="1"/>
+            <a:r>
+              <a:rPr kumimoji="1" lang="ja-JP" altLang="en-US" sz="2400" b="1" dirty="0"/>
+              <a:t>責任無いコードはメンタルモデルが喪失している</a:t>
+            </a:r>
+            <a:endParaRPr kumimoji="1" lang="ja-JP" altLang="en-US" sz="2400" dirty="0"/>
+          </a:p>
+        </p:txBody>
+      </p:sp>
+      <p:sp>
+        <p:nvSpPr>
+          <p:cNvPr id="3" name="タイトル 2"/>
+          <p:cNvSpPr>
+            <a:spLocks noGrp="1"/>
+          </p:cNvSpPr>
+          <p:nvPr>
+            <p:ph type="title"/>
+          </p:nvPr>
+        </p:nvSpPr>
+        <p:spPr/>
+        <p:txBody>
+          <a:bodyPr/>
+          <a:lstStyle/>
+          <a:p>
+            <a:r>
+              <a:rPr kumimoji="1" lang="ja-JP" altLang="en-US" dirty="0"/>
+              <a:t>結び: 人間が引き受けるべきこと</a:t>
+            </a:r>
+          </a:p>
+        </p:txBody>
+      </p:sp>
+    </p:spTree>
+  </p:cSld>
+  <p:clrMapOvr>
+    <a:masterClrMapping/>
+  </p:clrMapOvr>
+</p:sld>
+</file>
+
+<file path=ppt/slides/slide26.xml><?xml version="1.0" encoding="utf-8"?>
+<p:sld xmlns:a="http://schemas.openxmlformats.org/drawingml/2006/main" xmlns:r="http://schemas.openxmlformats.org/officeDocument/2006/relationships" xmlns:p="http://schemas.openxmlformats.org/presentationml/2006/main">
+  <p:cSld>
+    <p:spTree>
+      <p:nvGrpSpPr>
+        <p:cNvPr id="1" name="">
+          <a:extLst>
+            <a:ext uri="{FF2B5EF4-FFF2-40B4-BE49-F238E27FC236}">
+              <a16:creationId xmlns:a16="http://schemas.microsoft.com/office/drawing/2014/main" id="{86F953D7-D1D8-9872-F82B-C58E1A08183E}"/>
+            </a:ext>
+          </a:extLst>
+        </p:cNvPr>
+        <p:cNvGrpSpPr/>
+        <p:nvPr/>
+      </p:nvGrpSpPr>
+      <p:grpSpPr>
+        <a:xfrm>
+          <a:off x="0" y="0"/>
+          <a:ext cx="0" cy="0"/>
+          <a:chOff x="0" y="0"/>
+          <a:chExt cx="0" cy="0"/>
+        </a:xfrm>
+      </p:grpSpPr>
+      <p:sp>
+        <p:nvSpPr>
+          <p:cNvPr id="2" name="コンテンツ 1">
+            <a:extLst>
+              <a:ext uri="{FF2B5EF4-FFF2-40B4-BE49-F238E27FC236}">
+                <a16:creationId xmlns:a16="http://schemas.microsoft.com/office/drawing/2014/main" id="{C234E5C6-7308-DBB9-103E-90172E568EEC}"/>
+              </a:ext>
+            </a:extLst>
+          </p:cNvPr>
+          <p:cNvSpPr txBox="1">
+            <a:spLocks/>
+          </p:cNvSpPr>
+          <p:nvPr/>
+        </p:nvSpPr>
+        <p:spPr>
+          <a:xfrm>
+            <a:off x="0" y="1000000"/>
+            <a:ext cx="9906000" cy="4800000"/>
+          </a:xfrm>
+          <a:prstGeom prst="rect">
+            <a:avLst/>
+          </a:prstGeom>
+        </p:spPr>
+        <p:txBody>
+          <a:bodyPr vert="horz" lIns="91440" tIns="91440" rIns="91440" bIns="91440" rtlCol="0" anchor="ctr">
+            <a:normAutofit/>
+          </a:bodyPr>
+          <a:lstStyle>
+            <a:lvl1pPr algn="ctr">
+              <a:defRPr kumimoji="1" sz="2400">
+                <a:solidFill>
+                  <a:schemeClr val="tx1"/>
+                </a:solidFill>
+                <a:latin typeface="+mn-ea"/>
+              </a:defRPr>
+            </a:lvl1pPr>
+          </a:lstStyle>
+          <a:p>
+            <a:pPr lvl="1"/>
+            <a:r>
+              <a:rPr lang="ja-JP" altLang="en-US" sz="3600" dirty="0"/>
+              <a:t>　　　設計（エンジニアリング）🧑‍💻</a:t>
+            </a:r>
+            <a:endParaRPr lang="en-US" altLang="ja-JP" sz="3600" dirty="0"/>
+          </a:p>
+          <a:p>
+            <a:pPr lvl="1"/>
+            <a:endParaRPr lang="en-US" altLang="ja-JP" sz="3600" dirty="0"/>
+          </a:p>
+          <a:p>
+            <a:pPr lvl="1"/>
+            <a:r>
+              <a:rPr lang="ja-JP" altLang="en-US" sz="3600" dirty="0"/>
+              <a:t>　　　　　　　　↓</a:t>
+            </a:r>
+            <a:r>
+              <a:rPr lang="ja-JP" altLang="en-US" sz="2800" dirty="0"/>
+              <a:t>判断</a:t>
+            </a:r>
+            <a:r>
+              <a:rPr lang="ja-JP" altLang="en-US" sz="3600" dirty="0"/>
+              <a:t>↓</a:t>
+            </a:r>
+            <a:br>
+              <a:rPr lang="en-US" altLang="ja-JP" sz="3600" dirty="0"/>
+            </a:br>
+            <a:endParaRPr lang="en-US" altLang="ja-JP" sz="3600" dirty="0"/>
+          </a:p>
+          <a:p>
+            <a:pPr lvl="1"/>
+            <a:r>
+              <a:rPr lang="ja-JP" altLang="en-US" sz="3600" dirty="0"/>
+              <a:t>「</a:t>
+            </a:r>
+            <a:r>
+              <a:rPr lang="ja-JP" altLang="en-US" sz="2800" dirty="0"/>
+              <a:t>判断 🙆→ 演算 🤖→ 判断🙅 → 演算🤖→判断 🙆」</a:t>
+            </a:r>
+            <a:br>
+              <a:rPr lang="en-US" altLang="ja-JP" dirty="0"/>
+            </a:br>
+            <a:endParaRPr lang="ja-JP" altLang="en-US" sz="2800" dirty="0"/>
+          </a:p>
+        </p:txBody>
+      </p:sp>
+    </p:spTree>
+    <p:extLst>
+      <p:ext uri="{BB962C8B-B14F-4D97-AF65-F5344CB8AC3E}">
+        <p14:creationId xmlns:p14="http://schemas.microsoft.com/office/powerpoint/2010/main" val="1406584280"/>
+      </p:ext>
+    </p:extLst>
+  </p:cSld>
+  <p:clrMapOvr>
+    <a:masterClrMapping/>
+  </p:clrMapOvr>
+</p:sld>
+</file>
+
+<file path=ppt/slides/slide27.xml><?xml version="1.0" encoding="utf-8"?>
+<p:sld xmlns:a="http://schemas.openxmlformats.org/drawingml/2006/main" xmlns:r="http://schemas.openxmlformats.org/officeDocument/2006/relationships" xmlns:p="http://schemas.openxmlformats.org/presentationml/2006/main">
+  <p:cSld>
+    <p:spTree>
+      <p:nvGrpSpPr>
+        <p:cNvPr id="1" name=""/>
+        <p:cNvGrpSpPr/>
+        <p:nvPr/>
+      </p:nvGrpSpPr>
+      <p:grpSpPr>
+        <a:xfrm>
+          <a:off x="0" y="0"/>
+          <a:ext cx="0" cy="0"/>
+          <a:chOff x="0" y="0"/>
+          <a:chExt cx="0" cy="0"/>
+        </a:xfrm>
+      </p:grpSpPr>
+      <p:sp>
+        <p:nvSpPr>
+          <p:cNvPr id="2" name="コンテンツ プレースホルダー 1"/>
+          <p:cNvSpPr>
+            <a:spLocks noGrp="1"/>
+          </p:cNvSpPr>
+          <p:nvPr>
+            <p:ph idx="1"/>
+          </p:nvPr>
+        </p:nvSpPr>
+        <p:spPr/>
+        <p:txBody>
+          <a:bodyPr>
+            <a:normAutofit/>
+          </a:bodyPr>
+          <a:lstStyle/>
+          <a:p>
+            <a:r>
+              <a:rPr kumimoji="1" lang="ja-JP" altLang="en-US" sz="1500" dirty="0"/>
+              <a:t>Redmine → GitHub Issue → コード → Wiki をつなぐ</a:t>
+            </a:r>
+          </a:p>
+          <a:p>
+            <a:pPr lvl="1"/>
+            <a:r>
+              <a:rPr kumimoji="1" lang="ja-JP" altLang="en-US" sz="1500" dirty="0"/>
+              <a:t>GitHub Agent が全体の整合をガーデニングする</a:t>
+            </a:r>
+          </a:p>
+          <a:p>
+            <a:pPr lvl="1"/>
+            <a:r>
+              <a:rPr kumimoji="1" lang="ja-JP" altLang="en-US" sz="1500" dirty="0"/>
+              <a:t>例: PR 時に Wiki 未更新を指摘する</a:t>
+            </a:r>
+          </a:p>
+          <a:p>
+            <a:endParaRPr lang="ja-JP" altLang="en-US" dirty="0"/>
+          </a:p>
+          <a:p>
+            <a:r>
+              <a:rPr kumimoji="1" lang="ja-JP" altLang="en-US" sz="1500" b="1" dirty="0"/>
+              <a:t>Phase 2</a:t>
+            </a:r>
+          </a:p>
+          <a:p>
+            <a:pPr lvl="1"/>
+            <a:r>
+              <a:rPr kumimoji="1" lang="ja-JP" altLang="en-US" sz="1500" dirty="0"/>
+              <a:t>Claude Code Action による自動ドキュメント生成 PR</a:t>
+            </a:r>
+          </a:p>
+          <a:p>
+            <a:endParaRPr lang="ja-JP" altLang="en-US" dirty="0"/>
+          </a:p>
+          <a:p>
+            <a:r>
+              <a:rPr kumimoji="1" lang="ja-JP" altLang="en-US" sz="1500" b="1" dirty="0"/>
+              <a:t>Judgment → Reckoning → Judgment</a:t>
+            </a:r>
+          </a:p>
+          <a:p>
+            <a:pPr lvl="1"/>
+            <a:r>
+              <a:rPr kumimoji="1" lang="ja-JP" altLang="en-US" sz="1500" dirty="0"/>
+              <a:t>問いを立てる</a:t>
+            </a:r>
+          </a:p>
+          <a:p>
+            <a:pPr lvl="1"/>
+            <a:r>
+              <a:rPr kumimoji="1" lang="ja-JP" altLang="en-US" sz="1500" dirty="0"/>
+              <a:t>AI に演算させる</a:t>
+            </a:r>
+          </a:p>
+          <a:p>
+            <a:pPr lvl="1"/>
+            <a:r>
+              <a:rPr kumimoji="1" lang="ja-JP" altLang="en-US" sz="1500" dirty="0"/>
+              <a:t>採否を決める → また問いを立てる</a:t>
+            </a:r>
+          </a:p>
+        </p:txBody>
+      </p:sp>
+      <p:sp>
+        <p:nvSpPr>
+          <p:cNvPr id="3" name="タイトル 2"/>
+          <p:cNvSpPr>
+            <a:spLocks noGrp="1"/>
+          </p:cNvSpPr>
+          <p:nvPr>
+            <p:ph type="title"/>
+          </p:nvPr>
+        </p:nvSpPr>
+        <p:spPr/>
+        <p:txBody>
+          <a:bodyPr/>
+          <a:lstStyle/>
+          <a:p>
+            <a:r>
+              <a:rPr kumimoji="1" lang="ja-JP" altLang="en-US" dirty="0"/>
+              <a:t>将来の展望と最後のループ</a:t>
+            </a:r>
+          </a:p>
+        </p:txBody>
+      </p:sp>
+    </p:spTree>
+  </p:cSld>
+  <p:clrMapOvr>
+    <a:masterClrMapping/>
+  </p:clrMapOvr>
+</p:sld>
+</file>
+
+<file path=ppt/slides/slide28.xml><?xml version="1.0" encoding="utf-8"?>
+<p:sld xmlns:a="http://schemas.openxmlformats.org/drawingml/2006/main" xmlns:r="http://schemas.openxmlformats.org/officeDocument/2006/relationships" xmlns:p="http://schemas.openxmlformats.org/presentationml/2006/main">
+  <p:cSld>
+    <p:spTree>
+      <p:nvGrpSpPr>
+        <p:cNvPr id="1" name=""/>
+        <p:cNvGrpSpPr/>
+        <p:nvPr/>
+      </p:nvGrpSpPr>
+      <p:grpSpPr>
+        <a:xfrm>
+          <a:off x="0" y="0"/>
+          <a:ext cx="0" cy="0"/>
+          <a:chOff x="0" y="0"/>
+          <a:chExt cx="0" cy="0"/>
+        </a:xfrm>
+      </p:grpSpPr>
+      <p:sp>
+        <p:nvSpPr>
+          <p:cNvPr id="2" name="コンテンツ 1"/>
+          <p:cNvSpPr txBox="1">
+            <a:spLocks/>
+          </p:cNvSpPr>
+          <p:nvPr/>
+        </p:nvSpPr>
+        <p:spPr>
+          <a:xfrm>
+            <a:off x="697186" y="1000000"/>
+            <a:ext cx="8496300" cy="4800000"/>
+          </a:xfrm>
+          <a:prstGeom prst="rect">
+            <a:avLst/>
+          </a:prstGeom>
+        </p:spPr>
+        <p:txBody>
+          <a:bodyPr vert="horz" lIns="91440" tIns="91440" rIns="91440" bIns="91440" rtlCol="0" anchor="ctr">
+            <a:normAutofit/>
+          </a:bodyPr>
+          <a:lstStyle>
+            <a:lvl1pPr algn="ctr">
+              <a:defRPr kumimoji="1" sz="2400">
+                <a:solidFill>
+                  <a:schemeClr val="tx1"/>
+                </a:solidFill>
+                <a:latin typeface="+mn-ea"/>
+              </a:defRPr>
+            </a:lvl1pPr>
+          </a:lstStyle>
+          <a:p>
+            <a:r>
+              <a:rPr kumimoji="1" lang="ja-JP" altLang="en-US" sz="2600" dirty="0"/>
+              <a:t>レビューでは</a:t>
+            </a:r>
+          </a:p>
+          <a:p>
+            <a:r>
+              <a:rPr kumimoji="1" lang="ja-JP" altLang="en-US" sz="2800" b="1" dirty="0"/>
+              <a:t>「場」と「</a:t>
+            </a:r>
+            <a:r>
+              <a:rPr lang="ja-JP" altLang="en-US" sz="2800" b="1" dirty="0"/>
+              <a:t>仕組み</a:t>
+            </a:r>
+            <a:r>
+              <a:rPr kumimoji="1" lang="ja-JP" altLang="en-US" sz="2800" b="1" dirty="0"/>
+              <a:t>」を分けて考える</a:t>
+            </a:r>
+          </a:p>
+          <a:p>
+            <a:endParaRPr lang="ja-JP" altLang="en-US" dirty="0"/>
+          </a:p>
+          <a:p>
+            <a:r>
+              <a:rPr kumimoji="1" lang="ja-JP" altLang="en-US" sz="1900" dirty="0"/>
+              <a:t>場: この変更を組み込むか</a:t>
+            </a:r>
+          </a:p>
+          <a:p>
+            <a:r>
+              <a:rPr kumimoji="1" lang="ja-JP" altLang="en-US" sz="1900" dirty="0"/>
+              <a:t>制度: その判断を担える人を増やす</a:t>
+            </a:r>
+          </a:p>
+        </p:txBody>
+      </p:sp>
+    </p:spTree>
+  </p:cSld>
+  <p:clrMapOvr>
+    <a:masterClrMapping/>
+  </p:clrMapOvr>
+</p:sld>
+</file>
+
+<file path=ppt/slides/slide3.xml><?xml version="1.0" encoding="utf-8"?>
+<p:sld xmlns:a="http://schemas.openxmlformats.org/drawingml/2006/main" xmlns:r="http://schemas.openxmlformats.org/officeDocument/2006/relationships" xmlns:p="http://schemas.openxmlformats.org/presentationml/2006/main">
+  <p:cSld>
+    <p:spTree>
+      <p:nvGrpSpPr>
+        <p:cNvPr id="1" name=""/>
+        <p:cNvGrpSpPr/>
+        <p:nvPr/>
+      </p:nvGrpSpPr>
+      <p:grpSpPr>
+        <a:xfrm>
+          <a:off x="0" y="0"/>
+          <a:ext cx="0" cy="0"/>
+          <a:chOff x="0" y="0"/>
+          <a:chExt cx="0" cy="0"/>
+        </a:xfrm>
+      </p:grpSpPr>
+      <p:sp>
+        <p:nvSpPr>
+          <p:cNvPr id="2" name="コンテンツ プレースホルダー 1"/>
+          <p:cNvSpPr>
+            <a:spLocks noGrp="1"/>
+          </p:cNvSpPr>
+          <p:nvPr>
+            <p:ph idx="1"/>
+          </p:nvPr>
+        </p:nvSpPr>
+        <p:spPr/>
+        <p:txBody>
+          <a:bodyPr>
+            <a:normAutofit lnSpcReduction="10000"/>
+          </a:bodyPr>
+          <a:lstStyle/>
+          <a:p>
+            <a:r>
+              <a:rPr kumimoji="1" lang="ja-JP" altLang="en-US" sz="1600" dirty="0"/>
+              <a:t>はじめに — 枠組み: 判断と演算</a:t>
+            </a:r>
+          </a:p>
+          <a:p>
+            <a:r>
+              <a:rPr kumimoji="1" lang="ja-JP" altLang="en-US" sz="1600" dirty="0"/>
+              <a:t>全体像 — 2つの仕組み</a:t>
+            </a:r>
+            <a:endParaRPr lang="ja-JP" altLang="en-US" dirty="0"/>
+          </a:p>
+          <a:p>
+            <a:r>
+              <a:rPr kumimoji="1" lang="ja-JP" altLang="en-US" sz="1600" dirty="0"/>
+              <a:t>事例1: ドキュメントパイプライン</a:t>
+            </a:r>
+          </a:p>
+          <a:p>
+            <a:pPr lvl="1"/>
+            <a:r>
+              <a:rPr kumimoji="1" lang="ja-JP" altLang="en-US" sz="1600" dirty="0"/>
+              <a:t>課題 / 判断 / 演算 / 効果</a:t>
+            </a:r>
+            <a:endParaRPr lang="ja-JP" altLang="en-US" dirty="0"/>
+          </a:p>
+          <a:p>
+            <a:r>
+              <a:rPr kumimoji="1" lang="ja-JP" altLang="en-US" sz="1600" dirty="0"/>
+              <a:t>事例2: AIレビューワークフロー</a:t>
+            </a:r>
+          </a:p>
+          <a:p>
+            <a:pPr lvl="1"/>
+            <a:r>
+              <a:rPr kumimoji="1" lang="ja-JP" altLang="en-US" sz="1600" dirty="0"/>
+              <a:t>課題 / 判断 / 演算 / 効果 / 制度</a:t>
+            </a:r>
+            <a:endParaRPr lang="ja-JP" altLang="en-US" dirty="0"/>
+          </a:p>
+          <a:p>
+            <a:r>
+              <a:rPr kumimoji="1" lang="ja-JP" altLang="en-US" sz="1600" dirty="0"/>
+              <a:t>2つの事例が示すパターン</a:t>
+            </a:r>
+          </a:p>
+          <a:p>
+            <a:r>
+              <a:rPr kumimoji="1" lang="ja-JP" altLang="en-US" sz="1600" dirty="0"/>
+              <a:t>結び / 将来の展望</a:t>
+            </a:r>
+          </a:p>
+        </p:txBody>
+      </p:sp>
+      <p:sp>
+        <p:nvSpPr>
+          <p:cNvPr id="3" name="タイトル 2"/>
+          <p:cNvSpPr>
+            <a:spLocks noGrp="1"/>
+          </p:cNvSpPr>
+          <p:nvPr>
+            <p:ph type="title"/>
+          </p:nvPr>
+        </p:nvSpPr>
+        <p:spPr/>
+        <p:txBody>
+          <a:bodyPr/>
+          <a:lstStyle/>
+          <a:p>
+            <a:r>
+              <a:rPr kumimoji="1" lang="ja-JP" altLang="en-US" dirty="0"/>
+              <a:t>今日話すこと</a:t>
+            </a:r>
+          </a:p>
+        </p:txBody>
+      </p:sp>
+    </p:spTree>
+  </p:cSld>
+  <p:clrMapOvr>
+    <a:masterClrMapping/>
+  </p:clrMapOvr>
+</p:sld>
+</file>
+
+<file path=ppt/slides/slide4.xml><?xml version="1.0" encoding="utf-8"?>
+<p:sld xmlns:a="http://schemas.openxmlformats.org/drawingml/2006/main" xmlns:r="http://schemas.openxmlformats.org/officeDocument/2006/relationships" xmlns:p="http://schemas.openxmlformats.org/presentationml/2006/main">
+  <p:cSld>
+    <p:spTree>
+      <p:nvGrpSpPr>
+        <p:cNvPr id="1" name=""/>
+        <p:cNvGrpSpPr/>
+        <p:nvPr/>
+      </p:nvGrpSpPr>
+      <p:grpSpPr>
+        <a:xfrm>
+          <a:off x="0" y="0"/>
+          <a:ext cx="0" cy="0"/>
+          <a:chOff x="0" y="0"/>
+          <a:chExt cx="0" cy="0"/>
+        </a:xfrm>
+      </p:grpSpPr>
+      <p:sp>
+        <p:nvSpPr>
+          <p:cNvPr id="2" name="コンテンツ プレースホルダー 1"/>
+          <p:cNvSpPr>
+            <a:spLocks noGrp="1"/>
+          </p:cNvSpPr>
+          <p:nvPr>
+            <p:ph idx="1"/>
+          </p:nvPr>
+        </p:nvSpPr>
+        <p:spPr/>
+        <p:txBody>
+          <a:bodyPr>
+            <a:normAutofit/>
+          </a:bodyPr>
+          <a:lstStyle/>
+          <a:p>
+            <a:r>
+              <a:rPr kumimoji="1" lang="ja-JP" altLang="en-US" sz="2800" b="1" dirty="0"/>
+              <a:t>Judgment（判断）</a:t>
+            </a:r>
+            <a:r>
+              <a:rPr lang="ja-JP" altLang="en-US" sz="2800" dirty="0"/>
+              <a:t>🧑‍💻</a:t>
+            </a:r>
+            <a:endParaRPr kumimoji="1" lang="ja-JP" altLang="en-US" sz="2800" b="1" dirty="0"/>
+          </a:p>
+          <a:p>
+            <a:pPr lvl="1"/>
+            <a:r>
+              <a:rPr kumimoji="1" lang="ja-JP" altLang="en-US" sz="2800" dirty="0"/>
+              <a:t>何を問うか・何を採るかを引き受けること</a:t>
+            </a:r>
+            <a:endParaRPr kumimoji="1" lang="en-US" altLang="ja-JP" sz="2800" dirty="0"/>
+          </a:p>
+          <a:p>
+            <a:pPr lvl="2"/>
+            <a:r>
+              <a:rPr lang="en-US" altLang="ja-JP" sz="2000" dirty="0"/>
+              <a:t>Ex </a:t>
+            </a:r>
+            <a:r>
+              <a:rPr lang="ja-JP" altLang="en-US" sz="2000" dirty="0"/>
+              <a:t>トレードオフの判断</a:t>
+            </a:r>
+            <a:endParaRPr lang="en-US" altLang="ja-JP" sz="2000" dirty="0"/>
+          </a:p>
+          <a:p>
+            <a:pPr lvl="2"/>
+            <a:r>
+              <a:rPr kumimoji="1" lang="en-US" altLang="ja-JP" sz="2000" dirty="0"/>
+              <a:t>Ex </a:t>
+            </a:r>
+            <a:r>
+              <a:rPr kumimoji="1" lang="ja-JP" altLang="en-US" sz="2000" dirty="0"/>
+              <a:t>何を解決するかの判断</a:t>
+            </a:r>
+            <a:endParaRPr lang="ja-JP" altLang="en-US" sz="1400" dirty="0"/>
+          </a:p>
+          <a:p>
+            <a:r>
+              <a:rPr kumimoji="1" lang="ja-JP" altLang="en-US" sz="2800" b="1" dirty="0"/>
+              <a:t>Reckoning（演算）</a:t>
+            </a:r>
+            <a:r>
+              <a:rPr lang="ja-JP" altLang="en-US" sz="2800" dirty="0"/>
+              <a:t>🤖💻</a:t>
+            </a:r>
+            <a:endParaRPr kumimoji="1" lang="ja-JP" altLang="en-US" sz="2800" b="1" dirty="0"/>
+          </a:p>
+          <a:p>
+            <a:pPr lvl="1"/>
+            <a:r>
+              <a:rPr kumimoji="1" lang="ja-JP" altLang="en-US" sz="2800" dirty="0"/>
+              <a:t>与えられた条件で広く計算すること</a:t>
+            </a:r>
+            <a:endParaRPr kumimoji="1" lang="en-US" altLang="ja-JP" sz="2800" dirty="0"/>
+          </a:p>
+          <a:p>
+            <a:pPr lvl="2"/>
+            <a:r>
+              <a:rPr kumimoji="1" lang="en-US" altLang="ja-JP" sz="2000" dirty="0"/>
+              <a:t>Ex </a:t>
+            </a:r>
+            <a:r>
+              <a:rPr kumimoji="1" lang="ja-JP" altLang="en-US" sz="2000" dirty="0"/>
+              <a:t>コンテキストに従って生成すること</a:t>
+            </a:r>
+            <a:endParaRPr kumimoji="1" lang="en-US" altLang="ja-JP" sz="2000" dirty="0"/>
+          </a:p>
+          <a:p>
+            <a:pPr lvl="2"/>
+            <a:r>
+              <a:rPr lang="en-US" altLang="ja-JP" sz="2000" dirty="0"/>
+              <a:t>Ex </a:t>
+            </a:r>
+            <a:r>
+              <a:rPr lang="ja-JP" altLang="en-US" sz="2000" dirty="0"/>
+              <a:t>ツールを使って処理すること</a:t>
+            </a:r>
+            <a:endParaRPr kumimoji="1" lang="ja-JP" altLang="en-US" sz="2000" dirty="0"/>
+          </a:p>
+        </p:txBody>
+      </p:sp>
+      <p:sp>
+        <p:nvSpPr>
+          <p:cNvPr id="3" name="タイトル 2"/>
+          <p:cNvSpPr>
+            <a:spLocks noGrp="1"/>
+          </p:cNvSpPr>
+          <p:nvPr>
+            <p:ph type="title"/>
+          </p:nvPr>
+        </p:nvSpPr>
+        <p:spPr/>
+        <p:txBody>
+          <a:bodyPr>
+            <a:normAutofit fontScale="90000"/>
+          </a:bodyPr>
+          <a:lstStyle/>
+          <a:p>
+            <a:r>
+              <a:rPr kumimoji="1" lang="ja-JP" altLang="en-US" dirty="0"/>
+              <a:t>枠組み: 判断（Judgment）と演算（Reckoning）</a:t>
+            </a:r>
+          </a:p>
+        </p:txBody>
+      </p:sp>
+      <p:pic>
+        <p:nvPicPr>
+          <p:cNvPr id="6" name="図 5">
+            <a:extLst>
+              <a:ext uri="{FF2B5EF4-FFF2-40B4-BE49-F238E27FC236}">
+                <a16:creationId xmlns:a16="http://schemas.microsoft.com/office/drawing/2014/main" id="{DD70937A-5EE4-27D0-92C7-AB41BE5F0861}"/>
+              </a:ext>
+            </a:extLst>
+          </p:cNvPr>
+          <p:cNvPicPr>
+            <a:picLocks noChangeAspect="1"/>
+          </p:cNvPicPr>
+          <p:nvPr/>
+        </p:nvPicPr>
+        <p:blipFill>
+          <a:blip r:embed="rId2">
+            <a:extLst>
+              <a:ext uri="{28A0092B-C50C-407E-A947-70E740481C1C}">
+                <a14:useLocalDpi xmlns:a14="http://schemas.microsoft.com/office/drawing/2010/main" val="0"/>
+              </a:ext>
+            </a:extLst>
+          </a:blip>
+          <a:srcRect l="14905" t="2673" r="15827"/>
+          <a:stretch>
+            <a:fillRect/>
+          </a:stretch>
+        </p:blipFill>
+        <p:spPr>
+          <a:xfrm>
+            <a:off x="7365268" y="4002065"/>
+            <a:ext cx="2540732" cy="2855935"/>
+          </a:xfrm>
+          <a:prstGeom prst="rect">
+            <a:avLst/>
+          </a:prstGeom>
+        </p:spPr>
+      </p:pic>
+    </p:spTree>
+  </p:cSld>
+  <p:clrMapOvr>
+    <a:masterClrMapping/>
+  </p:clrMapOvr>
+</p:sld>
+</file>
+
+<file path=ppt/slides/slide5.xml><?xml version="1.0" encoding="utf-8"?>
 <p:sld xmlns:a="http://schemas.openxmlformats.org/drawingml/2006/main" xmlns:r="http://schemas.openxmlformats.org/officeDocument/2006/relationships" xmlns:p="http://schemas.openxmlformats.org/presentationml/2006/main">
   <p:cSld>
     <p:spTree>
@@ -6301,8 +7135,8 @@
         </p:nvSpPr>
         <p:spPr>
           <a:xfrm>
-            <a:off x="697186" y="1000000"/>
-            <a:ext cx="8496300" cy="4800000"/>
+            <a:off x="0" y="1000000"/>
+            <a:ext cx="9906000" cy="4800000"/>
           </a:xfrm>
           <a:prstGeom prst="rect">
             <a:avLst/>
@@ -6333,72 +7167,50 @@
             <a:endParaRPr lang="ja-JP" altLang="en-US" sz="2800" b="1" dirty="0"/>
           </a:p>
           <a:p>
-            <a:pPr marL="742950" lvl="1" indent="-285750">
-              <a:buFont typeface="Arial" panose="020B0604020202020204" pitchFamily="34" charset="0"/>
-              <a:buChar char="•"/>
-            </a:pPr>
+            <a:pPr lvl="1"/>
+            <a:r>
+              <a:rPr lang="ja-JP" altLang="en-US" sz="3600" dirty="0"/>
+              <a:t>　　　　　　　　設計🧑‍💻</a:t>
+            </a:r>
+            <a:endParaRPr lang="en-US" altLang="ja-JP" sz="3600" dirty="0"/>
+          </a:p>
+          <a:p>
+            <a:pPr lvl="1"/>
+            <a:endParaRPr lang="en-US" altLang="ja-JP" sz="3600" dirty="0"/>
+          </a:p>
+          <a:p>
+            <a:pPr lvl="1"/>
+            <a:r>
+              <a:rPr lang="ja-JP" altLang="en-US" sz="3600" dirty="0"/>
+              <a:t>　　　　　　　　↓</a:t>
+            </a:r>
             <a:r>
               <a:rPr lang="ja-JP" altLang="en-US" sz="2800" dirty="0"/>
-              <a:t>設計🧑‍💻↓↓↓</a:t>
+              <a:t>判断</a:t>
+            </a:r>
+            <a:r>
+              <a:rPr lang="ja-JP" altLang="en-US" sz="3600" dirty="0"/>
+              <a:t>↓</a:t>
             </a:r>
             <a:br>
-              <a:rPr lang="en-US" altLang="ja-JP" sz="2800" dirty="0"/>
+              <a:rPr lang="en-US" altLang="ja-JP" sz="3600" dirty="0"/>
             </a:br>
+            <a:endParaRPr lang="en-US" altLang="ja-JP" sz="3600" dirty="0"/>
+          </a:p>
+          <a:p>
+            <a:pPr lvl="1"/>
+            <a:r>
+              <a:rPr lang="ja-JP" altLang="en-US" sz="3600" dirty="0"/>
+              <a:t>「</a:t>
+            </a:r>
             <a:r>
               <a:rPr lang="ja-JP" altLang="en-US" sz="2800" dirty="0"/>
-              <a:t>「</a:t>
-            </a:r>
-            <a:r>
-              <a:rPr lang="ja-JP" altLang="en-US" sz="2000" dirty="0"/>
               <a:t>判断 🙆→ 演算 🤖→ 判断🙅 → 演算🤖→判断 🙆」</a:t>
             </a:r>
             <a:br>
               <a:rPr lang="en-US" altLang="ja-JP" dirty="0"/>
             </a:br>
             <a:endParaRPr lang="ja-JP" altLang="en-US" sz="2800" dirty="0"/>
-          </a:p>
-          <a:p>
-            <a:pPr marL="742950" lvl="1" indent="-285750">
-              <a:buFont typeface="Arial" panose="020B0604020202020204" pitchFamily="34" charset="0"/>
-              <a:buChar char="•"/>
-            </a:pPr>
-            <a:r>
-              <a:rPr lang="ja-JP" altLang="en-US" sz="2000" dirty="0"/>
-              <a:t>特にレビューでは、「現在の判断」だけでなく</a:t>
-            </a:r>
-            <a:br>
-              <a:rPr lang="en-US" altLang="ja-JP" sz="2000" dirty="0"/>
-            </a:br>
-            <a:r>
-              <a:rPr lang="ja-JP" altLang="en-US" sz="2000" dirty="0"/>
-              <a:t>「将来その</a:t>
-            </a:r>
-            <a:r>
-              <a:rPr lang="ja-JP" altLang="en-US" sz="2000" b="1" dirty="0"/>
-              <a:t>判断</a:t>
-            </a:r>
-            <a:r>
-              <a:rPr lang="ja-JP" altLang="en-US" sz="2000" dirty="0"/>
-              <a:t>を担える人を増やす事」まで考えよう</a:t>
-            </a:r>
-            <a:endParaRPr lang="en-US" altLang="ja-JP" sz="2000" dirty="0"/>
-          </a:p>
-          <a:p>
-            <a:pPr marL="742950" lvl="1" indent="-285750">
-              <a:buFont typeface="Arial" panose="020B0604020202020204" pitchFamily="34" charset="0"/>
-              <a:buChar char="•"/>
-            </a:pPr>
-            <a:endParaRPr lang="en-US" altLang="ja-JP" sz="2000" dirty="0"/>
-          </a:p>
-          <a:p>
-            <a:pPr marL="742950" lvl="1" indent="-285750">
-              <a:buFont typeface="Arial" panose="020B0604020202020204" pitchFamily="34" charset="0"/>
-              <a:buChar char="•"/>
-            </a:pPr>
-            <a:r>
-              <a:rPr lang="ja-JP" altLang="en-US" sz="2000" dirty="0"/>
-              <a:t>判断とメタ判断</a:t>
-            </a:r>
           </a:p>
         </p:txBody>
       </p:sp>
@@ -6408,6 +7220,185 @@
         <p14:creationId xmlns:p14="http://schemas.microsoft.com/office/powerpoint/2010/main" val="455247066"/>
       </p:ext>
     </p:extLst>
+  </p:cSld>
+  <p:clrMapOvr>
+    <a:masterClrMapping/>
+  </p:clrMapOvr>
+</p:sld>
+</file>
+
+<file path=ppt/slides/slide6.xml><?xml version="1.0" encoding="utf-8"?>
+<p:sld xmlns:a="http://schemas.openxmlformats.org/drawingml/2006/main" xmlns:r="http://schemas.openxmlformats.org/officeDocument/2006/relationships" xmlns:p="http://schemas.openxmlformats.org/presentationml/2006/main">
+  <p:cSld>
+    <p:spTree>
+      <p:nvGrpSpPr>
+        <p:cNvPr id="1" name=""/>
+        <p:cNvGrpSpPr/>
+        <p:nvPr/>
+      </p:nvGrpSpPr>
+      <p:grpSpPr>
+        <a:xfrm>
+          <a:off x="0" y="0"/>
+          <a:ext cx="0" cy="0"/>
+          <a:chOff x="0" y="0"/>
+          <a:chExt cx="0" cy="0"/>
+        </a:xfrm>
+      </p:grpSpPr>
+      <p:sp>
+        <p:nvSpPr>
+          <p:cNvPr id="2" name="コンテンツ プレースホルダー 1"/>
+          <p:cNvSpPr>
+            <a:spLocks noGrp="1"/>
+          </p:cNvSpPr>
+          <p:nvPr>
+            <p:ph idx="1"/>
+          </p:nvPr>
+        </p:nvSpPr>
+        <p:spPr/>
+        <p:txBody>
+          <a:bodyPr>
+            <a:normAutofit/>
+          </a:bodyPr>
+          <a:lstStyle/>
+          <a:p>
+            <a:r>
+              <a:rPr kumimoji="1" lang="ja-JP" altLang="en-US" sz="1800" b="1" dirty="0"/>
+              <a:t>事例1: ドキュメントパイプライン</a:t>
+            </a:r>
+          </a:p>
+          <a:p>
+            <a:pPr lvl="1"/>
+            <a:r>
+              <a:rPr kumimoji="1" lang="ja-JP" altLang="en-US" sz="1800" dirty="0"/>
+              <a:t>Git 上の Markdown（193ファイル）↔ 社内 Wiki（GROWI）の同期システム</a:t>
+            </a:r>
+          </a:p>
+          <a:p>
+            <a:pPr lvl="1"/>
+            <a:r>
+              <a:rPr kumimoji="1" lang="ja-JP" altLang="en-US" sz="1800" dirty="0"/>
+              <a:t>「</a:t>
+            </a:r>
+            <a:r>
+              <a:rPr lang="ja-JP" altLang="en-US" sz="1800" dirty="0"/>
+              <a:t>作業の進め方」「成果物の作り方」</a:t>
+            </a:r>
+            <a:r>
+              <a:rPr kumimoji="1" lang="ja-JP" altLang="en-US" sz="1800" dirty="0"/>
+              <a:t>を設計した</a:t>
+            </a:r>
+            <a:endParaRPr kumimoji="1" lang="en-US" altLang="ja-JP" sz="1800" dirty="0"/>
+          </a:p>
+          <a:p>
+            <a:pPr lvl="1"/>
+            <a:r>
+              <a:rPr lang="ja-JP" altLang="en-US" sz="1800" dirty="0"/>
+              <a:t>作り方を作る</a:t>
+            </a:r>
+          </a:p>
+          <a:p>
+            <a:r>
+              <a:rPr kumimoji="1" lang="ja-JP" altLang="en-US" sz="1800" b="1" dirty="0"/>
+              <a:t>事例2: AIレビューワークフロー</a:t>
+            </a:r>
+          </a:p>
+          <a:p>
+            <a:pPr lvl="1"/>
+            <a:r>
+              <a:rPr kumimoji="1" lang="ja-JP" altLang="en-US" sz="1800" dirty="0"/>
+              <a:t>Claude Code スキル/エージェント </a:t>
+            </a:r>
+            <a:r>
+              <a:rPr lang="ja-JP" altLang="en-US" sz="1800" dirty="0"/>
+              <a:t>↔</a:t>
+            </a:r>
+            <a:r>
+              <a:rPr kumimoji="1" lang="ja-JP" altLang="en-US" sz="1800" dirty="0"/>
+              <a:t>構造化レビュー ↔GitHub PR</a:t>
+            </a:r>
+          </a:p>
+          <a:p>
+            <a:pPr lvl="1"/>
+            <a:r>
+              <a:rPr kumimoji="1" lang="ja-JP" altLang="en-US" sz="1600" dirty="0"/>
+              <a:t>「人間・</a:t>
+            </a:r>
+            <a:r>
+              <a:rPr kumimoji="1" lang="en-US" altLang="ja-JP" sz="1600" dirty="0"/>
+              <a:t>AI</a:t>
+            </a:r>
+            <a:r>
+              <a:rPr kumimoji="1" lang="ja-JP" altLang="en-US" sz="1600" dirty="0"/>
+              <a:t>・ツールの役割分担」「判断力を持続可能にする仕組み」を設計した</a:t>
+            </a:r>
+            <a:endParaRPr kumimoji="1" lang="en-US" altLang="ja-JP" sz="1600" dirty="0"/>
+          </a:p>
+          <a:p>
+            <a:pPr lvl="1"/>
+            <a:r>
+              <a:rPr kumimoji="1" lang="ja-JP" altLang="en-US" sz="1600" dirty="0"/>
+              <a:t>育て方を作る</a:t>
+            </a:r>
+            <a:endParaRPr kumimoji="1" lang="en-US" altLang="ja-JP" sz="1600" dirty="0"/>
+          </a:p>
+          <a:p>
+            <a:pPr lvl="1"/>
+            <a:endParaRPr lang="ja-JP" altLang="en-US" dirty="0"/>
+          </a:p>
+          <a:p>
+            <a:r>
+              <a:rPr kumimoji="1" lang="ja-JP" altLang="en-US" sz="2000" b="1" dirty="0"/>
+              <a:t>共通パターン:</a:t>
+            </a:r>
+          </a:p>
+          <a:p>
+            <a:pPr lvl="1"/>
+            <a:r>
+              <a:rPr kumimoji="1" lang="ja-JP" altLang="en-US" sz="2000" dirty="0"/>
+              <a:t>人間</a:t>
+            </a:r>
+            <a:r>
+              <a:rPr lang="ja-JP" altLang="en-US" sz="2000" dirty="0"/>
+              <a:t>🧑‍💻</a:t>
+            </a:r>
+            <a:r>
+              <a:rPr kumimoji="1" lang="ja-JP" altLang="en-US" sz="2000" dirty="0"/>
+              <a:t>が判断の枠組みを作り、AI</a:t>
+            </a:r>
+            <a:r>
+              <a:rPr lang="ja-JP" altLang="en-US" sz="2000" dirty="0"/>
+              <a:t>🤖</a:t>
+            </a:r>
+            <a:r>
+              <a:rPr kumimoji="1" lang="ja-JP" altLang="en-US" sz="2000" dirty="0"/>
+              <a:t>が演算を担う</a:t>
+            </a:r>
+          </a:p>
+        </p:txBody>
+      </p:sp>
+      <p:sp>
+        <p:nvSpPr>
+          <p:cNvPr id="3" name="タイトル 2"/>
+          <p:cNvSpPr>
+            <a:spLocks noGrp="1"/>
+          </p:cNvSpPr>
+          <p:nvPr>
+            <p:ph type="title"/>
+          </p:nvPr>
+        </p:nvSpPr>
+        <p:spPr/>
+        <p:txBody>
+          <a:bodyPr/>
+          <a:lstStyle/>
+          <a:p>
+            <a:r>
+              <a:rPr kumimoji="1" lang="ja-JP" altLang="en-US" dirty="0"/>
+              <a:t>今日話す2つの仕組み</a:t>
+            </a:r>
+          </a:p>
+        </p:txBody>
+      </p:sp>
+    </p:spTree>
   </p:cSld>
   <p:clrMapOvr>
     <a:masterClrMapping/>
@@ -6434,12 +7425,36 @@
       </p:grpSpPr>
       <p:sp>
         <p:nvSpPr>
-          <p:cNvPr id="2" name="コンテンツ プレースホルダー 1"/>
+          <p:cNvPr id="2" name="タイトル 1"/>
           <p:cNvSpPr>
             <a:spLocks noGrp="1"/>
           </p:cNvSpPr>
           <p:nvPr>
-            <p:ph idx="1"/>
+            <p:ph type="ctrTitle"/>
+          </p:nvPr>
+        </p:nvSpPr>
+        <p:spPr/>
+        <p:txBody>
+          <a:bodyPr>
+            <a:normAutofit fontScale="90000"/>
+          </a:bodyPr>
+          <a:lstStyle/>
+          <a:p>
+            <a:r>
+              <a:rPr kumimoji="1" lang="ja-JP" altLang="en-US" sz="2600" dirty="0"/>
+              <a:t>事例1　ドキュメントパイプライン</a:t>
+            </a:r>
+          </a:p>
+        </p:txBody>
+      </p:sp>
+      <p:sp>
+        <p:nvSpPr>
+          <p:cNvPr id="3" name="字幕 2"/>
+          <p:cNvSpPr>
+            <a:spLocks noGrp="1"/>
+          </p:cNvSpPr>
+          <p:nvPr>
+            <p:ph type="subTitle" idx="1"/>
           </p:nvPr>
         </p:nvSpPr>
         <p:spPr/>
@@ -6450,123 +7465,8 @@
           <a:lstStyle/>
           <a:p>
             <a:r>
-              <a:rPr kumimoji="1" lang="ja-JP" altLang="en-US" sz="1800" b="1" dirty="0"/>
-              <a:t>事例1: ドキュメントパイプライン</a:t>
-            </a:r>
-          </a:p>
-          <a:p>
-            <a:pPr lvl="1"/>
-            <a:r>
-              <a:rPr kumimoji="1" lang="ja-JP" altLang="en-US" sz="1800" dirty="0"/>
-              <a:t>Git 上の Markdown（193ファイル）↔ 社内 Wiki（GROWI）の同期システム</a:t>
-            </a:r>
-          </a:p>
-          <a:p>
-            <a:pPr lvl="1"/>
-            <a:r>
-              <a:rPr kumimoji="1" lang="ja-JP" altLang="en-US" sz="1800" dirty="0"/>
-              <a:t>「</a:t>
-            </a:r>
-            <a:r>
-              <a:rPr lang="ja-JP" altLang="en-US" sz="1800" dirty="0"/>
-              <a:t>作業の進め方」「成果物の作り方」</a:t>
-            </a:r>
-            <a:r>
-              <a:rPr kumimoji="1" lang="ja-JP" altLang="en-US" sz="1800" dirty="0"/>
-              <a:t>を設計した</a:t>
-            </a:r>
-          </a:p>
-          <a:p>
-            <a:endParaRPr lang="ja-JP" altLang="en-US" sz="1800" dirty="0"/>
-          </a:p>
-          <a:p>
-            <a:r>
-              <a:rPr kumimoji="1" lang="ja-JP" altLang="en-US" sz="1800" b="1" dirty="0"/>
-              <a:t>事例2: AIレビューワークフロー</a:t>
-            </a:r>
-          </a:p>
-          <a:p>
-            <a:pPr lvl="1"/>
-            <a:r>
-              <a:rPr kumimoji="1" lang="ja-JP" altLang="en-US" sz="1800" dirty="0"/>
-              <a:t>Claude Code スキル/エージェント </a:t>
-            </a:r>
-            <a:r>
-              <a:rPr lang="ja-JP" altLang="en-US" sz="1800" dirty="0"/>
-              <a:t>↔</a:t>
-            </a:r>
-            <a:r>
-              <a:rPr kumimoji="1" lang="ja-JP" altLang="en-US" sz="1800" dirty="0"/>
-              <a:t>構造化レビュー ↔GitHub PR</a:t>
-            </a:r>
-          </a:p>
-          <a:p>
-            <a:pPr lvl="1"/>
-            <a:r>
-              <a:rPr kumimoji="1" lang="ja-JP" altLang="en-US" sz="1600" dirty="0"/>
-              <a:t>「人間・</a:t>
-            </a:r>
-            <a:r>
-              <a:rPr kumimoji="1" lang="en-US" altLang="ja-JP" sz="1600" dirty="0"/>
-              <a:t>AI</a:t>
-            </a:r>
-            <a:r>
-              <a:rPr kumimoji="1" lang="ja-JP" altLang="en-US" sz="1600" dirty="0"/>
-              <a:t>・ツールの役割分担」「判断力を持続可能にする仕組み」を設計した</a:t>
-            </a:r>
-          </a:p>
-          <a:p>
-            <a:endParaRPr lang="ja-JP" altLang="en-US" dirty="0"/>
-          </a:p>
-          <a:p>
-            <a:r>
-              <a:rPr kumimoji="1" lang="ja-JP" altLang="en-US" sz="2000" b="1" dirty="0"/>
-              <a:t>共通パターン:</a:t>
-            </a:r>
-          </a:p>
-          <a:p>
-            <a:pPr lvl="1"/>
-            <a:r>
-              <a:rPr kumimoji="1" lang="ja-JP" altLang="en-US" sz="2000" dirty="0"/>
-              <a:t>人間</a:t>
-            </a:r>
-            <a:r>
-              <a:rPr lang="ja-JP" altLang="en-US" sz="2000" dirty="0"/>
-              <a:t>🧑‍💻</a:t>
-            </a:r>
-            <a:r>
-              <a:rPr kumimoji="1" lang="ja-JP" altLang="en-US" sz="2000" dirty="0"/>
-              <a:t>が判断の枠組みを作り、AI</a:t>
-            </a:r>
-            <a:r>
-              <a:rPr lang="ja-JP" altLang="en-US" sz="2000" dirty="0"/>
-              <a:t>🤖</a:t>
-            </a:r>
-            <a:r>
-              <a:rPr kumimoji="1" lang="ja-JP" altLang="en-US" sz="2000" dirty="0"/>
-              <a:t>が演算を担う</a:t>
-            </a:r>
-          </a:p>
-        </p:txBody>
-      </p:sp>
-      <p:sp>
-        <p:nvSpPr>
-          <p:cNvPr id="3" name="タイトル 2"/>
-          <p:cNvSpPr>
-            <a:spLocks noGrp="1"/>
-          </p:cNvSpPr>
-          <p:nvPr>
-            <p:ph type="title"/>
-          </p:nvPr>
-        </p:nvSpPr>
-        <p:spPr/>
-        <p:txBody>
-          <a:bodyPr/>
-          <a:lstStyle/>
-          <a:p>
-            <a:r>
-              <a:rPr kumimoji="1" lang="ja-JP" altLang="en-US" dirty="0"/>
-              <a:t>今日話す2つの仕組み</a:t>
+              <a:rPr kumimoji="1" lang="ja-JP" altLang="en-US" sz="1300" dirty="0"/>
+              <a:t>「作り方を作る」</a:t>
             </a:r>
           </a:p>
         </p:txBody>
@@ -6598,48 +7498,179 @@
       </p:grpSpPr>
       <p:sp>
         <p:nvSpPr>
-          <p:cNvPr id="2" name="タイトル 1"/>
+          <p:cNvPr id="2" name="コンテンツ プレースホルダー 1"/>
           <p:cNvSpPr>
             <a:spLocks noGrp="1"/>
           </p:cNvSpPr>
           <p:nvPr>
-            <p:ph type="ctrTitle"/>
+            <p:ph idx="1"/>
           </p:nvPr>
         </p:nvSpPr>
         <p:spPr/>
         <p:txBody>
           <a:bodyPr>
-            <a:normAutofit fontScale="90000"/>
+            <a:normAutofit/>
           </a:bodyPr>
           <a:lstStyle/>
           <a:p>
             <a:r>
-              <a:rPr kumimoji="1" lang="ja-JP" altLang="en-US" sz="2600" dirty="0"/>
-              <a:t>事例1　ドキュメントパイプライン</a:t>
-            </a:r>
-          </a:p>
-        </p:txBody>
-      </p:sp>
-      <p:sp>
-        <p:nvSpPr>
-          <p:cNvPr id="3" name="字幕 2"/>
+              <a:rPr kumimoji="1" lang="ja-JP" altLang="en-US" sz="1600" dirty="0"/>
+              <a:t>実装と Wiki が一致しない（ドキュメントが腐る）</a:t>
+            </a:r>
+            <a:endParaRPr kumimoji="1" lang="en-US" altLang="ja-JP" sz="1600" dirty="0"/>
+          </a:p>
+          <a:p>
+            <a:r>
+              <a:rPr kumimoji="1" lang="ja-JP" altLang="en-US" sz="1600" dirty="0"/>
+              <a:t>ソースコードを </a:t>
+            </a:r>
+            <a:r>
+              <a:rPr kumimoji="1" lang="ja-JP" altLang="en-US" sz="1600" b="1" dirty="0"/>
+              <a:t>S</a:t>
+            </a:r>
+            <a:r>
+              <a:rPr kumimoji="1" lang="en-US" altLang="ja-JP" sz="1600" b="1" dirty="0"/>
+              <a:t>ingle </a:t>
+            </a:r>
+            <a:r>
+              <a:rPr kumimoji="1" lang="ja-JP" altLang="en-US" sz="1600" b="1" dirty="0"/>
+              <a:t>S</a:t>
+            </a:r>
+            <a:r>
+              <a:rPr kumimoji="1" lang="en-US" altLang="ja-JP" sz="1600" b="1" dirty="0" err="1"/>
+              <a:t>ource</a:t>
+            </a:r>
+            <a:r>
+              <a:rPr kumimoji="1" lang="en-US" altLang="ja-JP" sz="1600" b="1" dirty="0"/>
+              <a:t> </a:t>
+            </a:r>
+            <a:r>
+              <a:rPr kumimoji="1" lang="ja-JP" altLang="en-US" sz="1600" b="1" dirty="0"/>
+              <a:t>O</a:t>
+            </a:r>
+            <a:r>
+              <a:rPr kumimoji="1" lang="en-US" altLang="ja-JP" sz="1600" b="1" dirty="0"/>
+              <a:t>f </a:t>
+            </a:r>
+            <a:r>
+              <a:rPr kumimoji="1" lang="ja-JP" altLang="en-US" sz="1600" b="1" dirty="0"/>
+              <a:t>T</a:t>
+            </a:r>
+            <a:r>
+              <a:rPr kumimoji="1" lang="en-US" altLang="ja-JP" sz="1600" b="1" dirty="0" err="1"/>
+              <a:t>rueth</a:t>
+            </a:r>
+            <a:r>
+              <a:rPr kumimoji="1" lang="ja-JP" altLang="en-US" sz="1600" dirty="0"/>
+              <a:t>（唯一の真実） にしたいが、</a:t>
+            </a:r>
+            <a:br>
+              <a:rPr kumimoji="1" lang="en-US" altLang="ja-JP" sz="1600" dirty="0"/>
+            </a:br>
+            <a:r>
+              <a:rPr kumimoji="1" lang="ja-JP" altLang="en-US" sz="1600" dirty="0"/>
+              <a:t>他部門連携では Wiki が必要</a:t>
+            </a:r>
+          </a:p>
+          <a:p>
+            <a:endParaRPr lang="ja-JP" altLang="en-US" dirty="0"/>
+          </a:p>
+          <a:p>
+            <a:r>
+              <a:rPr kumimoji="1" lang="ja-JP" altLang="en-US" sz="1600" dirty="0"/>
+              <a:t>Issue / Redmine / 実装 / Wiki</a:t>
+            </a:r>
+            <a:r>
+              <a:rPr kumimoji="1" lang="en-US" altLang="ja-JP" sz="1600" dirty="0"/>
+              <a:t>s</a:t>
+            </a:r>
+            <a:endParaRPr kumimoji="1" lang="ja-JP" altLang="en-US" sz="1600" dirty="0"/>
+          </a:p>
+          <a:p>
+            <a:pPr lvl="1"/>
+            <a:r>
+              <a:rPr kumimoji="1" lang="ja-JP" altLang="en-US" sz="1600" dirty="0"/>
+              <a:t>→ 同じことを何度も書く </a:t>
+            </a:r>
+            <a:endParaRPr kumimoji="1" lang="en-US" altLang="ja-JP" sz="1600" dirty="0"/>
+          </a:p>
+          <a:p>
+            <a:pPr lvl="1"/>
+            <a:r>
+              <a:rPr kumimoji="1" lang="ja-JP" altLang="en-US" sz="1600" dirty="0"/>
+              <a:t>→ どこかで整合しなくなる</a:t>
+            </a:r>
+            <a:endParaRPr kumimoji="1" lang="en-US" altLang="ja-JP" sz="1600" dirty="0"/>
+          </a:p>
+          <a:p>
+            <a:pPr lvl="1"/>
+            <a:endParaRPr lang="en-US" altLang="ja-JP" sz="1600" dirty="0"/>
+          </a:p>
+          <a:p>
+            <a:pPr lvl="1"/>
+            <a:endParaRPr lang="en-US" altLang="ja-JP" sz="1600" dirty="0"/>
+          </a:p>
+          <a:p>
+            <a:r>
+              <a:rPr lang="ja-JP" altLang="en-US" b="1" dirty="0"/>
+              <a:t>GitHub も Redmine も GROWI も </a:t>
+            </a:r>
+            <a:r>
+              <a:rPr lang="en-US" altLang="ja-JP" b="1" dirty="0"/>
+              <a:t>CLI</a:t>
+            </a:r>
+            <a:r>
+              <a:rPr lang="ja-JP" altLang="en-US" b="1" dirty="0"/>
+              <a:t>から更新できる ！　</a:t>
+            </a:r>
+            <a:br>
+              <a:rPr lang="en-US" altLang="ja-JP" dirty="0"/>
+            </a:br>
+            <a:r>
+              <a:rPr lang="ja-JP" altLang="en-US" sz="1600" dirty="0"/>
+              <a:t>→ </a:t>
+            </a:r>
+            <a:r>
+              <a:rPr lang="en-US" altLang="ja-JP" sz="1600" dirty="0"/>
+              <a:t>AI</a:t>
+            </a:r>
+            <a:r>
+              <a:rPr lang="ja-JP" altLang="en-US" sz="1600" dirty="0"/>
+              <a:t>エージェント</a:t>
+            </a:r>
+            <a:r>
+              <a:rPr lang="ja-JP" altLang="en-US" dirty="0"/>
+              <a:t>🤖</a:t>
+            </a:r>
+            <a:r>
+              <a:rPr lang="ja-JP" altLang="en-US" sz="1600" dirty="0"/>
+              <a:t>を利用して解決したい</a:t>
+            </a:r>
+          </a:p>
+          <a:p>
+            <a:pPr lvl="1"/>
+            <a:endParaRPr lang="ja-JP" altLang="en-US" dirty="0"/>
+          </a:p>
+        </p:txBody>
+      </p:sp>
+      <p:sp>
+        <p:nvSpPr>
+          <p:cNvPr id="3" name="タイトル 2"/>
           <p:cNvSpPr>
             <a:spLocks noGrp="1"/>
           </p:cNvSpPr>
           <p:nvPr>
-            <p:ph type="subTitle" idx="1"/>
+            <p:ph type="title"/>
           </p:nvPr>
         </p:nvSpPr>
         <p:spPr/>
         <p:txBody>
-          <a:bodyPr>
-            <a:normAutofit/>
-          </a:bodyPr>
+          <a:bodyPr/>
           <a:lstStyle/>
           <a:p>
             <a:r>
-              <a:rPr kumimoji="1" lang="ja-JP" altLang="en-US" sz="1300" dirty="0"/>
-              <a:t>「作り方を作る」</a:t>
+              <a:rPr kumimoji="1" lang="ja-JP" altLang="en-US" dirty="0"/>
+              <a:t>きっかけ</a:t>
             </a:r>
           </a:p>
         </p:txBody>
@@ -6688,60 +7719,46 @@
           <a:p>
             <a:r>
               <a:rPr kumimoji="1" lang="ja-JP" altLang="en-US" sz="1600" dirty="0"/>
-              <a:t>実装と Wiki が一致しない（ドキュメントが腐る）</a:t>
-            </a:r>
+              <a:t>Claude Code で構築した統合 CLI ツール（TypeScript）</a:t>
+            </a:r>
+          </a:p>
+          <a:p>
             <a:endParaRPr lang="ja-JP" altLang="en-US" dirty="0"/>
           </a:p>
           <a:p>
-            <a:endParaRPr kumimoji="1" lang="en-US" altLang="ja-JP" sz="1600" dirty="0"/>
-          </a:p>
-          <a:p>
             <a:r>
               <a:rPr kumimoji="1" lang="ja-JP" altLang="en-US" sz="1600" dirty="0"/>
-              <a:t>ソースコードを S</a:t>
-            </a:r>
-            <a:r>
-              <a:rPr kumimoji="1" lang="en-US" altLang="ja-JP" sz="1600" dirty="0"/>
-              <a:t>ingle </a:t>
-            </a:r>
+              <a:t>docs:check        frontmatter 検証・パス重複チェック</a:t>
+            </a:r>
+          </a:p>
+          <a:p>
             <a:r>
               <a:rPr kumimoji="1" lang="ja-JP" altLang="en-US" sz="1600" dirty="0"/>
-              <a:t>S</a:t>
-            </a:r>
-            <a:r>
-              <a:rPr kumimoji="1" lang="en-US" altLang="ja-JP" sz="1600" dirty="0" err="1"/>
-              <a:t>ource</a:t>
-            </a:r>
-            <a:r>
-              <a:rPr kumimoji="1" lang="en-US" altLang="ja-JP" sz="1600" dirty="0"/>
-              <a:t> </a:t>
-            </a:r>
+              <a:t>docs:publish      Git → GROWI 同期（単体 / 一括 / dry-run）</a:t>
+            </a:r>
+          </a:p>
+          <a:p>
             <a:r>
               <a:rPr kumimoji="1" lang="ja-JP" altLang="en-US" sz="1600" dirty="0"/>
-              <a:t>O</a:t>
-            </a:r>
-            <a:r>
-              <a:rPr kumimoji="1" lang="en-US" altLang="ja-JP" sz="1600" dirty="0"/>
-              <a:t>f </a:t>
-            </a:r>
+              <a:t>docs:import:page  GROWI → Git 取り込み（画像を Blob に自動移行）</a:t>
+            </a:r>
+          </a:p>
+          <a:p>
             <a:r>
               <a:rPr kumimoji="1" lang="ja-JP" altLang="en-US" sz="1600" dirty="0"/>
-              <a:t>T</a:t>
-            </a:r>
-            <a:r>
-              <a:rPr kumimoji="1" lang="en-US" altLang="ja-JP" sz="1600" dirty="0" err="1"/>
-              <a:t>rueth</a:t>
-            </a:r>
+              <a:t>docs:import:tree  GROWI ツリー一括取り込み</a:t>
+            </a:r>
+          </a:p>
+          <a:p>
             <a:r>
               <a:rPr kumimoji="1" lang="ja-JP" altLang="en-US" sz="1600" dirty="0"/>
-              <a:t>（唯一の真実） にしたいが、</a:t>
-            </a:r>
-            <a:br>
-              <a:rPr kumimoji="1" lang="en-US" altLang="ja-JP" sz="1600" dirty="0"/>
-            </a:br>
+              <a:t>docs:image:paste  クリップボード画像 → Azure Blob → Markdown リンク</a:t>
+            </a:r>
+          </a:p>
+          <a:p>
             <a:r>
               <a:rPr kumimoji="1" lang="ja-JP" altLang="en-US" sz="1600" dirty="0"/>
-              <a:t>他部門連携では Wiki が必要</a:t>
+              <a:t>docs:image:upload ローカル画像ファイル → Azure Blob</a:t>
             </a:r>
           </a:p>
           <a:p>
@@ -6750,73 +7767,14 @@
           <a:p>
             <a:r>
               <a:rPr kumimoji="1" lang="ja-JP" altLang="en-US" sz="1600" dirty="0"/>
-              <a:t>Issue / Redmine / 実装 / Wiki</a:t>
-            </a:r>
-          </a:p>
-          <a:p>
-            <a:pPr lvl="1"/>
+              <a:t>各 Markdown に frontmatter でメタデータを持たせる（設定ファイル不要）</a:t>
+            </a:r>
+          </a:p>
+          <a:p>
             <a:r>
               <a:rPr kumimoji="1" lang="ja-JP" altLang="en-US" sz="1600" dirty="0"/>
-              <a:t>→ 同じことを何度も書く </a:t>
-            </a:r>
-            <a:endParaRPr kumimoji="1" lang="en-US" altLang="ja-JP" sz="1600" dirty="0"/>
-          </a:p>
-          <a:p>
-            <a:pPr lvl="1"/>
-            <a:r>
-              <a:rPr kumimoji="1" lang="ja-JP" altLang="en-US" sz="1600" dirty="0"/>
-              <a:t>→ どこかで整合しなくなる</a:t>
-            </a:r>
-            <a:endParaRPr kumimoji="1" lang="en-US" altLang="ja-JP" sz="1600" dirty="0"/>
-          </a:p>
-          <a:p>
-            <a:pPr lvl="1"/>
-            <a:endParaRPr lang="en-US" altLang="ja-JP" sz="1600" dirty="0"/>
-          </a:p>
-          <a:p>
-            <a:pPr lvl="1"/>
-            <a:endParaRPr lang="en-US" altLang="ja-JP" sz="1600" dirty="0"/>
-          </a:p>
-          <a:p>
-            <a:r>
-              <a:rPr lang="ja-JP" altLang="en-US" b="1" dirty="0"/>
-              <a:t>GitHub も Redmine も GROWI も </a:t>
-            </a:r>
-            <a:r>
-              <a:rPr lang="en-US" altLang="ja-JP" b="1" dirty="0"/>
-              <a:t>CLI</a:t>
-            </a:r>
-            <a:r>
-              <a:rPr lang="ja-JP" altLang="en-US" b="1" dirty="0"/>
-              <a:t>から更新できる ！　</a:t>
-            </a:r>
-            <a:br>
-              <a:rPr lang="en-US" altLang="ja-JP" dirty="0"/>
-            </a:br>
-            <a:r>
-              <a:rPr lang="ja-JP" altLang="en-US" sz="1600" dirty="0"/>
-              <a:t>→ </a:t>
-            </a:r>
-            <a:r>
-              <a:rPr lang="en-US" altLang="ja-JP" sz="1600" dirty="0"/>
-              <a:t>AI</a:t>
-            </a:r>
-            <a:r>
-              <a:rPr lang="ja-JP" altLang="en-US" sz="1600" dirty="0"/>
-              <a:t>エージェント</a:t>
-            </a:r>
-            <a:r>
-              <a:rPr lang="ja-JP" altLang="en-US" dirty="0"/>
-              <a:t>🤖</a:t>
-            </a:r>
-            <a:r>
-              <a:rPr lang="ja-JP" altLang="en-US" sz="1600" dirty="0"/>
-              <a:t>を利用して解決したい</a:t>
-            </a:r>
-          </a:p>
-          <a:p>
-            <a:pPr lvl="1"/>
-            <a:endParaRPr lang="ja-JP" altLang="en-US" dirty="0"/>
+              <a:t>画像貼り付けは VSCode ショートカット（Ctrl+Alt+V）で完結</a:t>
+            </a:r>
           </a:p>
         </p:txBody>
       </p:sp>
@@ -6837,7 +7795,7 @@
           <a:p>
             <a:r>
               <a:rPr kumimoji="1" lang="ja-JP" altLang="en-US" dirty="0"/>
-              <a:t>課題 — なぜ作ろうと思ったか</a:t>
+              <a:t>演算（Reckoning）— growi-docs CLI</a:t>
             </a:r>
           </a:p>
         </p:txBody>

--- a/TechMeeting202604/techmeeting20260406.pptx
+++ b/TechMeeting202604/techmeeting20260406.pptx
@@ -5,40 +5,42 @@
     <p:sldMasterId id="2147483660" r:id="rId1"/>
   </p:sldMasterIdLst>
   <p:notesMasterIdLst>
-    <p:notesMasterId r:id="rId30"/>
+    <p:notesMasterId r:id="rId32"/>
   </p:notesMasterIdLst>
   <p:handoutMasterIdLst>
-    <p:handoutMasterId r:id="rId31"/>
+    <p:handoutMasterId r:id="rId33"/>
   </p:handoutMasterIdLst>
   <p:sldIdLst>
     <p:sldId id="318" r:id="rId2"/>
     <p:sldId id="281" r:id="rId3"/>
-    <p:sldId id="322" r:id="rId4"/>
-    <p:sldId id="312" r:id="rId5"/>
-    <p:sldId id="338" r:id="rId6"/>
-    <p:sldId id="319" r:id="rId7"/>
-    <p:sldId id="321" r:id="rId8"/>
-    <p:sldId id="320" r:id="rId9"/>
-    <p:sldId id="324" r:id="rId10"/>
-    <p:sldId id="325" r:id="rId11"/>
-    <p:sldId id="340" r:id="rId12"/>
-    <p:sldId id="326" r:id="rId13"/>
-    <p:sldId id="323" r:id="rId14"/>
-    <p:sldId id="327" r:id="rId15"/>
-    <p:sldId id="328" r:id="rId16"/>
-    <p:sldId id="329" r:id="rId17"/>
-    <p:sldId id="330" r:id="rId18"/>
-    <p:sldId id="331" r:id="rId19"/>
-    <p:sldId id="332" r:id="rId20"/>
-    <p:sldId id="343" r:id="rId21"/>
-    <p:sldId id="342" r:id="rId22"/>
-    <p:sldId id="333" r:id="rId23"/>
-    <p:sldId id="337" r:id="rId24"/>
-    <p:sldId id="339" r:id="rId25"/>
-    <p:sldId id="334" r:id="rId26"/>
-    <p:sldId id="341" r:id="rId27"/>
-    <p:sldId id="335" r:id="rId28"/>
-    <p:sldId id="336" r:id="rId29"/>
+    <p:sldId id="312" r:id="rId4"/>
+    <p:sldId id="338" r:id="rId5"/>
+    <p:sldId id="319" r:id="rId6"/>
+    <p:sldId id="321" r:id="rId7"/>
+    <p:sldId id="355" r:id="rId8"/>
+    <p:sldId id="340" r:id="rId9"/>
+    <p:sldId id="354" r:id="rId10"/>
+    <p:sldId id="326" r:id="rId11"/>
+    <p:sldId id="323" r:id="rId12"/>
+    <p:sldId id="327" r:id="rId13"/>
+    <p:sldId id="330" r:id="rId14"/>
+    <p:sldId id="345" r:id="rId15"/>
+    <p:sldId id="347" r:id="rId16"/>
+    <p:sldId id="348" r:id="rId17"/>
+    <p:sldId id="346" r:id="rId18"/>
+    <p:sldId id="344" r:id="rId19"/>
+    <p:sldId id="349" r:id="rId20"/>
+    <p:sldId id="350" r:id="rId21"/>
+    <p:sldId id="331" r:id="rId22"/>
+    <p:sldId id="352" r:id="rId23"/>
+    <p:sldId id="332" r:id="rId24"/>
+    <p:sldId id="343" r:id="rId25"/>
+    <p:sldId id="342" r:id="rId26"/>
+    <p:sldId id="333" r:id="rId27"/>
+    <p:sldId id="337" r:id="rId28"/>
+    <p:sldId id="339" r:id="rId29"/>
+    <p:sldId id="334" r:id="rId30"/>
+    <p:sldId id="341" r:id="rId31"/>
   </p:sldIdLst>
   <p:sldSz cx="9906000" cy="6858000" type="A4"/>
   <p:notesSz cx="6735763" cy="9866313"/>
@@ -806,7 +808,7 @@
           <a:p>
             <a:fld id="{FB2DADC9-84AC-47A0-A132-06E0329E8A4A}" type="datetimeFigureOut">
               <a:rPr kumimoji="1" lang="ja-JP" altLang="en-US" smtClean="0"/>
-              <a:t>2026/4/2</a:t>
+              <a:t>2026/4/3</a:t>
             </a:fld>
             <a:endParaRPr kumimoji="1" lang="ja-JP" altLang="en-US"/>
           </a:p>
@@ -983,7 +985,7 @@
           <a:p>
             <a:fld id="{A532AB89-1C3C-45F3-9E77-B76890C91663}" type="datetimeFigureOut">
               <a:rPr kumimoji="1" lang="ja-JP" altLang="en-US" smtClean="0"/>
-              <a:t>2026/4/2</a:t>
+              <a:t>2026/4/3</a:t>
             </a:fld>
             <a:endParaRPr kumimoji="1" lang="ja-JP" altLang="en-US"/>
           </a:p>
@@ -3709,381 +3711,6 @@
             <p:ph idx="1"/>
           </p:nvPr>
         </p:nvSpPr>
-        <p:spPr/>
-        <p:txBody>
-          <a:bodyPr>
-            <a:normAutofit/>
-          </a:bodyPr>
-          <a:lstStyle/>
-          <a:p>
-            <a:r>
-              <a:rPr kumimoji="1" lang="ja-JP" altLang="en-US" sz="1600" dirty="0"/>
-              <a:t>PR 作成</a:t>
-            </a:r>
-          </a:p>
-          <a:p>
-            <a:pPr lvl="1"/>
-            <a:r>
-              <a:rPr kumimoji="1" lang="ja-JP" altLang="en-US" sz="1600" dirty="0"/>
-              <a:t>→ docs-validate.yml</a:t>
-            </a:r>
-          </a:p>
-          <a:p>
-            <a:pPr lvl="2"/>
-            <a:r>
-              <a:rPr kumimoji="1" lang="ja-JP" altLang="en-US" sz="1600" dirty="0"/>
-              <a:t>TypeScript 型チェック（tsc --noEmit）</a:t>
-            </a:r>
-          </a:p>
-          <a:p>
-            <a:pPr lvl="2"/>
-            <a:r>
-              <a:rPr kumimoji="1" lang="ja-JP" altLang="en-US" sz="1600" dirty="0"/>
-              <a:t>frontmatter / パス整合性チェック（docs:check）</a:t>
-            </a:r>
-            <a:endParaRPr lang="ja-JP" altLang="en-US" dirty="0"/>
-          </a:p>
-          <a:p>
-            <a:r>
-              <a:rPr kumimoji="1" lang="ja-JP" altLang="en-US" sz="1600" dirty="0"/>
-              <a:t>release ブランチへマージ</a:t>
-            </a:r>
-          </a:p>
-          <a:p>
-            <a:pPr lvl="1"/>
-            <a:r>
-              <a:rPr kumimoji="1" lang="ja-JP" altLang="en-US" sz="1600" dirty="0"/>
-              <a:t>→ sync-to-growi.yml</a:t>
-            </a:r>
-          </a:p>
-          <a:p>
-            <a:pPr lvl="2"/>
-            <a:r>
-              <a:rPr kumimoji="1" lang="ja-JP" altLang="en-US" sz="1600" dirty="0"/>
-              <a:t>git diff で変更 Markdown を検出</a:t>
-            </a:r>
-          </a:p>
-          <a:p>
-            <a:pPr lvl="2"/>
-            <a:r>
-              <a:rPr kumimoji="1" lang="ja-JP" altLang="en-US" sz="1600" dirty="0"/>
-              <a:t>growi_path の変更を検知 → 事故防止（fail）</a:t>
-            </a:r>
-          </a:p>
-          <a:p>
-            <a:pPr lvl="2"/>
-            <a:r>
-              <a:rPr kumimoji="1" lang="ja-JP" altLang="en-US" sz="1600" dirty="0"/>
-              <a:t>変更ファイルのみを GROWI に publish</a:t>
-            </a:r>
-          </a:p>
-          <a:p>
-            <a:pPr lvl="2"/>
-            <a:r>
-              <a:rPr kumimoji="1" lang="ja-JP" altLang="en-US" sz="1600" dirty="0"/>
-              <a:t>変更なしなら zero-diff skip</a:t>
-            </a:r>
-          </a:p>
-          <a:p>
-            <a:endParaRPr lang="ja-JP" altLang="en-US" dirty="0"/>
-          </a:p>
-          <a:p>
-            <a:r>
-              <a:rPr kumimoji="1" lang="ja-JP" altLang="en-US" sz="1600" dirty="0"/>
-              <a:t>冪等な設計: 再実行しても安全</a:t>
-            </a:r>
-          </a:p>
-        </p:txBody>
-      </p:sp>
-      <p:sp>
-        <p:nvSpPr>
-          <p:cNvPr id="3" name="タイトル 2"/>
-          <p:cNvSpPr>
-            <a:spLocks noGrp="1"/>
-          </p:cNvSpPr>
-          <p:nvPr>
-            <p:ph type="title"/>
-          </p:nvPr>
-        </p:nvSpPr>
-        <p:spPr/>
-        <p:txBody>
-          <a:bodyPr/>
-          <a:lstStyle/>
-          <a:p>
-            <a:r>
-              <a:rPr kumimoji="1" lang="ja-JP" altLang="en-US" dirty="0"/>
-              <a:t>演算（Reckoning）— 自動同期パイプライン</a:t>
-            </a:r>
-          </a:p>
-        </p:txBody>
-      </p:sp>
-    </p:spTree>
-  </p:cSld>
-  <p:clrMapOvr>
-    <a:masterClrMapping/>
-  </p:clrMapOvr>
-</p:sld>
-</file>
-
-<file path=ppt/slides/slide11.xml><?xml version="1.0" encoding="utf-8"?>
-<p:sld xmlns:a="http://schemas.openxmlformats.org/drawingml/2006/main" xmlns:r="http://schemas.openxmlformats.org/officeDocument/2006/relationships" xmlns:p="http://schemas.openxmlformats.org/presentationml/2006/main">
-  <p:cSld>
-    <p:spTree>
-      <p:nvGrpSpPr>
-        <p:cNvPr id="1" name="">
-          <a:extLst>
-            <a:ext uri="{FF2B5EF4-FFF2-40B4-BE49-F238E27FC236}">
-              <a16:creationId xmlns:a16="http://schemas.microsoft.com/office/drawing/2014/main" id="{D7C9E254-E99D-BA44-F8C7-33C2A2D7A941}"/>
-            </a:ext>
-          </a:extLst>
-        </p:cNvPr>
-        <p:cNvGrpSpPr/>
-        <p:nvPr/>
-      </p:nvGrpSpPr>
-      <p:grpSpPr>
-        <a:xfrm>
-          <a:off x="0" y="0"/>
-          <a:ext cx="0" cy="0"/>
-          <a:chOff x="0" y="0"/>
-          <a:chExt cx="0" cy="0"/>
-        </a:xfrm>
-      </p:grpSpPr>
-      <p:sp>
-        <p:nvSpPr>
-          <p:cNvPr id="2" name="コンテンツ プレースホルダー 1">
-            <a:extLst>
-              <a:ext uri="{FF2B5EF4-FFF2-40B4-BE49-F238E27FC236}">
-                <a16:creationId xmlns:a16="http://schemas.microsoft.com/office/drawing/2014/main" id="{372BF3A8-DCA0-5EF4-0CB8-F05EC084BE67}"/>
-              </a:ext>
-            </a:extLst>
-          </p:cNvPr>
-          <p:cNvSpPr>
-            <a:spLocks noGrp="1"/>
-          </p:cNvSpPr>
-          <p:nvPr>
-            <p:ph idx="1"/>
-          </p:nvPr>
-        </p:nvSpPr>
-        <p:spPr/>
-        <p:txBody>
-          <a:bodyPr>
-            <a:normAutofit/>
-          </a:bodyPr>
-          <a:lstStyle/>
-          <a:p>
-            <a:r>
-              <a:rPr lang="ja-JP" altLang="en-US" sz="1800" b="1" dirty="0"/>
-              <a:t>制約:</a:t>
-            </a:r>
-            <a:endParaRPr kumimoji="1" lang="en-US" altLang="ja-JP" sz="1800" dirty="0"/>
-          </a:p>
-          <a:p>
-            <a:pPr lvl="1"/>
-            <a:r>
-              <a:rPr kumimoji="1" lang="ja-JP" altLang="en-US" sz="1800" dirty="0"/>
-              <a:t>GROWI </a:t>
-            </a:r>
-            <a:r>
-              <a:rPr lang="ja-JP" altLang="en-US" sz="1800" dirty="0"/>
-              <a:t>は </a:t>
-            </a:r>
-            <a:r>
-              <a:rPr kumimoji="1" lang="ja-JP" altLang="en-US" sz="1800" dirty="0"/>
-              <a:t>社内 </a:t>
-            </a:r>
-            <a:r>
-              <a:rPr lang="ja-JP" altLang="en-US" sz="1800" dirty="0"/>
-              <a:t>ネットワークからしかアクセス不可</a:t>
-            </a:r>
-            <a:r>
-              <a:rPr kumimoji="1" lang="ja-JP" altLang="en-US" sz="1800" dirty="0"/>
-              <a:t>       </a:t>
-            </a:r>
-            <a:br>
-              <a:rPr kumimoji="1" lang="en-US" altLang="ja-JP" sz="1800" dirty="0"/>
-            </a:br>
-            <a:r>
-              <a:rPr lang="ja-JP" altLang="en-US" sz="1800" dirty="0"/>
-              <a:t>🧑‍💻</a:t>
-            </a:r>
-            <a:r>
-              <a:rPr kumimoji="1" lang="ja-JP" altLang="en-US" sz="1800" dirty="0"/>
-              <a:t>判断 → selfhost ランナー</a:t>
-            </a:r>
-          </a:p>
-          <a:p>
-            <a:pPr lvl="1"/>
-            <a:r>
-              <a:rPr kumimoji="1" lang="ja-JP" altLang="en-US" sz="1800" dirty="0"/>
-              <a:t>Git 画像でリポジトリが重い   </a:t>
-            </a:r>
-            <a:br>
-              <a:rPr kumimoji="1" lang="en-US" altLang="ja-JP" sz="1800" dirty="0"/>
-            </a:br>
-            <a:r>
-              <a:rPr lang="ja-JP" altLang="en-US" sz="1800" dirty="0"/>
-              <a:t>🧑‍💻</a:t>
-            </a:r>
-            <a:r>
-              <a:rPr kumimoji="1" lang="ja-JP" altLang="en-US" sz="1800" dirty="0"/>
-              <a:t>判断 → Azure Blob ストレージに保存してリンクを張る</a:t>
-            </a:r>
-          </a:p>
-          <a:p>
-            <a:pPr lvl="1"/>
-            <a:r>
-              <a:rPr kumimoji="1" lang="ja-JP" altLang="en-US" sz="1800" dirty="0"/>
-              <a:t>Blob に格納する手順が面倒   </a:t>
-            </a:r>
-            <a:br>
-              <a:rPr kumimoji="1" lang="en-US" altLang="ja-JP" sz="1800" dirty="0"/>
-            </a:br>
-            <a:r>
-              <a:rPr lang="ja-JP" altLang="en-US" sz="1800" dirty="0"/>
-              <a:t>🧑‍💻</a:t>
-            </a:r>
-            <a:r>
-              <a:rPr kumimoji="1" lang="ja-JP" altLang="en-US" sz="1800" dirty="0"/>
-              <a:t>判断 → CLI スクリプト + ショートカットで実行</a:t>
-            </a:r>
-            <a:endParaRPr kumimoji="1" lang="en-US" altLang="ja-JP" sz="1800" dirty="0"/>
-          </a:p>
-          <a:p>
-            <a:pPr lvl="1"/>
-            <a:r>
-              <a:rPr lang="ja-JP" altLang="en-US" sz="1800" dirty="0"/>
-              <a:t>品質管理部の方が</a:t>
-            </a:r>
-            <a:r>
-              <a:rPr lang="en-US" altLang="ja-JP" sz="1800" dirty="0"/>
-              <a:t>Wiki</a:t>
-            </a:r>
-            <a:r>
-              <a:rPr lang="ja-JP" altLang="en-US" sz="1800" dirty="0"/>
-              <a:t>編集したい場合は？ </a:t>
-            </a:r>
-            <a:br>
-              <a:rPr lang="en-US" altLang="ja-JP" sz="1800" dirty="0"/>
-            </a:br>
-            <a:r>
-              <a:rPr lang="ja-JP" altLang="en-US" sz="1800" dirty="0"/>
-              <a:t>🧑‍💻判断 → </a:t>
-            </a:r>
-            <a:r>
-              <a:rPr lang="en-US" altLang="ja-JP" sz="1800" dirty="0" err="1"/>
-              <a:t>Growi</a:t>
-            </a:r>
-            <a:r>
-              <a:rPr lang="ja-JP" altLang="en-US" sz="1800" dirty="0"/>
-              <a:t>からリポジトリへのの取り込み機能</a:t>
-            </a:r>
-            <a:endParaRPr lang="en-US" altLang="ja-JP" sz="1800" dirty="0"/>
-          </a:p>
-          <a:p>
-            <a:pPr marL="257173" lvl="1" indent="0">
-              <a:buNone/>
-            </a:pPr>
-            <a:endParaRPr lang="en-US" altLang="ja-JP" sz="1800" dirty="0"/>
-          </a:p>
-          <a:p>
-            <a:pPr marL="257173" lvl="1" indent="0">
-              <a:buNone/>
-            </a:pPr>
-            <a:r>
-              <a:rPr lang="ja-JP" altLang="en-US" sz="1800" dirty="0"/>
-              <a:t>決めてしまえば、</a:t>
-            </a:r>
-            <a:r>
-              <a:rPr lang="en-US" altLang="ja-JP" sz="1800" dirty="0"/>
-              <a:t>AI</a:t>
-            </a:r>
-            <a:r>
-              <a:rPr lang="ja-JP" altLang="en-US" sz="1800" dirty="0"/>
-              <a:t>🤖がサクッと実装してくれる</a:t>
-            </a:r>
-            <a:r>
-              <a:rPr lang="en-US" altLang="ja-JP" sz="1800" dirty="0"/>
-              <a:t>(</a:t>
-            </a:r>
-            <a:r>
-              <a:rPr lang="ja-JP" altLang="en-US" sz="1800" dirty="0"/>
-              <a:t>演算）</a:t>
-            </a:r>
-            <a:br>
-              <a:rPr lang="en-US" altLang="ja-JP" sz="1600" dirty="0"/>
-            </a:br>
-            <a:endParaRPr kumimoji="1" lang="en-US" altLang="ja-JP" sz="1600" dirty="0"/>
-          </a:p>
-        </p:txBody>
-      </p:sp>
-      <p:sp>
-        <p:nvSpPr>
-          <p:cNvPr id="3" name="タイトル 2">
-            <a:extLst>
-              <a:ext uri="{FF2B5EF4-FFF2-40B4-BE49-F238E27FC236}">
-                <a16:creationId xmlns:a16="http://schemas.microsoft.com/office/drawing/2014/main" id="{E288EF09-2924-4D6D-BD7E-6B7213BCE29A}"/>
-              </a:ext>
-            </a:extLst>
-          </p:cNvPr>
-          <p:cNvSpPr>
-            <a:spLocks noGrp="1"/>
-          </p:cNvSpPr>
-          <p:nvPr>
-            <p:ph type="title"/>
-          </p:nvPr>
-        </p:nvSpPr>
-        <p:spPr/>
-        <p:txBody>
-          <a:bodyPr/>
-          <a:lstStyle/>
-          <a:p>
-            <a:r>
-              <a:rPr kumimoji="1" lang="ja-JP" altLang="en-US" dirty="0"/>
-              <a:t>制約：何を気にする必要があったか</a:t>
-            </a:r>
-          </a:p>
-        </p:txBody>
-      </p:sp>
-    </p:spTree>
-    <p:extLst>
-      <p:ext uri="{BB962C8B-B14F-4D97-AF65-F5344CB8AC3E}">
-        <p14:creationId xmlns:p14="http://schemas.microsoft.com/office/powerpoint/2010/main" val="33621053"/>
-      </p:ext>
-    </p:extLst>
-  </p:cSld>
-  <p:clrMapOvr>
-    <a:masterClrMapping/>
-  </p:clrMapOvr>
-</p:sld>
-</file>
-
-<file path=ppt/slides/slide12.xml><?xml version="1.0" encoding="utf-8"?>
-<p:sld xmlns:a="http://schemas.openxmlformats.org/drawingml/2006/main" xmlns:r="http://schemas.openxmlformats.org/officeDocument/2006/relationships" xmlns:p="http://schemas.openxmlformats.org/presentationml/2006/main">
-  <p:cSld>
-    <p:spTree>
-      <p:nvGrpSpPr>
-        <p:cNvPr id="1" name=""/>
-        <p:cNvGrpSpPr/>
-        <p:nvPr/>
-      </p:nvGrpSpPr>
-      <p:grpSpPr>
-        <a:xfrm>
-          <a:off x="0" y="0"/>
-          <a:ext cx="0" cy="0"/>
-          <a:chOff x="0" y="0"/>
-          <a:chExt cx="0" cy="0"/>
-        </a:xfrm>
-      </p:grpSpPr>
-      <p:sp>
-        <p:nvSpPr>
-          <p:cNvPr id="2" name="コンテンツ プレースホルダー 1"/>
-          <p:cNvSpPr>
-            <a:spLocks noGrp="1"/>
-          </p:cNvSpPr>
-          <p:nvPr>
-            <p:ph idx="1"/>
-          </p:nvPr>
-        </p:nvSpPr>
         <p:spPr>
           <a:xfrm>
             <a:off x="308484" y="1282427"/>
@@ -4280,7 +3907,7 @@
 </p:sld>
 </file>
 
-<file path=ppt/slides/slide13.xml><?xml version="1.0" encoding="utf-8"?>
+<file path=ppt/slides/slide11.xml><?xml version="1.0" encoding="utf-8"?>
 <p:sld xmlns:a="http://schemas.openxmlformats.org/drawingml/2006/main" xmlns:r="http://schemas.openxmlformats.org/officeDocument/2006/relationships" xmlns:p="http://schemas.openxmlformats.org/presentationml/2006/main">
   <p:cSld>
     <p:spTree>
@@ -4429,7 +4056,7 @@
 </p:sld>
 </file>
 
-<file path=ppt/slides/slide14.xml><?xml version="1.0" encoding="utf-8"?>
+<file path=ppt/slides/slide12.xml><?xml version="1.0" encoding="utf-8"?>
 <p:sld xmlns:a="http://schemas.openxmlformats.org/drawingml/2006/main" xmlns:r="http://schemas.openxmlformats.org/officeDocument/2006/relationships" xmlns:p="http://schemas.openxmlformats.org/presentationml/2006/main">
   <p:cSld>
     <p:spTree>
@@ -4510,7 +4137,7 @@
 </p:sld>
 </file>
 
-<file path=ppt/slides/slide15.xml><?xml version="1.0" encoding="utf-8"?>
+<file path=ppt/slides/slide13.xml><?xml version="1.0" encoding="utf-8"?>
 <p:sld xmlns:a="http://schemas.openxmlformats.org/drawingml/2006/main" xmlns:r="http://schemas.openxmlformats.org/officeDocument/2006/relationships" xmlns:p="http://schemas.openxmlformats.org/presentationml/2006/main">
   <p:cSld>
     <p:spTree>
@@ -4527,104 +4154,38 @@
           <a:chExt cx="0" cy="0"/>
         </a:xfrm>
       </p:grpSpPr>
-      <p:sp>
-        <p:nvSpPr>
-          <p:cNvPr id="2" name="コンテンツ プレースホルダー 1"/>
-          <p:cNvSpPr>
-            <a:spLocks noGrp="1"/>
-          </p:cNvSpPr>
+      <p:pic>
+        <p:nvPicPr>
+          <p:cNvPr id="5" name="コンテンツ プレースホルダー 4">
+            <a:extLst>
+              <a:ext uri="{FF2B5EF4-FFF2-40B4-BE49-F238E27FC236}">
+                <a16:creationId xmlns:a16="http://schemas.microsoft.com/office/drawing/2014/main" id="{7583550A-9C68-C809-801C-80DF10861133}"/>
+              </a:ext>
+            </a:extLst>
+          </p:cNvPr>
+          <p:cNvPicPr>
+            <a:picLocks noGrp="1" noChangeAspect="1"/>
+          </p:cNvPicPr>
           <p:nvPr>
             <p:ph idx="1"/>
           </p:nvPr>
-        </p:nvSpPr>
-        <p:spPr/>
-        <p:txBody>
-          <a:bodyPr>
-            <a:normAutofit lnSpcReduction="10000"/>
-          </a:bodyPr>
-          <a:lstStyle/>
-          <a:p>
-            <a:r>
-              <a:rPr kumimoji="1" lang="ja-JP" altLang="en-US" sz="1500" dirty="0"/>
-              <a:t>コアメンバー（田中さん）が別チームへ</a:t>
-            </a:r>
-            <a:r>
-              <a:rPr kumimoji="1" lang="en-US" altLang="ja-JP" sz="1500" dirty="0"/>
-              <a:t>…</a:t>
-            </a:r>
-            <a:endParaRPr kumimoji="1" lang="ja-JP" altLang="en-US" sz="1500" dirty="0"/>
-          </a:p>
-          <a:p>
-            <a:pPr lvl="1"/>
-            <a:r>
-              <a:rPr kumimoji="1" lang="ja-JP" altLang="en-US" sz="1500" dirty="0"/>
-              <a:t>→ PdM 1名 / BE+FE 1名（私）/ FE 2名 体制に</a:t>
-            </a:r>
-          </a:p>
-          <a:p>
-            <a:endParaRPr lang="ja-JP" altLang="en-US" dirty="0"/>
-          </a:p>
-          <a:p>
-            <a:r>
-              <a:rPr kumimoji="1" lang="ja-JP" altLang="en-US" sz="1500" dirty="0"/>
-              <a:t>コード自体は AI で早く完成するが、レビューコストが高くなっていた</a:t>
-            </a:r>
-          </a:p>
-          <a:p>
-            <a:endParaRPr lang="ja-JP" altLang="en-US" dirty="0"/>
-          </a:p>
-          <a:p>
-            <a:r>
-              <a:rPr kumimoji="1" lang="ja-JP" altLang="en-US" sz="1500" b="1" dirty="0"/>
-              <a:t>AI にレビューさせるだけでは不十分</a:t>
-            </a:r>
-          </a:p>
-          <a:p>
-            <a:pPr lvl="1"/>
-            <a:r>
-              <a:rPr kumimoji="1" lang="ja-JP" altLang="en-US" sz="1500" dirty="0"/>
-              <a:t>確認してほしいことを確認してくれるとは限らない</a:t>
-            </a:r>
-          </a:p>
-          <a:p>
-            <a:pPr lvl="1"/>
-            <a:r>
-              <a:rPr kumimoji="1" lang="ja-JP" altLang="en-US" sz="1500" dirty="0"/>
-              <a:t>バグ探しを主目的にすると、テスト / Lint / 静的解析と責務が競合する</a:t>
-            </a:r>
-          </a:p>
-          <a:p>
-            <a:pPr lvl="1"/>
-            <a:r>
-              <a:rPr kumimoji="1" lang="ja-JP" altLang="en-US" sz="1500" dirty="0"/>
-              <a:t>AI生成コードは速く増えるが、人間の理解速度は変わらない</a:t>
-            </a:r>
-          </a:p>
-          <a:p>
-            <a:endParaRPr lang="ja-JP" altLang="en-US" dirty="0"/>
-          </a:p>
-          <a:p>
-            <a:r>
-              <a:rPr kumimoji="1" lang="ja-JP" altLang="en-US" sz="1500" b="1" dirty="0"/>
-              <a:t>レビューには 2つの時間軸がある</a:t>
-            </a:r>
-          </a:p>
-          <a:p>
-            <a:pPr lvl="1"/>
-            <a:r>
-              <a:rPr kumimoji="1" lang="ja-JP" altLang="en-US" sz="1500" dirty="0"/>
-              <a:t>短期: この変更をいま組み込むべきかを判断する</a:t>
-            </a:r>
-          </a:p>
-          <a:p>
-            <a:pPr lvl="1"/>
-            <a:r>
-              <a:rPr kumimoji="1" lang="ja-JP" altLang="en-US" sz="1500" dirty="0"/>
-              <a:t>長期: その判断を担える人を増やす</a:t>
-            </a:r>
-          </a:p>
-        </p:txBody>
-      </p:sp>
+        </p:nvPicPr>
+        <p:blipFill>
+          <a:blip r:embed="rId2"/>
+          <a:stretch>
+            <a:fillRect/>
+          </a:stretch>
+        </p:blipFill>
+        <p:spPr>
+          <a:xfrm>
+            <a:off x="596516" y="2276872"/>
+            <a:ext cx="7859222" cy="2124371"/>
+          </a:xfrm>
+          <a:prstGeom prst="rect">
+            <a:avLst/>
+          </a:prstGeom>
+        </p:spPr>
+      </p:pic>
       <p:sp>
         <p:nvSpPr>
           <p:cNvPr id="3" name="タイトル 2"/>
@@ -4637,30 +4198,362 @@
         </p:nvSpPr>
         <p:spPr/>
         <p:txBody>
-          <a:bodyPr/>
+          <a:bodyPr>
+            <a:normAutofit/>
+          </a:bodyPr>
           <a:lstStyle/>
           <a:p>
             <a:r>
               <a:rPr kumimoji="1" lang="ja-JP" altLang="en-US" dirty="0"/>
-              <a:t>課題 — AIレビューだけでは不十分</a:t>
+              <a:t>実践例</a:t>
             </a:r>
           </a:p>
         </p:txBody>
       </p:sp>
+      <p:sp>
+        <p:nvSpPr>
+          <p:cNvPr id="6" name="コンテンツ プレースホルダー 3">
+            <a:extLst>
+              <a:ext uri="{FF2B5EF4-FFF2-40B4-BE49-F238E27FC236}">
+                <a16:creationId xmlns:a16="http://schemas.microsoft.com/office/drawing/2014/main" id="{C947FA0E-370B-9205-63E1-ED8D33C3FD3A}"/>
+              </a:ext>
+            </a:extLst>
+          </p:cNvPr>
+          <p:cNvSpPr txBox="1">
+            <a:spLocks/>
+          </p:cNvSpPr>
+          <p:nvPr/>
+        </p:nvSpPr>
+        <p:spPr>
+          <a:xfrm>
+            <a:off x="704850" y="1282427"/>
+            <a:ext cx="8496300" cy="4894536"/>
+          </a:xfrm>
+          <a:prstGeom prst="rect">
+            <a:avLst/>
+          </a:prstGeom>
+        </p:spPr>
+        <p:txBody>
+          <a:bodyPr vert="horz" lIns="91440" tIns="45720" rIns="91440" bIns="45720" rtlCol="0">
+            <a:normAutofit/>
+          </a:bodyPr>
+          <a:lstStyle>
+            <a:lvl1pPr marL="0" indent="0" algn="l" defTabSz="514346" rtl="0" eaLnBrk="1" latinLnBrk="0" hangingPunct="1">
+              <a:lnSpc>
+                <a:spcPct val="140000"/>
+              </a:lnSpc>
+              <a:spcBef>
+                <a:spcPts val="563"/>
+              </a:spcBef>
+              <a:buFontTx/>
+              <a:buNone/>
+              <a:defRPr kumimoji="1" sz="1600" kern="1200">
+                <a:solidFill>
+                  <a:schemeClr val="tx1"/>
+                </a:solidFill>
+                <a:latin typeface="+mn-ea"/>
+                <a:ea typeface="+mn-ea"/>
+                <a:cs typeface="+mn-cs"/>
+              </a:defRPr>
+            </a:lvl1pPr>
+            <a:lvl2pPr marL="385760" indent="-128587" algn="l" defTabSz="514346" rtl="0" eaLnBrk="1" latinLnBrk="0" hangingPunct="1">
+              <a:lnSpc>
+                <a:spcPct val="140000"/>
+              </a:lnSpc>
+              <a:spcBef>
+                <a:spcPts val="281"/>
+              </a:spcBef>
+              <a:buFont typeface="Arial" panose="020B0604020202020204" pitchFamily="34" charset="0"/>
+              <a:buChar char="•"/>
+              <a:defRPr kumimoji="1" sz="1108" kern="1200">
+                <a:solidFill>
+                  <a:schemeClr val="tx1"/>
+                </a:solidFill>
+                <a:latin typeface="+mn-ea"/>
+                <a:ea typeface="+mn-ea"/>
+                <a:cs typeface="+mn-cs"/>
+              </a:defRPr>
+            </a:lvl2pPr>
+            <a:lvl3pPr marL="642932" indent="-128587" algn="l" defTabSz="514346" rtl="0" eaLnBrk="1" latinLnBrk="0" hangingPunct="1">
+              <a:lnSpc>
+                <a:spcPct val="140000"/>
+              </a:lnSpc>
+              <a:spcBef>
+                <a:spcPts val="281"/>
+              </a:spcBef>
+              <a:buFont typeface="Arial" panose="020B0604020202020204" pitchFamily="34" charset="0"/>
+              <a:buChar char="•"/>
+              <a:defRPr kumimoji="1" sz="1108" kern="1200">
+                <a:solidFill>
+                  <a:schemeClr val="tx1"/>
+                </a:solidFill>
+                <a:latin typeface="+mn-ea"/>
+                <a:ea typeface="+mn-ea"/>
+                <a:cs typeface="+mn-cs"/>
+              </a:defRPr>
+            </a:lvl3pPr>
+            <a:lvl4pPr marL="900105" indent="-128587" algn="l" defTabSz="514346" rtl="0" eaLnBrk="1" latinLnBrk="0" hangingPunct="1">
+              <a:lnSpc>
+                <a:spcPct val="140000"/>
+              </a:lnSpc>
+              <a:spcBef>
+                <a:spcPts val="281"/>
+              </a:spcBef>
+              <a:buFont typeface="Arial" panose="020B0604020202020204" pitchFamily="34" charset="0"/>
+              <a:buChar char="•"/>
+              <a:defRPr kumimoji="1" sz="1108" kern="1200">
+                <a:solidFill>
+                  <a:schemeClr val="tx1"/>
+                </a:solidFill>
+                <a:latin typeface="+mn-ea"/>
+                <a:ea typeface="+mn-ea"/>
+                <a:cs typeface="+mn-cs"/>
+              </a:defRPr>
+            </a:lvl4pPr>
+            <a:lvl5pPr marL="1157279" indent="-128587" algn="l" defTabSz="514346" rtl="0" eaLnBrk="1" latinLnBrk="0" hangingPunct="1">
+              <a:lnSpc>
+                <a:spcPct val="140000"/>
+              </a:lnSpc>
+              <a:spcBef>
+                <a:spcPts val="281"/>
+              </a:spcBef>
+              <a:buFont typeface="Arial" panose="020B0604020202020204" pitchFamily="34" charset="0"/>
+              <a:buChar char="•"/>
+              <a:defRPr kumimoji="1" sz="1108" kern="1200">
+                <a:solidFill>
+                  <a:schemeClr val="tx1"/>
+                </a:solidFill>
+                <a:latin typeface="+mn-ea"/>
+                <a:ea typeface="+mn-ea"/>
+                <a:cs typeface="+mn-cs"/>
+              </a:defRPr>
+            </a:lvl5pPr>
+            <a:lvl6pPr marL="1414451" indent="-128587" algn="l" defTabSz="514346" rtl="0" eaLnBrk="1" latinLnBrk="0" hangingPunct="1">
+              <a:lnSpc>
+                <a:spcPct val="90000"/>
+              </a:lnSpc>
+              <a:spcBef>
+                <a:spcPts val="281"/>
+              </a:spcBef>
+              <a:buFont typeface="Arial" panose="020B0604020202020204" pitchFamily="34" charset="0"/>
+              <a:buChar char="•"/>
+              <a:defRPr kumimoji="1" sz="1013" kern="1200">
+                <a:solidFill>
+                  <a:schemeClr val="tx1"/>
+                </a:solidFill>
+                <a:latin typeface="+mn-lt"/>
+                <a:ea typeface="+mn-ea"/>
+                <a:cs typeface="+mn-cs"/>
+              </a:defRPr>
+            </a:lvl6pPr>
+            <a:lvl7pPr marL="1671625" indent="-128587" algn="l" defTabSz="514346" rtl="0" eaLnBrk="1" latinLnBrk="0" hangingPunct="1">
+              <a:lnSpc>
+                <a:spcPct val="90000"/>
+              </a:lnSpc>
+              <a:spcBef>
+                <a:spcPts val="281"/>
+              </a:spcBef>
+              <a:buFont typeface="Arial" panose="020B0604020202020204" pitchFamily="34" charset="0"/>
+              <a:buChar char="•"/>
+              <a:defRPr kumimoji="1" sz="1013" kern="1200">
+                <a:solidFill>
+                  <a:schemeClr val="tx1"/>
+                </a:solidFill>
+                <a:latin typeface="+mn-lt"/>
+                <a:ea typeface="+mn-ea"/>
+                <a:cs typeface="+mn-cs"/>
+              </a:defRPr>
+            </a:lvl7pPr>
+            <a:lvl8pPr marL="1928797" indent="-128587" algn="l" defTabSz="514346" rtl="0" eaLnBrk="1" latinLnBrk="0" hangingPunct="1">
+              <a:lnSpc>
+                <a:spcPct val="90000"/>
+              </a:lnSpc>
+              <a:spcBef>
+                <a:spcPts val="281"/>
+              </a:spcBef>
+              <a:buFont typeface="Arial" panose="020B0604020202020204" pitchFamily="34" charset="0"/>
+              <a:buChar char="•"/>
+              <a:defRPr kumimoji="1" sz="1013" kern="1200">
+                <a:solidFill>
+                  <a:schemeClr val="tx1"/>
+                </a:solidFill>
+                <a:latin typeface="+mn-lt"/>
+                <a:ea typeface="+mn-ea"/>
+                <a:cs typeface="+mn-cs"/>
+              </a:defRPr>
+            </a:lvl8pPr>
+            <a:lvl9pPr marL="2185969" indent="-128587" algn="l" defTabSz="514346" rtl="0" eaLnBrk="1" latinLnBrk="0" hangingPunct="1">
+              <a:lnSpc>
+                <a:spcPct val="90000"/>
+              </a:lnSpc>
+              <a:spcBef>
+                <a:spcPts val="281"/>
+              </a:spcBef>
+              <a:buFont typeface="Arial" panose="020B0604020202020204" pitchFamily="34" charset="0"/>
+              <a:buChar char="•"/>
+              <a:defRPr kumimoji="1" sz="1013" kern="1200">
+                <a:solidFill>
+                  <a:schemeClr val="tx1"/>
+                </a:solidFill>
+                <a:latin typeface="+mn-lt"/>
+                <a:ea typeface="+mn-ea"/>
+                <a:cs typeface="+mn-cs"/>
+              </a:defRPr>
+            </a:lvl9pPr>
+          </a:lstStyle>
+          <a:p>
+            <a:r>
+              <a:rPr lang="en-US" altLang="ja-JP" dirty="0"/>
+              <a:t>Copilot</a:t>
+            </a:r>
+            <a:r>
+              <a:rPr lang="ja-JP" altLang="en-US" dirty="0"/>
+              <a:t>を起動して、</a:t>
+            </a:r>
+            <a:endParaRPr lang="en-US" altLang="ja-JP" dirty="0"/>
+          </a:p>
+          <a:p>
+            <a:r>
+              <a:rPr lang="ja-JP" altLang="en-US" dirty="0"/>
+              <a:t>必要なら　</a:t>
+            </a:r>
+            <a:r>
+              <a:rPr lang="en-US" altLang="ja-JP" dirty="0"/>
+              <a:t>/diff-</a:t>
+            </a:r>
+            <a:r>
+              <a:rPr lang="en-US" altLang="ja-JP" dirty="0" err="1"/>
+              <a:t>naigator</a:t>
+            </a:r>
+            <a:endParaRPr lang="ja-JP" altLang="en-US" dirty="0"/>
+          </a:p>
+        </p:txBody>
+      </p:sp>
+      <p:pic>
+        <p:nvPicPr>
+          <p:cNvPr id="7" name="図 6">
+            <a:extLst>
+              <a:ext uri="{FF2B5EF4-FFF2-40B4-BE49-F238E27FC236}">
+                <a16:creationId xmlns:a16="http://schemas.microsoft.com/office/drawing/2014/main" id="{74E534D7-C33B-9B46-9104-86096F488F08}"/>
+              </a:ext>
+            </a:extLst>
+          </p:cNvPr>
+          <p:cNvPicPr>
+            <a:picLocks noChangeAspect="1"/>
+          </p:cNvPicPr>
+          <p:nvPr/>
+        </p:nvPicPr>
+        <p:blipFill>
+          <a:blip r:embed="rId3"/>
+          <a:stretch>
+            <a:fillRect/>
+          </a:stretch>
+        </p:blipFill>
+        <p:spPr>
+          <a:xfrm>
+            <a:off x="1892660" y="204460"/>
+            <a:ext cx="7786142" cy="6547438"/>
+          </a:xfrm>
+          <a:prstGeom prst="rect">
+            <a:avLst/>
+          </a:prstGeom>
+        </p:spPr>
+      </p:pic>
     </p:spTree>
   </p:cSld>
   <p:clrMapOvr>
     <a:masterClrMapping/>
   </p:clrMapOvr>
+  <p:timing>
+    <p:tnLst>
+      <p:par>
+        <p:cTn id="1" dur="indefinite" restart="never" nodeType="tmRoot">
+          <p:childTnLst>
+            <p:seq concurrent="1" nextAc="seek">
+              <p:cTn id="2" dur="indefinite" nodeType="mainSeq">
+                <p:childTnLst>
+                  <p:par>
+                    <p:cTn id="3" fill="hold">
+                      <p:stCondLst>
+                        <p:cond delay="indefinite"/>
+                      </p:stCondLst>
+                      <p:childTnLst>
+                        <p:par>
+                          <p:cTn id="4" fill="hold">
+                            <p:stCondLst>
+                              <p:cond delay="0"/>
+                            </p:stCondLst>
+                            <p:childTnLst>
+                              <p:par>
+                                <p:cTn id="5" presetID="1" presetClass="entr" presetSubtype="0" fill="hold" nodeType="clickEffect">
+                                  <p:stCondLst>
+                                    <p:cond delay="0"/>
+                                  </p:stCondLst>
+                                  <p:childTnLst>
+                                    <p:set>
+                                      <p:cBhvr>
+                                        <p:cTn id="6" dur="1" fill="hold">
+                                          <p:stCondLst>
+                                            <p:cond delay="0"/>
+                                          </p:stCondLst>
+                                        </p:cTn>
+                                        <p:tgtEl>
+                                          <p:spTgt spid="7"/>
+                                        </p:tgtEl>
+                                        <p:attrNameLst>
+                                          <p:attrName>style.visibility</p:attrName>
+                                        </p:attrNameLst>
+                                      </p:cBhvr>
+                                      <p:to>
+                                        <p:strVal val="visible"/>
+                                      </p:to>
+                                    </p:set>
+                                  </p:childTnLst>
+                                </p:cTn>
+                              </p:par>
+                            </p:childTnLst>
+                          </p:cTn>
+                        </p:par>
+                      </p:childTnLst>
+                    </p:cTn>
+                  </p:par>
+                </p:childTnLst>
+              </p:cTn>
+              <p:prevCondLst>
+                <p:cond evt="onPrev" delay="0">
+                  <p:tgtEl>
+                    <p:sldTgt/>
+                  </p:tgtEl>
+                </p:cond>
+              </p:prevCondLst>
+              <p:nextCondLst>
+                <p:cond evt="onNext" delay="0">
+                  <p:tgtEl>
+                    <p:sldTgt/>
+                  </p:tgtEl>
+                </p:cond>
+              </p:nextCondLst>
+            </p:seq>
+          </p:childTnLst>
+        </p:cTn>
+      </p:par>
+    </p:tnLst>
+  </p:timing>
 </p:sld>
 </file>
 
-<file path=ppt/slides/slide16.xml><?xml version="1.0" encoding="utf-8"?>
+<file path=ppt/slides/slide14.xml><?xml version="1.0" encoding="utf-8"?>
 <p:sld xmlns:a="http://schemas.openxmlformats.org/drawingml/2006/main" xmlns:r="http://schemas.openxmlformats.org/officeDocument/2006/relationships" xmlns:p="http://schemas.openxmlformats.org/presentationml/2006/main">
   <p:cSld>
     <p:spTree>
       <p:nvGrpSpPr>
-        <p:cNvPr id="1" name=""/>
+        <p:cNvPr id="1" name="">
+          <a:extLst>
+            <a:ext uri="{FF2B5EF4-FFF2-40B4-BE49-F238E27FC236}">
+              <a16:creationId xmlns:a16="http://schemas.microsoft.com/office/drawing/2014/main" id="{2B3F6AEE-5F94-5352-27F5-6A97B1C7B894}"/>
+            </a:ext>
+          </a:extLst>
+        </p:cNvPr>
         <p:cNvGrpSpPr/>
         <p:nvPr/>
       </p:nvGrpSpPr>
@@ -4674,142 +4567,13 @@
       </p:grpSpPr>
       <p:sp>
         <p:nvSpPr>
-          <p:cNvPr id="2" name="コンテンツ プレースホルダー 1"/>
-          <p:cNvSpPr>
-            <a:spLocks noGrp="1"/>
-          </p:cNvSpPr>
-          <p:nvPr>
-            <p:ph idx="1"/>
-          </p:nvPr>
-        </p:nvSpPr>
-        <p:spPr/>
-        <p:txBody>
-          <a:bodyPr>
-            <a:normAutofit fontScale="92500" lnSpcReduction="10000"/>
-          </a:bodyPr>
-          <a:lstStyle/>
-          <a:p>
-            <a:r>
-              <a:rPr kumimoji="1" lang="ja-JP" altLang="en-US" sz="1500" b="1" dirty="0"/>
-              <a:t>問い: AI がチェックし、人間が採否を判断するワークフローをどう設計するか？</a:t>
-            </a:r>
-            <a:endParaRPr lang="ja-JP" altLang="en-US" dirty="0"/>
-          </a:p>
-          <a:p>
-            <a:r>
-              <a:rPr kumimoji="1" lang="ja-JP" altLang="en-US" sz="1500" dirty="0"/>
-              <a:t>レビューの前提</a:t>
-            </a:r>
-          </a:p>
-          <a:p>
-            <a:pPr lvl="1"/>
-            <a:r>
-              <a:rPr kumimoji="1" lang="ja-JP" altLang="en-US" sz="1500" dirty="0"/>
-              <a:t>これまでは、コーディングの過程でメンタルモデルが形成されていた</a:t>
-            </a:r>
-            <a:endParaRPr kumimoji="1" lang="en-US" altLang="ja-JP" sz="1500" dirty="0"/>
-          </a:p>
-          <a:p>
-            <a:pPr lvl="2"/>
-            <a:r>
-              <a:rPr kumimoji="1" lang="en-US" altLang="ja-JP" sz="1500" dirty="0"/>
-              <a:t>AI</a:t>
-            </a:r>
-            <a:r>
-              <a:rPr kumimoji="1" lang="ja-JP" altLang="en-US" sz="1500" dirty="0"/>
-              <a:t>によって、メンタルモデルが漠然としていても実装ができてしまう</a:t>
-            </a:r>
-            <a:br>
-              <a:rPr kumimoji="1" lang="en-US" altLang="ja-JP" sz="1500" dirty="0"/>
-            </a:br>
-            <a:r>
-              <a:rPr kumimoji="1" lang="ja-JP" altLang="en-US" sz="1500" dirty="0"/>
-              <a:t>≒コードの細かい仕様やトレードオフを理解せぬまま動いてしまう</a:t>
-            </a:r>
-            <a:endParaRPr kumimoji="1" lang="en-US" altLang="ja-JP" sz="1500" dirty="0"/>
-          </a:p>
-          <a:p>
-            <a:pPr lvl="1"/>
-            <a:r>
-              <a:rPr kumimoji="1" lang="ja-JP" altLang="en-US" sz="1500" dirty="0"/>
-              <a:t>著者が先に自分のメンタルモデルへ統合してからレビューに出す</a:t>
-            </a:r>
-          </a:p>
-          <a:p>
-            <a:pPr lvl="1"/>
-            <a:r>
-              <a:rPr kumimoji="1" lang="ja-JP" altLang="en-US" sz="1500" dirty="0"/>
-              <a:t>「AI が書いたので詳細はよく分からないが、テストは通っている」は出せない</a:t>
-            </a:r>
-            <a:endParaRPr lang="ja-JP" altLang="en-US" dirty="0"/>
-          </a:p>
-          <a:p>
-            <a:r>
-              <a:rPr kumimoji="1" lang="ja-JP" altLang="en-US" sz="1500" dirty="0"/>
-              <a:t>セルフレビュー（著者用）とピアレビュー（レビュワー用）を分離</a:t>
-            </a:r>
-          </a:p>
-          <a:p>
-            <a:pPr lvl="1"/>
-            <a:r>
-              <a:rPr kumimoji="1" lang="ja-JP" altLang="en-US" sz="1500" dirty="0"/>
-              <a:t>セルフ: 網羅的チェック + 意思決定の記録</a:t>
-            </a:r>
-            <a:endParaRPr kumimoji="1" lang="en-US" altLang="ja-JP" sz="1500" dirty="0"/>
-          </a:p>
-          <a:p>
-            <a:pPr lvl="2"/>
-            <a:r>
-              <a:rPr kumimoji="1" lang="ja-JP" altLang="en-US" sz="1500" dirty="0"/>
-              <a:t>著者がコードに責任を持つべき</a:t>
-            </a:r>
-            <a:endParaRPr kumimoji="1" lang="en-US" altLang="ja-JP" sz="1500" dirty="0"/>
-          </a:p>
-          <a:p>
-            <a:pPr lvl="1"/>
-            <a:r>
-              <a:rPr lang="ja-JP" altLang="en-US" sz="1500" dirty="0"/>
-              <a:t>ピア: PR 理解 + 重要指摘のみ質問形式</a:t>
-            </a:r>
-            <a:endParaRPr kumimoji="1" lang="ja-JP" altLang="en-US" sz="1500" dirty="0"/>
-          </a:p>
-          <a:p>
-            <a:pPr lvl="2"/>
-            <a:r>
-              <a:rPr kumimoji="1" lang="ja-JP" altLang="en-US" sz="1500" dirty="0"/>
-              <a:t>レビュワーに細かい指摘たくさんされると辛い</a:t>
-            </a:r>
-            <a:endParaRPr lang="ja-JP" altLang="en-US" dirty="0"/>
-          </a:p>
-          <a:p>
-            <a:r>
-              <a:rPr lang="ja-JP" altLang="en-US" sz="1500" dirty="0"/>
-              <a:t>成長の機会</a:t>
-            </a:r>
-            <a:r>
-              <a:rPr kumimoji="1" lang="ja-JP" altLang="en-US" sz="1500" dirty="0"/>
-              <a:t>は「教えること」ではなく「判断に参加すること」</a:t>
-            </a:r>
-          </a:p>
-          <a:p>
-            <a:pPr lvl="1"/>
-            <a:r>
-              <a:rPr kumimoji="1" lang="ja-JP" altLang="en-US" sz="1500" dirty="0"/>
-              <a:t>著者: 自分は何を採るのかを明示する</a:t>
-            </a:r>
-          </a:p>
-          <a:p>
-            <a:pPr lvl="1"/>
-            <a:r>
-              <a:rPr kumimoji="1" lang="ja-JP" altLang="en-US" sz="1500" dirty="0"/>
-              <a:t>レビュワー: その判断は妥当かを問う・理解する</a:t>
-            </a:r>
-          </a:p>
-        </p:txBody>
-      </p:sp>
-      <p:sp>
-        <p:nvSpPr>
-          <p:cNvPr id="3" name="タイトル 2"/>
+          <p:cNvPr id="3" name="タイトル 2">
+            <a:extLst>
+              <a:ext uri="{FF2B5EF4-FFF2-40B4-BE49-F238E27FC236}">
+                <a16:creationId xmlns:a16="http://schemas.microsoft.com/office/drawing/2014/main" id="{7C1741D0-84DD-B362-AFCB-8E37BD3BA897}"/>
+              </a:ext>
+            </a:extLst>
+          </p:cNvPr>
           <p:cNvSpPr>
             <a:spLocks noGrp="1"/>
           </p:cNvSpPr>
@@ -4819,30 +4583,349 @@
         </p:nvSpPr>
         <p:spPr/>
         <p:txBody>
+          <a:bodyPr>
+            <a:normAutofit/>
+          </a:bodyPr>
+          <a:lstStyle/>
+          <a:p>
+            <a:r>
+              <a:rPr kumimoji="1" lang="ja-JP" altLang="en-US" dirty="0"/>
+              <a:t>実践例：レビュー</a:t>
+            </a:r>
+          </a:p>
+        </p:txBody>
+      </p:sp>
+      <p:pic>
+        <p:nvPicPr>
+          <p:cNvPr id="7" name="図 6">
+            <a:extLst>
+              <a:ext uri="{FF2B5EF4-FFF2-40B4-BE49-F238E27FC236}">
+                <a16:creationId xmlns:a16="http://schemas.microsoft.com/office/drawing/2014/main" id="{CC6DBCCD-2083-B397-85C8-B3CB9620083E}"/>
+              </a:ext>
+            </a:extLst>
+          </p:cNvPr>
+          <p:cNvPicPr>
+            <a:picLocks noChangeAspect="1"/>
+          </p:cNvPicPr>
+          <p:nvPr/>
+        </p:nvPicPr>
+        <p:blipFill>
+          <a:blip r:embed="rId2"/>
+          <a:stretch>
+            <a:fillRect/>
+          </a:stretch>
+        </p:blipFill>
+        <p:spPr>
+          <a:xfrm>
+            <a:off x="323204" y="1783464"/>
+            <a:ext cx="9259592" cy="1943371"/>
+          </a:xfrm>
+          <a:prstGeom prst="rect">
+            <a:avLst/>
+          </a:prstGeom>
+        </p:spPr>
+      </p:pic>
+      <p:sp>
+        <p:nvSpPr>
+          <p:cNvPr id="13" name="コンテンツ プレースホルダー 12">
+            <a:extLst>
+              <a:ext uri="{FF2B5EF4-FFF2-40B4-BE49-F238E27FC236}">
+                <a16:creationId xmlns:a16="http://schemas.microsoft.com/office/drawing/2014/main" id="{2C89EBAC-EFC1-D061-F334-1DFC9178DB8B}"/>
+              </a:ext>
+            </a:extLst>
+          </p:cNvPr>
+          <p:cNvSpPr>
+            <a:spLocks noGrp="1"/>
+          </p:cNvSpPr>
+          <p:nvPr>
+            <p:ph idx="1"/>
+          </p:nvPr>
+        </p:nvSpPr>
+        <p:spPr>
+          <a:xfrm>
+            <a:off x="420104" y="1279567"/>
+            <a:ext cx="8496300" cy="4894536"/>
+          </a:xfrm>
+        </p:spPr>
+        <p:txBody>
           <a:bodyPr/>
           <a:lstStyle/>
           <a:p>
             <a:r>
+              <a:rPr lang="en-US" altLang="ja-JP" dirty="0"/>
+              <a:t># </a:t>
+            </a:r>
+            <a:r>
+              <a:rPr lang="ja-JP" altLang="en-US" dirty="0"/>
+              <a:t>実行</a:t>
+            </a:r>
+            <a:r>
+              <a:rPr lang="en-US" altLang="ja-JP" dirty="0"/>
+              <a:t> /peer-review</a:t>
+            </a:r>
+            <a:endParaRPr lang="ja-JP" altLang="en-US" dirty="0"/>
+          </a:p>
+        </p:txBody>
+      </p:sp>
+      <p:pic>
+        <p:nvPicPr>
+          <p:cNvPr id="14" name="図 13">
+            <a:extLst>
+              <a:ext uri="{FF2B5EF4-FFF2-40B4-BE49-F238E27FC236}">
+                <a16:creationId xmlns:a16="http://schemas.microsoft.com/office/drawing/2014/main" id="{FB6BE40A-494D-C2A1-10D1-9F8EF7B7E4F3}"/>
+              </a:ext>
+            </a:extLst>
+          </p:cNvPr>
+          <p:cNvPicPr>
+            <a:picLocks noChangeAspect="1"/>
+          </p:cNvPicPr>
+          <p:nvPr/>
+        </p:nvPicPr>
+        <p:blipFill>
+          <a:blip r:embed="rId3"/>
+          <a:stretch>
+            <a:fillRect/>
+          </a:stretch>
+        </p:blipFill>
+        <p:spPr>
+          <a:xfrm>
+            <a:off x="311712" y="3913951"/>
+            <a:ext cx="2553056" cy="1381318"/>
+          </a:xfrm>
+          <a:prstGeom prst="rect">
+            <a:avLst/>
+          </a:prstGeom>
+        </p:spPr>
+      </p:pic>
+      <p:pic>
+        <p:nvPicPr>
+          <p:cNvPr id="16" name="図 15">
+            <a:extLst>
+              <a:ext uri="{FF2B5EF4-FFF2-40B4-BE49-F238E27FC236}">
+                <a16:creationId xmlns:a16="http://schemas.microsoft.com/office/drawing/2014/main" id="{50089730-DF76-0515-1194-D91809FF64EB}"/>
+              </a:ext>
+            </a:extLst>
+          </p:cNvPr>
+          <p:cNvPicPr>
+            <a:picLocks noChangeAspect="1"/>
+          </p:cNvPicPr>
+          <p:nvPr/>
+        </p:nvPicPr>
+        <p:blipFill>
+          <a:blip r:embed="rId4"/>
+          <a:stretch>
+            <a:fillRect/>
+          </a:stretch>
+        </p:blipFill>
+        <p:spPr>
+          <a:xfrm>
+            <a:off x="2417168" y="3561129"/>
+            <a:ext cx="7488832" cy="3302575"/>
+          </a:xfrm>
+          <a:prstGeom prst="rect">
+            <a:avLst/>
+          </a:prstGeom>
+        </p:spPr>
+      </p:pic>
+      <p:sp>
+        <p:nvSpPr>
+          <p:cNvPr id="17" name="テキスト ボックス 16">
+            <a:extLst>
+              <a:ext uri="{FF2B5EF4-FFF2-40B4-BE49-F238E27FC236}">
+                <a16:creationId xmlns:a16="http://schemas.microsoft.com/office/drawing/2014/main" id="{F57C78EA-274C-53D9-2169-A2AA325C4588}"/>
+              </a:ext>
+            </a:extLst>
+          </p:cNvPr>
+          <p:cNvSpPr txBox="1"/>
+          <p:nvPr/>
+        </p:nvSpPr>
+        <p:spPr>
+          <a:xfrm>
+            <a:off x="311712" y="5647407"/>
+            <a:ext cx="3852428" cy="646331"/>
+          </a:xfrm>
+          <a:prstGeom prst="rect">
+            <a:avLst/>
+          </a:prstGeom>
+          <a:noFill/>
+        </p:spPr>
+        <p:txBody>
+          <a:bodyPr wrap="square" rtlCol="0">
+            <a:spAutoFit/>
+          </a:bodyPr>
+          <a:lstStyle/>
+          <a:p>
+            <a:r>
               <a:rPr kumimoji="1" lang="ja-JP" altLang="en-US" dirty="0"/>
-              <a:t>判断（Judgment）— レビュー制度を設計する</a:t>
+              <a:t>シェルスクリプト</a:t>
+            </a:r>
+            <a:endParaRPr kumimoji="1" lang="en-US" altLang="ja-JP" dirty="0"/>
+          </a:p>
+          <a:p>
+            <a:r>
+              <a:rPr kumimoji="1" lang="ja-JP" altLang="en-US" dirty="0"/>
+              <a:t>で差分を収集</a:t>
             </a:r>
           </a:p>
         </p:txBody>
       </p:sp>
     </p:spTree>
+    <p:extLst>
+      <p:ext uri="{BB962C8B-B14F-4D97-AF65-F5344CB8AC3E}">
+        <p14:creationId xmlns:p14="http://schemas.microsoft.com/office/powerpoint/2010/main" val="2393029103"/>
+      </p:ext>
+    </p:extLst>
   </p:cSld>
   <p:clrMapOvr>
     <a:masterClrMapping/>
   </p:clrMapOvr>
+  <p:timing>
+    <p:tnLst>
+      <p:par>
+        <p:cTn id="1" dur="indefinite" restart="never" nodeType="tmRoot">
+          <p:childTnLst>
+            <p:seq concurrent="1" nextAc="seek">
+              <p:cTn id="2" dur="indefinite" nodeType="mainSeq">
+                <p:childTnLst>
+                  <p:par>
+                    <p:cTn id="3" fill="hold">
+                      <p:stCondLst>
+                        <p:cond delay="indefinite"/>
+                      </p:stCondLst>
+                      <p:childTnLst>
+                        <p:par>
+                          <p:cTn id="4" fill="hold">
+                            <p:stCondLst>
+                              <p:cond delay="0"/>
+                            </p:stCondLst>
+                            <p:childTnLst>
+                              <p:par>
+                                <p:cTn id="5" presetID="1" presetClass="entr" presetSubtype="0" fill="hold" nodeType="clickEffect">
+                                  <p:stCondLst>
+                                    <p:cond delay="0"/>
+                                  </p:stCondLst>
+                                  <p:childTnLst>
+                                    <p:set>
+                                      <p:cBhvr>
+                                        <p:cTn id="6" dur="1" fill="hold">
+                                          <p:stCondLst>
+                                            <p:cond delay="0"/>
+                                          </p:stCondLst>
+                                        </p:cTn>
+                                        <p:tgtEl>
+                                          <p:spTgt spid="16"/>
+                                        </p:tgtEl>
+                                        <p:attrNameLst>
+                                          <p:attrName>style.visibility</p:attrName>
+                                        </p:attrNameLst>
+                                      </p:cBhvr>
+                                      <p:to>
+                                        <p:strVal val="visible"/>
+                                      </p:to>
+                                    </p:set>
+                                  </p:childTnLst>
+                                </p:cTn>
+                              </p:par>
+                              <p:par>
+                                <p:cTn id="7" presetID="1" presetClass="entr" presetSubtype="0" fill="hold" grpId="0" nodeType="withEffect">
+                                  <p:stCondLst>
+                                    <p:cond delay="0"/>
+                                  </p:stCondLst>
+                                  <p:childTnLst>
+                                    <p:set>
+                                      <p:cBhvr>
+                                        <p:cTn id="8" dur="1" fill="hold">
+                                          <p:stCondLst>
+                                            <p:cond delay="0"/>
+                                          </p:stCondLst>
+                                        </p:cTn>
+                                        <p:tgtEl>
+                                          <p:spTgt spid="17"/>
+                                        </p:tgtEl>
+                                        <p:attrNameLst>
+                                          <p:attrName>style.visibility</p:attrName>
+                                        </p:attrNameLst>
+                                      </p:cBhvr>
+                                      <p:to>
+                                        <p:strVal val="visible"/>
+                                      </p:to>
+                                    </p:set>
+                                  </p:childTnLst>
+                                </p:cTn>
+                              </p:par>
+                              <p:par>
+                                <p:cTn id="9" presetID="1" presetClass="entr" presetSubtype="0" fill="hold" nodeType="withEffect">
+                                  <p:stCondLst>
+                                    <p:cond delay="0"/>
+                                  </p:stCondLst>
+                                  <p:childTnLst>
+                                    <p:set>
+                                      <p:cBhvr>
+                                        <p:cTn id="10" dur="1" fill="hold">
+                                          <p:stCondLst>
+                                            <p:cond delay="0"/>
+                                          </p:stCondLst>
+                                        </p:cTn>
+                                        <p:tgtEl>
+                                          <p:spTgt spid="14"/>
+                                        </p:tgtEl>
+                                        <p:attrNameLst>
+                                          <p:attrName>style.visibility</p:attrName>
+                                        </p:attrNameLst>
+                                      </p:cBhvr>
+                                      <p:to>
+                                        <p:strVal val="visible"/>
+                                      </p:to>
+                                    </p:set>
+                                  </p:childTnLst>
+                                </p:cTn>
+                              </p:par>
+                            </p:childTnLst>
+                          </p:cTn>
+                        </p:par>
+                      </p:childTnLst>
+                    </p:cTn>
+                  </p:par>
+                </p:childTnLst>
+              </p:cTn>
+              <p:prevCondLst>
+                <p:cond evt="onPrev" delay="0">
+                  <p:tgtEl>
+                    <p:sldTgt/>
+                  </p:tgtEl>
+                </p:cond>
+              </p:prevCondLst>
+              <p:nextCondLst>
+                <p:cond evt="onNext" delay="0">
+                  <p:tgtEl>
+                    <p:sldTgt/>
+                  </p:tgtEl>
+                </p:cond>
+              </p:nextCondLst>
+            </p:seq>
+          </p:childTnLst>
+        </p:cTn>
+      </p:par>
+    </p:tnLst>
+    <p:bldLst>
+      <p:bldP spid="17" grpId="0"/>
+    </p:bldLst>
+  </p:timing>
 </p:sld>
 </file>
 
-<file path=ppt/slides/slide17.xml><?xml version="1.0" encoding="utf-8"?>
+<file path=ppt/slides/slide15.xml><?xml version="1.0" encoding="utf-8"?>
 <p:sld xmlns:a="http://schemas.openxmlformats.org/drawingml/2006/main" xmlns:r="http://schemas.openxmlformats.org/officeDocument/2006/relationships" xmlns:p="http://schemas.openxmlformats.org/presentationml/2006/main">
   <p:cSld>
     <p:spTree>
       <p:nvGrpSpPr>
-        <p:cNvPr id="1" name=""/>
+        <p:cNvPr id="1" name="">
+          <a:extLst>
+            <a:ext uri="{FF2B5EF4-FFF2-40B4-BE49-F238E27FC236}">
+              <a16:creationId xmlns:a16="http://schemas.microsoft.com/office/drawing/2014/main" id="{B9B65206-52AA-6C96-F47E-455ED25B5B7C}"/>
+            </a:ext>
+          </a:extLst>
+        </p:cNvPr>
         <p:cNvGrpSpPr/>
         <p:nvPr/>
       </p:nvGrpSpPr>
@@ -4856,84 +4939,13 @@
       </p:grpSpPr>
       <p:sp>
         <p:nvSpPr>
-          <p:cNvPr id="2" name="コンテンツ プレースホルダー 1"/>
-          <p:cNvSpPr>
-            <a:spLocks noGrp="1"/>
-          </p:cNvSpPr>
-          <p:nvPr>
-            <p:ph idx="1"/>
-          </p:nvPr>
-        </p:nvSpPr>
-        <p:spPr/>
-        <p:txBody>
-          <a:bodyPr>
-            <a:normAutofit/>
-          </a:bodyPr>
-          <a:lstStyle/>
-          <a:p>
-            <a:r>
-              <a:rPr kumimoji="1" lang="ja-JP" altLang="en-US" sz="1500" b="1" dirty="0"/>
-              <a:t>PR で共有すべき 4要素</a:t>
-            </a:r>
-          </a:p>
-          <a:p>
-            <a:pPr lvl="1"/>
-            <a:r>
-              <a:rPr kumimoji="1" lang="ja-JP" altLang="en-US" sz="1500" dirty="0"/>
-              <a:t>コード / 設計意図 / トレードオフ / 影響範囲</a:t>
-            </a:r>
-          </a:p>
-          <a:p>
-            <a:endParaRPr lang="ja-JP" altLang="en-US" dirty="0"/>
-          </a:p>
-          <a:p>
-            <a:r>
-              <a:rPr kumimoji="1" lang="ja-JP" altLang="en-US" sz="1500" b="1" dirty="0"/>
-              <a:t>9専門エージェント</a:t>
-            </a:r>
-          </a:p>
-          <a:p>
-            <a:pPr lvl="1"/>
-            <a:r>
-              <a:rPr kumimoji="1" lang="ja-JP" altLang="en-US" sz="1500" dirty="0"/>
-              <a:t>FE/BE: bug-hunter / security / performance</a:t>
-            </a:r>
-          </a:p>
-          <a:p>
-            <a:pPr lvl="1"/>
-            <a:r>
-              <a:rPr kumimoji="1" lang="ja-JP" altLang="en-US" sz="1500" dirty="0"/>
-              <a:t>Cross-cutting: architecture / simplicity / spec</a:t>
-            </a:r>
-          </a:p>
-          <a:p>
-            <a:endParaRPr lang="ja-JP" altLang="en-US" dirty="0"/>
-          </a:p>
-          <a:p>
-            <a:r>
-              <a:rPr kumimoji="1" lang="ja-JP" altLang="en-US" sz="1500" b="1" dirty="0"/>
-              <a:t>構造化プロンプト</a:t>
-            </a:r>
-          </a:p>
-          <a:p>
-            <a:pPr lvl="1"/>
-            <a:r>
-              <a:rPr kumimoji="1" lang="ja-JP" altLang="en-US" sz="1500" dirty="0"/>
-              <a:t>Role → Scope → Task → Constraints → Context → Output</a:t>
-            </a:r>
-          </a:p>
-          <a:p>
-            <a:pPr lvl="1"/>
-            <a:r>
-              <a:rPr kumimoji="1" lang="ja-JP" altLang="en-US" sz="1500" dirty="0"/>
-              <a:t>Read-only / 専門外については何も言わない</a:t>
-            </a:r>
-          </a:p>
-        </p:txBody>
-      </p:sp>
-      <p:sp>
-        <p:nvSpPr>
-          <p:cNvPr id="3" name="タイトル 2"/>
+          <p:cNvPr id="3" name="タイトル 2">
+            <a:extLst>
+              <a:ext uri="{FF2B5EF4-FFF2-40B4-BE49-F238E27FC236}">
+                <a16:creationId xmlns:a16="http://schemas.microsoft.com/office/drawing/2014/main" id="{2F45F9D3-FA06-2679-6636-C8772B9A9B89}"/>
+              </a:ext>
+            </a:extLst>
+          </p:cNvPr>
           <p:cNvSpPr>
             <a:spLocks noGrp="1"/>
           </p:cNvSpPr>
@@ -4944,31 +4956,292 @@
         <p:spPr/>
         <p:txBody>
           <a:bodyPr>
-            <a:normAutofit fontScale="90000"/>
+            <a:normAutofit/>
           </a:bodyPr>
           <a:lstStyle/>
           <a:p>
             <a:r>
               <a:rPr kumimoji="1" lang="ja-JP" altLang="en-US" dirty="0"/>
-              <a:t>判断（Judgment）— 共有すべきこととエージェント設計</a:t>
-            </a:r>
+              <a:t>実践例</a:t>
+            </a:r>
+          </a:p>
+        </p:txBody>
+      </p:sp>
+      <p:pic>
+        <p:nvPicPr>
+          <p:cNvPr id="9" name="コンテンツ プレースホルダー 8">
+            <a:extLst>
+              <a:ext uri="{FF2B5EF4-FFF2-40B4-BE49-F238E27FC236}">
+                <a16:creationId xmlns:a16="http://schemas.microsoft.com/office/drawing/2014/main" id="{C1EAAB7E-CAF5-F3DB-1926-566D2719A647}"/>
+              </a:ext>
+            </a:extLst>
+          </p:cNvPr>
+          <p:cNvPicPr>
+            <a:picLocks noGrp="1" noChangeAspect="1"/>
+          </p:cNvPicPr>
+          <p:nvPr>
+            <p:ph idx="1"/>
+          </p:nvPr>
+        </p:nvPicPr>
+        <p:blipFill>
+          <a:blip r:embed="rId2"/>
+          <a:stretch>
+            <a:fillRect/>
+          </a:stretch>
+        </p:blipFill>
+        <p:spPr>
+          <a:xfrm>
+            <a:off x="236475" y="1124744"/>
+            <a:ext cx="3248478" cy="790685"/>
+          </a:xfrm>
+          <a:prstGeom prst="rect">
+            <a:avLst/>
+          </a:prstGeom>
+        </p:spPr>
+      </p:pic>
+      <p:pic>
+        <p:nvPicPr>
+          <p:cNvPr id="7" name="図 6">
+            <a:extLst>
+              <a:ext uri="{FF2B5EF4-FFF2-40B4-BE49-F238E27FC236}">
+                <a16:creationId xmlns:a16="http://schemas.microsoft.com/office/drawing/2014/main" id="{2901CF3F-765F-312F-E94E-3B9512AB8A5F}"/>
+              </a:ext>
+            </a:extLst>
+          </p:cNvPr>
+          <p:cNvPicPr>
+            <a:picLocks noChangeAspect="1"/>
+          </p:cNvPicPr>
+          <p:nvPr/>
+        </p:nvPicPr>
+        <p:blipFill>
+          <a:blip r:embed="rId3"/>
+          <a:stretch>
+            <a:fillRect/>
+          </a:stretch>
+        </p:blipFill>
+        <p:spPr>
+          <a:xfrm>
+            <a:off x="236475" y="1988840"/>
+            <a:ext cx="8599457" cy="4752528"/>
+          </a:xfrm>
+          <a:prstGeom prst="rect">
+            <a:avLst/>
+          </a:prstGeom>
+        </p:spPr>
+      </p:pic>
+      <p:sp>
+        <p:nvSpPr>
+          <p:cNvPr id="10" name="テキスト ボックス 9">
+            <a:extLst>
+              <a:ext uri="{FF2B5EF4-FFF2-40B4-BE49-F238E27FC236}">
+                <a16:creationId xmlns:a16="http://schemas.microsoft.com/office/drawing/2014/main" id="{46A8CD5C-A387-8BEC-FB32-2CC163AA90B9}"/>
+              </a:ext>
+            </a:extLst>
+          </p:cNvPr>
+          <p:cNvSpPr txBox="1"/>
+          <p:nvPr/>
+        </p:nvSpPr>
+        <p:spPr>
+          <a:xfrm>
+            <a:off x="3488737" y="1150754"/>
+            <a:ext cx="3852428" cy="369332"/>
+          </a:xfrm>
+          <a:prstGeom prst="rect">
+            <a:avLst/>
+          </a:prstGeom>
+          <a:noFill/>
+        </p:spPr>
+        <p:txBody>
+          <a:bodyPr wrap="square" rtlCol="0">
+            <a:spAutoFit/>
+          </a:bodyPr>
+          <a:lstStyle/>
+          <a:p>
+            <a:r>
+              <a:rPr kumimoji="1" lang="ja-JP" altLang="en-US" dirty="0"/>
+              <a:t>←レビュー用</a:t>
+            </a:r>
+            <a:r>
+              <a:rPr kumimoji="1" lang="en-US" altLang="ja-JP" dirty="0"/>
+              <a:t>Temp</a:t>
+            </a:r>
+            <a:r>
+              <a:rPr kumimoji="1" lang="ja-JP" altLang="en-US" dirty="0"/>
+              <a:t>ディレクトリ</a:t>
+            </a:r>
+          </a:p>
+        </p:txBody>
+      </p:sp>
+      <p:sp>
+        <p:nvSpPr>
+          <p:cNvPr id="11" name="テキスト ボックス 10">
+            <a:extLst>
+              <a:ext uri="{FF2B5EF4-FFF2-40B4-BE49-F238E27FC236}">
+                <a16:creationId xmlns:a16="http://schemas.microsoft.com/office/drawing/2014/main" id="{8EE9730A-68C8-417B-2D86-1CE6EBB31331}"/>
+              </a:ext>
+            </a:extLst>
+          </p:cNvPr>
+          <p:cNvSpPr txBox="1"/>
+          <p:nvPr/>
+        </p:nvSpPr>
+        <p:spPr>
+          <a:xfrm>
+            <a:off x="3728864" y="1538121"/>
+            <a:ext cx="3852428" cy="369332"/>
+          </a:xfrm>
+          <a:prstGeom prst="rect">
+            <a:avLst/>
+          </a:prstGeom>
+          <a:noFill/>
+        </p:spPr>
+        <p:txBody>
+          <a:bodyPr wrap="square" rtlCol="0">
+            <a:spAutoFit/>
+          </a:bodyPr>
+          <a:lstStyle/>
+          <a:p>
+            <a:r>
+              <a:rPr kumimoji="1" lang="ja-JP" altLang="en-US" dirty="0"/>
+              <a:t>↓</a:t>
+            </a:r>
+            <a:r>
+              <a:rPr lang="ja-JP" altLang="en-US" dirty="0"/>
+              <a:t>仕様情報収集</a:t>
+            </a:r>
+            <a:endParaRPr kumimoji="1" lang="ja-JP" altLang="en-US" dirty="0"/>
           </a:p>
         </p:txBody>
       </p:sp>
     </p:spTree>
+    <p:extLst>
+      <p:ext uri="{BB962C8B-B14F-4D97-AF65-F5344CB8AC3E}">
+        <p14:creationId xmlns:p14="http://schemas.microsoft.com/office/powerpoint/2010/main" val="954731107"/>
+      </p:ext>
+    </p:extLst>
   </p:cSld>
   <p:clrMapOvr>
     <a:masterClrMapping/>
   </p:clrMapOvr>
+  <p:timing>
+    <p:tnLst>
+      <p:par>
+        <p:cTn id="1" dur="indefinite" restart="never" nodeType="tmRoot">
+          <p:childTnLst>
+            <p:seq concurrent="1" nextAc="seek">
+              <p:cTn id="2" dur="indefinite" nodeType="mainSeq">
+                <p:childTnLst>
+                  <p:par>
+                    <p:cTn id="3" fill="hold">
+                      <p:stCondLst>
+                        <p:cond delay="indefinite"/>
+                      </p:stCondLst>
+                      <p:childTnLst>
+                        <p:par>
+                          <p:cTn id="4" fill="hold">
+                            <p:stCondLst>
+                              <p:cond delay="0"/>
+                            </p:stCondLst>
+                            <p:childTnLst>
+                              <p:par>
+                                <p:cTn id="5" presetID="1" presetClass="entr" presetSubtype="0" fill="hold" nodeType="clickEffect">
+                                  <p:stCondLst>
+                                    <p:cond delay="0"/>
+                                  </p:stCondLst>
+                                  <p:childTnLst>
+                                    <p:set>
+                                      <p:cBhvr>
+                                        <p:cTn id="6" dur="1" fill="hold">
+                                          <p:stCondLst>
+                                            <p:cond delay="0"/>
+                                          </p:stCondLst>
+                                        </p:cTn>
+                                        <p:tgtEl>
+                                          <p:spTgt spid="7"/>
+                                        </p:tgtEl>
+                                        <p:attrNameLst>
+                                          <p:attrName>style.visibility</p:attrName>
+                                        </p:attrNameLst>
+                                      </p:cBhvr>
+                                      <p:to>
+                                        <p:strVal val="visible"/>
+                                      </p:to>
+                                    </p:set>
+                                  </p:childTnLst>
+                                </p:cTn>
+                              </p:par>
+                              <p:par>
+                                <p:cTn id="7" presetID="1" presetClass="entr" presetSubtype="0" fill="hold" grpId="0" nodeType="withEffect">
+                                  <p:stCondLst>
+                                    <p:cond delay="0"/>
+                                  </p:stCondLst>
+                                  <p:childTnLst>
+                                    <p:set>
+                                      <p:cBhvr>
+                                        <p:cTn id="8" dur="1" fill="hold">
+                                          <p:stCondLst>
+                                            <p:cond delay="0"/>
+                                          </p:stCondLst>
+                                        </p:cTn>
+                                        <p:tgtEl>
+                                          <p:spTgt spid="11"/>
+                                        </p:tgtEl>
+                                        <p:attrNameLst>
+                                          <p:attrName>style.visibility</p:attrName>
+                                        </p:attrNameLst>
+                                      </p:cBhvr>
+                                      <p:to>
+                                        <p:strVal val="visible"/>
+                                      </p:to>
+                                    </p:set>
+                                  </p:childTnLst>
+                                </p:cTn>
+                              </p:par>
+                            </p:childTnLst>
+                          </p:cTn>
+                        </p:par>
+                      </p:childTnLst>
+                    </p:cTn>
+                  </p:par>
+                </p:childTnLst>
+              </p:cTn>
+              <p:prevCondLst>
+                <p:cond evt="onPrev" delay="0">
+                  <p:tgtEl>
+                    <p:sldTgt/>
+                  </p:tgtEl>
+                </p:cond>
+              </p:prevCondLst>
+              <p:nextCondLst>
+                <p:cond evt="onNext" delay="0">
+                  <p:tgtEl>
+                    <p:sldTgt/>
+                  </p:tgtEl>
+                </p:cond>
+              </p:nextCondLst>
+            </p:seq>
+          </p:childTnLst>
+        </p:cTn>
+      </p:par>
+    </p:tnLst>
+    <p:bldLst>
+      <p:bldP spid="11" grpId="0"/>
+    </p:bldLst>
+  </p:timing>
 </p:sld>
 </file>
 
-<file path=ppt/slides/slide18.xml><?xml version="1.0" encoding="utf-8"?>
+<file path=ppt/slides/slide16.xml><?xml version="1.0" encoding="utf-8"?>
 <p:sld xmlns:a="http://schemas.openxmlformats.org/drawingml/2006/main" xmlns:r="http://schemas.openxmlformats.org/officeDocument/2006/relationships" xmlns:p="http://schemas.openxmlformats.org/presentationml/2006/main">
   <p:cSld>
     <p:spTree>
       <p:nvGrpSpPr>
-        <p:cNvPr id="1" name=""/>
+        <p:cNvPr id="1" name="">
+          <a:extLst>
+            <a:ext uri="{FF2B5EF4-FFF2-40B4-BE49-F238E27FC236}">
+              <a16:creationId xmlns:a16="http://schemas.microsoft.com/office/drawing/2014/main" id="{5F811E11-4560-97F3-BF44-816A2A5537B4}"/>
+            </a:ext>
+          </a:extLst>
+        </p:cNvPr>
         <p:cNvGrpSpPr/>
         <p:nvPr/>
       </p:nvGrpSpPr>
@@ -4982,7 +5255,43 @@
       </p:grpSpPr>
       <p:sp>
         <p:nvSpPr>
-          <p:cNvPr id="2" name="コンテンツ プレースホルダー 1"/>
+          <p:cNvPr id="3" name="タイトル 2">
+            <a:extLst>
+              <a:ext uri="{FF2B5EF4-FFF2-40B4-BE49-F238E27FC236}">
+                <a16:creationId xmlns:a16="http://schemas.microsoft.com/office/drawing/2014/main" id="{28CC07D9-7972-AD22-9BC4-5C302257E728}"/>
+              </a:ext>
+            </a:extLst>
+          </p:cNvPr>
+          <p:cNvSpPr>
+            <a:spLocks noGrp="1"/>
+          </p:cNvSpPr>
+          <p:nvPr>
+            <p:ph type="title"/>
+          </p:nvPr>
+        </p:nvSpPr>
+        <p:spPr/>
+        <p:txBody>
+          <a:bodyPr>
+            <a:normAutofit/>
+          </a:bodyPr>
+          <a:lstStyle/>
+          <a:p>
+            <a:r>
+              <a:rPr kumimoji="1" lang="ja-JP" altLang="en-US" dirty="0"/>
+              <a:t>実践例</a:t>
+            </a:r>
+          </a:p>
+        </p:txBody>
+      </p:sp>
+      <p:sp>
+        <p:nvSpPr>
+          <p:cNvPr id="4" name="コンテンツ プレースホルダー 3">
+            <a:extLst>
+              <a:ext uri="{FF2B5EF4-FFF2-40B4-BE49-F238E27FC236}">
+                <a16:creationId xmlns:a16="http://schemas.microsoft.com/office/drawing/2014/main" id="{B36FBEC6-67CA-AB02-022D-F4630DE8B5AE}"/>
+              </a:ext>
+            </a:extLst>
+          </p:cNvPr>
           <p:cNvSpPr>
             <a:spLocks noGrp="1"/>
           </p:cNvSpPr>
@@ -4992,132 +5301,52 @@
         </p:nvSpPr>
         <p:spPr/>
         <p:txBody>
-          <a:bodyPr>
-            <a:normAutofit/>
-          </a:bodyPr>
+          <a:bodyPr/>
           <a:lstStyle/>
           <a:p>
             <a:r>
-              <a:rPr kumimoji="1" lang="ja-JP" altLang="en-US" sz="1500" b="1" dirty="0"/>
-              <a:t>著者</a:t>
-            </a:r>
-          </a:p>
-          <a:p>
-            <a:pPr lvl="1"/>
-            <a:r>
-              <a:rPr kumimoji="1" lang="ja-JP" altLang="en-US" sz="1500" dirty="0"/>
-              <a:t>/self-review → 網羅的チェック（Reckoning）</a:t>
-            </a:r>
-          </a:p>
-          <a:p>
-            <a:pPr lvl="1"/>
-            <a:r>
-              <a:rPr kumimoji="1" lang="ja-JP" altLang="en-US" sz="1500" dirty="0"/>
-              <a:t>意思決定フェーズ → 各 finding に判断（Judgment）</a:t>
-            </a:r>
-          </a:p>
-          <a:p>
-            <a:pPr lvl="1"/>
-            <a:r>
-              <a:rPr kumimoji="1" lang="ja-JP" altLang="en-US" sz="1500" dirty="0"/>
-              <a:t>/draft-pr → 意思決定記録と設計意図を PR に埋め込む</a:t>
-            </a:r>
-            <a:endParaRPr lang="ja-JP" altLang="en-US" dirty="0"/>
-          </a:p>
-          <a:p>
-            <a:r>
-              <a:rPr kumimoji="1" lang="ja-JP" altLang="en-US" sz="1500" b="1" dirty="0"/>
-              <a:t>レビュワー</a:t>
-            </a:r>
-          </a:p>
-          <a:p>
-            <a:pPr lvl="1"/>
-            <a:r>
-              <a:rPr kumimoji="1" lang="ja-JP" altLang="en-US" sz="1500" dirty="0"/>
-              <a:t>/peer-review → 検討済み事項をスキップ</a:t>
-            </a:r>
-          </a:p>
-          <a:p>
-            <a:pPr lvl="1"/>
-            <a:r>
-              <a:rPr kumimoji="1" lang="ja-JP" altLang="en-US" sz="1500" dirty="0"/>
-              <a:t>コメント選択 → 「その判断は妥当か」を問う（Judgment）</a:t>
-            </a:r>
-          </a:p>
-          <a:p>
-            <a:pPr lvl="1"/>
-            <a:r>
-              <a:rPr kumimoji="1" lang="ja-JP" altLang="en-US" sz="1500" dirty="0"/>
-              <a:t>/post-review → Pending レビューを投稿</a:t>
-            </a:r>
-          </a:p>
-          <a:p>
-            <a:r>
-              <a:rPr lang="ja-JP" altLang="en-US" sz="1500" b="1" dirty="0"/>
-              <a:t>チームで</a:t>
-            </a:r>
-          </a:p>
-          <a:p>
-            <a:pPr lvl="1"/>
-            <a:r>
-              <a:rPr lang="en-US" altLang="ja-JP" sz="1500" dirty="0"/>
-              <a:t>Claude.md</a:t>
-            </a:r>
-            <a:r>
-              <a:rPr lang="ja-JP" altLang="en-US" sz="1500" dirty="0"/>
-              <a:t>や各</a:t>
-            </a:r>
-            <a:r>
-              <a:rPr lang="en-US" altLang="ja-JP" sz="1500" dirty="0"/>
-              <a:t>Agent.md</a:t>
-            </a:r>
-            <a:r>
-              <a:rPr lang="ja-JP" altLang="en-US" sz="1500" dirty="0"/>
-              <a:t>に判断・観点を追加していく（Judgment）</a:t>
-            </a:r>
-            <a:endParaRPr lang="en-US" altLang="ja-JP" sz="1500" dirty="0"/>
-          </a:p>
-          <a:p>
-            <a:pPr lvl="1"/>
-            <a:endParaRPr lang="ja-JP" altLang="en-US" dirty="0"/>
-          </a:p>
-          <a:p>
-            <a:r>
-              <a:rPr kumimoji="1" lang="ja-JP" altLang="en-US" sz="1500" b="1" dirty="0"/>
-              <a:t>重要なのは「AI に言われたから」ではなく</a:t>
-            </a:r>
-          </a:p>
-          <a:p>
-            <a:r>
-              <a:rPr kumimoji="1" lang="ja-JP" altLang="en-US" sz="1500" b="1" dirty="0"/>
-              <a:t>「自分はこう判断した」と残すこと</a:t>
+              <a:rPr lang="ja-JP" altLang="en-US" dirty="0"/>
+              <a:t>レビュー用エージェントを起動する（仕様コンテキストと差分をファイル参照させる）</a:t>
             </a:r>
           </a:p>
         </p:txBody>
       </p:sp>
-      <p:sp>
-        <p:nvSpPr>
-          <p:cNvPr id="3" name="タイトル 2"/>
-          <p:cNvSpPr>
-            <a:spLocks noGrp="1"/>
-          </p:cNvSpPr>
-          <p:nvPr>
-            <p:ph type="title"/>
-          </p:nvPr>
-        </p:nvSpPr>
-        <p:spPr/>
-        <p:txBody>
-          <a:bodyPr/>
-          <a:lstStyle/>
-          <a:p>
-            <a:r>
-              <a:rPr kumimoji="1" lang="ja-JP" altLang="en-US" dirty="0"/>
-              <a:t>演算（Reckoning）— 判断を通すワークフロー</a:t>
-            </a:r>
-          </a:p>
-        </p:txBody>
-      </p:sp>
+      <p:pic>
+        <p:nvPicPr>
+          <p:cNvPr id="9" name="コンテンツ プレースホルダー 8">
+            <a:extLst>
+              <a:ext uri="{FF2B5EF4-FFF2-40B4-BE49-F238E27FC236}">
+                <a16:creationId xmlns:a16="http://schemas.microsoft.com/office/drawing/2014/main" id="{DE197A31-DBCD-DE67-7477-1E28B9400EDB}"/>
+              </a:ext>
+            </a:extLst>
+          </p:cNvPr>
+          <p:cNvPicPr>
+            <a:picLocks noChangeAspect="1"/>
+          </p:cNvPicPr>
+          <p:nvPr/>
+        </p:nvPicPr>
+        <p:blipFill>
+          <a:blip r:embed="rId2"/>
+          <a:stretch>
+            <a:fillRect/>
+          </a:stretch>
+        </p:blipFill>
+        <p:spPr>
+          <a:xfrm>
+            <a:off x="704850" y="1886275"/>
+            <a:ext cx="8496300" cy="3085450"/>
+          </a:xfrm>
+          <a:prstGeom prst="rect">
+            <a:avLst/>
+          </a:prstGeom>
+        </p:spPr>
+      </p:pic>
     </p:spTree>
+    <p:extLst>
+      <p:ext uri="{BB962C8B-B14F-4D97-AF65-F5344CB8AC3E}">
+        <p14:creationId xmlns:p14="http://schemas.microsoft.com/office/powerpoint/2010/main" val="3835030111"/>
+      </p:ext>
+    </p:extLst>
   </p:cSld>
   <p:clrMapOvr>
     <a:masterClrMapping/>
@@ -5125,12 +5354,18 @@
 </p:sld>
 </file>
 
-<file path=ppt/slides/slide19.xml><?xml version="1.0" encoding="utf-8"?>
+<file path=ppt/slides/slide17.xml><?xml version="1.0" encoding="utf-8"?>
 <p:sld xmlns:a="http://schemas.openxmlformats.org/drawingml/2006/main" xmlns:r="http://schemas.openxmlformats.org/officeDocument/2006/relationships" xmlns:p="http://schemas.openxmlformats.org/presentationml/2006/main">
   <p:cSld>
     <p:spTree>
       <p:nvGrpSpPr>
-        <p:cNvPr id="1" name=""/>
+        <p:cNvPr id="1" name="">
+          <a:extLst>
+            <a:ext uri="{FF2B5EF4-FFF2-40B4-BE49-F238E27FC236}">
+              <a16:creationId xmlns:a16="http://schemas.microsoft.com/office/drawing/2014/main" id="{22E58C83-8ACF-ACD5-E69D-DA10EA815AE3}"/>
+            </a:ext>
+          </a:extLst>
+        </p:cNvPr>
         <p:cNvGrpSpPr/>
         <p:nvPr/>
       </p:nvGrpSpPr>
@@ -5144,7 +5379,674 @@
       </p:grpSpPr>
       <p:sp>
         <p:nvSpPr>
-          <p:cNvPr id="2" name="コンテンツ プレースホルダー 1"/>
+          <p:cNvPr id="3" name="タイトル 2">
+            <a:extLst>
+              <a:ext uri="{FF2B5EF4-FFF2-40B4-BE49-F238E27FC236}">
+                <a16:creationId xmlns:a16="http://schemas.microsoft.com/office/drawing/2014/main" id="{6E8E7C4A-D68B-D943-8C8C-48BDF8FB3858}"/>
+              </a:ext>
+            </a:extLst>
+          </p:cNvPr>
+          <p:cNvSpPr>
+            <a:spLocks noGrp="1"/>
+          </p:cNvSpPr>
+          <p:nvPr>
+            <p:ph type="title"/>
+          </p:nvPr>
+        </p:nvSpPr>
+        <p:spPr/>
+        <p:txBody>
+          <a:bodyPr>
+            <a:normAutofit/>
+          </a:bodyPr>
+          <a:lstStyle/>
+          <a:p>
+            <a:r>
+              <a:rPr kumimoji="1" lang="ja-JP" altLang="en-US" dirty="0"/>
+              <a:t>実践例</a:t>
+            </a:r>
+          </a:p>
+        </p:txBody>
+      </p:sp>
+      <p:pic>
+        <p:nvPicPr>
+          <p:cNvPr id="5" name="コンテンツ プレースホルダー 4">
+            <a:extLst>
+              <a:ext uri="{FF2B5EF4-FFF2-40B4-BE49-F238E27FC236}">
+                <a16:creationId xmlns:a16="http://schemas.microsoft.com/office/drawing/2014/main" id="{D3094BE5-9414-9BFD-9A57-C7D4853739C0}"/>
+              </a:ext>
+            </a:extLst>
+          </p:cNvPr>
+          <p:cNvPicPr>
+            <a:picLocks noGrp="1" noChangeAspect="1"/>
+          </p:cNvPicPr>
+          <p:nvPr>
+            <p:ph idx="1"/>
+          </p:nvPr>
+        </p:nvPicPr>
+        <p:blipFill>
+          <a:blip r:embed="rId2"/>
+          <a:stretch>
+            <a:fillRect/>
+          </a:stretch>
+        </p:blipFill>
+        <p:spPr>
+          <a:xfrm>
+            <a:off x="560512" y="980728"/>
+            <a:ext cx="8496300" cy="1808693"/>
+          </a:xfrm>
+          <a:prstGeom prst="rect">
+            <a:avLst/>
+          </a:prstGeom>
+        </p:spPr>
+      </p:pic>
+      <p:pic>
+        <p:nvPicPr>
+          <p:cNvPr id="7" name="図 6">
+            <a:extLst>
+              <a:ext uri="{FF2B5EF4-FFF2-40B4-BE49-F238E27FC236}">
+                <a16:creationId xmlns:a16="http://schemas.microsoft.com/office/drawing/2014/main" id="{8BE247AE-E301-544C-293B-46E52B6C3CAD}"/>
+              </a:ext>
+            </a:extLst>
+          </p:cNvPr>
+          <p:cNvPicPr>
+            <a:picLocks noChangeAspect="1"/>
+          </p:cNvPicPr>
+          <p:nvPr/>
+        </p:nvPicPr>
+        <p:blipFill>
+          <a:blip r:embed="rId3"/>
+          <a:stretch>
+            <a:fillRect/>
+          </a:stretch>
+        </p:blipFill>
+        <p:spPr>
+          <a:xfrm>
+            <a:off x="578324" y="2888940"/>
+            <a:ext cx="8478488" cy="659534"/>
+          </a:xfrm>
+          <a:prstGeom prst="rect">
+            <a:avLst/>
+          </a:prstGeom>
+        </p:spPr>
+      </p:pic>
+      <p:pic>
+        <p:nvPicPr>
+          <p:cNvPr id="9" name="図 8">
+            <a:extLst>
+              <a:ext uri="{FF2B5EF4-FFF2-40B4-BE49-F238E27FC236}">
+                <a16:creationId xmlns:a16="http://schemas.microsoft.com/office/drawing/2014/main" id="{9746735D-95D9-8108-3623-0DF892B9CC86}"/>
+              </a:ext>
+            </a:extLst>
+          </p:cNvPr>
+          <p:cNvPicPr>
+            <a:picLocks noChangeAspect="1"/>
+          </p:cNvPicPr>
+          <p:nvPr/>
+        </p:nvPicPr>
+        <p:blipFill>
+          <a:blip r:embed="rId4"/>
+          <a:stretch>
+            <a:fillRect/>
+          </a:stretch>
+        </p:blipFill>
+        <p:spPr>
+          <a:xfrm>
+            <a:off x="578324" y="3647993"/>
+            <a:ext cx="8478488" cy="3035429"/>
+          </a:xfrm>
+          <a:prstGeom prst="rect">
+            <a:avLst/>
+          </a:prstGeom>
+        </p:spPr>
+      </p:pic>
+      <p:pic>
+        <p:nvPicPr>
+          <p:cNvPr id="11" name="図 10">
+            <a:extLst>
+              <a:ext uri="{FF2B5EF4-FFF2-40B4-BE49-F238E27FC236}">
+                <a16:creationId xmlns:a16="http://schemas.microsoft.com/office/drawing/2014/main" id="{91131622-0427-BCB0-527F-9BFD6303457D}"/>
+              </a:ext>
+            </a:extLst>
+          </p:cNvPr>
+          <p:cNvPicPr>
+            <a:picLocks noChangeAspect="1"/>
+          </p:cNvPicPr>
+          <p:nvPr/>
+        </p:nvPicPr>
+        <p:blipFill>
+          <a:blip r:embed="rId5"/>
+          <a:stretch>
+            <a:fillRect/>
+          </a:stretch>
+        </p:blipFill>
+        <p:spPr>
+          <a:xfrm>
+            <a:off x="6786308" y="5142802"/>
+            <a:ext cx="3124636" cy="1667108"/>
+          </a:xfrm>
+          <a:prstGeom prst="rect">
+            <a:avLst/>
+          </a:prstGeom>
+        </p:spPr>
+      </p:pic>
+    </p:spTree>
+    <p:extLst>
+      <p:ext uri="{BB962C8B-B14F-4D97-AF65-F5344CB8AC3E}">
+        <p14:creationId xmlns:p14="http://schemas.microsoft.com/office/powerpoint/2010/main" val="3672013549"/>
+      </p:ext>
+    </p:extLst>
+  </p:cSld>
+  <p:clrMapOvr>
+    <a:masterClrMapping/>
+  </p:clrMapOvr>
+  <p:timing>
+    <p:tnLst>
+      <p:par>
+        <p:cTn id="1" dur="indefinite" restart="never" nodeType="tmRoot">
+          <p:childTnLst>
+            <p:seq concurrent="1" nextAc="seek">
+              <p:cTn id="2" dur="indefinite" nodeType="mainSeq">
+                <p:childTnLst>
+                  <p:par>
+                    <p:cTn id="3" fill="hold">
+                      <p:stCondLst>
+                        <p:cond delay="indefinite"/>
+                      </p:stCondLst>
+                      <p:childTnLst>
+                        <p:par>
+                          <p:cTn id="4" fill="hold">
+                            <p:stCondLst>
+                              <p:cond delay="0"/>
+                            </p:stCondLst>
+                            <p:childTnLst>
+                              <p:par>
+                                <p:cTn id="5" presetID="1" presetClass="entr" presetSubtype="0" fill="hold" nodeType="clickEffect">
+                                  <p:stCondLst>
+                                    <p:cond delay="0"/>
+                                  </p:stCondLst>
+                                  <p:childTnLst>
+                                    <p:set>
+                                      <p:cBhvr>
+                                        <p:cTn id="6" dur="1" fill="hold">
+                                          <p:stCondLst>
+                                            <p:cond delay="0"/>
+                                          </p:stCondLst>
+                                        </p:cTn>
+                                        <p:tgtEl>
+                                          <p:spTgt spid="7"/>
+                                        </p:tgtEl>
+                                        <p:attrNameLst>
+                                          <p:attrName>style.visibility</p:attrName>
+                                        </p:attrNameLst>
+                                      </p:cBhvr>
+                                      <p:to>
+                                        <p:strVal val="visible"/>
+                                      </p:to>
+                                    </p:set>
+                                  </p:childTnLst>
+                                </p:cTn>
+                              </p:par>
+                            </p:childTnLst>
+                          </p:cTn>
+                        </p:par>
+                      </p:childTnLst>
+                    </p:cTn>
+                  </p:par>
+                  <p:par>
+                    <p:cTn id="7" fill="hold">
+                      <p:stCondLst>
+                        <p:cond delay="indefinite"/>
+                      </p:stCondLst>
+                      <p:childTnLst>
+                        <p:par>
+                          <p:cTn id="8" fill="hold">
+                            <p:stCondLst>
+                              <p:cond delay="0"/>
+                            </p:stCondLst>
+                            <p:childTnLst>
+                              <p:par>
+                                <p:cTn id="9" presetID="1" presetClass="entr" presetSubtype="0" fill="hold" nodeType="clickEffect">
+                                  <p:stCondLst>
+                                    <p:cond delay="0"/>
+                                  </p:stCondLst>
+                                  <p:childTnLst>
+                                    <p:set>
+                                      <p:cBhvr>
+                                        <p:cTn id="10" dur="1" fill="hold">
+                                          <p:stCondLst>
+                                            <p:cond delay="0"/>
+                                          </p:stCondLst>
+                                        </p:cTn>
+                                        <p:tgtEl>
+                                          <p:spTgt spid="9"/>
+                                        </p:tgtEl>
+                                        <p:attrNameLst>
+                                          <p:attrName>style.visibility</p:attrName>
+                                        </p:attrNameLst>
+                                      </p:cBhvr>
+                                      <p:to>
+                                        <p:strVal val="visible"/>
+                                      </p:to>
+                                    </p:set>
+                                  </p:childTnLst>
+                                </p:cTn>
+                              </p:par>
+                            </p:childTnLst>
+                          </p:cTn>
+                        </p:par>
+                      </p:childTnLst>
+                    </p:cTn>
+                  </p:par>
+                  <p:par>
+                    <p:cTn id="11" fill="hold">
+                      <p:stCondLst>
+                        <p:cond delay="indefinite"/>
+                      </p:stCondLst>
+                      <p:childTnLst>
+                        <p:par>
+                          <p:cTn id="12" fill="hold">
+                            <p:stCondLst>
+                              <p:cond delay="0"/>
+                            </p:stCondLst>
+                            <p:childTnLst>
+                              <p:par>
+                                <p:cTn id="13" presetID="1" presetClass="entr" presetSubtype="0" fill="hold" nodeType="clickEffect">
+                                  <p:stCondLst>
+                                    <p:cond delay="0"/>
+                                  </p:stCondLst>
+                                  <p:childTnLst>
+                                    <p:set>
+                                      <p:cBhvr>
+                                        <p:cTn id="14" dur="1" fill="hold">
+                                          <p:stCondLst>
+                                            <p:cond delay="0"/>
+                                          </p:stCondLst>
+                                        </p:cTn>
+                                        <p:tgtEl>
+                                          <p:spTgt spid="11"/>
+                                        </p:tgtEl>
+                                        <p:attrNameLst>
+                                          <p:attrName>style.visibility</p:attrName>
+                                        </p:attrNameLst>
+                                      </p:cBhvr>
+                                      <p:to>
+                                        <p:strVal val="visible"/>
+                                      </p:to>
+                                    </p:set>
+                                  </p:childTnLst>
+                                </p:cTn>
+                              </p:par>
+                            </p:childTnLst>
+                          </p:cTn>
+                        </p:par>
+                      </p:childTnLst>
+                    </p:cTn>
+                  </p:par>
+                </p:childTnLst>
+              </p:cTn>
+              <p:prevCondLst>
+                <p:cond evt="onPrev" delay="0">
+                  <p:tgtEl>
+                    <p:sldTgt/>
+                  </p:tgtEl>
+                </p:cond>
+              </p:prevCondLst>
+              <p:nextCondLst>
+                <p:cond evt="onNext" delay="0">
+                  <p:tgtEl>
+                    <p:sldTgt/>
+                  </p:tgtEl>
+                </p:cond>
+              </p:nextCondLst>
+            </p:seq>
+          </p:childTnLst>
+        </p:cTn>
+      </p:par>
+    </p:tnLst>
+  </p:timing>
+</p:sld>
+</file>
+
+<file path=ppt/slides/slide18.xml><?xml version="1.0" encoding="utf-8"?>
+<p:sld xmlns:a="http://schemas.openxmlformats.org/drawingml/2006/main" xmlns:r="http://schemas.openxmlformats.org/officeDocument/2006/relationships" xmlns:p="http://schemas.openxmlformats.org/presentationml/2006/main">
+  <p:cSld>
+    <p:spTree>
+      <p:nvGrpSpPr>
+        <p:cNvPr id="1" name="">
+          <a:extLst>
+            <a:ext uri="{FF2B5EF4-FFF2-40B4-BE49-F238E27FC236}">
+              <a16:creationId xmlns:a16="http://schemas.microsoft.com/office/drawing/2014/main" id="{E1BE2065-E07B-2A97-AAC8-0A2110657DAC}"/>
+            </a:ext>
+          </a:extLst>
+        </p:cNvPr>
+        <p:cNvGrpSpPr/>
+        <p:nvPr/>
+      </p:nvGrpSpPr>
+      <p:grpSpPr>
+        <a:xfrm>
+          <a:off x="0" y="0"/>
+          <a:ext cx="0" cy="0"/>
+          <a:chOff x="0" y="0"/>
+          <a:chExt cx="0" cy="0"/>
+        </a:xfrm>
+      </p:grpSpPr>
+      <p:sp>
+        <p:nvSpPr>
+          <p:cNvPr id="3" name="タイトル 2">
+            <a:extLst>
+              <a:ext uri="{FF2B5EF4-FFF2-40B4-BE49-F238E27FC236}">
+                <a16:creationId xmlns:a16="http://schemas.microsoft.com/office/drawing/2014/main" id="{C86AAD0B-5ACC-C5E3-45DC-F758D59BA869}"/>
+              </a:ext>
+            </a:extLst>
+          </p:cNvPr>
+          <p:cNvSpPr>
+            <a:spLocks noGrp="1"/>
+          </p:cNvSpPr>
+          <p:nvPr>
+            <p:ph type="title"/>
+          </p:nvPr>
+        </p:nvSpPr>
+        <p:spPr/>
+        <p:txBody>
+          <a:bodyPr>
+            <a:normAutofit/>
+          </a:bodyPr>
+          <a:lstStyle/>
+          <a:p>
+            <a:r>
+              <a:rPr kumimoji="1" lang="ja-JP" altLang="en-US" dirty="0"/>
+              <a:t>実践例</a:t>
+            </a:r>
+          </a:p>
+        </p:txBody>
+      </p:sp>
+      <p:pic>
+        <p:nvPicPr>
+          <p:cNvPr id="15" name="コンテンツ プレースホルダー 14">
+            <a:extLst>
+              <a:ext uri="{FF2B5EF4-FFF2-40B4-BE49-F238E27FC236}">
+                <a16:creationId xmlns:a16="http://schemas.microsoft.com/office/drawing/2014/main" id="{C37C9A4F-037E-076F-5DB7-0EE2E2DBDF18}"/>
+              </a:ext>
+            </a:extLst>
+          </p:cNvPr>
+          <p:cNvPicPr>
+            <a:picLocks noGrp="1" noChangeAspect="1"/>
+          </p:cNvPicPr>
+          <p:nvPr>
+            <p:ph idx="1"/>
+          </p:nvPr>
+        </p:nvPicPr>
+        <p:blipFill>
+          <a:blip r:embed="rId2"/>
+          <a:stretch>
+            <a:fillRect/>
+          </a:stretch>
+        </p:blipFill>
+        <p:spPr>
+          <a:xfrm>
+            <a:off x="95156" y="3233713"/>
+            <a:ext cx="9765124" cy="1491431"/>
+          </a:xfrm>
+          <a:prstGeom prst="rect">
+            <a:avLst/>
+          </a:prstGeom>
+        </p:spPr>
+      </p:pic>
+      <p:pic>
+        <p:nvPicPr>
+          <p:cNvPr id="11" name="図 10">
+            <a:extLst>
+              <a:ext uri="{FF2B5EF4-FFF2-40B4-BE49-F238E27FC236}">
+                <a16:creationId xmlns:a16="http://schemas.microsoft.com/office/drawing/2014/main" id="{F3C5AF0D-E83F-5586-55CD-53DB2E78490C}"/>
+              </a:ext>
+            </a:extLst>
+          </p:cNvPr>
+          <p:cNvPicPr>
+            <a:picLocks noChangeAspect="1"/>
+          </p:cNvPicPr>
+          <p:nvPr/>
+        </p:nvPicPr>
+        <p:blipFill>
+          <a:blip r:embed="rId3"/>
+          <a:stretch>
+            <a:fillRect/>
+          </a:stretch>
+        </p:blipFill>
+        <p:spPr>
+          <a:xfrm>
+            <a:off x="92460" y="1124744"/>
+            <a:ext cx="9906000" cy="1841147"/>
+          </a:xfrm>
+          <a:prstGeom prst="rect">
+            <a:avLst/>
+          </a:prstGeom>
+        </p:spPr>
+      </p:pic>
+      <p:pic>
+        <p:nvPicPr>
+          <p:cNvPr id="16" name="図 15">
+            <a:extLst>
+              <a:ext uri="{FF2B5EF4-FFF2-40B4-BE49-F238E27FC236}">
+                <a16:creationId xmlns:a16="http://schemas.microsoft.com/office/drawing/2014/main" id="{4A51EB64-D078-79E8-82DC-3D9363343B2B}"/>
+              </a:ext>
+            </a:extLst>
+          </p:cNvPr>
+          <p:cNvPicPr>
+            <a:picLocks noChangeAspect="1"/>
+          </p:cNvPicPr>
+          <p:nvPr/>
+        </p:nvPicPr>
+        <p:blipFill>
+          <a:blip r:embed="rId4"/>
+          <a:stretch>
+            <a:fillRect/>
+          </a:stretch>
+        </p:blipFill>
+        <p:spPr>
+          <a:xfrm>
+            <a:off x="668524" y="1124744"/>
+            <a:ext cx="9417496" cy="5781451"/>
+          </a:xfrm>
+          <a:prstGeom prst="rect">
+            <a:avLst/>
+          </a:prstGeom>
+        </p:spPr>
+      </p:pic>
+    </p:spTree>
+    <p:extLst>
+      <p:ext uri="{BB962C8B-B14F-4D97-AF65-F5344CB8AC3E}">
+        <p14:creationId xmlns:p14="http://schemas.microsoft.com/office/powerpoint/2010/main" val="3331941764"/>
+      </p:ext>
+    </p:extLst>
+  </p:cSld>
+  <p:clrMapOvr>
+    <a:masterClrMapping/>
+  </p:clrMapOvr>
+  <p:timing>
+    <p:tnLst>
+      <p:par>
+        <p:cTn id="1" dur="indefinite" restart="never" nodeType="tmRoot">
+          <p:childTnLst>
+            <p:seq concurrent="1" nextAc="seek">
+              <p:cTn id="2" dur="indefinite" nodeType="mainSeq">
+                <p:childTnLst>
+                  <p:par>
+                    <p:cTn id="3" fill="hold">
+                      <p:stCondLst>
+                        <p:cond delay="indefinite"/>
+                      </p:stCondLst>
+                      <p:childTnLst>
+                        <p:par>
+                          <p:cTn id="4" fill="hold">
+                            <p:stCondLst>
+                              <p:cond delay="0"/>
+                            </p:stCondLst>
+                            <p:childTnLst>
+                              <p:par>
+                                <p:cTn id="5" presetID="1" presetClass="entr" presetSubtype="0" fill="hold" nodeType="clickEffect">
+                                  <p:stCondLst>
+                                    <p:cond delay="0"/>
+                                  </p:stCondLst>
+                                  <p:childTnLst>
+                                    <p:set>
+                                      <p:cBhvr>
+                                        <p:cTn id="6" dur="1" fill="hold">
+                                          <p:stCondLst>
+                                            <p:cond delay="0"/>
+                                          </p:stCondLst>
+                                        </p:cTn>
+                                        <p:tgtEl>
+                                          <p:spTgt spid="15"/>
+                                        </p:tgtEl>
+                                        <p:attrNameLst>
+                                          <p:attrName>style.visibility</p:attrName>
+                                        </p:attrNameLst>
+                                      </p:cBhvr>
+                                      <p:to>
+                                        <p:strVal val="visible"/>
+                                      </p:to>
+                                    </p:set>
+                                  </p:childTnLst>
+                                </p:cTn>
+                              </p:par>
+                            </p:childTnLst>
+                          </p:cTn>
+                        </p:par>
+                      </p:childTnLst>
+                    </p:cTn>
+                  </p:par>
+                  <p:par>
+                    <p:cTn id="7" fill="hold">
+                      <p:stCondLst>
+                        <p:cond delay="indefinite"/>
+                      </p:stCondLst>
+                      <p:childTnLst>
+                        <p:par>
+                          <p:cTn id="8" fill="hold">
+                            <p:stCondLst>
+                              <p:cond delay="0"/>
+                            </p:stCondLst>
+                            <p:childTnLst>
+                              <p:par>
+                                <p:cTn id="9" presetID="1" presetClass="entr" presetSubtype="0" fill="hold" nodeType="clickEffect">
+                                  <p:stCondLst>
+                                    <p:cond delay="0"/>
+                                  </p:stCondLst>
+                                  <p:childTnLst>
+                                    <p:set>
+                                      <p:cBhvr>
+                                        <p:cTn id="10" dur="1" fill="hold">
+                                          <p:stCondLst>
+                                            <p:cond delay="0"/>
+                                          </p:stCondLst>
+                                        </p:cTn>
+                                        <p:tgtEl>
+                                          <p:spTgt spid="16"/>
+                                        </p:tgtEl>
+                                        <p:attrNameLst>
+                                          <p:attrName>style.visibility</p:attrName>
+                                        </p:attrNameLst>
+                                      </p:cBhvr>
+                                      <p:to>
+                                        <p:strVal val="visible"/>
+                                      </p:to>
+                                    </p:set>
+                                  </p:childTnLst>
+                                </p:cTn>
+                              </p:par>
+                            </p:childTnLst>
+                          </p:cTn>
+                        </p:par>
+                      </p:childTnLst>
+                    </p:cTn>
+                  </p:par>
+                </p:childTnLst>
+              </p:cTn>
+              <p:prevCondLst>
+                <p:cond evt="onPrev" delay="0">
+                  <p:tgtEl>
+                    <p:sldTgt/>
+                  </p:tgtEl>
+                </p:cond>
+              </p:prevCondLst>
+              <p:nextCondLst>
+                <p:cond evt="onNext" delay="0">
+                  <p:tgtEl>
+                    <p:sldTgt/>
+                  </p:tgtEl>
+                </p:cond>
+              </p:nextCondLst>
+            </p:seq>
+          </p:childTnLst>
+        </p:cTn>
+      </p:par>
+    </p:tnLst>
+  </p:timing>
+</p:sld>
+</file>
+
+<file path=ppt/slides/slide19.xml><?xml version="1.0" encoding="utf-8"?>
+<p:sld xmlns:a="http://schemas.openxmlformats.org/drawingml/2006/main" xmlns:r="http://schemas.openxmlformats.org/officeDocument/2006/relationships" xmlns:p="http://schemas.openxmlformats.org/presentationml/2006/main">
+  <p:cSld>
+    <p:spTree>
+      <p:nvGrpSpPr>
+        <p:cNvPr id="1" name="">
+          <a:extLst>
+            <a:ext uri="{FF2B5EF4-FFF2-40B4-BE49-F238E27FC236}">
+              <a16:creationId xmlns:a16="http://schemas.microsoft.com/office/drawing/2014/main" id="{79148B7D-E68F-4F7E-87B1-2677656DAC4F}"/>
+            </a:ext>
+          </a:extLst>
+        </p:cNvPr>
+        <p:cNvGrpSpPr/>
+        <p:nvPr/>
+      </p:nvGrpSpPr>
+      <p:grpSpPr>
+        <a:xfrm>
+          <a:off x="0" y="0"/>
+          <a:ext cx="0" cy="0"/>
+          <a:chOff x="0" y="0"/>
+          <a:chExt cx="0" cy="0"/>
+        </a:xfrm>
+      </p:grpSpPr>
+      <p:sp>
+        <p:nvSpPr>
+          <p:cNvPr id="3" name="タイトル 2">
+            <a:extLst>
+              <a:ext uri="{FF2B5EF4-FFF2-40B4-BE49-F238E27FC236}">
+                <a16:creationId xmlns:a16="http://schemas.microsoft.com/office/drawing/2014/main" id="{AA0146F0-8E3C-2363-8898-8CBB80406B1C}"/>
+              </a:ext>
+            </a:extLst>
+          </p:cNvPr>
+          <p:cNvSpPr>
+            <a:spLocks noGrp="1"/>
+          </p:cNvSpPr>
+          <p:nvPr>
+            <p:ph type="title"/>
+          </p:nvPr>
+        </p:nvSpPr>
+        <p:spPr/>
+        <p:txBody>
+          <a:bodyPr>
+            <a:normAutofit/>
+          </a:bodyPr>
+          <a:lstStyle/>
+          <a:p>
+            <a:r>
+              <a:rPr kumimoji="1" lang="ja-JP" altLang="en-US" dirty="0"/>
+              <a:t>実践例</a:t>
+            </a:r>
+          </a:p>
+        </p:txBody>
+      </p:sp>
+      <p:sp>
+        <p:nvSpPr>
+          <p:cNvPr id="4" name="コンテンツ プレースホルダー 3">
+            <a:extLst>
+              <a:ext uri="{FF2B5EF4-FFF2-40B4-BE49-F238E27FC236}">
+                <a16:creationId xmlns:a16="http://schemas.microsoft.com/office/drawing/2014/main" id="{3B774938-0DF1-5EBA-B508-BA2472B4A136}"/>
+              </a:ext>
+            </a:extLst>
+          </p:cNvPr>
           <p:cNvSpPr>
             <a:spLocks noGrp="1"/>
           </p:cNvSpPr>
@@ -5154,109 +6056,236 @@
         </p:nvSpPr>
         <p:spPr/>
         <p:txBody>
-          <a:bodyPr>
-            <a:normAutofit/>
-          </a:bodyPr>
+          <a:bodyPr/>
           <a:lstStyle/>
           <a:p>
-            <a:r>
-              <a:rPr kumimoji="1" lang="ja-JP" altLang="en-US" sz="1500" b="1" dirty="0"/>
-              <a:t>責務分離</a:t>
-            </a:r>
-          </a:p>
-          <a:p>
-            <a:pPr lvl="1"/>
-            <a:r>
-              <a:rPr kumimoji="1" lang="ja-JP" altLang="en-US" sz="1500" dirty="0"/>
-              <a:t>自動化可能な欠陥検出は前段へ、レビューは採否判断へ寄せられる</a:t>
-            </a:r>
-          </a:p>
-          <a:p>
-            <a:pPr lvl="1"/>
-            <a:r>
-              <a:rPr kumimoji="1" lang="ja-JP" altLang="en-US" sz="1500" dirty="0"/>
-              <a:t>最終チェックポイントは人間同士のレビューに残せる</a:t>
-            </a:r>
+            <a:endParaRPr lang="en-US" altLang="ja-JP" dirty="0"/>
           </a:p>
           <a:p>
             <a:endParaRPr lang="ja-JP" altLang="en-US" dirty="0"/>
-          </a:p>
-          <a:p>
-            <a:r>
-              <a:rPr kumimoji="1" lang="ja-JP" altLang="en-US" sz="1500" b="1" dirty="0"/>
-              <a:t>変更理解</a:t>
-            </a:r>
-          </a:p>
-          <a:p>
-            <a:pPr lvl="1"/>
-            <a:r>
-              <a:rPr kumimoji="1" lang="ja-JP" altLang="en-US" sz="1500" dirty="0"/>
-              <a:t>著者が読み直してから出すので、ブラックボックスな変更が減る</a:t>
-            </a:r>
-          </a:p>
-          <a:p>
-            <a:pPr lvl="1"/>
-            <a:r>
-              <a:rPr kumimoji="1" lang="ja-JP" altLang="en-US" sz="1500" dirty="0"/>
-              <a:t>コメントが「教える」より「判断の確認」に寄ってくる</a:t>
-            </a:r>
-          </a:p>
-          <a:p>
-            <a:endParaRPr lang="ja-JP" altLang="en-US" dirty="0"/>
-          </a:p>
-          <a:p>
-            <a:r>
-              <a:rPr lang="ja-JP" altLang="en-US" sz="1500" b="1" dirty="0"/>
-              <a:t>仕組み</a:t>
-            </a:r>
-            <a:r>
-              <a:rPr kumimoji="1" lang="ja-JP" altLang="en-US" sz="1500" b="1" dirty="0"/>
-              <a:t>としての効果</a:t>
-            </a:r>
-          </a:p>
-          <a:p>
-            <a:pPr lvl="1"/>
-            <a:r>
-              <a:rPr kumimoji="1" lang="ja-JP" altLang="en-US" sz="1500" dirty="0"/>
-              <a:t>単発のレビューコメントは軽く、Judgment の訓練機会は増える</a:t>
-            </a:r>
-          </a:p>
-          <a:p>
-            <a:pPr lvl="1"/>
-            <a:r>
-              <a:rPr kumimoji="1" lang="ja-JP" altLang="en-US" sz="1500" dirty="0"/>
-              <a:t>Issue 起点で方向性を先に合わせる動機が生まれる</a:t>
-            </a:r>
           </a:p>
         </p:txBody>
       </p:sp>
-      <p:sp>
-        <p:nvSpPr>
-          <p:cNvPr id="3" name="タイトル 2"/>
-          <p:cNvSpPr>
-            <a:spLocks noGrp="1"/>
-          </p:cNvSpPr>
-          <p:nvPr>
-            <p:ph type="title"/>
-          </p:nvPr>
-        </p:nvSpPr>
-        <p:spPr/>
-        <p:txBody>
-          <a:bodyPr/>
-          <a:lstStyle/>
-          <a:p>
-            <a:r>
-              <a:rPr kumimoji="1" lang="ja-JP" altLang="en-US" dirty="0"/>
-              <a:t>効果 — 判断共有と判断育成</a:t>
-            </a:r>
-          </a:p>
-        </p:txBody>
-      </p:sp>
+      <p:pic>
+        <p:nvPicPr>
+          <p:cNvPr id="5" name="図 4">
+            <a:extLst>
+              <a:ext uri="{FF2B5EF4-FFF2-40B4-BE49-F238E27FC236}">
+                <a16:creationId xmlns:a16="http://schemas.microsoft.com/office/drawing/2014/main" id="{050DA598-5032-E479-7BF1-18DCF503A3C8}"/>
+              </a:ext>
+            </a:extLst>
+          </p:cNvPr>
+          <p:cNvPicPr>
+            <a:picLocks noChangeAspect="1"/>
+          </p:cNvPicPr>
+          <p:nvPr/>
+        </p:nvPicPr>
+        <p:blipFill>
+          <a:blip r:embed="rId2"/>
+          <a:stretch>
+            <a:fillRect/>
+          </a:stretch>
+        </p:blipFill>
+        <p:spPr>
+          <a:xfrm>
+            <a:off x="704850" y="994420"/>
+            <a:ext cx="6697010" cy="1086002"/>
+          </a:xfrm>
+          <a:prstGeom prst="rect">
+            <a:avLst/>
+          </a:prstGeom>
+        </p:spPr>
+      </p:pic>
+      <p:pic>
+        <p:nvPicPr>
+          <p:cNvPr id="7" name="図 6">
+            <a:extLst>
+              <a:ext uri="{FF2B5EF4-FFF2-40B4-BE49-F238E27FC236}">
+                <a16:creationId xmlns:a16="http://schemas.microsoft.com/office/drawing/2014/main" id="{E924E9D0-BDEF-3F84-7250-828B7A0DA7E1}"/>
+              </a:ext>
+            </a:extLst>
+          </p:cNvPr>
+          <p:cNvPicPr>
+            <a:picLocks noChangeAspect="1"/>
+          </p:cNvPicPr>
+          <p:nvPr/>
+        </p:nvPicPr>
+        <p:blipFill>
+          <a:blip r:embed="rId3"/>
+          <a:stretch>
+            <a:fillRect/>
+          </a:stretch>
+        </p:blipFill>
+        <p:spPr>
+          <a:xfrm>
+            <a:off x="704850" y="2230240"/>
+            <a:ext cx="9906000" cy="2422896"/>
+          </a:xfrm>
+          <a:prstGeom prst="rect">
+            <a:avLst/>
+          </a:prstGeom>
+        </p:spPr>
+      </p:pic>
+      <p:pic>
+        <p:nvPicPr>
+          <p:cNvPr id="9" name="図 8">
+            <a:extLst>
+              <a:ext uri="{FF2B5EF4-FFF2-40B4-BE49-F238E27FC236}">
+                <a16:creationId xmlns:a16="http://schemas.microsoft.com/office/drawing/2014/main" id="{0210D96A-FC6F-2431-88CE-F0BA47C4D448}"/>
+              </a:ext>
+            </a:extLst>
+          </p:cNvPr>
+          <p:cNvPicPr>
+            <a:picLocks noChangeAspect="1"/>
+          </p:cNvPicPr>
+          <p:nvPr/>
+        </p:nvPicPr>
+        <p:blipFill>
+          <a:blip r:embed="rId4"/>
+          <a:stretch>
+            <a:fillRect/>
+          </a:stretch>
+        </p:blipFill>
+        <p:spPr>
+          <a:xfrm>
+            <a:off x="2780306" y="3583041"/>
+            <a:ext cx="7125694" cy="3267531"/>
+          </a:xfrm>
+          <a:prstGeom prst="rect">
+            <a:avLst/>
+          </a:prstGeom>
+        </p:spPr>
+      </p:pic>
     </p:spTree>
+    <p:extLst>
+      <p:ext uri="{BB962C8B-B14F-4D97-AF65-F5344CB8AC3E}">
+        <p14:creationId xmlns:p14="http://schemas.microsoft.com/office/powerpoint/2010/main" val="3810584954"/>
+      </p:ext>
+    </p:extLst>
   </p:cSld>
   <p:clrMapOvr>
     <a:masterClrMapping/>
   </p:clrMapOvr>
+  <p:timing>
+    <p:tnLst>
+      <p:par>
+        <p:cTn id="1" dur="indefinite" restart="never" nodeType="tmRoot">
+          <p:childTnLst>
+            <p:seq concurrent="1" nextAc="seek">
+              <p:cTn id="2" dur="indefinite" nodeType="mainSeq">
+                <p:childTnLst>
+                  <p:par>
+                    <p:cTn id="3" fill="hold">
+                      <p:stCondLst>
+                        <p:cond delay="indefinite"/>
+                      </p:stCondLst>
+                      <p:childTnLst>
+                        <p:par>
+                          <p:cTn id="4" fill="hold">
+                            <p:stCondLst>
+                              <p:cond delay="0"/>
+                            </p:stCondLst>
+                            <p:childTnLst>
+                              <p:par>
+                                <p:cTn id="5" presetID="1" presetClass="entr" presetSubtype="0" fill="hold" nodeType="clickEffect">
+                                  <p:stCondLst>
+                                    <p:cond delay="0"/>
+                                  </p:stCondLst>
+                                  <p:childTnLst>
+                                    <p:set>
+                                      <p:cBhvr>
+                                        <p:cTn id="6" dur="1" fill="hold">
+                                          <p:stCondLst>
+                                            <p:cond delay="0"/>
+                                          </p:stCondLst>
+                                        </p:cTn>
+                                        <p:tgtEl>
+                                          <p:spTgt spid="7"/>
+                                        </p:tgtEl>
+                                        <p:attrNameLst>
+                                          <p:attrName>style.visibility</p:attrName>
+                                        </p:attrNameLst>
+                                      </p:cBhvr>
+                                      <p:to>
+                                        <p:strVal val="visible"/>
+                                      </p:to>
+                                    </p:set>
+                                  </p:childTnLst>
+                                </p:cTn>
+                              </p:par>
+                            </p:childTnLst>
+                          </p:cTn>
+                        </p:par>
+                      </p:childTnLst>
+                    </p:cTn>
+                  </p:par>
+                  <p:par>
+                    <p:cTn id="7" fill="hold">
+                      <p:stCondLst>
+                        <p:cond delay="indefinite"/>
+                      </p:stCondLst>
+                      <p:childTnLst>
+                        <p:par>
+                          <p:cTn id="8" fill="hold">
+                            <p:stCondLst>
+                              <p:cond delay="0"/>
+                            </p:stCondLst>
+                            <p:childTnLst>
+                              <p:par>
+                                <p:cTn id="9" presetID="1" presetClass="entr" presetSubtype="0" fill="hold" nodeType="clickEffect">
+                                  <p:stCondLst>
+                                    <p:cond delay="0"/>
+                                  </p:stCondLst>
+                                  <p:childTnLst>
+                                    <p:set>
+                                      <p:cBhvr>
+                                        <p:cTn id="10" dur="1" fill="hold">
+                                          <p:stCondLst>
+                                            <p:cond delay="0"/>
+                                          </p:stCondLst>
+                                        </p:cTn>
+                                        <p:tgtEl>
+                                          <p:spTgt spid="9"/>
+                                        </p:tgtEl>
+                                        <p:attrNameLst>
+                                          <p:attrName>style.visibility</p:attrName>
+                                        </p:attrNameLst>
+                                      </p:cBhvr>
+                                      <p:to>
+                                        <p:strVal val="visible"/>
+                                      </p:to>
+                                    </p:set>
+                                  </p:childTnLst>
+                                </p:cTn>
+                              </p:par>
+                            </p:childTnLst>
+                          </p:cTn>
+                        </p:par>
+                      </p:childTnLst>
+                    </p:cTn>
+                  </p:par>
+                </p:childTnLst>
+              </p:cTn>
+              <p:prevCondLst>
+                <p:cond evt="onPrev" delay="0">
+                  <p:tgtEl>
+                    <p:sldTgt/>
+                  </p:tgtEl>
+                </p:cond>
+              </p:prevCondLst>
+              <p:nextCondLst>
+                <p:cond evt="onNext" delay="0">
+                  <p:tgtEl>
+                    <p:sldTgt/>
+                  </p:tgtEl>
+                </p:cond>
+              </p:nextCondLst>
+            </p:seq>
+          </p:childTnLst>
+        </p:cTn>
+      </p:par>
+    </p:tnLst>
+  </p:timing>
 </p:sld>
 </file>
 
@@ -5350,6 +6379,526 @@
   <p:cSld>
     <p:spTree>
       <p:nvGrpSpPr>
+        <p:cNvPr id="1" name=""/>
+        <p:cNvGrpSpPr/>
+        <p:nvPr/>
+      </p:nvGrpSpPr>
+      <p:grpSpPr>
+        <a:xfrm>
+          <a:off x="0" y="0"/>
+          <a:ext cx="0" cy="0"/>
+          <a:chOff x="0" y="0"/>
+          <a:chExt cx="0" cy="0"/>
+        </a:xfrm>
+      </p:grpSpPr>
+      <p:pic>
+        <p:nvPicPr>
+          <p:cNvPr id="6" name="コンテンツ プレースホルダー 5">
+            <a:extLst>
+              <a:ext uri="{FF2B5EF4-FFF2-40B4-BE49-F238E27FC236}">
+                <a16:creationId xmlns:a16="http://schemas.microsoft.com/office/drawing/2014/main" id="{212D05DD-5ED8-240E-1EE9-D68483A12570}"/>
+              </a:ext>
+            </a:extLst>
+          </p:cNvPr>
+          <p:cNvPicPr>
+            <a:picLocks noGrp="1" noChangeAspect="1"/>
+          </p:cNvPicPr>
+          <p:nvPr>
+            <p:ph idx="1"/>
+          </p:nvPr>
+        </p:nvPicPr>
+        <p:blipFill>
+          <a:blip r:embed="rId2"/>
+          <a:stretch>
+            <a:fillRect/>
+          </a:stretch>
+        </p:blipFill>
+        <p:spPr>
+          <a:xfrm>
+            <a:off x="56456" y="1441500"/>
+            <a:ext cx="9468858" cy="4464496"/>
+          </a:xfrm>
+          <a:prstGeom prst="rect">
+            <a:avLst/>
+          </a:prstGeom>
+        </p:spPr>
+      </p:pic>
+      <p:sp>
+        <p:nvSpPr>
+          <p:cNvPr id="3" name="スライド番号プレースホルダー 2">
+            <a:extLst>
+              <a:ext uri="{FF2B5EF4-FFF2-40B4-BE49-F238E27FC236}">
+                <a16:creationId xmlns:a16="http://schemas.microsoft.com/office/drawing/2014/main" id="{39C7EF61-DC66-F970-7BA9-C3787AD421C6}"/>
+              </a:ext>
+            </a:extLst>
+          </p:cNvPr>
+          <p:cNvSpPr>
+            <a:spLocks noGrp="1"/>
+          </p:cNvSpPr>
+          <p:nvPr>
+            <p:ph type="sldNum" sz="quarter" idx="4"/>
+          </p:nvPr>
+        </p:nvSpPr>
+        <p:spPr/>
+        <p:txBody>
+          <a:bodyPr/>
+          <a:lstStyle/>
+          <a:p>
+            <a:fld id="{C314D315-6C69-40BF-98D6-60239DAB9584}" type="slidenum">
+              <a:rPr lang="ja-JP" altLang="en-US" smtClean="0"/>
+              <a:pPr/>
+              <a:t>19</a:t>
+            </a:fld>
+            <a:r>
+              <a:rPr lang="ja-JP" altLang="en-US"/>
+              <a:t>　</a:t>
+            </a:r>
+            <a:endParaRPr lang="ja-JP" altLang="en-US" dirty="0"/>
+          </a:p>
+        </p:txBody>
+      </p:sp>
+      <p:sp>
+        <p:nvSpPr>
+          <p:cNvPr id="4" name="タイトル 3">
+            <a:extLst>
+              <a:ext uri="{FF2B5EF4-FFF2-40B4-BE49-F238E27FC236}">
+                <a16:creationId xmlns:a16="http://schemas.microsoft.com/office/drawing/2014/main" id="{694F6F3C-4D58-A808-2968-18CBF7D9817D}"/>
+              </a:ext>
+            </a:extLst>
+          </p:cNvPr>
+          <p:cNvSpPr>
+            <a:spLocks noGrp="1"/>
+          </p:cNvSpPr>
+          <p:nvPr>
+            <p:ph type="title"/>
+          </p:nvPr>
+        </p:nvSpPr>
+        <p:spPr/>
+        <p:txBody>
+          <a:bodyPr/>
+          <a:lstStyle/>
+          <a:p>
+            <a:r>
+              <a:rPr lang="ja-JP" altLang="en-US" dirty="0"/>
+              <a:t>ワークフローの概要</a:t>
+            </a:r>
+            <a:endParaRPr kumimoji="1" lang="ja-JP" altLang="en-US" dirty="0"/>
+          </a:p>
+        </p:txBody>
+      </p:sp>
+    </p:spTree>
+    <p:extLst>
+      <p:ext uri="{BB962C8B-B14F-4D97-AF65-F5344CB8AC3E}">
+        <p14:creationId xmlns:p14="http://schemas.microsoft.com/office/powerpoint/2010/main" val="2515832326"/>
+      </p:ext>
+    </p:extLst>
+  </p:cSld>
+  <p:clrMapOvr>
+    <a:masterClrMapping/>
+  </p:clrMapOvr>
+</p:sld>
+</file>
+
+<file path=ppt/slides/slide21.xml><?xml version="1.0" encoding="utf-8"?>
+<p:sld xmlns:a="http://schemas.openxmlformats.org/drawingml/2006/main" xmlns:r="http://schemas.openxmlformats.org/officeDocument/2006/relationships" xmlns:p="http://schemas.openxmlformats.org/presentationml/2006/main">
+  <p:cSld>
+    <p:spTree>
+      <p:nvGrpSpPr>
+        <p:cNvPr id="1" name=""/>
+        <p:cNvGrpSpPr/>
+        <p:nvPr/>
+      </p:nvGrpSpPr>
+      <p:grpSpPr>
+        <a:xfrm>
+          <a:off x="0" y="0"/>
+          <a:ext cx="0" cy="0"/>
+          <a:chOff x="0" y="0"/>
+          <a:chExt cx="0" cy="0"/>
+        </a:xfrm>
+      </p:grpSpPr>
+      <p:sp>
+        <p:nvSpPr>
+          <p:cNvPr id="2" name="コンテンツ プレースホルダー 1"/>
+          <p:cNvSpPr>
+            <a:spLocks noGrp="1"/>
+          </p:cNvSpPr>
+          <p:nvPr>
+            <p:ph idx="1"/>
+          </p:nvPr>
+        </p:nvSpPr>
+        <p:spPr/>
+        <p:txBody>
+          <a:bodyPr>
+            <a:normAutofit/>
+          </a:bodyPr>
+          <a:lstStyle/>
+          <a:p>
+            <a:r>
+              <a:rPr kumimoji="1" lang="ja-JP" altLang="en-US" sz="1500" b="1" dirty="0"/>
+              <a:t>著者</a:t>
+            </a:r>
+          </a:p>
+          <a:p>
+            <a:pPr lvl="1"/>
+            <a:r>
+              <a:rPr kumimoji="1" lang="ja-JP" altLang="en-US" sz="1500" dirty="0"/>
+              <a:t>/self-review → 網羅的チェック（Reckoning）</a:t>
+            </a:r>
+          </a:p>
+          <a:p>
+            <a:pPr lvl="1"/>
+            <a:r>
+              <a:rPr kumimoji="1" lang="ja-JP" altLang="en-US" sz="1500" dirty="0"/>
+              <a:t>意思決定フェーズ → 各 finding に判断（Judgment）</a:t>
+            </a:r>
+          </a:p>
+          <a:p>
+            <a:pPr lvl="1"/>
+            <a:r>
+              <a:rPr kumimoji="1" lang="ja-JP" altLang="en-US" sz="1500" dirty="0"/>
+              <a:t>/draft-pr → 意思決定記録と設計意図を PR に埋め込む</a:t>
+            </a:r>
+            <a:endParaRPr lang="ja-JP" altLang="en-US" dirty="0"/>
+          </a:p>
+          <a:p>
+            <a:r>
+              <a:rPr kumimoji="1" lang="ja-JP" altLang="en-US" sz="1500" b="1" dirty="0"/>
+              <a:t>レビュワー</a:t>
+            </a:r>
+          </a:p>
+          <a:p>
+            <a:pPr lvl="1"/>
+            <a:r>
+              <a:rPr kumimoji="1" lang="ja-JP" altLang="en-US" sz="1500" dirty="0"/>
+              <a:t>/peer-review → 検討済み事項をスキップ</a:t>
+            </a:r>
+          </a:p>
+          <a:p>
+            <a:pPr lvl="1"/>
+            <a:r>
+              <a:rPr kumimoji="1" lang="ja-JP" altLang="en-US" sz="1500" dirty="0"/>
+              <a:t>コメント選択 → 「その判断は妥当か」を問う（Judgment）</a:t>
+            </a:r>
+          </a:p>
+          <a:p>
+            <a:pPr lvl="1"/>
+            <a:r>
+              <a:rPr kumimoji="1" lang="ja-JP" altLang="en-US" sz="1500" dirty="0"/>
+              <a:t>/post-review → Pending レビューを投稿</a:t>
+            </a:r>
+          </a:p>
+          <a:p>
+            <a:r>
+              <a:rPr lang="ja-JP" altLang="en-US" sz="1500" b="1" dirty="0"/>
+              <a:t>チームで</a:t>
+            </a:r>
+          </a:p>
+          <a:p>
+            <a:pPr lvl="1"/>
+            <a:r>
+              <a:rPr lang="en-US" altLang="ja-JP" sz="1500" dirty="0"/>
+              <a:t>Claude.md</a:t>
+            </a:r>
+            <a:r>
+              <a:rPr lang="ja-JP" altLang="en-US" sz="1500" dirty="0"/>
+              <a:t>や各</a:t>
+            </a:r>
+            <a:r>
+              <a:rPr lang="en-US" altLang="ja-JP" sz="1500" dirty="0"/>
+              <a:t>Agent.md</a:t>
+            </a:r>
+            <a:r>
+              <a:rPr lang="ja-JP" altLang="en-US" sz="1500" dirty="0"/>
+              <a:t>に判断・観点を追加していく（Judgment）</a:t>
+            </a:r>
+            <a:endParaRPr lang="en-US" altLang="ja-JP" sz="1500" dirty="0"/>
+          </a:p>
+          <a:p>
+            <a:pPr lvl="1"/>
+            <a:endParaRPr lang="ja-JP" altLang="en-US" dirty="0"/>
+          </a:p>
+          <a:p>
+            <a:r>
+              <a:rPr kumimoji="1" lang="ja-JP" altLang="en-US" sz="1500" b="1" dirty="0"/>
+              <a:t>重要なのは「AI に言われたから」ではなく</a:t>
+            </a:r>
+          </a:p>
+          <a:p>
+            <a:r>
+              <a:rPr kumimoji="1" lang="ja-JP" altLang="en-US" sz="1500" b="1" dirty="0"/>
+              <a:t>「自分はこう判断した」と残すこと</a:t>
+            </a:r>
+          </a:p>
+        </p:txBody>
+      </p:sp>
+      <p:sp>
+        <p:nvSpPr>
+          <p:cNvPr id="3" name="タイトル 2"/>
+          <p:cNvSpPr>
+            <a:spLocks noGrp="1"/>
+          </p:cNvSpPr>
+          <p:nvPr>
+            <p:ph type="title"/>
+          </p:nvPr>
+        </p:nvSpPr>
+        <p:spPr/>
+        <p:txBody>
+          <a:bodyPr/>
+          <a:lstStyle/>
+          <a:p>
+            <a:r>
+              <a:rPr kumimoji="1" lang="ja-JP" altLang="en-US" dirty="0"/>
+              <a:t>演算（Reckoning）— 判断を通すワークフロー</a:t>
+            </a:r>
+          </a:p>
+        </p:txBody>
+      </p:sp>
+    </p:spTree>
+  </p:cSld>
+  <p:clrMapOvr>
+    <a:masterClrMapping/>
+  </p:clrMapOvr>
+</p:sld>
+</file>
+
+<file path=ppt/slides/slide22.xml><?xml version="1.0" encoding="utf-8"?>
+<p:sld xmlns:a="http://schemas.openxmlformats.org/drawingml/2006/main" xmlns:r="http://schemas.openxmlformats.org/officeDocument/2006/relationships" xmlns:p="http://schemas.openxmlformats.org/presentationml/2006/main">
+  <p:cSld>
+    <p:spTree>
+      <p:nvGrpSpPr>
+        <p:cNvPr id="1" name=""/>
+        <p:cNvGrpSpPr/>
+        <p:nvPr/>
+      </p:nvGrpSpPr>
+      <p:grpSpPr>
+        <a:xfrm>
+          <a:off x="0" y="0"/>
+          <a:ext cx="0" cy="0"/>
+          <a:chOff x="0" y="0"/>
+          <a:chExt cx="0" cy="0"/>
+        </a:xfrm>
+      </p:grpSpPr>
+      <p:sp>
+        <p:nvSpPr>
+          <p:cNvPr id="2" name="スライド番号プレースホルダー 1">
+            <a:extLst>
+              <a:ext uri="{FF2B5EF4-FFF2-40B4-BE49-F238E27FC236}">
+                <a16:creationId xmlns:a16="http://schemas.microsoft.com/office/drawing/2014/main" id="{D973F7F5-AA83-C5F8-D4F6-95185740F790}"/>
+              </a:ext>
+            </a:extLst>
+          </p:cNvPr>
+          <p:cNvSpPr>
+            <a:spLocks noGrp="1"/>
+          </p:cNvSpPr>
+          <p:nvPr>
+            <p:ph type="sldNum" sz="quarter" idx="12"/>
+          </p:nvPr>
+        </p:nvSpPr>
+        <p:spPr/>
+        <p:txBody>
+          <a:bodyPr/>
+          <a:lstStyle/>
+          <a:p>
+            <a:fld id="{C314D315-6C69-40BF-98D6-60239DAB9584}" type="slidenum">
+              <a:rPr lang="ja-JP" altLang="en-US" smtClean="0"/>
+              <a:pPr/>
+              <a:t>21</a:t>
+            </a:fld>
+            <a:endParaRPr lang="ja-JP" altLang="en-US" dirty="0"/>
+          </a:p>
+        </p:txBody>
+      </p:sp>
+      <p:pic>
+        <p:nvPicPr>
+          <p:cNvPr id="14" name="コンテンツ プレースホルダー 13">
+            <a:extLst>
+              <a:ext uri="{FF2B5EF4-FFF2-40B4-BE49-F238E27FC236}">
+                <a16:creationId xmlns:a16="http://schemas.microsoft.com/office/drawing/2014/main" id="{FE0E50F9-CFA8-5701-25E1-2F10B6649CD8}"/>
+              </a:ext>
+            </a:extLst>
+          </p:cNvPr>
+          <p:cNvPicPr>
+            <a:picLocks noGrp="1" noChangeAspect="1"/>
+          </p:cNvPicPr>
+          <p:nvPr>
+            <p:ph sz="quarter" idx="13"/>
+          </p:nvPr>
+        </p:nvPicPr>
+        <p:blipFill>
+          <a:blip r:embed="rId2">
+            <a:extLst>
+              <a:ext uri="{28A0092B-C50C-407E-A947-70E740481C1C}">
+                <a14:useLocalDpi xmlns:a14="http://schemas.microsoft.com/office/drawing/2010/main" val="0"/>
+              </a:ext>
+            </a:extLst>
+          </a:blip>
+          <a:stretch>
+            <a:fillRect/>
+          </a:stretch>
+        </p:blipFill>
+        <p:spPr>
+          <a:xfrm>
+            <a:off x="1316596" y="134170"/>
+            <a:ext cx="7560840" cy="6571194"/>
+          </a:xfrm>
+          <a:prstGeom prst="rect">
+            <a:avLst/>
+          </a:prstGeom>
+        </p:spPr>
+      </p:pic>
+    </p:spTree>
+    <p:extLst>
+      <p:ext uri="{BB962C8B-B14F-4D97-AF65-F5344CB8AC3E}">
+        <p14:creationId xmlns:p14="http://schemas.microsoft.com/office/powerpoint/2010/main" val="3604008524"/>
+      </p:ext>
+    </p:extLst>
+  </p:cSld>
+  <p:clrMapOvr>
+    <a:masterClrMapping/>
+  </p:clrMapOvr>
+</p:sld>
+</file>
+
+<file path=ppt/slides/slide23.xml><?xml version="1.0" encoding="utf-8"?>
+<p:sld xmlns:a="http://schemas.openxmlformats.org/drawingml/2006/main" xmlns:r="http://schemas.openxmlformats.org/officeDocument/2006/relationships" xmlns:p="http://schemas.openxmlformats.org/presentationml/2006/main">
+  <p:cSld>
+    <p:spTree>
+      <p:nvGrpSpPr>
+        <p:cNvPr id="1" name=""/>
+        <p:cNvGrpSpPr/>
+        <p:nvPr/>
+      </p:nvGrpSpPr>
+      <p:grpSpPr>
+        <a:xfrm>
+          <a:off x="0" y="0"/>
+          <a:ext cx="0" cy="0"/>
+          <a:chOff x="0" y="0"/>
+          <a:chExt cx="0" cy="0"/>
+        </a:xfrm>
+      </p:grpSpPr>
+      <p:sp>
+        <p:nvSpPr>
+          <p:cNvPr id="2" name="コンテンツ プレースホルダー 1"/>
+          <p:cNvSpPr>
+            <a:spLocks noGrp="1"/>
+          </p:cNvSpPr>
+          <p:nvPr>
+            <p:ph idx="1"/>
+          </p:nvPr>
+        </p:nvSpPr>
+        <p:spPr/>
+        <p:txBody>
+          <a:bodyPr>
+            <a:normAutofit/>
+          </a:bodyPr>
+          <a:lstStyle/>
+          <a:p>
+            <a:r>
+              <a:rPr kumimoji="1" lang="ja-JP" altLang="en-US" sz="1500" b="1" dirty="0"/>
+              <a:t>責務分離</a:t>
+            </a:r>
+          </a:p>
+          <a:p>
+            <a:pPr lvl="1"/>
+            <a:r>
+              <a:rPr kumimoji="1" lang="ja-JP" altLang="en-US" sz="1500" dirty="0"/>
+              <a:t>自動化可能な欠陥検出は前段へ、レビューは採否判断へ寄せられる</a:t>
+            </a:r>
+          </a:p>
+          <a:p>
+            <a:pPr lvl="1"/>
+            <a:r>
+              <a:rPr kumimoji="1" lang="ja-JP" altLang="en-US" sz="1500" dirty="0"/>
+              <a:t>最終チェックポイントは人間同士のレビューに残せる</a:t>
+            </a:r>
+          </a:p>
+          <a:p>
+            <a:endParaRPr lang="ja-JP" altLang="en-US" dirty="0"/>
+          </a:p>
+          <a:p>
+            <a:r>
+              <a:rPr kumimoji="1" lang="ja-JP" altLang="en-US" sz="1500" b="1" dirty="0"/>
+              <a:t>変更理解</a:t>
+            </a:r>
+          </a:p>
+          <a:p>
+            <a:pPr lvl="1"/>
+            <a:r>
+              <a:rPr kumimoji="1" lang="ja-JP" altLang="en-US" sz="1500" dirty="0"/>
+              <a:t>著者が読み直してから出すので、ブラックボックスな変更が減る</a:t>
+            </a:r>
+          </a:p>
+          <a:p>
+            <a:pPr lvl="1"/>
+            <a:r>
+              <a:rPr kumimoji="1" lang="ja-JP" altLang="en-US" sz="1500" dirty="0"/>
+              <a:t>コメントが「教える」より「判断の確認」に寄ってくる</a:t>
+            </a:r>
+          </a:p>
+          <a:p>
+            <a:endParaRPr lang="ja-JP" altLang="en-US" dirty="0"/>
+          </a:p>
+          <a:p>
+            <a:r>
+              <a:rPr lang="ja-JP" altLang="en-US" sz="1500" b="1" dirty="0"/>
+              <a:t>仕組み</a:t>
+            </a:r>
+            <a:r>
+              <a:rPr kumimoji="1" lang="ja-JP" altLang="en-US" sz="1500" b="1" dirty="0"/>
+              <a:t>としての効果</a:t>
+            </a:r>
+          </a:p>
+          <a:p>
+            <a:pPr lvl="1"/>
+            <a:r>
+              <a:rPr kumimoji="1" lang="ja-JP" altLang="en-US" sz="1500" dirty="0"/>
+              <a:t>単発のレビューコメントは軽く、Judgment の訓練機会は増える</a:t>
+            </a:r>
+          </a:p>
+          <a:p>
+            <a:pPr lvl="1"/>
+            <a:r>
+              <a:rPr kumimoji="1" lang="ja-JP" altLang="en-US" sz="1500" dirty="0"/>
+              <a:t>Issue 起点で方向性を先に合わせる動機が生まれる</a:t>
+            </a:r>
+          </a:p>
+        </p:txBody>
+      </p:sp>
+      <p:sp>
+        <p:nvSpPr>
+          <p:cNvPr id="3" name="タイトル 2"/>
+          <p:cNvSpPr>
+            <a:spLocks noGrp="1"/>
+          </p:cNvSpPr>
+          <p:nvPr>
+            <p:ph type="title"/>
+          </p:nvPr>
+        </p:nvSpPr>
+        <p:spPr/>
+        <p:txBody>
+          <a:bodyPr/>
+          <a:lstStyle/>
+          <a:p>
+            <a:r>
+              <a:rPr kumimoji="1" lang="ja-JP" altLang="en-US" dirty="0"/>
+              <a:t>効果 — 判断共有と判断育成</a:t>
+            </a:r>
+          </a:p>
+        </p:txBody>
+      </p:sp>
+    </p:spTree>
+  </p:cSld>
+  <p:clrMapOvr>
+    <a:masterClrMapping/>
+  </p:clrMapOvr>
+</p:sld>
+</file>
+
+<file path=ppt/slides/slide24.xml><?xml version="1.0" encoding="utf-8"?>
+<p:sld xmlns:a="http://schemas.openxmlformats.org/drawingml/2006/main" xmlns:r="http://schemas.openxmlformats.org/officeDocument/2006/relationships" xmlns:p="http://schemas.openxmlformats.org/presentationml/2006/main">
+  <p:cSld>
+    <p:spTree>
+      <p:nvGrpSpPr>
         <p:cNvPr id="1" name="">
           <a:extLst>
             <a:ext uri="{FF2B5EF4-FFF2-40B4-BE49-F238E27FC236}">
@@ -5529,7 +7078,7 @@
 </p:sld>
 </file>
 
-<file path=ppt/slides/slide21.xml><?xml version="1.0" encoding="utf-8"?>
+<file path=ppt/slides/slide25.xml><?xml version="1.0" encoding="utf-8"?>
 <p:sld xmlns:a="http://schemas.openxmlformats.org/drawingml/2006/main" xmlns:r="http://schemas.openxmlformats.org/officeDocument/2006/relationships" xmlns:p="http://schemas.openxmlformats.org/presentationml/2006/main">
   <p:cSld>
     <p:spTree>
@@ -5638,7 +7187,7 @@
 </p:sld>
 </file>
 
-<file path=ppt/slides/slide22.xml><?xml version="1.0" encoding="utf-8"?>
+<file path=ppt/slides/slide26.xml><?xml version="1.0" encoding="utf-8"?>
 <p:sld xmlns:a="http://schemas.openxmlformats.org/drawingml/2006/main" xmlns:r="http://schemas.openxmlformats.org/officeDocument/2006/relationships" xmlns:p="http://schemas.openxmlformats.org/presentationml/2006/main">
   <p:cSld>
     <p:spTree>
@@ -5776,7 +7325,7 @@
 </p:sld>
 </file>
 
-<file path=ppt/slides/slide23.xml><?xml version="1.0" encoding="utf-8"?>
+<file path=ppt/slides/slide27.xml><?xml version="1.0" encoding="utf-8"?>
 <p:sld xmlns:a="http://schemas.openxmlformats.org/drawingml/2006/main" xmlns:r="http://schemas.openxmlformats.org/officeDocument/2006/relationships" xmlns:p="http://schemas.openxmlformats.org/presentationml/2006/main">
   <p:cSld>
     <p:spTree>
@@ -6043,7 +7592,7 @@
 </p:sld>
 </file>
 
-<file path=ppt/slides/slide24.xml><?xml version="1.0" encoding="utf-8"?>
+<file path=ppt/slides/slide28.xml><?xml version="1.0" encoding="utf-8"?>
 <p:sld xmlns:a="http://schemas.openxmlformats.org/drawingml/2006/main" xmlns:r="http://schemas.openxmlformats.org/officeDocument/2006/relationships" xmlns:p="http://schemas.openxmlformats.org/presentationml/2006/main">
   <p:cSld>
     <p:spTree>
@@ -6316,7 +7865,147 @@
 </p:sld>
 </file>
 
-<file path=ppt/slides/slide25.xml><?xml version="1.0" encoding="utf-8"?>
+<file path=ppt/slides/slide29.xml><?xml version="1.0" encoding="utf-8"?>
+<p:sld xmlns:a="http://schemas.openxmlformats.org/drawingml/2006/main" xmlns:r="http://schemas.openxmlformats.org/officeDocument/2006/relationships" xmlns:p="http://schemas.openxmlformats.org/presentationml/2006/main">
+  <p:cSld>
+    <p:spTree>
+      <p:nvGrpSpPr>
+        <p:cNvPr id="1" name=""/>
+        <p:cNvGrpSpPr/>
+        <p:nvPr/>
+      </p:nvGrpSpPr>
+      <p:grpSpPr>
+        <a:xfrm>
+          <a:off x="0" y="0"/>
+          <a:ext cx="0" cy="0"/>
+          <a:chOff x="0" y="0"/>
+          <a:chExt cx="0" cy="0"/>
+        </a:xfrm>
+      </p:grpSpPr>
+      <p:sp>
+        <p:nvSpPr>
+          <p:cNvPr id="2" name="コンテンツ プレースホルダー 1"/>
+          <p:cNvSpPr>
+            <a:spLocks noGrp="1"/>
+          </p:cNvSpPr>
+          <p:nvPr>
+            <p:ph idx="1"/>
+          </p:nvPr>
+        </p:nvSpPr>
+        <p:spPr>
+          <a:xfrm>
+            <a:off x="429960" y="1282427"/>
+            <a:ext cx="9059544" cy="4894536"/>
+          </a:xfrm>
+        </p:spPr>
+        <p:txBody>
+          <a:bodyPr>
+            <a:normAutofit/>
+          </a:bodyPr>
+          <a:lstStyle/>
+          <a:p>
+            <a:r>
+              <a:rPr kumimoji="1" lang="ja-JP" altLang="en-US" sz="2400" b="1" dirty="0"/>
+              <a:t>「何を問うか」を引き受けるのは人間</a:t>
+            </a:r>
+          </a:p>
+          <a:p>
+            <a:pPr lvl="1"/>
+            <a:r>
+              <a:rPr kumimoji="1" lang="ja-JP" altLang="en-US" sz="2400" dirty="0"/>
+              <a:t>問いを立てることも</a:t>
+            </a:r>
+            <a:r>
+              <a:rPr kumimoji="1" lang="en-US" altLang="ja-JP" sz="2400" b="1" dirty="0"/>
+              <a:t>Judgement</a:t>
+            </a:r>
+            <a:r>
+              <a:rPr kumimoji="1" lang="ja-JP" altLang="en-US" sz="2400" dirty="0"/>
+              <a:t>である</a:t>
+            </a:r>
+            <a:endParaRPr kumimoji="1" lang="en-US" altLang="ja-JP" sz="2400" dirty="0"/>
+          </a:p>
+          <a:p>
+            <a:pPr lvl="1"/>
+            <a:r>
+              <a:rPr lang="ja-JP" altLang="en-US" sz="2400" b="1" dirty="0"/>
+              <a:t>判断</a:t>
+            </a:r>
+            <a:r>
+              <a:rPr lang="ja-JP" altLang="en-US" sz="2400" dirty="0"/>
+              <a:t>：掛け金を持つ主体として世界にコミットする</a:t>
+            </a:r>
+            <a:endParaRPr kumimoji="1" lang="en-US" altLang="ja-JP" sz="2400" dirty="0"/>
+          </a:p>
+          <a:p>
+            <a:pPr lvl="2"/>
+            <a:r>
+              <a:rPr kumimoji="1" lang="ja-JP" altLang="en-US" sz="2400" dirty="0"/>
+              <a:t>違和感を問いとして言語化し、</a:t>
+            </a:r>
+            <a:endParaRPr kumimoji="1" lang="en-US" altLang="ja-JP" sz="2400" dirty="0"/>
+          </a:p>
+          <a:p>
+            <a:pPr lvl="2"/>
+            <a:r>
+              <a:rPr kumimoji="1" lang="ja-JP" altLang="en-US" sz="2400" dirty="0"/>
+              <a:t>満足できる条件を策定し、</a:t>
+            </a:r>
+            <a:endParaRPr kumimoji="1" lang="en-US" altLang="ja-JP" sz="2400" dirty="0"/>
+          </a:p>
+          <a:p>
+            <a:pPr lvl="2"/>
+            <a:r>
+              <a:rPr kumimoji="1" lang="ja-JP" altLang="en-US" sz="2400" dirty="0"/>
+              <a:t>受け入れるトレードオフを決める</a:t>
+            </a:r>
+            <a:endParaRPr kumimoji="1" lang="en-US" altLang="ja-JP" sz="2400" dirty="0"/>
+          </a:p>
+          <a:p>
+            <a:pPr lvl="2"/>
+            <a:endParaRPr kumimoji="1" lang="ja-JP" altLang="en-US" sz="2400" b="1" dirty="0"/>
+          </a:p>
+          <a:p>
+            <a:pPr lvl="1"/>
+            <a:r>
+              <a:rPr kumimoji="1" lang="ja-JP" altLang="en-US" sz="2400" b="1" dirty="0"/>
+              <a:t>責任無いコードはメンタルモデルが喪失している</a:t>
+            </a:r>
+            <a:endParaRPr kumimoji="1" lang="ja-JP" altLang="en-US" sz="2400" dirty="0"/>
+          </a:p>
+        </p:txBody>
+      </p:sp>
+      <p:sp>
+        <p:nvSpPr>
+          <p:cNvPr id="3" name="タイトル 2"/>
+          <p:cNvSpPr>
+            <a:spLocks noGrp="1"/>
+          </p:cNvSpPr>
+          <p:nvPr>
+            <p:ph type="title"/>
+          </p:nvPr>
+        </p:nvSpPr>
+        <p:spPr/>
+        <p:txBody>
+          <a:bodyPr/>
+          <a:lstStyle/>
+          <a:p>
+            <a:r>
+              <a:rPr kumimoji="1" lang="ja-JP" altLang="en-US" dirty="0"/>
+              <a:t>結び: 人間が引き受けるべきこと</a:t>
+            </a:r>
+          </a:p>
+        </p:txBody>
+      </p:sp>
+    </p:spTree>
+  </p:cSld>
+  <p:clrMapOvr>
+    <a:masterClrMapping/>
+  </p:clrMapOvr>
+</p:sld>
+</file>
+
+<file path=ppt/slides/slide3.xml><?xml version="1.0" encoding="utf-8"?>
 <p:sld xmlns:a="http://schemas.openxmlformats.org/drawingml/2006/main" xmlns:r="http://schemas.openxmlformats.org/officeDocument/2006/relationships" xmlns:p="http://schemas.openxmlformats.org/presentationml/2006/main">
   <p:cSld>
     <p:spTree>
@@ -6351,65 +8040,89 @@
           <a:lstStyle/>
           <a:p>
             <a:r>
-              <a:rPr kumimoji="1" lang="ja-JP" altLang="en-US" sz="2400" b="1" dirty="0"/>
-              <a:t>「何を問うか」を引き受けるのは人間</a:t>
-            </a:r>
+              <a:rPr kumimoji="1" lang="ja-JP" altLang="en-US" sz="2800" b="1" dirty="0"/>
+              <a:t>Judgment（判断）</a:t>
+            </a:r>
+            <a:r>
+              <a:rPr lang="ja-JP" altLang="en-US" sz="2800" dirty="0"/>
+              <a:t>🧑‍💻</a:t>
+            </a:r>
+            <a:endParaRPr kumimoji="1" lang="ja-JP" altLang="en-US" sz="2800" b="1" dirty="0"/>
           </a:p>
           <a:p>
             <a:pPr lvl="1"/>
             <a:r>
-              <a:rPr kumimoji="1" lang="ja-JP" altLang="en-US" sz="2400" dirty="0"/>
-              <a:t>問いを立てることも</a:t>
-            </a:r>
-            <a:r>
-              <a:rPr kumimoji="1" lang="en-US" altLang="ja-JP" sz="2400" b="1" dirty="0"/>
-              <a:t>Judgement</a:t>
-            </a:r>
-            <a:r>
-              <a:rPr kumimoji="1" lang="ja-JP" altLang="en-US" sz="2400" dirty="0"/>
-              <a:t>である</a:t>
-            </a:r>
-            <a:endParaRPr kumimoji="1" lang="en-US" altLang="ja-JP" sz="2400" dirty="0"/>
+              <a:rPr kumimoji="1" lang="ja-JP" altLang="en-US" sz="2800" dirty="0"/>
+              <a:t>何を問うか・何を採るかを引き受けること</a:t>
+            </a:r>
+            <a:endParaRPr kumimoji="1" lang="en-US" altLang="ja-JP" sz="2800" dirty="0"/>
+          </a:p>
+          <a:p>
+            <a:pPr lvl="2"/>
+            <a:r>
+              <a:rPr lang="en-US" altLang="ja-JP" sz="2000" dirty="0"/>
+              <a:t>Ex </a:t>
+            </a:r>
+            <a:r>
+              <a:rPr lang="ja-JP" altLang="en-US" sz="2000" dirty="0"/>
+              <a:t>トレードオフの判断</a:t>
+            </a:r>
+            <a:endParaRPr lang="en-US" altLang="ja-JP" sz="2000" dirty="0"/>
+          </a:p>
+          <a:p>
+            <a:pPr lvl="2"/>
+            <a:r>
+              <a:rPr kumimoji="1" lang="en-US" altLang="ja-JP" sz="2000" dirty="0"/>
+              <a:t>Ex </a:t>
+            </a:r>
+            <a:r>
+              <a:rPr kumimoji="1" lang="ja-JP" altLang="en-US" sz="2000" dirty="0"/>
+              <a:t>何を解決するかの判断</a:t>
+            </a:r>
+            <a:endParaRPr lang="ja-JP" altLang="en-US" sz="1400" dirty="0"/>
+          </a:p>
+          <a:p>
+            <a:r>
+              <a:rPr kumimoji="1" lang="ja-JP" altLang="en-US" sz="2800" b="1" dirty="0"/>
+              <a:t>Reckoning（演算）</a:t>
+            </a:r>
+            <a:r>
+              <a:rPr lang="ja-JP" altLang="en-US" sz="2800" dirty="0"/>
+              <a:t>🤖💻</a:t>
+            </a:r>
+            <a:endParaRPr kumimoji="1" lang="ja-JP" altLang="en-US" sz="2800" b="1" dirty="0"/>
           </a:p>
           <a:p>
             <a:pPr lvl="1"/>
             <a:r>
-              <a:rPr kumimoji="1" lang="ja-JP" altLang="en-US" sz="2400" dirty="0"/>
-              <a:t>責任：</a:t>
-            </a:r>
-            <a:endParaRPr kumimoji="1" lang="en-US" altLang="ja-JP" sz="2400" dirty="0"/>
+              <a:rPr kumimoji="1" lang="ja-JP" altLang="en-US" sz="2800" dirty="0"/>
+              <a:t>与えられた条件で広く計算すること</a:t>
+            </a:r>
+            <a:endParaRPr kumimoji="1" lang="en-US" altLang="ja-JP" sz="2800" dirty="0"/>
           </a:p>
           <a:p>
             <a:pPr lvl="2"/>
             <a:r>
-              <a:rPr kumimoji="1" lang="ja-JP" altLang="en-US" sz="2400" dirty="0"/>
-              <a:t>違和感を問いとして言語化し、</a:t>
-            </a:r>
-            <a:endParaRPr kumimoji="1" lang="en-US" altLang="ja-JP" sz="2400" dirty="0"/>
+              <a:rPr kumimoji="1" lang="en-US" altLang="ja-JP" sz="2000" dirty="0"/>
+              <a:t>Ex </a:t>
+            </a:r>
+            <a:r>
+              <a:rPr kumimoji="1" lang="ja-JP" altLang="en-US" sz="2000" dirty="0"/>
+              <a:t>コンテキストに従って生成すること</a:t>
+            </a:r>
+            <a:endParaRPr kumimoji="1" lang="en-US" altLang="ja-JP" sz="2000" dirty="0"/>
           </a:p>
           <a:p>
             <a:pPr lvl="2"/>
             <a:r>
-              <a:rPr kumimoji="1" lang="ja-JP" altLang="en-US" sz="2400" dirty="0"/>
-              <a:t>満足できる条件を策定し、</a:t>
-            </a:r>
-            <a:endParaRPr kumimoji="1" lang="en-US" altLang="ja-JP" sz="2400" dirty="0"/>
-          </a:p>
-          <a:p>
-            <a:pPr lvl="2"/>
-            <a:r>
-              <a:rPr kumimoji="1" lang="ja-JP" altLang="en-US" sz="2400" dirty="0"/>
-              <a:t>受け入れるトレードオフを決める</a:t>
-            </a:r>
-            <a:endParaRPr kumimoji="1" lang="ja-JP" altLang="en-US" sz="2400" b="1" dirty="0"/>
-          </a:p>
-          <a:p>
-            <a:pPr lvl="1"/>
-            <a:r>
-              <a:rPr kumimoji="1" lang="ja-JP" altLang="en-US" sz="2400" b="1" dirty="0"/>
-              <a:t>責任無いコードはメンタルモデルが喪失している</a:t>
-            </a:r>
-            <a:endParaRPr kumimoji="1" lang="ja-JP" altLang="en-US" sz="2400" dirty="0"/>
+              <a:rPr lang="en-US" altLang="ja-JP" sz="2000" dirty="0"/>
+              <a:t>Ex </a:t>
+            </a:r>
+            <a:r>
+              <a:rPr lang="ja-JP" altLang="en-US" sz="2000" dirty="0"/>
+              <a:t>ツールを使って処理すること</a:t>
+            </a:r>
+            <a:endParaRPr kumimoji="1" lang="ja-JP" altLang="en-US" sz="2000" dirty="0"/>
           </a:p>
         </p:txBody>
       </p:sp>
@@ -6425,16 +8138,55 @@
         </p:nvSpPr>
         <p:spPr/>
         <p:txBody>
-          <a:bodyPr/>
+          <a:bodyPr>
+            <a:normAutofit fontScale="90000"/>
+          </a:bodyPr>
           <a:lstStyle/>
           <a:p>
             <a:r>
               <a:rPr kumimoji="1" lang="ja-JP" altLang="en-US" dirty="0"/>
-              <a:t>結び: 人間が引き受けるべきこと</a:t>
+              <a:t>枠組み: 判断（Judgment）と演算（Reckoning）</a:t>
             </a:r>
           </a:p>
         </p:txBody>
       </p:sp>
+      <p:pic>
+        <p:nvPicPr>
+          <p:cNvPr id="6" name="図 5">
+            <a:extLst>
+              <a:ext uri="{FF2B5EF4-FFF2-40B4-BE49-F238E27FC236}">
+                <a16:creationId xmlns:a16="http://schemas.microsoft.com/office/drawing/2014/main" id="{DD70937A-5EE4-27D0-92C7-AB41BE5F0861}"/>
+              </a:ext>
+            </a:extLst>
+          </p:cNvPr>
+          <p:cNvPicPr>
+            <a:picLocks noChangeAspect="1"/>
+          </p:cNvPicPr>
+          <p:nvPr/>
+        </p:nvPicPr>
+        <p:blipFill>
+          <a:blip r:embed="rId2">
+            <a:extLst>
+              <a:ext uri="{28A0092B-C50C-407E-A947-70E740481C1C}">
+                <a14:useLocalDpi xmlns:a14="http://schemas.microsoft.com/office/drawing/2010/main" val="0"/>
+              </a:ext>
+            </a:extLst>
+          </a:blip>
+          <a:srcRect l="14905" t="2673" r="15827"/>
+          <a:stretch>
+            <a:fillRect/>
+          </a:stretch>
+        </p:blipFill>
+        <p:spPr>
+          <a:xfrm>
+            <a:off x="7365268" y="4002065"/>
+            <a:ext cx="2540732" cy="2855935"/>
+          </a:xfrm>
+          <a:prstGeom prst="rect">
+            <a:avLst/>
+          </a:prstGeom>
+        </p:spPr>
+      </p:pic>
     </p:spTree>
   </p:cSld>
   <p:clrMapOvr>
@@ -6443,7 +8195,7 @@
 </p:sld>
 </file>
 
-<file path=ppt/slides/slide26.xml><?xml version="1.0" encoding="utf-8"?>
+<file path=ppt/slides/slide30.xml><?xml version="1.0" encoding="utf-8"?>
 <p:sld xmlns:a="http://schemas.openxmlformats.org/drawingml/2006/main" xmlns:r="http://schemas.openxmlformats.org/officeDocument/2006/relationships" xmlns:p="http://schemas.openxmlformats.org/presentationml/2006/main">
   <p:cSld>
     <p:spTree>
@@ -6564,539 +8316,7 @@
 </p:sld>
 </file>
 
-<file path=ppt/slides/slide27.xml><?xml version="1.0" encoding="utf-8"?>
-<p:sld xmlns:a="http://schemas.openxmlformats.org/drawingml/2006/main" xmlns:r="http://schemas.openxmlformats.org/officeDocument/2006/relationships" xmlns:p="http://schemas.openxmlformats.org/presentationml/2006/main">
-  <p:cSld>
-    <p:spTree>
-      <p:nvGrpSpPr>
-        <p:cNvPr id="1" name=""/>
-        <p:cNvGrpSpPr/>
-        <p:nvPr/>
-      </p:nvGrpSpPr>
-      <p:grpSpPr>
-        <a:xfrm>
-          <a:off x="0" y="0"/>
-          <a:ext cx="0" cy="0"/>
-          <a:chOff x="0" y="0"/>
-          <a:chExt cx="0" cy="0"/>
-        </a:xfrm>
-      </p:grpSpPr>
-      <p:sp>
-        <p:nvSpPr>
-          <p:cNvPr id="2" name="コンテンツ プレースホルダー 1"/>
-          <p:cNvSpPr>
-            <a:spLocks noGrp="1"/>
-          </p:cNvSpPr>
-          <p:nvPr>
-            <p:ph idx="1"/>
-          </p:nvPr>
-        </p:nvSpPr>
-        <p:spPr/>
-        <p:txBody>
-          <a:bodyPr>
-            <a:normAutofit/>
-          </a:bodyPr>
-          <a:lstStyle/>
-          <a:p>
-            <a:r>
-              <a:rPr kumimoji="1" lang="ja-JP" altLang="en-US" sz="1500" dirty="0"/>
-              <a:t>Redmine → GitHub Issue → コード → Wiki をつなぐ</a:t>
-            </a:r>
-          </a:p>
-          <a:p>
-            <a:pPr lvl="1"/>
-            <a:r>
-              <a:rPr kumimoji="1" lang="ja-JP" altLang="en-US" sz="1500" dirty="0"/>
-              <a:t>GitHub Agent が全体の整合をガーデニングする</a:t>
-            </a:r>
-          </a:p>
-          <a:p>
-            <a:pPr lvl="1"/>
-            <a:r>
-              <a:rPr kumimoji="1" lang="ja-JP" altLang="en-US" sz="1500" dirty="0"/>
-              <a:t>例: PR 時に Wiki 未更新を指摘する</a:t>
-            </a:r>
-          </a:p>
-          <a:p>
-            <a:endParaRPr lang="ja-JP" altLang="en-US" dirty="0"/>
-          </a:p>
-          <a:p>
-            <a:r>
-              <a:rPr kumimoji="1" lang="ja-JP" altLang="en-US" sz="1500" b="1" dirty="0"/>
-              <a:t>Phase 2</a:t>
-            </a:r>
-          </a:p>
-          <a:p>
-            <a:pPr lvl="1"/>
-            <a:r>
-              <a:rPr kumimoji="1" lang="ja-JP" altLang="en-US" sz="1500" dirty="0"/>
-              <a:t>Claude Code Action による自動ドキュメント生成 PR</a:t>
-            </a:r>
-          </a:p>
-          <a:p>
-            <a:endParaRPr lang="ja-JP" altLang="en-US" dirty="0"/>
-          </a:p>
-          <a:p>
-            <a:r>
-              <a:rPr kumimoji="1" lang="ja-JP" altLang="en-US" sz="1500" b="1" dirty="0"/>
-              <a:t>Judgment → Reckoning → Judgment</a:t>
-            </a:r>
-          </a:p>
-          <a:p>
-            <a:pPr lvl="1"/>
-            <a:r>
-              <a:rPr kumimoji="1" lang="ja-JP" altLang="en-US" sz="1500" dirty="0"/>
-              <a:t>問いを立てる</a:t>
-            </a:r>
-          </a:p>
-          <a:p>
-            <a:pPr lvl="1"/>
-            <a:r>
-              <a:rPr kumimoji="1" lang="ja-JP" altLang="en-US" sz="1500" dirty="0"/>
-              <a:t>AI に演算させる</a:t>
-            </a:r>
-          </a:p>
-          <a:p>
-            <a:pPr lvl="1"/>
-            <a:r>
-              <a:rPr kumimoji="1" lang="ja-JP" altLang="en-US" sz="1500" dirty="0"/>
-              <a:t>採否を決める → また問いを立てる</a:t>
-            </a:r>
-          </a:p>
-        </p:txBody>
-      </p:sp>
-      <p:sp>
-        <p:nvSpPr>
-          <p:cNvPr id="3" name="タイトル 2"/>
-          <p:cNvSpPr>
-            <a:spLocks noGrp="1"/>
-          </p:cNvSpPr>
-          <p:nvPr>
-            <p:ph type="title"/>
-          </p:nvPr>
-        </p:nvSpPr>
-        <p:spPr/>
-        <p:txBody>
-          <a:bodyPr/>
-          <a:lstStyle/>
-          <a:p>
-            <a:r>
-              <a:rPr kumimoji="1" lang="ja-JP" altLang="en-US" dirty="0"/>
-              <a:t>将来の展望と最後のループ</a:t>
-            </a:r>
-          </a:p>
-        </p:txBody>
-      </p:sp>
-    </p:spTree>
-  </p:cSld>
-  <p:clrMapOvr>
-    <a:masterClrMapping/>
-  </p:clrMapOvr>
-</p:sld>
-</file>
-
-<file path=ppt/slides/slide28.xml><?xml version="1.0" encoding="utf-8"?>
-<p:sld xmlns:a="http://schemas.openxmlformats.org/drawingml/2006/main" xmlns:r="http://schemas.openxmlformats.org/officeDocument/2006/relationships" xmlns:p="http://schemas.openxmlformats.org/presentationml/2006/main">
-  <p:cSld>
-    <p:spTree>
-      <p:nvGrpSpPr>
-        <p:cNvPr id="1" name=""/>
-        <p:cNvGrpSpPr/>
-        <p:nvPr/>
-      </p:nvGrpSpPr>
-      <p:grpSpPr>
-        <a:xfrm>
-          <a:off x="0" y="0"/>
-          <a:ext cx="0" cy="0"/>
-          <a:chOff x="0" y="0"/>
-          <a:chExt cx="0" cy="0"/>
-        </a:xfrm>
-      </p:grpSpPr>
-      <p:sp>
-        <p:nvSpPr>
-          <p:cNvPr id="2" name="コンテンツ 1"/>
-          <p:cNvSpPr txBox="1">
-            <a:spLocks/>
-          </p:cNvSpPr>
-          <p:nvPr/>
-        </p:nvSpPr>
-        <p:spPr>
-          <a:xfrm>
-            <a:off x="697186" y="1000000"/>
-            <a:ext cx="8496300" cy="4800000"/>
-          </a:xfrm>
-          <a:prstGeom prst="rect">
-            <a:avLst/>
-          </a:prstGeom>
-        </p:spPr>
-        <p:txBody>
-          <a:bodyPr vert="horz" lIns="91440" tIns="91440" rIns="91440" bIns="91440" rtlCol="0" anchor="ctr">
-            <a:normAutofit/>
-          </a:bodyPr>
-          <a:lstStyle>
-            <a:lvl1pPr algn="ctr">
-              <a:defRPr kumimoji="1" sz="2400">
-                <a:solidFill>
-                  <a:schemeClr val="tx1"/>
-                </a:solidFill>
-                <a:latin typeface="+mn-ea"/>
-              </a:defRPr>
-            </a:lvl1pPr>
-          </a:lstStyle>
-          <a:p>
-            <a:r>
-              <a:rPr kumimoji="1" lang="ja-JP" altLang="en-US" sz="2600" dirty="0"/>
-              <a:t>レビューでは</a:t>
-            </a:r>
-          </a:p>
-          <a:p>
-            <a:r>
-              <a:rPr kumimoji="1" lang="ja-JP" altLang="en-US" sz="2800" b="1" dirty="0"/>
-              <a:t>「場」と「</a:t>
-            </a:r>
-            <a:r>
-              <a:rPr lang="ja-JP" altLang="en-US" sz="2800" b="1" dirty="0"/>
-              <a:t>仕組み</a:t>
-            </a:r>
-            <a:r>
-              <a:rPr kumimoji="1" lang="ja-JP" altLang="en-US" sz="2800" b="1" dirty="0"/>
-              <a:t>」を分けて考える</a:t>
-            </a:r>
-          </a:p>
-          <a:p>
-            <a:endParaRPr lang="ja-JP" altLang="en-US" dirty="0"/>
-          </a:p>
-          <a:p>
-            <a:r>
-              <a:rPr kumimoji="1" lang="ja-JP" altLang="en-US" sz="1900" dirty="0"/>
-              <a:t>場: この変更を組み込むか</a:t>
-            </a:r>
-          </a:p>
-          <a:p>
-            <a:r>
-              <a:rPr kumimoji="1" lang="ja-JP" altLang="en-US" sz="1900" dirty="0"/>
-              <a:t>制度: その判断を担える人を増やす</a:t>
-            </a:r>
-          </a:p>
-        </p:txBody>
-      </p:sp>
-    </p:spTree>
-  </p:cSld>
-  <p:clrMapOvr>
-    <a:masterClrMapping/>
-  </p:clrMapOvr>
-</p:sld>
-</file>
-
-<file path=ppt/slides/slide3.xml><?xml version="1.0" encoding="utf-8"?>
-<p:sld xmlns:a="http://schemas.openxmlformats.org/drawingml/2006/main" xmlns:r="http://schemas.openxmlformats.org/officeDocument/2006/relationships" xmlns:p="http://schemas.openxmlformats.org/presentationml/2006/main">
-  <p:cSld>
-    <p:spTree>
-      <p:nvGrpSpPr>
-        <p:cNvPr id="1" name=""/>
-        <p:cNvGrpSpPr/>
-        <p:nvPr/>
-      </p:nvGrpSpPr>
-      <p:grpSpPr>
-        <a:xfrm>
-          <a:off x="0" y="0"/>
-          <a:ext cx="0" cy="0"/>
-          <a:chOff x="0" y="0"/>
-          <a:chExt cx="0" cy="0"/>
-        </a:xfrm>
-      </p:grpSpPr>
-      <p:sp>
-        <p:nvSpPr>
-          <p:cNvPr id="2" name="コンテンツ プレースホルダー 1"/>
-          <p:cNvSpPr>
-            <a:spLocks noGrp="1"/>
-          </p:cNvSpPr>
-          <p:nvPr>
-            <p:ph idx="1"/>
-          </p:nvPr>
-        </p:nvSpPr>
-        <p:spPr/>
-        <p:txBody>
-          <a:bodyPr>
-            <a:normAutofit lnSpcReduction="10000"/>
-          </a:bodyPr>
-          <a:lstStyle/>
-          <a:p>
-            <a:r>
-              <a:rPr kumimoji="1" lang="ja-JP" altLang="en-US" sz="1600" dirty="0"/>
-              <a:t>はじめに — 枠組み: 判断と演算</a:t>
-            </a:r>
-          </a:p>
-          <a:p>
-            <a:r>
-              <a:rPr kumimoji="1" lang="ja-JP" altLang="en-US" sz="1600" dirty="0"/>
-              <a:t>全体像 — 2つの仕組み</a:t>
-            </a:r>
-            <a:endParaRPr lang="ja-JP" altLang="en-US" dirty="0"/>
-          </a:p>
-          <a:p>
-            <a:r>
-              <a:rPr kumimoji="1" lang="ja-JP" altLang="en-US" sz="1600" dirty="0"/>
-              <a:t>事例1: ドキュメントパイプライン</a:t>
-            </a:r>
-          </a:p>
-          <a:p>
-            <a:pPr lvl="1"/>
-            <a:r>
-              <a:rPr kumimoji="1" lang="ja-JP" altLang="en-US" sz="1600" dirty="0"/>
-              <a:t>課題 / 判断 / 演算 / 効果</a:t>
-            </a:r>
-            <a:endParaRPr lang="ja-JP" altLang="en-US" dirty="0"/>
-          </a:p>
-          <a:p>
-            <a:r>
-              <a:rPr kumimoji="1" lang="ja-JP" altLang="en-US" sz="1600" dirty="0"/>
-              <a:t>事例2: AIレビューワークフロー</a:t>
-            </a:r>
-          </a:p>
-          <a:p>
-            <a:pPr lvl="1"/>
-            <a:r>
-              <a:rPr kumimoji="1" lang="ja-JP" altLang="en-US" sz="1600" dirty="0"/>
-              <a:t>課題 / 判断 / 演算 / 効果 / 制度</a:t>
-            </a:r>
-            <a:endParaRPr lang="ja-JP" altLang="en-US" dirty="0"/>
-          </a:p>
-          <a:p>
-            <a:r>
-              <a:rPr kumimoji="1" lang="ja-JP" altLang="en-US" sz="1600" dirty="0"/>
-              <a:t>2つの事例が示すパターン</a:t>
-            </a:r>
-          </a:p>
-          <a:p>
-            <a:r>
-              <a:rPr kumimoji="1" lang="ja-JP" altLang="en-US" sz="1600" dirty="0"/>
-              <a:t>結び / 将来の展望</a:t>
-            </a:r>
-          </a:p>
-        </p:txBody>
-      </p:sp>
-      <p:sp>
-        <p:nvSpPr>
-          <p:cNvPr id="3" name="タイトル 2"/>
-          <p:cNvSpPr>
-            <a:spLocks noGrp="1"/>
-          </p:cNvSpPr>
-          <p:nvPr>
-            <p:ph type="title"/>
-          </p:nvPr>
-        </p:nvSpPr>
-        <p:spPr/>
-        <p:txBody>
-          <a:bodyPr/>
-          <a:lstStyle/>
-          <a:p>
-            <a:r>
-              <a:rPr kumimoji="1" lang="ja-JP" altLang="en-US" dirty="0"/>
-              <a:t>今日話すこと</a:t>
-            </a:r>
-          </a:p>
-        </p:txBody>
-      </p:sp>
-    </p:spTree>
-  </p:cSld>
-  <p:clrMapOvr>
-    <a:masterClrMapping/>
-  </p:clrMapOvr>
-</p:sld>
-</file>
-
 <file path=ppt/slides/slide4.xml><?xml version="1.0" encoding="utf-8"?>
-<p:sld xmlns:a="http://schemas.openxmlformats.org/drawingml/2006/main" xmlns:r="http://schemas.openxmlformats.org/officeDocument/2006/relationships" xmlns:p="http://schemas.openxmlformats.org/presentationml/2006/main">
-  <p:cSld>
-    <p:spTree>
-      <p:nvGrpSpPr>
-        <p:cNvPr id="1" name=""/>
-        <p:cNvGrpSpPr/>
-        <p:nvPr/>
-      </p:nvGrpSpPr>
-      <p:grpSpPr>
-        <a:xfrm>
-          <a:off x="0" y="0"/>
-          <a:ext cx="0" cy="0"/>
-          <a:chOff x="0" y="0"/>
-          <a:chExt cx="0" cy="0"/>
-        </a:xfrm>
-      </p:grpSpPr>
-      <p:sp>
-        <p:nvSpPr>
-          <p:cNvPr id="2" name="コンテンツ プレースホルダー 1"/>
-          <p:cNvSpPr>
-            <a:spLocks noGrp="1"/>
-          </p:cNvSpPr>
-          <p:nvPr>
-            <p:ph idx="1"/>
-          </p:nvPr>
-        </p:nvSpPr>
-        <p:spPr/>
-        <p:txBody>
-          <a:bodyPr>
-            <a:normAutofit/>
-          </a:bodyPr>
-          <a:lstStyle/>
-          <a:p>
-            <a:r>
-              <a:rPr kumimoji="1" lang="ja-JP" altLang="en-US" sz="2800" b="1" dirty="0"/>
-              <a:t>Judgment（判断）</a:t>
-            </a:r>
-            <a:r>
-              <a:rPr lang="ja-JP" altLang="en-US" sz="2800" dirty="0"/>
-              <a:t>🧑‍💻</a:t>
-            </a:r>
-            <a:endParaRPr kumimoji="1" lang="ja-JP" altLang="en-US" sz="2800" b="1" dirty="0"/>
-          </a:p>
-          <a:p>
-            <a:pPr lvl="1"/>
-            <a:r>
-              <a:rPr kumimoji="1" lang="ja-JP" altLang="en-US" sz="2800" dirty="0"/>
-              <a:t>何を問うか・何を採るかを引き受けること</a:t>
-            </a:r>
-            <a:endParaRPr kumimoji="1" lang="en-US" altLang="ja-JP" sz="2800" dirty="0"/>
-          </a:p>
-          <a:p>
-            <a:pPr lvl="2"/>
-            <a:r>
-              <a:rPr lang="en-US" altLang="ja-JP" sz="2000" dirty="0"/>
-              <a:t>Ex </a:t>
-            </a:r>
-            <a:r>
-              <a:rPr lang="ja-JP" altLang="en-US" sz="2000" dirty="0"/>
-              <a:t>トレードオフの判断</a:t>
-            </a:r>
-            <a:endParaRPr lang="en-US" altLang="ja-JP" sz="2000" dirty="0"/>
-          </a:p>
-          <a:p>
-            <a:pPr lvl="2"/>
-            <a:r>
-              <a:rPr kumimoji="1" lang="en-US" altLang="ja-JP" sz="2000" dirty="0"/>
-              <a:t>Ex </a:t>
-            </a:r>
-            <a:r>
-              <a:rPr kumimoji="1" lang="ja-JP" altLang="en-US" sz="2000" dirty="0"/>
-              <a:t>何を解決するかの判断</a:t>
-            </a:r>
-            <a:endParaRPr lang="ja-JP" altLang="en-US" sz="1400" dirty="0"/>
-          </a:p>
-          <a:p>
-            <a:r>
-              <a:rPr kumimoji="1" lang="ja-JP" altLang="en-US" sz="2800" b="1" dirty="0"/>
-              <a:t>Reckoning（演算）</a:t>
-            </a:r>
-            <a:r>
-              <a:rPr lang="ja-JP" altLang="en-US" sz="2800" dirty="0"/>
-              <a:t>🤖💻</a:t>
-            </a:r>
-            <a:endParaRPr kumimoji="1" lang="ja-JP" altLang="en-US" sz="2800" b="1" dirty="0"/>
-          </a:p>
-          <a:p>
-            <a:pPr lvl="1"/>
-            <a:r>
-              <a:rPr kumimoji="1" lang="ja-JP" altLang="en-US" sz="2800" dirty="0"/>
-              <a:t>与えられた条件で広く計算すること</a:t>
-            </a:r>
-            <a:endParaRPr kumimoji="1" lang="en-US" altLang="ja-JP" sz="2800" dirty="0"/>
-          </a:p>
-          <a:p>
-            <a:pPr lvl="2"/>
-            <a:r>
-              <a:rPr kumimoji="1" lang="en-US" altLang="ja-JP" sz="2000" dirty="0"/>
-              <a:t>Ex </a:t>
-            </a:r>
-            <a:r>
-              <a:rPr kumimoji="1" lang="ja-JP" altLang="en-US" sz="2000" dirty="0"/>
-              <a:t>コンテキストに従って生成すること</a:t>
-            </a:r>
-            <a:endParaRPr kumimoji="1" lang="en-US" altLang="ja-JP" sz="2000" dirty="0"/>
-          </a:p>
-          <a:p>
-            <a:pPr lvl="2"/>
-            <a:r>
-              <a:rPr lang="en-US" altLang="ja-JP" sz="2000" dirty="0"/>
-              <a:t>Ex </a:t>
-            </a:r>
-            <a:r>
-              <a:rPr lang="ja-JP" altLang="en-US" sz="2000" dirty="0"/>
-              <a:t>ツールを使って処理すること</a:t>
-            </a:r>
-            <a:endParaRPr kumimoji="1" lang="ja-JP" altLang="en-US" sz="2000" dirty="0"/>
-          </a:p>
-        </p:txBody>
-      </p:sp>
-      <p:sp>
-        <p:nvSpPr>
-          <p:cNvPr id="3" name="タイトル 2"/>
-          <p:cNvSpPr>
-            <a:spLocks noGrp="1"/>
-          </p:cNvSpPr>
-          <p:nvPr>
-            <p:ph type="title"/>
-          </p:nvPr>
-        </p:nvSpPr>
-        <p:spPr/>
-        <p:txBody>
-          <a:bodyPr>
-            <a:normAutofit fontScale="90000"/>
-          </a:bodyPr>
-          <a:lstStyle/>
-          <a:p>
-            <a:r>
-              <a:rPr kumimoji="1" lang="ja-JP" altLang="en-US" dirty="0"/>
-              <a:t>枠組み: 判断（Judgment）と演算（Reckoning）</a:t>
-            </a:r>
-          </a:p>
-        </p:txBody>
-      </p:sp>
-      <p:pic>
-        <p:nvPicPr>
-          <p:cNvPr id="6" name="図 5">
-            <a:extLst>
-              <a:ext uri="{FF2B5EF4-FFF2-40B4-BE49-F238E27FC236}">
-                <a16:creationId xmlns:a16="http://schemas.microsoft.com/office/drawing/2014/main" id="{DD70937A-5EE4-27D0-92C7-AB41BE5F0861}"/>
-              </a:ext>
-            </a:extLst>
-          </p:cNvPr>
-          <p:cNvPicPr>
-            <a:picLocks noChangeAspect="1"/>
-          </p:cNvPicPr>
-          <p:nvPr/>
-        </p:nvPicPr>
-        <p:blipFill>
-          <a:blip r:embed="rId2">
-            <a:extLst>
-              <a:ext uri="{28A0092B-C50C-407E-A947-70E740481C1C}">
-                <a14:useLocalDpi xmlns:a14="http://schemas.microsoft.com/office/drawing/2010/main" val="0"/>
-              </a:ext>
-            </a:extLst>
-          </a:blip>
-          <a:srcRect l="14905" t="2673" r="15827"/>
-          <a:stretch>
-            <a:fillRect/>
-          </a:stretch>
-        </p:blipFill>
-        <p:spPr>
-          <a:xfrm>
-            <a:off x="7365268" y="4002065"/>
-            <a:ext cx="2540732" cy="2855935"/>
-          </a:xfrm>
-          <a:prstGeom prst="rect">
-            <a:avLst/>
-          </a:prstGeom>
-        </p:spPr>
-      </p:pic>
-    </p:spTree>
-  </p:cSld>
-  <p:clrMapOvr>
-    <a:masterClrMapping/>
-  </p:clrMapOvr>
-</p:sld>
-</file>
-
-<file path=ppt/slides/slide5.xml><?xml version="1.0" encoding="utf-8"?>
 <p:sld xmlns:a="http://schemas.openxmlformats.org/drawingml/2006/main" xmlns:r="http://schemas.openxmlformats.org/officeDocument/2006/relationships" xmlns:p="http://schemas.openxmlformats.org/presentationml/2006/main">
   <p:cSld>
     <p:spTree>
@@ -7227,7 +8447,7 @@
 </p:sld>
 </file>
 
-<file path=ppt/slides/slide6.xml><?xml version="1.0" encoding="utf-8"?>
+<file path=ppt/slides/slide5.xml><?xml version="1.0" encoding="utf-8"?>
 <p:sld xmlns:a="http://schemas.openxmlformats.org/drawingml/2006/main" xmlns:r="http://schemas.openxmlformats.org/officeDocument/2006/relationships" xmlns:p="http://schemas.openxmlformats.org/presentationml/2006/main">
   <p:cSld>
     <p:spTree>
@@ -7406,7 +8626,7 @@
 </p:sld>
 </file>
 
-<file path=ppt/slides/slide7.xml><?xml version="1.0" encoding="utf-8"?>
+<file path=ppt/slides/slide6.xml><?xml version="1.0" encoding="utf-8"?>
 <p:sld xmlns:a="http://schemas.openxmlformats.org/drawingml/2006/main" xmlns:r="http://schemas.openxmlformats.org/officeDocument/2006/relationships" xmlns:p="http://schemas.openxmlformats.org/presentationml/2006/main">
   <p:cSld>
     <p:spTree>
@@ -7442,7 +8662,7 @@
           <a:p>
             <a:r>
               <a:rPr kumimoji="1" lang="ja-JP" altLang="en-US" sz="2600" dirty="0"/>
-              <a:t>事例1　ドキュメントパイプライン</a:t>
+              <a:t>事例1 ドキュメントパイプライン</a:t>
             </a:r>
           </a:p>
         </p:txBody>
@@ -7479,12 +8699,18 @@
 </p:sld>
 </file>
 
-<file path=ppt/slides/slide8.xml><?xml version="1.0" encoding="utf-8"?>
+<file path=ppt/slides/slide7.xml><?xml version="1.0" encoding="utf-8"?>
 <p:sld xmlns:a="http://schemas.openxmlformats.org/drawingml/2006/main" xmlns:r="http://schemas.openxmlformats.org/officeDocument/2006/relationships" xmlns:p="http://schemas.openxmlformats.org/presentationml/2006/main">
   <p:cSld>
     <p:spTree>
       <p:nvGrpSpPr>
-        <p:cNvPr id="1" name=""/>
+        <p:cNvPr id="1" name="">
+          <a:extLst>
+            <a:ext uri="{FF2B5EF4-FFF2-40B4-BE49-F238E27FC236}">
+              <a16:creationId xmlns:a16="http://schemas.microsoft.com/office/drawing/2014/main" id="{82D0A4F3-BB96-ABB7-A25D-F8274FBEC769}"/>
+            </a:ext>
+          </a:extLst>
+        </p:cNvPr>
         <p:cNvGrpSpPr/>
         <p:nvPr/>
       </p:nvGrpSpPr>
@@ -7498,7 +8724,288 @@
       </p:grpSpPr>
       <p:sp>
         <p:nvSpPr>
-          <p:cNvPr id="2" name="コンテンツ プレースホルダー 1"/>
+          <p:cNvPr id="3" name="タイトル 2">
+            <a:extLst>
+              <a:ext uri="{FF2B5EF4-FFF2-40B4-BE49-F238E27FC236}">
+                <a16:creationId xmlns:a16="http://schemas.microsoft.com/office/drawing/2014/main" id="{6B1BCE6B-B974-89F0-C145-B0F4194776AF}"/>
+              </a:ext>
+            </a:extLst>
+          </p:cNvPr>
+          <p:cNvSpPr>
+            <a:spLocks noGrp="1"/>
+          </p:cNvSpPr>
+          <p:nvPr>
+            <p:ph type="title"/>
+          </p:nvPr>
+        </p:nvSpPr>
+        <p:spPr/>
+        <p:txBody>
+          <a:bodyPr/>
+          <a:lstStyle/>
+          <a:p>
+            <a:r>
+              <a:rPr kumimoji="1" lang="ja-JP" altLang="en-US" dirty="0"/>
+              <a:t>何を作った？　</a:t>
+            </a:r>
+          </a:p>
+        </p:txBody>
+      </p:sp>
+      <p:sp>
+        <p:nvSpPr>
+          <p:cNvPr id="4" name="コンテンツ プレースホルダー 3">
+            <a:extLst>
+              <a:ext uri="{FF2B5EF4-FFF2-40B4-BE49-F238E27FC236}">
+                <a16:creationId xmlns:a16="http://schemas.microsoft.com/office/drawing/2014/main" id="{0EF3FEA9-B607-4C46-39E7-9A5F65B08F50}"/>
+              </a:ext>
+            </a:extLst>
+          </p:cNvPr>
+          <p:cNvSpPr>
+            <a:spLocks noGrp="1"/>
+          </p:cNvSpPr>
+          <p:nvPr>
+            <p:ph idx="1"/>
+          </p:nvPr>
+        </p:nvSpPr>
+        <p:spPr>
+          <a:xfrm>
+            <a:off x="429960" y="981732"/>
+            <a:ext cx="8496300" cy="4894536"/>
+          </a:xfrm>
+        </p:spPr>
+        <p:txBody>
+          <a:bodyPr/>
+          <a:lstStyle/>
+          <a:p>
+            <a:r>
+              <a:rPr lang="ja-JP" altLang="en-US" dirty="0"/>
+              <a:t>ローカルから</a:t>
+            </a:r>
+            <a:r>
+              <a:rPr lang="en-US" altLang="ja-JP" dirty="0" err="1"/>
+              <a:t>Growi</a:t>
+            </a:r>
+            <a:r>
+              <a:rPr lang="ja-JP" altLang="en-US" dirty="0"/>
+              <a:t>を更新するための</a:t>
+            </a:r>
+            <a:r>
+              <a:rPr lang="en-US" altLang="ja-JP" dirty="0"/>
+              <a:t>CLI</a:t>
+            </a:r>
+            <a:r>
+              <a:rPr lang="ja-JP" altLang="en-US" dirty="0"/>
+              <a:t>ツール</a:t>
+            </a:r>
+          </a:p>
+        </p:txBody>
+      </p:sp>
+      <p:pic>
+        <p:nvPicPr>
+          <p:cNvPr id="7" name="図 6">
+            <a:extLst>
+              <a:ext uri="{FF2B5EF4-FFF2-40B4-BE49-F238E27FC236}">
+                <a16:creationId xmlns:a16="http://schemas.microsoft.com/office/drawing/2014/main" id="{C41B5B65-B564-20F1-EABD-9CB9998A816A}"/>
+              </a:ext>
+            </a:extLst>
+          </p:cNvPr>
+          <p:cNvPicPr>
+            <a:picLocks noChangeAspect="1"/>
+          </p:cNvPicPr>
+          <p:nvPr/>
+        </p:nvPicPr>
+        <p:blipFill>
+          <a:blip r:embed="rId2"/>
+          <a:stretch>
+            <a:fillRect/>
+          </a:stretch>
+        </p:blipFill>
+        <p:spPr>
+          <a:xfrm>
+            <a:off x="1289892" y="1427379"/>
+            <a:ext cx="7326216" cy="5430621"/>
+          </a:xfrm>
+          <a:prstGeom prst="rect">
+            <a:avLst/>
+          </a:prstGeom>
+        </p:spPr>
+      </p:pic>
+    </p:spTree>
+    <p:extLst>
+      <p:ext uri="{BB962C8B-B14F-4D97-AF65-F5344CB8AC3E}">
+        <p14:creationId xmlns:p14="http://schemas.microsoft.com/office/powerpoint/2010/main" val="1112190950"/>
+      </p:ext>
+    </p:extLst>
+  </p:cSld>
+  <p:clrMapOvr>
+    <a:masterClrMapping/>
+  </p:clrMapOvr>
+</p:sld>
+</file>
+
+<file path=ppt/slides/slide8.xml><?xml version="1.0" encoding="utf-8"?>
+<p:sld xmlns:a="http://schemas.openxmlformats.org/drawingml/2006/main" xmlns:r="http://schemas.openxmlformats.org/officeDocument/2006/relationships" xmlns:p="http://schemas.openxmlformats.org/presentationml/2006/main">
+  <p:cSld>
+    <p:spTree>
+      <p:nvGrpSpPr>
+        <p:cNvPr id="1" name="">
+          <a:extLst>
+            <a:ext uri="{FF2B5EF4-FFF2-40B4-BE49-F238E27FC236}">
+              <a16:creationId xmlns:a16="http://schemas.microsoft.com/office/drawing/2014/main" id="{D7C9E254-E99D-BA44-F8C7-33C2A2D7A941}"/>
+            </a:ext>
+          </a:extLst>
+        </p:cNvPr>
+        <p:cNvGrpSpPr/>
+        <p:nvPr/>
+      </p:nvGrpSpPr>
+      <p:grpSpPr>
+        <a:xfrm>
+          <a:off x="0" y="0"/>
+          <a:ext cx="0" cy="0"/>
+          <a:chOff x="0" y="0"/>
+          <a:chExt cx="0" cy="0"/>
+        </a:xfrm>
+      </p:grpSpPr>
+      <p:pic>
+        <p:nvPicPr>
+          <p:cNvPr id="5" name="コンテンツ プレースホルダー 4">
+            <a:extLst>
+              <a:ext uri="{FF2B5EF4-FFF2-40B4-BE49-F238E27FC236}">
+                <a16:creationId xmlns:a16="http://schemas.microsoft.com/office/drawing/2014/main" id="{775FFB37-601C-560C-CF7A-5414F9915E11}"/>
+              </a:ext>
+            </a:extLst>
+          </p:cNvPr>
+          <p:cNvPicPr>
+            <a:picLocks noGrp="1" noChangeAspect="1"/>
+          </p:cNvPicPr>
+          <p:nvPr>
+            <p:ph idx="1"/>
+          </p:nvPr>
+        </p:nvPicPr>
+        <p:blipFill>
+          <a:blip r:embed="rId2"/>
+          <a:stretch>
+            <a:fillRect/>
+          </a:stretch>
+        </p:blipFill>
+        <p:spPr>
+          <a:xfrm>
+            <a:off x="704850" y="1880828"/>
+            <a:ext cx="8496300" cy="4658826"/>
+          </a:xfrm>
+          <a:prstGeom prst="rect">
+            <a:avLst/>
+          </a:prstGeom>
+        </p:spPr>
+      </p:pic>
+      <p:sp>
+        <p:nvSpPr>
+          <p:cNvPr id="3" name="タイトル 2">
+            <a:extLst>
+              <a:ext uri="{FF2B5EF4-FFF2-40B4-BE49-F238E27FC236}">
+                <a16:creationId xmlns:a16="http://schemas.microsoft.com/office/drawing/2014/main" id="{E288EF09-2924-4D6D-BD7E-6B7213BCE29A}"/>
+              </a:ext>
+            </a:extLst>
+          </p:cNvPr>
+          <p:cNvSpPr>
+            <a:spLocks noGrp="1"/>
+          </p:cNvSpPr>
+          <p:nvPr>
+            <p:ph type="title"/>
+          </p:nvPr>
+        </p:nvSpPr>
+        <p:spPr/>
+        <p:txBody>
+          <a:bodyPr/>
+          <a:lstStyle/>
+          <a:p>
+            <a:r>
+              <a:rPr kumimoji="1" lang="ja-JP" altLang="en-US" dirty="0"/>
+              <a:t>何を作った？　</a:t>
+            </a:r>
+          </a:p>
+        </p:txBody>
+      </p:sp>
+      <p:sp>
+        <p:nvSpPr>
+          <p:cNvPr id="7" name="テキスト ボックス 6">
+            <a:extLst>
+              <a:ext uri="{FF2B5EF4-FFF2-40B4-BE49-F238E27FC236}">
+                <a16:creationId xmlns:a16="http://schemas.microsoft.com/office/drawing/2014/main" id="{DE7140A9-0E55-6B3A-0406-8696AE2F946C}"/>
+              </a:ext>
+            </a:extLst>
+          </p:cNvPr>
+          <p:cNvSpPr txBox="1"/>
+          <p:nvPr/>
+        </p:nvSpPr>
+        <p:spPr>
+          <a:xfrm>
+            <a:off x="560512" y="1232756"/>
+            <a:ext cx="4951476" cy="369332"/>
+          </a:xfrm>
+          <a:prstGeom prst="rect">
+            <a:avLst/>
+          </a:prstGeom>
+          <a:noFill/>
+        </p:spPr>
+        <p:txBody>
+          <a:bodyPr wrap="square">
+            <a:spAutoFit/>
+          </a:bodyPr>
+          <a:lstStyle/>
+          <a:p>
+            <a:r>
+              <a:rPr kumimoji="1" lang="ja-JP" altLang="en-US" dirty="0"/>
+              <a:t>運用フロー</a:t>
+            </a:r>
+            <a:endParaRPr lang="ja-JP" altLang="en-US" dirty="0"/>
+          </a:p>
+        </p:txBody>
+      </p:sp>
+    </p:spTree>
+    <p:extLst>
+      <p:ext uri="{BB962C8B-B14F-4D97-AF65-F5344CB8AC3E}">
+        <p14:creationId xmlns:p14="http://schemas.microsoft.com/office/powerpoint/2010/main" val="33621053"/>
+      </p:ext>
+    </p:extLst>
+  </p:cSld>
+  <p:clrMapOvr>
+    <a:masterClrMapping/>
+  </p:clrMapOvr>
+</p:sld>
+</file>
+
+<file path=ppt/slides/slide9.xml><?xml version="1.0" encoding="utf-8"?>
+<p:sld xmlns:a="http://schemas.openxmlformats.org/drawingml/2006/main" xmlns:r="http://schemas.openxmlformats.org/officeDocument/2006/relationships" xmlns:p="http://schemas.openxmlformats.org/presentationml/2006/main">
+  <p:cSld>
+    <p:spTree>
+      <p:nvGrpSpPr>
+        <p:cNvPr id="1" name="">
+          <a:extLst>
+            <a:ext uri="{FF2B5EF4-FFF2-40B4-BE49-F238E27FC236}">
+              <a16:creationId xmlns:a16="http://schemas.microsoft.com/office/drawing/2014/main" id="{248FE18A-DEB4-C334-3883-E6996D25700A}"/>
+            </a:ext>
+          </a:extLst>
+        </p:cNvPr>
+        <p:cNvGrpSpPr/>
+        <p:nvPr/>
+      </p:nvGrpSpPr>
+      <p:grpSpPr>
+        <a:xfrm>
+          <a:off x="0" y="0"/>
+          <a:ext cx="0" cy="0"/>
+          <a:chOff x="0" y="0"/>
+          <a:chExt cx="0" cy="0"/>
+        </a:xfrm>
+      </p:grpSpPr>
+      <p:sp>
+        <p:nvSpPr>
+          <p:cNvPr id="2" name="コンテンツ プレースホルダー 1">
+            <a:extLst>
+              <a:ext uri="{FF2B5EF4-FFF2-40B4-BE49-F238E27FC236}">
+                <a16:creationId xmlns:a16="http://schemas.microsoft.com/office/drawing/2014/main" id="{8EB74BD0-AFE3-3A9C-7489-3AF59C2E08E8}"/>
+              </a:ext>
+            </a:extLst>
+          </p:cNvPr>
           <p:cNvSpPr>
             <a:spLocks noGrp="1"/>
           </p:cNvSpPr>
@@ -7514,148 +9021,159 @@
           <a:lstStyle/>
           <a:p>
             <a:r>
-              <a:rPr kumimoji="1" lang="ja-JP" altLang="en-US" sz="1600" dirty="0"/>
-              <a:t>実装と Wiki が一致しない（ドキュメントが腐る）</a:t>
-            </a:r>
+              <a:rPr lang="ja-JP" altLang="en-US" sz="1800" b="1" dirty="0"/>
+              <a:t>制約:</a:t>
+            </a:r>
+            <a:endParaRPr kumimoji="1" lang="en-US" altLang="ja-JP" sz="1800" dirty="0"/>
+          </a:p>
+          <a:p>
+            <a:pPr lvl="1"/>
+            <a:r>
+              <a:rPr kumimoji="1" lang="ja-JP" altLang="en-US" sz="1800" dirty="0"/>
+              <a:t>GROWI </a:t>
+            </a:r>
+            <a:r>
+              <a:rPr lang="ja-JP" altLang="en-US" sz="1800" dirty="0"/>
+              <a:t>は </a:t>
+            </a:r>
+            <a:r>
+              <a:rPr kumimoji="1" lang="ja-JP" altLang="en-US" sz="1800" dirty="0"/>
+              <a:t>社内 </a:t>
+            </a:r>
+            <a:r>
+              <a:rPr lang="ja-JP" altLang="en-US" sz="1800" dirty="0"/>
+              <a:t>ネットワークからしかアクセス不可</a:t>
+            </a:r>
+            <a:r>
+              <a:rPr kumimoji="1" lang="ja-JP" altLang="en-US" sz="1800" dirty="0"/>
+              <a:t>       </a:t>
+            </a:r>
+            <a:br>
+              <a:rPr kumimoji="1" lang="en-US" altLang="ja-JP" sz="1800" dirty="0"/>
+            </a:br>
+            <a:r>
+              <a:rPr lang="ja-JP" altLang="en-US" sz="1800" dirty="0"/>
+              <a:t>🧑‍💻</a:t>
+            </a:r>
+            <a:r>
+              <a:rPr kumimoji="1" lang="ja-JP" altLang="en-US" sz="1800" dirty="0"/>
+              <a:t>判断 → selfhost ランナー</a:t>
+            </a:r>
+          </a:p>
+          <a:p>
+            <a:pPr lvl="1"/>
+            <a:r>
+              <a:rPr kumimoji="1" lang="ja-JP" altLang="en-US" sz="1800" dirty="0"/>
+              <a:t>Git 画像でリポジトリが重い   </a:t>
+            </a:r>
+            <a:br>
+              <a:rPr kumimoji="1" lang="en-US" altLang="ja-JP" sz="1800" dirty="0"/>
+            </a:br>
+            <a:r>
+              <a:rPr lang="ja-JP" altLang="en-US" sz="1800" dirty="0"/>
+              <a:t>🧑‍💻</a:t>
+            </a:r>
+            <a:r>
+              <a:rPr kumimoji="1" lang="ja-JP" altLang="en-US" sz="1800" dirty="0"/>
+              <a:t>判断 → Azure Blob ストレージに保存してリンクを張る</a:t>
+            </a:r>
+          </a:p>
+          <a:p>
+            <a:pPr lvl="1"/>
+            <a:r>
+              <a:rPr kumimoji="1" lang="ja-JP" altLang="en-US" sz="1800" dirty="0"/>
+              <a:t>Blob に格納する手順が面倒   </a:t>
+            </a:r>
+            <a:br>
+              <a:rPr kumimoji="1" lang="en-US" altLang="ja-JP" sz="1800" dirty="0"/>
+            </a:br>
+            <a:r>
+              <a:rPr lang="ja-JP" altLang="en-US" sz="1800" dirty="0"/>
+              <a:t>🧑‍💻</a:t>
+            </a:r>
+            <a:r>
+              <a:rPr kumimoji="1" lang="ja-JP" altLang="en-US" sz="1800" dirty="0"/>
+              <a:t>判断 → CLI スクリプト + ショートカットで実行</a:t>
+            </a:r>
+            <a:endParaRPr kumimoji="1" lang="en-US" altLang="ja-JP" sz="1800" dirty="0"/>
+          </a:p>
+          <a:p>
+            <a:pPr lvl="1"/>
+            <a:r>
+              <a:rPr lang="ja-JP" altLang="en-US" sz="1800" dirty="0"/>
+              <a:t>品質管理部の方が</a:t>
+            </a:r>
+            <a:r>
+              <a:rPr lang="en-US" altLang="ja-JP" sz="1800" dirty="0"/>
+              <a:t>Wiki</a:t>
+            </a:r>
+            <a:r>
+              <a:rPr lang="ja-JP" altLang="en-US" sz="1800" dirty="0"/>
+              <a:t>編集したい場合は？ </a:t>
+            </a:r>
+            <a:br>
+              <a:rPr lang="en-US" altLang="ja-JP" sz="1800" dirty="0"/>
+            </a:br>
+            <a:r>
+              <a:rPr lang="ja-JP" altLang="en-US" sz="1800" dirty="0"/>
+              <a:t>🧑‍💻判断 → </a:t>
+            </a:r>
+            <a:r>
+              <a:rPr lang="en-US" altLang="ja-JP" sz="1800" dirty="0" err="1"/>
+              <a:t>Growi</a:t>
+            </a:r>
+            <a:r>
+              <a:rPr lang="ja-JP" altLang="en-US" sz="1800" dirty="0"/>
+              <a:t>からリポジトリへのの取り込み機能</a:t>
+            </a:r>
+            <a:endParaRPr lang="en-US" altLang="ja-JP" sz="1800" dirty="0"/>
+          </a:p>
+          <a:p>
+            <a:pPr marL="257173" lvl="1" indent="0">
+              <a:buNone/>
+            </a:pPr>
+            <a:endParaRPr lang="en-US" altLang="ja-JP" sz="1800" dirty="0"/>
+          </a:p>
+          <a:p>
+            <a:pPr marL="257173" lvl="1" indent="0">
+              <a:buNone/>
+            </a:pPr>
+            <a:r>
+              <a:rPr lang="ja-JP" altLang="en-US" sz="1800" dirty="0"/>
+              <a:t>決めてしまえば、</a:t>
+            </a:r>
+            <a:r>
+              <a:rPr lang="en-US" altLang="ja-JP" sz="1800" dirty="0"/>
+              <a:t>AI</a:t>
+            </a:r>
+            <a:r>
+              <a:rPr lang="ja-JP" altLang="en-US" sz="1800" dirty="0"/>
+              <a:t>🤖がサクッと実装してくれる</a:t>
+            </a:r>
+            <a:r>
+              <a:rPr lang="en-US" altLang="ja-JP" sz="1800" dirty="0"/>
+              <a:t>(</a:t>
+            </a:r>
+            <a:r>
+              <a:rPr lang="ja-JP" altLang="en-US" sz="1800" dirty="0"/>
+              <a:t>演算）</a:t>
+            </a:r>
+            <a:br>
+              <a:rPr lang="en-US" altLang="ja-JP" sz="1600" dirty="0"/>
+            </a:br>
             <a:endParaRPr kumimoji="1" lang="en-US" altLang="ja-JP" sz="1600" dirty="0"/>
-          </a:p>
-          <a:p>
-            <a:r>
-              <a:rPr kumimoji="1" lang="ja-JP" altLang="en-US" sz="1600" dirty="0"/>
-              <a:t>ソースコードを </a:t>
-            </a:r>
-            <a:r>
-              <a:rPr kumimoji="1" lang="ja-JP" altLang="en-US" sz="1600" b="1" dirty="0"/>
-              <a:t>S</a:t>
-            </a:r>
-            <a:r>
-              <a:rPr kumimoji="1" lang="en-US" altLang="ja-JP" sz="1600" b="1" dirty="0"/>
-              <a:t>ingle </a:t>
-            </a:r>
-            <a:r>
-              <a:rPr kumimoji="1" lang="ja-JP" altLang="en-US" sz="1600" b="1" dirty="0"/>
-              <a:t>S</a:t>
-            </a:r>
-            <a:r>
-              <a:rPr kumimoji="1" lang="en-US" altLang="ja-JP" sz="1600" b="1" dirty="0" err="1"/>
-              <a:t>ource</a:t>
-            </a:r>
-            <a:r>
-              <a:rPr kumimoji="1" lang="en-US" altLang="ja-JP" sz="1600" b="1" dirty="0"/>
-              <a:t> </a:t>
-            </a:r>
-            <a:r>
-              <a:rPr kumimoji="1" lang="ja-JP" altLang="en-US" sz="1600" b="1" dirty="0"/>
-              <a:t>O</a:t>
-            </a:r>
-            <a:r>
-              <a:rPr kumimoji="1" lang="en-US" altLang="ja-JP" sz="1600" b="1" dirty="0"/>
-              <a:t>f </a:t>
-            </a:r>
-            <a:r>
-              <a:rPr kumimoji="1" lang="ja-JP" altLang="en-US" sz="1600" b="1" dirty="0"/>
-              <a:t>T</a:t>
-            </a:r>
-            <a:r>
-              <a:rPr kumimoji="1" lang="en-US" altLang="ja-JP" sz="1600" b="1" dirty="0" err="1"/>
-              <a:t>rueth</a:t>
-            </a:r>
-            <a:r>
-              <a:rPr kumimoji="1" lang="ja-JP" altLang="en-US" sz="1600" dirty="0"/>
-              <a:t>（唯一の真実） にしたいが、</a:t>
-            </a:r>
-            <a:br>
-              <a:rPr kumimoji="1" lang="en-US" altLang="ja-JP" sz="1600" dirty="0"/>
-            </a:br>
-            <a:r>
-              <a:rPr kumimoji="1" lang="ja-JP" altLang="en-US" sz="1600" dirty="0"/>
-              <a:t>他部門連携では Wiki が必要</a:t>
-            </a:r>
-          </a:p>
-          <a:p>
-            <a:endParaRPr lang="ja-JP" altLang="en-US" dirty="0"/>
-          </a:p>
-          <a:p>
-            <a:r>
-              <a:rPr kumimoji="1" lang="ja-JP" altLang="en-US" sz="1600" dirty="0"/>
-              <a:t>Issue / Redmine / 実装 / Wiki</a:t>
-            </a:r>
-            <a:r>
-              <a:rPr kumimoji="1" lang="en-US" altLang="ja-JP" sz="1600" dirty="0"/>
-              <a:t>s</a:t>
-            </a:r>
-            <a:endParaRPr kumimoji="1" lang="ja-JP" altLang="en-US" sz="1600" dirty="0"/>
-          </a:p>
-          <a:p>
-            <a:pPr lvl="1"/>
-            <a:r>
-              <a:rPr kumimoji="1" lang="ja-JP" altLang="en-US" sz="1600" dirty="0"/>
-              <a:t>→ 同じことを何度も書く </a:t>
-            </a:r>
-            <a:endParaRPr kumimoji="1" lang="en-US" altLang="ja-JP" sz="1600" dirty="0"/>
-          </a:p>
-          <a:p>
-            <a:pPr lvl="1"/>
-            <a:r>
-              <a:rPr kumimoji="1" lang="ja-JP" altLang="en-US" sz="1600" dirty="0"/>
-              <a:t>→ どこかで整合しなくなる</a:t>
-            </a:r>
-            <a:endParaRPr kumimoji="1" lang="en-US" altLang="ja-JP" sz="1600" dirty="0"/>
-          </a:p>
-          <a:p>
-            <a:pPr lvl="1"/>
-            <a:endParaRPr lang="en-US" altLang="ja-JP" sz="1600" dirty="0"/>
-          </a:p>
-          <a:p>
-            <a:pPr lvl="1"/>
-            <a:endParaRPr lang="en-US" altLang="ja-JP" sz="1600" dirty="0"/>
-          </a:p>
-          <a:p>
-            <a:r>
-              <a:rPr lang="ja-JP" altLang="en-US" b="1" dirty="0"/>
-              <a:t>GitHub も Redmine も GROWI も </a:t>
-            </a:r>
-            <a:r>
-              <a:rPr lang="en-US" altLang="ja-JP" b="1" dirty="0"/>
-              <a:t>CLI</a:t>
-            </a:r>
-            <a:r>
-              <a:rPr lang="ja-JP" altLang="en-US" b="1" dirty="0"/>
-              <a:t>から更新できる ！　</a:t>
-            </a:r>
-            <a:br>
-              <a:rPr lang="en-US" altLang="ja-JP" dirty="0"/>
-            </a:br>
-            <a:r>
-              <a:rPr lang="ja-JP" altLang="en-US" sz="1600" dirty="0"/>
-              <a:t>→ </a:t>
-            </a:r>
-            <a:r>
-              <a:rPr lang="en-US" altLang="ja-JP" sz="1600" dirty="0"/>
-              <a:t>AI</a:t>
-            </a:r>
-            <a:r>
-              <a:rPr lang="ja-JP" altLang="en-US" sz="1600" dirty="0"/>
-              <a:t>エージェント</a:t>
-            </a:r>
-            <a:r>
-              <a:rPr lang="ja-JP" altLang="en-US" dirty="0"/>
-              <a:t>🤖</a:t>
-            </a:r>
-            <a:r>
-              <a:rPr lang="ja-JP" altLang="en-US" sz="1600" dirty="0"/>
-              <a:t>を利用して解決したい</a:t>
-            </a:r>
-          </a:p>
-          <a:p>
-            <a:pPr lvl="1"/>
-            <a:endParaRPr lang="ja-JP" altLang="en-US" dirty="0"/>
           </a:p>
         </p:txBody>
       </p:sp>
       <p:sp>
         <p:nvSpPr>
-          <p:cNvPr id="3" name="タイトル 2"/>
+          <p:cNvPr id="3" name="タイトル 2">
+            <a:extLst>
+              <a:ext uri="{FF2B5EF4-FFF2-40B4-BE49-F238E27FC236}">
+                <a16:creationId xmlns:a16="http://schemas.microsoft.com/office/drawing/2014/main" id="{7AE0AA9F-A870-D717-1DDA-AB8A15A43A44}"/>
+              </a:ext>
+            </a:extLst>
+          </p:cNvPr>
           <p:cNvSpPr>
             <a:spLocks noGrp="1"/>
           </p:cNvSpPr>
@@ -7670,137 +9188,17 @@
           <a:p>
             <a:r>
               <a:rPr kumimoji="1" lang="ja-JP" altLang="en-US" dirty="0"/>
-              <a:t>きっかけ</a:t>
+              <a:t>制約：何を気にする必要があったか</a:t>
             </a:r>
           </a:p>
         </p:txBody>
       </p:sp>
     </p:spTree>
-  </p:cSld>
-  <p:clrMapOvr>
-    <a:masterClrMapping/>
-  </p:clrMapOvr>
-</p:sld>
-</file>
-
-<file path=ppt/slides/slide9.xml><?xml version="1.0" encoding="utf-8"?>
-<p:sld xmlns:a="http://schemas.openxmlformats.org/drawingml/2006/main" xmlns:r="http://schemas.openxmlformats.org/officeDocument/2006/relationships" xmlns:p="http://schemas.openxmlformats.org/presentationml/2006/main">
-  <p:cSld>
-    <p:spTree>
-      <p:nvGrpSpPr>
-        <p:cNvPr id="1" name=""/>
-        <p:cNvGrpSpPr/>
-        <p:nvPr/>
-      </p:nvGrpSpPr>
-      <p:grpSpPr>
-        <a:xfrm>
-          <a:off x="0" y="0"/>
-          <a:ext cx="0" cy="0"/>
-          <a:chOff x="0" y="0"/>
-          <a:chExt cx="0" cy="0"/>
-        </a:xfrm>
-      </p:grpSpPr>
-      <p:sp>
-        <p:nvSpPr>
-          <p:cNvPr id="2" name="コンテンツ プレースホルダー 1"/>
-          <p:cNvSpPr>
-            <a:spLocks noGrp="1"/>
-          </p:cNvSpPr>
-          <p:nvPr>
-            <p:ph idx="1"/>
-          </p:nvPr>
-        </p:nvSpPr>
-        <p:spPr/>
-        <p:txBody>
-          <a:bodyPr>
-            <a:normAutofit/>
-          </a:bodyPr>
-          <a:lstStyle/>
-          <a:p>
-            <a:r>
-              <a:rPr kumimoji="1" lang="ja-JP" altLang="en-US" sz="1600" dirty="0"/>
-              <a:t>Claude Code で構築した統合 CLI ツール（TypeScript）</a:t>
-            </a:r>
-          </a:p>
-          <a:p>
-            <a:endParaRPr lang="ja-JP" altLang="en-US" dirty="0"/>
-          </a:p>
-          <a:p>
-            <a:r>
-              <a:rPr kumimoji="1" lang="ja-JP" altLang="en-US" sz="1600" dirty="0"/>
-              <a:t>docs:check        frontmatter 検証・パス重複チェック</a:t>
-            </a:r>
-          </a:p>
-          <a:p>
-            <a:r>
-              <a:rPr kumimoji="1" lang="ja-JP" altLang="en-US" sz="1600" dirty="0"/>
-              <a:t>docs:publish      Git → GROWI 同期（単体 / 一括 / dry-run）</a:t>
-            </a:r>
-          </a:p>
-          <a:p>
-            <a:r>
-              <a:rPr kumimoji="1" lang="ja-JP" altLang="en-US" sz="1600" dirty="0"/>
-              <a:t>docs:import:page  GROWI → Git 取り込み（画像を Blob に自動移行）</a:t>
-            </a:r>
-          </a:p>
-          <a:p>
-            <a:r>
-              <a:rPr kumimoji="1" lang="ja-JP" altLang="en-US" sz="1600" dirty="0"/>
-              <a:t>docs:import:tree  GROWI ツリー一括取り込み</a:t>
-            </a:r>
-          </a:p>
-          <a:p>
-            <a:r>
-              <a:rPr kumimoji="1" lang="ja-JP" altLang="en-US" sz="1600" dirty="0"/>
-              <a:t>docs:image:paste  クリップボード画像 → Azure Blob → Markdown リンク</a:t>
-            </a:r>
-          </a:p>
-          <a:p>
-            <a:r>
-              <a:rPr kumimoji="1" lang="ja-JP" altLang="en-US" sz="1600" dirty="0"/>
-              <a:t>docs:image:upload ローカル画像ファイル → Azure Blob</a:t>
-            </a:r>
-          </a:p>
-          <a:p>
-            <a:endParaRPr lang="ja-JP" altLang="en-US" dirty="0"/>
-          </a:p>
-          <a:p>
-            <a:r>
-              <a:rPr kumimoji="1" lang="ja-JP" altLang="en-US" sz="1600" dirty="0"/>
-              <a:t>各 Markdown に frontmatter でメタデータを持たせる（設定ファイル不要）</a:t>
-            </a:r>
-          </a:p>
-          <a:p>
-            <a:r>
-              <a:rPr kumimoji="1" lang="ja-JP" altLang="en-US" sz="1600" dirty="0"/>
-              <a:t>画像貼り付けは VSCode ショートカット（Ctrl+Alt+V）で完結</a:t>
-            </a:r>
-          </a:p>
-        </p:txBody>
-      </p:sp>
-      <p:sp>
-        <p:nvSpPr>
-          <p:cNvPr id="3" name="タイトル 2"/>
-          <p:cNvSpPr>
-            <a:spLocks noGrp="1"/>
-          </p:cNvSpPr>
-          <p:nvPr>
-            <p:ph type="title"/>
-          </p:nvPr>
-        </p:nvSpPr>
-        <p:spPr/>
-        <p:txBody>
-          <a:bodyPr/>
-          <a:lstStyle/>
-          <a:p>
-            <a:r>
-              <a:rPr kumimoji="1" lang="ja-JP" altLang="en-US" dirty="0"/>
-              <a:t>演算（Reckoning）— growi-docs CLI</a:t>
-            </a:r>
-          </a:p>
-        </p:txBody>
-      </p:sp>
-    </p:spTree>
+    <p:extLst>
+      <p:ext uri="{BB962C8B-B14F-4D97-AF65-F5344CB8AC3E}">
+        <p14:creationId xmlns:p14="http://schemas.microsoft.com/office/powerpoint/2010/main" val="207118078"/>
+      </p:ext>
+    </p:extLst>
   </p:cSld>
   <p:clrMapOvr>
     <a:masterClrMapping/>

--- a/TechMeeting202604/techmeeting20260406.pptx
+++ b/TechMeeting202604/techmeeting20260406.pptx
@@ -5,42 +5,44 @@
     <p:sldMasterId id="2147483660" r:id="rId1"/>
   </p:sldMasterIdLst>
   <p:notesMasterIdLst>
-    <p:notesMasterId r:id="rId32"/>
+    <p:notesMasterId r:id="rId34"/>
   </p:notesMasterIdLst>
   <p:handoutMasterIdLst>
-    <p:handoutMasterId r:id="rId33"/>
+    <p:handoutMasterId r:id="rId35"/>
   </p:handoutMasterIdLst>
   <p:sldIdLst>
     <p:sldId id="318" r:id="rId2"/>
     <p:sldId id="281" r:id="rId3"/>
-    <p:sldId id="312" r:id="rId4"/>
-    <p:sldId id="338" r:id="rId5"/>
-    <p:sldId id="319" r:id="rId6"/>
-    <p:sldId id="321" r:id="rId7"/>
-    <p:sldId id="355" r:id="rId8"/>
-    <p:sldId id="340" r:id="rId9"/>
-    <p:sldId id="354" r:id="rId10"/>
-    <p:sldId id="326" r:id="rId11"/>
-    <p:sldId id="323" r:id="rId12"/>
-    <p:sldId id="327" r:id="rId13"/>
-    <p:sldId id="330" r:id="rId14"/>
-    <p:sldId id="345" r:id="rId15"/>
-    <p:sldId id="347" r:id="rId16"/>
-    <p:sldId id="348" r:id="rId17"/>
-    <p:sldId id="346" r:id="rId18"/>
-    <p:sldId id="344" r:id="rId19"/>
-    <p:sldId id="349" r:id="rId20"/>
-    <p:sldId id="350" r:id="rId21"/>
-    <p:sldId id="331" r:id="rId22"/>
-    <p:sldId id="352" r:id="rId23"/>
-    <p:sldId id="332" r:id="rId24"/>
-    <p:sldId id="343" r:id="rId25"/>
-    <p:sldId id="342" r:id="rId26"/>
-    <p:sldId id="333" r:id="rId27"/>
-    <p:sldId id="337" r:id="rId28"/>
-    <p:sldId id="339" r:id="rId29"/>
-    <p:sldId id="334" r:id="rId30"/>
-    <p:sldId id="341" r:id="rId31"/>
+    <p:sldId id="321" r:id="rId4"/>
+    <p:sldId id="323" r:id="rId5"/>
+    <p:sldId id="355" r:id="rId6"/>
+    <p:sldId id="340" r:id="rId7"/>
+    <p:sldId id="356" r:id="rId8"/>
+    <p:sldId id="326" r:id="rId9"/>
+    <p:sldId id="327" r:id="rId10"/>
+    <p:sldId id="330" r:id="rId11"/>
+    <p:sldId id="358" r:id="rId12"/>
+    <p:sldId id="347" r:id="rId13"/>
+    <p:sldId id="348" r:id="rId14"/>
+    <p:sldId id="346" r:id="rId15"/>
+    <p:sldId id="344" r:id="rId16"/>
+    <p:sldId id="359" r:id="rId17"/>
+    <p:sldId id="349" r:id="rId18"/>
+    <p:sldId id="350" r:id="rId19"/>
+    <p:sldId id="332" r:id="rId20"/>
+    <p:sldId id="360" r:id="rId21"/>
+    <p:sldId id="343" r:id="rId22"/>
+    <p:sldId id="342" r:id="rId23"/>
+    <p:sldId id="337" r:id="rId24"/>
+    <p:sldId id="312" r:id="rId25"/>
+    <p:sldId id="319" r:id="rId26"/>
+    <p:sldId id="331" r:id="rId27"/>
+    <p:sldId id="333" r:id="rId28"/>
+    <p:sldId id="357" r:id="rId29"/>
+    <p:sldId id="338" r:id="rId30"/>
+    <p:sldId id="339" r:id="rId31"/>
+    <p:sldId id="334" r:id="rId32"/>
+    <p:sldId id="341" r:id="rId33"/>
   </p:sldIdLst>
   <p:sldSz cx="9906000" cy="6858000" type="A4"/>
   <p:notesSz cx="6735763" cy="9866313"/>
@@ -808,7 +810,7 @@
           <a:p>
             <a:fld id="{FB2DADC9-84AC-47A0-A132-06E0329E8A4A}" type="datetimeFigureOut">
               <a:rPr kumimoji="1" lang="ja-JP" altLang="en-US" smtClean="0"/>
-              <a:t>2026/4/3</a:t>
+              <a:t>2026/4/4</a:t>
             </a:fld>
             <a:endParaRPr kumimoji="1" lang="ja-JP" altLang="en-US"/>
           </a:p>
@@ -985,7 +987,7 @@
           <a:p>
             <a:fld id="{A532AB89-1C3C-45F3-9E77-B76890C91663}" type="datetimeFigureOut">
               <a:rPr kumimoji="1" lang="ja-JP" altLang="en-US" smtClean="0"/>
-              <a:t>2026/4/3</a:t>
+              <a:t>2026/4/4</a:t>
             </a:fld>
             <a:endParaRPr kumimoji="1" lang="ja-JP" altLang="en-US"/>
           </a:p>
@@ -3671,7 +3673,7 @@
           <a:p>
             <a:r>
               <a:rPr kumimoji="1" lang="ja-JP" altLang="en-US" sz="1300" dirty="0"/>
-              <a:t>品質管理クラウドチーム　2026.04</a:t>
+              <a:t>品質管理クラウド　森</a:t>
             </a:r>
           </a:p>
         </p:txBody>
@@ -3685,459 +3687,6 @@
 </file>
 
 <file path=ppt/slides/slide10.xml><?xml version="1.0" encoding="utf-8"?>
-<p:sld xmlns:a="http://schemas.openxmlformats.org/drawingml/2006/main" xmlns:r="http://schemas.openxmlformats.org/officeDocument/2006/relationships" xmlns:p="http://schemas.openxmlformats.org/presentationml/2006/main">
-  <p:cSld>
-    <p:spTree>
-      <p:nvGrpSpPr>
-        <p:cNvPr id="1" name=""/>
-        <p:cNvGrpSpPr/>
-        <p:nvPr/>
-      </p:nvGrpSpPr>
-      <p:grpSpPr>
-        <a:xfrm>
-          <a:off x="0" y="0"/>
-          <a:ext cx="0" cy="0"/>
-          <a:chOff x="0" y="0"/>
-          <a:chExt cx="0" cy="0"/>
-        </a:xfrm>
-      </p:grpSpPr>
-      <p:sp>
-        <p:nvSpPr>
-          <p:cNvPr id="2" name="コンテンツ プレースホルダー 1"/>
-          <p:cNvSpPr>
-            <a:spLocks noGrp="1"/>
-          </p:cNvSpPr>
-          <p:nvPr>
-            <p:ph idx="1"/>
-          </p:nvPr>
-        </p:nvSpPr>
-        <p:spPr>
-          <a:xfrm>
-            <a:off x="308484" y="1282427"/>
-            <a:ext cx="8892666" cy="4894536"/>
-          </a:xfrm>
-        </p:spPr>
-        <p:txBody>
-          <a:bodyPr>
-            <a:normAutofit/>
-          </a:bodyPr>
-          <a:lstStyle/>
-          <a:p>
-            <a:pPr lvl="1"/>
-            <a:r>
-              <a:rPr lang="ja-JP" altLang="en-US" sz="1600" b="1" dirty="0"/>
-              <a:t>チームの作業フローを決定</a:t>
-            </a:r>
-            <a:r>
-              <a:rPr lang="ja-JP" altLang="en-US" sz="1600" dirty="0"/>
-              <a:t>する</a:t>
-            </a:r>
-            <a:endParaRPr lang="en-US" altLang="ja-JP" sz="1600" dirty="0"/>
-          </a:p>
-          <a:p>
-            <a:pPr lvl="1"/>
-            <a:r>
-              <a:rPr lang="ja-JP" altLang="en-US" sz="1600" dirty="0"/>
-              <a:t>必要なツール作成の</a:t>
-            </a:r>
-            <a:r>
-              <a:rPr lang="ja-JP" altLang="en-US" sz="1600" b="1" dirty="0"/>
-              <a:t>指示</a:t>
-            </a:r>
-            <a:r>
-              <a:rPr lang="ja-JP" altLang="en-US" sz="1600" dirty="0"/>
-              <a:t>を出す</a:t>
-            </a:r>
-            <a:endParaRPr lang="en-US" altLang="ja-JP" sz="1600" dirty="0"/>
-          </a:p>
-          <a:p>
-            <a:pPr marL="257173" lvl="1" indent="0" algn="ctr">
-              <a:buNone/>
-            </a:pPr>
-            <a:endParaRPr lang="en-US" altLang="ja-JP" sz="1600" dirty="0"/>
-          </a:p>
-          <a:p>
-            <a:pPr marL="257173" lvl="1" indent="0" algn="ctr">
-              <a:buNone/>
-            </a:pPr>
-            <a:endParaRPr lang="en-US" altLang="ja-JP" sz="1600" dirty="0"/>
-          </a:p>
-          <a:p>
-            <a:pPr marL="257173" lvl="1" indent="0">
-              <a:buNone/>
-            </a:pPr>
-            <a:r>
-              <a:rPr lang="ja-JP" altLang="en-US" sz="2000" dirty="0"/>
-              <a:t>　　</a:t>
-            </a:r>
-            <a:r>
-              <a:rPr lang="ja-JP" altLang="en-US" sz="2600" dirty="0"/>
-              <a:t>設計🧑‍💻　　　　   設計🧑‍💻　　     　　   　設計🧑‍💻</a:t>
-            </a:r>
-            <a:br>
-              <a:rPr lang="en-US" altLang="ja-JP" sz="2600" dirty="0"/>
-            </a:br>
-            <a:r>
-              <a:rPr lang="ja-JP" altLang="en-US" sz="2000" dirty="0"/>
-              <a:t>　　 ↓ </a:t>
-            </a:r>
-            <a:r>
-              <a:rPr lang="ja-JP" altLang="en-US" sz="1700" dirty="0"/>
-              <a:t>フローを決める</a:t>
-            </a:r>
-            <a:r>
-              <a:rPr lang="ja-JP" altLang="en-US" sz="2000" dirty="0"/>
-              <a:t>　        ↓指示 　　　　　　　　         ↓指示</a:t>
-            </a:r>
-            <a:endParaRPr lang="en-US" altLang="ja-JP" sz="2000" dirty="0"/>
-          </a:p>
-          <a:p>
-            <a:pPr marL="257173" lvl="1" indent="0">
-              <a:buNone/>
-            </a:pPr>
-            <a:r>
-              <a:rPr lang="ja-JP" altLang="en-US" sz="2000" dirty="0"/>
-              <a:t>　　 ↓　　　　　　            ↓</a:t>
-            </a:r>
-            <a:r>
-              <a:rPr lang="ja-JP" altLang="en-US" sz="1400" dirty="0"/>
-              <a:t>ツールを作成</a:t>
-            </a:r>
-            <a:r>
-              <a:rPr lang="ja-JP" altLang="en-US" sz="1800" dirty="0"/>
-              <a:t>🤖</a:t>
-            </a:r>
-            <a:r>
-              <a:rPr lang="ja-JP" altLang="en-US" sz="1200" dirty="0"/>
-              <a:t>　　　　　　　　</a:t>
-            </a:r>
-            <a:r>
-              <a:rPr lang="ja-JP" altLang="en-US" sz="1900" dirty="0"/>
-              <a:t>          ↓</a:t>
-            </a:r>
-            <a:r>
-              <a:rPr lang="ja-JP" altLang="en-US" sz="1300" dirty="0"/>
-              <a:t>ツールを作成</a:t>
-            </a:r>
-            <a:r>
-              <a:rPr lang="ja-JP" altLang="en-US" sz="1700" dirty="0"/>
-              <a:t>🤖</a:t>
-            </a:r>
-            <a:endParaRPr lang="en-US" altLang="ja-JP" sz="2000" dirty="0"/>
-          </a:p>
-          <a:p>
-            <a:pPr marL="257173" lvl="1" indent="0">
-              <a:buNone/>
-            </a:pPr>
-            <a:r>
-              <a:rPr lang="ja-JP" altLang="en-US" sz="2000" dirty="0"/>
-              <a:t>「</a:t>
-            </a:r>
-            <a:r>
-              <a:rPr lang="ja-JP" altLang="en-US" sz="2400" dirty="0"/>
-              <a:t>🧑‍💻</a:t>
-            </a:r>
-            <a:r>
-              <a:rPr lang="ja-JP" altLang="en-US" sz="1600" dirty="0"/>
-              <a:t>このページを取込みたい→ 取り込み💻→</a:t>
-            </a:r>
-            <a:r>
-              <a:rPr lang="ja-JP" altLang="en-US" sz="2400" dirty="0"/>
-              <a:t>🧑‍💻</a:t>
-            </a:r>
-            <a:r>
-              <a:rPr lang="ja-JP" altLang="en-US" sz="1600" dirty="0"/>
-              <a:t>変更してプッシュ →</a:t>
-            </a:r>
-            <a:r>
-              <a:rPr lang="en-US" altLang="ja-JP" sz="1600" dirty="0" err="1"/>
-              <a:t>Growi</a:t>
-            </a:r>
-            <a:r>
-              <a:rPr lang="ja-JP" altLang="en-US" sz="1600" dirty="0"/>
-              <a:t>同期💻」</a:t>
-            </a:r>
-            <a:endParaRPr lang="en-US" altLang="ja-JP" sz="1600" dirty="0"/>
-          </a:p>
-          <a:p>
-            <a:pPr marL="257173" lvl="1" indent="0">
-              <a:buNone/>
-            </a:pPr>
-            <a:endParaRPr kumimoji="1" lang="en-US" altLang="ja-JP" sz="1600" dirty="0"/>
-          </a:p>
-        </p:txBody>
-      </p:sp>
-      <p:sp>
-        <p:nvSpPr>
-          <p:cNvPr id="3" name="タイトル 2"/>
-          <p:cNvSpPr>
-            <a:spLocks noGrp="1"/>
-          </p:cNvSpPr>
-          <p:nvPr>
-            <p:ph type="title"/>
-          </p:nvPr>
-        </p:nvSpPr>
-        <p:spPr/>
-        <p:txBody>
-          <a:bodyPr>
-            <a:normAutofit/>
-          </a:bodyPr>
-          <a:lstStyle/>
-          <a:p>
-            <a:r>
-              <a:rPr lang="en-US" altLang="ja-JP" dirty="0" err="1"/>
-              <a:t>Judement</a:t>
-            </a:r>
-            <a:r>
-              <a:rPr lang="en-US" altLang="ja-JP" dirty="0"/>
-              <a:t>!!  </a:t>
-            </a:r>
-            <a:r>
-              <a:rPr lang="ja-JP" altLang="en-US" dirty="0"/>
-              <a:t>～作り方を作る～</a:t>
-            </a:r>
-          </a:p>
-        </p:txBody>
-      </p:sp>
-    </p:spTree>
-  </p:cSld>
-  <p:clrMapOvr>
-    <a:masterClrMapping/>
-  </p:clrMapOvr>
-</p:sld>
-</file>
-
-<file path=ppt/slides/slide11.xml><?xml version="1.0" encoding="utf-8"?>
-<p:sld xmlns:a="http://schemas.openxmlformats.org/drawingml/2006/main" xmlns:r="http://schemas.openxmlformats.org/officeDocument/2006/relationships" xmlns:p="http://schemas.openxmlformats.org/presentationml/2006/main">
-  <p:cSld>
-    <p:spTree>
-      <p:nvGrpSpPr>
-        <p:cNvPr id="1" name=""/>
-        <p:cNvGrpSpPr/>
-        <p:nvPr/>
-      </p:nvGrpSpPr>
-      <p:grpSpPr>
-        <a:xfrm>
-          <a:off x="0" y="0"/>
-          <a:ext cx="0" cy="0"/>
-          <a:chOff x="0" y="0"/>
-          <a:chExt cx="0" cy="0"/>
-        </a:xfrm>
-      </p:grpSpPr>
-      <p:sp>
-        <p:nvSpPr>
-          <p:cNvPr id="2" name="コンテンツ プレースホルダー 1"/>
-          <p:cNvSpPr>
-            <a:spLocks noGrp="1"/>
-          </p:cNvSpPr>
-          <p:nvPr>
-            <p:ph idx="1"/>
-          </p:nvPr>
-        </p:nvSpPr>
-        <p:spPr/>
-        <p:txBody>
-          <a:bodyPr>
-            <a:normAutofit/>
-          </a:bodyPr>
-          <a:lstStyle/>
-          <a:p>
-            <a:r>
-              <a:rPr kumimoji="1" lang="ja-JP" altLang="en-US" sz="1600" b="1" dirty="0"/>
-              <a:t>問い: Wiki をローカル（Git）で管理すれば何が可能になるか？</a:t>
-            </a:r>
-            <a:endParaRPr lang="ja-JP" altLang="en-US" dirty="0"/>
-          </a:p>
-          <a:p>
-            <a:pPr lvl="1"/>
-            <a:r>
-              <a:rPr kumimoji="1" lang="ja-JP" altLang="en-US" sz="1600" dirty="0"/>
-              <a:t>コーディングエージェントはローカル情報に最も効率よくアクセスできる</a:t>
-            </a:r>
-          </a:p>
-          <a:p>
-            <a:pPr lvl="1"/>
-            <a:r>
-              <a:rPr kumimoji="1" lang="ja-JP" altLang="en-US" sz="1600" dirty="0"/>
-              <a:t>Wiki を読んで既存仕様との整合性チェックができる</a:t>
-            </a:r>
-          </a:p>
-          <a:p>
-            <a:pPr lvl="1"/>
-            <a:r>
-              <a:rPr kumimoji="1" lang="ja-JP" altLang="en-US" sz="1600" dirty="0"/>
-              <a:t>Git 管理にすれば GitHub Actions に組み込める</a:t>
-            </a:r>
-            <a:endParaRPr kumimoji="1" lang="en-US" altLang="ja-JP" sz="1600" dirty="0"/>
-          </a:p>
-          <a:p>
-            <a:pPr lvl="1"/>
-            <a:endParaRPr lang="en-US" altLang="ja-JP" sz="1600" dirty="0"/>
-          </a:p>
-          <a:p>
-            <a:pPr lvl="1"/>
-            <a:endParaRPr kumimoji="1" lang="ja-JP" altLang="en-US" sz="1600" dirty="0"/>
-          </a:p>
-          <a:p>
-            <a:r>
-              <a:rPr lang="ja-JP" altLang="en-US" b="1" dirty="0"/>
-              <a:t>判断の結果</a:t>
-            </a:r>
-          </a:p>
-          <a:p>
-            <a:pPr lvl="1"/>
-            <a:r>
-              <a:rPr lang="ja-JP" altLang="en-US" sz="1600" dirty="0"/>
-              <a:t>仕様ドキュメントを Git 管理（現在 193 ファイルが約２人日（片手間）で完了）</a:t>
-            </a:r>
-          </a:p>
-          <a:p>
-            <a:pPr lvl="1"/>
-            <a:r>
-              <a:rPr lang="ja-JP" altLang="en-US" sz="1600" b="1" dirty="0"/>
-              <a:t>仕様をコードから AI で生成 → 過程でバグも発見</a:t>
-            </a:r>
-            <a:r>
-              <a:rPr lang="ja-JP" altLang="en-US" sz="1600" dirty="0"/>
-              <a:t>（SSOT の恩恵）</a:t>
-            </a:r>
-          </a:p>
-          <a:p>
-            <a:pPr lvl="1"/>
-            <a:r>
-              <a:rPr lang="ja-JP" altLang="en-US" sz="1600" dirty="0"/>
-              <a:t>コミット履歴で貢献が見える（感謝を伝えやすい）</a:t>
-            </a:r>
-            <a:endParaRPr lang="en-US" altLang="ja-JP" sz="1600" dirty="0"/>
-          </a:p>
-          <a:p>
-            <a:pPr lvl="1"/>
-            <a:endParaRPr lang="en-US" altLang="ja-JP" sz="1600" dirty="0"/>
-          </a:p>
-          <a:p>
-            <a:pPr lvl="1"/>
-            <a:r>
-              <a:rPr lang="ja-JP" altLang="en-US" sz="1600" dirty="0"/>
-              <a:t>困りごとや制約をもとにツールを作っていく過程はエンジニアリングの過程そのもの</a:t>
-            </a:r>
-          </a:p>
-        </p:txBody>
-      </p:sp>
-      <p:sp>
-        <p:nvSpPr>
-          <p:cNvPr id="3" name="タイトル 2"/>
-          <p:cNvSpPr>
-            <a:spLocks noGrp="1"/>
-          </p:cNvSpPr>
-          <p:nvPr>
-            <p:ph type="title"/>
-          </p:nvPr>
-        </p:nvSpPr>
-        <p:spPr/>
-        <p:txBody>
-          <a:bodyPr/>
-          <a:lstStyle/>
-          <a:p>
-            <a:r>
-              <a:rPr lang="ja-JP" altLang="en-US" dirty="0"/>
-              <a:t>振り返り：</a:t>
-            </a:r>
-            <a:r>
-              <a:rPr kumimoji="1" lang="ja-JP" altLang="en-US" dirty="0"/>
-              <a:t>問いに答える正しい判断だったか？</a:t>
-            </a:r>
-          </a:p>
-        </p:txBody>
-      </p:sp>
-    </p:spTree>
-  </p:cSld>
-  <p:clrMapOvr>
-    <a:masterClrMapping/>
-  </p:clrMapOvr>
-</p:sld>
-</file>
-
-<file path=ppt/slides/slide12.xml><?xml version="1.0" encoding="utf-8"?>
-<p:sld xmlns:a="http://schemas.openxmlformats.org/drawingml/2006/main" xmlns:r="http://schemas.openxmlformats.org/officeDocument/2006/relationships" xmlns:p="http://schemas.openxmlformats.org/presentationml/2006/main">
-  <p:cSld>
-    <p:spTree>
-      <p:nvGrpSpPr>
-        <p:cNvPr id="1" name=""/>
-        <p:cNvGrpSpPr/>
-        <p:nvPr/>
-      </p:nvGrpSpPr>
-      <p:grpSpPr>
-        <a:xfrm>
-          <a:off x="0" y="0"/>
-          <a:ext cx="0" cy="0"/>
-          <a:chOff x="0" y="0"/>
-          <a:chExt cx="0" cy="0"/>
-        </a:xfrm>
-      </p:grpSpPr>
-      <p:sp>
-        <p:nvSpPr>
-          <p:cNvPr id="2" name="タイトル 1"/>
-          <p:cNvSpPr>
-            <a:spLocks noGrp="1"/>
-          </p:cNvSpPr>
-          <p:nvPr>
-            <p:ph type="ctrTitle"/>
-          </p:nvPr>
-        </p:nvSpPr>
-        <p:spPr/>
-        <p:txBody>
-          <a:bodyPr>
-            <a:normAutofit fontScale="90000"/>
-          </a:bodyPr>
-          <a:lstStyle/>
-          <a:p>
-            <a:r>
-              <a:rPr kumimoji="1" lang="ja-JP" altLang="en-US" sz="2600" dirty="0"/>
-              <a:t>事例2　AIレビューワークフロー</a:t>
-            </a:r>
-          </a:p>
-        </p:txBody>
-      </p:sp>
-      <p:sp>
-        <p:nvSpPr>
-          <p:cNvPr id="3" name="字幕 2"/>
-          <p:cNvSpPr>
-            <a:spLocks noGrp="1"/>
-          </p:cNvSpPr>
-          <p:nvPr>
-            <p:ph type="subTitle" idx="1"/>
-          </p:nvPr>
-        </p:nvSpPr>
-        <p:spPr/>
-        <p:txBody>
-          <a:bodyPr>
-            <a:normAutofit/>
-          </a:bodyPr>
-          <a:lstStyle/>
-          <a:p>
-            <a:r>
-              <a:rPr kumimoji="1" lang="ja-JP" altLang="en-US" sz="1300" dirty="0"/>
-              <a:t>「</a:t>
-            </a:r>
-            <a:r>
-              <a:rPr lang="ja-JP" altLang="en-US" sz="1400" dirty="0"/>
-              <a:t>育て方を作る</a:t>
-            </a:r>
-            <a:r>
-              <a:rPr kumimoji="1" lang="ja-JP" altLang="en-US" sz="1300" dirty="0"/>
-              <a:t>」</a:t>
-            </a:r>
-          </a:p>
-        </p:txBody>
-      </p:sp>
-    </p:spTree>
-  </p:cSld>
-  <p:clrMapOvr>
-    <a:masterClrMapping/>
-  </p:clrMapOvr>
-</p:sld>
-</file>
-
-<file path=ppt/slides/slide13.xml><?xml version="1.0" encoding="utf-8"?>
 <p:sld xmlns:a="http://schemas.openxmlformats.org/drawingml/2006/main" xmlns:r="http://schemas.openxmlformats.org/officeDocument/2006/relationships" xmlns:p="http://schemas.openxmlformats.org/presentationml/2006/main">
   <p:cSld>
     <p:spTree>
@@ -4172,14 +3721,15 @@
         </p:nvPicPr>
         <p:blipFill>
           <a:blip r:embed="rId2"/>
+          <a:srcRect b="15260"/>
           <a:stretch>
             <a:fillRect/>
           </a:stretch>
         </p:blipFill>
         <p:spPr>
           <a:xfrm>
-            <a:off x="596516" y="2276872"/>
-            <a:ext cx="7859222" cy="2124371"/>
+            <a:off x="780948" y="1772816"/>
+            <a:ext cx="7859222" cy="1800200"/>
           </a:xfrm>
           <a:prstGeom prst="rect">
             <a:avLst/>
@@ -4404,37 +3954,85 @@
           <a:p>
             <a:r>
               <a:rPr lang="en-US" altLang="ja-JP" dirty="0"/>
-              <a:t>Copilot</a:t>
+              <a:t>Copilot CLI</a:t>
             </a:r>
             <a:r>
               <a:rPr lang="ja-JP" altLang="en-US" dirty="0"/>
-              <a:t>を起動して、</a:t>
+              <a:t>を起動（</a:t>
+            </a:r>
+            <a:r>
+              <a:rPr lang="en-US" altLang="ja-JP" dirty="0"/>
+              <a:t>Claude Code</a:t>
+            </a:r>
+            <a:r>
+              <a:rPr lang="ja-JP" altLang="en-US" dirty="0"/>
+              <a:t>でも可）</a:t>
             </a:r>
             <a:endParaRPr lang="en-US" altLang="ja-JP" dirty="0"/>
           </a:p>
-          <a:p>
+        </p:txBody>
+      </p:sp>
+      <p:sp>
+        <p:nvSpPr>
+          <p:cNvPr id="4" name="テキスト ボックス 3">
+            <a:extLst>
+              <a:ext uri="{FF2B5EF4-FFF2-40B4-BE49-F238E27FC236}">
+                <a16:creationId xmlns:a16="http://schemas.microsoft.com/office/drawing/2014/main" id="{6AA21D1D-4EA0-A8E6-C371-22C2CE587400}"/>
+              </a:ext>
+            </a:extLst>
+          </p:cNvPr>
+          <p:cNvSpPr txBox="1"/>
+          <p:nvPr/>
+        </p:nvSpPr>
+        <p:spPr>
+          <a:xfrm>
+            <a:off x="780948" y="3813855"/>
+            <a:ext cx="7772452" cy="369332"/>
+          </a:xfrm>
+          <a:prstGeom prst="rect">
+            <a:avLst/>
+          </a:prstGeom>
+          <a:noFill/>
+        </p:spPr>
+        <p:txBody>
+          <a:bodyPr wrap="square">
+            <a:spAutoFit/>
+          </a:bodyPr>
+          <a:lstStyle/>
+          <a:p>
+            <a:r>
+              <a:rPr lang="en-US" altLang="ja-JP" dirty="0"/>
+              <a:t># </a:t>
+            </a:r>
             <a:r>
               <a:rPr lang="ja-JP" altLang="en-US" dirty="0"/>
-              <a:t>必要なら　</a:t>
+              <a:t>スキル実行</a:t>
             </a:r>
             <a:r>
               <a:rPr lang="en-US" altLang="ja-JP" dirty="0"/>
-              <a:t>/diff-</a:t>
-            </a:r>
-            <a:r>
-              <a:rPr lang="en-US" altLang="ja-JP" dirty="0" err="1"/>
-              <a:t>naigator</a:t>
-            </a:r>
-            <a:endParaRPr lang="ja-JP" altLang="en-US" dirty="0"/>
+              <a:t> </a:t>
+            </a:r>
+            <a:r>
+              <a:rPr lang="en-US" altLang="ja-JP" dirty="0">
+                <a:highlight>
+                  <a:srgbClr val="FDD000"/>
+                </a:highlight>
+              </a:rPr>
+              <a:t>/peer-review</a:t>
+            </a:r>
+            <a:r>
+              <a:rPr lang="ja-JP" altLang="en-US" dirty="0"/>
+              <a:t>　→　エージェント🤖がレビューを開始</a:t>
+            </a:r>
           </a:p>
         </p:txBody>
       </p:sp>
       <p:pic>
         <p:nvPicPr>
-          <p:cNvPr id="7" name="図 6">
+          <p:cNvPr id="8" name="図 7">
             <a:extLst>
               <a:ext uri="{FF2B5EF4-FFF2-40B4-BE49-F238E27FC236}">
-                <a16:creationId xmlns:a16="http://schemas.microsoft.com/office/drawing/2014/main" id="{74E534D7-C33B-9B46-9104-86096F488F08}"/>
+                <a16:creationId xmlns:a16="http://schemas.microsoft.com/office/drawing/2014/main" id="{CC6DBCCD-2083-B397-85C8-B3CB9620083E}"/>
               </a:ext>
             </a:extLst>
           </p:cNvPr>
@@ -4451,8 +4049,8 @@
         </p:blipFill>
         <p:spPr>
           <a:xfrm>
-            <a:off x="1892660" y="204460"/>
-            <a:ext cx="7786142" cy="6547438"/>
+            <a:off x="780948" y="4258794"/>
+            <a:ext cx="9259592" cy="1943371"/>
           </a:xfrm>
           <a:prstGeom prst="rect">
             <a:avLst/>
@@ -4498,7 +4096,34 @@
                                           </p:stCondLst>
                                         </p:cTn>
                                         <p:tgtEl>
-                                          <p:spTgt spid="7"/>
+                                          <p:spTgt spid="8"/>
+                                        </p:tgtEl>
+                                        <p:attrNameLst>
+                                          <p:attrName>style.visibility</p:attrName>
+                                        </p:attrNameLst>
+                                      </p:cBhvr>
+                                      <p:to>
+                                        <p:strVal val="visible"/>
+                                      </p:to>
+                                    </p:set>
+                                  </p:childTnLst>
+                                </p:cTn>
+                              </p:par>
+                              <p:par>
+                                <p:cTn id="7" presetID="1" presetClass="entr" presetSubtype="0" fill="hold" grpId="0" nodeType="withEffect">
+                                  <p:stCondLst>
+                                    <p:cond delay="0"/>
+                                  </p:stCondLst>
+                                  <p:childTnLst>
+                                    <p:set>
+                                      <p:cBhvr>
+                                        <p:cTn id="8" dur="1" fill="hold">
+                                          <p:stCondLst>
+                                            <p:cond delay="0"/>
+                                          </p:stCondLst>
+                                        </p:cTn>
+                                        <p:tgtEl>
+                                          <p:spTgt spid="4"/>
                                         </p:tgtEl>
                                         <p:attrNameLst>
                                           <p:attrName>style.visibility</p:attrName>
@@ -4538,11 +4163,14 @@
         </p:cTn>
       </p:par>
     </p:tnLst>
+    <p:bldLst>
+      <p:bldP spid="4" grpId="0"/>
+    </p:bldLst>
   </p:timing>
 </p:sld>
 </file>
 
-<file path=ppt/slides/slide14.xml><?xml version="1.0" encoding="utf-8"?>
+<file path=ppt/slides/slide11.xml><?xml version="1.0" encoding="utf-8"?>
 <p:sld xmlns:a="http://schemas.openxmlformats.org/drawingml/2006/main" xmlns:r="http://schemas.openxmlformats.org/officeDocument/2006/relationships" xmlns:p="http://schemas.openxmlformats.org/presentationml/2006/main">
   <p:cSld>
     <p:spTree>
@@ -4550,7 +4178,7 @@
         <p:cNvPr id="1" name="">
           <a:extLst>
             <a:ext uri="{FF2B5EF4-FFF2-40B4-BE49-F238E27FC236}">
-              <a16:creationId xmlns:a16="http://schemas.microsoft.com/office/drawing/2014/main" id="{2B3F6AEE-5F94-5352-27F5-6A97B1C7B894}"/>
+              <a16:creationId xmlns:a16="http://schemas.microsoft.com/office/drawing/2014/main" id="{288EF0C8-9FB4-6E68-5627-B9FE0B652881}"/>
             </a:ext>
           </a:extLst>
         </p:cNvPr>
@@ -4570,7 +4198,7 @@
           <p:cNvPr id="3" name="タイトル 2">
             <a:extLst>
               <a:ext uri="{FF2B5EF4-FFF2-40B4-BE49-F238E27FC236}">
-                <a16:creationId xmlns:a16="http://schemas.microsoft.com/office/drawing/2014/main" id="{7C1741D0-84DD-B362-AFCB-8E37BD3BA897}"/>
+                <a16:creationId xmlns:a16="http://schemas.microsoft.com/office/drawing/2014/main" id="{57467288-6E0A-C50B-F995-8DDD0B47CA6E}"/>
               </a:ext>
             </a:extLst>
           </p:cNvPr>
@@ -4595,42 +4223,12 @@
           </a:p>
         </p:txBody>
       </p:sp>
-      <p:pic>
-        <p:nvPicPr>
-          <p:cNvPr id="7" name="図 6">
-            <a:extLst>
-              <a:ext uri="{FF2B5EF4-FFF2-40B4-BE49-F238E27FC236}">
-                <a16:creationId xmlns:a16="http://schemas.microsoft.com/office/drawing/2014/main" id="{CC6DBCCD-2083-B397-85C8-B3CB9620083E}"/>
-              </a:ext>
-            </a:extLst>
-          </p:cNvPr>
-          <p:cNvPicPr>
-            <a:picLocks noChangeAspect="1"/>
-          </p:cNvPicPr>
-          <p:nvPr/>
-        </p:nvPicPr>
-        <p:blipFill>
-          <a:blip r:embed="rId2"/>
-          <a:stretch>
-            <a:fillRect/>
-          </a:stretch>
-        </p:blipFill>
-        <p:spPr>
-          <a:xfrm>
-            <a:off x="323204" y="1783464"/>
-            <a:ext cx="9259592" cy="1943371"/>
-          </a:xfrm>
-          <a:prstGeom prst="rect">
-            <a:avLst/>
-          </a:prstGeom>
-        </p:spPr>
-      </p:pic>
       <p:sp>
         <p:nvSpPr>
           <p:cNvPr id="13" name="コンテンツ プレースホルダー 12">
             <a:extLst>
               <a:ext uri="{FF2B5EF4-FFF2-40B4-BE49-F238E27FC236}">
-                <a16:creationId xmlns:a16="http://schemas.microsoft.com/office/drawing/2014/main" id="{2C89EBAC-EFC1-D061-F334-1DFC9178DB8B}"/>
+                <a16:creationId xmlns:a16="http://schemas.microsoft.com/office/drawing/2014/main" id="{7EC33228-5A56-DFF1-DC9C-11F2E64CC5E9}"/>
               </a:ext>
             </a:extLst>
           </p:cNvPr>
@@ -4651,18 +4249,6 @@
           <a:bodyPr/>
           <a:lstStyle/>
           <a:p>
-            <a:r>
-              <a:rPr lang="en-US" altLang="ja-JP" dirty="0"/>
-              <a:t># </a:t>
-            </a:r>
-            <a:r>
-              <a:rPr lang="ja-JP" altLang="en-US" dirty="0"/>
-              <a:t>実行</a:t>
-            </a:r>
-            <a:r>
-              <a:rPr lang="en-US" altLang="ja-JP" dirty="0"/>
-              <a:t> /peer-review</a:t>
-            </a:r>
             <a:endParaRPr lang="ja-JP" altLang="en-US" dirty="0"/>
           </a:p>
         </p:txBody>
@@ -4672,7 +4258,37 @@
           <p:cNvPr id="14" name="図 13">
             <a:extLst>
               <a:ext uri="{FF2B5EF4-FFF2-40B4-BE49-F238E27FC236}">
-                <a16:creationId xmlns:a16="http://schemas.microsoft.com/office/drawing/2014/main" id="{FB6BE40A-494D-C2A1-10D1-9F8EF7B7E4F3}"/>
+                <a16:creationId xmlns:a16="http://schemas.microsoft.com/office/drawing/2014/main" id="{92ADB9A0-BB6C-31D4-4A7C-148B893D7872}"/>
+              </a:ext>
+            </a:extLst>
+          </p:cNvPr>
+          <p:cNvPicPr>
+            <a:picLocks noChangeAspect="1"/>
+          </p:cNvPicPr>
+          <p:nvPr/>
+        </p:nvPicPr>
+        <p:blipFill>
+          <a:blip r:embed="rId2"/>
+          <a:stretch>
+            <a:fillRect/>
+          </a:stretch>
+        </p:blipFill>
+        <p:spPr>
+          <a:xfrm>
+            <a:off x="408516" y="2331233"/>
+            <a:ext cx="2553056" cy="1381318"/>
+          </a:xfrm>
+          <a:prstGeom prst="rect">
+            <a:avLst/>
+          </a:prstGeom>
+        </p:spPr>
+      </p:pic>
+      <p:pic>
+        <p:nvPicPr>
+          <p:cNvPr id="16" name="図 15">
+            <a:extLst>
+              <a:ext uri="{FF2B5EF4-FFF2-40B4-BE49-F238E27FC236}">
+                <a16:creationId xmlns:a16="http://schemas.microsoft.com/office/drawing/2014/main" id="{CC289118-D9E7-B21F-BC04-C7DCBBBB1CBA}"/>
               </a:ext>
             </a:extLst>
           </p:cNvPr>
@@ -4689,20 +4305,66 @@
         </p:blipFill>
         <p:spPr>
           <a:xfrm>
-            <a:off x="311712" y="3913951"/>
-            <a:ext cx="2553056" cy="1381318"/>
+            <a:off x="2154079" y="3132230"/>
+            <a:ext cx="7488832" cy="3302575"/>
           </a:xfrm>
           <a:prstGeom prst="rect">
             <a:avLst/>
           </a:prstGeom>
         </p:spPr>
       </p:pic>
+      <p:sp>
+        <p:nvSpPr>
+          <p:cNvPr id="17" name="テキスト ボックス 16">
+            <a:extLst>
+              <a:ext uri="{FF2B5EF4-FFF2-40B4-BE49-F238E27FC236}">
+                <a16:creationId xmlns:a16="http://schemas.microsoft.com/office/drawing/2014/main" id="{E185FB3B-AD72-52DA-7CB2-11C89E453F4A}"/>
+              </a:ext>
+            </a:extLst>
+          </p:cNvPr>
+          <p:cNvSpPr txBox="1"/>
+          <p:nvPr/>
+        </p:nvSpPr>
+        <p:spPr>
+          <a:xfrm>
+            <a:off x="3026786" y="2408566"/>
+            <a:ext cx="3852428" cy="646331"/>
+          </a:xfrm>
+          <a:prstGeom prst="rect">
+            <a:avLst/>
+          </a:prstGeom>
+          <a:noFill/>
+        </p:spPr>
+        <p:txBody>
+          <a:bodyPr wrap="square" rtlCol="0">
+            <a:spAutoFit/>
+          </a:bodyPr>
+          <a:lstStyle/>
+          <a:p>
+            <a:r>
+              <a:rPr kumimoji="1" lang="ja-JP" altLang="en-US" b="1" dirty="0"/>
+              <a:t>シェルスクリプト</a:t>
+            </a:r>
+            <a:r>
+              <a:rPr lang="ja-JP" altLang="en-US" dirty="0"/>
+              <a:t>🛠️</a:t>
+            </a:r>
+            <a:endParaRPr kumimoji="1" lang="en-US" altLang="ja-JP" dirty="0"/>
+          </a:p>
+          <a:p>
+            <a:r>
+              <a:rPr kumimoji="1" lang="ja-JP" altLang="en-US" dirty="0"/>
+              <a:t>でベースブランチとの差分を収集</a:t>
+            </a:r>
+          </a:p>
+        </p:txBody>
+      </p:sp>
       <p:pic>
         <p:nvPicPr>
-          <p:cNvPr id="16" name="図 15">
+          <p:cNvPr id="9" name="コンテンツ プレースホルダー 8">
             <a:extLst>
               <a:ext uri="{FF2B5EF4-FFF2-40B4-BE49-F238E27FC236}">
-                <a16:creationId xmlns:a16="http://schemas.microsoft.com/office/drawing/2014/main" id="{50089730-DF76-0515-1194-D91809FF64EB}"/>
+                <a16:creationId xmlns:a16="http://schemas.microsoft.com/office/drawing/2014/main" id="{C1EAAB7E-CAF5-F3DB-1926-566D2719A647}"/>
               </a:ext>
             </a:extLst>
           </p:cNvPr>
@@ -4719,8 +4381,8 @@
         </p:blipFill>
         <p:spPr>
           <a:xfrm>
-            <a:off x="2417168" y="3561129"/>
-            <a:ext cx="7488832" cy="3302575"/>
+            <a:off x="420104" y="1289879"/>
+            <a:ext cx="3248478" cy="790685"/>
           </a:xfrm>
           <a:prstGeom prst="rect">
             <a:avLst/>
@@ -4729,10 +4391,10 @@
       </p:pic>
       <p:sp>
         <p:nvSpPr>
-          <p:cNvPr id="17" name="テキスト ボックス 16">
+          <p:cNvPr id="10" name="テキスト ボックス 9">
             <a:extLst>
               <a:ext uri="{FF2B5EF4-FFF2-40B4-BE49-F238E27FC236}">
-                <a16:creationId xmlns:a16="http://schemas.microsoft.com/office/drawing/2014/main" id="{F57C78EA-274C-53D9-2169-A2AA325C4588}"/>
+                <a16:creationId xmlns:a16="http://schemas.microsoft.com/office/drawing/2014/main" id="{46A8CD5C-A387-8BEC-FB32-2CC163AA90B9}"/>
               </a:ext>
             </a:extLst>
           </p:cNvPr>
@@ -4741,8 +4403,8 @@
         </p:nvSpPr>
         <p:spPr>
           <a:xfrm>
-            <a:off x="311712" y="5647407"/>
-            <a:ext cx="3852428" cy="646331"/>
+            <a:off x="3672366" y="1315889"/>
+            <a:ext cx="5313082" cy="584775"/>
           </a:xfrm>
           <a:prstGeom prst="rect">
             <a:avLst/>
@@ -4757,22 +4419,47 @@
           <a:p>
             <a:r>
               <a:rPr kumimoji="1" lang="ja-JP" altLang="en-US" dirty="0"/>
-              <a:t>シェルスクリプト</a:t>
-            </a:r>
-            <a:endParaRPr kumimoji="1" lang="en-US" altLang="ja-JP" dirty="0"/>
-          </a:p>
-          <a:p>
-            <a:r>
-              <a:rPr kumimoji="1" lang="ja-JP" altLang="en-US" dirty="0"/>
-              <a:t>で差分を収集</a:t>
-            </a:r>
+              <a:t>←レビュー用ワークスペースディレクトリ</a:t>
+            </a:r>
+            <a:br>
+              <a:rPr kumimoji="1" lang="en-US" altLang="ja-JP" dirty="0"/>
+            </a:br>
+            <a:r>
+              <a:rPr kumimoji="1" lang="en-US" altLang="ja-JP" sz="1400" dirty="0"/>
+              <a:t>※</a:t>
+            </a:r>
+            <a:r>
+              <a:rPr kumimoji="1" lang="en-US" altLang="ja-JP" sz="1400" dirty="0" err="1"/>
+              <a:t>gitignore</a:t>
+            </a:r>
+            <a:r>
+              <a:rPr kumimoji="1" lang="ja-JP" altLang="en-US" sz="1400" dirty="0"/>
+              <a:t>に入れてるし、もちろん</a:t>
+            </a:r>
+            <a:r>
+              <a:rPr kumimoji="1" lang="en-US" altLang="ja-JP" sz="1400" dirty="0" err="1"/>
+              <a:t>worktree</a:t>
+            </a:r>
+            <a:r>
+              <a:rPr kumimoji="1" lang="ja-JP" altLang="en-US" sz="1400" dirty="0"/>
+              <a:t>なら</a:t>
+            </a:r>
+            <a:r>
+              <a:rPr lang="ja-JP" altLang="en-US" sz="1400" dirty="0"/>
+              <a:t>勝手</a:t>
+            </a:r>
+            <a:r>
+              <a:rPr kumimoji="1" lang="ja-JP" altLang="en-US" sz="1400" dirty="0"/>
+              <a:t>に消える</a:t>
+            </a:r>
+            <a:endParaRPr kumimoji="1" lang="ja-JP" altLang="en-US" dirty="0"/>
           </a:p>
         </p:txBody>
       </p:sp>
     </p:spTree>
     <p:extLst>
       <p:ext uri="{BB962C8B-B14F-4D97-AF65-F5344CB8AC3E}">
-        <p14:creationId xmlns:p14="http://schemas.microsoft.com/office/powerpoint/2010/main" val="2393029103"/>
+        <p14:creationId xmlns:p14="http://schemas.microsoft.com/office/powerpoint/2010/main" val="3606422315"/>
       </p:ext>
     </p:extLst>
   </p:cSld>
@@ -4914,7 +4601,7 @@
 </p:sld>
 </file>
 
-<file path=ppt/slides/slide15.xml><?xml version="1.0" encoding="utf-8"?>
+<file path=ppt/slides/slide12.xml><?xml version="1.0" encoding="utf-8"?>
 <p:sld xmlns:a="http://schemas.openxmlformats.org/drawingml/2006/main" xmlns:r="http://schemas.openxmlformats.org/officeDocument/2006/relationships" xmlns:p="http://schemas.openxmlformats.org/presentationml/2006/main">
   <p:cSld>
     <p:spTree>
@@ -4969,38 +4656,6 @@
       </p:sp>
       <p:pic>
         <p:nvPicPr>
-          <p:cNvPr id="9" name="コンテンツ プレースホルダー 8">
-            <a:extLst>
-              <a:ext uri="{FF2B5EF4-FFF2-40B4-BE49-F238E27FC236}">
-                <a16:creationId xmlns:a16="http://schemas.microsoft.com/office/drawing/2014/main" id="{C1EAAB7E-CAF5-F3DB-1926-566D2719A647}"/>
-              </a:ext>
-            </a:extLst>
-          </p:cNvPr>
-          <p:cNvPicPr>
-            <a:picLocks noGrp="1" noChangeAspect="1"/>
-          </p:cNvPicPr>
-          <p:nvPr>
-            <p:ph idx="1"/>
-          </p:nvPr>
-        </p:nvPicPr>
-        <p:blipFill>
-          <a:blip r:embed="rId2"/>
-          <a:stretch>
-            <a:fillRect/>
-          </a:stretch>
-        </p:blipFill>
-        <p:spPr>
-          <a:xfrm>
-            <a:off x="236475" y="1124744"/>
-            <a:ext cx="3248478" cy="790685"/>
-          </a:xfrm>
-          <a:prstGeom prst="rect">
-            <a:avLst/>
-          </a:prstGeom>
-        </p:spPr>
-      </p:pic>
-      <p:pic>
-        <p:nvPicPr>
           <p:cNvPr id="7" name="図 6">
             <a:extLst>
               <a:ext uri="{FF2B5EF4-FFF2-40B4-BE49-F238E27FC236}">
@@ -5014,64 +4669,21 @@
           <p:nvPr/>
         </p:nvPicPr>
         <p:blipFill>
-          <a:blip r:embed="rId3"/>
+          <a:blip r:embed="rId2"/>
           <a:stretch>
             <a:fillRect/>
           </a:stretch>
         </p:blipFill>
         <p:spPr>
           <a:xfrm>
-            <a:off x="236475" y="1988840"/>
-            <a:ext cx="8599457" cy="4752528"/>
+            <a:off x="259868" y="1440883"/>
+            <a:ext cx="9222306" cy="5096748"/>
           </a:xfrm>
           <a:prstGeom prst="rect">
             <a:avLst/>
           </a:prstGeom>
         </p:spPr>
       </p:pic>
-      <p:sp>
-        <p:nvSpPr>
-          <p:cNvPr id="10" name="テキスト ボックス 9">
-            <a:extLst>
-              <a:ext uri="{FF2B5EF4-FFF2-40B4-BE49-F238E27FC236}">
-                <a16:creationId xmlns:a16="http://schemas.microsoft.com/office/drawing/2014/main" id="{46A8CD5C-A387-8BEC-FB32-2CC163AA90B9}"/>
-              </a:ext>
-            </a:extLst>
-          </p:cNvPr>
-          <p:cNvSpPr txBox="1"/>
-          <p:nvPr/>
-        </p:nvSpPr>
-        <p:spPr>
-          <a:xfrm>
-            <a:off x="3488737" y="1150754"/>
-            <a:ext cx="3852428" cy="369332"/>
-          </a:xfrm>
-          <a:prstGeom prst="rect">
-            <a:avLst/>
-          </a:prstGeom>
-          <a:noFill/>
-        </p:spPr>
-        <p:txBody>
-          <a:bodyPr wrap="square" rtlCol="0">
-            <a:spAutoFit/>
-          </a:bodyPr>
-          <a:lstStyle/>
-          <a:p>
-            <a:r>
-              <a:rPr kumimoji="1" lang="ja-JP" altLang="en-US" dirty="0"/>
-              <a:t>←レビュー用</a:t>
-            </a:r>
-            <a:r>
-              <a:rPr kumimoji="1" lang="en-US" altLang="ja-JP" dirty="0"/>
-              <a:t>Temp</a:t>
-            </a:r>
-            <a:r>
-              <a:rPr kumimoji="1" lang="ja-JP" altLang="en-US" dirty="0"/>
-              <a:t>ディレクトリ</a:t>
-            </a:r>
-          </a:p>
-        </p:txBody>
-      </p:sp>
       <p:sp>
         <p:nvSpPr>
           <p:cNvPr id="11" name="テキスト ボックス 10">
@@ -5086,8 +4698,8 @@
         </p:nvSpPr>
         <p:spPr>
           <a:xfrm>
-            <a:off x="3728864" y="1538121"/>
-            <a:ext cx="3852428" cy="369332"/>
+            <a:off x="596516" y="1071551"/>
+            <a:ext cx="5004556" cy="369332"/>
           </a:xfrm>
           <a:prstGeom prst="rect">
             <a:avLst/>
@@ -5106,9 +4718,179 @@
             </a:r>
             <a:r>
               <a:rPr lang="ja-JP" altLang="en-US" dirty="0"/>
-              <a:t>仕様情報収集</a:t>
+              <a:t>🤖仕様情報収集して</a:t>
+            </a:r>
+            <a:r>
+              <a:rPr lang="en-US" altLang="ja-JP" dirty="0"/>
+              <a:t>md</a:t>
+            </a:r>
+            <a:r>
+              <a:rPr lang="ja-JP" altLang="en-US" dirty="0"/>
+              <a:t>ファイルにまとめる</a:t>
             </a:r>
             <a:endParaRPr kumimoji="1" lang="ja-JP" altLang="en-US" dirty="0"/>
+          </a:p>
+        </p:txBody>
+      </p:sp>
+      <p:sp>
+        <p:nvSpPr>
+          <p:cNvPr id="8" name="四角形: 角を丸くする 7">
+            <a:extLst>
+              <a:ext uri="{FF2B5EF4-FFF2-40B4-BE49-F238E27FC236}">
+                <a16:creationId xmlns:a16="http://schemas.microsoft.com/office/drawing/2014/main" id="{9D42FEAA-6948-C33C-2933-3D9DA9919CE0}"/>
+              </a:ext>
+            </a:extLst>
+          </p:cNvPr>
+          <p:cNvSpPr/>
+          <p:nvPr/>
+        </p:nvSpPr>
+        <p:spPr>
+          <a:xfrm>
+            <a:off x="429954" y="1661200"/>
+            <a:ext cx="1138670" cy="255632"/>
+          </a:xfrm>
+          <a:prstGeom prst="roundRect">
+            <a:avLst/>
+          </a:prstGeom>
+          <a:noFill/>
+          <a:ln w="19050" cap="flat" cmpd="sng" algn="ctr">
+            <a:solidFill>
+              <a:srgbClr val="FDD000"/>
+            </a:solidFill>
+            <a:prstDash val="solid"/>
+            <a:round/>
+            <a:headEnd type="none" w="med" len="med"/>
+            <a:tailEnd type="none" w="med" len="med"/>
+          </a:ln>
+        </p:spPr>
+        <p:style>
+          <a:lnRef idx="0">
+            <a:scrgbClr r="0" g="0" b="0"/>
+          </a:lnRef>
+          <a:fillRef idx="0">
+            <a:scrgbClr r="0" g="0" b="0"/>
+          </a:fillRef>
+          <a:effectRef idx="0">
+            <a:scrgbClr r="0" g="0" b="0"/>
+          </a:effectRef>
+          <a:fontRef idx="minor">
+            <a:schemeClr val="accent1"/>
+          </a:fontRef>
+        </p:style>
+        <p:txBody>
+          <a:bodyPr rtlCol="0" anchor="ctr"/>
+          <a:lstStyle/>
+          <a:p>
+            <a:pPr algn="ctr"/>
+            <a:endParaRPr kumimoji="1" lang="ja-JP" altLang="en-US"/>
+          </a:p>
+        </p:txBody>
+      </p:sp>
+      <p:sp>
+        <p:nvSpPr>
+          <p:cNvPr id="12" name="四角形: 角を丸くする 11">
+            <a:extLst>
+              <a:ext uri="{FF2B5EF4-FFF2-40B4-BE49-F238E27FC236}">
+                <a16:creationId xmlns:a16="http://schemas.microsoft.com/office/drawing/2014/main" id="{1D3890E9-5AD4-7994-33B0-B2CCBCE28431}"/>
+              </a:ext>
+            </a:extLst>
+          </p:cNvPr>
+          <p:cNvSpPr/>
+          <p:nvPr/>
+        </p:nvSpPr>
+        <p:spPr>
+          <a:xfrm>
+            <a:off x="452500" y="2420888"/>
+            <a:ext cx="1210678" cy="255632"/>
+          </a:xfrm>
+          <a:prstGeom prst="roundRect">
+            <a:avLst/>
+          </a:prstGeom>
+          <a:noFill/>
+          <a:ln w="19050" cap="flat" cmpd="sng" algn="ctr">
+            <a:solidFill>
+              <a:srgbClr val="FDD000"/>
+            </a:solidFill>
+            <a:prstDash val="solid"/>
+            <a:round/>
+            <a:headEnd type="none" w="med" len="med"/>
+            <a:tailEnd type="none" w="med" len="med"/>
+          </a:ln>
+        </p:spPr>
+        <p:style>
+          <a:lnRef idx="0">
+            <a:scrgbClr r="0" g="0" b="0"/>
+          </a:lnRef>
+          <a:fillRef idx="0">
+            <a:scrgbClr r="0" g="0" b="0"/>
+          </a:fillRef>
+          <a:effectRef idx="0">
+            <a:scrgbClr r="0" g="0" b="0"/>
+          </a:effectRef>
+          <a:fontRef idx="minor">
+            <a:schemeClr val="accent1"/>
+          </a:fontRef>
+        </p:style>
+        <p:txBody>
+          <a:bodyPr rtlCol="0" anchor="ctr"/>
+          <a:lstStyle/>
+          <a:p>
+            <a:pPr algn="ctr"/>
+            <a:endParaRPr kumimoji="1" lang="ja-JP" altLang="en-US"/>
+          </a:p>
+        </p:txBody>
+      </p:sp>
+      <p:sp>
+        <p:nvSpPr>
+          <p:cNvPr id="13" name="四角形: 角を丸くする 12">
+            <a:extLst>
+              <a:ext uri="{FF2B5EF4-FFF2-40B4-BE49-F238E27FC236}">
+                <a16:creationId xmlns:a16="http://schemas.microsoft.com/office/drawing/2014/main" id="{32BB2B74-96B5-30CD-DA07-38632C3CC51B}"/>
+              </a:ext>
+            </a:extLst>
+          </p:cNvPr>
+          <p:cNvSpPr/>
+          <p:nvPr/>
+        </p:nvSpPr>
+        <p:spPr>
+          <a:xfrm>
+            <a:off x="452500" y="3959153"/>
+            <a:ext cx="1210678" cy="255632"/>
+          </a:xfrm>
+          <a:prstGeom prst="roundRect">
+            <a:avLst/>
+          </a:prstGeom>
+          <a:noFill/>
+          <a:ln w="19050" cap="flat" cmpd="sng" algn="ctr">
+            <a:solidFill>
+              <a:srgbClr val="FDD000"/>
+            </a:solidFill>
+            <a:prstDash val="solid"/>
+            <a:round/>
+            <a:headEnd type="none" w="med" len="med"/>
+            <a:tailEnd type="none" w="med" len="med"/>
+          </a:ln>
+        </p:spPr>
+        <p:style>
+          <a:lnRef idx="0">
+            <a:scrgbClr r="0" g="0" b="0"/>
+          </a:lnRef>
+          <a:fillRef idx="0">
+            <a:scrgbClr r="0" g="0" b="0"/>
+          </a:fillRef>
+          <a:effectRef idx="0">
+            <a:scrgbClr r="0" g="0" b="0"/>
+          </a:effectRef>
+          <a:fontRef idx="minor">
+            <a:schemeClr val="accent1"/>
+          </a:fontRef>
+        </p:style>
+        <p:txBody>
+          <a:bodyPr rtlCol="0" anchor="ctr"/>
+          <a:lstStyle/>
+          <a:p>
+            <a:pPr algn="ctr"/>
+            <a:endParaRPr kumimoji="1" lang="ja-JP" altLang="en-US"/>
           </a:p>
         </p:txBody>
       </p:sp>
@@ -5143,7 +4925,7 @@
                             </p:stCondLst>
                             <p:childTnLst>
                               <p:par>
-                                <p:cTn id="5" presetID="1" presetClass="entr" presetSubtype="0" fill="hold" nodeType="clickEffect">
+                                <p:cTn id="5" presetID="1" presetClass="entr" presetSubtype="0" fill="hold" grpId="0" nodeType="clickEffect">
                                   <p:stCondLst>
                                     <p:cond delay="0"/>
                                   </p:stCondLst>
@@ -5156,7 +4938,7 @@
                                           </p:stCondLst>
                                         </p:cTn>
                                         <p:tgtEl>
-                                          <p:spTgt spid="7"/>
+                                          <p:spTgt spid="8"/>
                                         </p:tgtEl>
                                         <p:attrNameLst>
                                           <p:attrName>style.visibility</p:attrName>
@@ -5169,21 +4951,84 @@
                                   </p:childTnLst>
                                 </p:cTn>
                               </p:par>
+                            </p:childTnLst>
+                          </p:cTn>
+                        </p:par>
+                      </p:childTnLst>
+                    </p:cTn>
+                  </p:par>
+                  <p:par>
+                    <p:cTn id="7" fill="hold">
+                      <p:stCondLst>
+                        <p:cond delay="indefinite"/>
+                      </p:stCondLst>
+                      <p:childTnLst>
+                        <p:par>
+                          <p:cTn id="8" fill="hold">
+                            <p:stCondLst>
+                              <p:cond delay="0"/>
+                            </p:stCondLst>
+                            <p:childTnLst>
                               <p:par>
-                                <p:cTn id="7" presetID="1" presetClass="entr" presetSubtype="0" fill="hold" grpId="0" nodeType="withEffect">
+                                <p:cTn id="9" presetID="1" presetClass="entr" presetSubtype="0" fill="hold" grpId="0" nodeType="clickEffect">
                                   <p:stCondLst>
                                     <p:cond delay="0"/>
                                   </p:stCondLst>
                                   <p:childTnLst>
                                     <p:set>
                                       <p:cBhvr>
-                                        <p:cTn id="8" dur="1" fill="hold">
+                                        <p:cTn id="10" dur="1" fill="hold">
                                           <p:stCondLst>
                                             <p:cond delay="0"/>
                                           </p:stCondLst>
                                         </p:cTn>
                                         <p:tgtEl>
-                                          <p:spTgt spid="11"/>
+                                          <p:spTgt spid="12"/>
+                                        </p:tgtEl>
+                                        <p:attrNameLst>
+                                          <p:attrName>style.visibility</p:attrName>
+                                        </p:attrNameLst>
+                                      </p:cBhvr>
+                                      <p:to>
+                                        <p:strVal val="visible"/>
+                                      </p:to>
+                                    </p:set>
+                                  </p:childTnLst>
+                                </p:cTn>
+                              </p:par>
+                            </p:childTnLst>
+                          </p:cTn>
+                        </p:par>
+                      </p:childTnLst>
+                    </p:cTn>
+                  </p:par>
+                  <p:par>
+                    <p:cTn id="11" fill="hold">
+                      <p:stCondLst>
+                        <p:cond delay="indefinite"/>
+                      </p:stCondLst>
+                      <p:childTnLst>
+                        <p:par>
+                          <p:cTn id="12" fill="hold">
+                            <p:stCondLst>
+                              <p:cond delay="0"/>
+                            </p:stCondLst>
+                            <p:childTnLst>
+                              <p:par>
+                                <p:cTn id="13" presetID="1" presetClass="entr" presetSubtype="0" fill="hold" grpId="0" nodeType="clickEffect">
+                                  <p:stCondLst>
+                                    <p:cond delay="0"/>
+                                  </p:stCondLst>
+                                  <p:childTnLst>
+                                    <p:set>
+                                      <p:cBhvr>
+                                        <p:cTn id="14" dur="1" fill="hold">
+                                          <p:stCondLst>
+                                            <p:cond delay="0"/>
+                                          </p:stCondLst>
+                                        </p:cTn>
+                                        <p:tgtEl>
+                                          <p:spTgt spid="13"/>
                                         </p:tgtEl>
                                         <p:attrNameLst>
                                           <p:attrName>style.visibility</p:attrName>
@@ -5224,13 +5069,15 @@
       </p:par>
     </p:tnLst>
     <p:bldLst>
-      <p:bldP spid="11" grpId="0"/>
+      <p:bldP spid="8" grpId="0" animBg="1"/>
+      <p:bldP spid="12" grpId="0" animBg="1"/>
+      <p:bldP spid="13" grpId="0" animBg="1"/>
     </p:bldLst>
   </p:timing>
 </p:sld>
 </file>
 
-<file path=ppt/slides/slide16.xml><?xml version="1.0" encoding="utf-8"?>
+<file path=ppt/slides/slide13.xml><?xml version="1.0" encoding="utf-8"?>
 <p:sld xmlns:a="http://schemas.openxmlformats.org/drawingml/2006/main" xmlns:r="http://schemas.openxmlformats.org/officeDocument/2006/relationships" xmlns:p="http://schemas.openxmlformats.org/presentationml/2006/main">
   <p:cSld>
     <p:spTree>
@@ -5306,7 +5153,29 @@
           <a:p>
             <a:r>
               <a:rPr lang="ja-JP" altLang="en-US" dirty="0"/>
-              <a:t>レビュー用エージェントを起動する（仕様コンテキストと差分をファイル参照させる）</a:t>
+              <a:t>メインエージェント🤖は</a:t>
+            </a:r>
+            <a:endParaRPr lang="en-US" altLang="ja-JP" dirty="0"/>
+          </a:p>
+          <a:p>
+            <a:r>
+              <a:rPr lang="ja-JP" altLang="en-US" dirty="0"/>
+              <a:t>レビュー用</a:t>
+            </a:r>
+            <a:r>
+              <a:rPr lang="ja-JP" altLang="en-US" b="1" dirty="0"/>
+              <a:t>サブ</a:t>
+            </a:r>
+            <a:r>
+              <a:rPr lang="ja-JP" altLang="en-US" dirty="0"/>
+              <a:t>エージェント🤖🤖🤖🤖🤖🤖を起動する</a:t>
+            </a:r>
+            <a:endParaRPr lang="en-US" altLang="ja-JP" dirty="0"/>
+          </a:p>
+          <a:p>
+            <a:r>
+              <a:rPr lang="ja-JP" altLang="en-US" dirty="0"/>
+              <a:t>（仕様コンテキストと差分をファイル参照させる）</a:t>
             </a:r>
           </a:p>
         </p:txBody>
@@ -5333,7 +5202,7 @@
         </p:blipFill>
         <p:spPr>
           <a:xfrm>
-            <a:off x="704850" y="1886275"/>
+            <a:off x="704850" y="2600908"/>
             <a:ext cx="8496300" cy="3085450"/>
           </a:xfrm>
           <a:prstGeom prst="rect">
@@ -5341,6 +5210,402 @@
           </a:prstGeom>
         </p:spPr>
       </p:pic>
+      <p:sp>
+        <p:nvSpPr>
+          <p:cNvPr id="2" name="テキスト ボックス 1">
+            <a:extLst>
+              <a:ext uri="{FF2B5EF4-FFF2-40B4-BE49-F238E27FC236}">
+                <a16:creationId xmlns:a16="http://schemas.microsoft.com/office/drawing/2014/main" id="{E7E0A95B-8A58-B976-A2CA-7EEDDD9B5E95}"/>
+              </a:ext>
+            </a:extLst>
+          </p:cNvPr>
+          <p:cNvSpPr txBox="1"/>
+          <p:nvPr/>
+        </p:nvSpPr>
+        <p:spPr>
+          <a:xfrm>
+            <a:off x="3188804" y="5807632"/>
+            <a:ext cx="6012346" cy="369332"/>
+          </a:xfrm>
+          <a:prstGeom prst="rect">
+            <a:avLst/>
+          </a:prstGeom>
+          <a:noFill/>
+        </p:spPr>
+        <p:txBody>
+          <a:bodyPr wrap="square" rtlCol="0">
+            <a:spAutoFit/>
+          </a:bodyPr>
+          <a:lstStyle/>
+          <a:p>
+            <a:r>
+              <a:rPr lang="ja-JP" altLang="en-US" dirty="0"/>
+              <a:t>↑🤖レビュー観点毎に専門エージェントを定義している</a:t>
+            </a:r>
+            <a:endParaRPr kumimoji="1" lang="ja-JP" altLang="en-US" dirty="0"/>
+          </a:p>
+        </p:txBody>
+      </p:sp>
+      <p:sp>
+        <p:nvSpPr>
+          <p:cNvPr id="5" name="四角形: 角を丸くする 4">
+            <a:extLst>
+              <a:ext uri="{FF2B5EF4-FFF2-40B4-BE49-F238E27FC236}">
+                <a16:creationId xmlns:a16="http://schemas.microsoft.com/office/drawing/2014/main" id="{7B36E846-A20B-5D89-7461-95B1DF770473}"/>
+              </a:ext>
+            </a:extLst>
+          </p:cNvPr>
+          <p:cNvSpPr/>
+          <p:nvPr/>
+        </p:nvSpPr>
+        <p:spPr>
+          <a:xfrm>
+            <a:off x="956556" y="2885336"/>
+            <a:ext cx="2484276" cy="255632"/>
+          </a:xfrm>
+          <a:prstGeom prst="roundRect">
+            <a:avLst/>
+          </a:prstGeom>
+          <a:noFill/>
+          <a:ln w="19050" cap="flat" cmpd="sng" algn="ctr">
+            <a:solidFill>
+              <a:srgbClr val="FDD000"/>
+            </a:solidFill>
+            <a:prstDash val="solid"/>
+            <a:round/>
+            <a:headEnd type="none" w="med" len="med"/>
+            <a:tailEnd type="none" w="med" len="med"/>
+          </a:ln>
+        </p:spPr>
+        <p:style>
+          <a:lnRef idx="0">
+            <a:scrgbClr r="0" g="0" b="0"/>
+          </a:lnRef>
+          <a:fillRef idx="0">
+            <a:scrgbClr r="0" g="0" b="0"/>
+          </a:fillRef>
+          <a:effectRef idx="0">
+            <a:scrgbClr r="0" g="0" b="0"/>
+          </a:effectRef>
+          <a:fontRef idx="minor">
+            <a:schemeClr val="accent1"/>
+          </a:fontRef>
+        </p:style>
+        <p:txBody>
+          <a:bodyPr rtlCol="0" anchor="ctr"/>
+          <a:lstStyle/>
+          <a:p>
+            <a:pPr algn="ctr"/>
+            <a:endParaRPr kumimoji="1" lang="ja-JP" altLang="en-US"/>
+          </a:p>
+        </p:txBody>
+      </p:sp>
+      <p:sp>
+        <p:nvSpPr>
+          <p:cNvPr id="6" name="四角形: 角を丸くする 5">
+            <a:extLst>
+              <a:ext uri="{FF2B5EF4-FFF2-40B4-BE49-F238E27FC236}">
+                <a16:creationId xmlns:a16="http://schemas.microsoft.com/office/drawing/2014/main" id="{45567534-A3CD-0EB3-7BC1-8C4AE3442E62}"/>
+              </a:ext>
+            </a:extLst>
+          </p:cNvPr>
+          <p:cNvSpPr/>
+          <p:nvPr/>
+        </p:nvSpPr>
+        <p:spPr>
+          <a:xfrm>
+            <a:off x="970128" y="3310841"/>
+            <a:ext cx="2484276" cy="255632"/>
+          </a:xfrm>
+          <a:prstGeom prst="roundRect">
+            <a:avLst/>
+          </a:prstGeom>
+          <a:noFill/>
+          <a:ln w="19050" cap="flat" cmpd="sng" algn="ctr">
+            <a:solidFill>
+              <a:srgbClr val="FDD000"/>
+            </a:solidFill>
+            <a:prstDash val="solid"/>
+            <a:round/>
+            <a:headEnd type="none" w="med" len="med"/>
+            <a:tailEnd type="none" w="med" len="med"/>
+          </a:ln>
+        </p:spPr>
+        <p:style>
+          <a:lnRef idx="0">
+            <a:scrgbClr r="0" g="0" b="0"/>
+          </a:lnRef>
+          <a:fillRef idx="0">
+            <a:scrgbClr r="0" g="0" b="0"/>
+          </a:fillRef>
+          <a:effectRef idx="0">
+            <a:scrgbClr r="0" g="0" b="0"/>
+          </a:effectRef>
+          <a:fontRef idx="minor">
+            <a:schemeClr val="accent1"/>
+          </a:fontRef>
+        </p:style>
+        <p:txBody>
+          <a:bodyPr rtlCol="0" anchor="ctr"/>
+          <a:lstStyle/>
+          <a:p>
+            <a:pPr algn="ctr"/>
+            <a:endParaRPr kumimoji="1" lang="ja-JP" altLang="en-US"/>
+          </a:p>
+        </p:txBody>
+      </p:sp>
+      <p:sp>
+        <p:nvSpPr>
+          <p:cNvPr id="7" name="四角形: 角を丸くする 6">
+            <a:extLst>
+              <a:ext uri="{FF2B5EF4-FFF2-40B4-BE49-F238E27FC236}">
+                <a16:creationId xmlns:a16="http://schemas.microsoft.com/office/drawing/2014/main" id="{BAB2E0D9-8077-9057-A1D4-CD3984948BB9}"/>
+              </a:ext>
+            </a:extLst>
+          </p:cNvPr>
+          <p:cNvSpPr/>
+          <p:nvPr/>
+        </p:nvSpPr>
+        <p:spPr>
+          <a:xfrm>
+            <a:off x="956556" y="3785436"/>
+            <a:ext cx="2484276" cy="255632"/>
+          </a:xfrm>
+          <a:prstGeom prst="roundRect">
+            <a:avLst/>
+          </a:prstGeom>
+          <a:noFill/>
+          <a:ln w="19050" cap="flat" cmpd="sng" algn="ctr">
+            <a:solidFill>
+              <a:srgbClr val="FDD000"/>
+            </a:solidFill>
+            <a:prstDash val="solid"/>
+            <a:round/>
+            <a:headEnd type="none" w="med" len="med"/>
+            <a:tailEnd type="none" w="med" len="med"/>
+          </a:ln>
+        </p:spPr>
+        <p:style>
+          <a:lnRef idx="0">
+            <a:scrgbClr r="0" g="0" b="0"/>
+          </a:lnRef>
+          <a:fillRef idx="0">
+            <a:scrgbClr r="0" g="0" b="0"/>
+          </a:fillRef>
+          <a:effectRef idx="0">
+            <a:scrgbClr r="0" g="0" b="0"/>
+          </a:effectRef>
+          <a:fontRef idx="minor">
+            <a:schemeClr val="accent1"/>
+          </a:fontRef>
+        </p:style>
+        <p:txBody>
+          <a:bodyPr rtlCol="0" anchor="ctr"/>
+          <a:lstStyle/>
+          <a:p>
+            <a:pPr algn="ctr"/>
+            <a:endParaRPr kumimoji="1" lang="ja-JP" altLang="en-US"/>
+          </a:p>
+        </p:txBody>
+      </p:sp>
+      <p:sp>
+        <p:nvSpPr>
+          <p:cNvPr id="10" name="四角形: 角を丸くする 9">
+            <a:extLst>
+              <a:ext uri="{FF2B5EF4-FFF2-40B4-BE49-F238E27FC236}">
+                <a16:creationId xmlns:a16="http://schemas.microsoft.com/office/drawing/2014/main" id="{BE1B3BB4-A6B2-017D-8225-4D1DE6053391}"/>
+              </a:ext>
+            </a:extLst>
+          </p:cNvPr>
+          <p:cNvSpPr/>
+          <p:nvPr/>
+        </p:nvSpPr>
+        <p:spPr>
+          <a:xfrm>
+            <a:off x="956556" y="4257092"/>
+            <a:ext cx="2484276" cy="255632"/>
+          </a:xfrm>
+          <a:prstGeom prst="roundRect">
+            <a:avLst/>
+          </a:prstGeom>
+          <a:noFill/>
+          <a:ln w="19050" cap="flat" cmpd="sng" algn="ctr">
+            <a:solidFill>
+              <a:srgbClr val="FDD000"/>
+            </a:solidFill>
+            <a:prstDash val="solid"/>
+            <a:round/>
+            <a:headEnd type="none" w="med" len="med"/>
+            <a:tailEnd type="none" w="med" len="med"/>
+          </a:ln>
+        </p:spPr>
+        <p:style>
+          <a:lnRef idx="0">
+            <a:scrgbClr r="0" g="0" b="0"/>
+          </a:lnRef>
+          <a:fillRef idx="0">
+            <a:scrgbClr r="0" g="0" b="0"/>
+          </a:fillRef>
+          <a:effectRef idx="0">
+            <a:scrgbClr r="0" g="0" b="0"/>
+          </a:effectRef>
+          <a:fontRef idx="minor">
+            <a:schemeClr val="accent1"/>
+          </a:fontRef>
+        </p:style>
+        <p:txBody>
+          <a:bodyPr rtlCol="0" anchor="ctr"/>
+          <a:lstStyle/>
+          <a:p>
+            <a:pPr algn="ctr"/>
+            <a:endParaRPr kumimoji="1" lang="ja-JP" altLang="en-US"/>
+          </a:p>
+        </p:txBody>
+      </p:sp>
+      <p:sp>
+        <p:nvSpPr>
+          <p:cNvPr id="11" name="四角形: 角を丸くする 10">
+            <a:extLst>
+              <a:ext uri="{FF2B5EF4-FFF2-40B4-BE49-F238E27FC236}">
+                <a16:creationId xmlns:a16="http://schemas.microsoft.com/office/drawing/2014/main" id="{C795918F-7795-032A-266E-43568F901604}"/>
+              </a:ext>
+            </a:extLst>
+          </p:cNvPr>
+          <p:cNvSpPr/>
+          <p:nvPr/>
+        </p:nvSpPr>
+        <p:spPr>
+          <a:xfrm>
+            <a:off x="956556" y="4728748"/>
+            <a:ext cx="2484276" cy="255632"/>
+          </a:xfrm>
+          <a:prstGeom prst="roundRect">
+            <a:avLst/>
+          </a:prstGeom>
+          <a:noFill/>
+          <a:ln w="19050" cap="flat" cmpd="sng" algn="ctr">
+            <a:solidFill>
+              <a:srgbClr val="FDD000"/>
+            </a:solidFill>
+            <a:prstDash val="solid"/>
+            <a:round/>
+            <a:headEnd type="none" w="med" len="med"/>
+            <a:tailEnd type="none" w="med" len="med"/>
+          </a:ln>
+        </p:spPr>
+        <p:style>
+          <a:lnRef idx="0">
+            <a:scrgbClr r="0" g="0" b="0"/>
+          </a:lnRef>
+          <a:fillRef idx="0">
+            <a:scrgbClr r="0" g="0" b="0"/>
+          </a:fillRef>
+          <a:effectRef idx="0">
+            <a:scrgbClr r="0" g="0" b="0"/>
+          </a:effectRef>
+          <a:fontRef idx="minor">
+            <a:schemeClr val="accent1"/>
+          </a:fontRef>
+        </p:style>
+        <p:txBody>
+          <a:bodyPr rtlCol="0" anchor="ctr"/>
+          <a:lstStyle/>
+          <a:p>
+            <a:pPr algn="ctr"/>
+            <a:endParaRPr kumimoji="1" lang="ja-JP" altLang="en-US"/>
+          </a:p>
+        </p:txBody>
+      </p:sp>
+      <p:sp>
+        <p:nvSpPr>
+          <p:cNvPr id="12" name="四角形: 角を丸くする 11">
+            <a:extLst>
+              <a:ext uri="{FF2B5EF4-FFF2-40B4-BE49-F238E27FC236}">
+                <a16:creationId xmlns:a16="http://schemas.microsoft.com/office/drawing/2014/main" id="{2644AC9A-AA87-B401-6DEC-69D9B5C79BBB}"/>
+              </a:ext>
+            </a:extLst>
+          </p:cNvPr>
+          <p:cNvSpPr/>
+          <p:nvPr/>
+        </p:nvSpPr>
+        <p:spPr>
+          <a:xfrm>
+            <a:off x="956556" y="5189592"/>
+            <a:ext cx="2484276" cy="255632"/>
+          </a:xfrm>
+          <a:prstGeom prst="roundRect">
+            <a:avLst/>
+          </a:prstGeom>
+          <a:noFill/>
+          <a:ln w="19050" cap="flat" cmpd="sng" algn="ctr">
+            <a:solidFill>
+              <a:srgbClr val="FDD000"/>
+            </a:solidFill>
+            <a:prstDash val="solid"/>
+            <a:round/>
+            <a:headEnd type="none" w="med" len="med"/>
+            <a:tailEnd type="none" w="med" len="med"/>
+          </a:ln>
+        </p:spPr>
+        <p:style>
+          <a:lnRef idx="0">
+            <a:scrgbClr r="0" g="0" b="0"/>
+          </a:lnRef>
+          <a:fillRef idx="0">
+            <a:scrgbClr r="0" g="0" b="0"/>
+          </a:fillRef>
+          <a:effectRef idx="0">
+            <a:scrgbClr r="0" g="0" b="0"/>
+          </a:effectRef>
+          <a:fontRef idx="minor">
+            <a:schemeClr val="accent1"/>
+          </a:fontRef>
+        </p:style>
+        <p:txBody>
+          <a:bodyPr rtlCol="0" anchor="ctr"/>
+          <a:lstStyle/>
+          <a:p>
+            <a:pPr algn="ctr"/>
+            <a:endParaRPr kumimoji="1" lang="ja-JP" altLang="en-US"/>
+          </a:p>
+        </p:txBody>
+      </p:sp>
+      <p:sp>
+        <p:nvSpPr>
+          <p:cNvPr id="13" name="テキスト ボックス 12">
+            <a:extLst>
+              <a:ext uri="{FF2B5EF4-FFF2-40B4-BE49-F238E27FC236}">
+                <a16:creationId xmlns:a16="http://schemas.microsoft.com/office/drawing/2014/main" id="{882A717D-E28F-670F-0C9D-039BB1D6A89F}"/>
+              </a:ext>
+            </a:extLst>
+          </p:cNvPr>
+          <p:cNvSpPr txBox="1"/>
+          <p:nvPr/>
+        </p:nvSpPr>
+        <p:spPr>
+          <a:xfrm>
+            <a:off x="793814" y="6186347"/>
+            <a:ext cx="7327538" cy="307777"/>
+          </a:xfrm>
+          <a:prstGeom prst="rect">
+            <a:avLst/>
+          </a:prstGeom>
+          <a:noFill/>
+        </p:spPr>
+        <p:txBody>
+          <a:bodyPr wrap="square" rtlCol="0">
+            <a:spAutoFit/>
+          </a:bodyPr>
+          <a:lstStyle/>
+          <a:p>
+            <a:r>
+              <a:rPr lang="ja-JP" altLang="en-US" sz="1400" dirty="0"/>
+              <a:t>今回は６エージェントだが、毎回全部見なくてもいいようにいくつかのパターンを用意</a:t>
+            </a:r>
+            <a:endParaRPr kumimoji="1" lang="ja-JP" altLang="en-US" sz="1400" dirty="0"/>
+          </a:p>
+        </p:txBody>
+      </p:sp>
     </p:spTree>
     <p:extLst>
       <p:ext uri="{BB962C8B-B14F-4D97-AF65-F5344CB8AC3E}">
@@ -5351,10 +5616,410 @@
   <p:clrMapOvr>
     <a:masterClrMapping/>
   </p:clrMapOvr>
+  <p:timing>
+    <p:tnLst>
+      <p:par>
+        <p:cTn id="1" dur="indefinite" restart="never" nodeType="tmRoot">
+          <p:childTnLst>
+            <p:seq concurrent="1" nextAc="seek">
+              <p:cTn id="2" dur="indefinite" nodeType="mainSeq">
+                <p:childTnLst>
+                  <p:par>
+                    <p:cTn id="3" fill="hold">
+                      <p:stCondLst>
+                        <p:cond delay="indefinite"/>
+                      </p:stCondLst>
+                      <p:childTnLst>
+                        <p:par>
+                          <p:cTn id="4" fill="hold">
+                            <p:stCondLst>
+                              <p:cond delay="0"/>
+                            </p:stCondLst>
+                            <p:childTnLst>
+                              <p:par>
+                                <p:cTn id="5" presetID="1" presetClass="entr" presetSubtype="0" fill="hold" grpId="0" nodeType="clickEffect">
+                                  <p:stCondLst>
+                                    <p:cond delay="0"/>
+                                  </p:stCondLst>
+                                  <p:childTnLst>
+                                    <p:set>
+                                      <p:cBhvr>
+                                        <p:cTn id="6" dur="1" fill="hold">
+                                          <p:stCondLst>
+                                            <p:cond delay="0"/>
+                                          </p:stCondLst>
+                                        </p:cTn>
+                                        <p:tgtEl>
+                                          <p:spTgt spid="2"/>
+                                        </p:tgtEl>
+                                        <p:attrNameLst>
+                                          <p:attrName>style.visibility</p:attrName>
+                                        </p:attrNameLst>
+                                      </p:cBhvr>
+                                      <p:to>
+                                        <p:strVal val="visible"/>
+                                      </p:to>
+                                    </p:set>
+                                  </p:childTnLst>
+                                </p:cTn>
+                              </p:par>
+                            </p:childTnLst>
+                          </p:cTn>
+                        </p:par>
+                      </p:childTnLst>
+                    </p:cTn>
+                  </p:par>
+                  <p:par>
+                    <p:cTn id="7" fill="hold">
+                      <p:stCondLst>
+                        <p:cond delay="indefinite"/>
+                      </p:stCondLst>
+                      <p:childTnLst>
+                        <p:par>
+                          <p:cTn id="8" fill="hold">
+                            <p:stCondLst>
+                              <p:cond delay="0"/>
+                            </p:stCondLst>
+                            <p:childTnLst>
+                              <p:par>
+                                <p:cTn id="9" presetID="1" presetClass="entr" presetSubtype="0" fill="hold" grpId="0" nodeType="clickEffect">
+                                  <p:stCondLst>
+                                    <p:cond delay="0"/>
+                                  </p:stCondLst>
+                                  <p:childTnLst>
+                                    <p:set>
+                                      <p:cBhvr>
+                                        <p:cTn id="10" dur="1" fill="hold">
+                                          <p:stCondLst>
+                                            <p:cond delay="0"/>
+                                          </p:stCondLst>
+                                        </p:cTn>
+                                        <p:tgtEl>
+                                          <p:spTgt spid="5"/>
+                                        </p:tgtEl>
+                                        <p:attrNameLst>
+                                          <p:attrName>style.visibility</p:attrName>
+                                        </p:attrNameLst>
+                                      </p:cBhvr>
+                                      <p:to>
+                                        <p:strVal val="visible"/>
+                                      </p:to>
+                                    </p:set>
+                                  </p:childTnLst>
+                                </p:cTn>
+                              </p:par>
+                            </p:childTnLst>
+                          </p:cTn>
+                        </p:par>
+                      </p:childTnLst>
+                    </p:cTn>
+                  </p:par>
+                  <p:par>
+                    <p:cTn id="11" fill="hold">
+                      <p:stCondLst>
+                        <p:cond delay="indefinite"/>
+                      </p:stCondLst>
+                      <p:childTnLst>
+                        <p:par>
+                          <p:cTn id="12" fill="hold">
+                            <p:stCondLst>
+                              <p:cond delay="0"/>
+                            </p:stCondLst>
+                            <p:childTnLst>
+                              <p:par>
+                                <p:cTn id="13" presetID="1" presetClass="entr" presetSubtype="0" fill="hold" grpId="0" nodeType="clickEffect">
+                                  <p:stCondLst>
+                                    <p:cond delay="0"/>
+                                  </p:stCondLst>
+                                  <p:childTnLst>
+                                    <p:set>
+                                      <p:cBhvr>
+                                        <p:cTn id="14" dur="1" fill="hold">
+                                          <p:stCondLst>
+                                            <p:cond delay="0"/>
+                                          </p:stCondLst>
+                                        </p:cTn>
+                                        <p:tgtEl>
+                                          <p:spTgt spid="6"/>
+                                        </p:tgtEl>
+                                        <p:attrNameLst>
+                                          <p:attrName>style.visibility</p:attrName>
+                                        </p:attrNameLst>
+                                      </p:cBhvr>
+                                      <p:to>
+                                        <p:strVal val="visible"/>
+                                      </p:to>
+                                    </p:set>
+                                  </p:childTnLst>
+                                </p:cTn>
+                              </p:par>
+                            </p:childTnLst>
+                          </p:cTn>
+                        </p:par>
+                      </p:childTnLst>
+                    </p:cTn>
+                  </p:par>
+                  <p:par>
+                    <p:cTn id="15" fill="hold">
+                      <p:stCondLst>
+                        <p:cond delay="indefinite"/>
+                      </p:stCondLst>
+                      <p:childTnLst>
+                        <p:par>
+                          <p:cTn id="16" fill="hold">
+                            <p:stCondLst>
+                              <p:cond delay="0"/>
+                            </p:stCondLst>
+                            <p:childTnLst>
+                              <p:par>
+                                <p:cTn id="17" presetID="1" presetClass="entr" presetSubtype="0" fill="hold" grpId="0" nodeType="clickEffect">
+                                  <p:stCondLst>
+                                    <p:cond delay="0"/>
+                                  </p:stCondLst>
+                                  <p:childTnLst>
+                                    <p:set>
+                                      <p:cBhvr>
+                                        <p:cTn id="18" dur="1" fill="hold">
+                                          <p:stCondLst>
+                                            <p:cond delay="0"/>
+                                          </p:stCondLst>
+                                        </p:cTn>
+                                        <p:tgtEl>
+                                          <p:spTgt spid="7"/>
+                                        </p:tgtEl>
+                                        <p:attrNameLst>
+                                          <p:attrName>style.visibility</p:attrName>
+                                        </p:attrNameLst>
+                                      </p:cBhvr>
+                                      <p:to>
+                                        <p:strVal val="visible"/>
+                                      </p:to>
+                                    </p:set>
+                                  </p:childTnLst>
+                                </p:cTn>
+                              </p:par>
+                            </p:childTnLst>
+                          </p:cTn>
+                        </p:par>
+                      </p:childTnLst>
+                    </p:cTn>
+                  </p:par>
+                  <p:par>
+                    <p:cTn id="19" fill="hold">
+                      <p:stCondLst>
+                        <p:cond delay="indefinite"/>
+                      </p:stCondLst>
+                      <p:childTnLst>
+                        <p:par>
+                          <p:cTn id="20" fill="hold">
+                            <p:stCondLst>
+                              <p:cond delay="0"/>
+                            </p:stCondLst>
+                            <p:childTnLst>
+                              <p:par>
+                                <p:cTn id="21" presetID="1" presetClass="entr" presetSubtype="0" fill="hold" grpId="0" nodeType="clickEffect">
+                                  <p:stCondLst>
+                                    <p:cond delay="0"/>
+                                  </p:stCondLst>
+                                  <p:childTnLst>
+                                    <p:set>
+                                      <p:cBhvr>
+                                        <p:cTn id="22" dur="1" fill="hold">
+                                          <p:stCondLst>
+                                            <p:cond delay="0"/>
+                                          </p:stCondLst>
+                                        </p:cTn>
+                                        <p:tgtEl>
+                                          <p:spTgt spid="10"/>
+                                        </p:tgtEl>
+                                        <p:attrNameLst>
+                                          <p:attrName>style.visibility</p:attrName>
+                                        </p:attrNameLst>
+                                      </p:cBhvr>
+                                      <p:to>
+                                        <p:strVal val="visible"/>
+                                      </p:to>
+                                    </p:set>
+                                  </p:childTnLst>
+                                </p:cTn>
+                              </p:par>
+                            </p:childTnLst>
+                          </p:cTn>
+                        </p:par>
+                      </p:childTnLst>
+                    </p:cTn>
+                  </p:par>
+                  <p:par>
+                    <p:cTn id="23" fill="hold">
+                      <p:stCondLst>
+                        <p:cond delay="indefinite"/>
+                      </p:stCondLst>
+                      <p:childTnLst>
+                        <p:par>
+                          <p:cTn id="24" fill="hold">
+                            <p:stCondLst>
+                              <p:cond delay="0"/>
+                            </p:stCondLst>
+                            <p:childTnLst>
+                              <p:par>
+                                <p:cTn id="25" presetID="1" presetClass="entr" presetSubtype="0" fill="hold" grpId="0" nodeType="clickEffect">
+                                  <p:stCondLst>
+                                    <p:cond delay="0"/>
+                                  </p:stCondLst>
+                                  <p:childTnLst>
+                                    <p:set>
+                                      <p:cBhvr>
+                                        <p:cTn id="26" dur="1" fill="hold">
+                                          <p:stCondLst>
+                                            <p:cond delay="0"/>
+                                          </p:stCondLst>
+                                        </p:cTn>
+                                        <p:tgtEl>
+                                          <p:spTgt spid="11"/>
+                                        </p:tgtEl>
+                                        <p:attrNameLst>
+                                          <p:attrName>style.visibility</p:attrName>
+                                        </p:attrNameLst>
+                                      </p:cBhvr>
+                                      <p:to>
+                                        <p:strVal val="visible"/>
+                                      </p:to>
+                                    </p:set>
+                                  </p:childTnLst>
+                                </p:cTn>
+                              </p:par>
+                            </p:childTnLst>
+                          </p:cTn>
+                        </p:par>
+                      </p:childTnLst>
+                    </p:cTn>
+                  </p:par>
+                  <p:par>
+                    <p:cTn id="27" fill="hold">
+                      <p:stCondLst>
+                        <p:cond delay="indefinite"/>
+                      </p:stCondLst>
+                      <p:childTnLst>
+                        <p:par>
+                          <p:cTn id="28" fill="hold">
+                            <p:stCondLst>
+                              <p:cond delay="0"/>
+                            </p:stCondLst>
+                            <p:childTnLst>
+                              <p:par>
+                                <p:cTn id="29" presetID="1" presetClass="entr" presetSubtype="0" fill="hold" grpId="0" nodeType="clickEffect">
+                                  <p:stCondLst>
+                                    <p:cond delay="0"/>
+                                  </p:stCondLst>
+                                  <p:childTnLst>
+                                    <p:set>
+                                      <p:cBhvr>
+                                        <p:cTn id="30" dur="1" fill="hold">
+                                          <p:stCondLst>
+                                            <p:cond delay="0"/>
+                                          </p:stCondLst>
+                                        </p:cTn>
+                                        <p:tgtEl>
+                                          <p:spTgt spid="12"/>
+                                        </p:tgtEl>
+                                        <p:attrNameLst>
+                                          <p:attrName>style.visibility</p:attrName>
+                                        </p:attrNameLst>
+                                      </p:cBhvr>
+                                      <p:to>
+                                        <p:strVal val="visible"/>
+                                      </p:to>
+                                    </p:set>
+                                  </p:childTnLst>
+                                </p:cTn>
+                              </p:par>
+                            </p:childTnLst>
+                          </p:cTn>
+                        </p:par>
+                      </p:childTnLst>
+                    </p:cTn>
+                  </p:par>
+                  <p:par>
+                    <p:cTn id="31" fill="hold">
+                      <p:stCondLst>
+                        <p:cond delay="indefinite"/>
+                      </p:stCondLst>
+                      <p:childTnLst>
+                        <p:par>
+                          <p:cTn id="32" fill="hold">
+                            <p:stCondLst>
+                              <p:cond delay="0"/>
+                            </p:stCondLst>
+                            <p:childTnLst>
+                              <p:par>
+                                <p:cTn id="33" presetID="1" presetClass="entr" presetSubtype="0" fill="hold" grpId="0" nodeType="clickEffect">
+                                  <p:stCondLst>
+                                    <p:cond delay="0"/>
+                                  </p:stCondLst>
+                                  <p:childTnLst>
+                                    <p:set>
+                                      <p:cBhvr>
+                                        <p:cTn id="34" dur="1" fill="hold">
+                                          <p:stCondLst>
+                                            <p:cond delay="0"/>
+                                          </p:stCondLst>
+                                        </p:cTn>
+                                        <p:tgtEl>
+                                          <p:spTgt spid="13"/>
+                                        </p:tgtEl>
+                                        <p:attrNameLst>
+                                          <p:attrName>style.visibility</p:attrName>
+                                        </p:attrNameLst>
+                                      </p:cBhvr>
+                                      <p:to>
+                                        <p:strVal val="visible"/>
+                                      </p:to>
+                                    </p:set>
+                                  </p:childTnLst>
+                                </p:cTn>
+                              </p:par>
+                            </p:childTnLst>
+                          </p:cTn>
+                        </p:par>
+                      </p:childTnLst>
+                    </p:cTn>
+                  </p:par>
+                </p:childTnLst>
+              </p:cTn>
+              <p:prevCondLst>
+                <p:cond evt="onPrev" delay="0">
+                  <p:tgtEl>
+                    <p:sldTgt/>
+                  </p:tgtEl>
+                </p:cond>
+              </p:prevCondLst>
+              <p:nextCondLst>
+                <p:cond evt="onNext" delay="0">
+                  <p:tgtEl>
+                    <p:sldTgt/>
+                  </p:tgtEl>
+                </p:cond>
+              </p:nextCondLst>
+            </p:seq>
+          </p:childTnLst>
+        </p:cTn>
+      </p:par>
+    </p:tnLst>
+    <p:bldLst>
+      <p:bldP spid="2" grpId="0"/>
+      <p:bldP spid="5" grpId="0" animBg="1"/>
+      <p:bldP spid="6" grpId="0" animBg="1"/>
+      <p:bldP spid="7" grpId="0" animBg="1"/>
+      <p:bldP spid="10" grpId="0" animBg="1"/>
+      <p:bldP spid="11" grpId="0" animBg="1"/>
+      <p:bldP spid="12" grpId="0" animBg="1"/>
+      <p:bldP spid="13" grpId="0"/>
+    </p:bldLst>
+  </p:timing>
 </p:sld>
 </file>
 
-<file path=ppt/slides/slide17.xml><?xml version="1.0" encoding="utf-8"?>
+<file path=ppt/slides/slide14.xml><?xml version="1.0" encoding="utf-8"?>
 <p:sld xmlns:a="http://schemas.openxmlformats.org/drawingml/2006/main" xmlns:r="http://schemas.openxmlformats.org/officeDocument/2006/relationships" xmlns:p="http://schemas.openxmlformats.org/presentationml/2006/main">
   <p:cSld>
     <p:spTree>
@@ -5409,68 +6074,6 @@
       </p:sp>
       <p:pic>
         <p:nvPicPr>
-          <p:cNvPr id="5" name="コンテンツ プレースホルダー 4">
-            <a:extLst>
-              <a:ext uri="{FF2B5EF4-FFF2-40B4-BE49-F238E27FC236}">
-                <a16:creationId xmlns:a16="http://schemas.microsoft.com/office/drawing/2014/main" id="{D3094BE5-9414-9BFD-9A57-C7D4853739C0}"/>
-              </a:ext>
-            </a:extLst>
-          </p:cNvPr>
-          <p:cNvPicPr>
-            <a:picLocks noGrp="1" noChangeAspect="1"/>
-          </p:cNvPicPr>
-          <p:nvPr>
-            <p:ph idx="1"/>
-          </p:nvPr>
-        </p:nvPicPr>
-        <p:blipFill>
-          <a:blip r:embed="rId2"/>
-          <a:stretch>
-            <a:fillRect/>
-          </a:stretch>
-        </p:blipFill>
-        <p:spPr>
-          <a:xfrm>
-            <a:off x="560512" y="980728"/>
-            <a:ext cx="8496300" cy="1808693"/>
-          </a:xfrm>
-          <a:prstGeom prst="rect">
-            <a:avLst/>
-          </a:prstGeom>
-        </p:spPr>
-      </p:pic>
-      <p:pic>
-        <p:nvPicPr>
-          <p:cNvPr id="7" name="図 6">
-            <a:extLst>
-              <a:ext uri="{FF2B5EF4-FFF2-40B4-BE49-F238E27FC236}">
-                <a16:creationId xmlns:a16="http://schemas.microsoft.com/office/drawing/2014/main" id="{8BE247AE-E301-544C-293B-46E52B6C3CAD}"/>
-              </a:ext>
-            </a:extLst>
-          </p:cNvPr>
-          <p:cNvPicPr>
-            <a:picLocks noChangeAspect="1"/>
-          </p:cNvPicPr>
-          <p:nvPr/>
-        </p:nvPicPr>
-        <p:blipFill>
-          <a:blip r:embed="rId3"/>
-          <a:stretch>
-            <a:fillRect/>
-          </a:stretch>
-        </p:blipFill>
-        <p:spPr>
-          <a:xfrm>
-            <a:off x="578324" y="2888940"/>
-            <a:ext cx="8478488" cy="659534"/>
-          </a:xfrm>
-          <a:prstGeom prst="rect">
-            <a:avLst/>
-          </a:prstGeom>
-        </p:spPr>
-      </p:pic>
-      <p:pic>
-        <p:nvPicPr>
           <p:cNvPr id="9" name="図 8">
             <a:extLst>
               <a:ext uri="{FF2B5EF4-FFF2-40B4-BE49-F238E27FC236}">
@@ -5484,14 +6087,14 @@
           <p:nvPr/>
         </p:nvPicPr>
         <p:blipFill>
-          <a:blip r:embed="rId4"/>
+          <a:blip r:embed="rId2"/>
           <a:stretch>
             <a:fillRect/>
           </a:stretch>
         </p:blipFill>
         <p:spPr>
           <a:xfrm>
-            <a:off x="578324" y="3647993"/>
+            <a:off x="429960" y="1418596"/>
             <a:ext cx="8478488" cy="3035429"/>
           </a:xfrm>
           <a:prstGeom prst="rect">
@@ -5514,15 +6117,739 @@
           <p:nvPr/>
         </p:nvPicPr>
         <p:blipFill>
-          <a:blip r:embed="rId5"/>
+          <a:blip r:embed="rId3"/>
           <a:stretch>
             <a:fillRect/>
           </a:stretch>
         </p:blipFill>
         <p:spPr>
           <a:xfrm>
-            <a:off x="6786308" y="5142802"/>
+            <a:off x="429960" y="4742019"/>
             <a:ext cx="3124636" cy="1667108"/>
+          </a:xfrm>
+          <a:prstGeom prst="rect">
+            <a:avLst/>
+          </a:prstGeom>
+        </p:spPr>
+      </p:pic>
+      <p:sp>
+        <p:nvSpPr>
+          <p:cNvPr id="2" name="四角形: 角を丸くする 1">
+            <a:extLst>
+              <a:ext uri="{FF2B5EF4-FFF2-40B4-BE49-F238E27FC236}">
+                <a16:creationId xmlns:a16="http://schemas.microsoft.com/office/drawing/2014/main" id="{CAB91FD7-7833-DB4F-2BC7-D36489CE23F8}"/>
+              </a:ext>
+            </a:extLst>
+          </p:cNvPr>
+          <p:cNvSpPr/>
+          <p:nvPr/>
+        </p:nvSpPr>
+        <p:spPr>
+          <a:xfrm>
+            <a:off x="560512" y="1554185"/>
+            <a:ext cx="1584176" cy="182627"/>
+          </a:xfrm>
+          <a:prstGeom prst="roundRect">
+            <a:avLst/>
+          </a:prstGeom>
+          <a:noFill/>
+          <a:ln w="19050" cap="flat" cmpd="sng" algn="ctr">
+            <a:solidFill>
+              <a:srgbClr val="FDD000"/>
+            </a:solidFill>
+            <a:prstDash val="solid"/>
+            <a:round/>
+            <a:headEnd type="none" w="med" len="med"/>
+            <a:tailEnd type="none" w="med" len="med"/>
+          </a:ln>
+        </p:spPr>
+        <p:style>
+          <a:lnRef idx="0">
+            <a:scrgbClr r="0" g="0" b="0"/>
+          </a:lnRef>
+          <a:fillRef idx="0">
+            <a:scrgbClr r="0" g="0" b="0"/>
+          </a:fillRef>
+          <a:effectRef idx="0">
+            <a:scrgbClr r="0" g="0" b="0"/>
+          </a:effectRef>
+          <a:fontRef idx="minor">
+            <a:schemeClr val="accent1"/>
+          </a:fontRef>
+        </p:style>
+        <p:txBody>
+          <a:bodyPr rtlCol="0" anchor="ctr"/>
+          <a:lstStyle/>
+          <a:p>
+            <a:pPr algn="ctr"/>
+            <a:endParaRPr kumimoji="1" lang="ja-JP" altLang="en-US"/>
+          </a:p>
+        </p:txBody>
+      </p:sp>
+      <p:sp>
+        <p:nvSpPr>
+          <p:cNvPr id="4" name="テキスト ボックス 3">
+            <a:extLst>
+              <a:ext uri="{FF2B5EF4-FFF2-40B4-BE49-F238E27FC236}">
+                <a16:creationId xmlns:a16="http://schemas.microsoft.com/office/drawing/2014/main" id="{F235E428-17E5-5855-C440-8C862904EDCF}"/>
+              </a:ext>
+            </a:extLst>
+          </p:cNvPr>
+          <p:cNvSpPr txBox="1"/>
+          <p:nvPr/>
+        </p:nvSpPr>
+        <p:spPr>
+          <a:xfrm>
+            <a:off x="344488" y="999505"/>
+            <a:ext cx="6012346" cy="369332"/>
+          </a:xfrm>
+          <a:prstGeom prst="rect">
+            <a:avLst/>
+          </a:prstGeom>
+          <a:noFill/>
+        </p:spPr>
+        <p:txBody>
+          <a:bodyPr wrap="square" rtlCol="0">
+            <a:spAutoFit/>
+          </a:bodyPr>
+          <a:lstStyle/>
+          <a:p>
+            <a:r>
+              <a:rPr lang="ja-JP" altLang="en-US" dirty="0"/>
+              <a:t>↓🤖</a:t>
+            </a:r>
+            <a:r>
+              <a:rPr lang="ja-JP" altLang="en-US" b="1" dirty="0"/>
+              <a:t>サブ</a:t>
+            </a:r>
+            <a:r>
+              <a:rPr lang="ja-JP" altLang="en-US" dirty="0"/>
+              <a:t>サブエージェントは</a:t>
+            </a:r>
+            <a:r>
+              <a:rPr lang="en-US" altLang="ja-JP" dirty="0"/>
+              <a:t>Json</a:t>
+            </a:r>
+            <a:r>
+              <a:rPr lang="ja-JP" altLang="en-US" dirty="0"/>
+              <a:t>でレビュー結果を返す</a:t>
+            </a:r>
+            <a:endParaRPr kumimoji="1" lang="ja-JP" altLang="en-US" dirty="0"/>
+          </a:p>
+        </p:txBody>
+      </p:sp>
+      <p:sp>
+        <p:nvSpPr>
+          <p:cNvPr id="12" name="テキスト ボックス 11">
+            <a:extLst>
+              <a:ext uri="{FF2B5EF4-FFF2-40B4-BE49-F238E27FC236}">
+                <a16:creationId xmlns:a16="http://schemas.microsoft.com/office/drawing/2014/main" id="{79D31438-5531-5207-CF07-DCD8E5234398}"/>
+              </a:ext>
+            </a:extLst>
+          </p:cNvPr>
+          <p:cNvSpPr txBox="1"/>
+          <p:nvPr/>
+        </p:nvSpPr>
+        <p:spPr>
+          <a:xfrm>
+            <a:off x="3561820" y="4836909"/>
+            <a:ext cx="6012346" cy="369332"/>
+          </a:xfrm>
+          <a:prstGeom prst="rect">
+            <a:avLst/>
+          </a:prstGeom>
+          <a:noFill/>
+        </p:spPr>
+        <p:txBody>
+          <a:bodyPr wrap="square" rtlCol="0">
+            <a:spAutoFit/>
+          </a:bodyPr>
+          <a:lstStyle/>
+          <a:p>
+            <a:r>
+              <a:rPr lang="ja-JP" altLang="en-US" dirty="0"/>
+              <a:t>←🤖メインエージェントは</a:t>
+            </a:r>
+            <a:r>
+              <a:rPr lang="en-US" altLang="ja-JP" dirty="0"/>
+              <a:t>Json</a:t>
+            </a:r>
+            <a:r>
+              <a:rPr lang="ja-JP" altLang="en-US" dirty="0"/>
+              <a:t>を読み取って集計する</a:t>
+            </a:r>
+            <a:endParaRPr lang="en-US" altLang="ja-JP" dirty="0"/>
+          </a:p>
+        </p:txBody>
+      </p:sp>
+      <p:sp>
+        <p:nvSpPr>
+          <p:cNvPr id="14" name="テキスト ボックス 13">
+            <a:extLst>
+              <a:ext uri="{FF2B5EF4-FFF2-40B4-BE49-F238E27FC236}">
+                <a16:creationId xmlns:a16="http://schemas.microsoft.com/office/drawing/2014/main" id="{24B2A42D-826F-7CD5-DB9C-7D72E3BA3DAD}"/>
+              </a:ext>
+            </a:extLst>
+          </p:cNvPr>
+          <p:cNvSpPr txBox="1"/>
+          <p:nvPr/>
+        </p:nvSpPr>
+        <p:spPr>
+          <a:xfrm>
+            <a:off x="3875668" y="5206241"/>
+            <a:ext cx="4951476" cy="1477328"/>
+          </a:xfrm>
+          <a:prstGeom prst="rect">
+            <a:avLst/>
+          </a:prstGeom>
+          <a:noFill/>
+        </p:spPr>
+        <p:txBody>
+          <a:bodyPr wrap="square">
+            <a:spAutoFit/>
+          </a:bodyPr>
+          <a:lstStyle/>
+          <a:p>
+            <a:r>
+              <a:rPr lang="ja-JP" altLang="en-US" dirty="0"/>
+              <a:t>集計観点</a:t>
+            </a:r>
+            <a:endParaRPr lang="en-US" altLang="ja-JP" dirty="0"/>
+          </a:p>
+          <a:p>
+            <a:pPr marL="285750" indent="-285750">
+              <a:buFont typeface="Arial" panose="020B0604020202020204" pitchFamily="34" charset="0"/>
+              <a:buChar char="•"/>
+            </a:pPr>
+            <a:r>
+              <a:rPr lang="ja-JP" altLang="en-US" dirty="0"/>
+              <a:t>指摘の重複を整理</a:t>
+            </a:r>
+            <a:endParaRPr lang="en-US" altLang="ja-JP" dirty="0"/>
+          </a:p>
+          <a:p>
+            <a:pPr marL="285750" indent="-285750">
+              <a:buFont typeface="Arial" panose="020B0604020202020204" pitchFamily="34" charset="0"/>
+              <a:buChar char="•"/>
+            </a:pPr>
+            <a:r>
+              <a:rPr lang="ja-JP" altLang="en-US" dirty="0"/>
+              <a:t>組み合わせによる深刻度が上昇</a:t>
+            </a:r>
+            <a:endParaRPr lang="en-US" altLang="ja-JP" dirty="0"/>
+          </a:p>
+          <a:p>
+            <a:pPr marL="285750" indent="-285750">
+              <a:buFont typeface="Arial" panose="020B0604020202020204" pitchFamily="34" charset="0"/>
+              <a:buChar char="•"/>
+            </a:pPr>
+            <a:r>
+              <a:rPr lang="ja-JP" altLang="en-US" dirty="0"/>
+              <a:t>対立する指摘（トレードオフ）</a:t>
+            </a:r>
+            <a:endParaRPr lang="en-US" altLang="ja-JP" dirty="0"/>
+          </a:p>
+          <a:p>
+            <a:r>
+              <a:rPr lang="ja-JP" altLang="en-US" dirty="0"/>
+              <a:t>次のステップで人間に質問する</a:t>
+            </a:r>
+            <a:endParaRPr lang="en-US" altLang="ja-JP" dirty="0"/>
+          </a:p>
+        </p:txBody>
+      </p:sp>
+    </p:spTree>
+    <p:extLst>
+      <p:ext uri="{BB962C8B-B14F-4D97-AF65-F5344CB8AC3E}">
+        <p14:creationId xmlns:p14="http://schemas.microsoft.com/office/powerpoint/2010/main" val="3672013549"/>
+      </p:ext>
+    </p:extLst>
+  </p:cSld>
+  <p:clrMapOvr>
+    <a:masterClrMapping/>
+  </p:clrMapOvr>
+  <p:timing>
+    <p:tnLst>
+      <p:par>
+        <p:cTn id="1" dur="indefinite" restart="never" nodeType="tmRoot">
+          <p:childTnLst>
+            <p:seq concurrent="1" nextAc="seek">
+              <p:cTn id="2" dur="indefinite" nodeType="mainSeq">
+                <p:childTnLst>
+                  <p:par>
+                    <p:cTn id="3" fill="hold">
+                      <p:stCondLst>
+                        <p:cond delay="indefinite"/>
+                      </p:stCondLst>
+                      <p:childTnLst>
+                        <p:par>
+                          <p:cTn id="4" fill="hold">
+                            <p:stCondLst>
+                              <p:cond delay="0"/>
+                            </p:stCondLst>
+                            <p:childTnLst>
+                              <p:par>
+                                <p:cTn id="5" presetID="1" presetClass="entr" presetSubtype="0" fill="hold" grpId="0" nodeType="clickEffect">
+                                  <p:stCondLst>
+                                    <p:cond delay="0"/>
+                                  </p:stCondLst>
+                                  <p:childTnLst>
+                                    <p:set>
+                                      <p:cBhvr>
+                                        <p:cTn id="6" dur="1" fill="hold">
+                                          <p:stCondLst>
+                                            <p:cond delay="0"/>
+                                          </p:stCondLst>
+                                        </p:cTn>
+                                        <p:tgtEl>
+                                          <p:spTgt spid="4"/>
+                                        </p:tgtEl>
+                                        <p:attrNameLst>
+                                          <p:attrName>style.visibility</p:attrName>
+                                        </p:attrNameLst>
+                                      </p:cBhvr>
+                                      <p:to>
+                                        <p:strVal val="visible"/>
+                                      </p:to>
+                                    </p:set>
+                                  </p:childTnLst>
+                                </p:cTn>
+                              </p:par>
+                            </p:childTnLst>
+                          </p:cTn>
+                        </p:par>
+                      </p:childTnLst>
+                    </p:cTn>
+                  </p:par>
+                  <p:par>
+                    <p:cTn id="7" fill="hold">
+                      <p:stCondLst>
+                        <p:cond delay="indefinite"/>
+                      </p:stCondLst>
+                      <p:childTnLst>
+                        <p:par>
+                          <p:cTn id="8" fill="hold">
+                            <p:stCondLst>
+                              <p:cond delay="0"/>
+                            </p:stCondLst>
+                            <p:childTnLst>
+                              <p:par>
+                                <p:cTn id="9" presetID="1" presetClass="entr" presetSubtype="0" fill="hold" grpId="0" nodeType="clickEffect">
+                                  <p:stCondLst>
+                                    <p:cond delay="0"/>
+                                  </p:stCondLst>
+                                  <p:childTnLst>
+                                    <p:set>
+                                      <p:cBhvr>
+                                        <p:cTn id="10" dur="1" fill="hold">
+                                          <p:stCondLst>
+                                            <p:cond delay="0"/>
+                                          </p:stCondLst>
+                                        </p:cTn>
+                                        <p:tgtEl>
+                                          <p:spTgt spid="2"/>
+                                        </p:tgtEl>
+                                        <p:attrNameLst>
+                                          <p:attrName>style.visibility</p:attrName>
+                                        </p:attrNameLst>
+                                      </p:cBhvr>
+                                      <p:to>
+                                        <p:strVal val="visible"/>
+                                      </p:to>
+                                    </p:set>
+                                  </p:childTnLst>
+                                </p:cTn>
+                              </p:par>
+                            </p:childTnLst>
+                          </p:cTn>
+                        </p:par>
+                      </p:childTnLst>
+                    </p:cTn>
+                  </p:par>
+                  <p:par>
+                    <p:cTn id="11" fill="hold">
+                      <p:stCondLst>
+                        <p:cond delay="indefinite"/>
+                      </p:stCondLst>
+                      <p:childTnLst>
+                        <p:par>
+                          <p:cTn id="12" fill="hold">
+                            <p:stCondLst>
+                              <p:cond delay="0"/>
+                            </p:stCondLst>
+                            <p:childTnLst>
+                              <p:par>
+                                <p:cTn id="13" presetID="1" presetClass="entr" presetSubtype="0" fill="hold" nodeType="clickEffect">
+                                  <p:stCondLst>
+                                    <p:cond delay="0"/>
+                                  </p:stCondLst>
+                                  <p:childTnLst>
+                                    <p:set>
+                                      <p:cBhvr>
+                                        <p:cTn id="14" dur="1" fill="hold">
+                                          <p:stCondLst>
+                                            <p:cond delay="0"/>
+                                          </p:stCondLst>
+                                        </p:cTn>
+                                        <p:tgtEl>
+                                          <p:spTgt spid="11"/>
+                                        </p:tgtEl>
+                                        <p:attrNameLst>
+                                          <p:attrName>style.visibility</p:attrName>
+                                        </p:attrNameLst>
+                                      </p:cBhvr>
+                                      <p:to>
+                                        <p:strVal val="visible"/>
+                                      </p:to>
+                                    </p:set>
+                                  </p:childTnLst>
+                                </p:cTn>
+                              </p:par>
+                            </p:childTnLst>
+                          </p:cTn>
+                        </p:par>
+                      </p:childTnLst>
+                    </p:cTn>
+                  </p:par>
+                  <p:par>
+                    <p:cTn id="15" fill="hold">
+                      <p:stCondLst>
+                        <p:cond delay="indefinite"/>
+                      </p:stCondLst>
+                      <p:childTnLst>
+                        <p:par>
+                          <p:cTn id="16" fill="hold">
+                            <p:stCondLst>
+                              <p:cond delay="0"/>
+                            </p:stCondLst>
+                            <p:childTnLst>
+                              <p:par>
+                                <p:cTn id="17" presetID="1" presetClass="entr" presetSubtype="0" fill="hold" grpId="0" nodeType="clickEffect">
+                                  <p:stCondLst>
+                                    <p:cond delay="0"/>
+                                  </p:stCondLst>
+                                  <p:childTnLst>
+                                    <p:set>
+                                      <p:cBhvr>
+                                        <p:cTn id="18" dur="1" fill="hold">
+                                          <p:stCondLst>
+                                            <p:cond delay="0"/>
+                                          </p:stCondLst>
+                                        </p:cTn>
+                                        <p:tgtEl>
+                                          <p:spTgt spid="12"/>
+                                        </p:tgtEl>
+                                        <p:attrNameLst>
+                                          <p:attrName>style.visibility</p:attrName>
+                                        </p:attrNameLst>
+                                      </p:cBhvr>
+                                      <p:to>
+                                        <p:strVal val="visible"/>
+                                      </p:to>
+                                    </p:set>
+                                  </p:childTnLst>
+                                </p:cTn>
+                              </p:par>
+                            </p:childTnLst>
+                          </p:cTn>
+                        </p:par>
+                      </p:childTnLst>
+                    </p:cTn>
+                  </p:par>
+                </p:childTnLst>
+              </p:cTn>
+              <p:prevCondLst>
+                <p:cond evt="onPrev" delay="0">
+                  <p:tgtEl>
+                    <p:sldTgt/>
+                  </p:tgtEl>
+                </p:cond>
+              </p:prevCondLst>
+              <p:nextCondLst>
+                <p:cond evt="onNext" delay="0">
+                  <p:tgtEl>
+                    <p:sldTgt/>
+                  </p:tgtEl>
+                </p:cond>
+              </p:nextCondLst>
+            </p:seq>
+          </p:childTnLst>
+        </p:cTn>
+      </p:par>
+    </p:tnLst>
+    <p:bldLst>
+      <p:bldP spid="2" grpId="0" animBg="1"/>
+      <p:bldP spid="4" grpId="0"/>
+      <p:bldP spid="12" grpId="0"/>
+    </p:bldLst>
+  </p:timing>
+</p:sld>
+</file>
+
+<file path=ppt/slides/slide15.xml><?xml version="1.0" encoding="utf-8"?>
+<p:sld xmlns:a="http://schemas.openxmlformats.org/drawingml/2006/main" xmlns:r="http://schemas.openxmlformats.org/officeDocument/2006/relationships" xmlns:p="http://schemas.openxmlformats.org/presentationml/2006/main">
+  <p:cSld>
+    <p:spTree>
+      <p:nvGrpSpPr>
+        <p:cNvPr id="1" name="">
+          <a:extLst>
+            <a:ext uri="{FF2B5EF4-FFF2-40B4-BE49-F238E27FC236}">
+              <a16:creationId xmlns:a16="http://schemas.microsoft.com/office/drawing/2014/main" id="{E1BE2065-E07B-2A97-AAC8-0A2110657DAC}"/>
+            </a:ext>
+          </a:extLst>
+        </p:cNvPr>
+        <p:cNvGrpSpPr/>
+        <p:nvPr/>
+      </p:nvGrpSpPr>
+      <p:grpSpPr>
+        <a:xfrm>
+          <a:off x="0" y="0"/>
+          <a:ext cx="0" cy="0"/>
+          <a:chOff x="0" y="0"/>
+          <a:chExt cx="0" cy="0"/>
+        </a:xfrm>
+      </p:grpSpPr>
+      <p:sp>
+        <p:nvSpPr>
+          <p:cNvPr id="3" name="タイトル 2">
+            <a:extLst>
+              <a:ext uri="{FF2B5EF4-FFF2-40B4-BE49-F238E27FC236}">
+                <a16:creationId xmlns:a16="http://schemas.microsoft.com/office/drawing/2014/main" id="{C86AAD0B-5ACC-C5E3-45DC-F758D59BA869}"/>
+              </a:ext>
+            </a:extLst>
+          </p:cNvPr>
+          <p:cNvSpPr>
+            <a:spLocks noGrp="1"/>
+          </p:cNvSpPr>
+          <p:nvPr>
+            <p:ph type="title"/>
+          </p:nvPr>
+        </p:nvSpPr>
+        <p:spPr/>
+        <p:txBody>
+          <a:bodyPr>
+            <a:normAutofit/>
+          </a:bodyPr>
+          <a:lstStyle/>
+          <a:p>
+            <a:r>
+              <a:rPr kumimoji="1" lang="ja-JP" altLang="en-US" dirty="0"/>
+              <a:t>実践例</a:t>
+            </a:r>
+          </a:p>
+        </p:txBody>
+      </p:sp>
+      <p:pic>
+        <p:nvPicPr>
+          <p:cNvPr id="15" name="コンテンツ プレースホルダー 14">
+            <a:extLst>
+              <a:ext uri="{FF2B5EF4-FFF2-40B4-BE49-F238E27FC236}">
+                <a16:creationId xmlns:a16="http://schemas.microsoft.com/office/drawing/2014/main" id="{C37C9A4F-037E-076F-5DB7-0EE2E2DBDF18}"/>
+              </a:ext>
+            </a:extLst>
+          </p:cNvPr>
+          <p:cNvPicPr>
+            <a:picLocks noGrp="1" noChangeAspect="1"/>
+          </p:cNvPicPr>
+          <p:nvPr>
+            <p:ph idx="1"/>
+          </p:nvPr>
+        </p:nvPicPr>
+        <p:blipFill>
+          <a:blip r:embed="rId2"/>
+          <a:stretch>
+            <a:fillRect/>
+          </a:stretch>
+        </p:blipFill>
+        <p:spPr>
+          <a:xfrm>
+            <a:off x="70438" y="3939344"/>
+            <a:ext cx="9765124" cy="1491431"/>
+          </a:xfrm>
+          <a:prstGeom prst="rect">
+            <a:avLst/>
+          </a:prstGeom>
+        </p:spPr>
+      </p:pic>
+      <p:pic>
+        <p:nvPicPr>
+          <p:cNvPr id="11" name="図 10">
+            <a:extLst>
+              <a:ext uri="{FF2B5EF4-FFF2-40B4-BE49-F238E27FC236}">
+                <a16:creationId xmlns:a16="http://schemas.microsoft.com/office/drawing/2014/main" id="{F3C5AF0D-E83F-5586-55CD-53DB2E78490C}"/>
+              </a:ext>
+            </a:extLst>
+          </p:cNvPr>
+          <p:cNvPicPr>
+            <a:picLocks noChangeAspect="1"/>
+          </p:cNvPicPr>
+          <p:nvPr/>
+        </p:nvPicPr>
+        <p:blipFill>
+          <a:blip r:embed="rId3"/>
+          <a:stretch>
+            <a:fillRect/>
+          </a:stretch>
+        </p:blipFill>
+        <p:spPr>
+          <a:xfrm>
+            <a:off x="22022" y="1417159"/>
+            <a:ext cx="9906000" cy="1841147"/>
+          </a:xfrm>
+          <a:prstGeom prst="rect">
+            <a:avLst/>
+          </a:prstGeom>
+        </p:spPr>
+      </p:pic>
+      <p:sp>
+        <p:nvSpPr>
+          <p:cNvPr id="4" name="テキスト ボックス 3">
+            <a:extLst>
+              <a:ext uri="{FF2B5EF4-FFF2-40B4-BE49-F238E27FC236}">
+                <a16:creationId xmlns:a16="http://schemas.microsoft.com/office/drawing/2014/main" id="{E393A06A-707F-FDD2-1204-4BB45DFC475D}"/>
+              </a:ext>
+            </a:extLst>
+          </p:cNvPr>
+          <p:cNvSpPr txBox="1"/>
+          <p:nvPr/>
+        </p:nvSpPr>
+        <p:spPr>
+          <a:xfrm>
+            <a:off x="344488" y="1047827"/>
+            <a:ext cx="6825526" cy="369332"/>
+          </a:xfrm>
+          <a:prstGeom prst="rect">
+            <a:avLst/>
+          </a:prstGeom>
+          <a:noFill/>
+        </p:spPr>
+        <p:txBody>
+          <a:bodyPr wrap="square" rtlCol="0">
+            <a:spAutoFit/>
+          </a:bodyPr>
+          <a:lstStyle/>
+          <a:p>
+            <a:r>
+              <a:rPr lang="ja-JP" altLang="en-US" dirty="0"/>
+              <a:t>🤖指摘の概要を説明し、</a:t>
+            </a:r>
+            <a:r>
+              <a:rPr lang="en-US" altLang="ja-JP" dirty="0"/>
+              <a:t>PR</a:t>
+            </a:r>
+            <a:r>
+              <a:rPr lang="ja-JP" altLang="en-US" dirty="0"/>
+              <a:t>にコメントするかを人間に聞く</a:t>
+            </a:r>
+            <a:endParaRPr lang="en-US" altLang="ja-JP" dirty="0"/>
+          </a:p>
+        </p:txBody>
+      </p:sp>
+      <p:sp>
+        <p:nvSpPr>
+          <p:cNvPr id="5" name="テキスト ボックス 4">
+            <a:extLst>
+              <a:ext uri="{FF2B5EF4-FFF2-40B4-BE49-F238E27FC236}">
+                <a16:creationId xmlns:a16="http://schemas.microsoft.com/office/drawing/2014/main" id="{40DBF305-8AF0-3EF6-3F5C-00AE6EC9B505}"/>
+              </a:ext>
+            </a:extLst>
+          </p:cNvPr>
+          <p:cNvSpPr txBox="1"/>
+          <p:nvPr/>
+        </p:nvSpPr>
+        <p:spPr>
+          <a:xfrm>
+            <a:off x="387224" y="3415029"/>
+            <a:ext cx="6825526" cy="369332"/>
+          </a:xfrm>
+          <a:prstGeom prst="rect">
+            <a:avLst/>
+          </a:prstGeom>
+          <a:noFill/>
+        </p:spPr>
+        <p:txBody>
+          <a:bodyPr wrap="square" rtlCol="0">
+            <a:spAutoFit/>
+          </a:bodyPr>
+          <a:lstStyle/>
+          <a:p>
+            <a:r>
+              <a:rPr lang="ja-JP" altLang="en-US" dirty="0"/>
+              <a:t>↑人間が判断して回答🙆🙅</a:t>
+            </a:r>
+            <a:endParaRPr lang="en-US" altLang="ja-JP" dirty="0"/>
+          </a:p>
+        </p:txBody>
+      </p:sp>
+      <p:sp>
+        <p:nvSpPr>
+          <p:cNvPr id="6" name="テキスト ボックス 5">
+            <a:extLst>
+              <a:ext uri="{FF2B5EF4-FFF2-40B4-BE49-F238E27FC236}">
+                <a16:creationId xmlns:a16="http://schemas.microsoft.com/office/drawing/2014/main" id="{7CCECC5C-8834-8C34-7A0C-ADC30B6C2945}"/>
+              </a:ext>
+            </a:extLst>
+          </p:cNvPr>
+          <p:cNvSpPr txBox="1"/>
+          <p:nvPr/>
+        </p:nvSpPr>
+        <p:spPr>
+          <a:xfrm>
+            <a:off x="336308" y="5585758"/>
+            <a:ext cx="6825526" cy="646331"/>
+          </a:xfrm>
+          <a:prstGeom prst="rect">
+            <a:avLst/>
+          </a:prstGeom>
+          <a:noFill/>
+        </p:spPr>
+        <p:txBody>
+          <a:bodyPr wrap="square" rtlCol="0">
+            <a:spAutoFit/>
+          </a:bodyPr>
+          <a:lstStyle/>
+          <a:p>
+            <a:r>
+              <a:rPr lang="ja-JP" altLang="en-US" dirty="0"/>
+              <a:t>🤖この時点ではまだ指摘は</a:t>
+            </a:r>
+            <a:r>
+              <a:rPr lang="en-US" altLang="ja-JP" dirty="0"/>
+              <a:t>PR</a:t>
+            </a:r>
+            <a:r>
+              <a:rPr lang="ja-JP" altLang="en-US" dirty="0"/>
+              <a:t>に反映しない（人間の判断を待つ）</a:t>
+            </a:r>
+            <a:endParaRPr lang="en-US" altLang="ja-JP" dirty="0"/>
+          </a:p>
+        </p:txBody>
+      </p:sp>
+      <p:pic>
+        <p:nvPicPr>
+          <p:cNvPr id="7" name="図 6">
+            <a:extLst>
+              <a:ext uri="{FF2B5EF4-FFF2-40B4-BE49-F238E27FC236}">
+                <a16:creationId xmlns:a16="http://schemas.microsoft.com/office/drawing/2014/main" id="{D98F7D8F-CED5-B24C-C3E0-68DA542D1478}"/>
+              </a:ext>
+            </a:extLst>
+          </p:cNvPr>
+          <p:cNvPicPr>
+            <a:picLocks noChangeAspect="1"/>
+          </p:cNvPicPr>
+          <p:nvPr/>
+        </p:nvPicPr>
+        <p:blipFill>
+          <a:blip r:embed="rId4"/>
+          <a:srcRect b="65991"/>
+          <a:stretch>
+            <a:fillRect/>
+          </a:stretch>
+        </p:blipFill>
+        <p:spPr>
+          <a:xfrm>
+            <a:off x="344488" y="5965338"/>
+            <a:ext cx="6697010" cy="369332"/>
           </a:xfrm>
           <a:prstGeom prst="rect">
             <a:avLst/>
@@ -5532,7 +6859,670 @@
     </p:spTree>
     <p:extLst>
       <p:ext uri="{BB962C8B-B14F-4D97-AF65-F5344CB8AC3E}">
-        <p14:creationId xmlns:p14="http://schemas.microsoft.com/office/powerpoint/2010/main" val="3672013549"/>
+        <p14:creationId xmlns:p14="http://schemas.microsoft.com/office/powerpoint/2010/main" val="3331941764"/>
+      </p:ext>
+    </p:extLst>
+  </p:cSld>
+  <p:clrMapOvr>
+    <a:masterClrMapping/>
+  </p:clrMapOvr>
+  <p:timing>
+    <p:tnLst>
+      <p:par>
+        <p:cTn id="1" dur="indefinite" restart="never" nodeType="tmRoot">
+          <p:childTnLst>
+            <p:seq concurrent="1" nextAc="seek">
+              <p:cTn id="2" dur="indefinite" nodeType="mainSeq">
+                <p:childTnLst>
+                  <p:par>
+                    <p:cTn id="3" fill="hold">
+                      <p:stCondLst>
+                        <p:cond delay="indefinite"/>
+                      </p:stCondLst>
+                      <p:childTnLst>
+                        <p:par>
+                          <p:cTn id="4" fill="hold">
+                            <p:stCondLst>
+                              <p:cond delay="0"/>
+                            </p:stCondLst>
+                            <p:childTnLst>
+                              <p:par>
+                                <p:cTn id="5" presetID="1" presetClass="entr" presetSubtype="0" fill="hold" grpId="0" nodeType="clickEffect">
+                                  <p:stCondLst>
+                                    <p:cond delay="0"/>
+                                  </p:stCondLst>
+                                  <p:childTnLst>
+                                    <p:set>
+                                      <p:cBhvr>
+                                        <p:cTn id="6" dur="1" fill="hold">
+                                          <p:stCondLst>
+                                            <p:cond delay="0"/>
+                                          </p:stCondLst>
+                                        </p:cTn>
+                                        <p:tgtEl>
+                                          <p:spTgt spid="5"/>
+                                        </p:tgtEl>
+                                        <p:attrNameLst>
+                                          <p:attrName>style.visibility</p:attrName>
+                                        </p:attrNameLst>
+                                      </p:cBhvr>
+                                      <p:to>
+                                        <p:strVal val="visible"/>
+                                      </p:to>
+                                    </p:set>
+                                  </p:childTnLst>
+                                </p:cTn>
+                              </p:par>
+                            </p:childTnLst>
+                          </p:cTn>
+                        </p:par>
+                      </p:childTnLst>
+                    </p:cTn>
+                  </p:par>
+                  <p:par>
+                    <p:cTn id="7" fill="hold">
+                      <p:stCondLst>
+                        <p:cond delay="indefinite"/>
+                      </p:stCondLst>
+                      <p:childTnLst>
+                        <p:par>
+                          <p:cTn id="8" fill="hold">
+                            <p:stCondLst>
+                              <p:cond delay="0"/>
+                            </p:stCondLst>
+                            <p:childTnLst>
+                              <p:par>
+                                <p:cTn id="9" presetID="1" presetClass="entr" presetSubtype="0" fill="hold" nodeType="clickEffect">
+                                  <p:stCondLst>
+                                    <p:cond delay="0"/>
+                                  </p:stCondLst>
+                                  <p:childTnLst>
+                                    <p:set>
+                                      <p:cBhvr>
+                                        <p:cTn id="10" dur="1" fill="hold">
+                                          <p:stCondLst>
+                                            <p:cond delay="0"/>
+                                          </p:stCondLst>
+                                        </p:cTn>
+                                        <p:tgtEl>
+                                          <p:spTgt spid="15"/>
+                                        </p:tgtEl>
+                                        <p:attrNameLst>
+                                          <p:attrName>style.visibility</p:attrName>
+                                        </p:attrNameLst>
+                                      </p:cBhvr>
+                                      <p:to>
+                                        <p:strVal val="visible"/>
+                                      </p:to>
+                                    </p:set>
+                                  </p:childTnLst>
+                                </p:cTn>
+                              </p:par>
+                            </p:childTnLst>
+                          </p:cTn>
+                        </p:par>
+                      </p:childTnLst>
+                    </p:cTn>
+                  </p:par>
+                  <p:par>
+                    <p:cTn id="11" fill="hold">
+                      <p:stCondLst>
+                        <p:cond delay="indefinite"/>
+                      </p:stCondLst>
+                      <p:childTnLst>
+                        <p:par>
+                          <p:cTn id="12" fill="hold">
+                            <p:stCondLst>
+                              <p:cond delay="0"/>
+                            </p:stCondLst>
+                            <p:childTnLst>
+                              <p:par>
+                                <p:cTn id="13" presetID="1" presetClass="entr" presetSubtype="0" fill="hold" nodeType="clickEffect">
+                                  <p:stCondLst>
+                                    <p:cond delay="0"/>
+                                  </p:stCondLst>
+                                  <p:childTnLst>
+                                    <p:set>
+                                      <p:cBhvr>
+                                        <p:cTn id="14" dur="1" fill="hold">
+                                          <p:stCondLst>
+                                            <p:cond delay="0"/>
+                                          </p:stCondLst>
+                                        </p:cTn>
+                                        <p:tgtEl>
+                                          <p:spTgt spid="7"/>
+                                        </p:tgtEl>
+                                        <p:attrNameLst>
+                                          <p:attrName>style.visibility</p:attrName>
+                                        </p:attrNameLst>
+                                      </p:cBhvr>
+                                      <p:to>
+                                        <p:strVal val="visible"/>
+                                      </p:to>
+                                    </p:set>
+                                  </p:childTnLst>
+                                </p:cTn>
+                              </p:par>
+                              <p:par>
+                                <p:cTn id="15" presetID="1" presetClass="entr" presetSubtype="0" fill="hold" grpId="0" nodeType="withEffect">
+                                  <p:stCondLst>
+                                    <p:cond delay="0"/>
+                                  </p:stCondLst>
+                                  <p:childTnLst>
+                                    <p:set>
+                                      <p:cBhvr>
+                                        <p:cTn id="16" dur="1" fill="hold">
+                                          <p:stCondLst>
+                                            <p:cond delay="0"/>
+                                          </p:stCondLst>
+                                        </p:cTn>
+                                        <p:tgtEl>
+                                          <p:spTgt spid="6"/>
+                                        </p:tgtEl>
+                                        <p:attrNameLst>
+                                          <p:attrName>style.visibility</p:attrName>
+                                        </p:attrNameLst>
+                                      </p:cBhvr>
+                                      <p:to>
+                                        <p:strVal val="visible"/>
+                                      </p:to>
+                                    </p:set>
+                                  </p:childTnLst>
+                                </p:cTn>
+                              </p:par>
+                            </p:childTnLst>
+                          </p:cTn>
+                        </p:par>
+                      </p:childTnLst>
+                    </p:cTn>
+                  </p:par>
+                </p:childTnLst>
+              </p:cTn>
+              <p:prevCondLst>
+                <p:cond evt="onPrev" delay="0">
+                  <p:tgtEl>
+                    <p:sldTgt/>
+                  </p:tgtEl>
+                </p:cond>
+              </p:prevCondLst>
+              <p:nextCondLst>
+                <p:cond evt="onNext" delay="0">
+                  <p:tgtEl>
+                    <p:sldTgt/>
+                  </p:tgtEl>
+                </p:cond>
+              </p:nextCondLst>
+            </p:seq>
+          </p:childTnLst>
+        </p:cTn>
+      </p:par>
+    </p:tnLst>
+    <p:bldLst>
+      <p:bldP spid="5" grpId="0"/>
+      <p:bldP spid="6" grpId="0"/>
+    </p:bldLst>
+  </p:timing>
+</p:sld>
+</file>
+
+<file path=ppt/slides/slide16.xml><?xml version="1.0" encoding="utf-8"?>
+<p:sld xmlns:a="http://schemas.openxmlformats.org/drawingml/2006/main" xmlns:r="http://schemas.openxmlformats.org/officeDocument/2006/relationships" xmlns:p="http://schemas.openxmlformats.org/presentationml/2006/main">
+  <p:cSld>
+    <p:spTree>
+      <p:nvGrpSpPr>
+        <p:cNvPr id="1" name="">
+          <a:extLst>
+            <a:ext uri="{FF2B5EF4-FFF2-40B4-BE49-F238E27FC236}">
+              <a16:creationId xmlns:a16="http://schemas.microsoft.com/office/drawing/2014/main" id="{CDA8B5BA-44D4-88CF-8FFD-A2104C746C68}"/>
+            </a:ext>
+          </a:extLst>
+        </p:cNvPr>
+        <p:cNvGrpSpPr/>
+        <p:nvPr/>
+      </p:nvGrpSpPr>
+      <p:grpSpPr>
+        <a:xfrm>
+          <a:off x="0" y="0"/>
+          <a:ext cx="0" cy="0"/>
+          <a:chOff x="0" y="0"/>
+          <a:chExt cx="0" cy="0"/>
+        </a:xfrm>
+      </p:grpSpPr>
+      <p:sp>
+        <p:nvSpPr>
+          <p:cNvPr id="3" name="タイトル 2">
+            <a:extLst>
+              <a:ext uri="{FF2B5EF4-FFF2-40B4-BE49-F238E27FC236}">
+                <a16:creationId xmlns:a16="http://schemas.microsoft.com/office/drawing/2014/main" id="{3993B315-C25D-991D-BD8C-C70FD51EB89F}"/>
+              </a:ext>
+            </a:extLst>
+          </p:cNvPr>
+          <p:cNvSpPr>
+            <a:spLocks noGrp="1"/>
+          </p:cNvSpPr>
+          <p:nvPr>
+            <p:ph type="title"/>
+          </p:nvPr>
+        </p:nvSpPr>
+        <p:spPr/>
+        <p:txBody>
+          <a:bodyPr>
+            <a:normAutofit/>
+          </a:bodyPr>
+          <a:lstStyle/>
+          <a:p>
+            <a:r>
+              <a:rPr kumimoji="1" lang="ja-JP" altLang="en-US" dirty="0"/>
+              <a:t>実践例</a:t>
+            </a:r>
+          </a:p>
+        </p:txBody>
+      </p:sp>
+      <p:pic>
+        <p:nvPicPr>
+          <p:cNvPr id="16" name="図 15">
+            <a:extLst>
+              <a:ext uri="{FF2B5EF4-FFF2-40B4-BE49-F238E27FC236}">
+                <a16:creationId xmlns:a16="http://schemas.microsoft.com/office/drawing/2014/main" id="{FD358F89-041E-8728-7970-D28C2A46112A}"/>
+              </a:ext>
+            </a:extLst>
+          </p:cNvPr>
+          <p:cNvPicPr>
+            <a:picLocks noChangeAspect="1"/>
+          </p:cNvPicPr>
+          <p:nvPr/>
+        </p:nvPicPr>
+        <p:blipFill>
+          <a:blip r:embed="rId2"/>
+          <a:stretch>
+            <a:fillRect/>
+          </a:stretch>
+        </p:blipFill>
+        <p:spPr>
+          <a:xfrm>
+            <a:off x="668524" y="1446742"/>
+            <a:ext cx="8892988" cy="5459453"/>
+          </a:xfrm>
+          <a:prstGeom prst="rect">
+            <a:avLst/>
+          </a:prstGeom>
+        </p:spPr>
+      </p:pic>
+      <p:sp>
+        <p:nvSpPr>
+          <p:cNvPr id="4" name="コンテンツ プレースホルダー 3">
+            <a:extLst>
+              <a:ext uri="{FF2B5EF4-FFF2-40B4-BE49-F238E27FC236}">
+                <a16:creationId xmlns:a16="http://schemas.microsoft.com/office/drawing/2014/main" id="{112084D0-DFDD-249C-BB00-2ACE4C91DD0C}"/>
+              </a:ext>
+            </a:extLst>
+          </p:cNvPr>
+          <p:cNvSpPr>
+            <a:spLocks noGrp="1"/>
+          </p:cNvSpPr>
+          <p:nvPr>
+            <p:ph idx="1"/>
+          </p:nvPr>
+        </p:nvSpPr>
+        <p:spPr>
+          <a:xfrm>
+            <a:off x="200472" y="981732"/>
+            <a:ext cx="8496300" cy="4894536"/>
+          </a:xfrm>
+        </p:spPr>
+        <p:txBody>
+          <a:bodyPr/>
+          <a:lstStyle/>
+          <a:p>
+            <a:r>
+              <a:rPr lang="ja-JP" altLang="en-US" dirty="0"/>
+              <a:t>レビュー成果は</a:t>
+            </a:r>
+            <a:r>
+              <a:rPr lang="en-US" altLang="ja-JP" dirty="0"/>
+              <a:t>md</a:t>
+            </a:r>
+            <a:r>
+              <a:rPr lang="ja-JP" altLang="en-US" dirty="0"/>
+              <a:t>ファイルとして残る</a:t>
+            </a:r>
+          </a:p>
+        </p:txBody>
+      </p:sp>
+    </p:spTree>
+    <p:extLst>
+      <p:ext uri="{BB962C8B-B14F-4D97-AF65-F5344CB8AC3E}">
+        <p14:creationId xmlns:p14="http://schemas.microsoft.com/office/powerpoint/2010/main" val="1699559169"/>
+      </p:ext>
+    </p:extLst>
+  </p:cSld>
+  <p:clrMapOvr>
+    <a:masterClrMapping/>
+  </p:clrMapOvr>
+</p:sld>
+</file>
+
+<file path=ppt/slides/slide17.xml><?xml version="1.0" encoding="utf-8"?>
+<p:sld xmlns:a="http://schemas.openxmlformats.org/drawingml/2006/main" xmlns:r="http://schemas.openxmlformats.org/officeDocument/2006/relationships" xmlns:p="http://schemas.openxmlformats.org/presentationml/2006/main">
+  <p:cSld>
+    <p:spTree>
+      <p:nvGrpSpPr>
+        <p:cNvPr id="1" name="">
+          <a:extLst>
+            <a:ext uri="{FF2B5EF4-FFF2-40B4-BE49-F238E27FC236}">
+              <a16:creationId xmlns:a16="http://schemas.microsoft.com/office/drawing/2014/main" id="{79148B7D-E68F-4F7E-87B1-2677656DAC4F}"/>
+            </a:ext>
+          </a:extLst>
+        </p:cNvPr>
+        <p:cNvGrpSpPr/>
+        <p:nvPr/>
+      </p:nvGrpSpPr>
+      <p:grpSpPr>
+        <a:xfrm>
+          <a:off x="0" y="0"/>
+          <a:ext cx="0" cy="0"/>
+          <a:chOff x="0" y="0"/>
+          <a:chExt cx="0" cy="0"/>
+        </a:xfrm>
+      </p:grpSpPr>
+      <p:sp>
+        <p:nvSpPr>
+          <p:cNvPr id="3" name="タイトル 2">
+            <a:extLst>
+              <a:ext uri="{FF2B5EF4-FFF2-40B4-BE49-F238E27FC236}">
+                <a16:creationId xmlns:a16="http://schemas.microsoft.com/office/drawing/2014/main" id="{AA0146F0-8E3C-2363-8898-8CBB80406B1C}"/>
+              </a:ext>
+            </a:extLst>
+          </p:cNvPr>
+          <p:cNvSpPr>
+            <a:spLocks noGrp="1"/>
+          </p:cNvSpPr>
+          <p:nvPr>
+            <p:ph type="title"/>
+          </p:nvPr>
+        </p:nvSpPr>
+        <p:spPr/>
+        <p:txBody>
+          <a:bodyPr>
+            <a:normAutofit/>
+          </a:bodyPr>
+          <a:lstStyle/>
+          <a:p>
+            <a:r>
+              <a:rPr kumimoji="1" lang="ja-JP" altLang="en-US" dirty="0"/>
+              <a:t>実践例</a:t>
+            </a:r>
+          </a:p>
+        </p:txBody>
+      </p:sp>
+      <p:sp>
+        <p:nvSpPr>
+          <p:cNvPr id="4" name="コンテンツ プレースホルダー 3">
+            <a:extLst>
+              <a:ext uri="{FF2B5EF4-FFF2-40B4-BE49-F238E27FC236}">
+                <a16:creationId xmlns:a16="http://schemas.microsoft.com/office/drawing/2014/main" id="{3B774938-0DF1-5EBA-B508-BA2472B4A136}"/>
+              </a:ext>
+            </a:extLst>
+          </p:cNvPr>
+          <p:cNvSpPr>
+            <a:spLocks noGrp="1"/>
+          </p:cNvSpPr>
+          <p:nvPr>
+            <p:ph idx="1"/>
+          </p:nvPr>
+        </p:nvSpPr>
+        <p:spPr/>
+        <p:txBody>
+          <a:bodyPr/>
+          <a:lstStyle/>
+          <a:p>
+            <a:endParaRPr lang="en-US" altLang="ja-JP" dirty="0"/>
+          </a:p>
+          <a:p>
+            <a:endParaRPr lang="ja-JP" altLang="en-US" dirty="0"/>
+          </a:p>
+        </p:txBody>
+      </p:sp>
+      <p:pic>
+        <p:nvPicPr>
+          <p:cNvPr id="5" name="図 4">
+            <a:extLst>
+              <a:ext uri="{FF2B5EF4-FFF2-40B4-BE49-F238E27FC236}">
+                <a16:creationId xmlns:a16="http://schemas.microsoft.com/office/drawing/2014/main" id="{050DA598-5032-E479-7BF1-18DCF503A3C8}"/>
+              </a:ext>
+            </a:extLst>
+          </p:cNvPr>
+          <p:cNvPicPr>
+            <a:picLocks noChangeAspect="1"/>
+          </p:cNvPicPr>
+          <p:nvPr/>
+        </p:nvPicPr>
+        <p:blipFill>
+          <a:blip r:embed="rId2"/>
+          <a:stretch>
+            <a:fillRect/>
+          </a:stretch>
+        </p:blipFill>
+        <p:spPr>
+          <a:xfrm>
+            <a:off x="704850" y="994420"/>
+            <a:ext cx="6697010" cy="1086002"/>
+          </a:xfrm>
+          <a:prstGeom prst="rect">
+            <a:avLst/>
+          </a:prstGeom>
+        </p:spPr>
+      </p:pic>
+      <p:pic>
+        <p:nvPicPr>
+          <p:cNvPr id="7" name="図 6">
+            <a:extLst>
+              <a:ext uri="{FF2B5EF4-FFF2-40B4-BE49-F238E27FC236}">
+                <a16:creationId xmlns:a16="http://schemas.microsoft.com/office/drawing/2014/main" id="{E924E9D0-BDEF-3F84-7250-828B7A0DA7E1}"/>
+              </a:ext>
+            </a:extLst>
+          </p:cNvPr>
+          <p:cNvPicPr>
+            <a:picLocks noChangeAspect="1"/>
+          </p:cNvPicPr>
+          <p:nvPr/>
+        </p:nvPicPr>
+        <p:blipFill>
+          <a:blip r:embed="rId3"/>
+          <a:stretch>
+            <a:fillRect/>
+          </a:stretch>
+        </p:blipFill>
+        <p:spPr>
+          <a:xfrm>
+            <a:off x="704850" y="2230240"/>
+            <a:ext cx="9906000" cy="2422896"/>
+          </a:xfrm>
+          <a:prstGeom prst="rect">
+            <a:avLst/>
+          </a:prstGeom>
+        </p:spPr>
+      </p:pic>
+      <p:pic>
+        <p:nvPicPr>
+          <p:cNvPr id="9" name="図 8">
+            <a:extLst>
+              <a:ext uri="{FF2B5EF4-FFF2-40B4-BE49-F238E27FC236}">
+                <a16:creationId xmlns:a16="http://schemas.microsoft.com/office/drawing/2014/main" id="{0210D96A-FC6F-2431-88CE-F0BA47C4D448}"/>
+              </a:ext>
+            </a:extLst>
+          </p:cNvPr>
+          <p:cNvPicPr>
+            <a:picLocks noChangeAspect="1"/>
+          </p:cNvPicPr>
+          <p:nvPr/>
+        </p:nvPicPr>
+        <p:blipFill>
+          <a:blip r:embed="rId4"/>
+          <a:stretch>
+            <a:fillRect/>
+          </a:stretch>
+        </p:blipFill>
+        <p:spPr>
+          <a:xfrm>
+            <a:off x="2780306" y="3583041"/>
+            <a:ext cx="7125694" cy="3267531"/>
+          </a:xfrm>
+          <a:prstGeom prst="rect">
+            <a:avLst/>
+          </a:prstGeom>
+        </p:spPr>
+      </p:pic>
+      <p:sp>
+        <p:nvSpPr>
+          <p:cNvPr id="2" name="テキスト ボックス 1">
+            <a:extLst>
+              <a:ext uri="{FF2B5EF4-FFF2-40B4-BE49-F238E27FC236}">
+                <a16:creationId xmlns:a16="http://schemas.microsoft.com/office/drawing/2014/main" id="{A27E9608-1C20-0FA2-D56D-F6A63501E2D4}"/>
+              </a:ext>
+            </a:extLst>
+          </p:cNvPr>
+          <p:cNvSpPr txBox="1"/>
+          <p:nvPr/>
+        </p:nvSpPr>
+        <p:spPr>
+          <a:xfrm>
+            <a:off x="563062" y="4804291"/>
+            <a:ext cx="2348440" cy="646331"/>
+          </a:xfrm>
+          <a:prstGeom prst="rect">
+            <a:avLst/>
+          </a:prstGeom>
+          <a:noFill/>
+        </p:spPr>
+        <p:txBody>
+          <a:bodyPr wrap="square" rtlCol="0">
+            <a:spAutoFit/>
+          </a:bodyPr>
+          <a:lstStyle/>
+          <a:p>
+            <a:r>
+              <a:rPr lang="ja-JP" altLang="en-US" dirty="0"/>
+              <a:t>🤖</a:t>
+            </a:r>
+            <a:r>
+              <a:rPr lang="en-US" altLang="ja-JP" b="1" dirty="0"/>
+              <a:t>Pending</a:t>
+            </a:r>
+            <a:r>
+              <a:rPr lang="ja-JP" altLang="en-US" dirty="0"/>
+              <a:t>状態で</a:t>
+            </a:r>
+            <a:r>
+              <a:rPr lang="en-US" altLang="ja-JP" dirty="0"/>
+              <a:t>PR</a:t>
+            </a:r>
+            <a:r>
+              <a:rPr lang="ja-JP" altLang="en-US" dirty="0"/>
+              <a:t>に反映</a:t>
+            </a:r>
+            <a:endParaRPr lang="en-US" altLang="ja-JP" dirty="0"/>
+          </a:p>
+        </p:txBody>
+      </p:sp>
+      <p:sp>
+        <p:nvSpPr>
+          <p:cNvPr id="8" name="テキスト ボックス 7">
+            <a:extLst>
+              <a:ext uri="{FF2B5EF4-FFF2-40B4-BE49-F238E27FC236}">
+                <a16:creationId xmlns:a16="http://schemas.microsoft.com/office/drawing/2014/main" id="{BC5ECA42-B7B5-AB00-21FA-15417B8674E4}"/>
+              </a:ext>
+            </a:extLst>
+          </p:cNvPr>
+          <p:cNvSpPr txBox="1"/>
+          <p:nvPr/>
+        </p:nvSpPr>
+        <p:spPr>
+          <a:xfrm>
+            <a:off x="563062" y="5464261"/>
+            <a:ext cx="2218784" cy="646331"/>
+          </a:xfrm>
+          <a:prstGeom prst="rect">
+            <a:avLst/>
+          </a:prstGeom>
+          <a:noFill/>
+        </p:spPr>
+        <p:txBody>
+          <a:bodyPr wrap="square">
+            <a:spAutoFit/>
+          </a:bodyPr>
+          <a:lstStyle/>
+          <a:p>
+            <a:r>
+              <a:rPr lang="ja-JP" altLang="en-US" dirty="0"/>
+              <a:t>🧑‍💻書きぶりの修正をして、</a:t>
+            </a:r>
+            <a:r>
+              <a:rPr lang="en-US" altLang="ja-JP" dirty="0"/>
+              <a:t>Submit</a:t>
+            </a:r>
+            <a:endParaRPr lang="ja-JP" altLang="en-US" dirty="0"/>
+          </a:p>
+        </p:txBody>
+      </p:sp>
+      <p:sp>
+        <p:nvSpPr>
+          <p:cNvPr id="12" name="四角形: 角を丸くする 11">
+            <a:extLst>
+              <a:ext uri="{FF2B5EF4-FFF2-40B4-BE49-F238E27FC236}">
+                <a16:creationId xmlns:a16="http://schemas.microsoft.com/office/drawing/2014/main" id="{2A866D08-3E2F-121D-7269-E17C1AF89519}"/>
+              </a:ext>
+            </a:extLst>
+          </p:cNvPr>
+          <p:cNvSpPr/>
+          <p:nvPr/>
+        </p:nvSpPr>
+        <p:spPr>
+          <a:xfrm>
+            <a:off x="8301371" y="4293096"/>
+            <a:ext cx="1252203" cy="252028"/>
+          </a:xfrm>
+          <a:prstGeom prst="roundRect">
+            <a:avLst/>
+          </a:prstGeom>
+          <a:noFill/>
+          <a:ln w="19050" cap="flat" cmpd="sng" algn="ctr">
+            <a:solidFill>
+              <a:srgbClr val="FDD000"/>
+            </a:solidFill>
+            <a:prstDash val="solid"/>
+            <a:round/>
+            <a:headEnd type="none" w="med" len="med"/>
+            <a:tailEnd type="none" w="med" len="med"/>
+          </a:ln>
+        </p:spPr>
+        <p:style>
+          <a:lnRef idx="0">
+            <a:scrgbClr r="0" g="0" b="0"/>
+          </a:lnRef>
+          <a:fillRef idx="0">
+            <a:scrgbClr r="0" g="0" b="0"/>
+          </a:fillRef>
+          <a:effectRef idx="0">
+            <a:scrgbClr r="0" g="0" b="0"/>
+          </a:effectRef>
+          <a:fontRef idx="minor">
+            <a:schemeClr val="accent1"/>
+          </a:fontRef>
+        </p:style>
+        <p:txBody>
+          <a:bodyPr rtlCol="0" anchor="ctr"/>
+          <a:lstStyle/>
+          <a:p>
+            <a:pPr algn="ctr"/>
+            <a:endParaRPr kumimoji="1" lang="ja-JP" altLang="en-US"/>
+          </a:p>
+        </p:txBody>
+      </p:sp>
+    </p:spTree>
+    <p:extLst>
+      <p:ext uri="{BB962C8B-B14F-4D97-AF65-F5344CB8AC3E}">
+        <p14:creationId xmlns:p14="http://schemas.microsoft.com/office/powerpoint/2010/main" val="3810584954"/>
       </p:ext>
     </p:extLst>
   </p:cSld>
@@ -5650,7 +7640,7 @@
                             </p:stCondLst>
                             <p:childTnLst>
                               <p:par>
-                                <p:cTn id="13" presetID="1" presetClass="entr" presetSubtype="0" fill="hold" nodeType="clickEffect">
+                                <p:cTn id="13" presetID="1" presetClass="entr" presetSubtype="0" fill="hold" grpId="0" nodeType="clickEffect">
                                   <p:stCondLst>
                                     <p:cond delay="0"/>
                                   </p:stCondLst>
@@ -5663,7 +7653,79 @@
                                           </p:stCondLst>
                                         </p:cTn>
                                         <p:tgtEl>
-                                          <p:spTgt spid="11"/>
+                                          <p:spTgt spid="12"/>
+                                        </p:tgtEl>
+                                        <p:attrNameLst>
+                                          <p:attrName>style.visibility</p:attrName>
+                                        </p:attrNameLst>
+                                      </p:cBhvr>
+                                      <p:to>
+                                        <p:strVal val="visible"/>
+                                      </p:to>
+                                    </p:set>
+                                  </p:childTnLst>
+                                </p:cTn>
+                              </p:par>
+                              <p:par>
+                                <p:cTn id="15" presetID="1" presetClass="entr" presetSubtype="0" fill="hold" grpId="0" nodeType="withEffect">
+                                  <p:stCondLst>
+                                    <p:cond delay="0"/>
+                                  </p:stCondLst>
+                                  <p:childTnLst>
+                                    <p:set>
+                                      <p:cBhvr>
+                                        <p:cTn id="16" dur="1" fill="hold">
+                                          <p:stCondLst>
+                                            <p:cond delay="0"/>
+                                          </p:stCondLst>
+                                        </p:cTn>
+                                        <p:tgtEl>
+                                          <p:spTgt spid="2"/>
+                                        </p:tgtEl>
+                                        <p:attrNameLst>
+                                          <p:attrName>style.visibility</p:attrName>
+                                        </p:attrNameLst>
+                                      </p:cBhvr>
+                                      <p:to>
+                                        <p:strVal val="visible"/>
+                                      </p:to>
+                                    </p:set>
+                                  </p:childTnLst>
+                                </p:cTn>
+                              </p:par>
+                            </p:childTnLst>
+                          </p:cTn>
+                        </p:par>
+                      </p:childTnLst>
+                    </p:cTn>
+                  </p:par>
+                  <p:par>
+                    <p:cTn id="17" fill="hold">
+                      <p:stCondLst>
+                        <p:cond delay="indefinite"/>
+                      </p:stCondLst>
+                      <p:childTnLst>
+                        <p:par>
+                          <p:cTn id="18" fill="hold">
+                            <p:stCondLst>
+                              <p:cond delay="0"/>
+                            </p:stCondLst>
+                            <p:childTnLst>
+                              <p:par>
+                                <p:cTn id="19" presetID="1" presetClass="entr" presetSubtype="0" fill="hold" grpId="0" nodeType="clickEffect">
+                                  <p:stCondLst>
+                                    <p:cond delay="0"/>
+                                  </p:stCondLst>
+                                  <p:childTnLst>
+                                    <p:set>
+                                      <p:cBhvr>
+                                        <p:cTn id="20" dur="1" fill="hold">
+                                          <p:stCondLst>
+                                            <p:cond delay="0"/>
+                                          </p:stCondLst>
+                                        </p:cTn>
+                                        <p:tgtEl>
+                                          <p:spTgt spid="8"/>
                                         </p:tgtEl>
                                         <p:attrNameLst>
                                           <p:attrName>style.visibility</p:attrName>
@@ -5703,678 +7765,16 @@
         </p:cTn>
       </p:par>
     </p:tnLst>
+    <p:bldLst>
+      <p:bldP spid="2" grpId="0"/>
+      <p:bldP spid="8" grpId="0"/>
+      <p:bldP spid="12" grpId="0" animBg="1"/>
+    </p:bldLst>
   </p:timing>
 </p:sld>
 </file>
 
 <file path=ppt/slides/slide18.xml><?xml version="1.0" encoding="utf-8"?>
-<p:sld xmlns:a="http://schemas.openxmlformats.org/drawingml/2006/main" xmlns:r="http://schemas.openxmlformats.org/officeDocument/2006/relationships" xmlns:p="http://schemas.openxmlformats.org/presentationml/2006/main">
-  <p:cSld>
-    <p:spTree>
-      <p:nvGrpSpPr>
-        <p:cNvPr id="1" name="">
-          <a:extLst>
-            <a:ext uri="{FF2B5EF4-FFF2-40B4-BE49-F238E27FC236}">
-              <a16:creationId xmlns:a16="http://schemas.microsoft.com/office/drawing/2014/main" id="{E1BE2065-E07B-2A97-AAC8-0A2110657DAC}"/>
-            </a:ext>
-          </a:extLst>
-        </p:cNvPr>
-        <p:cNvGrpSpPr/>
-        <p:nvPr/>
-      </p:nvGrpSpPr>
-      <p:grpSpPr>
-        <a:xfrm>
-          <a:off x="0" y="0"/>
-          <a:ext cx="0" cy="0"/>
-          <a:chOff x="0" y="0"/>
-          <a:chExt cx="0" cy="0"/>
-        </a:xfrm>
-      </p:grpSpPr>
-      <p:sp>
-        <p:nvSpPr>
-          <p:cNvPr id="3" name="タイトル 2">
-            <a:extLst>
-              <a:ext uri="{FF2B5EF4-FFF2-40B4-BE49-F238E27FC236}">
-                <a16:creationId xmlns:a16="http://schemas.microsoft.com/office/drawing/2014/main" id="{C86AAD0B-5ACC-C5E3-45DC-F758D59BA869}"/>
-              </a:ext>
-            </a:extLst>
-          </p:cNvPr>
-          <p:cNvSpPr>
-            <a:spLocks noGrp="1"/>
-          </p:cNvSpPr>
-          <p:nvPr>
-            <p:ph type="title"/>
-          </p:nvPr>
-        </p:nvSpPr>
-        <p:spPr/>
-        <p:txBody>
-          <a:bodyPr>
-            <a:normAutofit/>
-          </a:bodyPr>
-          <a:lstStyle/>
-          <a:p>
-            <a:r>
-              <a:rPr kumimoji="1" lang="ja-JP" altLang="en-US" dirty="0"/>
-              <a:t>実践例</a:t>
-            </a:r>
-          </a:p>
-        </p:txBody>
-      </p:sp>
-      <p:pic>
-        <p:nvPicPr>
-          <p:cNvPr id="15" name="コンテンツ プレースホルダー 14">
-            <a:extLst>
-              <a:ext uri="{FF2B5EF4-FFF2-40B4-BE49-F238E27FC236}">
-                <a16:creationId xmlns:a16="http://schemas.microsoft.com/office/drawing/2014/main" id="{C37C9A4F-037E-076F-5DB7-0EE2E2DBDF18}"/>
-              </a:ext>
-            </a:extLst>
-          </p:cNvPr>
-          <p:cNvPicPr>
-            <a:picLocks noGrp="1" noChangeAspect="1"/>
-          </p:cNvPicPr>
-          <p:nvPr>
-            <p:ph idx="1"/>
-          </p:nvPr>
-        </p:nvPicPr>
-        <p:blipFill>
-          <a:blip r:embed="rId2"/>
-          <a:stretch>
-            <a:fillRect/>
-          </a:stretch>
-        </p:blipFill>
-        <p:spPr>
-          <a:xfrm>
-            <a:off x="95156" y="3233713"/>
-            <a:ext cx="9765124" cy="1491431"/>
-          </a:xfrm>
-          <a:prstGeom prst="rect">
-            <a:avLst/>
-          </a:prstGeom>
-        </p:spPr>
-      </p:pic>
-      <p:pic>
-        <p:nvPicPr>
-          <p:cNvPr id="11" name="図 10">
-            <a:extLst>
-              <a:ext uri="{FF2B5EF4-FFF2-40B4-BE49-F238E27FC236}">
-                <a16:creationId xmlns:a16="http://schemas.microsoft.com/office/drawing/2014/main" id="{F3C5AF0D-E83F-5586-55CD-53DB2E78490C}"/>
-              </a:ext>
-            </a:extLst>
-          </p:cNvPr>
-          <p:cNvPicPr>
-            <a:picLocks noChangeAspect="1"/>
-          </p:cNvPicPr>
-          <p:nvPr/>
-        </p:nvPicPr>
-        <p:blipFill>
-          <a:blip r:embed="rId3"/>
-          <a:stretch>
-            <a:fillRect/>
-          </a:stretch>
-        </p:blipFill>
-        <p:spPr>
-          <a:xfrm>
-            <a:off x="92460" y="1124744"/>
-            <a:ext cx="9906000" cy="1841147"/>
-          </a:xfrm>
-          <a:prstGeom prst="rect">
-            <a:avLst/>
-          </a:prstGeom>
-        </p:spPr>
-      </p:pic>
-      <p:pic>
-        <p:nvPicPr>
-          <p:cNvPr id="16" name="図 15">
-            <a:extLst>
-              <a:ext uri="{FF2B5EF4-FFF2-40B4-BE49-F238E27FC236}">
-                <a16:creationId xmlns:a16="http://schemas.microsoft.com/office/drawing/2014/main" id="{4A51EB64-D078-79E8-82DC-3D9363343B2B}"/>
-              </a:ext>
-            </a:extLst>
-          </p:cNvPr>
-          <p:cNvPicPr>
-            <a:picLocks noChangeAspect="1"/>
-          </p:cNvPicPr>
-          <p:nvPr/>
-        </p:nvPicPr>
-        <p:blipFill>
-          <a:blip r:embed="rId4"/>
-          <a:stretch>
-            <a:fillRect/>
-          </a:stretch>
-        </p:blipFill>
-        <p:spPr>
-          <a:xfrm>
-            <a:off x="668524" y="1124744"/>
-            <a:ext cx="9417496" cy="5781451"/>
-          </a:xfrm>
-          <a:prstGeom prst="rect">
-            <a:avLst/>
-          </a:prstGeom>
-        </p:spPr>
-      </p:pic>
-    </p:spTree>
-    <p:extLst>
-      <p:ext uri="{BB962C8B-B14F-4D97-AF65-F5344CB8AC3E}">
-        <p14:creationId xmlns:p14="http://schemas.microsoft.com/office/powerpoint/2010/main" val="3331941764"/>
-      </p:ext>
-    </p:extLst>
-  </p:cSld>
-  <p:clrMapOvr>
-    <a:masterClrMapping/>
-  </p:clrMapOvr>
-  <p:timing>
-    <p:tnLst>
-      <p:par>
-        <p:cTn id="1" dur="indefinite" restart="never" nodeType="tmRoot">
-          <p:childTnLst>
-            <p:seq concurrent="1" nextAc="seek">
-              <p:cTn id="2" dur="indefinite" nodeType="mainSeq">
-                <p:childTnLst>
-                  <p:par>
-                    <p:cTn id="3" fill="hold">
-                      <p:stCondLst>
-                        <p:cond delay="indefinite"/>
-                      </p:stCondLst>
-                      <p:childTnLst>
-                        <p:par>
-                          <p:cTn id="4" fill="hold">
-                            <p:stCondLst>
-                              <p:cond delay="0"/>
-                            </p:stCondLst>
-                            <p:childTnLst>
-                              <p:par>
-                                <p:cTn id="5" presetID="1" presetClass="entr" presetSubtype="0" fill="hold" nodeType="clickEffect">
-                                  <p:stCondLst>
-                                    <p:cond delay="0"/>
-                                  </p:stCondLst>
-                                  <p:childTnLst>
-                                    <p:set>
-                                      <p:cBhvr>
-                                        <p:cTn id="6" dur="1" fill="hold">
-                                          <p:stCondLst>
-                                            <p:cond delay="0"/>
-                                          </p:stCondLst>
-                                        </p:cTn>
-                                        <p:tgtEl>
-                                          <p:spTgt spid="15"/>
-                                        </p:tgtEl>
-                                        <p:attrNameLst>
-                                          <p:attrName>style.visibility</p:attrName>
-                                        </p:attrNameLst>
-                                      </p:cBhvr>
-                                      <p:to>
-                                        <p:strVal val="visible"/>
-                                      </p:to>
-                                    </p:set>
-                                  </p:childTnLst>
-                                </p:cTn>
-                              </p:par>
-                            </p:childTnLst>
-                          </p:cTn>
-                        </p:par>
-                      </p:childTnLst>
-                    </p:cTn>
-                  </p:par>
-                  <p:par>
-                    <p:cTn id="7" fill="hold">
-                      <p:stCondLst>
-                        <p:cond delay="indefinite"/>
-                      </p:stCondLst>
-                      <p:childTnLst>
-                        <p:par>
-                          <p:cTn id="8" fill="hold">
-                            <p:stCondLst>
-                              <p:cond delay="0"/>
-                            </p:stCondLst>
-                            <p:childTnLst>
-                              <p:par>
-                                <p:cTn id="9" presetID="1" presetClass="entr" presetSubtype="0" fill="hold" nodeType="clickEffect">
-                                  <p:stCondLst>
-                                    <p:cond delay="0"/>
-                                  </p:stCondLst>
-                                  <p:childTnLst>
-                                    <p:set>
-                                      <p:cBhvr>
-                                        <p:cTn id="10" dur="1" fill="hold">
-                                          <p:stCondLst>
-                                            <p:cond delay="0"/>
-                                          </p:stCondLst>
-                                        </p:cTn>
-                                        <p:tgtEl>
-                                          <p:spTgt spid="16"/>
-                                        </p:tgtEl>
-                                        <p:attrNameLst>
-                                          <p:attrName>style.visibility</p:attrName>
-                                        </p:attrNameLst>
-                                      </p:cBhvr>
-                                      <p:to>
-                                        <p:strVal val="visible"/>
-                                      </p:to>
-                                    </p:set>
-                                  </p:childTnLst>
-                                </p:cTn>
-                              </p:par>
-                            </p:childTnLst>
-                          </p:cTn>
-                        </p:par>
-                      </p:childTnLst>
-                    </p:cTn>
-                  </p:par>
-                </p:childTnLst>
-              </p:cTn>
-              <p:prevCondLst>
-                <p:cond evt="onPrev" delay="0">
-                  <p:tgtEl>
-                    <p:sldTgt/>
-                  </p:tgtEl>
-                </p:cond>
-              </p:prevCondLst>
-              <p:nextCondLst>
-                <p:cond evt="onNext" delay="0">
-                  <p:tgtEl>
-                    <p:sldTgt/>
-                  </p:tgtEl>
-                </p:cond>
-              </p:nextCondLst>
-            </p:seq>
-          </p:childTnLst>
-        </p:cTn>
-      </p:par>
-    </p:tnLst>
-  </p:timing>
-</p:sld>
-</file>
-
-<file path=ppt/slides/slide19.xml><?xml version="1.0" encoding="utf-8"?>
-<p:sld xmlns:a="http://schemas.openxmlformats.org/drawingml/2006/main" xmlns:r="http://schemas.openxmlformats.org/officeDocument/2006/relationships" xmlns:p="http://schemas.openxmlformats.org/presentationml/2006/main">
-  <p:cSld>
-    <p:spTree>
-      <p:nvGrpSpPr>
-        <p:cNvPr id="1" name="">
-          <a:extLst>
-            <a:ext uri="{FF2B5EF4-FFF2-40B4-BE49-F238E27FC236}">
-              <a16:creationId xmlns:a16="http://schemas.microsoft.com/office/drawing/2014/main" id="{79148B7D-E68F-4F7E-87B1-2677656DAC4F}"/>
-            </a:ext>
-          </a:extLst>
-        </p:cNvPr>
-        <p:cNvGrpSpPr/>
-        <p:nvPr/>
-      </p:nvGrpSpPr>
-      <p:grpSpPr>
-        <a:xfrm>
-          <a:off x="0" y="0"/>
-          <a:ext cx="0" cy="0"/>
-          <a:chOff x="0" y="0"/>
-          <a:chExt cx="0" cy="0"/>
-        </a:xfrm>
-      </p:grpSpPr>
-      <p:sp>
-        <p:nvSpPr>
-          <p:cNvPr id="3" name="タイトル 2">
-            <a:extLst>
-              <a:ext uri="{FF2B5EF4-FFF2-40B4-BE49-F238E27FC236}">
-                <a16:creationId xmlns:a16="http://schemas.microsoft.com/office/drawing/2014/main" id="{AA0146F0-8E3C-2363-8898-8CBB80406B1C}"/>
-              </a:ext>
-            </a:extLst>
-          </p:cNvPr>
-          <p:cNvSpPr>
-            <a:spLocks noGrp="1"/>
-          </p:cNvSpPr>
-          <p:nvPr>
-            <p:ph type="title"/>
-          </p:nvPr>
-        </p:nvSpPr>
-        <p:spPr/>
-        <p:txBody>
-          <a:bodyPr>
-            <a:normAutofit/>
-          </a:bodyPr>
-          <a:lstStyle/>
-          <a:p>
-            <a:r>
-              <a:rPr kumimoji="1" lang="ja-JP" altLang="en-US" dirty="0"/>
-              <a:t>実践例</a:t>
-            </a:r>
-          </a:p>
-        </p:txBody>
-      </p:sp>
-      <p:sp>
-        <p:nvSpPr>
-          <p:cNvPr id="4" name="コンテンツ プレースホルダー 3">
-            <a:extLst>
-              <a:ext uri="{FF2B5EF4-FFF2-40B4-BE49-F238E27FC236}">
-                <a16:creationId xmlns:a16="http://schemas.microsoft.com/office/drawing/2014/main" id="{3B774938-0DF1-5EBA-B508-BA2472B4A136}"/>
-              </a:ext>
-            </a:extLst>
-          </p:cNvPr>
-          <p:cNvSpPr>
-            <a:spLocks noGrp="1"/>
-          </p:cNvSpPr>
-          <p:nvPr>
-            <p:ph idx="1"/>
-          </p:nvPr>
-        </p:nvSpPr>
-        <p:spPr/>
-        <p:txBody>
-          <a:bodyPr/>
-          <a:lstStyle/>
-          <a:p>
-            <a:endParaRPr lang="en-US" altLang="ja-JP" dirty="0"/>
-          </a:p>
-          <a:p>
-            <a:endParaRPr lang="ja-JP" altLang="en-US" dirty="0"/>
-          </a:p>
-        </p:txBody>
-      </p:sp>
-      <p:pic>
-        <p:nvPicPr>
-          <p:cNvPr id="5" name="図 4">
-            <a:extLst>
-              <a:ext uri="{FF2B5EF4-FFF2-40B4-BE49-F238E27FC236}">
-                <a16:creationId xmlns:a16="http://schemas.microsoft.com/office/drawing/2014/main" id="{050DA598-5032-E479-7BF1-18DCF503A3C8}"/>
-              </a:ext>
-            </a:extLst>
-          </p:cNvPr>
-          <p:cNvPicPr>
-            <a:picLocks noChangeAspect="1"/>
-          </p:cNvPicPr>
-          <p:nvPr/>
-        </p:nvPicPr>
-        <p:blipFill>
-          <a:blip r:embed="rId2"/>
-          <a:stretch>
-            <a:fillRect/>
-          </a:stretch>
-        </p:blipFill>
-        <p:spPr>
-          <a:xfrm>
-            <a:off x="704850" y="994420"/>
-            <a:ext cx="6697010" cy="1086002"/>
-          </a:xfrm>
-          <a:prstGeom prst="rect">
-            <a:avLst/>
-          </a:prstGeom>
-        </p:spPr>
-      </p:pic>
-      <p:pic>
-        <p:nvPicPr>
-          <p:cNvPr id="7" name="図 6">
-            <a:extLst>
-              <a:ext uri="{FF2B5EF4-FFF2-40B4-BE49-F238E27FC236}">
-                <a16:creationId xmlns:a16="http://schemas.microsoft.com/office/drawing/2014/main" id="{E924E9D0-BDEF-3F84-7250-828B7A0DA7E1}"/>
-              </a:ext>
-            </a:extLst>
-          </p:cNvPr>
-          <p:cNvPicPr>
-            <a:picLocks noChangeAspect="1"/>
-          </p:cNvPicPr>
-          <p:nvPr/>
-        </p:nvPicPr>
-        <p:blipFill>
-          <a:blip r:embed="rId3"/>
-          <a:stretch>
-            <a:fillRect/>
-          </a:stretch>
-        </p:blipFill>
-        <p:spPr>
-          <a:xfrm>
-            <a:off x="704850" y="2230240"/>
-            <a:ext cx="9906000" cy="2422896"/>
-          </a:xfrm>
-          <a:prstGeom prst="rect">
-            <a:avLst/>
-          </a:prstGeom>
-        </p:spPr>
-      </p:pic>
-      <p:pic>
-        <p:nvPicPr>
-          <p:cNvPr id="9" name="図 8">
-            <a:extLst>
-              <a:ext uri="{FF2B5EF4-FFF2-40B4-BE49-F238E27FC236}">
-                <a16:creationId xmlns:a16="http://schemas.microsoft.com/office/drawing/2014/main" id="{0210D96A-FC6F-2431-88CE-F0BA47C4D448}"/>
-              </a:ext>
-            </a:extLst>
-          </p:cNvPr>
-          <p:cNvPicPr>
-            <a:picLocks noChangeAspect="1"/>
-          </p:cNvPicPr>
-          <p:nvPr/>
-        </p:nvPicPr>
-        <p:blipFill>
-          <a:blip r:embed="rId4"/>
-          <a:stretch>
-            <a:fillRect/>
-          </a:stretch>
-        </p:blipFill>
-        <p:spPr>
-          <a:xfrm>
-            <a:off x="2780306" y="3583041"/>
-            <a:ext cx="7125694" cy="3267531"/>
-          </a:xfrm>
-          <a:prstGeom prst="rect">
-            <a:avLst/>
-          </a:prstGeom>
-        </p:spPr>
-      </p:pic>
-    </p:spTree>
-    <p:extLst>
-      <p:ext uri="{BB962C8B-B14F-4D97-AF65-F5344CB8AC3E}">
-        <p14:creationId xmlns:p14="http://schemas.microsoft.com/office/powerpoint/2010/main" val="3810584954"/>
-      </p:ext>
-    </p:extLst>
-  </p:cSld>
-  <p:clrMapOvr>
-    <a:masterClrMapping/>
-  </p:clrMapOvr>
-  <p:timing>
-    <p:tnLst>
-      <p:par>
-        <p:cTn id="1" dur="indefinite" restart="never" nodeType="tmRoot">
-          <p:childTnLst>
-            <p:seq concurrent="1" nextAc="seek">
-              <p:cTn id="2" dur="indefinite" nodeType="mainSeq">
-                <p:childTnLst>
-                  <p:par>
-                    <p:cTn id="3" fill="hold">
-                      <p:stCondLst>
-                        <p:cond delay="indefinite"/>
-                      </p:stCondLst>
-                      <p:childTnLst>
-                        <p:par>
-                          <p:cTn id="4" fill="hold">
-                            <p:stCondLst>
-                              <p:cond delay="0"/>
-                            </p:stCondLst>
-                            <p:childTnLst>
-                              <p:par>
-                                <p:cTn id="5" presetID="1" presetClass="entr" presetSubtype="0" fill="hold" nodeType="clickEffect">
-                                  <p:stCondLst>
-                                    <p:cond delay="0"/>
-                                  </p:stCondLst>
-                                  <p:childTnLst>
-                                    <p:set>
-                                      <p:cBhvr>
-                                        <p:cTn id="6" dur="1" fill="hold">
-                                          <p:stCondLst>
-                                            <p:cond delay="0"/>
-                                          </p:stCondLst>
-                                        </p:cTn>
-                                        <p:tgtEl>
-                                          <p:spTgt spid="7"/>
-                                        </p:tgtEl>
-                                        <p:attrNameLst>
-                                          <p:attrName>style.visibility</p:attrName>
-                                        </p:attrNameLst>
-                                      </p:cBhvr>
-                                      <p:to>
-                                        <p:strVal val="visible"/>
-                                      </p:to>
-                                    </p:set>
-                                  </p:childTnLst>
-                                </p:cTn>
-                              </p:par>
-                            </p:childTnLst>
-                          </p:cTn>
-                        </p:par>
-                      </p:childTnLst>
-                    </p:cTn>
-                  </p:par>
-                  <p:par>
-                    <p:cTn id="7" fill="hold">
-                      <p:stCondLst>
-                        <p:cond delay="indefinite"/>
-                      </p:stCondLst>
-                      <p:childTnLst>
-                        <p:par>
-                          <p:cTn id="8" fill="hold">
-                            <p:stCondLst>
-                              <p:cond delay="0"/>
-                            </p:stCondLst>
-                            <p:childTnLst>
-                              <p:par>
-                                <p:cTn id="9" presetID="1" presetClass="entr" presetSubtype="0" fill="hold" nodeType="clickEffect">
-                                  <p:stCondLst>
-                                    <p:cond delay="0"/>
-                                  </p:stCondLst>
-                                  <p:childTnLst>
-                                    <p:set>
-                                      <p:cBhvr>
-                                        <p:cTn id="10" dur="1" fill="hold">
-                                          <p:stCondLst>
-                                            <p:cond delay="0"/>
-                                          </p:stCondLst>
-                                        </p:cTn>
-                                        <p:tgtEl>
-                                          <p:spTgt spid="9"/>
-                                        </p:tgtEl>
-                                        <p:attrNameLst>
-                                          <p:attrName>style.visibility</p:attrName>
-                                        </p:attrNameLst>
-                                      </p:cBhvr>
-                                      <p:to>
-                                        <p:strVal val="visible"/>
-                                      </p:to>
-                                    </p:set>
-                                  </p:childTnLst>
-                                </p:cTn>
-                              </p:par>
-                            </p:childTnLst>
-                          </p:cTn>
-                        </p:par>
-                      </p:childTnLst>
-                    </p:cTn>
-                  </p:par>
-                </p:childTnLst>
-              </p:cTn>
-              <p:prevCondLst>
-                <p:cond evt="onPrev" delay="0">
-                  <p:tgtEl>
-                    <p:sldTgt/>
-                  </p:tgtEl>
-                </p:cond>
-              </p:prevCondLst>
-              <p:nextCondLst>
-                <p:cond evt="onNext" delay="0">
-                  <p:tgtEl>
-                    <p:sldTgt/>
-                  </p:tgtEl>
-                </p:cond>
-              </p:nextCondLst>
-            </p:seq>
-          </p:childTnLst>
-        </p:cTn>
-      </p:par>
-    </p:tnLst>
-  </p:timing>
-</p:sld>
-</file>
-
-<file path=ppt/slides/slide2.xml><?xml version="1.0" encoding="utf-8"?>
-<p:sld xmlns:a="http://schemas.openxmlformats.org/drawingml/2006/main" xmlns:r="http://schemas.openxmlformats.org/officeDocument/2006/relationships" xmlns:p="http://schemas.openxmlformats.org/presentationml/2006/main">
-  <p:cSld>
-    <p:spTree>
-      <p:nvGrpSpPr>
-        <p:cNvPr id="1" name=""/>
-        <p:cNvGrpSpPr/>
-        <p:nvPr/>
-      </p:nvGrpSpPr>
-      <p:grpSpPr>
-        <a:xfrm>
-          <a:off x="0" y="0"/>
-          <a:ext cx="0" cy="0"/>
-          <a:chOff x="0" y="0"/>
-          <a:chExt cx="0" cy="0"/>
-        </a:xfrm>
-      </p:grpSpPr>
-      <p:sp>
-        <p:nvSpPr>
-          <p:cNvPr id="2" name="コンテンツ 1"/>
-          <p:cNvSpPr txBox="1">
-            <a:spLocks/>
-          </p:cNvSpPr>
-          <p:nvPr/>
-        </p:nvSpPr>
-        <p:spPr>
-          <a:xfrm>
-            <a:off x="697186" y="1000000"/>
-            <a:ext cx="8496300" cy="4800000"/>
-          </a:xfrm>
-          <a:prstGeom prst="rect">
-            <a:avLst/>
-          </a:prstGeom>
-        </p:spPr>
-        <p:txBody>
-          <a:bodyPr vert="horz" lIns="91440" tIns="91440" rIns="91440" bIns="91440" rtlCol="0" anchor="ctr">
-            <a:normAutofit/>
-          </a:bodyPr>
-          <a:lstStyle>
-            <a:lvl1pPr algn="ctr">
-              <a:defRPr kumimoji="1" sz="2400">
-                <a:solidFill>
-                  <a:schemeClr val="tx1"/>
-                </a:solidFill>
-                <a:latin typeface="+mn-ea"/>
-              </a:defRPr>
-            </a:lvl1pPr>
-          </a:lstStyle>
-          <a:p>
-            <a:r>
-              <a:rPr kumimoji="1" lang="ja-JP" altLang="en-US" sz="2800" dirty="0"/>
-              <a:t>AI</a:t>
-            </a:r>
-            <a:r>
-              <a:rPr lang="ja-JP" altLang="en-US" sz="2800" dirty="0"/>
-              <a:t>に</a:t>
-            </a:r>
-            <a:r>
-              <a:rPr kumimoji="1" lang="ja-JP" altLang="en-US" sz="2800" dirty="0"/>
-              <a:t>「何ができて、何をやらせるべき」か？</a:t>
-            </a:r>
-          </a:p>
-          <a:p>
-            <a:endParaRPr lang="ja-JP" altLang="en-US" dirty="0"/>
-          </a:p>
-          <a:p>
-            <a:endParaRPr lang="ja-JP" altLang="en-US" dirty="0"/>
-          </a:p>
-          <a:p>
-            <a:r>
-              <a:rPr kumimoji="1" lang="ja-JP" altLang="en-US" sz="3200" b="1" dirty="0"/>
-              <a:t>AI時代に仕事をどう設計するか</a:t>
-            </a:r>
-            <a:endParaRPr kumimoji="1" lang="en-US" altLang="ja-JP" sz="3200" b="1" dirty="0"/>
-          </a:p>
-        </p:txBody>
-      </p:sp>
-    </p:spTree>
-  </p:cSld>
-  <p:clrMapOvr>
-    <a:masterClrMapping/>
-  </p:clrMapOvr>
-</p:sld>
-</file>
-
-<file path=ppt/slides/slide20.xml><?xml version="1.0" encoding="utf-8"?>
 <p:sld xmlns:a="http://schemas.openxmlformats.org/drawingml/2006/main" xmlns:r="http://schemas.openxmlformats.org/officeDocument/2006/relationships" xmlns:p="http://schemas.openxmlformats.org/presentationml/2006/main">
   <p:cSld>
     <p:spTree>
@@ -6447,7 +7847,7 @@
             <a:fld id="{C314D315-6C69-40BF-98D6-60239DAB9584}" type="slidenum">
               <a:rPr lang="ja-JP" altLang="en-US" smtClean="0"/>
               <a:pPr/>
-              <a:t>19</a:t>
+              <a:t>17</a:t>
             </a:fld>
             <a:r>
               <a:rPr lang="ja-JP" altLang="en-US"/>
@@ -6486,6 +7886,483 @@
           </a:p>
         </p:txBody>
       </p:sp>
+      <p:sp>
+        <p:nvSpPr>
+          <p:cNvPr id="5" name="吹き出し: 四角形 4">
+            <a:extLst>
+              <a:ext uri="{FF2B5EF4-FFF2-40B4-BE49-F238E27FC236}">
+                <a16:creationId xmlns:a16="http://schemas.microsoft.com/office/drawing/2014/main" id="{C1FCAA6E-D663-611D-BCE2-2D25035A5A0A}"/>
+              </a:ext>
+            </a:extLst>
+          </p:cNvPr>
+          <p:cNvSpPr/>
+          <p:nvPr/>
+        </p:nvSpPr>
+        <p:spPr>
+          <a:xfrm>
+            <a:off x="1820652" y="1556792"/>
+            <a:ext cx="1692188" cy="648072"/>
+          </a:xfrm>
+          <a:prstGeom prst="wedgeRectCallout">
+            <a:avLst/>
+          </a:prstGeom>
+          <a:solidFill>
+            <a:schemeClr val="accent6">
+              <a:alpha val="50000"/>
+            </a:schemeClr>
+          </a:solidFill>
+          <a:ln>
+            <a:noFill/>
+          </a:ln>
+        </p:spPr>
+        <p:style>
+          <a:lnRef idx="0">
+            <a:scrgbClr r="0" g="0" b="0"/>
+          </a:lnRef>
+          <a:fillRef idx="0">
+            <a:scrgbClr r="0" g="0" b="0"/>
+          </a:fillRef>
+          <a:effectRef idx="0">
+            <a:scrgbClr r="0" g="0" b="0"/>
+          </a:effectRef>
+          <a:fontRef idx="minor">
+            <a:schemeClr val="lt1"/>
+          </a:fontRef>
+        </p:style>
+        <p:txBody>
+          <a:bodyPr rtlCol="0" anchor="ctr"/>
+          <a:lstStyle/>
+          <a:p>
+            <a:pPr algn="ctr"/>
+            <a:r>
+              <a:rPr lang="ja-JP" altLang="en-US" dirty="0"/>
+              <a:t>作者が</a:t>
+            </a:r>
+            <a:r>
+              <a:rPr lang="ja-JP" altLang="en-US" b="1" dirty="0"/>
+              <a:t>責任</a:t>
+            </a:r>
+            <a:r>
+              <a:rPr lang="ja-JP" altLang="en-US" dirty="0"/>
+              <a:t>を持つ</a:t>
+            </a:r>
+            <a:endParaRPr kumimoji="1" lang="ja-JP" altLang="en-US" dirty="0"/>
+          </a:p>
+        </p:txBody>
+      </p:sp>
+      <p:sp>
+        <p:nvSpPr>
+          <p:cNvPr id="7" name="吹き出し: 四角形 6">
+            <a:extLst>
+              <a:ext uri="{FF2B5EF4-FFF2-40B4-BE49-F238E27FC236}">
+                <a16:creationId xmlns:a16="http://schemas.microsoft.com/office/drawing/2014/main" id="{900A281E-2C0C-98CE-5C72-5BB77CDE8F13}"/>
+              </a:ext>
+            </a:extLst>
+          </p:cNvPr>
+          <p:cNvSpPr/>
+          <p:nvPr/>
+        </p:nvSpPr>
+        <p:spPr>
+          <a:xfrm>
+            <a:off x="5817096" y="1556792"/>
+            <a:ext cx="2049065" cy="648072"/>
+          </a:xfrm>
+          <a:prstGeom prst="wedgeRectCallout">
+            <a:avLst/>
+          </a:prstGeom>
+          <a:solidFill>
+            <a:schemeClr val="accent6">
+              <a:alpha val="50000"/>
+            </a:schemeClr>
+          </a:solidFill>
+          <a:ln>
+            <a:noFill/>
+          </a:ln>
+        </p:spPr>
+        <p:style>
+          <a:lnRef idx="0">
+            <a:scrgbClr r="0" g="0" b="0"/>
+          </a:lnRef>
+          <a:fillRef idx="0">
+            <a:scrgbClr r="0" g="0" b="0"/>
+          </a:fillRef>
+          <a:effectRef idx="0">
+            <a:scrgbClr r="0" g="0" b="0"/>
+          </a:effectRef>
+          <a:fontRef idx="minor">
+            <a:schemeClr val="lt1"/>
+          </a:fontRef>
+        </p:style>
+        <p:txBody>
+          <a:bodyPr rtlCol="0" anchor="ctr"/>
+          <a:lstStyle/>
+          <a:p>
+            <a:pPr algn="ctr"/>
+            <a:r>
+              <a:rPr lang="en-US" altLang="ja-JP" dirty="0"/>
+              <a:t>Self review</a:t>
+            </a:r>
+            <a:r>
+              <a:rPr lang="ja-JP" altLang="en-US" dirty="0"/>
+              <a:t>の結果は</a:t>
+            </a:r>
+            <a:r>
+              <a:rPr lang="en-US" altLang="ja-JP" b="1" dirty="0"/>
+              <a:t>PR</a:t>
+            </a:r>
+            <a:r>
+              <a:rPr lang="ja-JP" altLang="en-US" b="1" dirty="0"/>
+              <a:t>に残す</a:t>
+            </a:r>
+            <a:endParaRPr kumimoji="1" lang="ja-JP" altLang="en-US" b="1" dirty="0"/>
+          </a:p>
+        </p:txBody>
+      </p:sp>
+      <p:sp>
+        <p:nvSpPr>
+          <p:cNvPr id="8" name="吹き出し: 四角形 7">
+            <a:extLst>
+              <a:ext uri="{FF2B5EF4-FFF2-40B4-BE49-F238E27FC236}">
+                <a16:creationId xmlns:a16="http://schemas.microsoft.com/office/drawing/2014/main" id="{1C0C184A-AEA5-0447-91E0-ED85D7F7E0FB}"/>
+              </a:ext>
+            </a:extLst>
+          </p:cNvPr>
+          <p:cNvSpPr/>
+          <p:nvPr/>
+        </p:nvSpPr>
+        <p:spPr>
+          <a:xfrm>
+            <a:off x="524508" y="4652540"/>
+            <a:ext cx="2844316" cy="648072"/>
+          </a:xfrm>
+          <a:prstGeom prst="wedgeRectCallout">
+            <a:avLst>
+              <a:gd name="adj1" fmla="val 23346"/>
+              <a:gd name="adj2" fmla="val -72952"/>
+            </a:avLst>
+          </a:prstGeom>
+          <a:solidFill>
+            <a:schemeClr val="accent6">
+              <a:alpha val="50000"/>
+            </a:schemeClr>
+          </a:solidFill>
+          <a:ln>
+            <a:noFill/>
+          </a:ln>
+        </p:spPr>
+        <p:style>
+          <a:lnRef idx="0">
+            <a:scrgbClr r="0" g="0" b="0"/>
+          </a:lnRef>
+          <a:fillRef idx="0">
+            <a:scrgbClr r="0" g="0" b="0"/>
+          </a:fillRef>
+          <a:effectRef idx="0">
+            <a:scrgbClr r="0" g="0" b="0"/>
+          </a:effectRef>
+          <a:fontRef idx="minor">
+            <a:schemeClr val="lt1"/>
+          </a:fontRef>
+        </p:style>
+        <p:txBody>
+          <a:bodyPr rtlCol="0" anchor="ctr"/>
+          <a:lstStyle/>
+          <a:p>
+            <a:pPr algn="ctr"/>
+            <a:r>
+              <a:rPr lang="ja-JP" altLang="en-US" dirty="0"/>
+              <a:t>🤖</a:t>
+            </a:r>
+            <a:r>
+              <a:rPr kumimoji="1" lang="ja-JP" altLang="en-US" dirty="0"/>
+              <a:t>差分の説明</a:t>
+            </a:r>
+            <a:endParaRPr kumimoji="1" lang="en-US" altLang="ja-JP" dirty="0"/>
+          </a:p>
+          <a:p>
+            <a:pPr algn="ctr"/>
+            <a:r>
+              <a:rPr lang="ja-JP" altLang="en-US" dirty="0"/>
+              <a:t>🧑‍💻</a:t>
+            </a:r>
+            <a:r>
+              <a:rPr lang="ja-JP" altLang="en-US" b="1" dirty="0"/>
+              <a:t>メンタルモデル</a:t>
+            </a:r>
+            <a:r>
+              <a:rPr lang="ja-JP" altLang="en-US" dirty="0"/>
+              <a:t>の形成</a:t>
+            </a:r>
+            <a:endParaRPr kumimoji="1" lang="ja-JP" altLang="en-US" dirty="0"/>
+          </a:p>
+        </p:txBody>
+      </p:sp>
+      <p:sp>
+        <p:nvSpPr>
+          <p:cNvPr id="9" name="吹き出し: 四角形 8">
+            <a:extLst>
+              <a:ext uri="{FF2B5EF4-FFF2-40B4-BE49-F238E27FC236}">
+                <a16:creationId xmlns:a16="http://schemas.microsoft.com/office/drawing/2014/main" id="{D1A457E5-9F18-B859-0EB7-3B174CF4069C}"/>
+              </a:ext>
+            </a:extLst>
+          </p:cNvPr>
+          <p:cNvSpPr/>
+          <p:nvPr/>
+        </p:nvSpPr>
+        <p:spPr>
+          <a:xfrm>
+            <a:off x="3638757" y="4652540"/>
+            <a:ext cx="2304256" cy="648072"/>
+          </a:xfrm>
+          <a:prstGeom prst="wedgeRectCallout">
+            <a:avLst>
+              <a:gd name="adj1" fmla="val -12728"/>
+              <a:gd name="adj2" fmla="val -82829"/>
+            </a:avLst>
+          </a:prstGeom>
+          <a:solidFill>
+            <a:schemeClr val="accent6">
+              <a:alpha val="50000"/>
+            </a:schemeClr>
+          </a:solidFill>
+          <a:ln>
+            <a:noFill/>
+          </a:ln>
+        </p:spPr>
+        <p:style>
+          <a:lnRef idx="0">
+            <a:scrgbClr r="0" g="0" b="0"/>
+          </a:lnRef>
+          <a:fillRef idx="0">
+            <a:scrgbClr r="0" g="0" b="0"/>
+          </a:fillRef>
+          <a:effectRef idx="0">
+            <a:scrgbClr r="0" g="0" b="0"/>
+          </a:effectRef>
+          <a:fontRef idx="minor">
+            <a:schemeClr val="lt1"/>
+          </a:fontRef>
+        </p:style>
+        <p:txBody>
+          <a:bodyPr rtlCol="0" anchor="ctr"/>
+          <a:lstStyle/>
+          <a:p>
+            <a:pPr algn="ctr"/>
+            <a:r>
+              <a:rPr lang="ja-JP" altLang="en-US" dirty="0"/>
+              <a:t>🤖クリティカルな観点に</a:t>
+            </a:r>
+            <a:r>
+              <a:rPr lang="ja-JP" altLang="en-US" b="1" dirty="0"/>
+              <a:t>絞る</a:t>
+            </a:r>
+            <a:endParaRPr kumimoji="1" lang="ja-JP" altLang="en-US" b="1" dirty="0"/>
+          </a:p>
+        </p:txBody>
+      </p:sp>
+      <p:sp>
+        <p:nvSpPr>
+          <p:cNvPr id="10" name="吹き出し: 四角形 9">
+            <a:extLst>
+              <a:ext uri="{FF2B5EF4-FFF2-40B4-BE49-F238E27FC236}">
+                <a16:creationId xmlns:a16="http://schemas.microsoft.com/office/drawing/2014/main" id="{71C3264E-1373-22D0-5023-F3EB6F45E5C7}"/>
+              </a:ext>
+            </a:extLst>
+          </p:cNvPr>
+          <p:cNvSpPr/>
+          <p:nvPr/>
+        </p:nvSpPr>
+        <p:spPr>
+          <a:xfrm>
+            <a:off x="6017886" y="4657084"/>
+            <a:ext cx="2499510" cy="648072"/>
+          </a:xfrm>
+          <a:prstGeom prst="wedgeRectCallout">
+            <a:avLst>
+              <a:gd name="adj1" fmla="val -26617"/>
+              <a:gd name="adj2" fmla="val -89884"/>
+            </a:avLst>
+          </a:prstGeom>
+          <a:solidFill>
+            <a:schemeClr val="accent6">
+              <a:alpha val="50000"/>
+            </a:schemeClr>
+          </a:solidFill>
+          <a:ln>
+            <a:noFill/>
+          </a:ln>
+        </p:spPr>
+        <p:style>
+          <a:lnRef idx="0">
+            <a:scrgbClr r="0" g="0" b="0"/>
+          </a:lnRef>
+          <a:fillRef idx="0">
+            <a:scrgbClr r="0" g="0" b="0"/>
+          </a:fillRef>
+          <a:effectRef idx="0">
+            <a:scrgbClr r="0" g="0" b="0"/>
+          </a:effectRef>
+          <a:fontRef idx="minor">
+            <a:schemeClr val="lt1"/>
+          </a:fontRef>
+        </p:style>
+        <p:txBody>
+          <a:bodyPr rtlCol="0" anchor="ctr"/>
+          <a:lstStyle/>
+          <a:p>
+            <a:pPr algn="ctr"/>
+            <a:r>
+              <a:rPr lang="ja-JP" altLang="en-US" dirty="0"/>
+              <a:t>🧑‍💻ちゃんと</a:t>
+            </a:r>
+            <a:r>
+              <a:rPr lang="ja-JP" altLang="en-US" b="1" dirty="0"/>
+              <a:t>理解</a:t>
+            </a:r>
+            <a:r>
+              <a:rPr lang="ja-JP" altLang="en-US" dirty="0"/>
+              <a:t>して指摘・コメントする</a:t>
+            </a:r>
+            <a:endParaRPr kumimoji="1" lang="ja-JP" altLang="en-US" dirty="0"/>
+          </a:p>
+        </p:txBody>
+      </p:sp>
+      <p:sp>
+        <p:nvSpPr>
+          <p:cNvPr id="11" name="吹き出し: 四角形 10">
+            <a:extLst>
+              <a:ext uri="{FF2B5EF4-FFF2-40B4-BE49-F238E27FC236}">
+                <a16:creationId xmlns:a16="http://schemas.microsoft.com/office/drawing/2014/main" id="{7E0CE6D1-25AC-EF84-18C6-3992CD5D8E11}"/>
+              </a:ext>
+            </a:extLst>
+          </p:cNvPr>
+          <p:cNvSpPr/>
+          <p:nvPr/>
+        </p:nvSpPr>
+        <p:spPr>
+          <a:xfrm>
+            <a:off x="4775260" y="3429000"/>
+            <a:ext cx="2950048" cy="618156"/>
+          </a:xfrm>
+          <a:prstGeom prst="wedgeRectCallout">
+            <a:avLst>
+              <a:gd name="adj1" fmla="val -26986"/>
+              <a:gd name="adj2" fmla="val -84308"/>
+            </a:avLst>
+          </a:prstGeom>
+          <a:solidFill>
+            <a:schemeClr val="accent6">
+              <a:alpha val="50000"/>
+            </a:schemeClr>
+          </a:solidFill>
+          <a:ln>
+            <a:noFill/>
+          </a:ln>
+        </p:spPr>
+        <p:style>
+          <a:lnRef idx="0">
+            <a:scrgbClr r="0" g="0" b="0"/>
+          </a:lnRef>
+          <a:fillRef idx="0">
+            <a:scrgbClr r="0" g="0" b="0"/>
+          </a:fillRef>
+          <a:effectRef idx="0">
+            <a:scrgbClr r="0" g="0" b="0"/>
+          </a:effectRef>
+          <a:fontRef idx="minor">
+            <a:schemeClr val="lt1"/>
+          </a:fontRef>
+        </p:style>
+        <p:txBody>
+          <a:bodyPr rtlCol="0" anchor="ctr"/>
+          <a:lstStyle/>
+          <a:p>
+            <a:pPr algn="ctr"/>
+            <a:r>
+              <a:rPr lang="ja-JP" altLang="en-US" dirty="0"/>
+              <a:t>🤖セルフレビュー済みの内容は重複指摘しない</a:t>
+            </a:r>
+            <a:endParaRPr kumimoji="1" lang="ja-JP" altLang="en-US" dirty="0"/>
+          </a:p>
+        </p:txBody>
+      </p:sp>
+      <p:sp>
+        <p:nvSpPr>
+          <p:cNvPr id="13" name="テキスト ボックス 12">
+            <a:extLst>
+              <a:ext uri="{FF2B5EF4-FFF2-40B4-BE49-F238E27FC236}">
+                <a16:creationId xmlns:a16="http://schemas.microsoft.com/office/drawing/2014/main" id="{B7C8B2DE-AB29-A6BF-66D4-DEA7E3BD6EEC}"/>
+              </a:ext>
+            </a:extLst>
+          </p:cNvPr>
+          <p:cNvSpPr txBox="1"/>
+          <p:nvPr/>
+        </p:nvSpPr>
+        <p:spPr>
+          <a:xfrm>
+            <a:off x="2522730" y="6107786"/>
+            <a:ext cx="4860540" cy="646331"/>
+          </a:xfrm>
+          <a:prstGeom prst="rect">
+            <a:avLst/>
+          </a:prstGeom>
+          <a:noFill/>
+        </p:spPr>
+        <p:txBody>
+          <a:bodyPr wrap="square">
+            <a:spAutoFit/>
+          </a:bodyPr>
+          <a:lstStyle/>
+          <a:p>
+            <a:r>
+              <a:rPr kumimoji="1" lang="ja-JP" altLang="en-US" sz="1800" b="1" dirty="0"/>
+              <a:t>重要なのは「AI に言われたから」ではなく</a:t>
+            </a:r>
+          </a:p>
+          <a:p>
+            <a:r>
+              <a:rPr kumimoji="1" lang="ja-JP" altLang="en-US" sz="1800" b="1" dirty="0"/>
+              <a:t>「自分はこう判断した」と残すこと</a:t>
+            </a:r>
+          </a:p>
+        </p:txBody>
+      </p:sp>
+      <p:sp>
+        <p:nvSpPr>
+          <p:cNvPr id="15" name="テキスト ボックス 14">
+            <a:extLst>
+              <a:ext uri="{FF2B5EF4-FFF2-40B4-BE49-F238E27FC236}">
+                <a16:creationId xmlns:a16="http://schemas.microsoft.com/office/drawing/2014/main" id="{152D068A-F0AE-A905-DD6B-6C22DE75640E}"/>
+              </a:ext>
+            </a:extLst>
+          </p:cNvPr>
+          <p:cNvSpPr txBox="1"/>
+          <p:nvPr/>
+        </p:nvSpPr>
+        <p:spPr>
+          <a:xfrm>
+            <a:off x="2523122" y="5797902"/>
+            <a:ext cx="2645902" cy="369332"/>
+          </a:xfrm>
+          <a:prstGeom prst="rect">
+            <a:avLst/>
+          </a:prstGeom>
+          <a:noFill/>
+        </p:spPr>
+        <p:txBody>
+          <a:bodyPr wrap="square">
+            <a:spAutoFit/>
+          </a:bodyPr>
+          <a:lstStyle/>
+          <a:p>
+            <a:r>
+              <a:rPr lang="ja-JP" altLang="en-US" b="1" dirty="0"/>
+              <a:t>作者・レビュワー共に、</a:t>
+            </a:r>
+            <a:endParaRPr lang="en-US" altLang="ja-JP" b="1" dirty="0"/>
+          </a:p>
+        </p:txBody>
+      </p:sp>
     </p:spTree>
     <p:extLst>
       <p:ext uri="{BB962C8B-B14F-4D97-AF65-F5344CB8AC3E}">
@@ -6496,10 +8373,372 @@
   <p:clrMapOvr>
     <a:masterClrMapping/>
   </p:clrMapOvr>
+  <p:timing>
+    <p:tnLst>
+      <p:par>
+        <p:cTn id="1" dur="indefinite" restart="never" nodeType="tmRoot">
+          <p:childTnLst>
+            <p:seq concurrent="1" nextAc="seek">
+              <p:cTn id="2" dur="indefinite" nodeType="mainSeq">
+                <p:childTnLst>
+                  <p:par>
+                    <p:cTn id="3" fill="hold">
+                      <p:stCondLst>
+                        <p:cond delay="indefinite"/>
+                      </p:stCondLst>
+                      <p:childTnLst>
+                        <p:par>
+                          <p:cTn id="4" fill="hold">
+                            <p:stCondLst>
+                              <p:cond delay="0"/>
+                            </p:stCondLst>
+                            <p:childTnLst>
+                              <p:par>
+                                <p:cTn id="5" presetID="1" presetClass="entr" presetSubtype="0" fill="hold" grpId="0" nodeType="clickEffect">
+                                  <p:stCondLst>
+                                    <p:cond delay="0"/>
+                                  </p:stCondLst>
+                                  <p:childTnLst>
+                                    <p:set>
+                                      <p:cBhvr>
+                                        <p:cTn id="6" dur="1" fill="hold">
+                                          <p:stCondLst>
+                                            <p:cond delay="0"/>
+                                          </p:stCondLst>
+                                        </p:cTn>
+                                        <p:tgtEl>
+                                          <p:spTgt spid="5"/>
+                                        </p:tgtEl>
+                                        <p:attrNameLst>
+                                          <p:attrName>style.visibility</p:attrName>
+                                        </p:attrNameLst>
+                                      </p:cBhvr>
+                                      <p:to>
+                                        <p:strVal val="visible"/>
+                                      </p:to>
+                                    </p:set>
+                                  </p:childTnLst>
+                                </p:cTn>
+                              </p:par>
+                            </p:childTnLst>
+                          </p:cTn>
+                        </p:par>
+                      </p:childTnLst>
+                    </p:cTn>
+                  </p:par>
+                  <p:par>
+                    <p:cTn id="7" fill="hold">
+                      <p:stCondLst>
+                        <p:cond delay="indefinite"/>
+                      </p:stCondLst>
+                      <p:childTnLst>
+                        <p:par>
+                          <p:cTn id="8" fill="hold">
+                            <p:stCondLst>
+                              <p:cond delay="0"/>
+                            </p:stCondLst>
+                            <p:childTnLst>
+                              <p:par>
+                                <p:cTn id="9" presetID="1" presetClass="entr" presetSubtype="0" fill="hold" grpId="0" nodeType="clickEffect">
+                                  <p:stCondLst>
+                                    <p:cond delay="0"/>
+                                  </p:stCondLst>
+                                  <p:childTnLst>
+                                    <p:set>
+                                      <p:cBhvr>
+                                        <p:cTn id="10" dur="1" fill="hold">
+                                          <p:stCondLst>
+                                            <p:cond delay="0"/>
+                                          </p:stCondLst>
+                                        </p:cTn>
+                                        <p:tgtEl>
+                                          <p:spTgt spid="7"/>
+                                        </p:tgtEl>
+                                        <p:attrNameLst>
+                                          <p:attrName>style.visibility</p:attrName>
+                                        </p:attrNameLst>
+                                      </p:cBhvr>
+                                      <p:to>
+                                        <p:strVal val="visible"/>
+                                      </p:to>
+                                    </p:set>
+                                  </p:childTnLst>
+                                </p:cTn>
+                              </p:par>
+                            </p:childTnLst>
+                          </p:cTn>
+                        </p:par>
+                      </p:childTnLst>
+                    </p:cTn>
+                  </p:par>
+                  <p:par>
+                    <p:cTn id="11" fill="hold">
+                      <p:stCondLst>
+                        <p:cond delay="indefinite"/>
+                      </p:stCondLst>
+                      <p:childTnLst>
+                        <p:par>
+                          <p:cTn id="12" fill="hold">
+                            <p:stCondLst>
+                              <p:cond delay="0"/>
+                            </p:stCondLst>
+                            <p:childTnLst>
+                              <p:par>
+                                <p:cTn id="13" presetID="1" presetClass="entr" presetSubtype="0" fill="hold" grpId="0" nodeType="clickEffect">
+                                  <p:stCondLst>
+                                    <p:cond delay="0"/>
+                                  </p:stCondLst>
+                                  <p:childTnLst>
+                                    <p:set>
+                                      <p:cBhvr>
+                                        <p:cTn id="14" dur="1" fill="hold">
+                                          <p:stCondLst>
+                                            <p:cond delay="0"/>
+                                          </p:stCondLst>
+                                        </p:cTn>
+                                        <p:tgtEl>
+                                          <p:spTgt spid="8"/>
+                                        </p:tgtEl>
+                                        <p:attrNameLst>
+                                          <p:attrName>style.visibility</p:attrName>
+                                        </p:attrNameLst>
+                                      </p:cBhvr>
+                                      <p:to>
+                                        <p:strVal val="visible"/>
+                                      </p:to>
+                                    </p:set>
+                                  </p:childTnLst>
+                                </p:cTn>
+                              </p:par>
+                            </p:childTnLst>
+                          </p:cTn>
+                        </p:par>
+                      </p:childTnLst>
+                    </p:cTn>
+                  </p:par>
+                  <p:par>
+                    <p:cTn id="15" fill="hold">
+                      <p:stCondLst>
+                        <p:cond delay="indefinite"/>
+                      </p:stCondLst>
+                      <p:childTnLst>
+                        <p:par>
+                          <p:cTn id="16" fill="hold">
+                            <p:stCondLst>
+                              <p:cond delay="0"/>
+                            </p:stCondLst>
+                            <p:childTnLst>
+                              <p:par>
+                                <p:cTn id="17" presetID="1" presetClass="entr" presetSubtype="0" fill="hold" grpId="0" nodeType="clickEffect">
+                                  <p:stCondLst>
+                                    <p:cond delay="0"/>
+                                  </p:stCondLst>
+                                  <p:childTnLst>
+                                    <p:set>
+                                      <p:cBhvr>
+                                        <p:cTn id="18" dur="1" fill="hold">
+                                          <p:stCondLst>
+                                            <p:cond delay="0"/>
+                                          </p:stCondLst>
+                                        </p:cTn>
+                                        <p:tgtEl>
+                                          <p:spTgt spid="9"/>
+                                        </p:tgtEl>
+                                        <p:attrNameLst>
+                                          <p:attrName>style.visibility</p:attrName>
+                                        </p:attrNameLst>
+                                      </p:cBhvr>
+                                      <p:to>
+                                        <p:strVal val="visible"/>
+                                      </p:to>
+                                    </p:set>
+                                  </p:childTnLst>
+                                </p:cTn>
+                              </p:par>
+                            </p:childTnLst>
+                          </p:cTn>
+                        </p:par>
+                      </p:childTnLst>
+                    </p:cTn>
+                  </p:par>
+                  <p:par>
+                    <p:cTn id="19" fill="hold">
+                      <p:stCondLst>
+                        <p:cond delay="indefinite"/>
+                      </p:stCondLst>
+                      <p:childTnLst>
+                        <p:par>
+                          <p:cTn id="20" fill="hold">
+                            <p:stCondLst>
+                              <p:cond delay="0"/>
+                            </p:stCondLst>
+                            <p:childTnLst>
+                              <p:par>
+                                <p:cTn id="21" presetID="1" presetClass="entr" presetSubtype="0" fill="hold" grpId="0" nodeType="clickEffect">
+                                  <p:stCondLst>
+                                    <p:cond delay="0"/>
+                                  </p:stCondLst>
+                                  <p:childTnLst>
+                                    <p:set>
+                                      <p:cBhvr>
+                                        <p:cTn id="22" dur="1" fill="hold">
+                                          <p:stCondLst>
+                                            <p:cond delay="0"/>
+                                          </p:stCondLst>
+                                        </p:cTn>
+                                        <p:tgtEl>
+                                          <p:spTgt spid="11"/>
+                                        </p:tgtEl>
+                                        <p:attrNameLst>
+                                          <p:attrName>style.visibility</p:attrName>
+                                        </p:attrNameLst>
+                                      </p:cBhvr>
+                                      <p:to>
+                                        <p:strVal val="visible"/>
+                                      </p:to>
+                                    </p:set>
+                                  </p:childTnLst>
+                                </p:cTn>
+                              </p:par>
+                            </p:childTnLst>
+                          </p:cTn>
+                        </p:par>
+                      </p:childTnLst>
+                    </p:cTn>
+                  </p:par>
+                  <p:par>
+                    <p:cTn id="23" fill="hold">
+                      <p:stCondLst>
+                        <p:cond delay="indefinite"/>
+                      </p:stCondLst>
+                      <p:childTnLst>
+                        <p:par>
+                          <p:cTn id="24" fill="hold">
+                            <p:stCondLst>
+                              <p:cond delay="0"/>
+                            </p:stCondLst>
+                            <p:childTnLst>
+                              <p:par>
+                                <p:cTn id="25" presetID="1" presetClass="entr" presetSubtype="0" fill="hold" grpId="0" nodeType="clickEffect">
+                                  <p:stCondLst>
+                                    <p:cond delay="0"/>
+                                  </p:stCondLst>
+                                  <p:childTnLst>
+                                    <p:set>
+                                      <p:cBhvr>
+                                        <p:cTn id="26" dur="1" fill="hold">
+                                          <p:stCondLst>
+                                            <p:cond delay="0"/>
+                                          </p:stCondLst>
+                                        </p:cTn>
+                                        <p:tgtEl>
+                                          <p:spTgt spid="10"/>
+                                        </p:tgtEl>
+                                        <p:attrNameLst>
+                                          <p:attrName>style.visibility</p:attrName>
+                                        </p:attrNameLst>
+                                      </p:cBhvr>
+                                      <p:to>
+                                        <p:strVal val="visible"/>
+                                      </p:to>
+                                    </p:set>
+                                  </p:childTnLst>
+                                </p:cTn>
+                              </p:par>
+                            </p:childTnLst>
+                          </p:cTn>
+                        </p:par>
+                      </p:childTnLst>
+                    </p:cTn>
+                  </p:par>
+                  <p:par>
+                    <p:cTn id="27" fill="hold">
+                      <p:stCondLst>
+                        <p:cond delay="indefinite"/>
+                      </p:stCondLst>
+                      <p:childTnLst>
+                        <p:par>
+                          <p:cTn id="28" fill="hold">
+                            <p:stCondLst>
+                              <p:cond delay="0"/>
+                            </p:stCondLst>
+                            <p:childTnLst>
+                              <p:par>
+                                <p:cTn id="29" presetID="10" presetClass="entr" presetSubtype="0" fill="hold" grpId="0" nodeType="clickEffect">
+                                  <p:stCondLst>
+                                    <p:cond delay="0"/>
+                                  </p:stCondLst>
+                                  <p:childTnLst>
+                                    <p:set>
+                                      <p:cBhvr>
+                                        <p:cTn id="30" dur="1" fill="hold">
+                                          <p:stCondLst>
+                                            <p:cond delay="0"/>
+                                          </p:stCondLst>
+                                        </p:cTn>
+                                        <p:tgtEl>
+                                          <p:spTgt spid="15"/>
+                                        </p:tgtEl>
+                                        <p:attrNameLst>
+                                          <p:attrName>style.visibility</p:attrName>
+                                        </p:attrNameLst>
+                                      </p:cBhvr>
+                                      <p:to>
+                                        <p:strVal val="visible"/>
+                                      </p:to>
+                                    </p:set>
+                                    <p:animEffect transition="in" filter="fade">
+                                      <p:cBhvr>
+                                        <p:cTn id="31" dur="500"/>
+                                        <p:tgtEl>
+                                          <p:spTgt spid="15"/>
+                                        </p:tgtEl>
+                                      </p:cBhvr>
+                                    </p:animEffect>
+                                  </p:childTnLst>
+                                </p:cTn>
+                              </p:par>
+                            </p:childTnLst>
+                          </p:cTn>
+                        </p:par>
+                      </p:childTnLst>
+                    </p:cTn>
+                  </p:par>
+                </p:childTnLst>
+              </p:cTn>
+              <p:prevCondLst>
+                <p:cond evt="onPrev" delay="0">
+                  <p:tgtEl>
+                    <p:sldTgt/>
+                  </p:tgtEl>
+                </p:cond>
+              </p:prevCondLst>
+              <p:nextCondLst>
+                <p:cond evt="onNext" delay="0">
+                  <p:tgtEl>
+                    <p:sldTgt/>
+                  </p:tgtEl>
+                </p:cond>
+              </p:nextCondLst>
+            </p:seq>
+          </p:childTnLst>
+        </p:cTn>
+      </p:par>
+    </p:tnLst>
+    <p:bldLst>
+      <p:bldP spid="5" grpId="0" animBg="1"/>
+      <p:bldP spid="7" grpId="0" animBg="1"/>
+      <p:bldP spid="8" grpId="0" animBg="1"/>
+      <p:bldP spid="9" grpId="0" animBg="1"/>
+      <p:bldP spid="10" grpId="0" animBg="1"/>
+      <p:bldP spid="11" grpId="0" animBg="1"/>
+      <p:bldP spid="15" grpId="0"/>
+    </p:bldLst>
+  </p:timing>
 </p:sld>
 </file>
 
-<file path=ppt/slides/slide21.xml><?xml version="1.0" encoding="utf-8"?>
+<file path=ppt/slides/slide19.xml><?xml version="1.0" encoding="utf-8"?>
 <p:sld xmlns:a="http://schemas.openxmlformats.org/drawingml/2006/main" xmlns:r="http://schemas.openxmlformats.org/officeDocument/2006/relationships" xmlns:p="http://schemas.openxmlformats.org/presentationml/2006/main">
   <p:cSld>
     <p:spTree>
@@ -6526,108 +8765,221 @@
             <p:ph idx="1"/>
           </p:nvPr>
         </p:nvSpPr>
-        <p:spPr/>
+        <p:spPr>
+          <a:xfrm>
+            <a:off x="704850" y="1282427"/>
+            <a:ext cx="8496300" cy="5062898"/>
+          </a:xfrm>
+        </p:spPr>
         <p:txBody>
           <a:bodyPr>
-            <a:normAutofit/>
+            <a:normAutofit lnSpcReduction="10000"/>
           </a:bodyPr>
           <a:lstStyle/>
           <a:p>
             <a:r>
+              <a:rPr lang="ja-JP" altLang="en-US" sz="1500" b="1" dirty="0"/>
+              <a:t>レビューの役割とは</a:t>
+            </a:r>
+            <a:endParaRPr kumimoji="1" lang="ja-JP" altLang="en-US" sz="1500" b="1" dirty="0"/>
+          </a:p>
+          <a:p>
+            <a:pPr lvl="1"/>
+            <a:r>
+              <a:rPr kumimoji="1" lang="ja-JP" altLang="en-US" sz="1500" dirty="0"/>
+              <a:t>自動化可能な欠陥検出は前段（リンタ・自動テスト・静的解析）へ</a:t>
+            </a:r>
+            <a:endParaRPr kumimoji="1" lang="en-US" altLang="ja-JP" sz="1500" dirty="0"/>
+          </a:p>
+          <a:p>
+            <a:pPr lvl="2"/>
+            <a:r>
+              <a:rPr lang="ja-JP" altLang="en-US" sz="1500" dirty="0"/>
+              <a:t>そもそも</a:t>
+            </a:r>
+            <a:r>
+              <a:rPr lang="ja-JP" altLang="en-US" sz="1500" b="1" dirty="0"/>
+              <a:t>シフトレフトできる設計が重要</a:t>
+            </a:r>
+            <a:endParaRPr kumimoji="1" lang="en-US" altLang="ja-JP" sz="1500" b="1" dirty="0"/>
+          </a:p>
+          <a:p>
+            <a:pPr lvl="1"/>
+            <a:endParaRPr kumimoji="1" lang="en-US" altLang="ja-JP" sz="1500" dirty="0"/>
+          </a:p>
+          <a:p>
+            <a:pPr lvl="1"/>
+            <a:r>
+              <a:rPr kumimoji="1" lang="ja-JP" altLang="en-US" sz="1500" dirty="0"/>
+              <a:t>レビューは</a:t>
+            </a:r>
+            <a:r>
+              <a:rPr lang="ja-JP" altLang="en-US" sz="1600" dirty="0"/>
+              <a:t>コードが体現する</a:t>
+            </a:r>
+            <a:r>
+              <a:rPr lang="ja-JP" altLang="en-US" sz="1600" b="1" dirty="0"/>
+              <a:t>設計判断とその影響をチームで共有する</a:t>
+            </a:r>
+            <a:r>
+              <a:rPr lang="ja-JP" altLang="en-US" sz="1600" dirty="0"/>
+              <a:t>営み</a:t>
+            </a:r>
+            <a:endParaRPr lang="en-US" altLang="ja-JP" sz="1600" dirty="0"/>
+          </a:p>
+          <a:p>
+            <a:pPr lvl="2"/>
+            <a:r>
+              <a:rPr lang="ja-JP" altLang="en-US" sz="1600" dirty="0">
+                <a:hlinkClick r:id="rId2"/>
+              </a:rPr>
+              <a:t>コードレビューとは何か</a:t>
+            </a:r>
+            <a:endParaRPr lang="ja-JP" altLang="en-US" dirty="0"/>
+          </a:p>
+          <a:p>
+            <a:endParaRPr kumimoji="1" lang="en-US" altLang="ja-JP" sz="1500" b="1" dirty="0"/>
+          </a:p>
+          <a:p>
+            <a:r>
               <a:rPr kumimoji="1" lang="ja-JP" altLang="en-US" sz="1500" b="1" dirty="0"/>
-              <a:t>著者</a:t>
+              <a:t>それぞれの責任</a:t>
             </a:r>
           </a:p>
           <a:p>
             <a:pPr lvl="1"/>
             <a:r>
               <a:rPr kumimoji="1" lang="ja-JP" altLang="en-US" sz="1500" dirty="0"/>
-              <a:t>/self-review → 網羅的チェック（Reckoning）</a:t>
-            </a:r>
+              <a:t>筆者</a:t>
+            </a:r>
+            <a:r>
+              <a:rPr lang="ja-JP" altLang="en-US" sz="1400" dirty="0"/>
+              <a:t>🧑‍💻</a:t>
+            </a:r>
+            <a:r>
+              <a:rPr kumimoji="1" lang="ja-JP" altLang="en-US" sz="1500" dirty="0"/>
+              <a:t>：変更を内面化する、トレードオフを評価して</a:t>
+            </a:r>
+            <a:r>
+              <a:rPr kumimoji="1" lang="ja-JP" altLang="en-US" sz="1500" b="1" dirty="0"/>
+              <a:t>設計判断</a:t>
+            </a:r>
+            <a:r>
+              <a:rPr kumimoji="1" lang="ja-JP" altLang="en-US" sz="1500" dirty="0"/>
+              <a:t>する</a:t>
+            </a:r>
+            <a:endParaRPr kumimoji="1" lang="en-US" altLang="ja-JP" sz="1500" dirty="0"/>
           </a:p>
           <a:p>
             <a:pPr lvl="1"/>
             <a:r>
+              <a:rPr lang="ja-JP" altLang="en-US" sz="1500" dirty="0"/>
+              <a:t>レビュワー</a:t>
+            </a:r>
+            <a:r>
+              <a:rPr lang="ja-JP" altLang="en-US" sz="1400" dirty="0"/>
+              <a:t>🧑‍💻</a:t>
+            </a:r>
+            <a:r>
+              <a:rPr lang="ja-JP" altLang="en-US" sz="1500" dirty="0"/>
+              <a:t>：変更を内面化する、設計判断を評価する</a:t>
+            </a:r>
+            <a:endParaRPr lang="en-US" altLang="ja-JP" sz="1500" dirty="0"/>
+          </a:p>
+          <a:p>
+            <a:pPr lvl="1"/>
+            <a:r>
+              <a:rPr lang="ja-JP" altLang="en-US" sz="1500" dirty="0"/>
+              <a:t>チーム</a:t>
+            </a:r>
+            <a:r>
+              <a:rPr lang="ja-JP" altLang="en-US" sz="1600" dirty="0"/>
+              <a:t>🧑‍💻🧑‍💻🧑‍💻</a:t>
+            </a:r>
+            <a:r>
+              <a:rPr lang="ja-JP" altLang="en-US" sz="1500" dirty="0"/>
+              <a:t>：判断を言語化して、</a:t>
+            </a:r>
+            <a:r>
+              <a:rPr lang="en-US" altLang="ja-JP" sz="1500" dirty="0"/>
+              <a:t>md</a:t>
+            </a:r>
+            <a:r>
+              <a:rPr lang="ja-JP" altLang="en-US" sz="1500" dirty="0"/>
+              <a:t>ファイルに落とし込む</a:t>
+            </a:r>
+            <a:endParaRPr lang="en-US" altLang="ja-JP" sz="1500" dirty="0"/>
+          </a:p>
+          <a:p>
+            <a:pPr lvl="2"/>
+            <a:r>
+              <a:rPr lang="ja-JP" altLang="en-US" sz="1500" dirty="0"/>
+              <a:t>そうすれば</a:t>
+            </a:r>
+            <a:r>
+              <a:rPr lang="en-US" altLang="ja-JP" sz="1500" dirty="0"/>
+              <a:t>AI</a:t>
+            </a:r>
+            <a:r>
+              <a:rPr lang="ja-JP" altLang="en-US" sz="1500" dirty="0"/>
+              <a:t>が見れるので</a:t>
+            </a:r>
+            <a:r>
+              <a:rPr lang="ja-JP" altLang="en-US" sz="1500" b="1" dirty="0"/>
+              <a:t>スケール</a:t>
+            </a:r>
+            <a:r>
+              <a:rPr lang="ja-JP" altLang="en-US" sz="1500" dirty="0"/>
+              <a:t>する（逆に、個人に頼るとスケールしない）</a:t>
+            </a:r>
+            <a:endParaRPr lang="en-US" altLang="ja-JP" sz="1500" dirty="0"/>
+          </a:p>
+          <a:p>
+            <a:pPr lvl="1"/>
+            <a:r>
+              <a:rPr kumimoji="1" lang="en-US" altLang="ja-JP" sz="1500" dirty="0"/>
+              <a:t>AI</a:t>
+            </a:r>
+            <a:r>
+              <a:rPr lang="ja-JP" altLang="en-US" sz="1600" dirty="0"/>
+              <a:t>🤖</a:t>
+            </a:r>
+            <a:r>
               <a:rPr kumimoji="1" lang="ja-JP" altLang="en-US" sz="1500" dirty="0"/>
-              <a:t>意思決定フェーズ → 各 finding に判断（Judgment）</a:t>
-            </a:r>
-          </a:p>
-          <a:p>
-            <a:pPr lvl="1"/>
+              <a:t>：</a:t>
+            </a:r>
+            <a:r>
+              <a:rPr kumimoji="1" lang="en-US" altLang="ja-JP" sz="1500" dirty="0"/>
+              <a:t>md</a:t>
+            </a:r>
             <a:r>
               <a:rPr kumimoji="1" lang="ja-JP" altLang="en-US" sz="1500" dirty="0"/>
-              <a:t>/draft-pr → 意思決定記録と設計意図を PR に埋め込む</a:t>
+              <a:t>ファイルに</a:t>
+            </a:r>
+            <a:r>
+              <a:rPr kumimoji="1" lang="ja-JP" altLang="en-US" sz="1500" b="1" dirty="0"/>
+              <a:t>言語化済み</a:t>
+            </a:r>
+            <a:r>
+              <a:rPr kumimoji="1" lang="ja-JP" altLang="en-US" sz="1500" dirty="0"/>
+              <a:t>の判断が一貫されているか網羅する</a:t>
+            </a:r>
+            <a:br>
+              <a:rPr kumimoji="1" lang="en-US" altLang="ja-JP" sz="1500" dirty="0"/>
+            </a:br>
+            <a:r>
+              <a:rPr kumimoji="1" lang="ja-JP" altLang="en-US" sz="1500" dirty="0"/>
+              <a:t>　　　トレードオフ</a:t>
+            </a:r>
+            <a:r>
+              <a:rPr lang="ja-JP" altLang="en-US" sz="1500" dirty="0"/>
+              <a:t>がある場合は、</a:t>
+            </a:r>
+            <a:r>
+              <a:rPr kumimoji="1" lang="ja-JP" altLang="en-US" sz="1500" dirty="0"/>
+              <a:t>サジェストする</a:t>
             </a:r>
             <a:endParaRPr lang="ja-JP" altLang="en-US" dirty="0"/>
-          </a:p>
-          <a:p>
-            <a:r>
-              <a:rPr kumimoji="1" lang="ja-JP" altLang="en-US" sz="1500" b="1" dirty="0"/>
-              <a:t>レビュワー</a:t>
-            </a:r>
-          </a:p>
-          <a:p>
-            <a:pPr lvl="1"/>
-            <a:r>
-              <a:rPr kumimoji="1" lang="ja-JP" altLang="en-US" sz="1500" dirty="0"/>
-              <a:t>/peer-review → 検討済み事項をスキップ</a:t>
-            </a:r>
-          </a:p>
-          <a:p>
-            <a:pPr lvl="1"/>
-            <a:r>
-              <a:rPr kumimoji="1" lang="ja-JP" altLang="en-US" sz="1500" dirty="0"/>
-              <a:t>コメント選択 → 「その判断は妥当か」を問う（Judgment）</a:t>
-            </a:r>
-          </a:p>
-          <a:p>
-            <a:pPr lvl="1"/>
-            <a:r>
-              <a:rPr kumimoji="1" lang="ja-JP" altLang="en-US" sz="1500" dirty="0"/>
-              <a:t>/post-review → Pending レビューを投稿</a:t>
-            </a:r>
-          </a:p>
-          <a:p>
-            <a:r>
-              <a:rPr lang="ja-JP" altLang="en-US" sz="1500" b="1" dirty="0"/>
-              <a:t>チームで</a:t>
-            </a:r>
-          </a:p>
-          <a:p>
-            <a:pPr lvl="1"/>
-            <a:r>
-              <a:rPr lang="en-US" altLang="ja-JP" sz="1500" dirty="0"/>
-              <a:t>Claude.md</a:t>
-            </a:r>
-            <a:r>
-              <a:rPr lang="ja-JP" altLang="en-US" sz="1500" dirty="0"/>
-              <a:t>や各</a:t>
-            </a:r>
-            <a:r>
-              <a:rPr lang="en-US" altLang="ja-JP" sz="1500" dirty="0"/>
-              <a:t>Agent.md</a:t>
-            </a:r>
-            <a:r>
-              <a:rPr lang="ja-JP" altLang="en-US" sz="1500" dirty="0"/>
-              <a:t>に判断・観点を追加していく（Judgment）</a:t>
-            </a:r>
-            <a:endParaRPr lang="en-US" altLang="ja-JP" sz="1500" dirty="0"/>
-          </a:p>
-          <a:p>
-            <a:pPr lvl="1"/>
-            <a:endParaRPr lang="ja-JP" altLang="en-US" dirty="0"/>
-          </a:p>
-          <a:p>
-            <a:r>
-              <a:rPr kumimoji="1" lang="ja-JP" altLang="en-US" sz="1500" b="1" dirty="0"/>
-              <a:t>重要なのは「AI に言われたから」ではなく</a:t>
-            </a:r>
-          </a:p>
-          <a:p>
-            <a:r>
-              <a:rPr kumimoji="1" lang="ja-JP" altLang="en-US" sz="1500" b="1" dirty="0"/>
-              <a:t>「自分はこう判断した」と残すこと</a:t>
-            </a:r>
           </a:p>
         </p:txBody>
       </p:sp>
@@ -6648,8 +9000,185 @@
           <a:p>
             <a:r>
               <a:rPr kumimoji="1" lang="ja-JP" altLang="en-US" dirty="0"/>
-              <a:t>演算（Reckoning）— 判断を通すワークフロー</a:t>
-            </a:r>
+              <a:t>コードレビューとはなにか</a:t>
+            </a:r>
+          </a:p>
+        </p:txBody>
+      </p:sp>
+      <p:sp>
+        <p:nvSpPr>
+          <p:cNvPr id="4" name="吹き出し: 四角形 3">
+            <a:extLst>
+              <a:ext uri="{FF2B5EF4-FFF2-40B4-BE49-F238E27FC236}">
+                <a16:creationId xmlns:a16="http://schemas.microsoft.com/office/drawing/2014/main" id="{79E18367-E8D4-39B4-E3D2-E507EA67858B}"/>
+              </a:ext>
+            </a:extLst>
+          </p:cNvPr>
+          <p:cNvSpPr/>
+          <p:nvPr/>
+        </p:nvSpPr>
+        <p:spPr>
+          <a:xfrm>
+            <a:off x="5421052" y="1160748"/>
+            <a:ext cx="3996444" cy="418381"/>
+          </a:xfrm>
+          <a:prstGeom prst="wedgeRectCallout">
+            <a:avLst>
+              <a:gd name="adj1" fmla="val -30394"/>
+              <a:gd name="adj2" fmla="val 92960"/>
+            </a:avLst>
+          </a:prstGeom>
+          <a:solidFill>
+            <a:schemeClr val="accent6">
+              <a:alpha val="50000"/>
+            </a:schemeClr>
+          </a:solidFill>
+          <a:ln>
+            <a:noFill/>
+          </a:ln>
+        </p:spPr>
+        <p:style>
+          <a:lnRef idx="0">
+            <a:scrgbClr r="0" g="0" b="0"/>
+          </a:lnRef>
+          <a:fillRef idx="0">
+            <a:scrgbClr r="0" g="0" b="0"/>
+          </a:fillRef>
+          <a:effectRef idx="0">
+            <a:scrgbClr r="0" g="0" b="0"/>
+          </a:effectRef>
+          <a:fontRef idx="minor">
+            <a:schemeClr val="lt1"/>
+          </a:fontRef>
+        </p:style>
+        <p:txBody>
+          <a:bodyPr rtlCol="0" anchor="ctr"/>
+          <a:lstStyle/>
+          <a:p>
+            <a:pPr algn="ctr"/>
+            <a:r>
+              <a:rPr lang="ja-JP" altLang="en-US" dirty="0"/>
+              <a:t>コードレビューはバグ探しではない</a:t>
+            </a:r>
+            <a:endParaRPr kumimoji="1" lang="ja-JP" altLang="en-US" dirty="0"/>
+          </a:p>
+        </p:txBody>
+      </p:sp>
+      <p:sp>
+        <p:nvSpPr>
+          <p:cNvPr id="5" name="吹き出し: 四角形 4">
+            <a:extLst>
+              <a:ext uri="{FF2B5EF4-FFF2-40B4-BE49-F238E27FC236}">
+                <a16:creationId xmlns:a16="http://schemas.microsoft.com/office/drawing/2014/main" id="{11178968-5063-1A3B-F8BC-812CA141B413}"/>
+              </a:ext>
+            </a:extLst>
+          </p:cNvPr>
+          <p:cNvSpPr/>
+          <p:nvPr/>
+        </p:nvSpPr>
+        <p:spPr>
+          <a:xfrm>
+            <a:off x="5171792" y="2204864"/>
+            <a:ext cx="4245704" cy="418381"/>
+          </a:xfrm>
+          <a:prstGeom prst="wedgeRectCallout">
+            <a:avLst>
+              <a:gd name="adj1" fmla="val -55334"/>
+              <a:gd name="adj2" fmla="val -42545"/>
+            </a:avLst>
+          </a:prstGeom>
+          <a:solidFill>
+            <a:schemeClr val="accent6">
+              <a:alpha val="50000"/>
+            </a:schemeClr>
+          </a:solidFill>
+          <a:ln>
+            <a:noFill/>
+          </a:ln>
+        </p:spPr>
+        <p:style>
+          <a:lnRef idx="0">
+            <a:scrgbClr r="0" g="0" b="0"/>
+          </a:lnRef>
+          <a:fillRef idx="0">
+            <a:scrgbClr r="0" g="0" b="0"/>
+          </a:fillRef>
+          <a:effectRef idx="0">
+            <a:scrgbClr r="0" g="0" b="0"/>
+          </a:effectRef>
+          <a:fontRef idx="minor">
+            <a:schemeClr val="lt1"/>
+          </a:fontRef>
+        </p:style>
+        <p:txBody>
+          <a:bodyPr rtlCol="0" anchor="ctr"/>
+          <a:lstStyle/>
+          <a:p>
+            <a:pPr algn="ctr"/>
+            <a:r>
+              <a:rPr lang="ja-JP" altLang="en-US" dirty="0"/>
+              <a:t>レビューで見つかるのは基本遅すぎる</a:t>
+            </a:r>
+            <a:endParaRPr kumimoji="1" lang="ja-JP" altLang="en-US" dirty="0"/>
+          </a:p>
+        </p:txBody>
+      </p:sp>
+      <p:sp>
+        <p:nvSpPr>
+          <p:cNvPr id="6" name="吹き出し: 四角形 5">
+            <a:extLst>
+              <a:ext uri="{FF2B5EF4-FFF2-40B4-BE49-F238E27FC236}">
+                <a16:creationId xmlns:a16="http://schemas.microsoft.com/office/drawing/2014/main" id="{F4EED5A9-17F6-8A21-3B95-50E5EFB479E0}"/>
+              </a:ext>
+            </a:extLst>
+          </p:cNvPr>
+          <p:cNvSpPr/>
+          <p:nvPr/>
+        </p:nvSpPr>
+        <p:spPr>
+          <a:xfrm>
+            <a:off x="4484948" y="3545682"/>
+            <a:ext cx="4605744" cy="418381"/>
+          </a:xfrm>
+          <a:prstGeom prst="wedgeRectCallout">
+            <a:avLst>
+              <a:gd name="adj1" fmla="val -21090"/>
+              <a:gd name="adj2" fmla="val 97331"/>
+            </a:avLst>
+          </a:prstGeom>
+          <a:solidFill>
+            <a:schemeClr val="accent6">
+              <a:alpha val="50000"/>
+            </a:schemeClr>
+          </a:solidFill>
+          <a:ln>
+            <a:noFill/>
+          </a:ln>
+        </p:spPr>
+        <p:style>
+          <a:lnRef idx="0">
+            <a:scrgbClr r="0" g="0" b="0"/>
+          </a:lnRef>
+          <a:fillRef idx="0">
+            <a:scrgbClr r="0" g="0" b="0"/>
+          </a:fillRef>
+          <a:effectRef idx="0">
+            <a:scrgbClr r="0" g="0" b="0"/>
+          </a:effectRef>
+          <a:fontRef idx="minor">
+            <a:schemeClr val="lt1"/>
+          </a:fontRef>
+        </p:style>
+        <p:txBody>
+          <a:bodyPr rtlCol="0" anchor="ctr"/>
+          <a:lstStyle/>
+          <a:p>
+            <a:pPr algn="ctr"/>
+            <a:r>
+              <a:rPr lang="ja-JP" altLang="en-US" dirty="0"/>
+              <a:t>すべての設計判断はトレードオフに基づく</a:t>
+            </a:r>
+            <a:endParaRPr kumimoji="1" lang="ja-JP" altLang="en-US" dirty="0"/>
           </a:p>
         </p:txBody>
       </p:sp>
@@ -6658,10 +9187,180 @@
   <p:clrMapOvr>
     <a:masterClrMapping/>
   </p:clrMapOvr>
+  <p:timing>
+    <p:tnLst>
+      <p:par>
+        <p:cTn id="1" dur="indefinite" restart="never" nodeType="tmRoot">
+          <p:childTnLst>
+            <p:seq concurrent="1" nextAc="seek">
+              <p:cTn id="2" dur="indefinite" nodeType="mainSeq">
+                <p:childTnLst>
+                  <p:par>
+                    <p:cTn id="3" fill="hold">
+                      <p:stCondLst>
+                        <p:cond delay="indefinite"/>
+                      </p:stCondLst>
+                      <p:childTnLst>
+                        <p:par>
+                          <p:cTn id="4" fill="hold">
+                            <p:stCondLst>
+                              <p:cond delay="0"/>
+                            </p:stCondLst>
+                            <p:childTnLst>
+                              <p:par>
+                                <p:cTn id="5" presetID="1" presetClass="entr" presetSubtype="0" fill="hold" grpId="0" nodeType="clickEffect">
+                                  <p:stCondLst>
+                                    <p:cond delay="0"/>
+                                  </p:stCondLst>
+                                  <p:childTnLst>
+                                    <p:set>
+                                      <p:cBhvr>
+                                        <p:cTn id="6" dur="1" fill="hold">
+                                          <p:stCondLst>
+                                            <p:cond delay="0"/>
+                                          </p:stCondLst>
+                                        </p:cTn>
+                                        <p:tgtEl>
+                                          <p:spTgt spid="4"/>
+                                        </p:tgtEl>
+                                        <p:attrNameLst>
+                                          <p:attrName>style.visibility</p:attrName>
+                                        </p:attrNameLst>
+                                      </p:cBhvr>
+                                      <p:to>
+                                        <p:strVal val="visible"/>
+                                      </p:to>
+                                    </p:set>
+                                  </p:childTnLst>
+                                </p:cTn>
+                              </p:par>
+                            </p:childTnLst>
+                          </p:cTn>
+                        </p:par>
+                      </p:childTnLst>
+                    </p:cTn>
+                  </p:par>
+                  <p:par>
+                    <p:cTn id="7" fill="hold">
+                      <p:stCondLst>
+                        <p:cond delay="indefinite"/>
+                      </p:stCondLst>
+                      <p:childTnLst>
+                        <p:par>
+                          <p:cTn id="8" fill="hold">
+                            <p:stCondLst>
+                              <p:cond delay="0"/>
+                            </p:stCondLst>
+                            <p:childTnLst>
+                              <p:par>
+                                <p:cTn id="9" presetID="1" presetClass="entr" presetSubtype="0" fill="hold" grpId="0" nodeType="clickEffect">
+                                  <p:stCondLst>
+                                    <p:cond delay="0"/>
+                                  </p:stCondLst>
+                                  <p:childTnLst>
+                                    <p:set>
+                                      <p:cBhvr>
+                                        <p:cTn id="10" dur="1" fill="hold">
+                                          <p:stCondLst>
+                                            <p:cond delay="0"/>
+                                          </p:stCondLst>
+                                        </p:cTn>
+                                        <p:tgtEl>
+                                          <p:spTgt spid="5"/>
+                                        </p:tgtEl>
+                                        <p:attrNameLst>
+                                          <p:attrName>style.visibility</p:attrName>
+                                        </p:attrNameLst>
+                                      </p:cBhvr>
+                                      <p:to>
+                                        <p:strVal val="visible"/>
+                                      </p:to>
+                                    </p:set>
+                                  </p:childTnLst>
+                                </p:cTn>
+                              </p:par>
+                            </p:childTnLst>
+                          </p:cTn>
+                        </p:par>
+                      </p:childTnLst>
+                    </p:cTn>
+                  </p:par>
+                  <p:par>
+                    <p:cTn id="11" fill="hold">
+                      <p:stCondLst>
+                        <p:cond delay="indefinite"/>
+                      </p:stCondLst>
+                      <p:childTnLst>
+                        <p:par>
+                          <p:cTn id="12" fill="hold">
+                            <p:stCondLst>
+                              <p:cond delay="0"/>
+                            </p:stCondLst>
+                            <p:childTnLst>
+                              <p:par>
+                                <p:cTn id="13" presetID="1" presetClass="entr" presetSubtype="0" fill="hold" grpId="0" nodeType="clickEffect">
+                                  <p:stCondLst>
+                                    <p:cond delay="0"/>
+                                  </p:stCondLst>
+                                  <p:childTnLst>
+                                    <p:set>
+                                      <p:cBhvr>
+                                        <p:cTn id="14" dur="1" fill="hold">
+                                          <p:stCondLst>
+                                            <p:cond delay="0"/>
+                                          </p:stCondLst>
+                                        </p:cTn>
+                                        <p:tgtEl>
+                                          <p:spTgt spid="6"/>
+                                        </p:tgtEl>
+                                        <p:attrNameLst>
+                                          <p:attrName>style.visibility</p:attrName>
+                                        </p:attrNameLst>
+                                      </p:cBhvr>
+                                      <p:to>
+                                        <p:strVal val="visible"/>
+                                      </p:to>
+                                    </p:set>
+                                  </p:childTnLst>
+                                </p:cTn>
+                              </p:par>
+                            </p:childTnLst>
+                          </p:cTn>
+                        </p:par>
+                      </p:childTnLst>
+                    </p:cTn>
+                  </p:par>
+                </p:childTnLst>
+              </p:cTn>
+              <p:prevCondLst>
+                <p:cond evt="onPrev" delay="0">
+                  <p:tgtEl>
+                    <p:sldTgt/>
+                  </p:tgtEl>
+                </p:cond>
+              </p:prevCondLst>
+              <p:nextCondLst>
+                <p:cond evt="onNext" delay="0">
+                  <p:tgtEl>
+                    <p:sldTgt/>
+                  </p:tgtEl>
+                </p:cond>
+              </p:nextCondLst>
+            </p:seq>
+          </p:childTnLst>
+        </p:cTn>
+      </p:par>
+    </p:tnLst>
+    <p:bldLst>
+      <p:bldP spid="4" grpId="0" animBg="1"/>
+      <p:bldP spid="5" grpId="0" animBg="1"/>
+      <p:bldP spid="6" grpId="0" animBg="1"/>
+    </p:bldLst>
+  </p:timing>
 </p:sld>
 </file>
 
-<file path=ppt/slides/slide22.xml><?xml version="1.0" encoding="utf-8"?>
+<file path=ppt/slides/slide2.xml><?xml version="1.0" encoding="utf-8"?>
 <p:sld xmlns:a="http://schemas.openxmlformats.org/drawingml/2006/main" xmlns:r="http://schemas.openxmlformats.org/officeDocument/2006/relationships" xmlns:p="http://schemas.openxmlformats.org/presentationml/2006/main">
   <p:cSld>
     <p:spTree>
@@ -6680,66 +9379,96 @@
       </p:grpSpPr>
       <p:sp>
         <p:nvSpPr>
-          <p:cNvPr id="2" name="スライド番号プレースホルダー 1">
-            <a:extLst>
-              <a:ext uri="{FF2B5EF4-FFF2-40B4-BE49-F238E27FC236}">
-                <a16:creationId xmlns:a16="http://schemas.microsoft.com/office/drawing/2014/main" id="{D973F7F5-AA83-C5F8-D4F6-95185740F790}"/>
-              </a:ext>
-            </a:extLst>
-          </p:cNvPr>
-          <p:cNvSpPr>
-            <a:spLocks noGrp="1"/>
+          <p:cNvPr id="2" name="コンテンツ 1"/>
+          <p:cNvSpPr txBox="1">
+            <a:spLocks/>
           </p:cNvSpPr>
-          <p:nvPr>
-            <p:ph type="sldNum" sz="quarter" idx="12"/>
-          </p:nvPr>
+          <p:nvPr/>
         </p:nvSpPr>
-        <p:spPr/>
+        <p:spPr>
+          <a:xfrm>
+            <a:off x="697186" y="1000000"/>
+            <a:ext cx="8496300" cy="4800000"/>
+          </a:xfrm>
+          <a:prstGeom prst="rect">
+            <a:avLst/>
+          </a:prstGeom>
+        </p:spPr>
         <p:txBody>
-          <a:bodyPr/>
-          <a:lstStyle/>
-          <a:p>
-            <a:fld id="{C314D315-6C69-40BF-98D6-60239DAB9584}" type="slidenum">
-              <a:rPr lang="ja-JP" altLang="en-US" smtClean="0"/>
-              <a:pPr/>
-              <a:t>21</a:t>
-            </a:fld>
+          <a:bodyPr vert="horz" lIns="91440" tIns="91440" rIns="91440" bIns="91440" rtlCol="0" anchor="ctr">
+            <a:normAutofit/>
+          </a:bodyPr>
+          <a:lstStyle>
+            <a:lvl1pPr algn="ctr">
+              <a:defRPr kumimoji="1" sz="2400">
+                <a:solidFill>
+                  <a:schemeClr val="tx1"/>
+                </a:solidFill>
+                <a:latin typeface="+mn-ea"/>
+              </a:defRPr>
+            </a:lvl1pPr>
+          </a:lstStyle>
+          <a:p>
+            <a:r>
+              <a:rPr kumimoji="1" lang="ja-JP" altLang="en-US" sz="2800" dirty="0"/>
+              <a:t>AI</a:t>
+            </a:r>
+            <a:r>
+              <a:rPr lang="ja-JP" altLang="en-US" sz="2800" dirty="0"/>
+              <a:t>に</a:t>
+            </a:r>
+            <a:r>
+              <a:rPr kumimoji="1" lang="ja-JP" altLang="en-US" sz="2800" dirty="0"/>
+              <a:t>「何ができて、何をやらせるべき」か？</a:t>
+            </a:r>
+          </a:p>
+          <a:p>
             <a:endParaRPr lang="ja-JP" altLang="en-US" dirty="0"/>
+          </a:p>
+          <a:p>
+            <a:endParaRPr lang="ja-JP" altLang="en-US" dirty="0"/>
+          </a:p>
+          <a:p>
+            <a:r>
+              <a:rPr kumimoji="1" lang="ja-JP" altLang="en-US" sz="3200" b="1" dirty="0"/>
+              <a:t>AI時代に仕事をどう設計するか</a:t>
+            </a:r>
+            <a:endParaRPr kumimoji="1" lang="en-US" altLang="ja-JP" sz="3200" b="1" dirty="0"/>
           </a:p>
         </p:txBody>
       </p:sp>
       <p:pic>
         <p:nvPicPr>
-          <p:cNvPr id="14" name="コンテンツ プレースホルダー 13">
+          <p:cNvPr id="4" name="図 3">
             <a:extLst>
               <a:ext uri="{FF2B5EF4-FFF2-40B4-BE49-F238E27FC236}">
-                <a16:creationId xmlns:a16="http://schemas.microsoft.com/office/drawing/2014/main" id="{FE0E50F9-CFA8-5701-25E1-2F10B6649CD8}"/>
+                <a16:creationId xmlns:a16="http://schemas.microsoft.com/office/drawing/2014/main" id="{54AAFD6A-8F69-762F-CC68-F02F57101B33}"/>
               </a:ext>
             </a:extLst>
           </p:cNvPr>
           <p:cNvPicPr>
-            <a:picLocks noGrp="1" noChangeAspect="1"/>
+            <a:picLocks noChangeAspect="1"/>
           </p:cNvPicPr>
-          <p:nvPr>
-            <p:ph sz="quarter" idx="13"/>
-          </p:nvPr>
+          <p:nvPr/>
         </p:nvPicPr>
         <p:blipFill>
           <a:blip r:embed="rId2">
+            <a:alphaModFix amt="35000"/>
             <a:extLst>
               <a:ext uri="{28A0092B-C50C-407E-A947-70E740481C1C}">
                 <a14:useLocalDpi xmlns:a14="http://schemas.microsoft.com/office/drawing/2010/main" val="0"/>
               </a:ext>
             </a:extLst>
           </a:blip>
+          <a:srcRect l="14905" t="2673" r="15827"/>
           <a:stretch>
             <a:fillRect/>
           </a:stretch>
         </p:blipFill>
         <p:spPr>
           <a:xfrm>
-            <a:off x="1316596" y="134170"/>
-            <a:ext cx="7560840" cy="6571194"/>
+            <a:off x="7653300" y="4365104"/>
+            <a:ext cx="2146032" cy="2412268"/>
           </a:xfrm>
           <a:prstGeom prst="rect">
             <a:avLst/>
@@ -6747,11 +9476,6 @@
         </p:spPr>
       </p:pic>
     </p:spTree>
-    <p:extLst>
-      <p:ext uri="{BB962C8B-B14F-4D97-AF65-F5344CB8AC3E}">
-        <p14:creationId xmlns:p14="http://schemas.microsoft.com/office/powerpoint/2010/main" val="3604008524"/>
-      </p:ext>
-    </p:extLst>
   </p:cSld>
   <p:clrMapOvr>
     <a:masterClrMapping/>
@@ -6759,12 +9483,18 @@
 </p:sld>
 </file>
 
-<file path=ppt/slides/slide23.xml><?xml version="1.0" encoding="utf-8"?>
+<file path=ppt/slides/slide20.xml><?xml version="1.0" encoding="utf-8"?>
 <p:sld xmlns:a="http://schemas.openxmlformats.org/drawingml/2006/main" xmlns:r="http://schemas.openxmlformats.org/officeDocument/2006/relationships" xmlns:p="http://schemas.openxmlformats.org/presentationml/2006/main">
   <p:cSld>
     <p:spTree>
       <p:nvGrpSpPr>
-        <p:cNvPr id="1" name=""/>
+        <p:cNvPr id="1" name="">
+          <a:extLst>
+            <a:ext uri="{FF2B5EF4-FFF2-40B4-BE49-F238E27FC236}">
+              <a16:creationId xmlns:a16="http://schemas.microsoft.com/office/drawing/2014/main" id="{C0FBEBEC-AF90-B5CB-023A-A9CF0A81E621}"/>
+            </a:ext>
+          </a:extLst>
+        </p:cNvPr>
         <p:cNvGrpSpPr/>
         <p:nvPr/>
       </p:nvGrpSpPr>
@@ -6778,7 +9508,13 @@
       </p:grpSpPr>
       <p:sp>
         <p:nvSpPr>
-          <p:cNvPr id="2" name="コンテンツ プレースホルダー 1"/>
+          <p:cNvPr id="2" name="コンテンツ プレースホルダー 1">
+            <a:extLst>
+              <a:ext uri="{FF2B5EF4-FFF2-40B4-BE49-F238E27FC236}">
+                <a16:creationId xmlns:a16="http://schemas.microsoft.com/office/drawing/2014/main" id="{0ED4CDC0-E09E-F8AB-DBC0-554DEBA37A40}"/>
+              </a:ext>
+            </a:extLst>
+          </p:cNvPr>
           <p:cNvSpPr>
             <a:spLocks noGrp="1"/>
           </p:cNvSpPr>
@@ -6786,87 +9522,119 @@
             <p:ph idx="1"/>
           </p:nvPr>
         </p:nvSpPr>
-        <p:spPr/>
+        <p:spPr>
+          <a:xfrm>
+            <a:off x="389139" y="1676206"/>
+            <a:ext cx="8496300" cy="3116527"/>
+          </a:xfrm>
+        </p:spPr>
         <p:txBody>
           <a:bodyPr>
-            <a:normAutofit/>
+            <a:normAutofit lnSpcReduction="10000"/>
           </a:bodyPr>
           <a:lstStyle/>
           <a:p>
             <a:r>
-              <a:rPr kumimoji="1" lang="ja-JP" altLang="en-US" sz="1500" b="1" dirty="0"/>
-              <a:t>責務分離</a:t>
-            </a:r>
+              <a:rPr lang="en-US" altLang="ja-JP" b="1" dirty="0"/>
+              <a:t>AI</a:t>
+            </a:r>
+            <a:r>
+              <a:rPr lang="ja-JP" altLang="en-US" b="1" dirty="0"/>
+              <a:t>が優秀になったことで陥りがちな状況</a:t>
+            </a:r>
+            <a:endParaRPr kumimoji="1" lang="ja-JP" altLang="en-US" dirty="0"/>
           </a:p>
           <a:p>
             <a:pPr lvl="1"/>
             <a:r>
-              <a:rPr kumimoji="1" lang="ja-JP" altLang="en-US" sz="1500" dirty="0"/>
-              <a:t>自動化可能な欠陥検出は前段へ、レビューは採否判断へ寄せられる</a:t>
-            </a:r>
+              <a:rPr lang="en-US" altLang="ja-JP" sz="1600" dirty="0"/>
+              <a:t>AI</a:t>
+            </a:r>
+            <a:r>
+              <a:rPr lang="ja-JP" altLang="en-US" sz="1800" dirty="0"/>
+              <a:t>🤖</a:t>
+            </a:r>
+            <a:r>
+              <a:rPr lang="ja-JP" altLang="en-US" sz="1600" dirty="0"/>
+              <a:t>が出力した実装を、</a:t>
+            </a:r>
+            <a:br>
+              <a:rPr lang="en-US" altLang="ja-JP" sz="1600" dirty="0"/>
+            </a:br>
+            <a:r>
+              <a:rPr lang="ja-JP" altLang="en-US" sz="1600" dirty="0"/>
+              <a:t>筆者</a:t>
+            </a:r>
+            <a:r>
+              <a:rPr lang="ja-JP" altLang="en-US" sz="1800" dirty="0"/>
+              <a:t>🧑‍💻</a:t>
+            </a:r>
+            <a:r>
+              <a:rPr lang="ja-JP" altLang="en-US" sz="1600" dirty="0"/>
+              <a:t>が「動いてるから」でレビューに出してくる</a:t>
+            </a:r>
+            <a:endParaRPr lang="en-US" altLang="ja-JP" sz="1600" dirty="0"/>
           </a:p>
           <a:p>
             <a:pPr lvl="1"/>
-            <a:r>
-              <a:rPr kumimoji="1" lang="ja-JP" altLang="en-US" sz="1500" dirty="0"/>
-              <a:t>最終チェックポイントは人間同士のレビューに残せる</a:t>
-            </a:r>
-          </a:p>
-          <a:p>
-            <a:endParaRPr lang="ja-JP" altLang="en-US" dirty="0"/>
-          </a:p>
-          <a:p>
-            <a:r>
-              <a:rPr kumimoji="1" lang="ja-JP" altLang="en-US" sz="1500" b="1" dirty="0"/>
-              <a:t>変更理解</a:t>
-            </a:r>
+            <a:endParaRPr lang="en-US" altLang="ja-JP" sz="1600" dirty="0"/>
           </a:p>
           <a:p>
             <a:pPr lvl="1"/>
-            <a:r>
-              <a:rPr kumimoji="1" lang="ja-JP" altLang="en-US" sz="1500" dirty="0"/>
-              <a:t>著者が読み直してから出すので、ブラックボックスな変更が減る</a:t>
-            </a:r>
+            <a:endParaRPr lang="en-US" altLang="ja-JP" sz="1600" dirty="0"/>
           </a:p>
           <a:p>
             <a:pPr lvl="1"/>
-            <a:r>
-              <a:rPr kumimoji="1" lang="ja-JP" altLang="en-US" sz="1500" dirty="0"/>
-              <a:t>コメントが「教える」より「判断の確認」に寄ってくる</a:t>
-            </a:r>
-          </a:p>
-          <a:p>
-            <a:endParaRPr lang="ja-JP" altLang="en-US" dirty="0"/>
-          </a:p>
-          <a:p>
-            <a:r>
-              <a:rPr lang="ja-JP" altLang="en-US" sz="1500" b="1" dirty="0"/>
-              <a:t>仕組み</a:t>
-            </a:r>
-            <a:r>
-              <a:rPr kumimoji="1" lang="ja-JP" altLang="en-US" sz="1500" b="1" dirty="0"/>
-              <a:t>としての効果</a:t>
-            </a:r>
+            <a:endParaRPr lang="en-US" altLang="ja-JP" sz="1600" dirty="0"/>
           </a:p>
           <a:p>
             <a:pPr lvl="1"/>
             <a:r>
-              <a:rPr kumimoji="1" lang="ja-JP" altLang="en-US" sz="1500" dirty="0"/>
-              <a:t>単発のレビューコメントは軽く、Judgment の訓練機会は増える</a:t>
-            </a:r>
-          </a:p>
-          <a:p>
-            <a:pPr lvl="1"/>
-            <a:r>
-              <a:rPr kumimoji="1" lang="ja-JP" altLang="en-US" sz="1500" dirty="0"/>
-              <a:t>Issue 起点で方向性を先に合わせる動機が生まれる</a:t>
-            </a:r>
+              <a:rPr lang="en-US" altLang="ja-JP" sz="1600" dirty="0"/>
+              <a:t>AI</a:t>
+            </a:r>
+            <a:r>
+              <a:rPr lang="ja-JP" altLang="en-US" sz="1800" dirty="0"/>
+              <a:t>🤖</a:t>
+            </a:r>
+            <a:r>
+              <a:rPr lang="ja-JP" altLang="en-US" sz="1600" dirty="0"/>
+              <a:t>が出した指摘を</a:t>
+            </a:r>
+            <a:br>
+              <a:rPr lang="en-US" altLang="ja-JP" sz="1600" dirty="0"/>
+            </a:br>
+            <a:r>
+              <a:rPr lang="ja-JP" altLang="en-US" sz="1600" dirty="0"/>
+              <a:t>レビュワー</a:t>
+            </a:r>
+            <a:r>
+              <a:rPr lang="ja-JP" altLang="en-US" sz="1800" dirty="0"/>
+              <a:t>🧑‍💻</a:t>
+            </a:r>
+            <a:r>
+              <a:rPr lang="ja-JP" altLang="en-US" sz="1600" dirty="0"/>
+              <a:t>が理解もせずにたくさん指摘してくる</a:t>
+            </a:r>
+            <a:endParaRPr lang="en-US" altLang="ja-JP" sz="1600" dirty="0"/>
+          </a:p>
+          <a:p>
+            <a:endParaRPr lang="en-US" altLang="ja-JP" sz="1500" b="1" dirty="0"/>
+          </a:p>
+          <a:p>
+            <a:endParaRPr lang="en-US" altLang="ja-JP" sz="1500" b="1" dirty="0"/>
           </a:p>
         </p:txBody>
       </p:sp>
       <p:sp>
         <p:nvSpPr>
-          <p:cNvPr id="3" name="タイトル 2"/>
+          <p:cNvPr id="3" name="タイトル 2">
+            <a:extLst>
+              <a:ext uri="{FF2B5EF4-FFF2-40B4-BE49-F238E27FC236}">
+                <a16:creationId xmlns:a16="http://schemas.microsoft.com/office/drawing/2014/main" id="{408BC273-5357-6783-E7B8-42ECEF62A56F}"/>
+              </a:ext>
+            </a:extLst>
+          </p:cNvPr>
           <p:cNvSpPr>
             <a:spLocks noGrp="1"/>
           </p:cNvSpPr>
@@ -6881,20 +9649,707 @@
           <a:p>
             <a:r>
               <a:rPr kumimoji="1" lang="ja-JP" altLang="en-US" dirty="0"/>
-              <a:t>効果 — 判断共有と判断育成</a:t>
-            </a:r>
+              <a:t>この仕組みの効果</a:t>
+            </a:r>
+          </a:p>
+        </p:txBody>
+      </p:sp>
+      <p:sp>
+        <p:nvSpPr>
+          <p:cNvPr id="4" name="吹き出し: 四角形 3">
+            <a:extLst>
+              <a:ext uri="{FF2B5EF4-FFF2-40B4-BE49-F238E27FC236}">
+                <a16:creationId xmlns:a16="http://schemas.microsoft.com/office/drawing/2014/main" id="{DD005DB7-4D6B-EF47-15A3-96224F1BC6C7}"/>
+              </a:ext>
+            </a:extLst>
+          </p:cNvPr>
+          <p:cNvSpPr/>
+          <p:nvPr/>
+        </p:nvSpPr>
+        <p:spPr>
+          <a:xfrm>
+            <a:off x="4287218" y="1497352"/>
+            <a:ext cx="3996444" cy="576064"/>
+          </a:xfrm>
+          <a:prstGeom prst="wedgeRectCallout">
+            <a:avLst>
+              <a:gd name="adj1" fmla="val -35884"/>
+              <a:gd name="adj2" fmla="val 99644"/>
+            </a:avLst>
+          </a:prstGeom>
+          <a:solidFill>
+            <a:schemeClr val="accent6">
+              <a:alpha val="50000"/>
+            </a:schemeClr>
+          </a:solidFill>
+          <a:ln>
+            <a:noFill/>
+          </a:ln>
+        </p:spPr>
+        <p:style>
+          <a:lnRef idx="0">
+            <a:scrgbClr r="0" g="0" b="0"/>
+          </a:lnRef>
+          <a:fillRef idx="0">
+            <a:scrgbClr r="0" g="0" b="0"/>
+          </a:fillRef>
+          <a:effectRef idx="0">
+            <a:scrgbClr r="0" g="0" b="0"/>
+          </a:effectRef>
+          <a:fontRef idx="minor">
+            <a:schemeClr val="lt1"/>
+          </a:fontRef>
+        </p:style>
+        <p:txBody>
+          <a:bodyPr rtlCol="0" anchor="ctr"/>
+          <a:lstStyle/>
+          <a:p>
+            <a:pPr algn="ctr"/>
+            <a:r>
+              <a:rPr lang="ja-JP" altLang="en-US" dirty="0"/>
+              <a:t>これが良くないのは</a:t>
+            </a:r>
+            <a:endParaRPr lang="en-US" altLang="ja-JP" dirty="0"/>
+          </a:p>
+          <a:p>
+            <a:pPr algn="ctr"/>
+            <a:r>
+              <a:rPr lang="en-US" altLang="ja-JP" dirty="0"/>
+              <a:t>AI</a:t>
+            </a:r>
+            <a:r>
+              <a:rPr lang="ja-JP" altLang="en-US" dirty="0"/>
+              <a:t>が</a:t>
+            </a:r>
+            <a:r>
+              <a:rPr lang="ja-JP" altLang="en-US" b="1" dirty="0"/>
+              <a:t>間違うからではない</a:t>
+            </a:r>
+            <a:endParaRPr kumimoji="1" lang="ja-JP" altLang="en-US" b="1" dirty="0"/>
+          </a:p>
+        </p:txBody>
+      </p:sp>
+      <p:sp>
+        <p:nvSpPr>
+          <p:cNvPr id="7" name="吹き出し: 四角形 6">
+            <a:extLst>
+              <a:ext uri="{FF2B5EF4-FFF2-40B4-BE49-F238E27FC236}">
+                <a16:creationId xmlns:a16="http://schemas.microsoft.com/office/drawing/2014/main" id="{A560663D-FB43-3686-5229-521018B76E29}"/>
+              </a:ext>
+            </a:extLst>
+          </p:cNvPr>
+          <p:cNvSpPr/>
+          <p:nvPr/>
+        </p:nvSpPr>
+        <p:spPr>
+          <a:xfrm>
+            <a:off x="2848683" y="3623207"/>
+            <a:ext cx="4608512" cy="412451"/>
+          </a:xfrm>
+          <a:prstGeom prst="wedgeRectCallout">
+            <a:avLst>
+              <a:gd name="adj1" fmla="val -33424"/>
+              <a:gd name="adj2" fmla="val 108121"/>
+            </a:avLst>
+          </a:prstGeom>
+          <a:solidFill>
+            <a:schemeClr val="accent6">
+              <a:alpha val="50000"/>
+            </a:schemeClr>
+          </a:solidFill>
+          <a:ln>
+            <a:noFill/>
+          </a:ln>
+        </p:spPr>
+        <p:style>
+          <a:lnRef idx="0">
+            <a:scrgbClr r="0" g="0" b="0"/>
+          </a:lnRef>
+          <a:fillRef idx="0">
+            <a:scrgbClr r="0" g="0" b="0"/>
+          </a:fillRef>
+          <a:effectRef idx="0">
+            <a:scrgbClr r="0" g="0" b="0"/>
+          </a:effectRef>
+          <a:fontRef idx="minor">
+            <a:schemeClr val="lt1"/>
+          </a:fontRef>
+        </p:style>
+        <p:txBody>
+          <a:bodyPr rtlCol="0" anchor="ctr"/>
+          <a:lstStyle/>
+          <a:p>
+            <a:pPr algn="ctr"/>
+            <a:r>
+              <a:rPr lang="en-US" altLang="ja-JP" dirty="0"/>
+              <a:t>AI</a:t>
+            </a:r>
+            <a:r>
+              <a:rPr lang="ja-JP" altLang="en-US" dirty="0"/>
+              <a:t>が優秀なことによる無力感もわかるが</a:t>
+            </a:r>
+            <a:r>
+              <a:rPr lang="en-US" altLang="ja-JP" dirty="0"/>
+              <a:t>…</a:t>
+            </a:r>
+            <a:endParaRPr kumimoji="1" lang="ja-JP" altLang="en-US" dirty="0"/>
+          </a:p>
+        </p:txBody>
+      </p:sp>
+      <p:sp>
+        <p:nvSpPr>
+          <p:cNvPr id="8" name="吹き出し: 四角形 7">
+            <a:extLst>
+              <a:ext uri="{FF2B5EF4-FFF2-40B4-BE49-F238E27FC236}">
+                <a16:creationId xmlns:a16="http://schemas.microsoft.com/office/drawing/2014/main" id="{58FEA702-B3EC-24B4-B000-3A235D6472C0}"/>
+              </a:ext>
+            </a:extLst>
+          </p:cNvPr>
+          <p:cNvSpPr/>
+          <p:nvPr/>
+        </p:nvSpPr>
+        <p:spPr>
+          <a:xfrm>
+            <a:off x="922236" y="4875502"/>
+            <a:ext cx="4608512" cy="657806"/>
+          </a:xfrm>
+          <a:prstGeom prst="wedgeRectCallout">
+            <a:avLst>
+              <a:gd name="adj1" fmla="val 23717"/>
+              <a:gd name="adj2" fmla="val -92142"/>
+            </a:avLst>
+          </a:prstGeom>
+          <a:solidFill>
+            <a:schemeClr val="accent6">
+              <a:alpha val="50000"/>
+            </a:schemeClr>
+          </a:solidFill>
+          <a:ln>
+            <a:noFill/>
+          </a:ln>
+        </p:spPr>
+        <p:style>
+          <a:lnRef idx="0">
+            <a:scrgbClr r="0" g="0" b="0"/>
+          </a:lnRef>
+          <a:fillRef idx="0">
+            <a:scrgbClr r="0" g="0" b="0"/>
+          </a:fillRef>
+          <a:effectRef idx="0">
+            <a:scrgbClr r="0" g="0" b="0"/>
+          </a:effectRef>
+          <a:fontRef idx="minor">
+            <a:schemeClr val="lt1"/>
+          </a:fontRef>
+        </p:style>
+        <p:txBody>
+          <a:bodyPr rtlCol="0" anchor="ctr"/>
+          <a:lstStyle/>
+          <a:p>
+            <a:pPr algn="ctr"/>
+            <a:r>
+              <a:rPr lang="ja-JP" altLang="en-US" dirty="0"/>
+              <a:t>そもそも、設計とは</a:t>
+            </a:r>
+            <a:r>
+              <a:rPr lang="ja-JP" altLang="en-US" b="1" dirty="0"/>
+              <a:t>トレードオフ</a:t>
+            </a:r>
+            <a:r>
+              <a:rPr lang="ja-JP" altLang="en-US" dirty="0"/>
+              <a:t>である</a:t>
+            </a:r>
+            <a:endParaRPr kumimoji="1" lang="ja-JP" altLang="en-US" dirty="0"/>
+          </a:p>
+        </p:txBody>
+      </p:sp>
+      <p:pic>
+        <p:nvPicPr>
+          <p:cNvPr id="11" name="図 10">
+            <a:extLst>
+              <a:ext uri="{FF2B5EF4-FFF2-40B4-BE49-F238E27FC236}">
+                <a16:creationId xmlns:a16="http://schemas.microsoft.com/office/drawing/2014/main" id="{AC5BAFBD-272A-4930-DC2D-7697C068A5CA}"/>
+              </a:ext>
+            </a:extLst>
+          </p:cNvPr>
+          <p:cNvPicPr>
+            <a:picLocks noChangeAspect="1"/>
+          </p:cNvPicPr>
+          <p:nvPr/>
+        </p:nvPicPr>
+        <p:blipFill>
+          <a:blip r:embed="rId2"/>
+          <a:stretch>
+            <a:fillRect/>
+          </a:stretch>
+        </p:blipFill>
+        <p:spPr>
+          <a:xfrm>
+            <a:off x="7438901" y="4360601"/>
+            <a:ext cx="2471439" cy="2497399"/>
+          </a:xfrm>
+          <a:prstGeom prst="rect">
+            <a:avLst/>
+          </a:prstGeom>
+        </p:spPr>
+      </p:pic>
+      <p:sp>
+        <p:nvSpPr>
+          <p:cNvPr id="14" name="吹き出し: 四角形 13">
+            <a:extLst>
+              <a:ext uri="{FF2B5EF4-FFF2-40B4-BE49-F238E27FC236}">
+                <a16:creationId xmlns:a16="http://schemas.microsoft.com/office/drawing/2014/main" id="{65D7BD06-718C-927A-8481-F2B463650092}"/>
+              </a:ext>
+            </a:extLst>
+          </p:cNvPr>
+          <p:cNvSpPr/>
+          <p:nvPr/>
+        </p:nvSpPr>
+        <p:spPr>
+          <a:xfrm>
+            <a:off x="922236" y="3002856"/>
+            <a:ext cx="7505442" cy="406151"/>
+          </a:xfrm>
+          <a:prstGeom prst="wedgeRectCallout">
+            <a:avLst>
+              <a:gd name="adj1" fmla="val 13195"/>
+              <a:gd name="adj2" fmla="val -100521"/>
+            </a:avLst>
+          </a:prstGeom>
+          <a:solidFill>
+            <a:schemeClr val="accent6">
+              <a:alpha val="50000"/>
+            </a:schemeClr>
+          </a:solidFill>
+          <a:ln>
+            <a:noFill/>
+          </a:ln>
+        </p:spPr>
+        <p:style>
+          <a:lnRef idx="0">
+            <a:scrgbClr r="0" g="0" b="0"/>
+          </a:lnRef>
+          <a:fillRef idx="0">
+            <a:scrgbClr r="0" g="0" b="0"/>
+          </a:fillRef>
+          <a:effectRef idx="0">
+            <a:scrgbClr r="0" g="0" b="0"/>
+          </a:effectRef>
+          <a:fontRef idx="minor">
+            <a:schemeClr val="lt1"/>
+          </a:fontRef>
+        </p:style>
+        <p:txBody>
+          <a:bodyPr rtlCol="0" anchor="ctr"/>
+          <a:lstStyle/>
+          <a:p>
+            <a:r>
+              <a:rPr lang="en-US" altLang="ja-JP" dirty="0"/>
+              <a:t>Opus4.5 GPT5.4</a:t>
+            </a:r>
+            <a:r>
+              <a:rPr lang="ja-JP" altLang="en-US" dirty="0"/>
+              <a:t>以降は、</a:t>
+            </a:r>
+            <a:r>
+              <a:rPr lang="ja-JP" altLang="en-US" b="1" dirty="0"/>
+              <a:t>適切なコンテキストがあれば</a:t>
+            </a:r>
+            <a:r>
+              <a:rPr lang="en-US" altLang="ja-JP" dirty="0"/>
+              <a:t>AI</a:t>
+            </a:r>
+            <a:r>
+              <a:rPr lang="ja-JP" altLang="en-US" dirty="0"/>
+              <a:t>の方が優秀</a:t>
+            </a:r>
+          </a:p>
+        </p:txBody>
+      </p:sp>
+      <p:sp>
+        <p:nvSpPr>
+          <p:cNvPr id="15" name="吹き出し: 四角形 14">
+            <a:extLst>
+              <a:ext uri="{FF2B5EF4-FFF2-40B4-BE49-F238E27FC236}">
+                <a16:creationId xmlns:a16="http://schemas.microsoft.com/office/drawing/2014/main" id="{367FB952-2915-A9EE-9EB5-9DEC421F01E4}"/>
+              </a:ext>
+            </a:extLst>
+          </p:cNvPr>
+          <p:cNvSpPr/>
+          <p:nvPr/>
+        </p:nvSpPr>
+        <p:spPr>
+          <a:xfrm>
+            <a:off x="2667038" y="5702414"/>
+            <a:ext cx="4608512" cy="483814"/>
+          </a:xfrm>
+          <a:prstGeom prst="wedgeRectCallout">
+            <a:avLst>
+              <a:gd name="adj1" fmla="val 14989"/>
+              <a:gd name="adj2" fmla="val -112095"/>
+            </a:avLst>
+          </a:prstGeom>
+          <a:solidFill>
+            <a:schemeClr val="accent6">
+              <a:alpha val="50000"/>
+            </a:schemeClr>
+          </a:solidFill>
+          <a:ln>
+            <a:noFill/>
+          </a:ln>
+        </p:spPr>
+        <p:style>
+          <a:lnRef idx="0">
+            <a:scrgbClr r="0" g="0" b="0"/>
+          </a:lnRef>
+          <a:fillRef idx="0">
+            <a:scrgbClr r="0" g="0" b="0"/>
+          </a:fillRef>
+          <a:effectRef idx="0">
+            <a:scrgbClr r="0" g="0" b="0"/>
+          </a:effectRef>
+          <a:fontRef idx="minor">
+            <a:schemeClr val="lt1"/>
+          </a:fontRef>
+        </p:style>
+        <p:txBody>
+          <a:bodyPr rtlCol="0" anchor="ctr"/>
+          <a:lstStyle/>
+          <a:p>
+            <a:pPr algn="ctr"/>
+            <a:r>
+              <a:rPr lang="ja-JP" altLang="en-US" dirty="0"/>
+              <a:t>コンテキストがある＝</a:t>
+            </a:r>
+            <a:r>
+              <a:rPr lang="ja-JP" altLang="en-US" b="1" dirty="0"/>
+              <a:t>言語化済み</a:t>
+            </a:r>
+            <a:endParaRPr lang="en-US" altLang="ja-JP" b="1" dirty="0"/>
           </a:p>
         </p:txBody>
       </p:sp>
     </p:spTree>
+    <p:extLst>
+      <p:ext uri="{BB962C8B-B14F-4D97-AF65-F5344CB8AC3E}">
+        <p14:creationId xmlns:p14="http://schemas.microsoft.com/office/powerpoint/2010/main" val="1006490860"/>
+      </p:ext>
+    </p:extLst>
   </p:cSld>
   <p:clrMapOvr>
     <a:masterClrMapping/>
   </p:clrMapOvr>
+  <p:timing>
+    <p:tnLst>
+      <p:par>
+        <p:cTn id="1" dur="indefinite" restart="never" nodeType="tmRoot">
+          <p:childTnLst>
+            <p:seq concurrent="1" nextAc="seek">
+              <p:cTn id="2" dur="indefinite" nodeType="mainSeq">
+                <p:childTnLst>
+                  <p:par>
+                    <p:cTn id="3" fill="hold">
+                      <p:stCondLst>
+                        <p:cond delay="indefinite"/>
+                      </p:stCondLst>
+                      <p:childTnLst>
+                        <p:par>
+                          <p:cTn id="4" fill="hold">
+                            <p:stCondLst>
+                              <p:cond delay="0"/>
+                            </p:stCondLst>
+                            <p:childTnLst>
+                              <p:par>
+                                <p:cTn id="5" presetID="1" presetClass="entr" presetSubtype="0" fill="hold" grpId="0" nodeType="clickEffect">
+                                  <p:stCondLst>
+                                    <p:cond delay="0"/>
+                                  </p:stCondLst>
+                                  <p:childTnLst>
+                                    <p:set>
+                                      <p:cBhvr>
+                                        <p:cTn id="6" dur="1" fill="hold">
+                                          <p:stCondLst>
+                                            <p:cond delay="0"/>
+                                          </p:stCondLst>
+                                        </p:cTn>
+                                        <p:tgtEl>
+                                          <p:spTgt spid="4"/>
+                                        </p:tgtEl>
+                                        <p:attrNameLst>
+                                          <p:attrName>style.visibility</p:attrName>
+                                        </p:attrNameLst>
+                                      </p:cBhvr>
+                                      <p:to>
+                                        <p:strVal val="visible"/>
+                                      </p:to>
+                                    </p:set>
+                                  </p:childTnLst>
+                                </p:cTn>
+                              </p:par>
+                            </p:childTnLst>
+                          </p:cTn>
+                        </p:par>
+                      </p:childTnLst>
+                    </p:cTn>
+                  </p:par>
+                  <p:par>
+                    <p:cTn id="7" fill="hold">
+                      <p:stCondLst>
+                        <p:cond delay="indefinite"/>
+                      </p:stCondLst>
+                      <p:childTnLst>
+                        <p:par>
+                          <p:cTn id="8" fill="hold">
+                            <p:stCondLst>
+                              <p:cond delay="0"/>
+                            </p:stCondLst>
+                            <p:childTnLst>
+                              <p:par>
+                                <p:cTn id="9" presetID="1" presetClass="entr" presetSubtype="0" fill="hold" grpId="0" nodeType="clickEffect">
+                                  <p:stCondLst>
+                                    <p:cond delay="0"/>
+                                  </p:stCondLst>
+                                  <p:childTnLst>
+                                    <p:set>
+                                      <p:cBhvr>
+                                        <p:cTn id="10" dur="1" fill="hold">
+                                          <p:stCondLst>
+                                            <p:cond delay="0"/>
+                                          </p:stCondLst>
+                                        </p:cTn>
+                                        <p:tgtEl>
+                                          <p:spTgt spid="14"/>
+                                        </p:tgtEl>
+                                        <p:attrNameLst>
+                                          <p:attrName>style.visibility</p:attrName>
+                                        </p:attrNameLst>
+                                      </p:cBhvr>
+                                      <p:to>
+                                        <p:strVal val="visible"/>
+                                      </p:to>
+                                    </p:set>
+                                  </p:childTnLst>
+                                </p:cTn>
+                              </p:par>
+                            </p:childTnLst>
+                          </p:cTn>
+                        </p:par>
+                      </p:childTnLst>
+                    </p:cTn>
+                  </p:par>
+                  <p:par>
+                    <p:cTn id="11" fill="hold">
+                      <p:stCondLst>
+                        <p:cond delay="indefinite"/>
+                      </p:stCondLst>
+                      <p:childTnLst>
+                        <p:par>
+                          <p:cTn id="12" fill="hold">
+                            <p:stCondLst>
+                              <p:cond delay="0"/>
+                            </p:stCondLst>
+                            <p:childTnLst>
+                              <p:par>
+                                <p:cTn id="13" presetID="1" presetClass="entr" presetSubtype="0" fill="hold" grpId="0" nodeType="clickEffect">
+                                  <p:stCondLst>
+                                    <p:cond delay="0"/>
+                                  </p:stCondLst>
+                                  <p:childTnLst>
+                                    <p:set>
+                                      <p:cBhvr>
+                                        <p:cTn id="14" dur="1" fill="hold">
+                                          <p:stCondLst>
+                                            <p:cond delay="0"/>
+                                          </p:stCondLst>
+                                        </p:cTn>
+                                        <p:tgtEl>
+                                          <p:spTgt spid="7"/>
+                                        </p:tgtEl>
+                                        <p:attrNameLst>
+                                          <p:attrName>style.visibility</p:attrName>
+                                        </p:attrNameLst>
+                                      </p:cBhvr>
+                                      <p:to>
+                                        <p:strVal val="visible"/>
+                                      </p:to>
+                                    </p:set>
+                                  </p:childTnLst>
+                                </p:cTn>
+                              </p:par>
+                            </p:childTnLst>
+                          </p:cTn>
+                        </p:par>
+                      </p:childTnLst>
+                    </p:cTn>
+                  </p:par>
+                  <p:par>
+                    <p:cTn id="15" fill="hold">
+                      <p:stCondLst>
+                        <p:cond delay="indefinite"/>
+                      </p:stCondLst>
+                      <p:childTnLst>
+                        <p:par>
+                          <p:cTn id="16" fill="hold">
+                            <p:stCondLst>
+                              <p:cond delay="0"/>
+                            </p:stCondLst>
+                            <p:childTnLst>
+                              <p:par>
+                                <p:cTn id="17" presetID="1" presetClass="entr" presetSubtype="0" fill="hold" grpId="0" nodeType="clickEffect">
+                                  <p:stCondLst>
+                                    <p:cond delay="0"/>
+                                  </p:stCondLst>
+                                  <p:childTnLst>
+                                    <p:set>
+                                      <p:cBhvr>
+                                        <p:cTn id="18" dur="1" fill="hold">
+                                          <p:stCondLst>
+                                            <p:cond delay="0"/>
+                                          </p:stCondLst>
+                                        </p:cTn>
+                                        <p:tgtEl>
+                                          <p:spTgt spid="8"/>
+                                        </p:tgtEl>
+                                        <p:attrNameLst>
+                                          <p:attrName>style.visibility</p:attrName>
+                                        </p:attrNameLst>
+                                      </p:cBhvr>
+                                      <p:to>
+                                        <p:strVal val="visible"/>
+                                      </p:to>
+                                    </p:set>
+                                  </p:childTnLst>
+                                </p:cTn>
+                              </p:par>
+                            </p:childTnLst>
+                          </p:cTn>
+                        </p:par>
+                      </p:childTnLst>
+                    </p:cTn>
+                  </p:par>
+                  <p:par>
+                    <p:cTn id="19" fill="hold">
+                      <p:stCondLst>
+                        <p:cond delay="indefinite"/>
+                      </p:stCondLst>
+                      <p:childTnLst>
+                        <p:par>
+                          <p:cTn id="20" fill="hold">
+                            <p:stCondLst>
+                              <p:cond delay="0"/>
+                            </p:stCondLst>
+                            <p:childTnLst>
+                              <p:par>
+                                <p:cTn id="21" presetID="1" presetClass="entr" presetSubtype="0" fill="hold" nodeType="clickEffect">
+                                  <p:stCondLst>
+                                    <p:cond delay="0"/>
+                                  </p:stCondLst>
+                                  <p:childTnLst>
+                                    <p:set>
+                                      <p:cBhvr>
+                                        <p:cTn id="22" dur="1" fill="hold">
+                                          <p:stCondLst>
+                                            <p:cond delay="0"/>
+                                          </p:stCondLst>
+                                        </p:cTn>
+                                        <p:tgtEl>
+                                          <p:spTgt spid="11"/>
+                                        </p:tgtEl>
+                                        <p:attrNameLst>
+                                          <p:attrName>style.visibility</p:attrName>
+                                        </p:attrNameLst>
+                                      </p:cBhvr>
+                                      <p:to>
+                                        <p:strVal val="visible"/>
+                                      </p:to>
+                                    </p:set>
+                                  </p:childTnLst>
+                                </p:cTn>
+                              </p:par>
+                            </p:childTnLst>
+                          </p:cTn>
+                        </p:par>
+                      </p:childTnLst>
+                    </p:cTn>
+                  </p:par>
+                  <p:par>
+                    <p:cTn id="23" fill="hold">
+                      <p:stCondLst>
+                        <p:cond delay="indefinite"/>
+                      </p:stCondLst>
+                      <p:childTnLst>
+                        <p:par>
+                          <p:cTn id="24" fill="hold">
+                            <p:stCondLst>
+                              <p:cond delay="0"/>
+                            </p:stCondLst>
+                            <p:childTnLst>
+                              <p:par>
+                                <p:cTn id="25" presetID="1" presetClass="entr" presetSubtype="0" fill="hold" grpId="0" nodeType="clickEffect">
+                                  <p:stCondLst>
+                                    <p:cond delay="0"/>
+                                  </p:stCondLst>
+                                  <p:childTnLst>
+                                    <p:set>
+                                      <p:cBhvr>
+                                        <p:cTn id="26" dur="1" fill="hold">
+                                          <p:stCondLst>
+                                            <p:cond delay="0"/>
+                                          </p:stCondLst>
+                                        </p:cTn>
+                                        <p:tgtEl>
+                                          <p:spTgt spid="15"/>
+                                        </p:tgtEl>
+                                        <p:attrNameLst>
+                                          <p:attrName>style.visibility</p:attrName>
+                                        </p:attrNameLst>
+                                      </p:cBhvr>
+                                      <p:to>
+                                        <p:strVal val="visible"/>
+                                      </p:to>
+                                    </p:set>
+                                  </p:childTnLst>
+                                </p:cTn>
+                              </p:par>
+                            </p:childTnLst>
+                          </p:cTn>
+                        </p:par>
+                      </p:childTnLst>
+                    </p:cTn>
+                  </p:par>
+                </p:childTnLst>
+              </p:cTn>
+              <p:prevCondLst>
+                <p:cond evt="onPrev" delay="0">
+                  <p:tgtEl>
+                    <p:sldTgt/>
+                  </p:tgtEl>
+                </p:cond>
+              </p:prevCondLst>
+              <p:nextCondLst>
+                <p:cond evt="onNext" delay="0">
+                  <p:tgtEl>
+                    <p:sldTgt/>
+                  </p:tgtEl>
+                </p:cond>
+              </p:nextCondLst>
+            </p:seq>
+          </p:childTnLst>
+        </p:cTn>
+      </p:par>
+    </p:tnLst>
+    <p:bldLst>
+      <p:bldP spid="4" grpId="0" animBg="1"/>
+      <p:bldP spid="7" grpId="0" animBg="1"/>
+      <p:bldP spid="8" grpId="0" animBg="1"/>
+      <p:bldP spid="14" grpId="0" animBg="1"/>
+      <p:bldP spid="15" grpId="0" animBg="1"/>
+    </p:bldLst>
+  </p:timing>
 </p:sld>
 </file>
 
-<file path=ppt/slides/slide24.xml><?xml version="1.0" encoding="utf-8"?>
+<file path=ppt/slides/slide21.xml><?xml version="1.0" encoding="utf-8"?>
 <p:sld xmlns:a="http://schemas.openxmlformats.org/drawingml/2006/main" xmlns:r="http://schemas.openxmlformats.org/officeDocument/2006/relationships" xmlns:p="http://schemas.openxmlformats.org/presentationml/2006/main">
   <p:cSld>
     <p:spTree>
@@ -6952,8 +10407,8 @@
               <a:t>問いを立てることも</a:t>
             </a:r>
             <a:r>
-              <a:rPr kumimoji="1" lang="en-US" altLang="ja-JP" sz="1500" b="1" dirty="0"/>
-              <a:t>Judgement</a:t>
+              <a:rPr kumimoji="1" lang="ja-JP" altLang="en-US" sz="1500" b="1" dirty="0"/>
+              <a:t>判断の一部</a:t>
             </a:r>
             <a:r>
               <a:rPr kumimoji="1" lang="ja-JP" altLang="en-US" sz="1500" dirty="0"/>
@@ -6965,7 +10420,15 @@
             <a:pPr lvl="1"/>
             <a:r>
               <a:rPr kumimoji="1" lang="ja-JP" altLang="en-US" sz="1500" dirty="0"/>
-              <a:t>責任：違和感を言語化し、満足できる条件を策定し、受け入れるトレードオフを決める</a:t>
+              <a:t>責任：</a:t>
+            </a:r>
+            <a:r>
+              <a:rPr kumimoji="1" lang="ja-JP" altLang="en-US" sz="1500" b="1" dirty="0"/>
+              <a:t>違和感を言語化</a:t>
+            </a:r>
+            <a:r>
+              <a:rPr kumimoji="1" lang="ja-JP" altLang="en-US" sz="1500" dirty="0"/>
+              <a:t>し、満足できる条件を策定し、受け入れるトレードオフを決める</a:t>
             </a:r>
           </a:p>
           <a:p>
@@ -6986,19 +10449,34 @@
             </a:r>
           </a:p>
           <a:p>
+            <a:r>
+              <a:rPr lang="ja-JP" altLang="en-US" sz="1500" b="1" dirty="0"/>
+              <a:t>レビューの役割</a:t>
+            </a:r>
+          </a:p>
+          <a:p>
             <a:pPr lvl="1"/>
             <a:r>
-              <a:rPr kumimoji="1" lang="ja-JP" altLang="en-US" sz="1500" dirty="0"/>
-              <a:t>AI が書いたコードでも、自分の言葉で説明できなければならない</a:t>
-            </a:r>
-          </a:p>
-          <a:p>
+              <a:rPr lang="ja-JP" altLang="en-US" sz="1600" dirty="0"/>
+              <a:t>コードが体現する</a:t>
+            </a:r>
+            <a:r>
+              <a:rPr lang="ja-JP" altLang="en-US" sz="1600" b="1" dirty="0"/>
+              <a:t>設計判断とその影響をチームで共有する</a:t>
+            </a:r>
+            <a:r>
+              <a:rPr lang="ja-JP" altLang="en-US" sz="1600" dirty="0"/>
+              <a:t>営み</a:t>
+            </a:r>
+          </a:p>
+          <a:p>
+            <a:pPr lvl="1"/>
             <a:endParaRPr lang="ja-JP" altLang="en-US" dirty="0"/>
           </a:p>
           <a:p>
             <a:r>
               <a:rPr kumimoji="1" lang="ja-JP" altLang="en-US" sz="1500" b="1" dirty="0"/>
-              <a:t>教育をどこに置くか</a:t>
+              <a:t>結局、人間が強くなるしかない</a:t>
             </a:r>
           </a:p>
           <a:p>
@@ -7025,15 +10503,21 @@
             </a:r>
             <a:r>
               <a:rPr kumimoji="1" lang="ja-JP" altLang="en-US" sz="1500" dirty="0"/>
-              <a:t>の目的には 判断能力（Judgment） 育成を含めるべき</a:t>
-            </a:r>
+              <a:t>の目的には 判断能力 育成を含めるべき</a:t>
+            </a:r>
+            <a:endParaRPr kumimoji="1" lang="en-US" altLang="ja-JP" sz="1500" dirty="0"/>
           </a:p>
           <a:p>
             <a:pPr lvl="1"/>
             <a:r>
-              <a:rPr kumimoji="1" lang="ja-JP" altLang="en-US" sz="1500" dirty="0"/>
-              <a:t>教育は「丁寧に教えること」より「判断に参加させること」で起こる</a:t>
-            </a:r>
+              <a:rPr lang="en-US" altLang="ja-JP" sz="1500" dirty="0"/>
+              <a:t>A</a:t>
+            </a:r>
+            <a:r>
+              <a:rPr lang="ja-JP" altLang="en-US" sz="1500" dirty="0"/>
+              <a:t>Ｉにたくさん質問させて、知らなかった知識を日々学んでいく</a:t>
+            </a:r>
+            <a:endParaRPr kumimoji="1" lang="ja-JP" altLang="en-US" sz="1500" dirty="0"/>
           </a:p>
         </p:txBody>
       </p:sp>
@@ -7078,7 +10562,7 @@
 </p:sld>
 </file>
 
-<file path=ppt/slides/slide25.xml><?xml version="1.0" encoding="utf-8"?>
+<file path=ppt/slides/slide22.xml><?xml version="1.0" encoding="utf-8"?>
 <p:sld xmlns:a="http://schemas.openxmlformats.org/drawingml/2006/main" xmlns:r="http://schemas.openxmlformats.org/officeDocument/2006/relationships" xmlns:p="http://schemas.openxmlformats.org/presentationml/2006/main">
   <p:cSld>
     <p:spTree>
@@ -7174,6 +10658,43 @@
           </a:p>
         </p:txBody>
       </p:sp>
+      <p:pic>
+        <p:nvPicPr>
+          <p:cNvPr id="6" name="図 5">
+            <a:extLst>
+              <a:ext uri="{FF2B5EF4-FFF2-40B4-BE49-F238E27FC236}">
+                <a16:creationId xmlns:a16="http://schemas.microsoft.com/office/drawing/2014/main" id="{DD70937A-5EE4-27D0-92C7-AB41BE5F0861}"/>
+              </a:ext>
+            </a:extLst>
+          </p:cNvPr>
+          <p:cNvPicPr>
+            <a:picLocks noChangeAspect="1"/>
+          </p:cNvPicPr>
+          <p:nvPr/>
+        </p:nvPicPr>
+        <p:blipFill>
+          <a:blip r:embed="rId2">
+            <a:extLst>
+              <a:ext uri="{28A0092B-C50C-407E-A947-70E740481C1C}">
+                <a14:useLocalDpi xmlns:a14="http://schemas.microsoft.com/office/drawing/2010/main" val="0"/>
+              </a:ext>
+            </a:extLst>
+          </a:blip>
+          <a:srcRect l="14905" t="2673" r="15827"/>
+          <a:stretch>
+            <a:fillRect/>
+          </a:stretch>
+        </p:blipFill>
+        <p:spPr>
+          <a:xfrm>
+            <a:off x="6429164" y="1340768"/>
+            <a:ext cx="2540732" cy="2855935"/>
+          </a:xfrm>
+          <a:prstGeom prst="rect">
+            <a:avLst/>
+          </a:prstGeom>
+        </p:spPr>
+      </p:pic>
     </p:spTree>
     <p:extLst>
       <p:ext uri="{BB962C8B-B14F-4D97-AF65-F5344CB8AC3E}">
@@ -7187,145 +10708,7 @@
 </p:sld>
 </file>
 
-<file path=ppt/slides/slide26.xml><?xml version="1.0" encoding="utf-8"?>
-<p:sld xmlns:a="http://schemas.openxmlformats.org/drawingml/2006/main" xmlns:r="http://schemas.openxmlformats.org/officeDocument/2006/relationships" xmlns:p="http://schemas.openxmlformats.org/presentationml/2006/main">
-  <p:cSld>
-    <p:spTree>
-      <p:nvGrpSpPr>
-        <p:cNvPr id="1" name=""/>
-        <p:cNvGrpSpPr/>
-        <p:nvPr/>
-      </p:nvGrpSpPr>
-      <p:grpSpPr>
-        <a:xfrm>
-          <a:off x="0" y="0"/>
-          <a:ext cx="0" cy="0"/>
-          <a:chOff x="0" y="0"/>
-          <a:chExt cx="0" cy="0"/>
-        </a:xfrm>
-      </p:grpSpPr>
-      <p:sp>
-        <p:nvSpPr>
-          <p:cNvPr id="2" name="コンテンツ プレースホルダー 1"/>
-          <p:cNvSpPr>
-            <a:spLocks noGrp="1"/>
-          </p:cNvSpPr>
-          <p:nvPr>
-            <p:ph idx="1"/>
-          </p:nvPr>
-        </p:nvSpPr>
-        <p:spPr>
-          <a:xfrm>
-            <a:off x="632681" y="1304764"/>
-            <a:ext cx="8640638" cy="4894536"/>
-          </a:xfrm>
-        </p:spPr>
-        <p:txBody>
-          <a:bodyPr>
-            <a:normAutofit/>
-          </a:bodyPr>
-          <a:lstStyle/>
-          <a:p>
-            <a:r>
-              <a:rPr kumimoji="1" lang="ja-JP" altLang="en-US" sz="1800" b="1" dirty="0"/>
-              <a:t>ドキュメントパイプライン</a:t>
-            </a:r>
-          </a:p>
-          <a:p>
-            <a:pPr lvl="1"/>
-            <a:r>
-              <a:rPr kumimoji="1" lang="ja-JP" altLang="en-US" sz="1800" dirty="0"/>
-              <a:t>Judgment: 何を自動化し・何を</a:t>
-            </a:r>
-            <a:r>
-              <a:rPr lang="ja-JP" altLang="en-US" sz="1800" dirty="0"/>
-              <a:t>メンバー（人間）に何</a:t>
-            </a:r>
-            <a:r>
-              <a:rPr kumimoji="1" lang="ja-JP" altLang="en-US" sz="1800" dirty="0"/>
-              <a:t>をやってもらうか</a:t>
-            </a:r>
-            <a:br>
-              <a:rPr kumimoji="1" lang="en-US" altLang="ja-JP" sz="1800" dirty="0"/>
-            </a:br>
-            <a:r>
-              <a:rPr kumimoji="1" lang="ja-JP" altLang="en-US" sz="1800" dirty="0"/>
-              <a:t>Reckoning: ツール構築・ツール実行</a:t>
-            </a:r>
-            <a:endParaRPr lang="ja-JP" altLang="en-US" sz="1400" dirty="0"/>
-          </a:p>
-          <a:p>
-            <a:r>
-              <a:rPr kumimoji="1" lang="ja-JP" altLang="en-US" sz="1800" b="1" dirty="0"/>
-              <a:t>レビューワークフロー</a:t>
-            </a:r>
-          </a:p>
-          <a:p>
-            <a:pPr lvl="1"/>
-            <a:r>
-              <a:rPr kumimoji="1" lang="ja-JP" altLang="en-US" sz="1800" dirty="0"/>
-              <a:t>Judgment: この変更を組み込むべきか、どの判断を採るか、何を観点とするか</a:t>
-            </a:r>
-          </a:p>
-          <a:p>
-            <a:pPr lvl="1"/>
-            <a:r>
-              <a:rPr kumimoji="1" lang="ja-JP" altLang="en-US" sz="1800" dirty="0"/>
-              <a:t>Reckoning: 網羅分析、要約、観点別チェック</a:t>
-            </a:r>
-          </a:p>
-          <a:p>
-            <a:endParaRPr lang="ja-JP" altLang="en-US" dirty="0"/>
-          </a:p>
-          <a:p>
-            <a:pPr algn="ctr"/>
-            <a:r>
-              <a:rPr kumimoji="1" lang="ja-JP" altLang="en-US" sz="1800" b="1" dirty="0"/>
-              <a:t>共通</a:t>
-            </a:r>
-          </a:p>
-          <a:p>
-            <a:pPr marL="257173" lvl="1" indent="0" algn="ctr">
-              <a:buNone/>
-            </a:pPr>
-            <a:r>
-              <a:rPr kumimoji="1" lang="ja-JP" altLang="en-US" sz="1800" dirty="0"/>
-              <a:t>人間が枠組みと採否を決め、AI がその範囲で実行する</a:t>
-            </a:r>
-          </a:p>
-        </p:txBody>
-      </p:sp>
-      <p:sp>
-        <p:nvSpPr>
-          <p:cNvPr id="3" name="タイトル 2"/>
-          <p:cNvSpPr>
-            <a:spLocks noGrp="1"/>
-          </p:cNvSpPr>
-          <p:nvPr>
-            <p:ph type="title"/>
-          </p:nvPr>
-        </p:nvSpPr>
-        <p:spPr/>
-        <p:txBody>
-          <a:bodyPr/>
-          <a:lstStyle/>
-          <a:p>
-            <a:r>
-              <a:rPr kumimoji="1" lang="ja-JP" altLang="en-US" dirty="0"/>
-              <a:t>2つの事例が示すパターン</a:t>
-            </a:r>
-          </a:p>
-        </p:txBody>
-      </p:sp>
-    </p:spTree>
-  </p:cSld>
-  <p:clrMapOvr>
-    <a:masterClrMapping/>
-  </p:clrMapOvr>
-</p:sld>
-</file>
-
-<file path=ppt/slides/slide27.xml><?xml version="1.0" encoding="utf-8"?>
+<file path=ppt/slides/slide23.xml><?xml version="1.0" encoding="utf-8"?>
 <p:sld xmlns:a="http://schemas.openxmlformats.org/drawingml/2006/main" xmlns:r="http://schemas.openxmlformats.org/officeDocument/2006/relationships" xmlns:p="http://schemas.openxmlformats.org/presentationml/2006/main">
   <p:cSld>
     <p:spTree>
@@ -7592,7 +10975,1063 @@
 </p:sld>
 </file>
 
+<file path=ppt/slides/slide24.xml><?xml version="1.0" encoding="utf-8"?>
+<p:sld xmlns:a="http://schemas.openxmlformats.org/drawingml/2006/main" xmlns:r="http://schemas.openxmlformats.org/officeDocument/2006/relationships" xmlns:p="http://schemas.openxmlformats.org/presentationml/2006/main">
+  <p:cSld>
+    <p:spTree>
+      <p:nvGrpSpPr>
+        <p:cNvPr id="1" name=""/>
+        <p:cNvGrpSpPr/>
+        <p:nvPr/>
+      </p:nvGrpSpPr>
+      <p:grpSpPr>
+        <a:xfrm>
+          <a:off x="0" y="0"/>
+          <a:ext cx="0" cy="0"/>
+          <a:chOff x="0" y="0"/>
+          <a:chExt cx="0" cy="0"/>
+        </a:xfrm>
+      </p:grpSpPr>
+      <p:sp>
+        <p:nvSpPr>
+          <p:cNvPr id="2" name="コンテンツ プレースホルダー 1"/>
+          <p:cNvSpPr>
+            <a:spLocks noGrp="1"/>
+          </p:cNvSpPr>
+          <p:nvPr>
+            <p:ph idx="1"/>
+          </p:nvPr>
+        </p:nvSpPr>
+        <p:spPr/>
+        <p:txBody>
+          <a:bodyPr>
+            <a:normAutofit/>
+          </a:bodyPr>
+          <a:lstStyle/>
+          <a:p>
+            <a:r>
+              <a:rPr kumimoji="1" lang="ja-JP" altLang="en-US" sz="2800" b="1" dirty="0"/>
+              <a:t>Judgment（判断）</a:t>
+            </a:r>
+            <a:r>
+              <a:rPr lang="ja-JP" altLang="en-US" sz="2800" dirty="0"/>
+              <a:t>🧑‍💻</a:t>
+            </a:r>
+            <a:endParaRPr kumimoji="1" lang="ja-JP" altLang="en-US" sz="2800" b="1" dirty="0"/>
+          </a:p>
+          <a:p>
+            <a:pPr lvl="1"/>
+            <a:r>
+              <a:rPr kumimoji="1" lang="ja-JP" altLang="en-US" sz="2800" dirty="0"/>
+              <a:t>何を問うか・何を採るかを引き受けること</a:t>
+            </a:r>
+            <a:endParaRPr kumimoji="1" lang="en-US" altLang="ja-JP" sz="2800" dirty="0"/>
+          </a:p>
+          <a:p>
+            <a:pPr lvl="2"/>
+            <a:r>
+              <a:rPr lang="en-US" altLang="ja-JP" sz="2000" dirty="0"/>
+              <a:t>Ex </a:t>
+            </a:r>
+            <a:r>
+              <a:rPr lang="ja-JP" altLang="en-US" sz="2000" dirty="0"/>
+              <a:t>トレードオフの判断</a:t>
+            </a:r>
+            <a:endParaRPr lang="en-US" altLang="ja-JP" sz="2000" dirty="0"/>
+          </a:p>
+          <a:p>
+            <a:pPr lvl="2"/>
+            <a:r>
+              <a:rPr kumimoji="1" lang="en-US" altLang="ja-JP" sz="2000" dirty="0"/>
+              <a:t>Ex </a:t>
+            </a:r>
+            <a:r>
+              <a:rPr kumimoji="1" lang="ja-JP" altLang="en-US" sz="2000" dirty="0"/>
+              <a:t>何を解決するかの判断</a:t>
+            </a:r>
+            <a:endParaRPr lang="ja-JP" altLang="en-US" sz="1400" dirty="0"/>
+          </a:p>
+          <a:p>
+            <a:r>
+              <a:rPr kumimoji="1" lang="ja-JP" altLang="en-US" sz="2800" b="1" dirty="0"/>
+              <a:t>Reckoning（演算）</a:t>
+            </a:r>
+            <a:r>
+              <a:rPr lang="ja-JP" altLang="en-US" sz="2800" dirty="0"/>
+              <a:t>🤖💻</a:t>
+            </a:r>
+            <a:endParaRPr kumimoji="1" lang="ja-JP" altLang="en-US" sz="2800" b="1" dirty="0"/>
+          </a:p>
+          <a:p>
+            <a:pPr lvl="1"/>
+            <a:r>
+              <a:rPr kumimoji="1" lang="ja-JP" altLang="en-US" sz="2800" dirty="0"/>
+              <a:t>与えられた条件で広く計算すること</a:t>
+            </a:r>
+            <a:endParaRPr kumimoji="1" lang="en-US" altLang="ja-JP" sz="2800" dirty="0"/>
+          </a:p>
+          <a:p>
+            <a:pPr lvl="2"/>
+            <a:r>
+              <a:rPr kumimoji="1" lang="en-US" altLang="ja-JP" sz="2000" dirty="0"/>
+              <a:t>Ex </a:t>
+            </a:r>
+            <a:r>
+              <a:rPr kumimoji="1" lang="ja-JP" altLang="en-US" sz="2000" dirty="0"/>
+              <a:t>コンテキストに従って生成すること</a:t>
+            </a:r>
+            <a:endParaRPr kumimoji="1" lang="en-US" altLang="ja-JP" sz="2000" dirty="0"/>
+          </a:p>
+          <a:p>
+            <a:pPr lvl="2"/>
+            <a:r>
+              <a:rPr lang="en-US" altLang="ja-JP" sz="2000" dirty="0"/>
+              <a:t>Ex </a:t>
+            </a:r>
+            <a:r>
+              <a:rPr lang="ja-JP" altLang="en-US" sz="2000" dirty="0"/>
+              <a:t>ツールを使って処理すること</a:t>
+            </a:r>
+            <a:endParaRPr kumimoji="1" lang="ja-JP" altLang="en-US" sz="2000" dirty="0"/>
+          </a:p>
+        </p:txBody>
+      </p:sp>
+      <p:sp>
+        <p:nvSpPr>
+          <p:cNvPr id="3" name="タイトル 2"/>
+          <p:cNvSpPr>
+            <a:spLocks noGrp="1"/>
+          </p:cNvSpPr>
+          <p:nvPr>
+            <p:ph type="title"/>
+          </p:nvPr>
+        </p:nvSpPr>
+        <p:spPr/>
+        <p:txBody>
+          <a:bodyPr>
+            <a:normAutofit fontScale="90000"/>
+          </a:bodyPr>
+          <a:lstStyle/>
+          <a:p>
+            <a:r>
+              <a:rPr kumimoji="1" lang="ja-JP" altLang="en-US" dirty="0"/>
+              <a:t>枠組み: 判断（Judgment）と演算（Reckoning）</a:t>
+            </a:r>
+          </a:p>
+        </p:txBody>
+      </p:sp>
+    </p:spTree>
+    <p:extLst>
+      <p:ext uri="{BB962C8B-B14F-4D97-AF65-F5344CB8AC3E}">
+        <p14:creationId xmlns:p14="http://schemas.microsoft.com/office/powerpoint/2010/main" val="3989734313"/>
+      </p:ext>
+    </p:extLst>
+  </p:cSld>
+  <p:clrMapOvr>
+    <a:masterClrMapping/>
+  </p:clrMapOvr>
+</p:sld>
+</file>
+
+<file path=ppt/slides/slide25.xml><?xml version="1.0" encoding="utf-8"?>
+<p:sld xmlns:a="http://schemas.openxmlformats.org/drawingml/2006/main" xmlns:r="http://schemas.openxmlformats.org/officeDocument/2006/relationships" xmlns:p="http://schemas.openxmlformats.org/presentationml/2006/main">
+  <p:cSld>
+    <p:spTree>
+      <p:nvGrpSpPr>
+        <p:cNvPr id="1" name=""/>
+        <p:cNvGrpSpPr/>
+        <p:nvPr/>
+      </p:nvGrpSpPr>
+      <p:grpSpPr>
+        <a:xfrm>
+          <a:off x="0" y="0"/>
+          <a:ext cx="0" cy="0"/>
+          <a:chOff x="0" y="0"/>
+          <a:chExt cx="0" cy="0"/>
+        </a:xfrm>
+      </p:grpSpPr>
+      <p:sp>
+        <p:nvSpPr>
+          <p:cNvPr id="2" name="コンテンツ プレースホルダー 1"/>
+          <p:cNvSpPr>
+            <a:spLocks noGrp="1"/>
+          </p:cNvSpPr>
+          <p:nvPr>
+            <p:ph idx="1"/>
+          </p:nvPr>
+        </p:nvSpPr>
+        <p:spPr/>
+        <p:txBody>
+          <a:bodyPr>
+            <a:normAutofit/>
+          </a:bodyPr>
+          <a:lstStyle/>
+          <a:p>
+            <a:r>
+              <a:rPr kumimoji="1" lang="ja-JP" altLang="en-US" sz="1800" b="1" dirty="0"/>
+              <a:t>事例1: ドキュメントパイプライン</a:t>
+            </a:r>
+          </a:p>
+          <a:p>
+            <a:pPr lvl="1"/>
+            <a:r>
+              <a:rPr kumimoji="1" lang="ja-JP" altLang="en-US" sz="1800" dirty="0"/>
+              <a:t>Git 上の Markdown（193ファイル）↔ 社内 Wiki（GROWI）の同期システム</a:t>
+            </a:r>
+          </a:p>
+          <a:p>
+            <a:pPr lvl="1"/>
+            <a:r>
+              <a:rPr kumimoji="1" lang="ja-JP" altLang="en-US" sz="1800" dirty="0"/>
+              <a:t>「</a:t>
+            </a:r>
+            <a:r>
+              <a:rPr lang="ja-JP" altLang="en-US" sz="1800" dirty="0"/>
+              <a:t>作業の進め方」「成果物の作り方」</a:t>
+            </a:r>
+            <a:r>
+              <a:rPr kumimoji="1" lang="ja-JP" altLang="en-US" sz="1800" dirty="0"/>
+              <a:t>を設計した</a:t>
+            </a:r>
+            <a:endParaRPr kumimoji="1" lang="en-US" altLang="ja-JP" sz="1800" dirty="0"/>
+          </a:p>
+          <a:p>
+            <a:pPr lvl="1"/>
+            <a:r>
+              <a:rPr lang="ja-JP" altLang="en-US" sz="1800" dirty="0"/>
+              <a:t>作り方を作る</a:t>
+            </a:r>
+          </a:p>
+          <a:p>
+            <a:r>
+              <a:rPr kumimoji="1" lang="ja-JP" altLang="en-US" sz="1800" b="1" dirty="0"/>
+              <a:t>事例2: AIレビューワークフロー</a:t>
+            </a:r>
+          </a:p>
+          <a:p>
+            <a:pPr lvl="1"/>
+            <a:r>
+              <a:rPr kumimoji="1" lang="ja-JP" altLang="en-US" sz="1800" dirty="0"/>
+              <a:t>Claude Code スキル/エージェント </a:t>
+            </a:r>
+            <a:r>
+              <a:rPr lang="ja-JP" altLang="en-US" sz="1800" dirty="0"/>
+              <a:t>↔</a:t>
+            </a:r>
+            <a:r>
+              <a:rPr kumimoji="1" lang="ja-JP" altLang="en-US" sz="1800" dirty="0"/>
+              <a:t>構造化レビュー ↔GitHub PR</a:t>
+            </a:r>
+          </a:p>
+          <a:p>
+            <a:pPr lvl="1"/>
+            <a:r>
+              <a:rPr kumimoji="1" lang="ja-JP" altLang="en-US" sz="1600" dirty="0"/>
+              <a:t>「人間・</a:t>
+            </a:r>
+            <a:r>
+              <a:rPr kumimoji="1" lang="en-US" altLang="ja-JP" sz="1600" dirty="0"/>
+              <a:t>AI</a:t>
+            </a:r>
+            <a:r>
+              <a:rPr kumimoji="1" lang="ja-JP" altLang="en-US" sz="1600" dirty="0"/>
+              <a:t>・ツールの役割分担」「判断力を持続可能にする仕組み」を設計した</a:t>
+            </a:r>
+            <a:endParaRPr kumimoji="1" lang="en-US" altLang="ja-JP" sz="1600" dirty="0"/>
+          </a:p>
+          <a:p>
+            <a:pPr lvl="1"/>
+            <a:r>
+              <a:rPr kumimoji="1" lang="ja-JP" altLang="en-US" sz="1600" dirty="0"/>
+              <a:t>育て方を作る</a:t>
+            </a:r>
+            <a:endParaRPr kumimoji="1" lang="en-US" altLang="ja-JP" sz="1600" dirty="0"/>
+          </a:p>
+          <a:p>
+            <a:pPr lvl="1"/>
+            <a:endParaRPr lang="ja-JP" altLang="en-US" dirty="0"/>
+          </a:p>
+          <a:p>
+            <a:r>
+              <a:rPr kumimoji="1" lang="ja-JP" altLang="en-US" sz="2000" b="1" dirty="0"/>
+              <a:t>共通パターン:</a:t>
+            </a:r>
+          </a:p>
+          <a:p>
+            <a:pPr lvl="1"/>
+            <a:r>
+              <a:rPr kumimoji="1" lang="ja-JP" altLang="en-US" sz="2000" dirty="0"/>
+              <a:t>人間</a:t>
+            </a:r>
+            <a:r>
+              <a:rPr lang="ja-JP" altLang="en-US" sz="2000" dirty="0"/>
+              <a:t>🧑‍💻</a:t>
+            </a:r>
+            <a:r>
+              <a:rPr kumimoji="1" lang="ja-JP" altLang="en-US" sz="2000" dirty="0"/>
+              <a:t>が判断の枠組みを作り、AI</a:t>
+            </a:r>
+            <a:r>
+              <a:rPr lang="ja-JP" altLang="en-US" sz="2000" dirty="0"/>
+              <a:t>🤖</a:t>
+            </a:r>
+            <a:r>
+              <a:rPr kumimoji="1" lang="ja-JP" altLang="en-US" sz="2000" dirty="0"/>
+              <a:t>が演算を担う</a:t>
+            </a:r>
+          </a:p>
+        </p:txBody>
+      </p:sp>
+      <p:sp>
+        <p:nvSpPr>
+          <p:cNvPr id="3" name="タイトル 2"/>
+          <p:cNvSpPr>
+            <a:spLocks noGrp="1"/>
+          </p:cNvSpPr>
+          <p:nvPr>
+            <p:ph type="title"/>
+          </p:nvPr>
+        </p:nvSpPr>
+        <p:spPr/>
+        <p:txBody>
+          <a:bodyPr/>
+          <a:lstStyle/>
+          <a:p>
+            <a:r>
+              <a:rPr kumimoji="1" lang="ja-JP" altLang="en-US" dirty="0"/>
+              <a:t>今日話した2つの仕組み</a:t>
+            </a:r>
+          </a:p>
+        </p:txBody>
+      </p:sp>
+    </p:spTree>
+    <p:extLst>
+      <p:ext uri="{BB962C8B-B14F-4D97-AF65-F5344CB8AC3E}">
+        <p14:creationId xmlns:p14="http://schemas.microsoft.com/office/powerpoint/2010/main" val="1825818896"/>
+      </p:ext>
+    </p:extLst>
+  </p:cSld>
+  <p:clrMapOvr>
+    <a:masterClrMapping/>
+  </p:clrMapOvr>
+</p:sld>
+</file>
+
+<file path=ppt/slides/slide26.xml><?xml version="1.0" encoding="utf-8"?>
+<p:sld xmlns:a="http://schemas.openxmlformats.org/drawingml/2006/main" xmlns:r="http://schemas.openxmlformats.org/officeDocument/2006/relationships" xmlns:p="http://schemas.openxmlformats.org/presentationml/2006/main">
+  <p:cSld>
+    <p:spTree>
+      <p:nvGrpSpPr>
+        <p:cNvPr id="1" name=""/>
+        <p:cNvGrpSpPr/>
+        <p:nvPr/>
+      </p:nvGrpSpPr>
+      <p:grpSpPr>
+        <a:xfrm>
+          <a:off x="0" y="0"/>
+          <a:ext cx="0" cy="0"/>
+          <a:chOff x="0" y="0"/>
+          <a:chExt cx="0" cy="0"/>
+        </a:xfrm>
+      </p:grpSpPr>
+      <p:sp>
+        <p:nvSpPr>
+          <p:cNvPr id="2" name="コンテンツ プレースホルダー 1"/>
+          <p:cNvSpPr>
+            <a:spLocks noGrp="1"/>
+          </p:cNvSpPr>
+          <p:nvPr>
+            <p:ph idx="1"/>
+          </p:nvPr>
+        </p:nvSpPr>
+        <p:spPr/>
+        <p:txBody>
+          <a:bodyPr>
+            <a:normAutofit/>
+          </a:bodyPr>
+          <a:lstStyle/>
+          <a:p>
+            <a:r>
+              <a:rPr kumimoji="1" lang="ja-JP" altLang="en-US" sz="1500" b="1" dirty="0"/>
+              <a:t>著者</a:t>
+            </a:r>
+          </a:p>
+          <a:p>
+            <a:pPr lvl="1"/>
+            <a:r>
+              <a:rPr kumimoji="1" lang="ja-JP" altLang="en-US" sz="1500" dirty="0"/>
+              <a:t>/self-review → 網羅的チェック（Reckoning）</a:t>
+            </a:r>
+          </a:p>
+          <a:p>
+            <a:pPr lvl="1"/>
+            <a:r>
+              <a:rPr kumimoji="1" lang="ja-JP" altLang="en-US" sz="1500" dirty="0"/>
+              <a:t>意思決定フェーズ → 各 finding に判断（Judgment）</a:t>
+            </a:r>
+          </a:p>
+          <a:p>
+            <a:pPr lvl="1"/>
+            <a:r>
+              <a:rPr kumimoji="1" lang="ja-JP" altLang="en-US" sz="1500" dirty="0"/>
+              <a:t>/draft-pr → 意思決定記録と設計意図を PR に埋め込む</a:t>
+            </a:r>
+            <a:endParaRPr lang="ja-JP" altLang="en-US" dirty="0"/>
+          </a:p>
+          <a:p>
+            <a:r>
+              <a:rPr kumimoji="1" lang="ja-JP" altLang="en-US" sz="1500" b="1" dirty="0"/>
+              <a:t>レビュワー</a:t>
+            </a:r>
+          </a:p>
+          <a:p>
+            <a:pPr lvl="1"/>
+            <a:r>
+              <a:rPr kumimoji="1" lang="ja-JP" altLang="en-US" sz="1500" dirty="0"/>
+              <a:t>/peer-review → 検討済み事項をスキップ</a:t>
+            </a:r>
+          </a:p>
+          <a:p>
+            <a:pPr lvl="1"/>
+            <a:r>
+              <a:rPr kumimoji="1" lang="ja-JP" altLang="en-US" sz="1500" dirty="0"/>
+              <a:t>コメント選択 → 「その判断は妥当か」を問う（Judgment）</a:t>
+            </a:r>
+          </a:p>
+          <a:p>
+            <a:pPr lvl="1"/>
+            <a:r>
+              <a:rPr kumimoji="1" lang="ja-JP" altLang="en-US" sz="1500" dirty="0"/>
+              <a:t>/post-review → Pending レビューを投稿</a:t>
+            </a:r>
+          </a:p>
+          <a:p>
+            <a:r>
+              <a:rPr lang="ja-JP" altLang="en-US" sz="1500" b="1" dirty="0"/>
+              <a:t>チームで</a:t>
+            </a:r>
+          </a:p>
+          <a:p>
+            <a:pPr lvl="1"/>
+            <a:r>
+              <a:rPr lang="en-US" altLang="ja-JP" sz="1500" dirty="0"/>
+              <a:t>Claude.md</a:t>
+            </a:r>
+            <a:r>
+              <a:rPr lang="ja-JP" altLang="en-US" sz="1500" dirty="0"/>
+              <a:t>や各</a:t>
+            </a:r>
+            <a:r>
+              <a:rPr lang="en-US" altLang="ja-JP" sz="1500" dirty="0"/>
+              <a:t>Agent.md</a:t>
+            </a:r>
+            <a:r>
+              <a:rPr lang="ja-JP" altLang="en-US" sz="1500" dirty="0"/>
+              <a:t>に判断・観点を追加していく（Judgment）</a:t>
+            </a:r>
+            <a:endParaRPr lang="en-US" altLang="ja-JP" sz="1500" dirty="0"/>
+          </a:p>
+          <a:p>
+            <a:pPr lvl="1"/>
+            <a:endParaRPr lang="ja-JP" altLang="en-US" dirty="0"/>
+          </a:p>
+        </p:txBody>
+      </p:sp>
+      <p:sp>
+        <p:nvSpPr>
+          <p:cNvPr id="3" name="タイトル 2"/>
+          <p:cNvSpPr>
+            <a:spLocks noGrp="1"/>
+          </p:cNvSpPr>
+          <p:nvPr>
+            <p:ph type="title"/>
+          </p:nvPr>
+        </p:nvSpPr>
+        <p:spPr/>
+        <p:txBody>
+          <a:bodyPr/>
+          <a:lstStyle/>
+          <a:p>
+            <a:r>
+              <a:rPr kumimoji="1" lang="ja-JP" altLang="en-US" dirty="0"/>
+              <a:t>演算（Reckoning）— 判断を通すワークフロー</a:t>
+            </a:r>
+          </a:p>
+        </p:txBody>
+      </p:sp>
+    </p:spTree>
+  </p:cSld>
+  <p:clrMapOvr>
+    <a:masterClrMapping/>
+  </p:clrMapOvr>
+</p:sld>
+</file>
+
+<file path=ppt/slides/slide27.xml><?xml version="1.0" encoding="utf-8"?>
+<p:sld xmlns:a="http://schemas.openxmlformats.org/drawingml/2006/main" xmlns:r="http://schemas.openxmlformats.org/officeDocument/2006/relationships" xmlns:p="http://schemas.openxmlformats.org/presentationml/2006/main">
+  <p:cSld>
+    <p:spTree>
+      <p:nvGrpSpPr>
+        <p:cNvPr id="1" name=""/>
+        <p:cNvGrpSpPr/>
+        <p:nvPr/>
+      </p:nvGrpSpPr>
+      <p:grpSpPr>
+        <a:xfrm>
+          <a:off x="0" y="0"/>
+          <a:ext cx="0" cy="0"/>
+          <a:chOff x="0" y="0"/>
+          <a:chExt cx="0" cy="0"/>
+        </a:xfrm>
+      </p:grpSpPr>
+      <p:sp>
+        <p:nvSpPr>
+          <p:cNvPr id="2" name="コンテンツ プレースホルダー 1"/>
+          <p:cNvSpPr>
+            <a:spLocks noGrp="1"/>
+          </p:cNvSpPr>
+          <p:nvPr>
+            <p:ph idx="1"/>
+          </p:nvPr>
+        </p:nvSpPr>
+        <p:spPr>
+          <a:xfrm>
+            <a:off x="632681" y="1304764"/>
+            <a:ext cx="8640638" cy="4894536"/>
+          </a:xfrm>
+        </p:spPr>
+        <p:txBody>
+          <a:bodyPr>
+            <a:normAutofit/>
+          </a:bodyPr>
+          <a:lstStyle/>
+          <a:p>
+            <a:r>
+              <a:rPr kumimoji="1" lang="ja-JP" altLang="en-US" sz="1800" b="1" dirty="0"/>
+              <a:t>ドキュメントパイプライン</a:t>
+            </a:r>
+          </a:p>
+          <a:p>
+            <a:pPr lvl="1"/>
+            <a:r>
+              <a:rPr kumimoji="1" lang="ja-JP" altLang="en-US" sz="1800" dirty="0"/>
+              <a:t>Judgment: 何を自動化し・何を</a:t>
+            </a:r>
+            <a:r>
+              <a:rPr lang="ja-JP" altLang="en-US" sz="1800" dirty="0"/>
+              <a:t>メンバー（人間）に何</a:t>
+            </a:r>
+            <a:r>
+              <a:rPr kumimoji="1" lang="ja-JP" altLang="en-US" sz="1800" dirty="0"/>
+              <a:t>をやってもらうか</a:t>
+            </a:r>
+            <a:br>
+              <a:rPr kumimoji="1" lang="en-US" altLang="ja-JP" sz="1800" dirty="0"/>
+            </a:br>
+            <a:r>
+              <a:rPr kumimoji="1" lang="ja-JP" altLang="en-US" sz="1800" dirty="0"/>
+              <a:t>Reckoning: ツール構築・ツール実行</a:t>
+            </a:r>
+            <a:endParaRPr lang="ja-JP" altLang="en-US" sz="1400" dirty="0"/>
+          </a:p>
+          <a:p>
+            <a:r>
+              <a:rPr kumimoji="1" lang="ja-JP" altLang="en-US" sz="1800" b="1" dirty="0"/>
+              <a:t>レビューワークフロー</a:t>
+            </a:r>
+          </a:p>
+          <a:p>
+            <a:pPr lvl="1"/>
+            <a:r>
+              <a:rPr kumimoji="1" lang="ja-JP" altLang="en-US" sz="1800" dirty="0"/>
+              <a:t>Judgment: この変更を組み込むべきか、どの判断を採るか、何を観点とするか</a:t>
+            </a:r>
+          </a:p>
+          <a:p>
+            <a:pPr lvl="1"/>
+            <a:r>
+              <a:rPr kumimoji="1" lang="ja-JP" altLang="en-US" sz="1800" dirty="0"/>
+              <a:t>Reckoning: 網羅分析、要約、観点別チェック</a:t>
+            </a:r>
+          </a:p>
+          <a:p>
+            <a:endParaRPr lang="ja-JP" altLang="en-US" dirty="0"/>
+          </a:p>
+          <a:p>
+            <a:pPr algn="ctr"/>
+            <a:r>
+              <a:rPr kumimoji="1" lang="ja-JP" altLang="en-US" sz="1800" b="1" dirty="0"/>
+              <a:t>共通</a:t>
+            </a:r>
+          </a:p>
+          <a:p>
+            <a:pPr marL="257173" lvl="1" indent="0" algn="ctr">
+              <a:buNone/>
+            </a:pPr>
+            <a:r>
+              <a:rPr kumimoji="1" lang="ja-JP" altLang="en-US" sz="1800" dirty="0"/>
+              <a:t>人間が枠組みと採否を決め、AI がその範囲で実行する</a:t>
+            </a:r>
+          </a:p>
+        </p:txBody>
+      </p:sp>
+      <p:sp>
+        <p:nvSpPr>
+          <p:cNvPr id="3" name="タイトル 2"/>
+          <p:cNvSpPr>
+            <a:spLocks noGrp="1"/>
+          </p:cNvSpPr>
+          <p:nvPr>
+            <p:ph type="title"/>
+          </p:nvPr>
+        </p:nvSpPr>
+        <p:spPr/>
+        <p:txBody>
+          <a:bodyPr/>
+          <a:lstStyle/>
+          <a:p>
+            <a:r>
+              <a:rPr kumimoji="1" lang="ja-JP" altLang="en-US" dirty="0"/>
+              <a:t>2つの事例が示すパターン</a:t>
+            </a:r>
+          </a:p>
+        </p:txBody>
+      </p:sp>
+    </p:spTree>
+  </p:cSld>
+  <p:clrMapOvr>
+    <a:masterClrMapping/>
+  </p:clrMapOvr>
+</p:sld>
+</file>
+
 <file path=ppt/slides/slide28.xml><?xml version="1.0" encoding="utf-8"?>
+<p:sld xmlns:a="http://schemas.openxmlformats.org/drawingml/2006/main" xmlns:r="http://schemas.openxmlformats.org/officeDocument/2006/relationships" xmlns:p="http://schemas.openxmlformats.org/presentationml/2006/main">
+  <p:cSld>
+    <p:spTree>
+      <p:nvGrpSpPr>
+        <p:cNvPr id="1" name="">
+          <a:extLst>
+            <a:ext uri="{FF2B5EF4-FFF2-40B4-BE49-F238E27FC236}">
+              <a16:creationId xmlns:a16="http://schemas.microsoft.com/office/drawing/2014/main" id="{68959926-2416-36CA-D42E-AD9927535C45}"/>
+            </a:ext>
+          </a:extLst>
+        </p:cNvPr>
+        <p:cNvGrpSpPr/>
+        <p:nvPr/>
+      </p:nvGrpSpPr>
+      <p:grpSpPr>
+        <a:xfrm>
+          <a:off x="0" y="0"/>
+          <a:ext cx="0" cy="0"/>
+          <a:chOff x="0" y="0"/>
+          <a:chExt cx="0" cy="0"/>
+        </a:xfrm>
+      </p:grpSpPr>
+      <p:sp>
+        <p:nvSpPr>
+          <p:cNvPr id="2" name="コンテンツ プレースホルダー 1">
+            <a:extLst>
+              <a:ext uri="{FF2B5EF4-FFF2-40B4-BE49-F238E27FC236}">
+                <a16:creationId xmlns:a16="http://schemas.microsoft.com/office/drawing/2014/main" id="{409AD931-9E05-3ACB-7061-FAA1E558DB1D}"/>
+              </a:ext>
+            </a:extLst>
+          </p:cNvPr>
+          <p:cNvSpPr>
+            <a:spLocks noGrp="1"/>
+          </p:cNvSpPr>
+          <p:nvPr>
+            <p:ph idx="1"/>
+          </p:nvPr>
+        </p:nvSpPr>
+        <p:spPr/>
+        <p:txBody>
+          <a:bodyPr>
+            <a:normAutofit/>
+          </a:bodyPr>
+          <a:lstStyle/>
+          <a:p>
+            <a:r>
+              <a:rPr lang="ja-JP" altLang="en-US" sz="1800" b="1" dirty="0"/>
+              <a:t>制約:</a:t>
+            </a:r>
+            <a:endParaRPr kumimoji="1" lang="en-US" altLang="ja-JP" sz="1800" dirty="0"/>
+          </a:p>
+          <a:p>
+            <a:pPr lvl="1"/>
+            <a:r>
+              <a:rPr kumimoji="1" lang="ja-JP" altLang="en-US" sz="1800" dirty="0"/>
+              <a:t>GROWI </a:t>
+            </a:r>
+            <a:r>
+              <a:rPr lang="ja-JP" altLang="en-US" sz="1800" dirty="0"/>
+              <a:t>は </a:t>
+            </a:r>
+            <a:r>
+              <a:rPr kumimoji="1" lang="ja-JP" altLang="en-US" sz="1800" dirty="0"/>
+              <a:t>社内 </a:t>
+            </a:r>
+            <a:r>
+              <a:rPr lang="ja-JP" altLang="en-US" sz="1800" dirty="0"/>
+              <a:t>ネットワークからしかアクセス不可</a:t>
+            </a:r>
+            <a:r>
+              <a:rPr kumimoji="1" lang="ja-JP" altLang="en-US" sz="1800" dirty="0"/>
+              <a:t>       </a:t>
+            </a:r>
+            <a:br>
+              <a:rPr kumimoji="1" lang="en-US" altLang="ja-JP" sz="1800" dirty="0"/>
+            </a:br>
+            <a:r>
+              <a:rPr lang="ja-JP" altLang="en-US" sz="1800" dirty="0"/>
+              <a:t>🧑‍💻</a:t>
+            </a:r>
+            <a:r>
+              <a:rPr kumimoji="1" lang="ja-JP" altLang="en-US" sz="1800" dirty="0"/>
+              <a:t>判断 → selfhost ランナー</a:t>
+            </a:r>
+          </a:p>
+          <a:p>
+            <a:pPr lvl="1"/>
+            <a:r>
+              <a:rPr kumimoji="1" lang="ja-JP" altLang="en-US" sz="1800" dirty="0"/>
+              <a:t>Git 画像でリポジトリが重い   </a:t>
+            </a:r>
+            <a:br>
+              <a:rPr kumimoji="1" lang="en-US" altLang="ja-JP" sz="1800" dirty="0"/>
+            </a:br>
+            <a:r>
+              <a:rPr lang="ja-JP" altLang="en-US" sz="1800" dirty="0"/>
+              <a:t>🧑‍💻</a:t>
+            </a:r>
+            <a:r>
+              <a:rPr kumimoji="1" lang="ja-JP" altLang="en-US" sz="1800" dirty="0"/>
+              <a:t>判断 → Azure Blob ストレージに保存してリンクを張る</a:t>
+            </a:r>
+          </a:p>
+          <a:p>
+            <a:pPr lvl="1"/>
+            <a:r>
+              <a:rPr kumimoji="1" lang="ja-JP" altLang="en-US" sz="1800" dirty="0"/>
+              <a:t>Blob に格納する手順が面倒   </a:t>
+            </a:r>
+            <a:br>
+              <a:rPr kumimoji="1" lang="en-US" altLang="ja-JP" sz="1800" dirty="0"/>
+            </a:br>
+            <a:r>
+              <a:rPr lang="ja-JP" altLang="en-US" sz="1800" dirty="0"/>
+              <a:t>🧑‍💻</a:t>
+            </a:r>
+            <a:r>
+              <a:rPr kumimoji="1" lang="ja-JP" altLang="en-US" sz="1800" dirty="0"/>
+              <a:t>判断 → CLI スクリプト + ショートカットで実行</a:t>
+            </a:r>
+            <a:endParaRPr kumimoji="1" lang="en-US" altLang="ja-JP" sz="1800" dirty="0"/>
+          </a:p>
+          <a:p>
+            <a:pPr lvl="1"/>
+            <a:r>
+              <a:rPr lang="ja-JP" altLang="en-US" sz="1800" dirty="0"/>
+              <a:t>品質管理部の方が</a:t>
+            </a:r>
+            <a:r>
+              <a:rPr lang="en-US" altLang="ja-JP" sz="1800" dirty="0"/>
+              <a:t>Wiki</a:t>
+            </a:r>
+            <a:r>
+              <a:rPr lang="ja-JP" altLang="en-US" sz="1800" dirty="0"/>
+              <a:t>編集したい場合は？ </a:t>
+            </a:r>
+            <a:br>
+              <a:rPr lang="en-US" altLang="ja-JP" sz="1800" dirty="0"/>
+            </a:br>
+            <a:r>
+              <a:rPr lang="ja-JP" altLang="en-US" sz="1800" dirty="0"/>
+              <a:t>🧑‍💻判断 → </a:t>
+            </a:r>
+            <a:r>
+              <a:rPr lang="en-US" altLang="ja-JP" sz="1800" dirty="0" err="1"/>
+              <a:t>Growi</a:t>
+            </a:r>
+            <a:r>
+              <a:rPr lang="ja-JP" altLang="en-US" sz="1800" dirty="0"/>
+              <a:t>からリポジトリへのの取り込み機能</a:t>
+            </a:r>
+            <a:endParaRPr lang="en-US" altLang="ja-JP" sz="1800" dirty="0"/>
+          </a:p>
+          <a:p>
+            <a:pPr marL="257173" lvl="1" indent="0">
+              <a:buNone/>
+            </a:pPr>
+            <a:endParaRPr lang="en-US" altLang="ja-JP" sz="1800" dirty="0"/>
+          </a:p>
+          <a:p>
+            <a:pPr marL="257173" lvl="1" indent="0">
+              <a:buNone/>
+            </a:pPr>
+            <a:r>
+              <a:rPr lang="ja-JP" altLang="en-US" sz="1800" dirty="0"/>
+              <a:t>決めてしまえば、</a:t>
+            </a:r>
+            <a:r>
+              <a:rPr lang="en-US" altLang="ja-JP" sz="1800" dirty="0"/>
+              <a:t>AI</a:t>
+            </a:r>
+            <a:r>
+              <a:rPr lang="ja-JP" altLang="en-US" sz="1800" dirty="0"/>
+              <a:t>🤖がサクッと実装してくれる</a:t>
+            </a:r>
+            <a:r>
+              <a:rPr lang="en-US" altLang="ja-JP" sz="1800" dirty="0"/>
+              <a:t>(</a:t>
+            </a:r>
+            <a:r>
+              <a:rPr lang="ja-JP" altLang="en-US" sz="1800" dirty="0"/>
+              <a:t>演算）</a:t>
+            </a:r>
+            <a:br>
+              <a:rPr lang="en-US" altLang="ja-JP" sz="1600" dirty="0"/>
+            </a:br>
+            <a:endParaRPr kumimoji="1" lang="en-US" altLang="ja-JP" sz="1600" dirty="0"/>
+          </a:p>
+        </p:txBody>
+      </p:sp>
+      <p:sp>
+        <p:nvSpPr>
+          <p:cNvPr id="3" name="タイトル 2">
+            <a:extLst>
+              <a:ext uri="{FF2B5EF4-FFF2-40B4-BE49-F238E27FC236}">
+                <a16:creationId xmlns:a16="http://schemas.microsoft.com/office/drawing/2014/main" id="{5C556F17-869E-20ED-D876-B8047E071C6D}"/>
+              </a:ext>
+            </a:extLst>
+          </p:cNvPr>
+          <p:cNvSpPr>
+            <a:spLocks noGrp="1"/>
+          </p:cNvSpPr>
+          <p:nvPr>
+            <p:ph type="title"/>
+          </p:nvPr>
+        </p:nvSpPr>
+        <p:spPr/>
+        <p:txBody>
+          <a:bodyPr/>
+          <a:lstStyle/>
+          <a:p>
+            <a:r>
+              <a:rPr kumimoji="1" lang="ja-JP" altLang="en-US" dirty="0"/>
+              <a:t>制約：何を気にする必要があったか</a:t>
+            </a:r>
+          </a:p>
+        </p:txBody>
+      </p:sp>
+    </p:spTree>
+    <p:extLst>
+      <p:ext uri="{BB962C8B-B14F-4D97-AF65-F5344CB8AC3E}">
+        <p14:creationId xmlns:p14="http://schemas.microsoft.com/office/powerpoint/2010/main" val="312428593"/>
+      </p:ext>
+    </p:extLst>
+  </p:cSld>
+  <p:clrMapOvr>
+    <a:masterClrMapping/>
+  </p:clrMapOvr>
+</p:sld>
+</file>
+
+<file path=ppt/slides/slide29.xml><?xml version="1.0" encoding="utf-8"?>
+<p:sld xmlns:a="http://schemas.openxmlformats.org/drawingml/2006/main" xmlns:r="http://schemas.openxmlformats.org/officeDocument/2006/relationships" xmlns:p="http://schemas.openxmlformats.org/presentationml/2006/main">
+  <p:cSld>
+    <p:spTree>
+      <p:nvGrpSpPr>
+        <p:cNvPr id="1" name="">
+          <a:extLst>
+            <a:ext uri="{FF2B5EF4-FFF2-40B4-BE49-F238E27FC236}">
+              <a16:creationId xmlns:a16="http://schemas.microsoft.com/office/drawing/2014/main" id="{E2B807AA-1893-685C-58DA-275050603BF7}"/>
+            </a:ext>
+          </a:extLst>
+        </p:cNvPr>
+        <p:cNvGrpSpPr/>
+        <p:nvPr/>
+      </p:nvGrpSpPr>
+      <p:grpSpPr>
+        <a:xfrm>
+          <a:off x="0" y="0"/>
+          <a:ext cx="0" cy="0"/>
+          <a:chOff x="0" y="0"/>
+          <a:chExt cx="0" cy="0"/>
+        </a:xfrm>
+      </p:grpSpPr>
+      <p:sp>
+        <p:nvSpPr>
+          <p:cNvPr id="2" name="コンテンツ 1">
+            <a:extLst>
+              <a:ext uri="{FF2B5EF4-FFF2-40B4-BE49-F238E27FC236}">
+                <a16:creationId xmlns:a16="http://schemas.microsoft.com/office/drawing/2014/main" id="{541267B1-6604-BF94-782E-4ECE098B8A6F}"/>
+              </a:ext>
+            </a:extLst>
+          </p:cNvPr>
+          <p:cNvSpPr txBox="1">
+            <a:spLocks/>
+          </p:cNvSpPr>
+          <p:nvPr/>
+        </p:nvSpPr>
+        <p:spPr>
+          <a:xfrm>
+            <a:off x="0" y="1000000"/>
+            <a:ext cx="9906000" cy="4800000"/>
+          </a:xfrm>
+          <a:prstGeom prst="rect">
+            <a:avLst/>
+          </a:prstGeom>
+        </p:spPr>
+        <p:txBody>
+          <a:bodyPr vert="horz" lIns="91440" tIns="91440" rIns="91440" bIns="91440" rtlCol="0" anchor="ctr">
+            <a:normAutofit/>
+          </a:bodyPr>
+          <a:lstStyle>
+            <a:lvl1pPr algn="ctr">
+              <a:defRPr kumimoji="1" sz="2400">
+                <a:solidFill>
+                  <a:schemeClr val="tx1"/>
+                </a:solidFill>
+                <a:latin typeface="+mn-ea"/>
+              </a:defRPr>
+            </a:lvl1pPr>
+          </a:lstStyle>
+          <a:p>
+            <a:pPr lvl="1"/>
+            <a:r>
+              <a:rPr lang="ja-JP" altLang="en-US" sz="3600" dirty="0"/>
+              <a:t>　　　　　　　　設計🧑‍💻</a:t>
+            </a:r>
+            <a:endParaRPr lang="en-US" altLang="ja-JP" sz="3600" dirty="0"/>
+          </a:p>
+          <a:p>
+            <a:pPr lvl="1"/>
+            <a:endParaRPr lang="en-US" altLang="ja-JP" sz="3600" dirty="0"/>
+          </a:p>
+          <a:p>
+            <a:pPr lvl="1"/>
+            <a:r>
+              <a:rPr lang="ja-JP" altLang="en-US" sz="3600" dirty="0"/>
+              <a:t>　　　　　　　　↓</a:t>
+            </a:r>
+            <a:r>
+              <a:rPr lang="ja-JP" altLang="en-US" sz="2800" dirty="0"/>
+              <a:t>判断</a:t>
+            </a:r>
+            <a:r>
+              <a:rPr lang="ja-JP" altLang="en-US" sz="3600" dirty="0"/>
+              <a:t>↓</a:t>
+            </a:r>
+            <a:br>
+              <a:rPr lang="en-US" altLang="ja-JP" sz="3600" dirty="0"/>
+            </a:br>
+            <a:endParaRPr lang="en-US" altLang="ja-JP" sz="3600" dirty="0"/>
+          </a:p>
+          <a:p>
+            <a:pPr lvl="1"/>
+            <a:r>
+              <a:rPr lang="ja-JP" altLang="en-US" sz="3600" dirty="0"/>
+              <a:t>「</a:t>
+            </a:r>
+            <a:r>
+              <a:rPr lang="ja-JP" altLang="en-US" sz="2800" dirty="0"/>
+              <a:t>判断 🙆→ 演算 🤖→ 判断🙅 → 演算🤖→判断 🙆」</a:t>
+            </a:r>
+            <a:br>
+              <a:rPr lang="en-US" altLang="ja-JP" dirty="0"/>
+            </a:br>
+            <a:endParaRPr lang="ja-JP" altLang="en-US" sz="2800" dirty="0"/>
+          </a:p>
+        </p:txBody>
+      </p:sp>
+    </p:spTree>
+    <p:extLst>
+      <p:ext uri="{BB962C8B-B14F-4D97-AF65-F5344CB8AC3E}">
+        <p14:creationId xmlns:p14="http://schemas.microsoft.com/office/powerpoint/2010/main" val="1957738102"/>
+      </p:ext>
+    </p:extLst>
+  </p:cSld>
+  <p:clrMapOvr>
+    <a:masterClrMapping/>
+  </p:clrMapOvr>
+</p:sld>
+</file>
+
+<file path=ppt/slides/slide3.xml><?xml version="1.0" encoding="utf-8"?>
+<p:sld xmlns:a="http://schemas.openxmlformats.org/drawingml/2006/main" xmlns:r="http://schemas.openxmlformats.org/officeDocument/2006/relationships" xmlns:p="http://schemas.openxmlformats.org/presentationml/2006/main">
+  <p:cSld>
+    <p:spTree>
+      <p:nvGrpSpPr>
+        <p:cNvPr id="1" name=""/>
+        <p:cNvGrpSpPr/>
+        <p:nvPr/>
+      </p:nvGrpSpPr>
+      <p:grpSpPr>
+        <a:xfrm>
+          <a:off x="0" y="0"/>
+          <a:ext cx="0" cy="0"/>
+          <a:chOff x="0" y="0"/>
+          <a:chExt cx="0" cy="0"/>
+        </a:xfrm>
+      </p:grpSpPr>
+      <p:sp>
+        <p:nvSpPr>
+          <p:cNvPr id="2" name="タイトル 1"/>
+          <p:cNvSpPr>
+            <a:spLocks noGrp="1"/>
+          </p:cNvSpPr>
+          <p:nvPr>
+            <p:ph type="ctrTitle"/>
+          </p:nvPr>
+        </p:nvSpPr>
+        <p:spPr/>
+        <p:txBody>
+          <a:bodyPr>
+            <a:normAutofit fontScale="90000"/>
+          </a:bodyPr>
+          <a:lstStyle/>
+          <a:p>
+            <a:r>
+              <a:rPr kumimoji="1" lang="ja-JP" altLang="en-US" sz="2600" dirty="0"/>
+              <a:t>事例1 ドキュメントパイプライン</a:t>
+            </a:r>
+          </a:p>
+        </p:txBody>
+      </p:sp>
+      <p:sp>
+        <p:nvSpPr>
+          <p:cNvPr id="3" name="字幕 2"/>
+          <p:cNvSpPr>
+            <a:spLocks noGrp="1"/>
+          </p:cNvSpPr>
+          <p:nvPr>
+            <p:ph type="subTitle" idx="1"/>
+          </p:nvPr>
+        </p:nvSpPr>
+        <p:spPr/>
+        <p:txBody>
+          <a:bodyPr>
+            <a:normAutofit/>
+          </a:bodyPr>
+          <a:lstStyle/>
+          <a:p>
+            <a:r>
+              <a:rPr kumimoji="1" lang="ja-JP" altLang="en-US" sz="1300" dirty="0"/>
+              <a:t>「作り方を作る」エンジニアリング</a:t>
+            </a:r>
+          </a:p>
+        </p:txBody>
+      </p:sp>
+    </p:spTree>
+  </p:cSld>
+  <p:clrMapOvr>
+    <a:masterClrMapping/>
+  </p:clrMapOvr>
+</p:sld>
+</file>
+
+<file path=ppt/slides/slide30.xml><?xml version="1.0" encoding="utf-8"?>
 <p:sld xmlns:a="http://schemas.openxmlformats.org/drawingml/2006/main" xmlns:r="http://schemas.openxmlformats.org/officeDocument/2006/relationships" xmlns:p="http://schemas.openxmlformats.org/presentationml/2006/main">
   <p:cSld>
     <p:spTree>
@@ -7865,7 +12304,7 @@
 </p:sld>
 </file>
 
-<file path=ppt/slides/slide29.xml><?xml version="1.0" encoding="utf-8"?>
+<file path=ppt/slides/slide31.xml><?xml version="1.0" encoding="utf-8"?>
 <p:sld xmlns:a="http://schemas.openxmlformats.org/drawingml/2006/main" xmlns:r="http://schemas.openxmlformats.org/officeDocument/2006/relationships" xmlns:p="http://schemas.openxmlformats.org/presentationml/2006/main">
   <p:cSld>
     <p:spTree>
@@ -8005,197 +12444,7 @@
 </p:sld>
 </file>
 
-<file path=ppt/slides/slide3.xml><?xml version="1.0" encoding="utf-8"?>
-<p:sld xmlns:a="http://schemas.openxmlformats.org/drawingml/2006/main" xmlns:r="http://schemas.openxmlformats.org/officeDocument/2006/relationships" xmlns:p="http://schemas.openxmlformats.org/presentationml/2006/main">
-  <p:cSld>
-    <p:spTree>
-      <p:nvGrpSpPr>
-        <p:cNvPr id="1" name=""/>
-        <p:cNvGrpSpPr/>
-        <p:nvPr/>
-      </p:nvGrpSpPr>
-      <p:grpSpPr>
-        <a:xfrm>
-          <a:off x="0" y="0"/>
-          <a:ext cx="0" cy="0"/>
-          <a:chOff x="0" y="0"/>
-          <a:chExt cx="0" cy="0"/>
-        </a:xfrm>
-      </p:grpSpPr>
-      <p:sp>
-        <p:nvSpPr>
-          <p:cNvPr id="2" name="コンテンツ プレースホルダー 1"/>
-          <p:cNvSpPr>
-            <a:spLocks noGrp="1"/>
-          </p:cNvSpPr>
-          <p:nvPr>
-            <p:ph idx="1"/>
-          </p:nvPr>
-        </p:nvSpPr>
-        <p:spPr/>
-        <p:txBody>
-          <a:bodyPr>
-            <a:normAutofit/>
-          </a:bodyPr>
-          <a:lstStyle/>
-          <a:p>
-            <a:r>
-              <a:rPr kumimoji="1" lang="ja-JP" altLang="en-US" sz="2800" b="1" dirty="0"/>
-              <a:t>Judgment（判断）</a:t>
-            </a:r>
-            <a:r>
-              <a:rPr lang="ja-JP" altLang="en-US" sz="2800" dirty="0"/>
-              <a:t>🧑‍💻</a:t>
-            </a:r>
-            <a:endParaRPr kumimoji="1" lang="ja-JP" altLang="en-US" sz="2800" b="1" dirty="0"/>
-          </a:p>
-          <a:p>
-            <a:pPr lvl="1"/>
-            <a:r>
-              <a:rPr kumimoji="1" lang="ja-JP" altLang="en-US" sz="2800" dirty="0"/>
-              <a:t>何を問うか・何を採るかを引き受けること</a:t>
-            </a:r>
-            <a:endParaRPr kumimoji="1" lang="en-US" altLang="ja-JP" sz="2800" dirty="0"/>
-          </a:p>
-          <a:p>
-            <a:pPr lvl="2"/>
-            <a:r>
-              <a:rPr lang="en-US" altLang="ja-JP" sz="2000" dirty="0"/>
-              <a:t>Ex </a:t>
-            </a:r>
-            <a:r>
-              <a:rPr lang="ja-JP" altLang="en-US" sz="2000" dirty="0"/>
-              <a:t>トレードオフの判断</a:t>
-            </a:r>
-            <a:endParaRPr lang="en-US" altLang="ja-JP" sz="2000" dirty="0"/>
-          </a:p>
-          <a:p>
-            <a:pPr lvl="2"/>
-            <a:r>
-              <a:rPr kumimoji="1" lang="en-US" altLang="ja-JP" sz="2000" dirty="0"/>
-              <a:t>Ex </a:t>
-            </a:r>
-            <a:r>
-              <a:rPr kumimoji="1" lang="ja-JP" altLang="en-US" sz="2000" dirty="0"/>
-              <a:t>何を解決するかの判断</a:t>
-            </a:r>
-            <a:endParaRPr lang="ja-JP" altLang="en-US" sz="1400" dirty="0"/>
-          </a:p>
-          <a:p>
-            <a:r>
-              <a:rPr kumimoji="1" lang="ja-JP" altLang="en-US" sz="2800" b="1" dirty="0"/>
-              <a:t>Reckoning（演算）</a:t>
-            </a:r>
-            <a:r>
-              <a:rPr lang="ja-JP" altLang="en-US" sz="2800" dirty="0"/>
-              <a:t>🤖💻</a:t>
-            </a:r>
-            <a:endParaRPr kumimoji="1" lang="ja-JP" altLang="en-US" sz="2800" b="1" dirty="0"/>
-          </a:p>
-          <a:p>
-            <a:pPr lvl="1"/>
-            <a:r>
-              <a:rPr kumimoji="1" lang="ja-JP" altLang="en-US" sz="2800" dirty="0"/>
-              <a:t>与えられた条件で広く計算すること</a:t>
-            </a:r>
-            <a:endParaRPr kumimoji="1" lang="en-US" altLang="ja-JP" sz="2800" dirty="0"/>
-          </a:p>
-          <a:p>
-            <a:pPr lvl="2"/>
-            <a:r>
-              <a:rPr kumimoji="1" lang="en-US" altLang="ja-JP" sz="2000" dirty="0"/>
-              <a:t>Ex </a:t>
-            </a:r>
-            <a:r>
-              <a:rPr kumimoji="1" lang="ja-JP" altLang="en-US" sz="2000" dirty="0"/>
-              <a:t>コンテキストに従って生成すること</a:t>
-            </a:r>
-            <a:endParaRPr kumimoji="1" lang="en-US" altLang="ja-JP" sz="2000" dirty="0"/>
-          </a:p>
-          <a:p>
-            <a:pPr lvl="2"/>
-            <a:r>
-              <a:rPr lang="en-US" altLang="ja-JP" sz="2000" dirty="0"/>
-              <a:t>Ex </a:t>
-            </a:r>
-            <a:r>
-              <a:rPr lang="ja-JP" altLang="en-US" sz="2000" dirty="0"/>
-              <a:t>ツールを使って処理すること</a:t>
-            </a:r>
-            <a:endParaRPr kumimoji="1" lang="ja-JP" altLang="en-US" sz="2000" dirty="0"/>
-          </a:p>
-        </p:txBody>
-      </p:sp>
-      <p:sp>
-        <p:nvSpPr>
-          <p:cNvPr id="3" name="タイトル 2"/>
-          <p:cNvSpPr>
-            <a:spLocks noGrp="1"/>
-          </p:cNvSpPr>
-          <p:nvPr>
-            <p:ph type="title"/>
-          </p:nvPr>
-        </p:nvSpPr>
-        <p:spPr/>
-        <p:txBody>
-          <a:bodyPr>
-            <a:normAutofit fontScale="90000"/>
-          </a:bodyPr>
-          <a:lstStyle/>
-          <a:p>
-            <a:r>
-              <a:rPr kumimoji="1" lang="ja-JP" altLang="en-US" dirty="0"/>
-              <a:t>枠組み: 判断（Judgment）と演算（Reckoning）</a:t>
-            </a:r>
-          </a:p>
-        </p:txBody>
-      </p:sp>
-      <p:pic>
-        <p:nvPicPr>
-          <p:cNvPr id="6" name="図 5">
-            <a:extLst>
-              <a:ext uri="{FF2B5EF4-FFF2-40B4-BE49-F238E27FC236}">
-                <a16:creationId xmlns:a16="http://schemas.microsoft.com/office/drawing/2014/main" id="{DD70937A-5EE4-27D0-92C7-AB41BE5F0861}"/>
-              </a:ext>
-            </a:extLst>
-          </p:cNvPr>
-          <p:cNvPicPr>
-            <a:picLocks noChangeAspect="1"/>
-          </p:cNvPicPr>
-          <p:nvPr/>
-        </p:nvPicPr>
-        <p:blipFill>
-          <a:blip r:embed="rId2">
-            <a:extLst>
-              <a:ext uri="{28A0092B-C50C-407E-A947-70E740481C1C}">
-                <a14:useLocalDpi xmlns:a14="http://schemas.microsoft.com/office/drawing/2010/main" val="0"/>
-              </a:ext>
-            </a:extLst>
-          </a:blip>
-          <a:srcRect l="14905" t="2673" r="15827"/>
-          <a:stretch>
-            <a:fillRect/>
-          </a:stretch>
-        </p:blipFill>
-        <p:spPr>
-          <a:xfrm>
-            <a:off x="7365268" y="4002065"/>
-            <a:ext cx="2540732" cy="2855935"/>
-          </a:xfrm>
-          <a:prstGeom prst="rect">
-            <a:avLst/>
-          </a:prstGeom>
-        </p:spPr>
-      </p:pic>
-    </p:spTree>
-  </p:cSld>
-  <p:clrMapOvr>
-    <a:masterClrMapping/>
-  </p:clrMapOvr>
-</p:sld>
-</file>
-
-<file path=ppt/slides/slide30.xml><?xml version="1.0" encoding="utf-8"?>
+<file path=ppt/slides/slide32.xml><?xml version="1.0" encoding="utf-8"?>
 <p:sld xmlns:a="http://schemas.openxmlformats.org/drawingml/2006/main" xmlns:r="http://schemas.openxmlformats.org/officeDocument/2006/relationships" xmlns:p="http://schemas.openxmlformats.org/presentationml/2006/main">
   <p:cSld>
     <p:spTree>
@@ -8321,137 +12570,6 @@
   <p:cSld>
     <p:spTree>
       <p:nvGrpSpPr>
-        <p:cNvPr id="1" name="">
-          <a:extLst>
-            <a:ext uri="{FF2B5EF4-FFF2-40B4-BE49-F238E27FC236}">
-              <a16:creationId xmlns:a16="http://schemas.microsoft.com/office/drawing/2014/main" id="{E2B807AA-1893-685C-58DA-275050603BF7}"/>
-            </a:ext>
-          </a:extLst>
-        </p:cNvPr>
-        <p:cNvGrpSpPr/>
-        <p:nvPr/>
-      </p:nvGrpSpPr>
-      <p:grpSpPr>
-        <a:xfrm>
-          <a:off x="0" y="0"/>
-          <a:ext cx="0" cy="0"/>
-          <a:chOff x="0" y="0"/>
-          <a:chExt cx="0" cy="0"/>
-        </a:xfrm>
-      </p:grpSpPr>
-      <p:sp>
-        <p:nvSpPr>
-          <p:cNvPr id="2" name="コンテンツ 1">
-            <a:extLst>
-              <a:ext uri="{FF2B5EF4-FFF2-40B4-BE49-F238E27FC236}">
-                <a16:creationId xmlns:a16="http://schemas.microsoft.com/office/drawing/2014/main" id="{541267B1-6604-BF94-782E-4ECE098B8A6F}"/>
-              </a:ext>
-            </a:extLst>
-          </p:cNvPr>
-          <p:cNvSpPr txBox="1">
-            <a:spLocks/>
-          </p:cNvSpPr>
-          <p:nvPr/>
-        </p:nvSpPr>
-        <p:spPr>
-          <a:xfrm>
-            <a:off x="0" y="1000000"/>
-            <a:ext cx="9906000" cy="4800000"/>
-          </a:xfrm>
-          <a:prstGeom prst="rect">
-            <a:avLst/>
-          </a:prstGeom>
-        </p:spPr>
-        <p:txBody>
-          <a:bodyPr vert="horz" lIns="91440" tIns="91440" rIns="91440" bIns="91440" rtlCol="0" anchor="ctr">
-            <a:normAutofit/>
-          </a:bodyPr>
-          <a:lstStyle>
-            <a:lvl1pPr algn="ctr">
-              <a:defRPr kumimoji="1" sz="2400">
-                <a:solidFill>
-                  <a:schemeClr val="tx1"/>
-                </a:solidFill>
-                <a:latin typeface="+mn-ea"/>
-              </a:defRPr>
-            </a:lvl1pPr>
-          </a:lstStyle>
-          <a:p>
-            <a:r>
-              <a:rPr lang="ja-JP" altLang="en-US" sz="2800" b="1" dirty="0"/>
-              <a:t>本日の主張:</a:t>
-            </a:r>
-            <a:endParaRPr lang="en-US" altLang="ja-JP" sz="2800" b="1" dirty="0"/>
-          </a:p>
-          <a:p>
-            <a:endParaRPr lang="ja-JP" altLang="en-US" sz="2800" b="1" dirty="0"/>
-          </a:p>
-          <a:p>
-            <a:pPr lvl="1"/>
-            <a:r>
-              <a:rPr lang="ja-JP" altLang="en-US" sz="3600" dirty="0"/>
-              <a:t>　　　　　　　　設計🧑‍💻</a:t>
-            </a:r>
-            <a:endParaRPr lang="en-US" altLang="ja-JP" sz="3600" dirty="0"/>
-          </a:p>
-          <a:p>
-            <a:pPr lvl="1"/>
-            <a:endParaRPr lang="en-US" altLang="ja-JP" sz="3600" dirty="0"/>
-          </a:p>
-          <a:p>
-            <a:pPr lvl="1"/>
-            <a:r>
-              <a:rPr lang="ja-JP" altLang="en-US" sz="3600" dirty="0"/>
-              <a:t>　　　　　　　　↓</a:t>
-            </a:r>
-            <a:r>
-              <a:rPr lang="ja-JP" altLang="en-US" sz="2800" dirty="0"/>
-              <a:t>判断</a:t>
-            </a:r>
-            <a:r>
-              <a:rPr lang="ja-JP" altLang="en-US" sz="3600" dirty="0"/>
-              <a:t>↓</a:t>
-            </a:r>
-            <a:br>
-              <a:rPr lang="en-US" altLang="ja-JP" sz="3600" dirty="0"/>
-            </a:br>
-            <a:endParaRPr lang="en-US" altLang="ja-JP" sz="3600" dirty="0"/>
-          </a:p>
-          <a:p>
-            <a:pPr lvl="1"/>
-            <a:r>
-              <a:rPr lang="ja-JP" altLang="en-US" sz="3600" dirty="0"/>
-              <a:t>「</a:t>
-            </a:r>
-            <a:r>
-              <a:rPr lang="ja-JP" altLang="en-US" sz="2800" dirty="0"/>
-              <a:t>判断 🙆→ 演算 🤖→ 判断🙅 → 演算🤖→判断 🙆」</a:t>
-            </a:r>
-            <a:br>
-              <a:rPr lang="en-US" altLang="ja-JP" dirty="0"/>
-            </a:br>
-            <a:endParaRPr lang="ja-JP" altLang="en-US" sz="2800" dirty="0"/>
-          </a:p>
-        </p:txBody>
-      </p:sp>
-    </p:spTree>
-    <p:extLst>
-      <p:ext uri="{BB962C8B-B14F-4D97-AF65-F5344CB8AC3E}">
-        <p14:creationId xmlns:p14="http://schemas.microsoft.com/office/powerpoint/2010/main" val="455247066"/>
-      </p:ext>
-    </p:extLst>
-  </p:cSld>
-  <p:clrMapOvr>
-    <a:masterClrMapping/>
-  </p:clrMapOvr>
-</p:sld>
-</file>
-
-<file path=ppt/slides/slide5.xml><?xml version="1.0" encoding="utf-8"?>
-<p:sld xmlns:a="http://schemas.openxmlformats.org/drawingml/2006/main" xmlns:r="http://schemas.openxmlformats.org/officeDocument/2006/relationships" xmlns:p="http://schemas.openxmlformats.org/presentationml/2006/main">
-  <p:cSld>
-    <p:spTree>
-      <p:nvGrpSpPr>
         <p:cNvPr id="1" name=""/>
         <p:cNvGrpSpPr/>
         <p:nvPr/>
@@ -8482,117 +12600,86 @@
           <a:lstStyle/>
           <a:p>
             <a:r>
-              <a:rPr kumimoji="1" lang="ja-JP" altLang="en-US" sz="1800" b="1" dirty="0"/>
-              <a:t>事例1: ドキュメントパイプライン</a:t>
-            </a:r>
+              <a:rPr kumimoji="1" lang="ja-JP" altLang="en-US" sz="1600" b="1" dirty="0"/>
+              <a:t>Wiki をローカル（Git）で管理すれば何が可能になる？</a:t>
+            </a:r>
+            <a:endParaRPr lang="ja-JP" altLang="en-US" dirty="0"/>
           </a:p>
           <a:p>
             <a:pPr lvl="1"/>
             <a:r>
-              <a:rPr kumimoji="1" lang="ja-JP" altLang="en-US" sz="1800" dirty="0"/>
-              <a:t>Git 上の Markdown（193ファイル）↔ 社内 Wiki（GROWI）の同期システム</a:t>
+              <a:rPr kumimoji="1" lang="ja-JP" altLang="en-US" sz="1600" dirty="0"/>
+              <a:t>コーディングエージェントはローカル情報に最も効率よくアクセスできる</a:t>
             </a:r>
           </a:p>
           <a:p>
             <a:pPr lvl="1"/>
             <a:r>
-              <a:rPr kumimoji="1" lang="ja-JP" altLang="en-US" sz="1800" dirty="0"/>
-              <a:t>「</a:t>
-            </a:r>
-            <a:r>
-              <a:rPr lang="ja-JP" altLang="en-US" sz="1800" dirty="0"/>
-              <a:t>作業の進め方」「成果物の作り方」</a:t>
-            </a:r>
-            <a:r>
-              <a:rPr kumimoji="1" lang="ja-JP" altLang="en-US" sz="1800" dirty="0"/>
-              <a:t>を設計した</a:t>
-            </a:r>
-            <a:endParaRPr kumimoji="1" lang="en-US" altLang="ja-JP" sz="1800" dirty="0"/>
+              <a:rPr kumimoji="1" lang="ja-JP" altLang="en-US" sz="1600" dirty="0"/>
+              <a:t>Wiki を読んで既存仕様との整合性チェックができる</a:t>
+            </a:r>
           </a:p>
           <a:p>
             <a:pPr lvl="1"/>
             <a:r>
-              <a:rPr lang="ja-JP" altLang="en-US" sz="1800" dirty="0"/>
-              <a:t>作り方を作る</a:t>
-            </a:r>
-          </a:p>
-          <a:p>
-            <a:r>
-              <a:rPr kumimoji="1" lang="ja-JP" altLang="en-US" sz="1800" b="1" dirty="0"/>
-              <a:t>事例2: AIレビューワークフロー</a:t>
+              <a:rPr kumimoji="1" lang="ja-JP" altLang="en-US" sz="1600" dirty="0"/>
+              <a:t>Git 管理にすれば GitHub Actions に組み込める</a:t>
+            </a:r>
+            <a:endParaRPr kumimoji="1" lang="en-US" altLang="ja-JP" sz="1600" dirty="0"/>
+          </a:p>
+          <a:p>
+            <a:pPr marL="257173" lvl="1" indent="0">
+              <a:buNone/>
+            </a:pPr>
+            <a:endParaRPr kumimoji="1" lang="ja-JP" altLang="en-US" sz="1600" dirty="0"/>
+          </a:p>
+          <a:p>
+            <a:r>
+              <a:rPr lang="ja-JP" altLang="en-US" b="1" dirty="0"/>
+              <a:t>結果</a:t>
             </a:r>
           </a:p>
           <a:p>
             <a:pPr lvl="1"/>
             <a:r>
-              <a:rPr kumimoji="1" lang="ja-JP" altLang="en-US" sz="1800" dirty="0"/>
-              <a:t>Claude Code スキル/エージェント </a:t>
-            </a:r>
-            <a:r>
-              <a:rPr lang="ja-JP" altLang="en-US" sz="1800" dirty="0"/>
-              <a:t>↔</a:t>
-            </a:r>
-            <a:r>
-              <a:rPr kumimoji="1" lang="ja-JP" altLang="en-US" sz="1800" dirty="0"/>
-              <a:t>構造化レビュー ↔GitHub PR</a:t>
+              <a:rPr lang="ja-JP" altLang="en-US" sz="1600" dirty="0"/>
+              <a:t>仕様ドキュメントを Git 管理（ 193 ファイルの移行が約３人日</a:t>
+            </a:r>
+            <a:r>
+              <a:rPr lang="ja-JP" altLang="en-US" sz="1200" dirty="0"/>
+              <a:t>（片手間）</a:t>
+            </a:r>
+            <a:r>
+              <a:rPr lang="ja-JP" altLang="en-US" sz="1600" dirty="0"/>
+              <a:t>で完了）</a:t>
             </a:r>
           </a:p>
           <a:p>
             <a:pPr lvl="1"/>
             <a:r>
-              <a:rPr kumimoji="1" lang="ja-JP" altLang="en-US" sz="1600" dirty="0"/>
-              <a:t>「人間・</a:t>
-            </a:r>
-            <a:r>
-              <a:rPr kumimoji="1" lang="en-US" altLang="ja-JP" sz="1600" dirty="0"/>
-              <a:t>AI</a:t>
-            </a:r>
-            <a:r>
-              <a:rPr kumimoji="1" lang="ja-JP" altLang="en-US" sz="1600" dirty="0"/>
-              <a:t>・ツールの役割分担」「判断力を持続可能にする仕組み」を設計した</a:t>
-            </a:r>
-            <a:endParaRPr kumimoji="1" lang="en-US" altLang="ja-JP" sz="1600" dirty="0"/>
+              <a:rPr lang="ja-JP" altLang="en-US" sz="1600" b="1" dirty="0"/>
+              <a:t>仕様をコードから AI で生成 → 過程でバグも発見</a:t>
+            </a:r>
+            <a:r>
+              <a:rPr lang="ja-JP" altLang="en-US" sz="1600" dirty="0"/>
+              <a:t>（SSOT の恩恵）</a:t>
+            </a:r>
           </a:p>
           <a:p>
             <a:pPr lvl="1"/>
             <a:r>
-              <a:rPr kumimoji="1" lang="ja-JP" altLang="en-US" sz="1600" dirty="0"/>
-              <a:t>育て方を作る</a:t>
-            </a:r>
-            <a:endParaRPr kumimoji="1" lang="en-US" altLang="ja-JP" sz="1600" dirty="0"/>
-          </a:p>
-          <a:p>
-            <a:pPr lvl="1"/>
-            <a:endParaRPr lang="ja-JP" altLang="en-US" dirty="0"/>
-          </a:p>
-          <a:p>
-            <a:r>
-              <a:rPr kumimoji="1" lang="ja-JP" altLang="en-US" sz="2000" b="1" dirty="0"/>
-              <a:t>共通パターン:</a:t>
-            </a:r>
-          </a:p>
-          <a:p>
-            <a:pPr lvl="1"/>
-            <a:r>
-              <a:rPr kumimoji="1" lang="ja-JP" altLang="en-US" sz="2000" dirty="0"/>
-              <a:t>人間</a:t>
-            </a:r>
-            <a:r>
-              <a:rPr lang="ja-JP" altLang="en-US" sz="2000" dirty="0"/>
-              <a:t>🧑‍💻</a:t>
-            </a:r>
-            <a:r>
-              <a:rPr kumimoji="1" lang="ja-JP" altLang="en-US" sz="2000" dirty="0"/>
-              <a:t>が判断の枠組みを作り、AI</a:t>
-            </a:r>
-            <a:r>
-              <a:rPr lang="ja-JP" altLang="en-US" sz="2000" dirty="0"/>
-              <a:t>🤖</a:t>
-            </a:r>
-            <a:r>
-              <a:rPr kumimoji="1" lang="ja-JP" altLang="en-US" sz="2000" dirty="0"/>
-              <a:t>が演算を担う</a:t>
-            </a:r>
+              <a:rPr lang="ja-JP" altLang="en-US" sz="1600" dirty="0"/>
+              <a:t>コミット履歴で貢献が見える（</a:t>
+            </a:r>
+            <a:r>
+              <a:rPr lang="ja-JP" altLang="en-US" sz="1600" b="1" dirty="0"/>
+              <a:t>小さなことに感謝する</a:t>
+            </a:r>
+            <a:r>
+              <a:rPr lang="ja-JP" altLang="en-US" sz="1600" dirty="0"/>
+              <a:t>）</a:t>
+            </a:r>
+            <a:endParaRPr lang="en-US" altLang="ja-JP" sz="1600" dirty="0"/>
           </a:p>
         </p:txBody>
       </p:sp>
@@ -8613,7 +12700,7 @@
           <a:p>
             <a:r>
               <a:rPr kumimoji="1" lang="ja-JP" altLang="en-US" dirty="0"/>
-              <a:t>今日話す2つの仕組み</a:t>
+              <a:t>何をしたかったか？</a:t>
             </a:r>
           </a:p>
         </p:txBody>
@@ -8626,80 +12713,7 @@
 </p:sld>
 </file>
 
-<file path=ppt/slides/slide6.xml><?xml version="1.0" encoding="utf-8"?>
-<p:sld xmlns:a="http://schemas.openxmlformats.org/drawingml/2006/main" xmlns:r="http://schemas.openxmlformats.org/officeDocument/2006/relationships" xmlns:p="http://schemas.openxmlformats.org/presentationml/2006/main">
-  <p:cSld>
-    <p:spTree>
-      <p:nvGrpSpPr>
-        <p:cNvPr id="1" name=""/>
-        <p:cNvGrpSpPr/>
-        <p:nvPr/>
-      </p:nvGrpSpPr>
-      <p:grpSpPr>
-        <a:xfrm>
-          <a:off x="0" y="0"/>
-          <a:ext cx="0" cy="0"/>
-          <a:chOff x="0" y="0"/>
-          <a:chExt cx="0" cy="0"/>
-        </a:xfrm>
-      </p:grpSpPr>
-      <p:sp>
-        <p:nvSpPr>
-          <p:cNvPr id="2" name="タイトル 1"/>
-          <p:cNvSpPr>
-            <a:spLocks noGrp="1"/>
-          </p:cNvSpPr>
-          <p:nvPr>
-            <p:ph type="ctrTitle"/>
-          </p:nvPr>
-        </p:nvSpPr>
-        <p:spPr/>
-        <p:txBody>
-          <a:bodyPr>
-            <a:normAutofit fontScale="90000"/>
-          </a:bodyPr>
-          <a:lstStyle/>
-          <a:p>
-            <a:r>
-              <a:rPr kumimoji="1" lang="ja-JP" altLang="en-US" sz="2600" dirty="0"/>
-              <a:t>事例1 ドキュメントパイプライン</a:t>
-            </a:r>
-          </a:p>
-        </p:txBody>
-      </p:sp>
-      <p:sp>
-        <p:nvSpPr>
-          <p:cNvPr id="3" name="字幕 2"/>
-          <p:cNvSpPr>
-            <a:spLocks noGrp="1"/>
-          </p:cNvSpPr>
-          <p:nvPr>
-            <p:ph type="subTitle" idx="1"/>
-          </p:nvPr>
-        </p:nvSpPr>
-        <p:spPr/>
-        <p:txBody>
-          <a:bodyPr>
-            <a:normAutofit/>
-          </a:bodyPr>
-          <a:lstStyle/>
-          <a:p>
-            <a:r>
-              <a:rPr kumimoji="1" lang="ja-JP" altLang="en-US" sz="1300" dirty="0"/>
-              <a:t>「作り方を作る」</a:t>
-            </a:r>
-          </a:p>
-        </p:txBody>
-      </p:sp>
-    </p:spTree>
-  </p:cSld>
-  <p:clrMapOvr>
-    <a:masterClrMapping/>
-  </p:clrMapOvr>
-</p:sld>
-</file>
-
-<file path=ppt/slides/slide7.xml><?xml version="1.0" encoding="utf-8"?>
+<file path=ppt/slides/slide5.xml><?xml version="1.0" encoding="utf-8"?>
 <p:sld xmlns:a="http://schemas.openxmlformats.org/drawingml/2006/main" xmlns:r="http://schemas.openxmlformats.org/officeDocument/2006/relationships" xmlns:p="http://schemas.openxmlformats.org/presentationml/2006/main">
   <p:cSld>
     <p:spTree>
@@ -8842,7 +12856,7 @@
 </p:sld>
 </file>
 
-<file path=ppt/slides/slide8.xml><?xml version="1.0" encoding="utf-8"?>
+<file path=ppt/slides/slide6.xml><?xml version="1.0" encoding="utf-8"?>
 <p:sld xmlns:a="http://schemas.openxmlformats.org/drawingml/2006/main" xmlns:r="http://schemas.openxmlformats.org/officeDocument/2006/relationships" xmlns:p="http://schemas.openxmlformats.org/presentationml/2006/main">
   <p:cSld>
     <p:spTree>
@@ -8974,7 +12988,7 @@
 </p:sld>
 </file>
 
-<file path=ppt/slides/slide9.xml><?xml version="1.0" encoding="utf-8"?>
+<file path=ppt/slides/slide7.xml><?xml version="1.0" encoding="utf-8"?>
 <p:sld xmlns:a="http://schemas.openxmlformats.org/drawingml/2006/main" xmlns:r="http://schemas.openxmlformats.org/officeDocument/2006/relationships" xmlns:p="http://schemas.openxmlformats.org/presentationml/2006/main">
   <p:cSld>
     <p:spTree>
@@ -8982,7 +12996,7 @@
         <p:cNvPr id="1" name="">
           <a:extLst>
             <a:ext uri="{FF2B5EF4-FFF2-40B4-BE49-F238E27FC236}">
-              <a16:creationId xmlns:a16="http://schemas.microsoft.com/office/drawing/2014/main" id="{248FE18A-DEB4-C334-3883-E6996D25700A}"/>
+              <a16:creationId xmlns:a16="http://schemas.microsoft.com/office/drawing/2014/main" id="{78B77477-9C47-4C23-E886-9CA14EF63BC3}"/>
             </a:ext>
           </a:extLst>
         </p:cNvPr>
@@ -9002,7 +13016,7 @@
           <p:cNvPr id="2" name="コンテンツ プレースホルダー 1">
             <a:extLst>
               <a:ext uri="{FF2B5EF4-FFF2-40B4-BE49-F238E27FC236}">
-                <a16:creationId xmlns:a16="http://schemas.microsoft.com/office/drawing/2014/main" id="{8EB74BD0-AFE3-3A9C-7489-3AF59C2E08E8}"/>
+                <a16:creationId xmlns:a16="http://schemas.microsoft.com/office/drawing/2014/main" id="{87F4FFFA-717C-2077-443C-0E519FF16935}"/>
               </a:ext>
             </a:extLst>
           </p:cNvPr>
@@ -9052,12 +13066,8 @@
               <a:rPr kumimoji="1" lang="en-US" altLang="ja-JP" sz="1800" dirty="0"/>
             </a:br>
             <a:r>
-              <a:rPr lang="ja-JP" altLang="en-US" sz="1800" dirty="0"/>
-              <a:t>🧑‍💻</a:t>
-            </a:r>
-            <a:r>
               <a:rPr kumimoji="1" lang="ja-JP" altLang="en-US" sz="1800" dirty="0"/>
-              <a:t>判断 → selfhost ランナー</a:t>
+              <a:t>→ selfhost ランナー</a:t>
             </a:r>
           </a:p>
           <a:p>
@@ -9070,12 +13080,8 @@
               <a:rPr kumimoji="1" lang="en-US" altLang="ja-JP" sz="1800" dirty="0"/>
             </a:br>
             <a:r>
-              <a:rPr lang="ja-JP" altLang="en-US" sz="1800" dirty="0"/>
-              <a:t>🧑‍💻</a:t>
-            </a:r>
-            <a:r>
               <a:rPr kumimoji="1" lang="ja-JP" altLang="en-US" sz="1800" dirty="0"/>
-              <a:t>判断 → Azure Blob ストレージに保存してリンクを張る</a:t>
+              <a:t>→ Azure Blob ストレージに保存してリンクを張る</a:t>
             </a:r>
           </a:p>
           <a:p>
@@ -9088,12 +13094,8 @@
               <a:rPr kumimoji="1" lang="en-US" altLang="ja-JP" sz="1800" dirty="0"/>
             </a:br>
             <a:r>
-              <a:rPr lang="ja-JP" altLang="en-US" sz="1800" dirty="0"/>
-              <a:t>🧑‍💻</a:t>
-            </a:r>
-            <a:r>
               <a:rPr kumimoji="1" lang="ja-JP" altLang="en-US" sz="1800" dirty="0"/>
-              <a:t>判断 → CLI スクリプト + ショートカットで実行</a:t>
+              <a:t>→ CLI スクリプト + ショートカットで実行</a:t>
             </a:r>
             <a:endParaRPr kumimoji="1" lang="en-US" altLang="ja-JP" sz="1800" dirty="0"/>
           </a:p>
@@ -9116,7 +13118,7 @@
             </a:br>
             <a:r>
               <a:rPr lang="ja-JP" altLang="en-US" sz="1800" dirty="0"/>
-              <a:t>🧑‍💻判断 → </a:t>
+              <a:t>→ </a:t>
             </a:r>
             <a:r>
               <a:rPr lang="en-US" altLang="ja-JP" sz="1800" dirty="0" err="1"/>
@@ -9140,7 +13142,7 @@
             </a:pPr>
             <a:r>
               <a:rPr lang="ja-JP" altLang="en-US" sz="1800" dirty="0"/>
-              <a:t>決めてしまえば、</a:t>
+              <a:t>仕組みを決めてしまえば、</a:t>
             </a:r>
             <a:r>
               <a:rPr lang="en-US" altLang="ja-JP" sz="1800" dirty="0"/>
@@ -9150,17 +13152,6 @@
               <a:rPr lang="ja-JP" altLang="en-US" sz="1800" dirty="0"/>
               <a:t>🤖がサクッと実装してくれる</a:t>
             </a:r>
-            <a:r>
-              <a:rPr lang="en-US" altLang="ja-JP" sz="1800" dirty="0"/>
-              <a:t>(</a:t>
-            </a:r>
-            <a:r>
-              <a:rPr lang="ja-JP" altLang="en-US" sz="1800" dirty="0"/>
-              <a:t>演算）</a:t>
-            </a:r>
-            <a:br>
-              <a:rPr lang="en-US" altLang="ja-JP" sz="1600" dirty="0"/>
-            </a:br>
             <a:endParaRPr kumimoji="1" lang="en-US" altLang="ja-JP" sz="1600" dirty="0"/>
           </a:p>
         </p:txBody>
@@ -9170,7 +13161,7 @@
           <p:cNvPr id="3" name="タイトル 2">
             <a:extLst>
               <a:ext uri="{FF2B5EF4-FFF2-40B4-BE49-F238E27FC236}">
-                <a16:creationId xmlns:a16="http://schemas.microsoft.com/office/drawing/2014/main" id="{7AE0AA9F-A870-D717-1DDA-AB8A15A43A44}"/>
+                <a16:creationId xmlns:a16="http://schemas.microsoft.com/office/drawing/2014/main" id="{28FCC6D1-762E-B32E-373A-7A37977C83DE}"/>
               </a:ext>
             </a:extLst>
           </p:cNvPr>
@@ -9196,9 +13187,639 @@
     </p:spTree>
     <p:extLst>
       <p:ext uri="{BB962C8B-B14F-4D97-AF65-F5344CB8AC3E}">
-        <p14:creationId xmlns:p14="http://schemas.microsoft.com/office/powerpoint/2010/main" val="207118078"/>
+        <p14:creationId xmlns:p14="http://schemas.microsoft.com/office/powerpoint/2010/main" val="204249703"/>
       </p:ext>
     </p:extLst>
+  </p:cSld>
+  <p:clrMapOvr>
+    <a:masterClrMapping/>
+  </p:clrMapOvr>
+</p:sld>
+</file>
+
+<file path=ppt/slides/slide8.xml><?xml version="1.0" encoding="utf-8"?>
+<p:sld xmlns:a="http://schemas.openxmlformats.org/drawingml/2006/main" xmlns:r="http://schemas.openxmlformats.org/officeDocument/2006/relationships" xmlns:p="http://schemas.openxmlformats.org/presentationml/2006/main">
+  <p:cSld>
+    <p:spTree>
+      <p:nvGrpSpPr>
+        <p:cNvPr id="1" name=""/>
+        <p:cNvGrpSpPr/>
+        <p:nvPr/>
+      </p:nvGrpSpPr>
+      <p:grpSpPr>
+        <a:xfrm>
+          <a:off x="0" y="0"/>
+          <a:ext cx="0" cy="0"/>
+          <a:chOff x="0" y="0"/>
+          <a:chExt cx="0" cy="0"/>
+        </a:xfrm>
+      </p:grpSpPr>
+      <p:sp>
+        <p:nvSpPr>
+          <p:cNvPr id="2" name="コンテンツ プレースホルダー 1"/>
+          <p:cNvSpPr>
+            <a:spLocks noGrp="1"/>
+          </p:cNvSpPr>
+          <p:nvPr>
+            <p:ph idx="1"/>
+          </p:nvPr>
+        </p:nvSpPr>
+        <p:spPr>
+          <a:xfrm>
+            <a:off x="308484" y="1282426"/>
+            <a:ext cx="8892666" cy="5371113"/>
+          </a:xfrm>
+        </p:spPr>
+        <p:txBody>
+          <a:bodyPr>
+            <a:normAutofit/>
+          </a:bodyPr>
+          <a:lstStyle/>
+          <a:p>
+            <a:pPr lvl="1"/>
+            <a:r>
+              <a:rPr lang="ja-JP" altLang="en-US" sz="2000" dirty="0"/>
+              <a:t>人間は</a:t>
+            </a:r>
+            <a:r>
+              <a:rPr lang="ja-JP" altLang="en-US" sz="2000" b="1" dirty="0"/>
+              <a:t>チームの作業フローを設計</a:t>
+            </a:r>
+            <a:r>
+              <a:rPr lang="ja-JP" altLang="en-US" sz="2000" dirty="0"/>
+              <a:t>する</a:t>
+            </a:r>
+            <a:endParaRPr lang="en-US" altLang="ja-JP" sz="2000" dirty="0"/>
+          </a:p>
+          <a:p>
+            <a:pPr lvl="2"/>
+            <a:r>
+              <a:rPr lang="en-US" altLang="ja-JP" sz="2000" dirty="0" err="1"/>
+              <a:t>Growi</a:t>
+            </a:r>
+            <a:r>
+              <a:rPr lang="ja-JP" altLang="en-US" sz="2000" dirty="0"/>
+              <a:t>からの取り込みや、</a:t>
+            </a:r>
+            <a:r>
+              <a:rPr lang="en-US" altLang="ja-JP" sz="2000" dirty="0" err="1"/>
+              <a:t>Growi</a:t>
+            </a:r>
+            <a:r>
+              <a:rPr lang="ja-JP" altLang="en-US" sz="2000" dirty="0"/>
+              <a:t>への反映は</a:t>
+            </a:r>
+            <a:br>
+              <a:rPr lang="en-US" altLang="ja-JP" sz="2000" dirty="0"/>
+            </a:br>
+            <a:r>
+              <a:rPr lang="ja-JP" altLang="en-US" sz="2000" b="1" dirty="0"/>
+              <a:t>決定性が高い操作</a:t>
+            </a:r>
+            <a:r>
+              <a:rPr lang="ja-JP" altLang="en-US" sz="2000" dirty="0"/>
+              <a:t>なので、</a:t>
+            </a:r>
+            <a:r>
+              <a:rPr lang="en-US" altLang="ja-JP" sz="2000" dirty="0"/>
+              <a:t>AI</a:t>
+            </a:r>
+            <a:r>
+              <a:rPr lang="ja-JP" altLang="en-US" sz="2000" dirty="0"/>
+              <a:t>より</a:t>
+            </a:r>
+            <a:r>
+              <a:rPr lang="ja-JP" altLang="en-US" sz="2000" b="1" dirty="0"/>
+              <a:t>ツール</a:t>
+            </a:r>
+            <a:r>
+              <a:rPr lang="ja-JP" altLang="en-US" sz="2000" dirty="0"/>
+              <a:t>🛠️にする</a:t>
+            </a:r>
+            <a:br>
+              <a:rPr lang="en-US" altLang="ja-JP" sz="2000" dirty="0"/>
+            </a:br>
+            <a:r>
+              <a:rPr lang="en-US" altLang="ja-JP" sz="1600" dirty="0"/>
+              <a:t>※</a:t>
+            </a:r>
+            <a:r>
+              <a:rPr lang="ja-JP" altLang="en-US" sz="1600" dirty="0"/>
+              <a:t>決定性が高い操作は</a:t>
+            </a:r>
+            <a:r>
+              <a:rPr lang="en-US" altLang="ja-JP" sz="1600" dirty="0"/>
+              <a:t>AI</a:t>
+            </a:r>
+            <a:r>
+              <a:rPr lang="ja-JP" altLang="en-US" sz="1600" dirty="0"/>
+              <a:t>にやらせると非効率</a:t>
+            </a:r>
+            <a:endParaRPr lang="en-US" altLang="ja-JP" sz="2000" dirty="0"/>
+          </a:p>
+          <a:p>
+            <a:pPr lvl="1"/>
+            <a:r>
+              <a:rPr lang="ja-JP" altLang="en-US" sz="2000" dirty="0"/>
+              <a:t>人間はフローに必要なツールの</a:t>
+            </a:r>
+            <a:r>
+              <a:rPr lang="ja-JP" altLang="en-US" sz="2000" b="1" dirty="0"/>
+              <a:t>設計</a:t>
+            </a:r>
+            <a:r>
+              <a:rPr lang="ja-JP" altLang="en-US" sz="2000" dirty="0"/>
+              <a:t>🧑‍💻をする</a:t>
+            </a:r>
+            <a:endParaRPr lang="en-US" altLang="ja-JP" sz="1600" dirty="0"/>
+          </a:p>
+          <a:p>
+            <a:pPr marL="257173" lvl="1" indent="0" algn="ctr">
+              <a:buNone/>
+            </a:pPr>
+            <a:endParaRPr lang="en-US" altLang="ja-JP" sz="1600" dirty="0"/>
+          </a:p>
+          <a:p>
+            <a:pPr marL="257173" lvl="1" indent="0">
+              <a:buNone/>
+            </a:pPr>
+            <a:r>
+              <a:rPr lang="ja-JP" altLang="en-US" sz="2000" dirty="0"/>
+              <a:t>　　</a:t>
+            </a:r>
+            <a:r>
+              <a:rPr lang="ja-JP" altLang="en-US" sz="2600" dirty="0"/>
+              <a:t>設計🧑‍💻　　　　   設計🧑‍💻　　     　　   　設計🧑‍💻</a:t>
+            </a:r>
+            <a:br>
+              <a:rPr lang="en-US" altLang="ja-JP" sz="2600" dirty="0"/>
+            </a:br>
+            <a:r>
+              <a:rPr lang="ja-JP" altLang="en-US" sz="2000" dirty="0"/>
+              <a:t>　　 ↓ 作業</a:t>
+            </a:r>
+            <a:r>
+              <a:rPr lang="ja-JP" altLang="en-US" sz="1700" b="1" dirty="0">
+                <a:solidFill>
+                  <a:srgbClr val="FDD000"/>
+                </a:solidFill>
+              </a:rPr>
+              <a:t>フロー</a:t>
+            </a:r>
+            <a:r>
+              <a:rPr lang="ja-JP" altLang="en-US" sz="1700" dirty="0"/>
+              <a:t>を</a:t>
+            </a:r>
+            <a:r>
+              <a:rPr lang="ja-JP" altLang="en-US" sz="1800" dirty="0"/>
+              <a:t>設計</a:t>
+            </a:r>
+            <a:r>
+              <a:rPr lang="ja-JP" altLang="en-US" sz="1700" dirty="0"/>
+              <a:t>　</a:t>
+            </a:r>
+            <a:r>
+              <a:rPr lang="ja-JP" altLang="en-US" sz="2000" dirty="0"/>
+              <a:t>    ↓　　　　　　　　   　　       ↓</a:t>
+            </a:r>
+            <a:endParaRPr lang="en-US" altLang="ja-JP" sz="2000" dirty="0"/>
+          </a:p>
+          <a:p>
+            <a:pPr marL="257173" lvl="1" indent="0">
+              <a:buNone/>
+            </a:pPr>
+            <a:r>
+              <a:rPr lang="ja-JP" altLang="en-US" sz="2000" dirty="0"/>
+              <a:t>　　 ↓　　　　　　            ↓</a:t>
+            </a:r>
+            <a:r>
+              <a:rPr lang="ja-JP" altLang="en-US" sz="1400" dirty="0"/>
+              <a:t>ツールを作成</a:t>
+            </a:r>
+            <a:r>
+              <a:rPr lang="ja-JP" altLang="en-US" sz="1800" dirty="0"/>
+              <a:t>🤖</a:t>
+            </a:r>
+            <a:r>
+              <a:rPr lang="ja-JP" altLang="en-US" sz="1200" dirty="0"/>
+              <a:t>　　　　　　　　</a:t>
+            </a:r>
+            <a:r>
+              <a:rPr lang="ja-JP" altLang="en-US" sz="1900" dirty="0"/>
+              <a:t>          ↓</a:t>
+            </a:r>
+            <a:r>
+              <a:rPr lang="ja-JP" altLang="en-US" sz="1300" dirty="0"/>
+              <a:t>ツールを作成</a:t>
+            </a:r>
+            <a:r>
+              <a:rPr lang="ja-JP" altLang="en-US" sz="1700" dirty="0"/>
+              <a:t>🤖</a:t>
+            </a:r>
+            <a:endParaRPr lang="en-US" altLang="ja-JP" sz="2000" dirty="0"/>
+          </a:p>
+          <a:p>
+            <a:pPr marL="257173" lvl="1" indent="0">
+              <a:buNone/>
+            </a:pPr>
+            <a:r>
+              <a:rPr lang="ja-JP" altLang="en-US" sz="2000" dirty="0"/>
+              <a:t> 　</a:t>
+            </a:r>
+            <a:r>
+              <a:rPr lang="ja-JP" altLang="en-US" sz="2400" dirty="0"/>
+              <a:t>🧑‍💻</a:t>
+            </a:r>
+            <a:r>
+              <a:rPr lang="ja-JP" altLang="en-US" sz="1600" dirty="0"/>
+              <a:t>このページを取込みたい→ 取り込み🛠️→</a:t>
+            </a:r>
+            <a:r>
+              <a:rPr lang="ja-JP" altLang="en-US" sz="2400" dirty="0"/>
+              <a:t>🧑‍💻</a:t>
+            </a:r>
+            <a:r>
+              <a:rPr lang="ja-JP" altLang="en-US" sz="1600" dirty="0"/>
+              <a:t>変更してプッシュ →</a:t>
+            </a:r>
+            <a:r>
+              <a:rPr lang="en-US" altLang="ja-JP" sz="1600" dirty="0" err="1"/>
+              <a:t>Growi</a:t>
+            </a:r>
+            <a:r>
+              <a:rPr lang="ja-JP" altLang="en-US" sz="1600" dirty="0"/>
+              <a:t>同期🛠️</a:t>
+            </a:r>
+            <a:endParaRPr kumimoji="1" lang="en-US" altLang="ja-JP" sz="1600" dirty="0"/>
+          </a:p>
+        </p:txBody>
+      </p:sp>
+      <p:sp>
+        <p:nvSpPr>
+          <p:cNvPr id="3" name="タイトル 2"/>
+          <p:cNvSpPr>
+            <a:spLocks noGrp="1"/>
+          </p:cNvSpPr>
+          <p:nvPr>
+            <p:ph type="title"/>
+          </p:nvPr>
+        </p:nvSpPr>
+        <p:spPr/>
+        <p:txBody>
+          <a:bodyPr>
+            <a:normAutofit/>
+          </a:bodyPr>
+          <a:lstStyle/>
+          <a:p>
+            <a:r>
+              <a:rPr lang="ja-JP" altLang="en-US" dirty="0"/>
+              <a:t>作り方を作る　</a:t>
+            </a:r>
+            <a:r>
+              <a:rPr lang="ja-JP" altLang="en-US" sz="2000" dirty="0"/>
+              <a:t>エンジニアリング エンジニアリング</a:t>
+            </a:r>
+            <a:endParaRPr lang="ja-JP" altLang="en-US" dirty="0"/>
+          </a:p>
+        </p:txBody>
+      </p:sp>
+      <p:sp>
+        <p:nvSpPr>
+          <p:cNvPr id="4" name="四角形: 角を丸くする 3">
+            <a:extLst>
+              <a:ext uri="{FF2B5EF4-FFF2-40B4-BE49-F238E27FC236}">
+                <a16:creationId xmlns:a16="http://schemas.microsoft.com/office/drawing/2014/main" id="{CBE5C731-1148-FC00-2B0A-B52D1A379F98}"/>
+              </a:ext>
+            </a:extLst>
+          </p:cNvPr>
+          <p:cNvSpPr/>
+          <p:nvPr/>
+        </p:nvSpPr>
+        <p:spPr>
+          <a:xfrm>
+            <a:off x="596516" y="3933056"/>
+            <a:ext cx="8604956" cy="2340260"/>
+          </a:xfrm>
+          <a:prstGeom prst="roundRect">
+            <a:avLst/>
+          </a:prstGeom>
+          <a:noFill/>
+          <a:ln w="19050" cap="flat" cmpd="sng" algn="ctr">
+            <a:solidFill>
+              <a:srgbClr val="D9D9D9"/>
+            </a:solidFill>
+            <a:prstDash val="solid"/>
+            <a:round/>
+            <a:headEnd type="none" w="med" len="med"/>
+            <a:tailEnd type="none" w="med" len="med"/>
+          </a:ln>
+        </p:spPr>
+        <p:style>
+          <a:lnRef idx="0">
+            <a:scrgbClr r="0" g="0" b="0"/>
+          </a:lnRef>
+          <a:fillRef idx="0">
+            <a:scrgbClr r="0" g="0" b="0"/>
+          </a:fillRef>
+          <a:effectRef idx="0">
+            <a:scrgbClr r="0" g="0" b="0"/>
+          </a:effectRef>
+          <a:fontRef idx="minor">
+            <a:schemeClr val="accent1"/>
+          </a:fontRef>
+        </p:style>
+        <p:txBody>
+          <a:bodyPr rtlCol="0" anchor="ctr"/>
+          <a:lstStyle/>
+          <a:p>
+            <a:pPr algn="ctr"/>
+            <a:endParaRPr kumimoji="1" lang="ja-JP" altLang="en-US"/>
+          </a:p>
+        </p:txBody>
+      </p:sp>
+      <p:sp>
+        <p:nvSpPr>
+          <p:cNvPr id="5" name="四角形: 角を丸くする 4">
+            <a:extLst>
+              <a:ext uri="{FF2B5EF4-FFF2-40B4-BE49-F238E27FC236}">
+                <a16:creationId xmlns:a16="http://schemas.microsoft.com/office/drawing/2014/main" id="{BAEF935F-3859-1001-6E13-67C04C0B9ABD}"/>
+              </a:ext>
+            </a:extLst>
+          </p:cNvPr>
+          <p:cNvSpPr/>
+          <p:nvPr/>
+        </p:nvSpPr>
+        <p:spPr>
+          <a:xfrm>
+            <a:off x="748916" y="5373216"/>
+            <a:ext cx="8128520" cy="540060"/>
+          </a:xfrm>
+          <a:prstGeom prst="roundRect">
+            <a:avLst/>
+          </a:prstGeom>
+          <a:noFill/>
+          <a:ln w="19050" cap="flat" cmpd="sng" algn="ctr">
+            <a:solidFill>
+              <a:srgbClr val="FDD000"/>
+            </a:solidFill>
+            <a:prstDash val="solid"/>
+            <a:round/>
+            <a:headEnd type="none" w="med" len="med"/>
+            <a:tailEnd type="none" w="med" len="med"/>
+          </a:ln>
+        </p:spPr>
+        <p:style>
+          <a:lnRef idx="0">
+            <a:scrgbClr r="0" g="0" b="0"/>
+          </a:lnRef>
+          <a:fillRef idx="0">
+            <a:scrgbClr r="0" g="0" b="0"/>
+          </a:fillRef>
+          <a:effectRef idx="0">
+            <a:scrgbClr r="0" g="0" b="0"/>
+          </a:effectRef>
+          <a:fontRef idx="minor">
+            <a:schemeClr val="accent1"/>
+          </a:fontRef>
+        </p:style>
+        <p:txBody>
+          <a:bodyPr rtlCol="0" anchor="ctr"/>
+          <a:lstStyle/>
+          <a:p>
+            <a:pPr algn="ctr"/>
+            <a:endParaRPr kumimoji="1" lang="ja-JP" altLang="en-US"/>
+          </a:p>
+        </p:txBody>
+      </p:sp>
+      <p:sp>
+        <p:nvSpPr>
+          <p:cNvPr id="7" name="テキスト ボックス 6">
+            <a:extLst>
+              <a:ext uri="{FF2B5EF4-FFF2-40B4-BE49-F238E27FC236}">
+                <a16:creationId xmlns:a16="http://schemas.microsoft.com/office/drawing/2014/main" id="{3820ED7B-9C27-7360-4C2E-06C96C63070C}"/>
+              </a:ext>
+            </a:extLst>
+          </p:cNvPr>
+          <p:cNvSpPr txBox="1"/>
+          <p:nvPr/>
+        </p:nvSpPr>
+        <p:spPr>
+          <a:xfrm>
+            <a:off x="888740" y="6392219"/>
+            <a:ext cx="8128520" cy="369332"/>
+          </a:xfrm>
+          <a:prstGeom prst="rect">
+            <a:avLst/>
+          </a:prstGeom>
+          <a:solidFill>
+            <a:srgbClr val="FDD000"/>
+          </a:solidFill>
+        </p:spPr>
+        <p:txBody>
+          <a:bodyPr wrap="square">
+            <a:spAutoFit/>
+          </a:bodyPr>
+          <a:lstStyle/>
+          <a:p>
+            <a:pPr marL="257173" lvl="1" indent="0">
+              <a:buNone/>
+            </a:pPr>
+            <a:r>
+              <a:rPr lang="ja-JP" altLang="en-US" sz="1800" dirty="0"/>
+              <a:t>↑</a:t>
+            </a:r>
+            <a:r>
+              <a:rPr lang="ja-JP" altLang="en-US" dirty="0"/>
+              <a:t>課題</a:t>
+            </a:r>
+            <a:r>
+              <a:rPr lang="ja-JP" altLang="en-US" sz="1800" dirty="0"/>
+              <a:t>や制約をもとに仕組みを設計する過程＝</a:t>
+            </a:r>
+            <a:r>
+              <a:rPr lang="ja-JP" altLang="en-US" sz="1800" b="1" dirty="0"/>
+              <a:t>エンジニアリング</a:t>
+            </a:r>
+            <a:r>
+              <a:rPr lang="ja-JP" altLang="en-US" sz="1800" dirty="0"/>
+              <a:t>そのもの</a:t>
+            </a:r>
+          </a:p>
+        </p:txBody>
+      </p:sp>
+    </p:spTree>
+  </p:cSld>
+  <p:clrMapOvr>
+    <a:masterClrMapping/>
+  </p:clrMapOvr>
+  <p:timing>
+    <p:tnLst>
+      <p:par>
+        <p:cTn id="1" dur="indefinite" restart="never" nodeType="tmRoot">
+          <p:childTnLst>
+            <p:seq concurrent="1" nextAc="seek">
+              <p:cTn id="2" dur="indefinite" nodeType="mainSeq">
+                <p:childTnLst>
+                  <p:par>
+                    <p:cTn id="3" fill="hold">
+                      <p:stCondLst>
+                        <p:cond delay="indefinite"/>
+                      </p:stCondLst>
+                      <p:childTnLst>
+                        <p:par>
+                          <p:cTn id="4" fill="hold">
+                            <p:stCondLst>
+                              <p:cond delay="0"/>
+                            </p:stCondLst>
+                            <p:childTnLst>
+                              <p:par>
+                                <p:cTn id="5" presetID="10" presetClass="entr" presetSubtype="0" fill="hold" grpId="0" nodeType="clickEffect">
+                                  <p:stCondLst>
+                                    <p:cond delay="0"/>
+                                  </p:stCondLst>
+                                  <p:childTnLst>
+                                    <p:set>
+                                      <p:cBhvr>
+                                        <p:cTn id="6" dur="1" fill="hold">
+                                          <p:stCondLst>
+                                            <p:cond delay="0"/>
+                                          </p:stCondLst>
+                                        </p:cTn>
+                                        <p:tgtEl>
+                                          <p:spTgt spid="7"/>
+                                        </p:tgtEl>
+                                        <p:attrNameLst>
+                                          <p:attrName>style.visibility</p:attrName>
+                                        </p:attrNameLst>
+                                      </p:cBhvr>
+                                      <p:to>
+                                        <p:strVal val="visible"/>
+                                      </p:to>
+                                    </p:set>
+                                    <p:animEffect transition="in" filter="fade">
+                                      <p:cBhvr>
+                                        <p:cTn id="7" dur="500"/>
+                                        <p:tgtEl>
+                                          <p:spTgt spid="7"/>
+                                        </p:tgtEl>
+                                      </p:cBhvr>
+                                    </p:animEffect>
+                                  </p:childTnLst>
+                                </p:cTn>
+                              </p:par>
+                            </p:childTnLst>
+                          </p:cTn>
+                        </p:par>
+                      </p:childTnLst>
+                    </p:cTn>
+                  </p:par>
+                </p:childTnLst>
+              </p:cTn>
+              <p:prevCondLst>
+                <p:cond evt="onPrev" delay="0">
+                  <p:tgtEl>
+                    <p:sldTgt/>
+                  </p:tgtEl>
+                </p:cond>
+              </p:prevCondLst>
+              <p:nextCondLst>
+                <p:cond evt="onNext" delay="0">
+                  <p:tgtEl>
+                    <p:sldTgt/>
+                  </p:tgtEl>
+                </p:cond>
+              </p:nextCondLst>
+            </p:seq>
+          </p:childTnLst>
+        </p:cTn>
+      </p:par>
+    </p:tnLst>
+    <p:bldLst>
+      <p:bldP spid="7" grpId="0" animBg="1"/>
+    </p:bldLst>
+  </p:timing>
+</p:sld>
+</file>
+
+<file path=ppt/slides/slide9.xml><?xml version="1.0" encoding="utf-8"?>
+<p:sld xmlns:a="http://schemas.openxmlformats.org/drawingml/2006/main" xmlns:r="http://schemas.openxmlformats.org/officeDocument/2006/relationships" xmlns:p="http://schemas.openxmlformats.org/presentationml/2006/main">
+  <p:cSld>
+    <p:spTree>
+      <p:nvGrpSpPr>
+        <p:cNvPr id="1" name=""/>
+        <p:cNvGrpSpPr/>
+        <p:nvPr/>
+      </p:nvGrpSpPr>
+      <p:grpSpPr>
+        <a:xfrm>
+          <a:off x="0" y="0"/>
+          <a:ext cx="0" cy="0"/>
+          <a:chOff x="0" y="0"/>
+          <a:chExt cx="0" cy="0"/>
+        </a:xfrm>
+      </p:grpSpPr>
+      <p:sp>
+        <p:nvSpPr>
+          <p:cNvPr id="2" name="タイトル 1"/>
+          <p:cNvSpPr>
+            <a:spLocks noGrp="1"/>
+          </p:cNvSpPr>
+          <p:nvPr>
+            <p:ph type="ctrTitle"/>
+          </p:nvPr>
+        </p:nvSpPr>
+        <p:spPr/>
+        <p:txBody>
+          <a:bodyPr>
+            <a:normAutofit fontScale="90000"/>
+          </a:bodyPr>
+          <a:lstStyle/>
+          <a:p>
+            <a:r>
+              <a:rPr kumimoji="1" lang="ja-JP" altLang="en-US" sz="2600" dirty="0"/>
+              <a:t>事例2　AIレビューワークフロー</a:t>
+            </a:r>
+          </a:p>
+        </p:txBody>
+      </p:sp>
+      <p:sp>
+        <p:nvSpPr>
+          <p:cNvPr id="3" name="字幕 2"/>
+          <p:cNvSpPr>
+            <a:spLocks noGrp="1"/>
+          </p:cNvSpPr>
+          <p:nvPr>
+            <p:ph type="subTitle" idx="1"/>
+          </p:nvPr>
+        </p:nvSpPr>
+        <p:spPr/>
+        <p:txBody>
+          <a:bodyPr>
+            <a:normAutofit fontScale="77500" lnSpcReduction="20000"/>
+          </a:bodyPr>
+          <a:lstStyle/>
+          <a:p>
+            <a:r>
+              <a:rPr kumimoji="1" lang="ja-JP" altLang="en-US" sz="1300" dirty="0"/>
+              <a:t>「</a:t>
+            </a:r>
+            <a:r>
+              <a:rPr lang="ja-JP" altLang="en-US" sz="1400" dirty="0"/>
+              <a:t>育て方を作る</a:t>
+            </a:r>
+            <a:r>
+              <a:rPr kumimoji="1" lang="ja-JP" altLang="en-US" sz="1300" dirty="0"/>
+              <a:t>」</a:t>
+            </a:r>
+            <a:r>
+              <a:rPr lang="ja-JP" altLang="en-US" dirty="0"/>
+              <a:t>エンジニアリング エンジニアリング エンジニアリング</a:t>
+            </a:r>
+            <a:endParaRPr kumimoji="1" lang="ja-JP" altLang="en-US" sz="1300" dirty="0"/>
+          </a:p>
+        </p:txBody>
+      </p:sp>
+    </p:spTree>
   </p:cSld>
   <p:clrMapOvr>
     <a:masterClrMapping/>

--- a/TechMeeting202604/techmeeting20260406.pptx
+++ b/TechMeeting202604/techmeeting20260406.pptx
@@ -5,44 +5,43 @@
     <p:sldMasterId id="2147483660" r:id="rId1"/>
   </p:sldMasterIdLst>
   <p:notesMasterIdLst>
-    <p:notesMasterId r:id="rId34"/>
+    <p:notesMasterId r:id="rId33"/>
   </p:notesMasterIdLst>
   <p:handoutMasterIdLst>
-    <p:handoutMasterId r:id="rId35"/>
+    <p:handoutMasterId r:id="rId34"/>
   </p:handoutMasterIdLst>
   <p:sldIdLst>
     <p:sldId id="318" r:id="rId2"/>
     <p:sldId id="281" r:id="rId3"/>
-    <p:sldId id="321" r:id="rId4"/>
-    <p:sldId id="323" r:id="rId5"/>
-    <p:sldId id="355" r:id="rId6"/>
-    <p:sldId id="340" r:id="rId7"/>
-    <p:sldId id="356" r:id="rId8"/>
-    <p:sldId id="326" r:id="rId9"/>
-    <p:sldId id="327" r:id="rId10"/>
-    <p:sldId id="330" r:id="rId11"/>
-    <p:sldId id="358" r:id="rId12"/>
-    <p:sldId id="347" r:id="rId13"/>
-    <p:sldId id="348" r:id="rId14"/>
-    <p:sldId id="346" r:id="rId15"/>
-    <p:sldId id="344" r:id="rId16"/>
-    <p:sldId id="359" r:id="rId17"/>
-    <p:sldId id="349" r:id="rId18"/>
-    <p:sldId id="350" r:id="rId19"/>
-    <p:sldId id="332" r:id="rId20"/>
-    <p:sldId id="360" r:id="rId21"/>
-    <p:sldId id="343" r:id="rId22"/>
-    <p:sldId id="342" r:id="rId23"/>
-    <p:sldId id="337" r:id="rId24"/>
-    <p:sldId id="312" r:id="rId25"/>
-    <p:sldId id="319" r:id="rId26"/>
-    <p:sldId id="331" r:id="rId27"/>
-    <p:sldId id="333" r:id="rId28"/>
-    <p:sldId id="357" r:id="rId29"/>
-    <p:sldId id="338" r:id="rId30"/>
-    <p:sldId id="339" r:id="rId31"/>
-    <p:sldId id="334" r:id="rId32"/>
-    <p:sldId id="341" r:id="rId33"/>
+    <p:sldId id="338" r:id="rId4"/>
+    <p:sldId id="321" r:id="rId5"/>
+    <p:sldId id="323" r:id="rId6"/>
+    <p:sldId id="355" r:id="rId7"/>
+    <p:sldId id="340" r:id="rId8"/>
+    <p:sldId id="356" r:id="rId9"/>
+    <p:sldId id="326" r:id="rId10"/>
+    <p:sldId id="327" r:id="rId11"/>
+    <p:sldId id="330" r:id="rId12"/>
+    <p:sldId id="358" r:id="rId13"/>
+    <p:sldId id="347" r:id="rId14"/>
+    <p:sldId id="348" r:id="rId15"/>
+    <p:sldId id="346" r:id="rId16"/>
+    <p:sldId id="344" r:id="rId17"/>
+    <p:sldId id="359" r:id="rId18"/>
+    <p:sldId id="349" r:id="rId19"/>
+    <p:sldId id="350" r:id="rId20"/>
+    <p:sldId id="332" r:id="rId21"/>
+    <p:sldId id="360" r:id="rId22"/>
+    <p:sldId id="343" r:id="rId23"/>
+    <p:sldId id="342" r:id="rId24"/>
+    <p:sldId id="337" r:id="rId25"/>
+    <p:sldId id="312" r:id="rId26"/>
+    <p:sldId id="319" r:id="rId27"/>
+    <p:sldId id="361" r:id="rId28"/>
+    <p:sldId id="362" r:id="rId29"/>
+    <p:sldId id="339" r:id="rId30"/>
+    <p:sldId id="334" r:id="rId31"/>
+    <p:sldId id="341" r:id="rId32"/>
   </p:sldIdLst>
   <p:sldSz cx="9906000" cy="6858000" type="A4"/>
   <p:notesSz cx="6735763" cy="9866313"/>
@@ -3637,19 +3636,13 @@
         <p:spPr/>
         <p:txBody>
           <a:bodyPr>
-            <a:normAutofit fontScale="90000"/>
+            <a:normAutofit/>
           </a:bodyPr>
           <a:lstStyle/>
           <a:p>
             <a:r>
               <a:rPr kumimoji="1" lang="ja-JP" altLang="en-US" sz="2600" dirty="0"/>
-              <a:t>判断と演算のループを設計する</a:t>
-            </a:r>
-          </a:p>
-          <a:p>
-            <a:r>
-              <a:rPr kumimoji="1" lang="ja-JP" altLang="en-US" sz="2000" dirty="0"/>
-              <a:t>— AIエージェント活用の2つの事例 —</a:t>
+              <a:t>判断と演算を設計する</a:t>
             </a:r>
           </a:p>
         </p:txBody>
@@ -3673,7 +3666,7 @@
           <a:p>
             <a:r>
               <a:rPr kumimoji="1" lang="ja-JP" altLang="en-US" sz="1300" dirty="0"/>
-              <a:t>品質管理クラウド　森</a:t>
+              <a:t>品質管理クラウド　森 大樹</a:t>
             </a:r>
           </a:p>
         </p:txBody>
@@ -3687,6 +3680,92 @@
 </file>
 
 <file path=ppt/slides/slide10.xml><?xml version="1.0" encoding="utf-8"?>
+<p:sld xmlns:a="http://schemas.openxmlformats.org/drawingml/2006/main" xmlns:r="http://schemas.openxmlformats.org/officeDocument/2006/relationships" xmlns:p="http://schemas.openxmlformats.org/presentationml/2006/main">
+  <p:cSld>
+    <p:spTree>
+      <p:nvGrpSpPr>
+        <p:cNvPr id="1" name=""/>
+        <p:cNvGrpSpPr/>
+        <p:nvPr/>
+      </p:nvGrpSpPr>
+      <p:grpSpPr>
+        <a:xfrm>
+          <a:off x="0" y="0"/>
+          <a:ext cx="0" cy="0"/>
+          <a:chOff x="0" y="0"/>
+          <a:chExt cx="0" cy="0"/>
+        </a:xfrm>
+      </p:grpSpPr>
+      <p:sp>
+        <p:nvSpPr>
+          <p:cNvPr id="2" name="タイトル 1"/>
+          <p:cNvSpPr>
+            <a:spLocks noGrp="1"/>
+          </p:cNvSpPr>
+          <p:nvPr>
+            <p:ph type="ctrTitle"/>
+          </p:nvPr>
+        </p:nvSpPr>
+        <p:spPr/>
+        <p:txBody>
+          <a:bodyPr>
+            <a:normAutofit fontScale="90000"/>
+          </a:bodyPr>
+          <a:lstStyle/>
+          <a:p>
+            <a:r>
+              <a:rPr kumimoji="1" lang="ja-JP" altLang="en-US" sz="2600" dirty="0"/>
+              <a:t>事例2　AIレビューワークフロー</a:t>
+            </a:r>
+          </a:p>
+        </p:txBody>
+      </p:sp>
+      <p:sp>
+        <p:nvSpPr>
+          <p:cNvPr id="3" name="字幕 2"/>
+          <p:cNvSpPr>
+            <a:spLocks noGrp="1"/>
+          </p:cNvSpPr>
+          <p:nvPr>
+            <p:ph type="subTitle" idx="1"/>
+          </p:nvPr>
+        </p:nvSpPr>
+        <p:spPr/>
+        <p:txBody>
+          <a:bodyPr>
+            <a:normAutofit fontScale="77500" lnSpcReduction="20000"/>
+          </a:bodyPr>
+          <a:lstStyle/>
+          <a:p>
+            <a:r>
+              <a:rPr kumimoji="1" lang="ja-JP" altLang="en-US" sz="1300" dirty="0"/>
+              <a:t>「</a:t>
+            </a:r>
+            <a:r>
+              <a:rPr lang="ja-JP" altLang="en-US" sz="1400" dirty="0"/>
+              <a:t>育て方を作る</a:t>
+            </a:r>
+            <a:r>
+              <a:rPr kumimoji="1" lang="ja-JP" altLang="en-US" sz="1300" dirty="0"/>
+              <a:t>」</a:t>
+            </a:r>
+            <a:r>
+              <a:rPr lang="ja-JP" altLang="en-US" dirty="0"/>
+              <a:t>エンジニアリング エンジニアリング エンジニアリング</a:t>
+            </a:r>
+            <a:endParaRPr kumimoji="1" lang="ja-JP" altLang="en-US" sz="1300" dirty="0"/>
+          </a:p>
+        </p:txBody>
+      </p:sp>
+    </p:spTree>
+  </p:cSld>
+  <p:clrMapOvr>
+    <a:masterClrMapping/>
+  </p:clrMapOvr>
+</p:sld>
+</file>
+
+<file path=ppt/slides/slide11.xml><?xml version="1.0" encoding="utf-8"?>
 <p:sld xmlns:a="http://schemas.openxmlformats.org/drawingml/2006/main" xmlns:r="http://schemas.openxmlformats.org/officeDocument/2006/relationships" xmlns:p="http://schemas.openxmlformats.org/presentationml/2006/main">
   <p:cSld>
     <p:spTree>
@@ -4170,7 +4249,7 @@
 </p:sld>
 </file>
 
-<file path=ppt/slides/slide11.xml><?xml version="1.0" encoding="utf-8"?>
+<file path=ppt/slides/slide12.xml><?xml version="1.0" encoding="utf-8"?>
 <p:sld xmlns:a="http://schemas.openxmlformats.org/drawingml/2006/main" xmlns:r="http://schemas.openxmlformats.org/officeDocument/2006/relationships" xmlns:p="http://schemas.openxmlformats.org/presentationml/2006/main">
   <p:cSld>
     <p:spTree>
@@ -4601,7 +4680,7 @@
 </p:sld>
 </file>
 
-<file path=ppt/slides/slide12.xml><?xml version="1.0" encoding="utf-8"?>
+<file path=ppt/slides/slide13.xml><?xml version="1.0" encoding="utf-8"?>
 <p:sld xmlns:a="http://schemas.openxmlformats.org/drawingml/2006/main" xmlns:r="http://schemas.openxmlformats.org/officeDocument/2006/relationships" xmlns:p="http://schemas.openxmlformats.org/presentationml/2006/main">
   <p:cSld>
     <p:spTree>
@@ -5077,7 +5156,7 @@
 </p:sld>
 </file>
 
-<file path=ppt/slides/slide13.xml><?xml version="1.0" encoding="utf-8"?>
+<file path=ppt/slides/slide14.xml><?xml version="1.0" encoding="utf-8"?>
 <p:sld xmlns:a="http://schemas.openxmlformats.org/drawingml/2006/main" xmlns:r="http://schemas.openxmlformats.org/officeDocument/2006/relationships" xmlns:p="http://schemas.openxmlformats.org/presentationml/2006/main">
   <p:cSld>
     <p:spTree>
@@ -6019,7 +6098,7 @@
 </p:sld>
 </file>
 
-<file path=ppt/slides/slide14.xml><?xml version="1.0" encoding="utf-8"?>
+<file path=ppt/slides/slide15.xml><?xml version="1.0" encoding="utf-8"?>
 <p:sld xmlns:a="http://schemas.openxmlformats.org/drawingml/2006/main" xmlns:r="http://schemas.openxmlformats.org/officeDocument/2006/relationships" xmlns:p="http://schemas.openxmlformats.org/presentationml/2006/main">
   <p:cSld>
     <p:spTree>
@@ -6556,6 +6635,51 @@
                       </p:childTnLst>
                     </p:cTn>
                   </p:par>
+                  <p:par>
+                    <p:cTn id="19" fill="hold">
+                      <p:stCondLst>
+                        <p:cond delay="indefinite"/>
+                      </p:stCondLst>
+                      <p:childTnLst>
+                        <p:par>
+                          <p:cTn id="20" fill="hold">
+                            <p:stCondLst>
+                              <p:cond delay="0"/>
+                            </p:stCondLst>
+                            <p:childTnLst>
+                              <p:par>
+                                <p:cTn id="21" presetID="1" presetClass="entr" presetSubtype="0" fill="hold" grpId="0" nodeType="clickEffect">
+                                  <p:stCondLst>
+                                    <p:cond delay="0"/>
+                                  </p:stCondLst>
+                                  <p:childTnLst>
+                                    <p:set>
+                                      <p:cBhvr>
+                                        <p:cTn id="22" dur="1" fill="hold">
+                                          <p:stCondLst>
+                                            <p:cond delay="0"/>
+                                          </p:stCondLst>
+                                        </p:cTn>
+                                        <p:tgtEl>
+                                          <p:spTgt spid="14"/>
+                                        </p:tgtEl>
+                                        <p:attrNameLst>
+                                          <p:attrName>style.visibility</p:attrName>
+                                        </p:attrNameLst>
+                                      </p:cBhvr>
+                                      <p:to>
+                                        <p:strVal val="visible"/>
+                                      </p:to>
+                                    </p:set>
+                                  </p:childTnLst>
+                                </p:cTn>
+                              </p:par>
+                            </p:childTnLst>
+                          </p:cTn>
+                        </p:par>
+                      </p:childTnLst>
+                    </p:cTn>
+                  </p:par>
                 </p:childTnLst>
               </p:cTn>
               <p:prevCondLst>
@@ -6581,12 +6705,13 @@
       <p:bldP spid="2" grpId="0" animBg="1"/>
       <p:bldP spid="4" grpId="0"/>
       <p:bldP spid="12" grpId="0"/>
+      <p:bldP spid="14" grpId="0"/>
     </p:bldLst>
   </p:timing>
 </p:sld>
 </file>
 
-<file path=ppt/slides/slide15.xml><?xml version="1.0" encoding="utf-8"?>
+<file path=ppt/slides/slide16.xml><?xml version="1.0" encoding="utf-8"?>
 <p:sld xmlns:a="http://schemas.openxmlformats.org/drawingml/2006/main" xmlns:r="http://schemas.openxmlformats.org/officeDocument/2006/relationships" xmlns:p="http://schemas.openxmlformats.org/presentationml/2006/main">
   <p:cSld>
     <p:spTree>
@@ -7065,7 +7190,7 @@
 </p:sld>
 </file>
 
-<file path=ppt/slides/slide16.xml><?xml version="1.0" encoding="utf-8"?>
+<file path=ppt/slides/slide17.xml><?xml version="1.0" encoding="utf-8"?>
 <p:sld xmlns:a="http://schemas.openxmlformats.org/drawingml/2006/main" xmlns:r="http://schemas.openxmlformats.org/officeDocument/2006/relationships" xmlns:p="http://schemas.openxmlformats.org/presentationml/2006/main">
   <p:cSld>
     <p:spTree>
@@ -7202,7 +7327,7 @@
 </p:sld>
 </file>
 
-<file path=ppt/slides/slide17.xml><?xml version="1.0" encoding="utf-8"?>
+<file path=ppt/slides/slide18.xml><?xml version="1.0" encoding="utf-8"?>
 <p:sld xmlns:a="http://schemas.openxmlformats.org/drawingml/2006/main" xmlns:r="http://schemas.openxmlformats.org/officeDocument/2006/relationships" xmlns:p="http://schemas.openxmlformats.org/presentationml/2006/main">
   <p:cSld>
     <p:spTree>
@@ -7774,7 +7899,7 @@
 </p:sld>
 </file>
 
-<file path=ppt/slides/slide18.xml><?xml version="1.0" encoding="utf-8"?>
+<file path=ppt/slides/slide19.xml><?xml version="1.0" encoding="utf-8"?>
 <p:sld xmlns:a="http://schemas.openxmlformats.org/drawingml/2006/main" xmlns:r="http://schemas.openxmlformats.org/officeDocument/2006/relationships" xmlns:p="http://schemas.openxmlformats.org/presentationml/2006/main">
   <p:cSld>
     <p:spTree>
@@ -7847,7 +7972,7 @@
             <a:fld id="{C314D315-6C69-40BF-98D6-60239DAB9584}" type="slidenum">
               <a:rPr lang="ja-JP" altLang="en-US" smtClean="0"/>
               <a:pPr/>
-              <a:t>17</a:t>
+              <a:t>18</a:t>
             </a:fld>
             <a:r>
               <a:rPr lang="ja-JP" altLang="en-US"/>
@@ -8738,7 +8863,130 @@
 </p:sld>
 </file>
 
-<file path=ppt/slides/slide19.xml><?xml version="1.0" encoding="utf-8"?>
+<file path=ppt/slides/slide2.xml><?xml version="1.0" encoding="utf-8"?>
+<p:sld xmlns:a="http://schemas.openxmlformats.org/drawingml/2006/main" xmlns:r="http://schemas.openxmlformats.org/officeDocument/2006/relationships" xmlns:p="http://schemas.openxmlformats.org/presentationml/2006/main">
+  <p:cSld>
+    <p:spTree>
+      <p:nvGrpSpPr>
+        <p:cNvPr id="1" name=""/>
+        <p:cNvGrpSpPr/>
+        <p:nvPr/>
+      </p:nvGrpSpPr>
+      <p:grpSpPr>
+        <a:xfrm>
+          <a:off x="0" y="0"/>
+          <a:ext cx="0" cy="0"/>
+          <a:chOff x="0" y="0"/>
+          <a:chExt cx="0" cy="0"/>
+        </a:xfrm>
+      </p:grpSpPr>
+      <p:sp>
+        <p:nvSpPr>
+          <p:cNvPr id="2" name="コンテンツ 1"/>
+          <p:cNvSpPr txBox="1">
+            <a:spLocks/>
+          </p:cNvSpPr>
+          <p:nvPr/>
+        </p:nvSpPr>
+        <p:spPr>
+          <a:xfrm>
+            <a:off x="697186" y="1000000"/>
+            <a:ext cx="8496300" cy="4800000"/>
+          </a:xfrm>
+          <a:prstGeom prst="rect">
+            <a:avLst/>
+          </a:prstGeom>
+        </p:spPr>
+        <p:txBody>
+          <a:bodyPr vert="horz" lIns="91440" tIns="91440" rIns="91440" bIns="91440" rtlCol="0" anchor="ctr">
+            <a:normAutofit/>
+          </a:bodyPr>
+          <a:lstStyle>
+            <a:lvl1pPr algn="ctr">
+              <a:defRPr kumimoji="1" sz="2400">
+                <a:solidFill>
+                  <a:schemeClr val="tx1"/>
+                </a:solidFill>
+                <a:latin typeface="+mn-ea"/>
+              </a:defRPr>
+            </a:lvl1pPr>
+          </a:lstStyle>
+          <a:p>
+            <a:r>
+              <a:rPr kumimoji="1" lang="ja-JP" altLang="en-US" sz="2800" dirty="0"/>
+              <a:t>AI</a:t>
+            </a:r>
+            <a:r>
+              <a:rPr lang="ja-JP" altLang="en-US" sz="2800" dirty="0"/>
+              <a:t>に</a:t>
+            </a:r>
+            <a:r>
+              <a:rPr kumimoji="1" lang="ja-JP" altLang="en-US" sz="2800" dirty="0"/>
+              <a:t>「何ができて、何をやらせるべき」か？</a:t>
+            </a:r>
+          </a:p>
+          <a:p>
+            <a:endParaRPr lang="ja-JP" altLang="en-US" dirty="0"/>
+          </a:p>
+          <a:p>
+            <a:endParaRPr lang="ja-JP" altLang="en-US" dirty="0"/>
+          </a:p>
+          <a:p>
+            <a:r>
+              <a:rPr kumimoji="1" lang="ja-JP" altLang="en-US" sz="3200" b="1" dirty="0"/>
+              <a:t>AI時代に仕事をどう設計するか</a:t>
+            </a:r>
+            <a:endParaRPr kumimoji="1" lang="en-US" altLang="ja-JP" sz="3200" b="1" dirty="0"/>
+          </a:p>
+        </p:txBody>
+      </p:sp>
+      <p:pic>
+        <p:nvPicPr>
+          <p:cNvPr id="4" name="図 3">
+            <a:extLst>
+              <a:ext uri="{FF2B5EF4-FFF2-40B4-BE49-F238E27FC236}">
+                <a16:creationId xmlns:a16="http://schemas.microsoft.com/office/drawing/2014/main" id="{54AAFD6A-8F69-762F-CC68-F02F57101B33}"/>
+              </a:ext>
+            </a:extLst>
+          </p:cNvPr>
+          <p:cNvPicPr>
+            <a:picLocks noChangeAspect="1"/>
+          </p:cNvPicPr>
+          <p:nvPr/>
+        </p:nvPicPr>
+        <p:blipFill>
+          <a:blip r:embed="rId2">
+            <a:alphaModFix amt="35000"/>
+            <a:extLst>
+              <a:ext uri="{28A0092B-C50C-407E-A947-70E740481C1C}">
+                <a14:useLocalDpi xmlns:a14="http://schemas.microsoft.com/office/drawing/2010/main" val="0"/>
+              </a:ext>
+            </a:extLst>
+          </a:blip>
+          <a:srcRect l="14905" t="2673" r="15827"/>
+          <a:stretch>
+            <a:fillRect/>
+          </a:stretch>
+        </p:blipFill>
+        <p:spPr>
+          <a:xfrm>
+            <a:off x="7653300" y="4365104"/>
+            <a:ext cx="2146032" cy="2412268"/>
+          </a:xfrm>
+          <a:prstGeom prst="rect">
+            <a:avLst/>
+          </a:prstGeom>
+        </p:spPr>
+      </p:pic>
+    </p:spTree>
+  </p:cSld>
+  <p:clrMapOvr>
+    <a:masterClrMapping/>
+  </p:clrMapOvr>
+</p:sld>
+</file>
+
+<file path=ppt/slides/slide20.xml><?xml version="1.0" encoding="utf-8"?>
 <p:sld xmlns:a="http://schemas.openxmlformats.org/drawingml/2006/main" xmlns:r="http://schemas.openxmlformats.org/officeDocument/2006/relationships" xmlns:p="http://schemas.openxmlformats.org/presentationml/2006/main">
   <p:cSld>
     <p:spTree>
@@ -9360,130 +9608,7 @@
 </p:sld>
 </file>
 
-<file path=ppt/slides/slide2.xml><?xml version="1.0" encoding="utf-8"?>
-<p:sld xmlns:a="http://schemas.openxmlformats.org/drawingml/2006/main" xmlns:r="http://schemas.openxmlformats.org/officeDocument/2006/relationships" xmlns:p="http://schemas.openxmlformats.org/presentationml/2006/main">
-  <p:cSld>
-    <p:spTree>
-      <p:nvGrpSpPr>
-        <p:cNvPr id="1" name=""/>
-        <p:cNvGrpSpPr/>
-        <p:nvPr/>
-      </p:nvGrpSpPr>
-      <p:grpSpPr>
-        <a:xfrm>
-          <a:off x="0" y="0"/>
-          <a:ext cx="0" cy="0"/>
-          <a:chOff x="0" y="0"/>
-          <a:chExt cx="0" cy="0"/>
-        </a:xfrm>
-      </p:grpSpPr>
-      <p:sp>
-        <p:nvSpPr>
-          <p:cNvPr id="2" name="コンテンツ 1"/>
-          <p:cNvSpPr txBox="1">
-            <a:spLocks/>
-          </p:cNvSpPr>
-          <p:nvPr/>
-        </p:nvSpPr>
-        <p:spPr>
-          <a:xfrm>
-            <a:off x="697186" y="1000000"/>
-            <a:ext cx="8496300" cy="4800000"/>
-          </a:xfrm>
-          <a:prstGeom prst="rect">
-            <a:avLst/>
-          </a:prstGeom>
-        </p:spPr>
-        <p:txBody>
-          <a:bodyPr vert="horz" lIns="91440" tIns="91440" rIns="91440" bIns="91440" rtlCol="0" anchor="ctr">
-            <a:normAutofit/>
-          </a:bodyPr>
-          <a:lstStyle>
-            <a:lvl1pPr algn="ctr">
-              <a:defRPr kumimoji="1" sz="2400">
-                <a:solidFill>
-                  <a:schemeClr val="tx1"/>
-                </a:solidFill>
-                <a:latin typeface="+mn-ea"/>
-              </a:defRPr>
-            </a:lvl1pPr>
-          </a:lstStyle>
-          <a:p>
-            <a:r>
-              <a:rPr kumimoji="1" lang="ja-JP" altLang="en-US" sz="2800" dirty="0"/>
-              <a:t>AI</a:t>
-            </a:r>
-            <a:r>
-              <a:rPr lang="ja-JP" altLang="en-US" sz="2800" dirty="0"/>
-              <a:t>に</a:t>
-            </a:r>
-            <a:r>
-              <a:rPr kumimoji="1" lang="ja-JP" altLang="en-US" sz="2800" dirty="0"/>
-              <a:t>「何ができて、何をやらせるべき」か？</a:t>
-            </a:r>
-          </a:p>
-          <a:p>
-            <a:endParaRPr lang="ja-JP" altLang="en-US" dirty="0"/>
-          </a:p>
-          <a:p>
-            <a:endParaRPr lang="ja-JP" altLang="en-US" dirty="0"/>
-          </a:p>
-          <a:p>
-            <a:r>
-              <a:rPr kumimoji="1" lang="ja-JP" altLang="en-US" sz="3200" b="1" dirty="0"/>
-              <a:t>AI時代に仕事をどう設計するか</a:t>
-            </a:r>
-            <a:endParaRPr kumimoji="1" lang="en-US" altLang="ja-JP" sz="3200" b="1" dirty="0"/>
-          </a:p>
-        </p:txBody>
-      </p:sp>
-      <p:pic>
-        <p:nvPicPr>
-          <p:cNvPr id="4" name="図 3">
-            <a:extLst>
-              <a:ext uri="{FF2B5EF4-FFF2-40B4-BE49-F238E27FC236}">
-                <a16:creationId xmlns:a16="http://schemas.microsoft.com/office/drawing/2014/main" id="{54AAFD6A-8F69-762F-CC68-F02F57101B33}"/>
-              </a:ext>
-            </a:extLst>
-          </p:cNvPr>
-          <p:cNvPicPr>
-            <a:picLocks noChangeAspect="1"/>
-          </p:cNvPicPr>
-          <p:nvPr/>
-        </p:nvPicPr>
-        <p:blipFill>
-          <a:blip r:embed="rId2">
-            <a:alphaModFix amt="35000"/>
-            <a:extLst>
-              <a:ext uri="{28A0092B-C50C-407E-A947-70E740481C1C}">
-                <a14:useLocalDpi xmlns:a14="http://schemas.microsoft.com/office/drawing/2010/main" val="0"/>
-              </a:ext>
-            </a:extLst>
-          </a:blip>
-          <a:srcRect l="14905" t="2673" r="15827"/>
-          <a:stretch>
-            <a:fillRect/>
-          </a:stretch>
-        </p:blipFill>
-        <p:spPr>
-          <a:xfrm>
-            <a:off x="7653300" y="4365104"/>
-            <a:ext cx="2146032" cy="2412268"/>
-          </a:xfrm>
-          <a:prstGeom prst="rect">
-            <a:avLst/>
-          </a:prstGeom>
-        </p:spPr>
-      </p:pic>
-    </p:spTree>
-  </p:cSld>
-  <p:clrMapOvr>
-    <a:masterClrMapping/>
-  </p:clrMapOvr>
-</p:sld>
-</file>
-
-<file path=ppt/slides/slide20.xml><?xml version="1.0" encoding="utf-8"?>
+<file path=ppt/slides/slide21.xml><?xml version="1.0" encoding="utf-8"?>
 <p:sld xmlns:a="http://schemas.openxmlformats.org/drawingml/2006/main" xmlns:r="http://schemas.openxmlformats.org/officeDocument/2006/relationships" xmlns:p="http://schemas.openxmlformats.org/presentationml/2006/main">
   <p:cSld>
     <p:spTree>
@@ -10349,7 +10474,7 @@
 </p:sld>
 </file>
 
-<file path=ppt/slides/slide21.xml><?xml version="1.0" encoding="utf-8"?>
+<file path=ppt/slides/slide22.xml><?xml version="1.0" encoding="utf-8"?>
 <p:sld xmlns:a="http://schemas.openxmlformats.org/drawingml/2006/main" xmlns:r="http://schemas.openxmlformats.org/officeDocument/2006/relationships" xmlns:p="http://schemas.openxmlformats.org/presentationml/2006/main">
   <p:cSld>
     <p:spTree>
@@ -10562,7 +10687,7 @@
 </p:sld>
 </file>
 
-<file path=ppt/slides/slide22.xml><?xml version="1.0" encoding="utf-8"?>
+<file path=ppt/slides/slide23.xml><?xml version="1.0" encoding="utf-8"?>
 <p:sld xmlns:a="http://schemas.openxmlformats.org/drawingml/2006/main" xmlns:r="http://schemas.openxmlformats.org/officeDocument/2006/relationships" xmlns:p="http://schemas.openxmlformats.org/presentationml/2006/main">
   <p:cSld>
     <p:spTree>
@@ -10708,7 +10833,7 @@
 </p:sld>
 </file>
 
-<file path=ppt/slides/slide23.xml><?xml version="1.0" encoding="utf-8"?>
+<file path=ppt/slides/slide24.xml><?xml version="1.0" encoding="utf-8"?>
 <p:sld xmlns:a="http://schemas.openxmlformats.org/drawingml/2006/main" xmlns:r="http://schemas.openxmlformats.org/officeDocument/2006/relationships" xmlns:p="http://schemas.openxmlformats.org/presentationml/2006/main">
   <p:cSld>
     <p:spTree>
@@ -10968,164 +11093,6 @@
         </p:spPr>
       </p:pic>
     </p:spTree>
-  </p:cSld>
-  <p:clrMapOvr>
-    <a:masterClrMapping/>
-  </p:clrMapOvr>
-</p:sld>
-</file>
-
-<file path=ppt/slides/slide24.xml><?xml version="1.0" encoding="utf-8"?>
-<p:sld xmlns:a="http://schemas.openxmlformats.org/drawingml/2006/main" xmlns:r="http://schemas.openxmlformats.org/officeDocument/2006/relationships" xmlns:p="http://schemas.openxmlformats.org/presentationml/2006/main">
-  <p:cSld>
-    <p:spTree>
-      <p:nvGrpSpPr>
-        <p:cNvPr id="1" name=""/>
-        <p:cNvGrpSpPr/>
-        <p:nvPr/>
-      </p:nvGrpSpPr>
-      <p:grpSpPr>
-        <a:xfrm>
-          <a:off x="0" y="0"/>
-          <a:ext cx="0" cy="0"/>
-          <a:chOff x="0" y="0"/>
-          <a:chExt cx="0" cy="0"/>
-        </a:xfrm>
-      </p:grpSpPr>
-      <p:sp>
-        <p:nvSpPr>
-          <p:cNvPr id="2" name="コンテンツ プレースホルダー 1"/>
-          <p:cNvSpPr>
-            <a:spLocks noGrp="1"/>
-          </p:cNvSpPr>
-          <p:nvPr>
-            <p:ph idx="1"/>
-          </p:nvPr>
-        </p:nvSpPr>
-        <p:spPr/>
-        <p:txBody>
-          <a:bodyPr>
-            <a:normAutofit/>
-          </a:bodyPr>
-          <a:lstStyle/>
-          <a:p>
-            <a:r>
-              <a:rPr kumimoji="1" lang="ja-JP" altLang="en-US" sz="2800" b="1" dirty="0"/>
-              <a:t>Judgment（判断）</a:t>
-            </a:r>
-            <a:r>
-              <a:rPr lang="ja-JP" altLang="en-US" sz="2800" dirty="0"/>
-              <a:t>🧑‍💻</a:t>
-            </a:r>
-            <a:endParaRPr kumimoji="1" lang="ja-JP" altLang="en-US" sz="2800" b="1" dirty="0"/>
-          </a:p>
-          <a:p>
-            <a:pPr lvl="1"/>
-            <a:r>
-              <a:rPr kumimoji="1" lang="ja-JP" altLang="en-US" sz="2800" dirty="0"/>
-              <a:t>何を問うか・何を採るかを引き受けること</a:t>
-            </a:r>
-            <a:endParaRPr kumimoji="1" lang="en-US" altLang="ja-JP" sz="2800" dirty="0"/>
-          </a:p>
-          <a:p>
-            <a:pPr lvl="2"/>
-            <a:r>
-              <a:rPr lang="en-US" altLang="ja-JP" sz="2000" dirty="0"/>
-              <a:t>Ex </a:t>
-            </a:r>
-            <a:r>
-              <a:rPr lang="ja-JP" altLang="en-US" sz="2000" dirty="0"/>
-              <a:t>トレードオフの判断</a:t>
-            </a:r>
-            <a:endParaRPr lang="en-US" altLang="ja-JP" sz="2000" dirty="0"/>
-          </a:p>
-          <a:p>
-            <a:pPr lvl="2"/>
-            <a:r>
-              <a:rPr kumimoji="1" lang="en-US" altLang="ja-JP" sz="2000" dirty="0"/>
-              <a:t>Ex </a:t>
-            </a:r>
-            <a:r>
-              <a:rPr kumimoji="1" lang="ja-JP" altLang="en-US" sz="2000" dirty="0"/>
-              <a:t>何を解決するかの判断</a:t>
-            </a:r>
-            <a:endParaRPr lang="ja-JP" altLang="en-US" sz="1400" dirty="0"/>
-          </a:p>
-          <a:p>
-            <a:r>
-              <a:rPr kumimoji="1" lang="ja-JP" altLang="en-US" sz="2800" b="1" dirty="0"/>
-              <a:t>Reckoning（演算）</a:t>
-            </a:r>
-            <a:r>
-              <a:rPr lang="ja-JP" altLang="en-US" sz="2800" dirty="0"/>
-              <a:t>🤖💻</a:t>
-            </a:r>
-            <a:endParaRPr kumimoji="1" lang="ja-JP" altLang="en-US" sz="2800" b="1" dirty="0"/>
-          </a:p>
-          <a:p>
-            <a:pPr lvl="1"/>
-            <a:r>
-              <a:rPr kumimoji="1" lang="ja-JP" altLang="en-US" sz="2800" dirty="0"/>
-              <a:t>与えられた条件で広く計算すること</a:t>
-            </a:r>
-            <a:endParaRPr kumimoji="1" lang="en-US" altLang="ja-JP" sz="2800" dirty="0"/>
-          </a:p>
-          <a:p>
-            <a:pPr lvl="2"/>
-            <a:r>
-              <a:rPr kumimoji="1" lang="en-US" altLang="ja-JP" sz="2000" dirty="0"/>
-              <a:t>Ex </a:t>
-            </a:r>
-            <a:r>
-              <a:rPr kumimoji="1" lang="ja-JP" altLang="en-US" sz="2000" dirty="0"/>
-              <a:t>コンテキストに従って生成すること</a:t>
-            </a:r>
-            <a:endParaRPr kumimoji="1" lang="en-US" altLang="ja-JP" sz="2000" dirty="0"/>
-          </a:p>
-          <a:p>
-            <a:pPr lvl="2"/>
-            <a:r>
-              <a:rPr lang="en-US" altLang="ja-JP" sz="2000" dirty="0"/>
-              <a:t>Ex </a:t>
-            </a:r>
-            <a:r>
-              <a:rPr lang="ja-JP" altLang="en-US" sz="2000" dirty="0"/>
-              <a:t>ツールを使って処理すること</a:t>
-            </a:r>
-            <a:endParaRPr kumimoji="1" lang="ja-JP" altLang="en-US" sz="2000" dirty="0"/>
-          </a:p>
-        </p:txBody>
-      </p:sp>
-      <p:sp>
-        <p:nvSpPr>
-          <p:cNvPr id="3" name="タイトル 2"/>
-          <p:cNvSpPr>
-            <a:spLocks noGrp="1"/>
-          </p:cNvSpPr>
-          <p:nvPr>
-            <p:ph type="title"/>
-          </p:nvPr>
-        </p:nvSpPr>
-        <p:spPr/>
-        <p:txBody>
-          <a:bodyPr>
-            <a:normAutofit fontScale="90000"/>
-          </a:bodyPr>
-          <a:lstStyle/>
-          <a:p>
-            <a:r>
-              <a:rPr kumimoji="1" lang="ja-JP" altLang="en-US" dirty="0"/>
-              <a:t>枠組み: 判断（Judgment）と演算（Reckoning）</a:t>
-            </a:r>
-          </a:p>
-        </p:txBody>
-      </p:sp>
-    </p:spTree>
-    <p:extLst>
-      <p:ext uri="{BB962C8B-B14F-4D97-AF65-F5344CB8AC3E}">
-        <p14:creationId xmlns:p14="http://schemas.microsoft.com/office/powerpoint/2010/main" val="3989734313"/>
-      </p:ext>
-    </p:extLst>
   </p:cSld>
   <p:clrMapOvr>
     <a:masterClrMapping/>
@@ -11168,117 +11135,89 @@
           <a:lstStyle/>
           <a:p>
             <a:r>
-              <a:rPr kumimoji="1" lang="ja-JP" altLang="en-US" sz="1800" b="1" dirty="0"/>
-              <a:t>事例1: ドキュメントパイプライン</a:t>
-            </a:r>
+              <a:rPr kumimoji="1" lang="ja-JP" altLang="en-US" sz="2800" b="1" dirty="0"/>
+              <a:t>Judgment（判断）</a:t>
+            </a:r>
+            <a:r>
+              <a:rPr lang="ja-JP" altLang="en-US" sz="2800" dirty="0"/>
+              <a:t>🧑‍💻</a:t>
+            </a:r>
+            <a:endParaRPr kumimoji="1" lang="ja-JP" altLang="en-US" sz="2800" b="1" dirty="0"/>
           </a:p>
           <a:p>
             <a:pPr lvl="1"/>
             <a:r>
-              <a:rPr kumimoji="1" lang="ja-JP" altLang="en-US" sz="1800" dirty="0"/>
-              <a:t>Git 上の Markdown（193ファイル）↔ 社内 Wiki（GROWI）の同期システム</a:t>
-            </a:r>
+              <a:rPr kumimoji="1" lang="ja-JP" altLang="en-US" sz="2800" dirty="0"/>
+              <a:t>何を問うか・何を採るかを引き受けること</a:t>
+            </a:r>
+            <a:endParaRPr kumimoji="1" lang="en-US" altLang="ja-JP" sz="2800" dirty="0"/>
+          </a:p>
+          <a:p>
+            <a:pPr lvl="2"/>
+            <a:r>
+              <a:rPr lang="en-US" altLang="ja-JP" sz="2000" dirty="0"/>
+              <a:t>Ex </a:t>
+            </a:r>
+            <a:r>
+              <a:rPr lang="ja-JP" altLang="en-US" sz="2000" dirty="0"/>
+              <a:t>トレードオフの判断</a:t>
+            </a:r>
+            <a:endParaRPr lang="en-US" altLang="ja-JP" sz="2000" dirty="0"/>
+          </a:p>
+          <a:p>
+            <a:pPr lvl="2"/>
+            <a:r>
+              <a:rPr kumimoji="1" lang="en-US" altLang="ja-JP" sz="2000" dirty="0"/>
+              <a:t>Ex </a:t>
+            </a:r>
+            <a:r>
+              <a:rPr kumimoji="1" lang="ja-JP" altLang="en-US" sz="2000" dirty="0"/>
+              <a:t>何を解決するかの判断</a:t>
+            </a:r>
+            <a:endParaRPr lang="ja-JP" altLang="en-US" sz="1400" dirty="0"/>
+          </a:p>
+          <a:p>
+            <a:r>
+              <a:rPr kumimoji="1" lang="ja-JP" altLang="en-US" sz="2800" b="1" dirty="0"/>
+              <a:t>Reckoning（演算）</a:t>
+            </a:r>
+            <a:r>
+              <a:rPr lang="ja-JP" altLang="en-US" sz="2800" dirty="0"/>
+              <a:t>🤖💻</a:t>
+            </a:r>
+            <a:endParaRPr kumimoji="1" lang="ja-JP" altLang="en-US" sz="2800" b="1" dirty="0"/>
           </a:p>
           <a:p>
             <a:pPr lvl="1"/>
             <a:r>
-              <a:rPr kumimoji="1" lang="ja-JP" altLang="en-US" sz="1800" dirty="0"/>
-              <a:t>「</a:t>
-            </a:r>
-            <a:r>
-              <a:rPr lang="ja-JP" altLang="en-US" sz="1800" dirty="0"/>
-              <a:t>作業の進め方」「成果物の作り方」</a:t>
-            </a:r>
-            <a:r>
-              <a:rPr kumimoji="1" lang="ja-JP" altLang="en-US" sz="1800" dirty="0"/>
-              <a:t>を設計した</a:t>
-            </a:r>
-            <a:endParaRPr kumimoji="1" lang="en-US" altLang="ja-JP" sz="1800" dirty="0"/>
-          </a:p>
-          <a:p>
-            <a:pPr lvl="1"/>
-            <a:r>
-              <a:rPr lang="ja-JP" altLang="en-US" sz="1800" dirty="0"/>
-              <a:t>作り方を作る</a:t>
-            </a:r>
-          </a:p>
-          <a:p>
-            <a:r>
-              <a:rPr kumimoji="1" lang="ja-JP" altLang="en-US" sz="1800" b="1" dirty="0"/>
-              <a:t>事例2: AIレビューワークフロー</a:t>
-            </a:r>
-          </a:p>
-          <a:p>
-            <a:pPr lvl="1"/>
-            <a:r>
-              <a:rPr kumimoji="1" lang="ja-JP" altLang="en-US" sz="1800" dirty="0"/>
-              <a:t>Claude Code スキル/エージェント </a:t>
-            </a:r>
-            <a:r>
-              <a:rPr lang="ja-JP" altLang="en-US" sz="1800" dirty="0"/>
-              <a:t>↔</a:t>
-            </a:r>
-            <a:r>
-              <a:rPr kumimoji="1" lang="ja-JP" altLang="en-US" sz="1800" dirty="0"/>
-              <a:t>構造化レビュー ↔GitHub PR</a:t>
-            </a:r>
-          </a:p>
-          <a:p>
-            <a:pPr lvl="1"/>
-            <a:r>
-              <a:rPr kumimoji="1" lang="ja-JP" altLang="en-US" sz="1600" dirty="0"/>
-              <a:t>「人間・</a:t>
-            </a:r>
-            <a:r>
-              <a:rPr kumimoji="1" lang="en-US" altLang="ja-JP" sz="1600" dirty="0"/>
-              <a:t>AI</a:t>
-            </a:r>
-            <a:r>
-              <a:rPr kumimoji="1" lang="ja-JP" altLang="en-US" sz="1600" dirty="0"/>
-              <a:t>・ツールの役割分担」「判断力を持続可能にする仕組み」を設計した</a:t>
-            </a:r>
-            <a:endParaRPr kumimoji="1" lang="en-US" altLang="ja-JP" sz="1600" dirty="0"/>
-          </a:p>
-          <a:p>
-            <a:pPr lvl="1"/>
-            <a:r>
-              <a:rPr kumimoji="1" lang="ja-JP" altLang="en-US" sz="1600" dirty="0"/>
-              <a:t>育て方を作る</a:t>
-            </a:r>
-            <a:endParaRPr kumimoji="1" lang="en-US" altLang="ja-JP" sz="1600" dirty="0"/>
-          </a:p>
-          <a:p>
-            <a:pPr lvl="1"/>
-            <a:endParaRPr lang="ja-JP" altLang="en-US" dirty="0"/>
-          </a:p>
-          <a:p>
-            <a:r>
-              <a:rPr kumimoji="1" lang="ja-JP" altLang="en-US" sz="2000" b="1" dirty="0"/>
-              <a:t>共通パターン:</a:t>
-            </a:r>
-          </a:p>
-          <a:p>
-            <a:pPr lvl="1"/>
+              <a:rPr kumimoji="1" lang="ja-JP" altLang="en-US" sz="2800" dirty="0"/>
+              <a:t>与えられた条件で広く計算すること</a:t>
+            </a:r>
+            <a:endParaRPr kumimoji="1" lang="en-US" altLang="ja-JP" sz="2800" dirty="0"/>
+          </a:p>
+          <a:p>
+            <a:pPr lvl="2"/>
+            <a:r>
+              <a:rPr kumimoji="1" lang="en-US" altLang="ja-JP" sz="2000" dirty="0"/>
+              <a:t>Ex </a:t>
+            </a:r>
             <a:r>
               <a:rPr kumimoji="1" lang="ja-JP" altLang="en-US" sz="2000" dirty="0"/>
-              <a:t>人間</a:t>
+              <a:t>コンテキストに従って生成すること</a:t>
+            </a:r>
+            <a:endParaRPr kumimoji="1" lang="en-US" altLang="ja-JP" sz="2000" dirty="0"/>
+          </a:p>
+          <a:p>
+            <a:pPr lvl="2"/>
+            <a:r>
+              <a:rPr lang="en-US" altLang="ja-JP" sz="2000" dirty="0"/>
+              <a:t>Ex </a:t>
             </a:r>
             <a:r>
               <a:rPr lang="ja-JP" altLang="en-US" sz="2000" dirty="0"/>
-              <a:t>🧑‍💻</a:t>
-            </a:r>
-            <a:r>
-              <a:rPr kumimoji="1" lang="ja-JP" altLang="en-US" sz="2000" dirty="0"/>
-              <a:t>が判断の枠組みを作り、AI</a:t>
-            </a:r>
-            <a:r>
-              <a:rPr lang="ja-JP" altLang="en-US" sz="2000" dirty="0"/>
-              <a:t>🤖</a:t>
-            </a:r>
-            <a:r>
-              <a:rPr kumimoji="1" lang="ja-JP" altLang="en-US" sz="2000" dirty="0"/>
-              <a:t>が演算を担う</a:t>
-            </a:r>
+              <a:t>ツールを使って処理すること</a:t>
+            </a:r>
+            <a:endParaRPr kumimoji="1" lang="ja-JP" altLang="en-US" sz="2000" dirty="0"/>
           </a:p>
         </p:txBody>
       </p:sp>
@@ -11294,12 +11233,14 @@
         </p:nvSpPr>
         <p:spPr/>
         <p:txBody>
-          <a:bodyPr/>
+          <a:bodyPr>
+            <a:normAutofit fontScale="90000"/>
+          </a:bodyPr>
           <a:lstStyle/>
           <a:p>
             <a:r>
               <a:rPr kumimoji="1" lang="ja-JP" altLang="en-US" dirty="0"/>
-              <a:t>今日話した2つの仕組み</a:t>
+              <a:t>枠組み: 判断（Judgment）と演算（Reckoning）</a:t>
             </a:r>
           </a:p>
         </p:txBody>
@@ -11307,7 +11248,7 @@
     </p:spTree>
     <p:extLst>
       <p:ext uri="{BB962C8B-B14F-4D97-AF65-F5344CB8AC3E}">
-        <p14:creationId xmlns:p14="http://schemas.microsoft.com/office/powerpoint/2010/main" val="1825818896"/>
+        <p14:creationId xmlns:p14="http://schemas.microsoft.com/office/powerpoint/2010/main" val="3989734313"/>
       </p:ext>
     </p:extLst>
   </p:cSld>
@@ -11352,88 +11293,113 @@
           <a:lstStyle/>
           <a:p>
             <a:r>
-              <a:rPr kumimoji="1" lang="ja-JP" altLang="en-US" sz="1500" b="1" dirty="0"/>
-              <a:t>著者</a:t>
+              <a:rPr kumimoji="1" lang="ja-JP" altLang="en-US" sz="1800" b="1" dirty="0"/>
+              <a:t>事例1: ドキュメントパイプライン</a:t>
             </a:r>
           </a:p>
           <a:p>
             <a:pPr lvl="1"/>
             <a:r>
-              <a:rPr kumimoji="1" lang="ja-JP" altLang="en-US" sz="1500" dirty="0"/>
-              <a:t>/self-review → 網羅的チェック（Reckoning）</a:t>
+              <a:rPr kumimoji="1" lang="ja-JP" altLang="en-US" sz="1800" dirty="0"/>
+              <a:t>Git 上の Markdown（193ファイル）↔ 社内 Wiki（GROWI）の同期システム</a:t>
             </a:r>
           </a:p>
           <a:p>
             <a:pPr lvl="1"/>
             <a:r>
-              <a:rPr kumimoji="1" lang="ja-JP" altLang="en-US" sz="1500" dirty="0"/>
-              <a:t>意思決定フェーズ → 各 finding に判断（Judgment）</a:t>
-            </a:r>
+              <a:rPr kumimoji="1" lang="ja-JP" altLang="en-US" sz="1800" dirty="0"/>
+              <a:t>「</a:t>
+            </a:r>
+            <a:r>
+              <a:rPr lang="ja-JP" altLang="en-US" sz="1800" dirty="0"/>
+              <a:t>作業の進め方」「成果物の作り方」</a:t>
+            </a:r>
+            <a:r>
+              <a:rPr kumimoji="1" lang="ja-JP" altLang="en-US" sz="1800" dirty="0"/>
+              <a:t>を設計した</a:t>
+            </a:r>
+            <a:endParaRPr kumimoji="1" lang="en-US" altLang="ja-JP" sz="1800" dirty="0"/>
           </a:p>
           <a:p>
             <a:pPr lvl="1"/>
             <a:r>
-              <a:rPr kumimoji="1" lang="ja-JP" altLang="en-US" sz="1500" dirty="0"/>
-              <a:t>/draft-pr → 意思決定記録と設計意図を PR に埋め込む</a:t>
+              <a:rPr lang="ja-JP" altLang="en-US" sz="1800" dirty="0"/>
+              <a:t>作り方を作る</a:t>
+            </a:r>
+          </a:p>
+          <a:p>
+            <a:r>
+              <a:rPr kumimoji="1" lang="ja-JP" altLang="en-US" sz="1800" b="1" dirty="0"/>
+              <a:t>事例2: AIレビューワークフロー</a:t>
+            </a:r>
+          </a:p>
+          <a:p>
+            <a:pPr lvl="1"/>
+            <a:r>
+              <a:rPr kumimoji="1" lang="ja-JP" altLang="en-US" sz="1800" dirty="0"/>
+              <a:t>Claude Code スキル/エージェント </a:t>
+            </a:r>
+            <a:r>
+              <a:rPr lang="ja-JP" altLang="en-US" sz="1800" dirty="0"/>
+              <a:t>↔</a:t>
+            </a:r>
+            <a:r>
+              <a:rPr kumimoji="1" lang="ja-JP" altLang="en-US" sz="1800" dirty="0"/>
+              <a:t>構造化レビュー ↔GitHub PR</a:t>
+            </a:r>
+          </a:p>
+          <a:p>
+            <a:pPr lvl="1"/>
+            <a:r>
+              <a:rPr kumimoji="1" lang="ja-JP" altLang="en-US" sz="1600" dirty="0"/>
+              <a:t>「人間・</a:t>
+            </a:r>
+            <a:r>
+              <a:rPr kumimoji="1" lang="en-US" altLang="ja-JP" sz="1600" dirty="0"/>
+              <a:t>AI</a:t>
+            </a:r>
+            <a:r>
+              <a:rPr kumimoji="1" lang="ja-JP" altLang="en-US" sz="1600" dirty="0"/>
+              <a:t>・ツールの役割分担」「判断力を持続可能にする仕組み」を設計した</a:t>
+            </a:r>
+            <a:endParaRPr kumimoji="1" lang="en-US" altLang="ja-JP" sz="1600" dirty="0"/>
+          </a:p>
+          <a:p>
+            <a:pPr lvl="1"/>
+            <a:r>
+              <a:rPr kumimoji="1" lang="ja-JP" altLang="en-US" sz="1600" dirty="0"/>
+              <a:t>判断の仕組みを作る</a:t>
             </a:r>
             <a:endParaRPr lang="ja-JP" altLang="en-US" dirty="0"/>
           </a:p>
           <a:p>
             <a:r>
-              <a:rPr kumimoji="1" lang="ja-JP" altLang="en-US" sz="1500" b="1" dirty="0"/>
-              <a:t>レビュワー</a:t>
+              <a:rPr kumimoji="1" lang="ja-JP" altLang="en-US" sz="2000" b="1" dirty="0"/>
+              <a:t>共通パターン:</a:t>
             </a:r>
           </a:p>
           <a:p>
             <a:pPr lvl="1"/>
             <a:r>
-              <a:rPr kumimoji="1" lang="ja-JP" altLang="en-US" sz="1500" dirty="0"/>
-              <a:t>/peer-review → 検討済み事項をスキップ</a:t>
-            </a:r>
-          </a:p>
-          <a:p>
-            <a:pPr lvl="1"/>
-            <a:r>
-              <a:rPr kumimoji="1" lang="ja-JP" altLang="en-US" sz="1500" dirty="0"/>
-              <a:t>コメント選択 → 「その判断は妥当か」を問う（Judgment）</a:t>
-            </a:r>
-          </a:p>
-          <a:p>
-            <a:pPr lvl="1"/>
-            <a:r>
-              <a:rPr kumimoji="1" lang="ja-JP" altLang="en-US" sz="1500" dirty="0"/>
-              <a:t>/post-review → Pending レビューを投稿</a:t>
-            </a:r>
-          </a:p>
-          <a:p>
-            <a:r>
-              <a:rPr lang="ja-JP" altLang="en-US" sz="1500" b="1" dirty="0"/>
-              <a:t>チームで</a:t>
-            </a:r>
-          </a:p>
-          <a:p>
-            <a:pPr lvl="1"/>
-            <a:r>
-              <a:rPr lang="en-US" altLang="ja-JP" sz="1500" dirty="0"/>
-              <a:t>Claude.md</a:t>
-            </a:r>
-            <a:r>
-              <a:rPr lang="ja-JP" altLang="en-US" sz="1500" dirty="0"/>
-              <a:t>や各</a:t>
-            </a:r>
-            <a:r>
-              <a:rPr lang="en-US" altLang="ja-JP" sz="1500" dirty="0"/>
-              <a:t>Agent.md</a:t>
-            </a:r>
-            <a:r>
-              <a:rPr lang="ja-JP" altLang="en-US" sz="1500" dirty="0"/>
-              <a:t>に判断・観点を追加していく（Judgment）</a:t>
-            </a:r>
-            <a:endParaRPr lang="en-US" altLang="ja-JP" sz="1500" dirty="0"/>
-          </a:p>
-          <a:p>
-            <a:pPr lvl="1"/>
-            <a:endParaRPr lang="ja-JP" altLang="en-US" dirty="0"/>
+              <a:rPr kumimoji="1" lang="ja-JP" altLang="en-US" sz="2000" dirty="0"/>
+              <a:t>人間</a:t>
+            </a:r>
+            <a:r>
+              <a:rPr lang="ja-JP" altLang="en-US" sz="2000" dirty="0"/>
+              <a:t>🧑‍💻</a:t>
+            </a:r>
+            <a:r>
+              <a:rPr kumimoji="1" lang="ja-JP" altLang="en-US" sz="2000" dirty="0"/>
+              <a:t>が判断の枠組みを作り、AI</a:t>
+            </a:r>
+            <a:r>
+              <a:rPr lang="ja-JP" altLang="en-US" sz="2000" dirty="0"/>
+              <a:t>🤖</a:t>
+            </a:r>
+            <a:r>
+              <a:rPr kumimoji="1" lang="ja-JP" altLang="en-US" sz="2000" dirty="0"/>
+              <a:t>が演算を担う</a:t>
+            </a:r>
           </a:p>
         </p:txBody>
       </p:sp>
@@ -11454,12 +11420,17 @@
           <a:p>
             <a:r>
               <a:rPr kumimoji="1" lang="ja-JP" altLang="en-US" dirty="0"/>
-              <a:t>演算（Reckoning）— 判断を通すワークフロー</a:t>
+              <a:t>今日話した2つの仕組み</a:t>
             </a:r>
           </a:p>
         </p:txBody>
       </p:sp>
     </p:spTree>
+    <p:extLst>
+      <p:ext uri="{BB962C8B-B14F-4D97-AF65-F5344CB8AC3E}">
+        <p14:creationId xmlns:p14="http://schemas.microsoft.com/office/powerpoint/2010/main" val="1825818896"/>
+      </p:ext>
+    </p:extLst>
   </p:cSld>
   <p:clrMapOvr>
     <a:masterClrMapping/>
@@ -11472,148 +11443,10 @@
   <p:cSld>
     <p:spTree>
       <p:nvGrpSpPr>
-        <p:cNvPr id="1" name=""/>
-        <p:cNvGrpSpPr/>
-        <p:nvPr/>
-      </p:nvGrpSpPr>
-      <p:grpSpPr>
-        <a:xfrm>
-          <a:off x="0" y="0"/>
-          <a:ext cx="0" cy="0"/>
-          <a:chOff x="0" y="0"/>
-          <a:chExt cx="0" cy="0"/>
-        </a:xfrm>
-      </p:grpSpPr>
-      <p:sp>
-        <p:nvSpPr>
-          <p:cNvPr id="2" name="コンテンツ プレースホルダー 1"/>
-          <p:cNvSpPr>
-            <a:spLocks noGrp="1"/>
-          </p:cNvSpPr>
-          <p:nvPr>
-            <p:ph idx="1"/>
-          </p:nvPr>
-        </p:nvSpPr>
-        <p:spPr>
-          <a:xfrm>
-            <a:off x="632681" y="1304764"/>
-            <a:ext cx="8640638" cy="4894536"/>
-          </a:xfrm>
-        </p:spPr>
-        <p:txBody>
-          <a:bodyPr>
-            <a:normAutofit/>
-          </a:bodyPr>
-          <a:lstStyle/>
-          <a:p>
-            <a:r>
-              <a:rPr kumimoji="1" lang="ja-JP" altLang="en-US" sz="1800" b="1" dirty="0"/>
-              <a:t>ドキュメントパイプライン</a:t>
-            </a:r>
-          </a:p>
-          <a:p>
-            <a:pPr lvl="1"/>
-            <a:r>
-              <a:rPr kumimoji="1" lang="ja-JP" altLang="en-US" sz="1800" dirty="0"/>
-              <a:t>Judgment: 何を自動化し・何を</a:t>
-            </a:r>
-            <a:r>
-              <a:rPr lang="ja-JP" altLang="en-US" sz="1800" dirty="0"/>
-              <a:t>メンバー（人間）に何</a:t>
-            </a:r>
-            <a:r>
-              <a:rPr kumimoji="1" lang="ja-JP" altLang="en-US" sz="1800" dirty="0"/>
-              <a:t>をやってもらうか</a:t>
-            </a:r>
-            <a:br>
-              <a:rPr kumimoji="1" lang="en-US" altLang="ja-JP" sz="1800" dirty="0"/>
-            </a:br>
-            <a:r>
-              <a:rPr kumimoji="1" lang="ja-JP" altLang="en-US" sz="1800" dirty="0"/>
-              <a:t>Reckoning: ツール構築・ツール実行</a:t>
-            </a:r>
-            <a:endParaRPr lang="ja-JP" altLang="en-US" sz="1400" dirty="0"/>
-          </a:p>
-          <a:p>
-            <a:r>
-              <a:rPr kumimoji="1" lang="ja-JP" altLang="en-US" sz="1800" b="1" dirty="0"/>
-              <a:t>レビューワークフロー</a:t>
-            </a:r>
-          </a:p>
-          <a:p>
-            <a:pPr lvl="1"/>
-            <a:r>
-              <a:rPr kumimoji="1" lang="ja-JP" altLang="en-US" sz="1800" dirty="0"/>
-              <a:t>Judgment: この変更を組み込むべきか、どの判断を採るか、何を観点とするか</a:t>
-            </a:r>
-          </a:p>
-          <a:p>
-            <a:pPr lvl="1"/>
-            <a:r>
-              <a:rPr kumimoji="1" lang="ja-JP" altLang="en-US" sz="1800" dirty="0"/>
-              <a:t>Reckoning: 網羅分析、要約、観点別チェック</a:t>
-            </a:r>
-          </a:p>
-          <a:p>
-            <a:endParaRPr lang="ja-JP" altLang="en-US" dirty="0"/>
-          </a:p>
-          <a:p>
-            <a:pPr algn="ctr"/>
-            <a:r>
-              <a:rPr kumimoji="1" lang="ja-JP" altLang="en-US" sz="1800" b="1" dirty="0"/>
-              <a:t>共通</a:t>
-            </a:r>
-          </a:p>
-          <a:p>
-            <a:pPr marL="257173" lvl="1" indent="0" algn="ctr">
-              <a:buNone/>
-            </a:pPr>
-            <a:r>
-              <a:rPr kumimoji="1" lang="ja-JP" altLang="en-US" sz="1800" dirty="0"/>
-              <a:t>人間が枠組みと採否を決め、AI がその範囲で実行する</a:t>
-            </a:r>
-          </a:p>
-        </p:txBody>
-      </p:sp>
-      <p:sp>
-        <p:nvSpPr>
-          <p:cNvPr id="3" name="タイトル 2"/>
-          <p:cNvSpPr>
-            <a:spLocks noGrp="1"/>
-          </p:cNvSpPr>
-          <p:nvPr>
-            <p:ph type="title"/>
-          </p:nvPr>
-        </p:nvSpPr>
-        <p:spPr/>
-        <p:txBody>
-          <a:bodyPr/>
-          <a:lstStyle/>
-          <a:p>
-            <a:r>
-              <a:rPr kumimoji="1" lang="ja-JP" altLang="en-US" dirty="0"/>
-              <a:t>2つの事例が示すパターン</a:t>
-            </a:r>
-          </a:p>
-        </p:txBody>
-      </p:sp>
-    </p:spTree>
-  </p:cSld>
-  <p:clrMapOvr>
-    <a:masterClrMapping/>
-  </p:clrMapOvr>
-</p:sld>
-</file>
-
-<file path=ppt/slides/slide28.xml><?xml version="1.0" encoding="utf-8"?>
-<p:sld xmlns:a="http://schemas.openxmlformats.org/drawingml/2006/main" xmlns:r="http://schemas.openxmlformats.org/officeDocument/2006/relationships" xmlns:p="http://schemas.openxmlformats.org/presentationml/2006/main">
-  <p:cSld>
-    <p:spTree>
-      <p:nvGrpSpPr>
         <p:cNvPr id="1" name="">
           <a:extLst>
             <a:ext uri="{FF2B5EF4-FFF2-40B4-BE49-F238E27FC236}">
-              <a16:creationId xmlns:a16="http://schemas.microsoft.com/office/drawing/2014/main" id="{68959926-2416-36CA-D42E-AD9927535C45}"/>
+              <a16:creationId xmlns:a16="http://schemas.microsoft.com/office/drawing/2014/main" id="{84209145-CC9E-E168-2498-D8E4C15E8B90}"/>
             </a:ext>
           </a:extLst>
         </p:cNvPr>
@@ -11633,7 +11466,7 @@
           <p:cNvPr id="2" name="コンテンツ プレースホルダー 1">
             <a:extLst>
               <a:ext uri="{FF2B5EF4-FFF2-40B4-BE49-F238E27FC236}">
-                <a16:creationId xmlns:a16="http://schemas.microsoft.com/office/drawing/2014/main" id="{409AD931-9E05-3ACB-7061-FAA1E558DB1D}"/>
+                <a16:creationId xmlns:a16="http://schemas.microsoft.com/office/drawing/2014/main" id="{C5499A8D-B6E9-AA26-4B15-CFEAA8FDA979}"/>
               </a:ext>
             </a:extLst>
           </p:cNvPr>
@@ -11644,6 +11477,186 @@
             <p:ph idx="1"/>
           </p:nvPr>
         </p:nvSpPr>
+        <p:spPr>
+          <a:xfrm>
+            <a:off x="308484" y="1282426"/>
+            <a:ext cx="8892666" cy="5371113"/>
+          </a:xfrm>
+        </p:spPr>
+        <p:txBody>
+          <a:bodyPr>
+            <a:normAutofit/>
+          </a:bodyPr>
+          <a:lstStyle/>
+          <a:p>
+            <a:pPr lvl="1"/>
+            <a:r>
+              <a:rPr lang="ja-JP" altLang="en-US" sz="2000" dirty="0"/>
+              <a:t>人間は</a:t>
+            </a:r>
+            <a:r>
+              <a:rPr lang="ja-JP" altLang="en-US" sz="2000" b="1" dirty="0"/>
+              <a:t>チームの作業フローを設計</a:t>
+            </a:r>
+            <a:r>
+              <a:rPr lang="ja-JP" altLang="en-US" sz="2000" dirty="0"/>
+              <a:t>する</a:t>
+            </a:r>
+            <a:endParaRPr lang="en-US" altLang="ja-JP" sz="2000" dirty="0"/>
+          </a:p>
+          <a:p>
+            <a:pPr lvl="1"/>
+            <a:r>
+              <a:rPr lang="ja-JP" altLang="en-US" sz="2000" dirty="0"/>
+              <a:t>人間はフローに必要なツールの</a:t>
+            </a:r>
+            <a:r>
+              <a:rPr lang="ja-JP" altLang="en-US" sz="2000" b="1" dirty="0"/>
+              <a:t>設計</a:t>
+            </a:r>
+            <a:r>
+              <a:rPr lang="ja-JP" altLang="en-US" sz="2000" dirty="0"/>
+              <a:t>🧑‍💻をする</a:t>
+            </a:r>
+            <a:endParaRPr lang="en-US" altLang="ja-JP" sz="1600" dirty="0"/>
+          </a:p>
+          <a:p>
+            <a:pPr marL="257173" lvl="1" indent="0" algn="ctr">
+              <a:buNone/>
+            </a:pPr>
+            <a:endParaRPr lang="en-US" altLang="ja-JP" sz="1600" dirty="0"/>
+          </a:p>
+          <a:p>
+            <a:pPr marL="257173" lvl="1" indent="0">
+              <a:buNone/>
+            </a:pPr>
+            <a:r>
+              <a:rPr lang="ja-JP" altLang="en-US" sz="2000" dirty="0"/>
+              <a:t>　　</a:t>
+            </a:r>
+            <a:r>
+              <a:rPr lang="ja-JP" altLang="en-US" sz="2600" dirty="0"/>
+              <a:t>設計🧑‍💻　　　　   設計🧑‍💻　　     　　   　設計🧑‍💻</a:t>
+            </a:r>
+            <a:br>
+              <a:rPr lang="en-US" altLang="ja-JP" sz="2600" dirty="0"/>
+            </a:br>
+            <a:r>
+              <a:rPr lang="ja-JP" altLang="en-US" sz="2000" dirty="0"/>
+              <a:t>　　 ↓ 作業</a:t>
+            </a:r>
+            <a:r>
+              <a:rPr lang="ja-JP" altLang="en-US" sz="1700" b="1" dirty="0">
+                <a:solidFill>
+                  <a:srgbClr val="FDD000"/>
+                </a:solidFill>
+              </a:rPr>
+              <a:t>フロー</a:t>
+            </a:r>
+            <a:r>
+              <a:rPr lang="ja-JP" altLang="en-US" sz="1700" dirty="0"/>
+              <a:t>を</a:t>
+            </a:r>
+            <a:r>
+              <a:rPr lang="ja-JP" altLang="en-US" sz="1800" dirty="0"/>
+              <a:t>設計</a:t>
+            </a:r>
+            <a:r>
+              <a:rPr lang="ja-JP" altLang="en-US" sz="1700" dirty="0"/>
+              <a:t>　</a:t>
+            </a:r>
+            <a:r>
+              <a:rPr lang="ja-JP" altLang="en-US" sz="2000" dirty="0"/>
+              <a:t>    ↓　　　　　　　　   　　       ↓</a:t>
+            </a:r>
+            <a:endParaRPr lang="en-US" altLang="ja-JP" sz="2000" dirty="0"/>
+          </a:p>
+          <a:p>
+            <a:pPr marL="257173" lvl="1" indent="0">
+              <a:buNone/>
+            </a:pPr>
+            <a:r>
+              <a:rPr lang="ja-JP" altLang="en-US" sz="2000" dirty="0"/>
+              <a:t>　　 ↓　　　　　　            ↓</a:t>
+            </a:r>
+            <a:r>
+              <a:rPr lang="ja-JP" altLang="en-US" sz="1400" dirty="0"/>
+              <a:t>ツールを作成</a:t>
+            </a:r>
+            <a:r>
+              <a:rPr lang="ja-JP" altLang="en-US" sz="1800" dirty="0"/>
+              <a:t>🤖</a:t>
+            </a:r>
+            <a:r>
+              <a:rPr lang="ja-JP" altLang="en-US" sz="1200" dirty="0"/>
+              <a:t>　　　　　　　　</a:t>
+            </a:r>
+            <a:r>
+              <a:rPr lang="ja-JP" altLang="en-US" sz="1900" dirty="0"/>
+              <a:t>          ↓</a:t>
+            </a:r>
+            <a:r>
+              <a:rPr lang="ja-JP" altLang="en-US" sz="1300" dirty="0"/>
+              <a:t>ツールを作成</a:t>
+            </a:r>
+            <a:r>
+              <a:rPr lang="ja-JP" altLang="en-US" sz="1700" dirty="0"/>
+              <a:t>🤖</a:t>
+            </a:r>
+            <a:endParaRPr lang="en-US" altLang="ja-JP" sz="2000" dirty="0"/>
+          </a:p>
+          <a:p>
+            <a:pPr marL="257173" lvl="1" indent="0">
+              <a:buNone/>
+            </a:pPr>
+            <a:r>
+              <a:rPr lang="ja-JP" altLang="en-US" sz="2000" dirty="0"/>
+              <a:t> 　</a:t>
+            </a:r>
+            <a:r>
+              <a:rPr lang="ja-JP" altLang="en-US" sz="2400" dirty="0"/>
+              <a:t>🧑‍💻</a:t>
+            </a:r>
+            <a:r>
+              <a:rPr lang="ja-JP" altLang="en-US" sz="1600" dirty="0"/>
+              <a:t>このページを取込みたい→ 取り込み🛠️→</a:t>
+            </a:r>
+            <a:r>
+              <a:rPr lang="ja-JP" altLang="en-US" sz="2400" dirty="0"/>
+              <a:t>🧑‍💻</a:t>
+            </a:r>
+            <a:r>
+              <a:rPr lang="ja-JP" altLang="en-US" sz="1600" dirty="0"/>
+              <a:t>変更してプッシュ →</a:t>
+            </a:r>
+            <a:r>
+              <a:rPr lang="en-US" altLang="ja-JP" sz="1600" dirty="0" err="1"/>
+              <a:t>Growi</a:t>
+            </a:r>
+            <a:r>
+              <a:rPr lang="ja-JP" altLang="en-US" sz="1600" dirty="0"/>
+              <a:t>同期🛠️</a:t>
+            </a:r>
+            <a:endParaRPr kumimoji="1" lang="en-US" altLang="ja-JP" sz="1600" dirty="0"/>
+          </a:p>
+        </p:txBody>
+      </p:sp>
+      <p:sp>
+        <p:nvSpPr>
+          <p:cNvPr id="3" name="タイトル 2">
+            <a:extLst>
+              <a:ext uri="{FF2B5EF4-FFF2-40B4-BE49-F238E27FC236}">
+                <a16:creationId xmlns:a16="http://schemas.microsoft.com/office/drawing/2014/main" id="{8654F192-3759-0168-90F3-2E2E41338DF6}"/>
+              </a:ext>
+            </a:extLst>
+          </p:cNvPr>
+          <p:cNvSpPr>
+            <a:spLocks noGrp="1"/>
+          </p:cNvSpPr>
+          <p:nvPr>
+            <p:ph type="title"/>
+          </p:nvPr>
+        </p:nvSpPr>
         <p:spPr/>
         <p:txBody>
           <a:bodyPr>
@@ -11652,156 +11665,237 @@
           <a:lstStyle/>
           <a:p>
             <a:r>
-              <a:rPr lang="ja-JP" altLang="en-US" sz="1800" b="1" dirty="0"/>
-              <a:t>制約:</a:t>
-            </a:r>
-            <a:endParaRPr kumimoji="1" lang="en-US" altLang="ja-JP" sz="1800" dirty="0"/>
-          </a:p>
-          <a:p>
-            <a:pPr lvl="1"/>
-            <a:r>
-              <a:rPr kumimoji="1" lang="ja-JP" altLang="en-US" sz="1800" dirty="0"/>
-              <a:t>GROWI </a:t>
-            </a:r>
-            <a:r>
-              <a:rPr lang="ja-JP" altLang="en-US" sz="1800" dirty="0"/>
-              <a:t>は </a:t>
-            </a:r>
-            <a:r>
-              <a:rPr kumimoji="1" lang="ja-JP" altLang="en-US" sz="1800" dirty="0"/>
-              <a:t>社内 </a:t>
-            </a:r>
-            <a:r>
-              <a:rPr lang="ja-JP" altLang="en-US" sz="1800" dirty="0"/>
-              <a:t>ネットワークからしかアクセス不可</a:t>
-            </a:r>
-            <a:r>
-              <a:rPr kumimoji="1" lang="ja-JP" altLang="en-US" sz="1800" dirty="0"/>
-              <a:t>       </a:t>
-            </a:r>
-            <a:br>
-              <a:rPr kumimoji="1" lang="en-US" altLang="ja-JP" sz="1800" dirty="0"/>
-            </a:br>
-            <a:r>
-              <a:rPr lang="ja-JP" altLang="en-US" sz="1800" dirty="0"/>
-              <a:t>🧑‍💻</a:t>
-            </a:r>
-            <a:r>
-              <a:rPr kumimoji="1" lang="ja-JP" altLang="en-US" sz="1800" dirty="0"/>
-              <a:t>判断 → selfhost ランナー</a:t>
-            </a:r>
-          </a:p>
-          <a:p>
-            <a:pPr lvl="1"/>
-            <a:r>
-              <a:rPr kumimoji="1" lang="ja-JP" altLang="en-US" sz="1800" dirty="0"/>
-              <a:t>Git 画像でリポジトリが重い   </a:t>
-            </a:r>
-            <a:br>
-              <a:rPr kumimoji="1" lang="en-US" altLang="ja-JP" sz="1800" dirty="0"/>
-            </a:br>
-            <a:r>
-              <a:rPr lang="ja-JP" altLang="en-US" sz="1800" dirty="0"/>
-              <a:t>🧑‍💻</a:t>
-            </a:r>
-            <a:r>
-              <a:rPr kumimoji="1" lang="ja-JP" altLang="en-US" sz="1800" dirty="0"/>
-              <a:t>判断 → Azure Blob ストレージに保存してリンクを張る</a:t>
-            </a:r>
-          </a:p>
-          <a:p>
-            <a:pPr lvl="1"/>
-            <a:r>
-              <a:rPr kumimoji="1" lang="ja-JP" altLang="en-US" sz="1800" dirty="0"/>
-              <a:t>Blob に格納する手順が面倒   </a:t>
-            </a:r>
-            <a:br>
-              <a:rPr kumimoji="1" lang="en-US" altLang="ja-JP" sz="1800" dirty="0"/>
-            </a:br>
-            <a:r>
-              <a:rPr lang="ja-JP" altLang="en-US" sz="1800" dirty="0"/>
-              <a:t>🧑‍💻</a:t>
-            </a:r>
-            <a:r>
-              <a:rPr kumimoji="1" lang="ja-JP" altLang="en-US" sz="1800" dirty="0"/>
-              <a:t>判断 → CLI スクリプト + ショートカットで実行</a:t>
-            </a:r>
-            <a:endParaRPr kumimoji="1" lang="en-US" altLang="ja-JP" sz="1800" dirty="0"/>
-          </a:p>
-          <a:p>
-            <a:pPr lvl="1"/>
-            <a:r>
-              <a:rPr lang="ja-JP" altLang="en-US" sz="1800" dirty="0"/>
-              <a:t>品質管理部の方が</a:t>
-            </a:r>
-            <a:r>
-              <a:rPr lang="en-US" altLang="ja-JP" sz="1800" dirty="0"/>
-              <a:t>Wiki</a:t>
-            </a:r>
-            <a:r>
-              <a:rPr lang="ja-JP" altLang="en-US" sz="1800" dirty="0"/>
-              <a:t>編集したい場合は？ </a:t>
-            </a:r>
-            <a:br>
-              <a:rPr lang="en-US" altLang="ja-JP" sz="1800" dirty="0"/>
-            </a:br>
-            <a:r>
-              <a:rPr lang="ja-JP" altLang="en-US" sz="1800" dirty="0"/>
-              <a:t>🧑‍💻判断 → </a:t>
-            </a:r>
-            <a:r>
-              <a:rPr lang="en-US" altLang="ja-JP" sz="1800" dirty="0" err="1"/>
-              <a:t>Growi</a:t>
-            </a:r>
-            <a:r>
-              <a:rPr lang="ja-JP" altLang="en-US" sz="1800" dirty="0"/>
-              <a:t>からリポジトリへのの取り込み機能</a:t>
-            </a:r>
-            <a:endParaRPr lang="en-US" altLang="ja-JP" sz="1800" dirty="0"/>
-          </a:p>
-          <a:p>
-            <a:pPr marL="257173" lvl="1" indent="0">
-              <a:buNone/>
-            </a:pPr>
-            <a:endParaRPr lang="en-US" altLang="ja-JP" sz="1800" dirty="0"/>
-          </a:p>
-          <a:p>
-            <a:pPr marL="257173" lvl="1" indent="0">
-              <a:buNone/>
-            </a:pPr>
-            <a:r>
-              <a:rPr lang="ja-JP" altLang="en-US" sz="1800" dirty="0"/>
-              <a:t>決めてしまえば、</a:t>
-            </a:r>
-            <a:r>
-              <a:rPr lang="en-US" altLang="ja-JP" sz="1800" dirty="0"/>
-              <a:t>AI</a:t>
-            </a:r>
-            <a:r>
-              <a:rPr lang="ja-JP" altLang="en-US" sz="1800" dirty="0"/>
-              <a:t>🤖がサクッと実装してくれる</a:t>
-            </a:r>
-            <a:r>
-              <a:rPr lang="en-US" altLang="ja-JP" sz="1800" dirty="0"/>
-              <a:t>(</a:t>
-            </a:r>
-            <a:r>
-              <a:rPr lang="ja-JP" altLang="en-US" sz="1800" dirty="0"/>
-              <a:t>演算）</a:t>
-            </a:r>
-            <a:br>
-              <a:rPr lang="en-US" altLang="ja-JP" sz="1600" dirty="0"/>
-            </a:br>
-            <a:endParaRPr kumimoji="1" lang="en-US" altLang="ja-JP" sz="1600" dirty="0"/>
+              <a:rPr lang="ja-JP" altLang="en-US" sz="2000" dirty="0"/>
+              <a:t>エンジニアリングとは判断（</a:t>
+            </a:r>
+            <a:r>
+              <a:rPr lang="en-US" altLang="ja-JP" sz="2000" dirty="0"/>
+              <a:t>Judgement</a:t>
+            </a:r>
+            <a:r>
+              <a:rPr lang="ja-JP" altLang="en-US" sz="2000" dirty="0"/>
+              <a:t>）である</a:t>
+            </a:r>
+            <a:endParaRPr lang="ja-JP" altLang="en-US" dirty="0"/>
           </a:p>
         </p:txBody>
       </p:sp>
       <p:sp>
         <p:nvSpPr>
-          <p:cNvPr id="3" name="タイトル 2">
+          <p:cNvPr id="4" name="四角形: 角を丸くする 3">
             <a:extLst>
               <a:ext uri="{FF2B5EF4-FFF2-40B4-BE49-F238E27FC236}">
-                <a16:creationId xmlns:a16="http://schemas.microsoft.com/office/drawing/2014/main" id="{5C556F17-869E-20ED-D876-B8047E071C6D}"/>
+                <a16:creationId xmlns:a16="http://schemas.microsoft.com/office/drawing/2014/main" id="{3021CFD9-A676-4B72-2F4B-754832973D37}"/>
+              </a:ext>
+            </a:extLst>
+          </p:cNvPr>
+          <p:cNvSpPr/>
+          <p:nvPr/>
+        </p:nvSpPr>
+        <p:spPr>
+          <a:xfrm>
+            <a:off x="650522" y="2456892"/>
+            <a:ext cx="8604956" cy="2340260"/>
+          </a:xfrm>
+          <a:prstGeom prst="roundRect">
+            <a:avLst/>
+          </a:prstGeom>
+          <a:noFill/>
+          <a:ln w="19050" cap="flat" cmpd="sng" algn="ctr">
+            <a:solidFill>
+              <a:srgbClr val="D9D9D9"/>
+            </a:solidFill>
+            <a:prstDash val="solid"/>
+            <a:round/>
+            <a:headEnd type="none" w="med" len="med"/>
+            <a:tailEnd type="none" w="med" len="med"/>
+          </a:ln>
+        </p:spPr>
+        <p:style>
+          <a:lnRef idx="0">
+            <a:scrgbClr r="0" g="0" b="0"/>
+          </a:lnRef>
+          <a:fillRef idx="0">
+            <a:scrgbClr r="0" g="0" b="0"/>
+          </a:fillRef>
+          <a:effectRef idx="0">
+            <a:scrgbClr r="0" g="0" b="0"/>
+          </a:effectRef>
+          <a:fontRef idx="minor">
+            <a:schemeClr val="accent1"/>
+          </a:fontRef>
+        </p:style>
+        <p:txBody>
+          <a:bodyPr rtlCol="0" anchor="ctr"/>
+          <a:lstStyle/>
+          <a:p>
+            <a:pPr algn="ctr"/>
+            <a:endParaRPr kumimoji="1" lang="ja-JP" altLang="en-US"/>
+          </a:p>
+        </p:txBody>
+      </p:sp>
+      <p:sp>
+        <p:nvSpPr>
+          <p:cNvPr id="5" name="四角形: 角を丸くする 4">
+            <a:extLst>
+              <a:ext uri="{FF2B5EF4-FFF2-40B4-BE49-F238E27FC236}">
+                <a16:creationId xmlns:a16="http://schemas.microsoft.com/office/drawing/2014/main" id="{5A010F57-1135-3471-91D6-CDD6ED349DB7}"/>
+              </a:ext>
+            </a:extLst>
+          </p:cNvPr>
+          <p:cNvSpPr/>
+          <p:nvPr/>
+        </p:nvSpPr>
+        <p:spPr>
+          <a:xfrm>
+            <a:off x="812540" y="4149080"/>
+            <a:ext cx="8128520" cy="540060"/>
+          </a:xfrm>
+          <a:prstGeom prst="roundRect">
+            <a:avLst/>
+          </a:prstGeom>
+          <a:noFill/>
+          <a:ln w="19050" cap="flat" cmpd="sng" algn="ctr">
+            <a:solidFill>
+              <a:srgbClr val="FDD000"/>
+            </a:solidFill>
+            <a:prstDash val="solid"/>
+            <a:round/>
+            <a:headEnd type="none" w="med" len="med"/>
+            <a:tailEnd type="none" w="med" len="med"/>
+          </a:ln>
+        </p:spPr>
+        <p:style>
+          <a:lnRef idx="0">
+            <a:scrgbClr r="0" g="0" b="0"/>
+          </a:lnRef>
+          <a:fillRef idx="0">
+            <a:scrgbClr r="0" g="0" b="0"/>
+          </a:fillRef>
+          <a:effectRef idx="0">
+            <a:scrgbClr r="0" g="0" b="0"/>
+          </a:effectRef>
+          <a:fontRef idx="minor">
+            <a:schemeClr val="accent1"/>
+          </a:fontRef>
+        </p:style>
+        <p:txBody>
+          <a:bodyPr rtlCol="0" anchor="ctr"/>
+          <a:lstStyle/>
+          <a:p>
+            <a:pPr algn="ctr"/>
+            <a:endParaRPr kumimoji="1" lang="ja-JP" altLang="en-US"/>
+          </a:p>
+        </p:txBody>
+      </p:sp>
+    </p:spTree>
+    <p:extLst>
+      <p:ext uri="{BB962C8B-B14F-4D97-AF65-F5344CB8AC3E}">
+        <p14:creationId xmlns:p14="http://schemas.microsoft.com/office/powerpoint/2010/main" val="930401620"/>
+      </p:ext>
+    </p:extLst>
+  </p:cSld>
+  <p:clrMapOvr>
+    <a:masterClrMapping/>
+  </p:clrMapOvr>
+</p:sld>
+</file>
+
+<file path=ppt/slides/slide28.xml><?xml version="1.0" encoding="utf-8"?>
+<p:sld xmlns:a="http://schemas.openxmlformats.org/drawingml/2006/main" xmlns:r="http://schemas.openxmlformats.org/officeDocument/2006/relationships" xmlns:p="http://schemas.openxmlformats.org/presentationml/2006/main">
+  <p:cSld>
+    <p:spTree>
+      <p:nvGrpSpPr>
+        <p:cNvPr id="1" name="">
+          <a:extLst>
+            <a:ext uri="{FF2B5EF4-FFF2-40B4-BE49-F238E27FC236}">
+              <a16:creationId xmlns:a16="http://schemas.microsoft.com/office/drawing/2014/main" id="{06804BAF-0E45-9371-E61B-FDFDBD4D151E}"/>
+            </a:ext>
+          </a:extLst>
+        </p:cNvPr>
+        <p:cNvGrpSpPr/>
+        <p:nvPr/>
+      </p:nvGrpSpPr>
+      <p:grpSpPr>
+        <a:xfrm>
+          <a:off x="0" y="0"/>
+          <a:ext cx="0" cy="0"/>
+          <a:chOff x="0" y="0"/>
+          <a:chExt cx="0" cy="0"/>
+        </a:xfrm>
+      </p:grpSpPr>
+      <p:pic>
+        <p:nvPicPr>
+          <p:cNvPr id="6" name="コンテンツ プレースホルダー 5">
+            <a:extLst>
+              <a:ext uri="{FF2B5EF4-FFF2-40B4-BE49-F238E27FC236}">
+                <a16:creationId xmlns:a16="http://schemas.microsoft.com/office/drawing/2014/main" id="{9C44AEDC-B0B7-9CE5-A75E-AC1664309391}"/>
+              </a:ext>
+            </a:extLst>
+          </p:cNvPr>
+          <p:cNvPicPr>
+            <a:picLocks noGrp="1" noChangeAspect="1"/>
+          </p:cNvPicPr>
+          <p:nvPr>
+            <p:ph idx="1"/>
+          </p:nvPr>
+        </p:nvPicPr>
+        <p:blipFill>
+          <a:blip r:embed="rId2"/>
+          <a:stretch>
+            <a:fillRect/>
+          </a:stretch>
+        </p:blipFill>
+        <p:spPr>
+          <a:xfrm>
+            <a:off x="56456" y="1441500"/>
+            <a:ext cx="9468858" cy="4464496"/>
+          </a:xfrm>
+          <a:prstGeom prst="rect">
+            <a:avLst/>
+          </a:prstGeom>
+        </p:spPr>
+      </p:pic>
+      <p:sp>
+        <p:nvSpPr>
+          <p:cNvPr id="3" name="スライド番号プレースホルダー 2">
+            <a:extLst>
+              <a:ext uri="{FF2B5EF4-FFF2-40B4-BE49-F238E27FC236}">
+                <a16:creationId xmlns:a16="http://schemas.microsoft.com/office/drawing/2014/main" id="{723ADCDE-984F-B884-E663-5AA424D6C079}"/>
+              </a:ext>
+            </a:extLst>
+          </p:cNvPr>
+          <p:cNvSpPr>
+            <a:spLocks noGrp="1"/>
+          </p:cNvSpPr>
+          <p:nvPr>
+            <p:ph type="sldNum" sz="quarter" idx="4"/>
+          </p:nvPr>
+        </p:nvSpPr>
+        <p:spPr/>
+        <p:txBody>
+          <a:bodyPr/>
+          <a:lstStyle/>
+          <a:p>
+            <a:fld id="{C314D315-6C69-40BF-98D6-60239DAB9584}" type="slidenum">
+              <a:rPr lang="ja-JP" altLang="en-US" smtClean="0"/>
+              <a:pPr/>
+              <a:t>27</a:t>
+            </a:fld>
+            <a:r>
+              <a:rPr lang="ja-JP" altLang="en-US"/>
+              <a:t>　</a:t>
+            </a:r>
+            <a:endParaRPr lang="ja-JP" altLang="en-US" dirty="0"/>
+          </a:p>
+        </p:txBody>
+      </p:sp>
+      <p:sp>
+        <p:nvSpPr>
+          <p:cNvPr id="4" name="タイトル 3">
+            <a:extLst>
+              <a:ext uri="{FF2B5EF4-FFF2-40B4-BE49-F238E27FC236}">
+                <a16:creationId xmlns:a16="http://schemas.microsoft.com/office/drawing/2014/main" id="{BA6B6873-FBBA-CD45-20A9-54A4C8C440DA}"/>
               </a:ext>
             </a:extLst>
           </p:cNvPr>
@@ -11818,16 +11912,494 @@
           <a:lstStyle/>
           <a:p>
             <a:r>
+              <a:rPr lang="ja-JP" altLang="en-US" dirty="0"/>
+              <a:t>ワークフローの概要</a:t>
+            </a:r>
+            <a:endParaRPr kumimoji="1" lang="ja-JP" altLang="en-US" dirty="0"/>
+          </a:p>
+        </p:txBody>
+      </p:sp>
+      <p:sp>
+        <p:nvSpPr>
+          <p:cNvPr id="5" name="吹き出し: 四角形 4">
+            <a:extLst>
+              <a:ext uri="{FF2B5EF4-FFF2-40B4-BE49-F238E27FC236}">
+                <a16:creationId xmlns:a16="http://schemas.microsoft.com/office/drawing/2014/main" id="{7FC4D3B5-A463-BBD6-7D7E-23A683AD4CC5}"/>
+              </a:ext>
+            </a:extLst>
+          </p:cNvPr>
+          <p:cNvSpPr/>
+          <p:nvPr/>
+        </p:nvSpPr>
+        <p:spPr>
+          <a:xfrm>
+            <a:off x="1820652" y="1556792"/>
+            <a:ext cx="1692188" cy="648072"/>
+          </a:xfrm>
+          <a:prstGeom prst="wedgeRectCallout">
+            <a:avLst/>
+          </a:prstGeom>
+          <a:solidFill>
+            <a:schemeClr val="accent6">
+              <a:alpha val="50000"/>
+            </a:schemeClr>
+          </a:solidFill>
+          <a:ln>
+            <a:noFill/>
+          </a:ln>
+        </p:spPr>
+        <p:style>
+          <a:lnRef idx="0">
+            <a:scrgbClr r="0" g="0" b="0"/>
+          </a:lnRef>
+          <a:fillRef idx="0">
+            <a:scrgbClr r="0" g="0" b="0"/>
+          </a:fillRef>
+          <a:effectRef idx="0">
+            <a:scrgbClr r="0" g="0" b="0"/>
+          </a:effectRef>
+          <a:fontRef idx="minor">
+            <a:schemeClr val="lt1"/>
+          </a:fontRef>
+        </p:style>
+        <p:txBody>
+          <a:bodyPr rtlCol="0" anchor="ctr"/>
+          <a:lstStyle/>
+          <a:p>
+            <a:pPr algn="ctr"/>
+            <a:r>
+              <a:rPr lang="ja-JP" altLang="en-US" dirty="0"/>
+              <a:t>作者が</a:t>
+            </a:r>
+            <a:r>
+              <a:rPr lang="ja-JP" altLang="en-US" b="1" dirty="0"/>
+              <a:t>責任</a:t>
+            </a:r>
+            <a:r>
+              <a:rPr lang="ja-JP" altLang="en-US" dirty="0"/>
+              <a:t>を持つ</a:t>
+            </a:r>
+            <a:endParaRPr kumimoji="1" lang="ja-JP" altLang="en-US" dirty="0"/>
+          </a:p>
+        </p:txBody>
+      </p:sp>
+      <p:sp>
+        <p:nvSpPr>
+          <p:cNvPr id="7" name="吹き出し: 四角形 6">
+            <a:extLst>
+              <a:ext uri="{FF2B5EF4-FFF2-40B4-BE49-F238E27FC236}">
+                <a16:creationId xmlns:a16="http://schemas.microsoft.com/office/drawing/2014/main" id="{E34B8805-E478-FC77-D2BA-0435AC1E9BB2}"/>
+              </a:ext>
+            </a:extLst>
+          </p:cNvPr>
+          <p:cNvSpPr/>
+          <p:nvPr/>
+        </p:nvSpPr>
+        <p:spPr>
+          <a:xfrm>
+            <a:off x="5817096" y="1556792"/>
+            <a:ext cx="2049065" cy="648072"/>
+          </a:xfrm>
+          <a:prstGeom prst="wedgeRectCallout">
+            <a:avLst/>
+          </a:prstGeom>
+          <a:solidFill>
+            <a:schemeClr val="accent6">
+              <a:alpha val="50000"/>
+            </a:schemeClr>
+          </a:solidFill>
+          <a:ln>
+            <a:noFill/>
+          </a:ln>
+        </p:spPr>
+        <p:style>
+          <a:lnRef idx="0">
+            <a:scrgbClr r="0" g="0" b="0"/>
+          </a:lnRef>
+          <a:fillRef idx="0">
+            <a:scrgbClr r="0" g="0" b="0"/>
+          </a:fillRef>
+          <a:effectRef idx="0">
+            <a:scrgbClr r="0" g="0" b="0"/>
+          </a:effectRef>
+          <a:fontRef idx="minor">
+            <a:schemeClr val="lt1"/>
+          </a:fontRef>
+        </p:style>
+        <p:txBody>
+          <a:bodyPr rtlCol="0" anchor="ctr"/>
+          <a:lstStyle/>
+          <a:p>
+            <a:pPr algn="ctr"/>
+            <a:r>
+              <a:rPr lang="en-US" altLang="ja-JP" dirty="0"/>
+              <a:t>Self review</a:t>
+            </a:r>
+            <a:r>
+              <a:rPr lang="ja-JP" altLang="en-US" dirty="0"/>
+              <a:t>の結果は</a:t>
+            </a:r>
+            <a:r>
+              <a:rPr lang="en-US" altLang="ja-JP" b="1" dirty="0"/>
+              <a:t>PR</a:t>
+            </a:r>
+            <a:r>
+              <a:rPr lang="ja-JP" altLang="en-US" b="1" dirty="0"/>
+              <a:t>に残す</a:t>
+            </a:r>
+            <a:endParaRPr kumimoji="1" lang="ja-JP" altLang="en-US" b="1" dirty="0"/>
+          </a:p>
+        </p:txBody>
+      </p:sp>
+      <p:sp>
+        <p:nvSpPr>
+          <p:cNvPr id="8" name="吹き出し: 四角形 7">
+            <a:extLst>
+              <a:ext uri="{FF2B5EF4-FFF2-40B4-BE49-F238E27FC236}">
+                <a16:creationId xmlns:a16="http://schemas.microsoft.com/office/drawing/2014/main" id="{81B6F3C5-AA4B-16A8-0B11-DE5EDC8C5A4F}"/>
+              </a:ext>
+            </a:extLst>
+          </p:cNvPr>
+          <p:cNvSpPr/>
+          <p:nvPr/>
+        </p:nvSpPr>
+        <p:spPr>
+          <a:xfrm>
+            <a:off x="524508" y="4652540"/>
+            <a:ext cx="2844316" cy="648072"/>
+          </a:xfrm>
+          <a:prstGeom prst="wedgeRectCallout">
+            <a:avLst>
+              <a:gd name="adj1" fmla="val 23346"/>
+              <a:gd name="adj2" fmla="val -72952"/>
+            </a:avLst>
+          </a:prstGeom>
+          <a:solidFill>
+            <a:schemeClr val="accent6">
+              <a:alpha val="50000"/>
+            </a:schemeClr>
+          </a:solidFill>
+          <a:ln>
+            <a:noFill/>
+          </a:ln>
+        </p:spPr>
+        <p:style>
+          <a:lnRef idx="0">
+            <a:scrgbClr r="0" g="0" b="0"/>
+          </a:lnRef>
+          <a:fillRef idx="0">
+            <a:scrgbClr r="0" g="0" b="0"/>
+          </a:fillRef>
+          <a:effectRef idx="0">
+            <a:scrgbClr r="0" g="0" b="0"/>
+          </a:effectRef>
+          <a:fontRef idx="minor">
+            <a:schemeClr val="lt1"/>
+          </a:fontRef>
+        </p:style>
+        <p:txBody>
+          <a:bodyPr rtlCol="0" anchor="ctr"/>
+          <a:lstStyle/>
+          <a:p>
+            <a:pPr algn="ctr"/>
+            <a:r>
+              <a:rPr lang="ja-JP" altLang="en-US" dirty="0"/>
+              <a:t>🤖</a:t>
+            </a:r>
+            <a:r>
               <a:rPr kumimoji="1" lang="ja-JP" altLang="en-US" dirty="0"/>
-              <a:t>制約：何を気にする必要があったか</a:t>
-            </a:r>
+              <a:t>差分の説明</a:t>
+            </a:r>
+            <a:endParaRPr kumimoji="1" lang="en-US" altLang="ja-JP" dirty="0"/>
+          </a:p>
+          <a:p>
+            <a:pPr algn="ctr"/>
+            <a:r>
+              <a:rPr lang="ja-JP" altLang="en-US" dirty="0"/>
+              <a:t>🧑‍💻</a:t>
+            </a:r>
+            <a:r>
+              <a:rPr lang="ja-JP" altLang="en-US" b="1" dirty="0"/>
+              <a:t>メンタルモデル</a:t>
+            </a:r>
+            <a:r>
+              <a:rPr lang="ja-JP" altLang="en-US" dirty="0"/>
+              <a:t>の形成</a:t>
+            </a:r>
+            <a:endParaRPr kumimoji="1" lang="ja-JP" altLang="en-US" dirty="0"/>
+          </a:p>
+        </p:txBody>
+      </p:sp>
+      <p:sp>
+        <p:nvSpPr>
+          <p:cNvPr id="9" name="吹き出し: 四角形 8">
+            <a:extLst>
+              <a:ext uri="{FF2B5EF4-FFF2-40B4-BE49-F238E27FC236}">
+                <a16:creationId xmlns:a16="http://schemas.microsoft.com/office/drawing/2014/main" id="{BBFF8199-961B-33C5-C0C7-F74D88F1CD61}"/>
+              </a:ext>
+            </a:extLst>
+          </p:cNvPr>
+          <p:cNvSpPr/>
+          <p:nvPr/>
+        </p:nvSpPr>
+        <p:spPr>
+          <a:xfrm>
+            <a:off x="3638757" y="4652540"/>
+            <a:ext cx="2304256" cy="648072"/>
+          </a:xfrm>
+          <a:prstGeom prst="wedgeRectCallout">
+            <a:avLst>
+              <a:gd name="adj1" fmla="val -12728"/>
+              <a:gd name="adj2" fmla="val -82829"/>
+            </a:avLst>
+          </a:prstGeom>
+          <a:solidFill>
+            <a:schemeClr val="accent6">
+              <a:alpha val="50000"/>
+            </a:schemeClr>
+          </a:solidFill>
+          <a:ln>
+            <a:noFill/>
+          </a:ln>
+        </p:spPr>
+        <p:style>
+          <a:lnRef idx="0">
+            <a:scrgbClr r="0" g="0" b="0"/>
+          </a:lnRef>
+          <a:fillRef idx="0">
+            <a:scrgbClr r="0" g="0" b="0"/>
+          </a:fillRef>
+          <a:effectRef idx="0">
+            <a:scrgbClr r="0" g="0" b="0"/>
+          </a:effectRef>
+          <a:fontRef idx="minor">
+            <a:schemeClr val="lt1"/>
+          </a:fontRef>
+        </p:style>
+        <p:txBody>
+          <a:bodyPr rtlCol="0" anchor="ctr"/>
+          <a:lstStyle/>
+          <a:p>
+            <a:pPr algn="ctr"/>
+            <a:r>
+              <a:rPr lang="ja-JP" altLang="en-US" dirty="0"/>
+              <a:t>🤖クリティカルな観点に</a:t>
+            </a:r>
+            <a:r>
+              <a:rPr lang="ja-JP" altLang="en-US" b="1" dirty="0"/>
+              <a:t>絞る</a:t>
+            </a:r>
+            <a:endParaRPr kumimoji="1" lang="ja-JP" altLang="en-US" b="1" dirty="0"/>
+          </a:p>
+        </p:txBody>
+      </p:sp>
+      <p:sp>
+        <p:nvSpPr>
+          <p:cNvPr id="10" name="吹き出し: 四角形 9">
+            <a:extLst>
+              <a:ext uri="{FF2B5EF4-FFF2-40B4-BE49-F238E27FC236}">
+                <a16:creationId xmlns:a16="http://schemas.microsoft.com/office/drawing/2014/main" id="{6E135075-1250-6BF8-A330-2A0FD32149AE}"/>
+              </a:ext>
+            </a:extLst>
+          </p:cNvPr>
+          <p:cNvSpPr/>
+          <p:nvPr/>
+        </p:nvSpPr>
+        <p:spPr>
+          <a:xfrm>
+            <a:off x="6017886" y="4657084"/>
+            <a:ext cx="2499510" cy="648072"/>
+          </a:xfrm>
+          <a:prstGeom prst="wedgeRectCallout">
+            <a:avLst>
+              <a:gd name="adj1" fmla="val -26617"/>
+              <a:gd name="adj2" fmla="val -89884"/>
+            </a:avLst>
+          </a:prstGeom>
+          <a:solidFill>
+            <a:schemeClr val="accent6">
+              <a:alpha val="50000"/>
+            </a:schemeClr>
+          </a:solidFill>
+          <a:ln>
+            <a:noFill/>
+          </a:ln>
+        </p:spPr>
+        <p:style>
+          <a:lnRef idx="0">
+            <a:scrgbClr r="0" g="0" b="0"/>
+          </a:lnRef>
+          <a:fillRef idx="0">
+            <a:scrgbClr r="0" g="0" b="0"/>
+          </a:fillRef>
+          <a:effectRef idx="0">
+            <a:scrgbClr r="0" g="0" b="0"/>
+          </a:effectRef>
+          <a:fontRef idx="minor">
+            <a:schemeClr val="lt1"/>
+          </a:fontRef>
+        </p:style>
+        <p:txBody>
+          <a:bodyPr rtlCol="0" anchor="ctr"/>
+          <a:lstStyle/>
+          <a:p>
+            <a:pPr algn="ctr"/>
+            <a:r>
+              <a:rPr lang="ja-JP" altLang="en-US" dirty="0"/>
+              <a:t>🧑‍💻ちゃんと</a:t>
+            </a:r>
+            <a:r>
+              <a:rPr lang="ja-JP" altLang="en-US" b="1" dirty="0"/>
+              <a:t>理解</a:t>
+            </a:r>
+            <a:r>
+              <a:rPr lang="ja-JP" altLang="en-US" dirty="0"/>
+              <a:t>して指摘・コメントする</a:t>
+            </a:r>
+            <a:endParaRPr kumimoji="1" lang="ja-JP" altLang="en-US" dirty="0"/>
+          </a:p>
+        </p:txBody>
+      </p:sp>
+      <p:sp>
+        <p:nvSpPr>
+          <p:cNvPr id="11" name="吹き出し: 四角形 10">
+            <a:extLst>
+              <a:ext uri="{FF2B5EF4-FFF2-40B4-BE49-F238E27FC236}">
+                <a16:creationId xmlns:a16="http://schemas.microsoft.com/office/drawing/2014/main" id="{25158409-FCC9-9EFB-F1EF-86AD1BF3CCC0}"/>
+              </a:ext>
+            </a:extLst>
+          </p:cNvPr>
+          <p:cNvSpPr/>
+          <p:nvPr/>
+        </p:nvSpPr>
+        <p:spPr>
+          <a:xfrm>
+            <a:off x="4775260" y="3429000"/>
+            <a:ext cx="2950048" cy="618156"/>
+          </a:xfrm>
+          <a:prstGeom prst="wedgeRectCallout">
+            <a:avLst>
+              <a:gd name="adj1" fmla="val -26986"/>
+              <a:gd name="adj2" fmla="val -84308"/>
+            </a:avLst>
+          </a:prstGeom>
+          <a:solidFill>
+            <a:schemeClr val="accent6">
+              <a:alpha val="50000"/>
+            </a:schemeClr>
+          </a:solidFill>
+          <a:ln>
+            <a:noFill/>
+          </a:ln>
+        </p:spPr>
+        <p:style>
+          <a:lnRef idx="0">
+            <a:scrgbClr r="0" g="0" b="0"/>
+          </a:lnRef>
+          <a:fillRef idx="0">
+            <a:scrgbClr r="0" g="0" b="0"/>
+          </a:fillRef>
+          <a:effectRef idx="0">
+            <a:scrgbClr r="0" g="0" b="0"/>
+          </a:effectRef>
+          <a:fontRef idx="minor">
+            <a:schemeClr val="lt1"/>
+          </a:fontRef>
+        </p:style>
+        <p:txBody>
+          <a:bodyPr rtlCol="0" anchor="ctr"/>
+          <a:lstStyle/>
+          <a:p>
+            <a:pPr algn="ctr"/>
+            <a:r>
+              <a:rPr lang="ja-JP" altLang="en-US" dirty="0"/>
+              <a:t>🤖セルフレビュー済みの内容は重複指摘しない</a:t>
+            </a:r>
+            <a:endParaRPr kumimoji="1" lang="ja-JP" altLang="en-US" dirty="0"/>
+          </a:p>
+        </p:txBody>
+      </p:sp>
+      <p:sp>
+        <p:nvSpPr>
+          <p:cNvPr id="13" name="テキスト ボックス 12">
+            <a:extLst>
+              <a:ext uri="{FF2B5EF4-FFF2-40B4-BE49-F238E27FC236}">
+                <a16:creationId xmlns:a16="http://schemas.microsoft.com/office/drawing/2014/main" id="{AACC09D1-03B9-BB37-68B5-2F6F7FBF1C6C}"/>
+              </a:ext>
+            </a:extLst>
+          </p:cNvPr>
+          <p:cNvSpPr txBox="1"/>
+          <p:nvPr/>
+        </p:nvSpPr>
+        <p:spPr>
+          <a:xfrm>
+            <a:off x="2522730" y="6107786"/>
+            <a:ext cx="4860540" cy="646331"/>
+          </a:xfrm>
+          <a:prstGeom prst="rect">
+            <a:avLst/>
+          </a:prstGeom>
+          <a:noFill/>
+        </p:spPr>
+        <p:txBody>
+          <a:bodyPr wrap="square">
+            <a:spAutoFit/>
+          </a:bodyPr>
+          <a:lstStyle/>
+          <a:p>
+            <a:r>
+              <a:rPr kumimoji="1" lang="ja-JP" altLang="en-US" sz="1800" b="1" dirty="0"/>
+              <a:t>重要なのは「AI に言われたから」ではなく</a:t>
+            </a:r>
+          </a:p>
+          <a:p>
+            <a:r>
+              <a:rPr kumimoji="1" lang="ja-JP" altLang="en-US" sz="1800" b="1" dirty="0"/>
+              <a:t>「自分はこう判断した」と残すこと</a:t>
+            </a:r>
+          </a:p>
+        </p:txBody>
+      </p:sp>
+      <p:sp>
+        <p:nvSpPr>
+          <p:cNvPr id="15" name="テキスト ボックス 14">
+            <a:extLst>
+              <a:ext uri="{FF2B5EF4-FFF2-40B4-BE49-F238E27FC236}">
+                <a16:creationId xmlns:a16="http://schemas.microsoft.com/office/drawing/2014/main" id="{045F65EC-A58D-F867-8A02-309DCF21BBAD}"/>
+              </a:ext>
+            </a:extLst>
+          </p:cNvPr>
+          <p:cNvSpPr txBox="1"/>
+          <p:nvPr/>
+        </p:nvSpPr>
+        <p:spPr>
+          <a:xfrm>
+            <a:off x="2523122" y="5797902"/>
+            <a:ext cx="2645902" cy="369332"/>
+          </a:xfrm>
+          <a:prstGeom prst="rect">
+            <a:avLst/>
+          </a:prstGeom>
+          <a:noFill/>
+        </p:spPr>
+        <p:txBody>
+          <a:bodyPr wrap="square">
+            <a:spAutoFit/>
+          </a:bodyPr>
+          <a:lstStyle/>
+          <a:p>
+            <a:r>
+              <a:rPr lang="ja-JP" altLang="en-US" b="1" dirty="0"/>
+              <a:t>作者・レビュワー共に、</a:t>
+            </a:r>
+            <a:endParaRPr lang="en-US" altLang="ja-JP" b="1" dirty="0"/>
           </a:p>
         </p:txBody>
       </p:sp>
     </p:spTree>
     <p:extLst>
       <p:ext uri="{BB962C8B-B14F-4D97-AF65-F5344CB8AC3E}">
-        <p14:creationId xmlns:p14="http://schemas.microsoft.com/office/powerpoint/2010/main" val="312428593"/>
+        <p14:creationId xmlns:p14="http://schemas.microsoft.com/office/powerpoint/2010/main" val="272562364"/>
       </p:ext>
     </p:extLst>
   </p:cSld>
@@ -11838,6 +12410,279 @@
 </file>
 
 <file path=ppt/slides/slide29.xml><?xml version="1.0" encoding="utf-8"?>
+<p:sld xmlns:a="http://schemas.openxmlformats.org/drawingml/2006/main" xmlns:r="http://schemas.openxmlformats.org/officeDocument/2006/relationships" xmlns:p="http://schemas.openxmlformats.org/presentationml/2006/main">
+  <p:cSld>
+    <p:spTree>
+      <p:nvGrpSpPr>
+        <p:cNvPr id="1" name="">
+          <a:extLst>
+            <a:ext uri="{FF2B5EF4-FFF2-40B4-BE49-F238E27FC236}">
+              <a16:creationId xmlns:a16="http://schemas.microsoft.com/office/drawing/2014/main" id="{DEB019F2-1916-EC49-C447-6CFB51CD0B9A}"/>
+            </a:ext>
+          </a:extLst>
+        </p:cNvPr>
+        <p:cNvGrpSpPr/>
+        <p:nvPr/>
+      </p:nvGrpSpPr>
+      <p:grpSpPr>
+        <a:xfrm>
+          <a:off x="0" y="0"/>
+          <a:ext cx="0" cy="0"/>
+          <a:chOff x="0" y="0"/>
+          <a:chExt cx="0" cy="0"/>
+        </a:xfrm>
+      </p:grpSpPr>
+      <p:sp>
+        <p:nvSpPr>
+          <p:cNvPr id="2" name="コンテンツ プレースホルダー 1">
+            <a:extLst>
+              <a:ext uri="{FF2B5EF4-FFF2-40B4-BE49-F238E27FC236}">
+                <a16:creationId xmlns:a16="http://schemas.microsoft.com/office/drawing/2014/main" id="{5C34B18D-6E76-2900-D135-3A71908B83E8}"/>
+              </a:ext>
+            </a:extLst>
+          </p:cNvPr>
+          <p:cNvSpPr>
+            <a:spLocks noGrp="1"/>
+          </p:cNvSpPr>
+          <p:nvPr>
+            <p:ph idx="1"/>
+          </p:nvPr>
+        </p:nvSpPr>
+        <p:spPr/>
+        <p:txBody>
+          <a:bodyPr>
+            <a:normAutofit lnSpcReduction="10000"/>
+          </a:bodyPr>
+          <a:lstStyle/>
+          <a:p>
+            <a:r>
+              <a:rPr kumimoji="1" lang="ja-JP" altLang="en-US" sz="1600" b="1" dirty="0"/>
+              <a:t>Judgment（判断）</a:t>
+            </a:r>
+          </a:p>
+          <a:p>
+            <a:pPr lvl="1"/>
+            <a:r>
+              <a:rPr kumimoji="1" lang="ja-JP" altLang="en-US" sz="1600" dirty="0"/>
+              <a:t>何を</a:t>
+            </a:r>
+            <a:r>
+              <a:rPr kumimoji="1" lang="ja-JP" altLang="en-US" sz="1600" b="1" dirty="0"/>
+              <a:t>問う</a:t>
+            </a:r>
+            <a:r>
+              <a:rPr kumimoji="1" lang="ja-JP" altLang="en-US" sz="1600" dirty="0"/>
+              <a:t>か・何を</a:t>
+            </a:r>
+            <a:r>
+              <a:rPr kumimoji="1" lang="ja-JP" altLang="en-US" sz="1600" b="1" dirty="0"/>
+              <a:t>採る</a:t>
+            </a:r>
+            <a:r>
+              <a:rPr kumimoji="1" lang="ja-JP" altLang="en-US" sz="1600" dirty="0"/>
+              <a:t>かを引き受けること</a:t>
+            </a:r>
+            <a:endParaRPr kumimoji="1" lang="en-US" altLang="ja-JP" sz="1600" dirty="0"/>
+          </a:p>
+          <a:p>
+            <a:pPr marL="257173" lvl="1" indent="0">
+              <a:buNone/>
+            </a:pPr>
+            <a:endParaRPr lang="ja-JP" altLang="en-US" dirty="0"/>
+          </a:p>
+          <a:p>
+            <a:r>
+              <a:rPr kumimoji="1" lang="ja-JP" altLang="en-US" sz="1600" b="1" dirty="0"/>
+              <a:t>Reckoning（演算）</a:t>
+            </a:r>
+          </a:p>
+          <a:p>
+            <a:pPr lvl="1"/>
+            <a:r>
+              <a:rPr kumimoji="1" lang="ja-JP" altLang="en-US" sz="1600" dirty="0"/>
+              <a:t>与えられた条件で広く計算すること</a:t>
+            </a:r>
+          </a:p>
+          <a:p>
+            <a:endParaRPr lang="ja-JP" altLang="en-US" dirty="0"/>
+          </a:p>
+          <a:p>
+            <a:r>
+              <a:rPr kumimoji="1" lang="ja-JP" altLang="en-US" sz="1600" dirty="0"/>
+              <a:t>現行 LLM の得意領域は Reckoning</a:t>
+            </a:r>
+            <a:r>
+              <a:rPr lang="ja-JP" altLang="en-US" b="1" dirty="0"/>
+              <a:t>（演算）</a:t>
+            </a:r>
+            <a:endParaRPr kumimoji="1" lang="ja-JP" altLang="en-US" sz="1600" dirty="0"/>
+          </a:p>
+          <a:p>
+            <a:pPr lvl="1"/>
+            <a:r>
+              <a:rPr kumimoji="1" lang="ja-JP" altLang="en-US" sz="1600" dirty="0"/>
+              <a:t>人間が与えた判断基準（</a:t>
+            </a:r>
+            <a:r>
+              <a:rPr kumimoji="1" lang="en-US" altLang="ja-JP" sz="1600" b="1" dirty="0"/>
+              <a:t>Context</a:t>
+            </a:r>
+            <a:r>
+              <a:rPr kumimoji="1" lang="ja-JP" altLang="en-US" sz="1600" dirty="0"/>
+              <a:t>）あるいは事前学習に沿って</a:t>
+            </a:r>
+            <a:br>
+              <a:rPr kumimoji="1" lang="en-US" altLang="ja-JP" sz="1600" dirty="0"/>
+            </a:br>
+            <a:r>
+              <a:rPr kumimoji="1" lang="ja-JP" altLang="en-US" sz="1600" b="1" dirty="0"/>
+              <a:t>演算</a:t>
+            </a:r>
+            <a:r>
+              <a:rPr lang="ja-JP" altLang="en-US" sz="1600" dirty="0"/>
+              <a:t>させているに過ぎない　（自然言語的計算機？）</a:t>
+            </a:r>
+            <a:endParaRPr kumimoji="1" lang="en-US" altLang="ja-JP" sz="1600" dirty="0"/>
+          </a:p>
+          <a:p>
+            <a:pPr lvl="1"/>
+            <a:endParaRPr lang="en-US" altLang="ja-JP" sz="1600" dirty="0"/>
+          </a:p>
+          <a:p>
+            <a:pPr marL="257173" lvl="1" indent="0">
+              <a:buNone/>
+            </a:pPr>
+            <a:r>
+              <a:rPr lang="ja-JP" altLang="en-US" sz="1600" dirty="0"/>
+              <a:t>晩年の</a:t>
+            </a:r>
+            <a:r>
+              <a:rPr lang="en-US" altLang="ja-JP" sz="1600" dirty="0"/>
+              <a:t>Smith</a:t>
+            </a:r>
+            <a:r>
+              <a:rPr lang="ja-JP" altLang="en-US" sz="1600" dirty="0"/>
+              <a:t>は、「</a:t>
+            </a:r>
+            <a:r>
+              <a:rPr lang="en-US" altLang="ja-JP" sz="1600" b="1" dirty="0"/>
+              <a:t>AI</a:t>
+            </a:r>
+            <a:r>
+              <a:rPr lang="ja-JP" altLang="en-US" sz="1600" b="1" dirty="0"/>
+              <a:t>の圧倒的な演算力を前に、人間が判断の重要性を見失う</a:t>
+            </a:r>
+            <a:r>
+              <a:rPr lang="ja-JP" altLang="en-US" sz="1600" dirty="0"/>
+              <a:t>」</a:t>
+            </a:r>
+            <a:br>
+              <a:rPr lang="en-US" altLang="ja-JP" sz="1600" dirty="0"/>
+            </a:br>
+            <a:r>
+              <a:rPr lang="ja-JP" altLang="en-US" sz="1600" dirty="0"/>
+              <a:t>ことを危惧していたそう</a:t>
+            </a:r>
+            <a:endParaRPr lang="en-US" altLang="ja-JP" sz="1600" dirty="0"/>
+          </a:p>
+          <a:p>
+            <a:pPr lvl="2"/>
+            <a:r>
+              <a:rPr lang="en-US" altLang="ja-JP" sz="1600" dirty="0">
+                <a:hlinkClick r:id="rId2"/>
+              </a:rPr>
+              <a:t>On Brian Cantwell Smith and the Promise of AI</a:t>
+            </a:r>
+            <a:endParaRPr lang="ja-JP" altLang="en-US" sz="1600" dirty="0"/>
+          </a:p>
+          <a:p>
+            <a:pPr marL="257173" lvl="1" indent="0">
+              <a:buNone/>
+            </a:pPr>
+            <a:endParaRPr kumimoji="1" lang="en-US" altLang="ja-JP" sz="1600" dirty="0"/>
+          </a:p>
+        </p:txBody>
+      </p:sp>
+      <p:sp>
+        <p:nvSpPr>
+          <p:cNvPr id="3" name="タイトル 2">
+            <a:extLst>
+              <a:ext uri="{FF2B5EF4-FFF2-40B4-BE49-F238E27FC236}">
+                <a16:creationId xmlns:a16="http://schemas.microsoft.com/office/drawing/2014/main" id="{4A4BDA9A-4807-9063-214E-28E79A1055C0}"/>
+              </a:ext>
+            </a:extLst>
+          </p:cNvPr>
+          <p:cNvSpPr>
+            <a:spLocks noGrp="1"/>
+          </p:cNvSpPr>
+          <p:nvPr>
+            <p:ph type="title"/>
+          </p:nvPr>
+        </p:nvSpPr>
+        <p:spPr/>
+        <p:txBody>
+          <a:bodyPr>
+            <a:normAutofit fontScale="90000"/>
+          </a:bodyPr>
+          <a:lstStyle/>
+          <a:p>
+            <a:r>
+              <a:rPr kumimoji="1" lang="ja-JP" altLang="en-US" dirty="0"/>
+              <a:t>枠組み: 判断（Judgment）と演算（Reckoning）</a:t>
+            </a:r>
+          </a:p>
+        </p:txBody>
+      </p:sp>
+      <p:pic>
+        <p:nvPicPr>
+          <p:cNvPr id="7" name="図 6">
+            <a:extLst>
+              <a:ext uri="{FF2B5EF4-FFF2-40B4-BE49-F238E27FC236}">
+                <a16:creationId xmlns:a16="http://schemas.microsoft.com/office/drawing/2014/main" id="{4A22153F-3E1F-BA1D-0DF0-6F902F1C1553}"/>
+              </a:ext>
+            </a:extLst>
+          </p:cNvPr>
+          <p:cNvPicPr>
+            <a:picLocks noChangeAspect="1"/>
+          </p:cNvPicPr>
+          <p:nvPr/>
+        </p:nvPicPr>
+        <p:blipFill>
+          <a:blip r:embed="rId3">
+            <a:extLst>
+              <a:ext uri="{28A0092B-C50C-407E-A947-70E740481C1C}">
+                <a14:useLocalDpi xmlns:a14="http://schemas.microsoft.com/office/drawing/2010/main" val="0"/>
+              </a:ext>
+            </a:extLst>
+          </a:blip>
+          <a:stretch>
+            <a:fillRect/>
+          </a:stretch>
+        </p:blipFill>
+        <p:spPr>
+          <a:xfrm>
+            <a:off x="7581292" y="980728"/>
+            <a:ext cx="2324708" cy="2905885"/>
+          </a:xfrm>
+          <a:prstGeom prst="rect">
+            <a:avLst/>
+          </a:prstGeom>
+        </p:spPr>
+      </p:pic>
+    </p:spTree>
+    <p:extLst>
+      <p:ext uri="{BB962C8B-B14F-4D97-AF65-F5344CB8AC3E}">
+        <p14:creationId xmlns:p14="http://schemas.microsoft.com/office/powerpoint/2010/main" val="594510954"/>
+      </p:ext>
+    </p:extLst>
+  </p:cSld>
+  <p:clrMapOvr>
+    <a:masterClrMapping/>
+  </p:clrMapOvr>
+</p:sld>
+</file>
+
+<file path=ppt/slides/slide3.xml><?xml version="1.0" encoding="utf-8"?>
 <p:sld xmlns:a="http://schemas.openxmlformats.org/drawingml/2006/main" xmlns:r="http://schemas.openxmlformats.org/officeDocument/2006/relationships" xmlns:p="http://schemas.openxmlformats.org/presentationml/2006/main">
   <p:cSld>
     <p:spTree>
@@ -11958,353 +12803,7 @@
 </p:sld>
 </file>
 
-<file path=ppt/slides/slide3.xml><?xml version="1.0" encoding="utf-8"?>
-<p:sld xmlns:a="http://schemas.openxmlformats.org/drawingml/2006/main" xmlns:r="http://schemas.openxmlformats.org/officeDocument/2006/relationships" xmlns:p="http://schemas.openxmlformats.org/presentationml/2006/main">
-  <p:cSld>
-    <p:spTree>
-      <p:nvGrpSpPr>
-        <p:cNvPr id="1" name=""/>
-        <p:cNvGrpSpPr/>
-        <p:nvPr/>
-      </p:nvGrpSpPr>
-      <p:grpSpPr>
-        <a:xfrm>
-          <a:off x="0" y="0"/>
-          <a:ext cx="0" cy="0"/>
-          <a:chOff x="0" y="0"/>
-          <a:chExt cx="0" cy="0"/>
-        </a:xfrm>
-      </p:grpSpPr>
-      <p:sp>
-        <p:nvSpPr>
-          <p:cNvPr id="2" name="タイトル 1"/>
-          <p:cNvSpPr>
-            <a:spLocks noGrp="1"/>
-          </p:cNvSpPr>
-          <p:nvPr>
-            <p:ph type="ctrTitle"/>
-          </p:nvPr>
-        </p:nvSpPr>
-        <p:spPr/>
-        <p:txBody>
-          <a:bodyPr>
-            <a:normAutofit fontScale="90000"/>
-          </a:bodyPr>
-          <a:lstStyle/>
-          <a:p>
-            <a:r>
-              <a:rPr kumimoji="1" lang="ja-JP" altLang="en-US" sz="2600" dirty="0"/>
-              <a:t>事例1 ドキュメントパイプライン</a:t>
-            </a:r>
-          </a:p>
-        </p:txBody>
-      </p:sp>
-      <p:sp>
-        <p:nvSpPr>
-          <p:cNvPr id="3" name="字幕 2"/>
-          <p:cNvSpPr>
-            <a:spLocks noGrp="1"/>
-          </p:cNvSpPr>
-          <p:nvPr>
-            <p:ph type="subTitle" idx="1"/>
-          </p:nvPr>
-        </p:nvSpPr>
-        <p:spPr/>
-        <p:txBody>
-          <a:bodyPr>
-            <a:normAutofit/>
-          </a:bodyPr>
-          <a:lstStyle/>
-          <a:p>
-            <a:r>
-              <a:rPr kumimoji="1" lang="ja-JP" altLang="en-US" sz="1300" dirty="0"/>
-              <a:t>「作り方を作る」エンジニアリング</a:t>
-            </a:r>
-          </a:p>
-        </p:txBody>
-      </p:sp>
-    </p:spTree>
-  </p:cSld>
-  <p:clrMapOvr>
-    <a:masterClrMapping/>
-  </p:clrMapOvr>
-</p:sld>
-</file>
-
 <file path=ppt/slides/slide30.xml><?xml version="1.0" encoding="utf-8"?>
-<p:sld xmlns:a="http://schemas.openxmlformats.org/drawingml/2006/main" xmlns:r="http://schemas.openxmlformats.org/officeDocument/2006/relationships" xmlns:p="http://schemas.openxmlformats.org/presentationml/2006/main">
-  <p:cSld>
-    <p:spTree>
-      <p:nvGrpSpPr>
-        <p:cNvPr id="1" name="">
-          <a:extLst>
-            <a:ext uri="{FF2B5EF4-FFF2-40B4-BE49-F238E27FC236}">
-              <a16:creationId xmlns:a16="http://schemas.microsoft.com/office/drawing/2014/main" id="{DEB019F2-1916-EC49-C447-6CFB51CD0B9A}"/>
-            </a:ext>
-          </a:extLst>
-        </p:cNvPr>
-        <p:cNvGrpSpPr/>
-        <p:nvPr/>
-      </p:nvGrpSpPr>
-      <p:grpSpPr>
-        <a:xfrm>
-          <a:off x="0" y="0"/>
-          <a:ext cx="0" cy="0"/>
-          <a:chOff x="0" y="0"/>
-          <a:chExt cx="0" cy="0"/>
-        </a:xfrm>
-      </p:grpSpPr>
-      <p:sp>
-        <p:nvSpPr>
-          <p:cNvPr id="2" name="コンテンツ プレースホルダー 1">
-            <a:extLst>
-              <a:ext uri="{FF2B5EF4-FFF2-40B4-BE49-F238E27FC236}">
-                <a16:creationId xmlns:a16="http://schemas.microsoft.com/office/drawing/2014/main" id="{5C34B18D-6E76-2900-D135-3A71908B83E8}"/>
-              </a:ext>
-            </a:extLst>
-          </p:cNvPr>
-          <p:cNvSpPr>
-            <a:spLocks noGrp="1"/>
-          </p:cNvSpPr>
-          <p:nvPr>
-            <p:ph idx="1"/>
-          </p:nvPr>
-        </p:nvSpPr>
-        <p:spPr/>
-        <p:txBody>
-          <a:bodyPr>
-            <a:normAutofit lnSpcReduction="10000"/>
-          </a:bodyPr>
-          <a:lstStyle/>
-          <a:p>
-            <a:r>
-              <a:rPr kumimoji="1" lang="ja-JP" altLang="en-US" sz="1600" b="1" dirty="0"/>
-              <a:t>Judgment（判断）</a:t>
-            </a:r>
-          </a:p>
-          <a:p>
-            <a:pPr lvl="1"/>
-            <a:r>
-              <a:rPr kumimoji="1" lang="ja-JP" altLang="en-US" sz="1600" dirty="0"/>
-              <a:t>何を</a:t>
-            </a:r>
-            <a:r>
-              <a:rPr kumimoji="1" lang="ja-JP" altLang="en-US" sz="1600" b="1" dirty="0"/>
-              <a:t>問う</a:t>
-            </a:r>
-            <a:r>
-              <a:rPr kumimoji="1" lang="ja-JP" altLang="en-US" sz="1600" dirty="0"/>
-              <a:t>か・何を</a:t>
-            </a:r>
-            <a:r>
-              <a:rPr kumimoji="1" lang="ja-JP" altLang="en-US" sz="1600" b="1" dirty="0"/>
-              <a:t>採る</a:t>
-            </a:r>
-            <a:r>
-              <a:rPr kumimoji="1" lang="ja-JP" altLang="en-US" sz="1600" dirty="0"/>
-              <a:t>かを引き受けること</a:t>
-            </a:r>
-            <a:endParaRPr kumimoji="1" lang="en-US" altLang="ja-JP" sz="1600" dirty="0"/>
-          </a:p>
-          <a:p>
-            <a:pPr marL="257173" lvl="1" indent="0">
-              <a:buNone/>
-            </a:pPr>
-            <a:endParaRPr lang="ja-JP" altLang="en-US" dirty="0"/>
-          </a:p>
-          <a:p>
-            <a:r>
-              <a:rPr kumimoji="1" lang="ja-JP" altLang="en-US" sz="1600" b="1" dirty="0"/>
-              <a:t>Reckoning（演算）</a:t>
-            </a:r>
-          </a:p>
-          <a:p>
-            <a:pPr lvl="1"/>
-            <a:r>
-              <a:rPr kumimoji="1" lang="ja-JP" altLang="en-US" sz="1600" dirty="0"/>
-              <a:t>与えられた条件で広く計算すること</a:t>
-            </a:r>
-          </a:p>
-          <a:p>
-            <a:endParaRPr lang="ja-JP" altLang="en-US" dirty="0"/>
-          </a:p>
-          <a:p>
-            <a:r>
-              <a:rPr kumimoji="1" lang="ja-JP" altLang="en-US" sz="1600" dirty="0"/>
-              <a:t>現行 LLM の得意領域は Reckoning</a:t>
-            </a:r>
-            <a:r>
-              <a:rPr lang="ja-JP" altLang="en-US" b="1" dirty="0"/>
-              <a:t>（演算）</a:t>
-            </a:r>
-            <a:endParaRPr kumimoji="1" lang="ja-JP" altLang="en-US" sz="1600" dirty="0"/>
-          </a:p>
-          <a:p>
-            <a:pPr lvl="1"/>
-            <a:r>
-              <a:rPr kumimoji="1" lang="ja-JP" altLang="en-US" sz="1600" dirty="0"/>
-              <a:t>人間が与えた判断基準（</a:t>
-            </a:r>
-            <a:r>
-              <a:rPr kumimoji="1" lang="en-US" altLang="ja-JP" sz="1600" b="1" dirty="0"/>
-              <a:t>Context</a:t>
-            </a:r>
-            <a:r>
-              <a:rPr kumimoji="1" lang="ja-JP" altLang="en-US" sz="1600" dirty="0"/>
-              <a:t>）あるいは事前学習に沿って</a:t>
-            </a:r>
-            <a:br>
-              <a:rPr kumimoji="1" lang="en-US" altLang="ja-JP" sz="1600" dirty="0"/>
-            </a:br>
-            <a:r>
-              <a:rPr kumimoji="1" lang="ja-JP" altLang="en-US" sz="1600" b="1" dirty="0"/>
-              <a:t>演算</a:t>
-            </a:r>
-            <a:r>
-              <a:rPr lang="ja-JP" altLang="en-US" sz="1600" dirty="0"/>
-              <a:t>させているに過ぎない</a:t>
-            </a:r>
-            <a:endParaRPr kumimoji="1" lang="en-US" altLang="ja-JP" sz="1600" dirty="0"/>
-          </a:p>
-          <a:p>
-            <a:pPr lvl="1"/>
-            <a:endParaRPr lang="en-US" altLang="ja-JP" sz="1600" dirty="0"/>
-          </a:p>
-          <a:p>
-            <a:pPr marL="257173" lvl="1" indent="0">
-              <a:buNone/>
-            </a:pPr>
-            <a:r>
-              <a:rPr lang="ja-JP" altLang="en-US" sz="1600" dirty="0"/>
-              <a:t>晩年の</a:t>
-            </a:r>
-            <a:r>
-              <a:rPr lang="en-US" altLang="ja-JP" sz="1600" dirty="0"/>
-              <a:t>Smith</a:t>
-            </a:r>
-            <a:r>
-              <a:rPr lang="ja-JP" altLang="en-US" sz="1600" dirty="0"/>
-              <a:t>は、「</a:t>
-            </a:r>
-            <a:r>
-              <a:rPr lang="en-US" altLang="ja-JP" sz="1600" b="1" dirty="0"/>
-              <a:t>AI</a:t>
-            </a:r>
-            <a:r>
-              <a:rPr lang="ja-JP" altLang="en-US" sz="1600" b="1" dirty="0"/>
-              <a:t>の圧倒的な演算力を前に、人間が判断の重要性を見失う</a:t>
-            </a:r>
-            <a:r>
-              <a:rPr lang="ja-JP" altLang="en-US" sz="1600" dirty="0"/>
-              <a:t>」</a:t>
-            </a:r>
-            <a:br>
-              <a:rPr lang="en-US" altLang="ja-JP" sz="1600" dirty="0"/>
-            </a:br>
-            <a:r>
-              <a:rPr lang="ja-JP" altLang="en-US" sz="1600" dirty="0"/>
-              <a:t>ことを危惧していたそう</a:t>
-            </a:r>
-            <a:endParaRPr lang="en-US" altLang="ja-JP" sz="1600" dirty="0"/>
-          </a:p>
-          <a:p>
-            <a:pPr lvl="2"/>
-            <a:r>
-              <a:rPr lang="en-US" altLang="ja-JP" sz="1600" dirty="0">
-                <a:hlinkClick r:id="rId2"/>
-              </a:rPr>
-              <a:t>On Brian Cantwell Smith and the Promise of AI</a:t>
-            </a:r>
-            <a:endParaRPr lang="ja-JP" altLang="en-US" sz="1600" dirty="0"/>
-          </a:p>
-          <a:p>
-            <a:pPr marL="257173" lvl="1" indent="0">
-              <a:buNone/>
-            </a:pPr>
-            <a:endParaRPr kumimoji="1" lang="en-US" altLang="ja-JP" sz="1600" dirty="0"/>
-          </a:p>
-        </p:txBody>
-      </p:sp>
-      <p:sp>
-        <p:nvSpPr>
-          <p:cNvPr id="3" name="タイトル 2">
-            <a:extLst>
-              <a:ext uri="{FF2B5EF4-FFF2-40B4-BE49-F238E27FC236}">
-                <a16:creationId xmlns:a16="http://schemas.microsoft.com/office/drawing/2014/main" id="{4A4BDA9A-4807-9063-214E-28E79A1055C0}"/>
-              </a:ext>
-            </a:extLst>
-          </p:cNvPr>
-          <p:cNvSpPr>
-            <a:spLocks noGrp="1"/>
-          </p:cNvSpPr>
-          <p:nvPr>
-            <p:ph type="title"/>
-          </p:nvPr>
-        </p:nvSpPr>
-        <p:spPr/>
-        <p:txBody>
-          <a:bodyPr>
-            <a:normAutofit fontScale="90000"/>
-          </a:bodyPr>
-          <a:lstStyle/>
-          <a:p>
-            <a:r>
-              <a:rPr kumimoji="1" lang="ja-JP" altLang="en-US" dirty="0"/>
-              <a:t>枠組み: 判断（Judgment）と演算（Reckoning）</a:t>
-            </a:r>
-          </a:p>
-        </p:txBody>
-      </p:sp>
-      <p:pic>
-        <p:nvPicPr>
-          <p:cNvPr id="7" name="図 6">
-            <a:extLst>
-              <a:ext uri="{FF2B5EF4-FFF2-40B4-BE49-F238E27FC236}">
-                <a16:creationId xmlns:a16="http://schemas.microsoft.com/office/drawing/2014/main" id="{4A22153F-3E1F-BA1D-0DF0-6F902F1C1553}"/>
-              </a:ext>
-            </a:extLst>
-          </p:cNvPr>
-          <p:cNvPicPr>
-            <a:picLocks noChangeAspect="1"/>
-          </p:cNvPicPr>
-          <p:nvPr/>
-        </p:nvPicPr>
-        <p:blipFill>
-          <a:blip r:embed="rId3">
-            <a:extLst>
-              <a:ext uri="{28A0092B-C50C-407E-A947-70E740481C1C}">
-                <a14:useLocalDpi xmlns:a14="http://schemas.microsoft.com/office/drawing/2010/main" val="0"/>
-              </a:ext>
-            </a:extLst>
-          </a:blip>
-          <a:stretch>
-            <a:fillRect/>
-          </a:stretch>
-        </p:blipFill>
-        <p:spPr>
-          <a:xfrm>
-            <a:off x="7581292" y="980728"/>
-            <a:ext cx="2324708" cy="2905885"/>
-          </a:xfrm>
-          <a:prstGeom prst="rect">
-            <a:avLst/>
-          </a:prstGeom>
-        </p:spPr>
-      </p:pic>
-    </p:spTree>
-    <p:extLst>
-      <p:ext uri="{BB962C8B-B14F-4D97-AF65-F5344CB8AC3E}">
-        <p14:creationId xmlns:p14="http://schemas.microsoft.com/office/powerpoint/2010/main" val="594510954"/>
-      </p:ext>
-    </p:extLst>
-  </p:cSld>
-  <p:clrMapOvr>
-    <a:masterClrMapping/>
-  </p:clrMapOvr>
-</p:sld>
-</file>
-
-<file path=ppt/slides/slide31.xml><?xml version="1.0" encoding="utf-8"?>
 <p:sld xmlns:a="http://schemas.openxmlformats.org/drawingml/2006/main" xmlns:r="http://schemas.openxmlformats.org/officeDocument/2006/relationships" xmlns:p="http://schemas.openxmlformats.org/presentationml/2006/main">
   <p:cSld>
     <p:spTree>
@@ -12339,40 +12838,67 @@
         </p:spPr>
         <p:txBody>
           <a:bodyPr>
-            <a:normAutofit/>
+            <a:normAutofit fontScale="92500" lnSpcReduction="20000"/>
           </a:bodyPr>
           <a:lstStyle/>
           <a:p>
-            <a:r>
-              <a:rPr kumimoji="1" lang="ja-JP" altLang="en-US" sz="2400" b="1" dirty="0"/>
-              <a:t>「何を問うか」を引き受けるのは人間</a:t>
-            </a:r>
+            <a:pPr marL="257173" lvl="1" indent="0">
+              <a:buNone/>
+            </a:pPr>
+            <a:r>
+              <a:rPr lang="en-US" altLang="ja-JP" sz="2400" b="1" dirty="0"/>
+              <a:t>Judgement</a:t>
+            </a:r>
+            <a:r>
+              <a:rPr lang="ja-JP" altLang="en-US" sz="2400" b="1" dirty="0"/>
+              <a:t>の定義</a:t>
+            </a:r>
+            <a:endParaRPr lang="en-US" altLang="ja-JP" sz="2400" b="1" dirty="0"/>
           </a:p>
           <a:p>
             <a:pPr lvl="1"/>
             <a:r>
-              <a:rPr kumimoji="1" lang="ja-JP" altLang="en-US" sz="2400" dirty="0"/>
-              <a:t>問いを立てることも</a:t>
-            </a:r>
-            <a:r>
-              <a:rPr kumimoji="1" lang="en-US" altLang="ja-JP" sz="2400" b="1" dirty="0"/>
-              <a:t>Judgement</a:t>
-            </a:r>
-            <a:r>
-              <a:rPr kumimoji="1" lang="ja-JP" altLang="en-US" sz="2400" dirty="0"/>
-              <a:t>である</a:t>
-            </a:r>
-            <a:endParaRPr kumimoji="1" lang="en-US" altLang="ja-JP" sz="2400" dirty="0"/>
+              <a:rPr lang="en-US" altLang="ja-JP" sz="2400" b="1" dirty="0"/>
+              <a:t>&gt; </a:t>
+            </a:r>
+            <a:r>
+              <a:rPr lang="en-US" altLang="ja-JP" sz="2400" dirty="0"/>
+              <a:t>a form of dispassionate deliberative thought, grounded in ethical commitment and responsible action, appropriate to the situation in which it is deployed</a:t>
+            </a:r>
           </a:p>
           <a:p>
             <a:pPr lvl="1"/>
             <a:r>
+              <a:rPr lang="ja-JP" altLang="en-US" sz="2400" dirty="0"/>
+              <a:t>訳：倫理的な</a:t>
+            </a:r>
+            <a:r>
               <a:rPr lang="ja-JP" altLang="en-US" sz="2400" b="1" dirty="0"/>
-              <a:t>判断</a:t>
+              <a:t>責任</a:t>
             </a:r>
             <a:r>
               <a:rPr lang="ja-JP" altLang="en-US" sz="2400" dirty="0"/>
-              <a:t>：掛け金を持つ主体として世界にコミットする</a:t>
+              <a:t>と誠実な行動に基づき、その場の状況にふさわしい形で発揮される、冷静で慎重な思考のあり方。</a:t>
+            </a:r>
+            <a:endParaRPr lang="en-US" altLang="ja-JP" sz="2400" dirty="0"/>
+          </a:p>
+          <a:p>
+            <a:pPr lvl="1"/>
+            <a:endParaRPr lang="en-US" altLang="ja-JP" sz="2400" b="1" dirty="0"/>
+          </a:p>
+          <a:p>
+            <a:pPr lvl="1"/>
+            <a:r>
+              <a:rPr lang="ja-JP" altLang="en-US" sz="2400" dirty="0"/>
+              <a:t>人間：</a:t>
+            </a:r>
+            <a:r>
+              <a:rPr lang="ja-JP" altLang="en-US" sz="2400" b="1" dirty="0"/>
+              <a:t>掛け金</a:t>
+            </a:r>
+            <a:r>
+              <a:rPr lang="ja-JP" altLang="en-US" sz="2400" dirty="0"/>
+              <a:t>を持つ主体として生きる</a:t>
             </a:r>
             <a:endParaRPr kumimoji="1" lang="en-US" altLang="ja-JP" sz="2400" dirty="0"/>
           </a:p>
@@ -12399,18 +12925,6 @@
               <a:t>受け入れるトレードオフを決める</a:t>
             </a:r>
             <a:endParaRPr kumimoji="1" lang="en-US" altLang="ja-JP" sz="2400" dirty="0"/>
-          </a:p>
-          <a:p>
-            <a:pPr lvl="2"/>
-            <a:endParaRPr kumimoji="1" lang="ja-JP" altLang="en-US" sz="2400" b="1" dirty="0"/>
-          </a:p>
-          <a:p>
-            <a:pPr lvl="1"/>
-            <a:r>
-              <a:rPr kumimoji="1" lang="ja-JP" altLang="en-US" sz="2400" b="1" dirty="0"/>
-              <a:t>責任無いコードはメンタルモデルが喪失している</a:t>
-            </a:r>
-            <a:endParaRPr kumimoji="1" lang="ja-JP" altLang="en-US" sz="2400" dirty="0"/>
           </a:p>
         </p:txBody>
       </p:sp>
@@ -12444,7 +12958,7 @@
 </p:sld>
 </file>
 
-<file path=ppt/slides/slide32.xml><?xml version="1.0" encoding="utf-8"?>
+<file path=ppt/slides/slide31.xml><?xml version="1.0" encoding="utf-8"?>
 <p:sld xmlns:a="http://schemas.openxmlformats.org/drawingml/2006/main" xmlns:r="http://schemas.openxmlformats.org/officeDocument/2006/relationships" xmlns:p="http://schemas.openxmlformats.org/presentationml/2006/main">
   <p:cSld>
     <p:spTree>
@@ -12584,6 +13098,79 @@
       </p:grpSpPr>
       <p:sp>
         <p:nvSpPr>
+          <p:cNvPr id="2" name="タイトル 1"/>
+          <p:cNvSpPr>
+            <a:spLocks noGrp="1"/>
+          </p:cNvSpPr>
+          <p:nvPr>
+            <p:ph type="ctrTitle"/>
+          </p:nvPr>
+        </p:nvSpPr>
+        <p:spPr/>
+        <p:txBody>
+          <a:bodyPr>
+            <a:normAutofit fontScale="90000"/>
+          </a:bodyPr>
+          <a:lstStyle/>
+          <a:p>
+            <a:r>
+              <a:rPr kumimoji="1" lang="ja-JP" altLang="en-US" sz="2600" dirty="0"/>
+              <a:t>事例1 ドキュメントパイプライン</a:t>
+            </a:r>
+          </a:p>
+        </p:txBody>
+      </p:sp>
+      <p:sp>
+        <p:nvSpPr>
+          <p:cNvPr id="3" name="字幕 2"/>
+          <p:cNvSpPr>
+            <a:spLocks noGrp="1"/>
+          </p:cNvSpPr>
+          <p:nvPr>
+            <p:ph type="subTitle" idx="1"/>
+          </p:nvPr>
+        </p:nvSpPr>
+        <p:spPr/>
+        <p:txBody>
+          <a:bodyPr>
+            <a:normAutofit/>
+          </a:bodyPr>
+          <a:lstStyle/>
+          <a:p>
+            <a:r>
+              <a:rPr kumimoji="1" lang="ja-JP" altLang="en-US" sz="1300" dirty="0"/>
+              <a:t>「作り方を作る」エンジニアリング</a:t>
+            </a:r>
+          </a:p>
+        </p:txBody>
+      </p:sp>
+    </p:spTree>
+  </p:cSld>
+  <p:clrMapOvr>
+    <a:masterClrMapping/>
+  </p:clrMapOvr>
+</p:sld>
+</file>
+
+<file path=ppt/slides/slide5.xml><?xml version="1.0" encoding="utf-8"?>
+<p:sld xmlns:a="http://schemas.openxmlformats.org/drawingml/2006/main" xmlns:r="http://schemas.openxmlformats.org/officeDocument/2006/relationships" xmlns:p="http://schemas.openxmlformats.org/presentationml/2006/main">
+  <p:cSld>
+    <p:spTree>
+      <p:nvGrpSpPr>
+        <p:cNvPr id="1" name=""/>
+        <p:cNvGrpSpPr/>
+        <p:nvPr/>
+      </p:nvGrpSpPr>
+      <p:grpSpPr>
+        <a:xfrm>
+          <a:off x="0" y="0"/>
+          <a:ext cx="0" cy="0"/>
+          <a:chOff x="0" y="0"/>
+          <a:chExt cx="0" cy="0"/>
+        </a:xfrm>
+      </p:grpSpPr>
+      <p:sp>
+        <p:nvSpPr>
           <p:cNvPr id="2" name="コンテンツ プレースホルダー 1"/>
           <p:cNvSpPr>
             <a:spLocks noGrp="1"/>
@@ -12595,7 +13182,7 @@
         <p:spPr/>
         <p:txBody>
           <a:bodyPr>
-            <a:normAutofit/>
+            <a:normAutofit lnSpcReduction="10000"/>
           </a:bodyPr>
           <a:lstStyle/>
           <a:p>
@@ -12624,6 +13211,48 @@
             <a:r>
               <a:rPr kumimoji="1" lang="ja-JP" altLang="en-US" sz="1600" dirty="0"/>
               <a:t>Git 管理にすれば GitHub Actions に組み込める</a:t>
+            </a:r>
+            <a:endParaRPr kumimoji="1" lang="en-US" altLang="ja-JP" sz="1600" dirty="0"/>
+          </a:p>
+          <a:p>
+            <a:pPr lvl="1"/>
+            <a:endParaRPr kumimoji="1" lang="en-US" altLang="ja-JP" sz="1600" dirty="0"/>
+          </a:p>
+          <a:p>
+            <a:r>
+              <a:rPr lang="ja-JP" altLang="en-US" b="1" dirty="0"/>
+              <a:t>発想・方法</a:t>
+            </a:r>
+          </a:p>
+          <a:p>
+            <a:pPr lvl="1"/>
+            <a:r>
+              <a:rPr lang="ja-JP" altLang="en-US" sz="1600" dirty="0"/>
+              <a:t>移行ツールを</a:t>
+            </a:r>
+            <a:r>
+              <a:rPr lang="en-US" altLang="ja-JP" sz="1600" dirty="0"/>
+              <a:t>AI</a:t>
+            </a:r>
+            <a:r>
+              <a:rPr lang="ja-JP" altLang="en-US" sz="1600" dirty="0"/>
+              <a:t>に作らせよう</a:t>
+            </a:r>
+            <a:endParaRPr lang="en-US" altLang="ja-JP" sz="1600" dirty="0"/>
+          </a:p>
+          <a:p>
+            <a:pPr lvl="1"/>
+            <a:r>
+              <a:rPr kumimoji="1" lang="ja-JP" altLang="en-US" sz="1600" dirty="0"/>
+              <a:t>どうやって運用するかも</a:t>
+            </a:r>
+            <a:r>
+              <a:rPr kumimoji="1" lang="en-US" altLang="ja-JP" sz="1600" dirty="0"/>
+              <a:t>AI</a:t>
+            </a:r>
+            <a:r>
+              <a:rPr kumimoji="1" lang="ja-JP" altLang="en-US" sz="1600" dirty="0"/>
+              <a:t>と考えよう</a:t>
             </a:r>
             <a:endParaRPr kumimoji="1" lang="en-US" altLang="ja-JP" sz="1600" dirty="0"/>
           </a:p>
@@ -12700,8 +13329,138 @@
           <a:p>
             <a:r>
               <a:rPr kumimoji="1" lang="ja-JP" altLang="en-US" dirty="0"/>
-              <a:t>何をしたかったか？</a:t>
-            </a:r>
+              <a:t>何をしたかったか？何が良かったか？</a:t>
+            </a:r>
+          </a:p>
+        </p:txBody>
+      </p:sp>
+      <p:sp>
+        <p:nvSpPr>
+          <p:cNvPr id="4" name="吹き出し: 四角形 3">
+            <a:extLst>
+              <a:ext uri="{FF2B5EF4-FFF2-40B4-BE49-F238E27FC236}">
+                <a16:creationId xmlns:a16="http://schemas.microsoft.com/office/drawing/2014/main" id="{168B3DD9-873C-917F-D51A-21560403A0ED}"/>
+              </a:ext>
+            </a:extLst>
+          </p:cNvPr>
+          <p:cNvSpPr/>
+          <p:nvPr/>
+        </p:nvSpPr>
+        <p:spPr>
+          <a:xfrm>
+            <a:off x="6033120" y="2240868"/>
+            <a:ext cx="2448272" cy="864096"/>
+          </a:xfrm>
+          <a:prstGeom prst="wedgeRectCallout">
+            <a:avLst>
+              <a:gd name="adj1" fmla="val -42448"/>
+              <a:gd name="adj2" fmla="val -67308"/>
+            </a:avLst>
+          </a:prstGeom>
+          <a:solidFill>
+            <a:schemeClr val="accent6">
+              <a:alpha val="50000"/>
+            </a:schemeClr>
+          </a:solidFill>
+          <a:ln>
+            <a:noFill/>
+          </a:ln>
+        </p:spPr>
+        <p:style>
+          <a:lnRef idx="0">
+            <a:scrgbClr r="0" g="0" b="0"/>
+          </a:lnRef>
+          <a:fillRef idx="0">
+            <a:scrgbClr r="0" g="0" b="0"/>
+          </a:fillRef>
+          <a:effectRef idx="0">
+            <a:scrgbClr r="0" g="0" b="0"/>
+          </a:effectRef>
+          <a:fontRef idx="minor">
+            <a:schemeClr val="lt1"/>
+          </a:fontRef>
+        </p:style>
+        <p:txBody>
+          <a:bodyPr rtlCol="0" anchor="ctr"/>
+          <a:lstStyle/>
+          <a:p>
+            <a:pPr algn="ctr"/>
+            <a:r>
+              <a:rPr lang="en-US" altLang="ja-JP" dirty="0"/>
+              <a:t>AI</a:t>
+            </a:r>
+            <a:r>
+              <a:rPr lang="ja-JP" altLang="en-US" dirty="0"/>
+              <a:t>フレンドリーな</a:t>
+            </a:r>
+            <a:endParaRPr lang="en-US" altLang="ja-JP" dirty="0"/>
+          </a:p>
+          <a:p>
+            <a:pPr algn="ctr"/>
+            <a:r>
+              <a:rPr lang="ja-JP" altLang="en-US" dirty="0"/>
+              <a:t>環境づくり</a:t>
+            </a:r>
+            <a:endParaRPr kumimoji="1" lang="ja-JP" altLang="en-US" dirty="0"/>
+          </a:p>
+        </p:txBody>
+      </p:sp>
+      <p:sp>
+        <p:nvSpPr>
+          <p:cNvPr id="5" name="吹き出し: 四角形 4">
+            <a:extLst>
+              <a:ext uri="{FF2B5EF4-FFF2-40B4-BE49-F238E27FC236}">
+                <a16:creationId xmlns:a16="http://schemas.microsoft.com/office/drawing/2014/main" id="{35ADB967-0BC2-B382-4EEA-D7F7465D93E3}"/>
+              </a:ext>
+            </a:extLst>
+          </p:cNvPr>
+          <p:cNvSpPr/>
+          <p:nvPr/>
+        </p:nvSpPr>
+        <p:spPr>
+          <a:xfrm>
+            <a:off x="4967064" y="3530469"/>
+            <a:ext cx="2736304" cy="864096"/>
+          </a:xfrm>
+          <a:prstGeom prst="wedgeRectCallout">
+            <a:avLst>
+              <a:gd name="adj1" fmla="val -62616"/>
+              <a:gd name="adj2" fmla="val 2534"/>
+            </a:avLst>
+          </a:prstGeom>
+          <a:solidFill>
+            <a:schemeClr val="accent6">
+              <a:alpha val="50000"/>
+            </a:schemeClr>
+          </a:solidFill>
+          <a:ln>
+            <a:noFill/>
+          </a:ln>
+        </p:spPr>
+        <p:style>
+          <a:lnRef idx="0">
+            <a:scrgbClr r="0" g="0" b="0"/>
+          </a:lnRef>
+          <a:fillRef idx="0">
+            <a:scrgbClr r="0" g="0" b="0"/>
+          </a:fillRef>
+          <a:effectRef idx="0">
+            <a:scrgbClr r="0" g="0" b="0"/>
+          </a:effectRef>
+          <a:fontRef idx="minor">
+            <a:schemeClr val="lt1"/>
+          </a:fontRef>
+        </p:style>
+        <p:txBody>
+          <a:bodyPr rtlCol="0" anchor="ctr"/>
+          <a:lstStyle/>
+          <a:p>
+            <a:pPr algn="ctr"/>
+            <a:r>
+              <a:rPr lang="ja-JP" altLang="en-US" dirty="0"/>
+              <a:t>ドキュメントが腐らない運用を考える</a:t>
+            </a:r>
+            <a:endParaRPr kumimoji="1" lang="ja-JP" altLang="en-US" dirty="0"/>
           </a:p>
         </p:txBody>
       </p:sp>
@@ -12710,10 +13469,134 @@
   <p:clrMapOvr>
     <a:masterClrMapping/>
   </p:clrMapOvr>
+  <p:timing>
+    <p:tnLst>
+      <p:par>
+        <p:cTn id="1" dur="indefinite" restart="never" nodeType="tmRoot">
+          <p:childTnLst>
+            <p:seq concurrent="1" nextAc="seek">
+              <p:cTn id="2" dur="indefinite" nodeType="mainSeq">
+                <p:childTnLst>
+                  <p:par>
+                    <p:cTn id="3" fill="hold">
+                      <p:stCondLst>
+                        <p:cond delay="indefinite"/>
+                      </p:stCondLst>
+                      <p:childTnLst>
+                        <p:par>
+                          <p:cTn id="4" fill="hold">
+                            <p:stCondLst>
+                              <p:cond delay="0"/>
+                            </p:stCondLst>
+                            <p:childTnLst>
+                              <p:par>
+                                <p:cTn id="5" presetID="1" presetClass="entr" presetSubtype="0" fill="hold" grpId="0" nodeType="clickEffect">
+                                  <p:stCondLst>
+                                    <p:cond delay="0"/>
+                                  </p:stCondLst>
+                                  <p:childTnLst>
+                                    <p:set>
+                                      <p:cBhvr>
+                                        <p:cTn id="6" dur="1" fill="hold">
+                                          <p:stCondLst>
+                                            <p:cond delay="0"/>
+                                          </p:stCondLst>
+                                        </p:cTn>
+                                        <p:tgtEl>
+                                          <p:spTgt spid="4"/>
+                                        </p:tgtEl>
+                                        <p:attrNameLst>
+                                          <p:attrName>style.visibility</p:attrName>
+                                        </p:attrNameLst>
+                                      </p:cBhvr>
+                                      <p:to>
+                                        <p:strVal val="visible"/>
+                                      </p:to>
+                                    </p:set>
+                                  </p:childTnLst>
+                                </p:cTn>
+                              </p:par>
+                            </p:childTnLst>
+                          </p:cTn>
+                        </p:par>
+                      </p:childTnLst>
+                    </p:cTn>
+                  </p:par>
+                  <p:par>
+                    <p:cTn id="7" fill="hold">
+                      <p:stCondLst>
+                        <p:cond delay="indefinite"/>
+                      </p:stCondLst>
+                      <p:childTnLst>
+                        <p:par>
+                          <p:cTn id="8" fill="hold">
+                            <p:stCondLst>
+                              <p:cond delay="0"/>
+                            </p:stCondLst>
+                            <p:childTnLst>
+                              <p:par>
+                                <p:cTn id="9" presetID="1" presetClass="entr" presetSubtype="0" fill="hold" grpId="0" nodeType="clickEffect">
+                                  <p:stCondLst>
+                                    <p:cond delay="0"/>
+                                  </p:stCondLst>
+                                  <p:childTnLst>
+                                    <p:set>
+                                      <p:cBhvr>
+                                        <p:cTn id="10" dur="1" fill="hold">
+                                          <p:stCondLst>
+                                            <p:cond delay="0"/>
+                                          </p:stCondLst>
+                                        </p:cTn>
+                                        <p:tgtEl>
+                                          <p:spTgt spid="5"/>
+                                        </p:tgtEl>
+                                        <p:attrNameLst>
+                                          <p:attrName>style.visibility</p:attrName>
+                                        </p:attrNameLst>
+                                      </p:cBhvr>
+                                      <p:to>
+                                        <p:strVal val="visible"/>
+                                      </p:to>
+                                    </p:set>
+                                  </p:childTnLst>
+                                </p:cTn>
+                              </p:par>
+                            </p:childTnLst>
+                          </p:cTn>
+                        </p:par>
+                      </p:childTnLst>
+                    </p:cTn>
+                  </p:par>
+                </p:childTnLst>
+              </p:cTn>
+              <p:prevCondLst>
+                <p:cond evt="onPrev" delay="0">
+                  <p:tgtEl>
+                    <p:sldTgt/>
+                  </p:tgtEl>
+                </p:cond>
+              </p:prevCondLst>
+              <p:nextCondLst>
+                <p:cond evt="onNext" delay="0">
+                  <p:tgtEl>
+                    <p:sldTgt/>
+                  </p:tgtEl>
+                </p:cond>
+              </p:nextCondLst>
+            </p:seq>
+          </p:childTnLst>
+        </p:cTn>
+      </p:par>
+    </p:tnLst>
+    <p:bldLst>
+      <p:bldP spid="4" grpId="0" animBg="1"/>
+      <p:bldP spid="5" grpId="0" animBg="1"/>
+    </p:bldLst>
+  </p:timing>
 </p:sld>
 </file>
 
-<file path=ppt/slides/slide5.xml><?xml version="1.0" encoding="utf-8"?>
+<file path=ppt/slides/slide6.xml><?xml version="1.0" encoding="utf-8"?>
 <p:sld xmlns:a="http://schemas.openxmlformats.org/drawingml/2006/main" xmlns:r="http://schemas.openxmlformats.org/officeDocument/2006/relationships" xmlns:p="http://schemas.openxmlformats.org/presentationml/2006/main">
   <p:cSld>
     <p:spTree>
@@ -12754,42 +13637,22 @@
         </p:nvSpPr>
         <p:spPr/>
         <p:txBody>
-          <a:bodyPr/>
+          <a:bodyPr>
+            <a:normAutofit fontScale="90000"/>
+          </a:bodyPr>
           <a:lstStyle/>
           <a:p>
             <a:r>
               <a:rPr kumimoji="1" lang="ja-JP" altLang="en-US" dirty="0"/>
               <a:t>何を作った？　</a:t>
             </a:r>
-          </a:p>
-        </p:txBody>
-      </p:sp>
-      <p:sp>
-        <p:nvSpPr>
-          <p:cNvPr id="4" name="コンテンツ プレースホルダー 3">
-            <a:extLst>
-              <a:ext uri="{FF2B5EF4-FFF2-40B4-BE49-F238E27FC236}">
-                <a16:creationId xmlns:a16="http://schemas.microsoft.com/office/drawing/2014/main" id="{0EF3FEA9-B607-4C46-39E7-9A5F65B08F50}"/>
-              </a:ext>
-            </a:extLst>
-          </p:cNvPr>
-          <p:cNvSpPr>
-            <a:spLocks noGrp="1"/>
-          </p:cNvSpPr>
-          <p:nvPr>
-            <p:ph idx="1"/>
-          </p:nvPr>
-        </p:nvSpPr>
-        <p:spPr>
-          <a:xfrm>
-            <a:off x="429960" y="981732"/>
-            <a:ext cx="8496300" cy="4894536"/>
-          </a:xfrm>
-        </p:spPr>
-        <p:txBody>
-          <a:bodyPr/>
-          <a:lstStyle/>
-          <a:p>
+            <a:br>
+              <a:rPr kumimoji="1" lang="en-US" altLang="ja-JP" dirty="0"/>
+            </a:br>
+            <a:r>
+              <a:rPr kumimoji="1" lang="ja-JP" altLang="en-US" dirty="0"/>
+              <a:t>①</a:t>
+            </a:r>
             <a:r>
               <a:rPr lang="ja-JP" altLang="en-US" dirty="0"/>
               <a:t>ローカルから</a:t>
@@ -12810,6 +13673,7 @@
               <a:rPr lang="ja-JP" altLang="en-US" dirty="0"/>
               <a:t>ツール</a:t>
             </a:r>
+            <a:endParaRPr kumimoji="1" lang="ja-JP" altLang="en-US" dirty="0"/>
           </a:p>
         </p:txBody>
       </p:sp>
@@ -12835,14 +13699,338 @@
         </p:blipFill>
         <p:spPr>
           <a:xfrm>
-            <a:off x="1289892" y="1427379"/>
-            <a:ext cx="7326216" cy="5430621"/>
+            <a:off x="1223670" y="1124744"/>
+            <a:ext cx="7458660" cy="5528796"/>
           </a:xfrm>
           <a:prstGeom prst="rect">
             <a:avLst/>
           </a:prstGeom>
         </p:spPr>
       </p:pic>
+      <p:sp>
+        <p:nvSpPr>
+          <p:cNvPr id="5" name="四角形: 角を丸くする 4">
+            <a:extLst>
+              <a:ext uri="{FF2B5EF4-FFF2-40B4-BE49-F238E27FC236}">
+                <a16:creationId xmlns:a16="http://schemas.microsoft.com/office/drawing/2014/main" id="{B5D2B02A-60EA-5976-757D-17D36F6D62D5}"/>
+              </a:ext>
+            </a:extLst>
+          </p:cNvPr>
+          <p:cNvSpPr/>
+          <p:nvPr/>
+        </p:nvSpPr>
+        <p:spPr>
+          <a:xfrm>
+            <a:off x="6350933" y="1881094"/>
+            <a:ext cx="1662407" cy="863829"/>
+          </a:xfrm>
+          <a:prstGeom prst="roundRect">
+            <a:avLst/>
+          </a:prstGeom>
+          <a:noFill/>
+          <a:ln w="19050" cap="flat" cmpd="sng" algn="ctr">
+            <a:solidFill>
+              <a:srgbClr val="FDD000"/>
+            </a:solidFill>
+            <a:prstDash val="solid"/>
+            <a:round/>
+            <a:headEnd type="none" w="med" len="med"/>
+            <a:tailEnd type="none" w="med" len="med"/>
+          </a:ln>
+        </p:spPr>
+        <p:style>
+          <a:lnRef idx="0">
+            <a:scrgbClr r="0" g="0" b="0"/>
+          </a:lnRef>
+          <a:fillRef idx="0">
+            <a:scrgbClr r="0" g="0" b="0"/>
+          </a:fillRef>
+          <a:effectRef idx="0">
+            <a:scrgbClr r="0" g="0" b="0"/>
+          </a:effectRef>
+          <a:fontRef idx="minor">
+            <a:schemeClr val="accent1"/>
+          </a:fontRef>
+        </p:style>
+        <p:txBody>
+          <a:bodyPr rtlCol="0" anchor="ctr"/>
+          <a:lstStyle/>
+          <a:p>
+            <a:pPr algn="ctr"/>
+            <a:endParaRPr kumimoji="1" lang="ja-JP" altLang="en-US"/>
+          </a:p>
+        </p:txBody>
+      </p:sp>
+      <p:sp>
+        <p:nvSpPr>
+          <p:cNvPr id="8" name="四角形: 角を丸くする 7">
+            <a:extLst>
+              <a:ext uri="{FF2B5EF4-FFF2-40B4-BE49-F238E27FC236}">
+                <a16:creationId xmlns:a16="http://schemas.microsoft.com/office/drawing/2014/main" id="{40B2DF3A-D093-6067-19BC-BD3B9589347D}"/>
+              </a:ext>
+            </a:extLst>
+          </p:cNvPr>
+          <p:cNvSpPr/>
+          <p:nvPr/>
+        </p:nvSpPr>
+        <p:spPr>
+          <a:xfrm>
+            <a:off x="1388604" y="3174058"/>
+            <a:ext cx="1692188" cy="775123"/>
+          </a:xfrm>
+          <a:prstGeom prst="roundRect">
+            <a:avLst/>
+          </a:prstGeom>
+          <a:noFill/>
+          <a:ln w="19050" cap="flat" cmpd="sng" algn="ctr">
+            <a:solidFill>
+              <a:srgbClr val="FDD000"/>
+            </a:solidFill>
+            <a:prstDash val="solid"/>
+            <a:round/>
+            <a:headEnd type="none" w="med" len="med"/>
+            <a:tailEnd type="none" w="med" len="med"/>
+          </a:ln>
+        </p:spPr>
+        <p:style>
+          <a:lnRef idx="0">
+            <a:scrgbClr r="0" g="0" b="0"/>
+          </a:lnRef>
+          <a:fillRef idx="0">
+            <a:scrgbClr r="0" g="0" b="0"/>
+          </a:fillRef>
+          <a:effectRef idx="0">
+            <a:scrgbClr r="0" g="0" b="0"/>
+          </a:effectRef>
+          <a:fontRef idx="minor">
+            <a:schemeClr val="accent1"/>
+          </a:fontRef>
+        </p:style>
+        <p:txBody>
+          <a:bodyPr rtlCol="0" anchor="ctr"/>
+          <a:lstStyle/>
+          <a:p>
+            <a:pPr algn="ctr"/>
+            <a:endParaRPr kumimoji="1" lang="ja-JP" altLang="en-US"/>
+          </a:p>
+        </p:txBody>
+      </p:sp>
+      <p:sp>
+        <p:nvSpPr>
+          <p:cNvPr id="9" name="四角形: 角を丸くする 8">
+            <a:extLst>
+              <a:ext uri="{FF2B5EF4-FFF2-40B4-BE49-F238E27FC236}">
+                <a16:creationId xmlns:a16="http://schemas.microsoft.com/office/drawing/2014/main" id="{D86E73C4-19CC-A03B-D671-42F658BA1E0F}"/>
+              </a:ext>
+            </a:extLst>
+          </p:cNvPr>
+          <p:cNvSpPr/>
+          <p:nvPr/>
+        </p:nvSpPr>
+        <p:spPr>
+          <a:xfrm>
+            <a:off x="4448943" y="3949181"/>
+            <a:ext cx="618861" cy="775123"/>
+          </a:xfrm>
+          <a:prstGeom prst="roundRect">
+            <a:avLst/>
+          </a:prstGeom>
+          <a:noFill/>
+          <a:ln w="19050" cap="flat" cmpd="sng" algn="ctr">
+            <a:solidFill>
+              <a:srgbClr val="FDD000"/>
+            </a:solidFill>
+            <a:prstDash val="solid"/>
+            <a:round/>
+            <a:headEnd type="none" w="med" len="med"/>
+            <a:tailEnd type="none" w="med" len="med"/>
+          </a:ln>
+        </p:spPr>
+        <p:style>
+          <a:lnRef idx="0">
+            <a:scrgbClr r="0" g="0" b="0"/>
+          </a:lnRef>
+          <a:fillRef idx="0">
+            <a:scrgbClr r="0" g="0" b="0"/>
+          </a:fillRef>
+          <a:effectRef idx="0">
+            <a:scrgbClr r="0" g="0" b="0"/>
+          </a:effectRef>
+          <a:fontRef idx="minor">
+            <a:schemeClr val="accent1"/>
+          </a:fontRef>
+        </p:style>
+        <p:txBody>
+          <a:bodyPr rtlCol="0" anchor="ctr"/>
+          <a:lstStyle/>
+          <a:p>
+            <a:pPr algn="ctr"/>
+            <a:endParaRPr kumimoji="1" lang="ja-JP" altLang="en-US"/>
+          </a:p>
+        </p:txBody>
+      </p:sp>
+      <p:sp>
+        <p:nvSpPr>
+          <p:cNvPr id="10" name="四角形: 角を丸くする 9">
+            <a:extLst>
+              <a:ext uri="{FF2B5EF4-FFF2-40B4-BE49-F238E27FC236}">
+                <a16:creationId xmlns:a16="http://schemas.microsoft.com/office/drawing/2014/main" id="{0889B584-EF3B-6AD0-C92F-8FBECA8EB41B}"/>
+              </a:ext>
+            </a:extLst>
+          </p:cNvPr>
+          <p:cNvSpPr/>
+          <p:nvPr/>
+        </p:nvSpPr>
+        <p:spPr>
+          <a:xfrm>
+            <a:off x="3846849" y="5095097"/>
+            <a:ext cx="1701024" cy="511542"/>
+          </a:xfrm>
+          <a:prstGeom prst="roundRect">
+            <a:avLst/>
+          </a:prstGeom>
+          <a:noFill/>
+          <a:ln w="19050" cap="flat" cmpd="sng" algn="ctr">
+            <a:solidFill>
+              <a:srgbClr val="FDD000"/>
+            </a:solidFill>
+            <a:prstDash val="solid"/>
+            <a:round/>
+            <a:headEnd type="none" w="med" len="med"/>
+            <a:tailEnd type="none" w="med" len="med"/>
+          </a:ln>
+        </p:spPr>
+        <p:style>
+          <a:lnRef idx="0">
+            <a:scrgbClr r="0" g="0" b="0"/>
+          </a:lnRef>
+          <a:fillRef idx="0">
+            <a:scrgbClr r="0" g="0" b="0"/>
+          </a:fillRef>
+          <a:effectRef idx="0">
+            <a:scrgbClr r="0" g="0" b="0"/>
+          </a:effectRef>
+          <a:fontRef idx="minor">
+            <a:schemeClr val="accent1"/>
+          </a:fontRef>
+        </p:style>
+        <p:txBody>
+          <a:bodyPr rtlCol="0" anchor="ctr"/>
+          <a:lstStyle/>
+          <a:p>
+            <a:pPr algn="ctr"/>
+            <a:endParaRPr kumimoji="1" lang="ja-JP" altLang="en-US"/>
+          </a:p>
+        </p:txBody>
+      </p:sp>
+      <p:sp>
+        <p:nvSpPr>
+          <p:cNvPr id="11" name="四角形: 角を丸くする 10">
+            <a:extLst>
+              <a:ext uri="{FF2B5EF4-FFF2-40B4-BE49-F238E27FC236}">
+                <a16:creationId xmlns:a16="http://schemas.microsoft.com/office/drawing/2014/main" id="{A34ECBDC-5D0E-6CCD-4D3B-96029381A264}"/>
+              </a:ext>
+            </a:extLst>
+          </p:cNvPr>
+          <p:cNvSpPr/>
+          <p:nvPr/>
+        </p:nvSpPr>
+        <p:spPr>
+          <a:xfrm>
+            <a:off x="6213139" y="4990061"/>
+            <a:ext cx="764475" cy="721187"/>
+          </a:xfrm>
+          <a:prstGeom prst="roundRect">
+            <a:avLst/>
+          </a:prstGeom>
+          <a:noFill/>
+          <a:ln w="19050" cap="flat" cmpd="sng" algn="ctr">
+            <a:solidFill>
+              <a:srgbClr val="FDD000"/>
+            </a:solidFill>
+            <a:prstDash val="solid"/>
+            <a:round/>
+            <a:headEnd type="none" w="med" len="med"/>
+            <a:tailEnd type="none" w="med" len="med"/>
+          </a:ln>
+        </p:spPr>
+        <p:style>
+          <a:lnRef idx="0">
+            <a:scrgbClr r="0" g="0" b="0"/>
+          </a:lnRef>
+          <a:fillRef idx="0">
+            <a:scrgbClr r="0" g="0" b="0"/>
+          </a:fillRef>
+          <a:effectRef idx="0">
+            <a:scrgbClr r="0" g="0" b="0"/>
+          </a:effectRef>
+          <a:fontRef idx="minor">
+            <a:schemeClr val="accent1"/>
+          </a:fontRef>
+        </p:style>
+        <p:txBody>
+          <a:bodyPr rtlCol="0" anchor="ctr"/>
+          <a:lstStyle/>
+          <a:p>
+            <a:pPr algn="ctr"/>
+            <a:endParaRPr kumimoji="1" lang="ja-JP" altLang="en-US"/>
+          </a:p>
+        </p:txBody>
+      </p:sp>
+      <p:sp>
+        <p:nvSpPr>
+          <p:cNvPr id="12" name="四角形: 角を丸くする 11">
+            <a:extLst>
+              <a:ext uri="{FF2B5EF4-FFF2-40B4-BE49-F238E27FC236}">
+                <a16:creationId xmlns:a16="http://schemas.microsoft.com/office/drawing/2014/main" id="{15B37F24-3F62-1A6A-18F2-F2339234382E}"/>
+              </a:ext>
+            </a:extLst>
+          </p:cNvPr>
+          <p:cNvSpPr/>
+          <p:nvPr/>
+        </p:nvSpPr>
+        <p:spPr>
+          <a:xfrm>
+            <a:off x="3863045" y="5977432"/>
+            <a:ext cx="1747373" cy="629501"/>
+          </a:xfrm>
+          <a:prstGeom prst="roundRect">
+            <a:avLst/>
+          </a:prstGeom>
+          <a:noFill/>
+          <a:ln w="19050" cap="flat" cmpd="sng" algn="ctr">
+            <a:solidFill>
+              <a:srgbClr val="FDD000"/>
+            </a:solidFill>
+            <a:prstDash val="solid"/>
+            <a:round/>
+            <a:headEnd type="none" w="med" len="med"/>
+            <a:tailEnd type="none" w="med" len="med"/>
+          </a:ln>
+        </p:spPr>
+        <p:style>
+          <a:lnRef idx="0">
+            <a:scrgbClr r="0" g="0" b="0"/>
+          </a:lnRef>
+          <a:fillRef idx="0">
+            <a:scrgbClr r="0" g="0" b="0"/>
+          </a:fillRef>
+          <a:effectRef idx="0">
+            <a:scrgbClr r="0" g="0" b="0"/>
+          </a:effectRef>
+          <a:fontRef idx="minor">
+            <a:schemeClr val="accent1"/>
+          </a:fontRef>
+        </p:style>
+        <p:txBody>
+          <a:bodyPr rtlCol="0" anchor="ctr"/>
+          <a:lstStyle/>
+          <a:p>
+            <a:pPr algn="ctr"/>
+            <a:endParaRPr kumimoji="1" lang="ja-JP" altLang="en-US"/>
+          </a:p>
+        </p:txBody>
+      </p:sp>
     </p:spTree>
     <p:extLst>
       <p:ext uri="{BB962C8B-B14F-4D97-AF65-F5344CB8AC3E}">
@@ -12853,10 +14041,318 @@
   <p:clrMapOvr>
     <a:masterClrMapping/>
   </p:clrMapOvr>
+  <p:timing>
+    <p:tnLst>
+      <p:par>
+        <p:cTn id="1" dur="indefinite" restart="never" nodeType="tmRoot">
+          <p:childTnLst>
+            <p:seq concurrent="1" nextAc="seek">
+              <p:cTn id="2" dur="indefinite" nodeType="mainSeq">
+                <p:childTnLst>
+                  <p:par>
+                    <p:cTn id="3" fill="hold">
+                      <p:stCondLst>
+                        <p:cond delay="indefinite"/>
+                      </p:stCondLst>
+                      <p:childTnLst>
+                        <p:par>
+                          <p:cTn id="4" fill="hold">
+                            <p:stCondLst>
+                              <p:cond delay="0"/>
+                            </p:stCondLst>
+                            <p:childTnLst>
+                              <p:par>
+                                <p:cTn id="5" presetID="1" presetClass="entr" presetSubtype="0" fill="hold" grpId="0" nodeType="clickEffect">
+                                  <p:stCondLst>
+                                    <p:cond delay="0"/>
+                                  </p:stCondLst>
+                                  <p:childTnLst>
+                                    <p:set>
+                                      <p:cBhvr>
+                                        <p:cTn id="6" dur="1" fill="hold">
+                                          <p:stCondLst>
+                                            <p:cond delay="0"/>
+                                          </p:stCondLst>
+                                        </p:cTn>
+                                        <p:tgtEl>
+                                          <p:spTgt spid="5"/>
+                                        </p:tgtEl>
+                                        <p:attrNameLst>
+                                          <p:attrName>style.visibility</p:attrName>
+                                        </p:attrNameLst>
+                                      </p:cBhvr>
+                                      <p:to>
+                                        <p:strVal val="visible"/>
+                                      </p:to>
+                                    </p:set>
+                                  </p:childTnLst>
+                                </p:cTn>
+                              </p:par>
+                            </p:childTnLst>
+                          </p:cTn>
+                        </p:par>
+                      </p:childTnLst>
+                    </p:cTn>
+                  </p:par>
+                  <p:par>
+                    <p:cTn id="7" fill="hold">
+                      <p:stCondLst>
+                        <p:cond delay="indefinite"/>
+                      </p:stCondLst>
+                      <p:childTnLst>
+                        <p:par>
+                          <p:cTn id="8" fill="hold">
+                            <p:stCondLst>
+                              <p:cond delay="0"/>
+                            </p:stCondLst>
+                            <p:childTnLst>
+                              <p:par>
+                                <p:cTn id="9" presetID="1" presetClass="entr" presetSubtype="0" fill="hold" grpId="0" nodeType="clickEffect">
+                                  <p:stCondLst>
+                                    <p:cond delay="0"/>
+                                  </p:stCondLst>
+                                  <p:childTnLst>
+                                    <p:set>
+                                      <p:cBhvr>
+                                        <p:cTn id="10" dur="1" fill="hold">
+                                          <p:stCondLst>
+                                            <p:cond delay="0"/>
+                                          </p:stCondLst>
+                                        </p:cTn>
+                                        <p:tgtEl>
+                                          <p:spTgt spid="9"/>
+                                        </p:tgtEl>
+                                        <p:attrNameLst>
+                                          <p:attrName>style.visibility</p:attrName>
+                                        </p:attrNameLst>
+                                      </p:cBhvr>
+                                      <p:to>
+                                        <p:strVal val="visible"/>
+                                      </p:to>
+                                    </p:set>
+                                  </p:childTnLst>
+                                </p:cTn>
+                              </p:par>
+                            </p:childTnLst>
+                          </p:cTn>
+                        </p:par>
+                      </p:childTnLst>
+                    </p:cTn>
+                  </p:par>
+                  <p:par>
+                    <p:cTn id="11" fill="hold">
+                      <p:stCondLst>
+                        <p:cond delay="indefinite"/>
+                      </p:stCondLst>
+                      <p:childTnLst>
+                        <p:par>
+                          <p:cTn id="12" fill="hold">
+                            <p:stCondLst>
+                              <p:cond delay="0"/>
+                            </p:stCondLst>
+                            <p:childTnLst>
+                              <p:par>
+                                <p:cTn id="13" presetID="1" presetClass="entr" presetSubtype="0" fill="hold" grpId="0" nodeType="clickEffect">
+                                  <p:stCondLst>
+                                    <p:cond delay="0"/>
+                                  </p:stCondLst>
+                                  <p:childTnLst>
+                                    <p:set>
+                                      <p:cBhvr>
+                                        <p:cTn id="14" dur="1" fill="hold">
+                                          <p:stCondLst>
+                                            <p:cond delay="0"/>
+                                          </p:stCondLst>
+                                        </p:cTn>
+                                        <p:tgtEl>
+                                          <p:spTgt spid="8"/>
+                                        </p:tgtEl>
+                                        <p:attrNameLst>
+                                          <p:attrName>style.visibility</p:attrName>
+                                        </p:attrNameLst>
+                                      </p:cBhvr>
+                                      <p:to>
+                                        <p:strVal val="visible"/>
+                                      </p:to>
+                                    </p:set>
+                                  </p:childTnLst>
+                                </p:cTn>
+                              </p:par>
+                            </p:childTnLst>
+                          </p:cTn>
+                        </p:par>
+                      </p:childTnLst>
+                    </p:cTn>
+                  </p:par>
+                  <p:par>
+                    <p:cTn id="15" fill="hold">
+                      <p:stCondLst>
+                        <p:cond delay="indefinite"/>
+                      </p:stCondLst>
+                      <p:childTnLst>
+                        <p:par>
+                          <p:cTn id="16" fill="hold">
+                            <p:stCondLst>
+                              <p:cond delay="0"/>
+                            </p:stCondLst>
+                            <p:childTnLst>
+                              <p:par>
+                                <p:cTn id="17" presetID="1" presetClass="entr" presetSubtype="0" fill="hold" grpId="0" nodeType="clickEffect">
+                                  <p:stCondLst>
+                                    <p:cond delay="0"/>
+                                  </p:stCondLst>
+                                  <p:childTnLst>
+                                    <p:set>
+                                      <p:cBhvr>
+                                        <p:cTn id="18" dur="1" fill="hold">
+                                          <p:stCondLst>
+                                            <p:cond delay="0"/>
+                                          </p:stCondLst>
+                                        </p:cTn>
+                                        <p:tgtEl>
+                                          <p:spTgt spid="10"/>
+                                        </p:tgtEl>
+                                        <p:attrNameLst>
+                                          <p:attrName>style.visibility</p:attrName>
+                                        </p:attrNameLst>
+                                      </p:cBhvr>
+                                      <p:to>
+                                        <p:strVal val="visible"/>
+                                      </p:to>
+                                    </p:set>
+                                  </p:childTnLst>
+                                </p:cTn>
+                              </p:par>
+                            </p:childTnLst>
+                          </p:cTn>
+                        </p:par>
+                      </p:childTnLst>
+                    </p:cTn>
+                  </p:par>
+                  <p:par>
+                    <p:cTn id="19" fill="hold">
+                      <p:stCondLst>
+                        <p:cond delay="indefinite"/>
+                      </p:stCondLst>
+                      <p:childTnLst>
+                        <p:par>
+                          <p:cTn id="20" fill="hold">
+                            <p:stCondLst>
+                              <p:cond delay="0"/>
+                            </p:stCondLst>
+                            <p:childTnLst>
+                              <p:par>
+                                <p:cTn id="21" presetID="1" presetClass="entr" presetSubtype="0" fill="hold" grpId="0" nodeType="clickEffect">
+                                  <p:stCondLst>
+                                    <p:cond delay="0"/>
+                                  </p:stCondLst>
+                                  <p:childTnLst>
+                                    <p:set>
+                                      <p:cBhvr>
+                                        <p:cTn id="22" dur="1" fill="hold">
+                                          <p:stCondLst>
+                                            <p:cond delay="0"/>
+                                          </p:stCondLst>
+                                        </p:cTn>
+                                        <p:tgtEl>
+                                          <p:spTgt spid="11"/>
+                                        </p:tgtEl>
+                                        <p:attrNameLst>
+                                          <p:attrName>style.visibility</p:attrName>
+                                        </p:attrNameLst>
+                                      </p:cBhvr>
+                                      <p:to>
+                                        <p:strVal val="visible"/>
+                                      </p:to>
+                                    </p:set>
+                                  </p:childTnLst>
+                                </p:cTn>
+                              </p:par>
+                            </p:childTnLst>
+                          </p:cTn>
+                        </p:par>
+                      </p:childTnLst>
+                    </p:cTn>
+                  </p:par>
+                  <p:par>
+                    <p:cTn id="23" fill="hold">
+                      <p:stCondLst>
+                        <p:cond delay="indefinite"/>
+                      </p:stCondLst>
+                      <p:childTnLst>
+                        <p:par>
+                          <p:cTn id="24" fill="hold">
+                            <p:stCondLst>
+                              <p:cond delay="0"/>
+                            </p:stCondLst>
+                            <p:childTnLst>
+                              <p:par>
+                                <p:cTn id="25" presetID="1" presetClass="entr" presetSubtype="0" fill="hold" grpId="0" nodeType="clickEffect">
+                                  <p:stCondLst>
+                                    <p:cond delay="0"/>
+                                  </p:stCondLst>
+                                  <p:childTnLst>
+                                    <p:set>
+                                      <p:cBhvr>
+                                        <p:cTn id="26" dur="1" fill="hold">
+                                          <p:stCondLst>
+                                            <p:cond delay="0"/>
+                                          </p:stCondLst>
+                                        </p:cTn>
+                                        <p:tgtEl>
+                                          <p:spTgt spid="12"/>
+                                        </p:tgtEl>
+                                        <p:attrNameLst>
+                                          <p:attrName>style.visibility</p:attrName>
+                                        </p:attrNameLst>
+                                      </p:cBhvr>
+                                      <p:to>
+                                        <p:strVal val="visible"/>
+                                      </p:to>
+                                    </p:set>
+                                  </p:childTnLst>
+                                </p:cTn>
+                              </p:par>
+                            </p:childTnLst>
+                          </p:cTn>
+                        </p:par>
+                      </p:childTnLst>
+                    </p:cTn>
+                  </p:par>
+                </p:childTnLst>
+              </p:cTn>
+              <p:prevCondLst>
+                <p:cond evt="onPrev" delay="0">
+                  <p:tgtEl>
+                    <p:sldTgt/>
+                  </p:tgtEl>
+                </p:cond>
+              </p:prevCondLst>
+              <p:nextCondLst>
+                <p:cond evt="onNext" delay="0">
+                  <p:tgtEl>
+                    <p:sldTgt/>
+                  </p:tgtEl>
+                </p:cond>
+              </p:nextCondLst>
+            </p:seq>
+          </p:childTnLst>
+        </p:cTn>
+      </p:par>
+    </p:tnLst>
+    <p:bldLst>
+      <p:bldP spid="5" grpId="0" animBg="1"/>
+      <p:bldP spid="8" grpId="0" animBg="1"/>
+      <p:bldP spid="9" grpId="0" animBg="1"/>
+      <p:bldP spid="10" grpId="0" animBg="1"/>
+      <p:bldP spid="11" grpId="0" animBg="1"/>
+      <p:bldP spid="12" grpId="0" animBg="1"/>
+    </p:bldLst>
+  </p:timing>
 </p:sld>
 </file>
 
-<file path=ppt/slides/slide6.xml><?xml version="1.0" encoding="utf-8"?>
+<file path=ppt/slides/slide7.xml><?xml version="1.0" encoding="utf-8"?>
 <p:sld xmlns:a="http://schemas.openxmlformats.org/drawingml/2006/main" xmlns:r="http://schemas.openxmlformats.org/officeDocument/2006/relationships" xmlns:p="http://schemas.openxmlformats.org/presentationml/2006/main">
   <p:cSld>
     <p:spTree>
@@ -12975,6 +14471,276 @@
           </a:p>
         </p:txBody>
       </p:sp>
+      <p:sp>
+        <p:nvSpPr>
+          <p:cNvPr id="2" name="四角形: 角を丸くする 1">
+            <a:extLst>
+              <a:ext uri="{FF2B5EF4-FFF2-40B4-BE49-F238E27FC236}">
+                <a16:creationId xmlns:a16="http://schemas.microsoft.com/office/drawing/2014/main" id="{E2341F91-C46A-1F63-343A-B51A671A2736}"/>
+              </a:ext>
+            </a:extLst>
+          </p:cNvPr>
+          <p:cNvSpPr/>
+          <p:nvPr/>
+        </p:nvSpPr>
+        <p:spPr>
+          <a:xfrm>
+            <a:off x="1344062" y="2312877"/>
+            <a:ext cx="1448698" cy="432048"/>
+          </a:xfrm>
+          <a:prstGeom prst="roundRect">
+            <a:avLst/>
+          </a:prstGeom>
+          <a:noFill/>
+          <a:ln w="19050" cap="flat" cmpd="sng" algn="ctr">
+            <a:solidFill>
+              <a:srgbClr val="FDD000"/>
+            </a:solidFill>
+            <a:prstDash val="solid"/>
+            <a:round/>
+            <a:headEnd type="none" w="med" len="med"/>
+            <a:tailEnd type="none" w="med" len="med"/>
+          </a:ln>
+        </p:spPr>
+        <p:style>
+          <a:lnRef idx="0">
+            <a:scrgbClr r="0" g="0" b="0"/>
+          </a:lnRef>
+          <a:fillRef idx="0">
+            <a:scrgbClr r="0" g="0" b="0"/>
+          </a:fillRef>
+          <a:effectRef idx="0">
+            <a:scrgbClr r="0" g="0" b="0"/>
+          </a:effectRef>
+          <a:fontRef idx="minor">
+            <a:schemeClr val="accent1"/>
+          </a:fontRef>
+        </p:style>
+        <p:txBody>
+          <a:bodyPr rtlCol="0" anchor="ctr"/>
+          <a:lstStyle/>
+          <a:p>
+            <a:pPr algn="ctr"/>
+            <a:endParaRPr kumimoji="1" lang="ja-JP" altLang="en-US"/>
+          </a:p>
+        </p:txBody>
+      </p:sp>
+      <p:sp>
+        <p:nvSpPr>
+          <p:cNvPr id="4" name="四角形: 角を丸くする 3">
+            <a:extLst>
+              <a:ext uri="{FF2B5EF4-FFF2-40B4-BE49-F238E27FC236}">
+                <a16:creationId xmlns:a16="http://schemas.microsoft.com/office/drawing/2014/main" id="{BF580F91-BBFE-E155-5823-7590908F87ED}"/>
+              </a:ext>
+            </a:extLst>
+          </p:cNvPr>
+          <p:cNvSpPr/>
+          <p:nvPr/>
+        </p:nvSpPr>
+        <p:spPr>
+          <a:xfrm>
+            <a:off x="1344062" y="4443989"/>
+            <a:ext cx="1520706" cy="432048"/>
+          </a:xfrm>
+          <a:prstGeom prst="roundRect">
+            <a:avLst/>
+          </a:prstGeom>
+          <a:noFill/>
+          <a:ln w="19050" cap="flat" cmpd="sng" algn="ctr">
+            <a:solidFill>
+              <a:srgbClr val="FDD000"/>
+            </a:solidFill>
+            <a:prstDash val="solid"/>
+            <a:round/>
+            <a:headEnd type="none" w="med" len="med"/>
+            <a:tailEnd type="none" w="med" len="med"/>
+          </a:ln>
+        </p:spPr>
+        <p:style>
+          <a:lnRef idx="0">
+            <a:scrgbClr r="0" g="0" b="0"/>
+          </a:lnRef>
+          <a:fillRef idx="0">
+            <a:scrgbClr r="0" g="0" b="0"/>
+          </a:fillRef>
+          <a:effectRef idx="0">
+            <a:scrgbClr r="0" g="0" b="0"/>
+          </a:effectRef>
+          <a:fontRef idx="minor">
+            <a:schemeClr val="accent1"/>
+          </a:fontRef>
+        </p:style>
+        <p:txBody>
+          <a:bodyPr rtlCol="0" anchor="ctr"/>
+          <a:lstStyle/>
+          <a:p>
+            <a:pPr algn="ctr"/>
+            <a:endParaRPr kumimoji="1" lang="ja-JP" altLang="en-US"/>
+          </a:p>
+        </p:txBody>
+      </p:sp>
+      <p:sp>
+        <p:nvSpPr>
+          <p:cNvPr id="6" name="四角形: 角を丸くする 5">
+            <a:extLst>
+              <a:ext uri="{FF2B5EF4-FFF2-40B4-BE49-F238E27FC236}">
+                <a16:creationId xmlns:a16="http://schemas.microsoft.com/office/drawing/2014/main" id="{FADF93C5-F85F-A0F9-685D-BD30A17C7C9C}"/>
+              </a:ext>
+            </a:extLst>
+          </p:cNvPr>
+          <p:cNvSpPr/>
+          <p:nvPr/>
+        </p:nvSpPr>
+        <p:spPr>
+          <a:xfrm>
+            <a:off x="1308058" y="3378433"/>
+            <a:ext cx="1520706" cy="432048"/>
+          </a:xfrm>
+          <a:prstGeom prst="roundRect">
+            <a:avLst/>
+          </a:prstGeom>
+          <a:noFill/>
+          <a:ln w="19050" cap="flat" cmpd="sng" algn="ctr">
+            <a:solidFill>
+              <a:srgbClr val="FDD000"/>
+            </a:solidFill>
+            <a:prstDash val="solid"/>
+            <a:round/>
+            <a:headEnd type="none" w="med" len="med"/>
+            <a:tailEnd type="none" w="med" len="med"/>
+          </a:ln>
+        </p:spPr>
+        <p:style>
+          <a:lnRef idx="0">
+            <a:scrgbClr r="0" g="0" b="0"/>
+          </a:lnRef>
+          <a:fillRef idx="0">
+            <a:scrgbClr r="0" g="0" b="0"/>
+          </a:fillRef>
+          <a:effectRef idx="0">
+            <a:scrgbClr r="0" g="0" b="0"/>
+          </a:effectRef>
+          <a:fontRef idx="minor">
+            <a:schemeClr val="accent1"/>
+          </a:fontRef>
+        </p:style>
+        <p:txBody>
+          <a:bodyPr rtlCol="0" anchor="ctr"/>
+          <a:lstStyle/>
+          <a:p>
+            <a:pPr algn="ctr"/>
+            <a:endParaRPr kumimoji="1" lang="ja-JP" altLang="en-US"/>
+          </a:p>
+        </p:txBody>
+      </p:sp>
+      <p:sp>
+        <p:nvSpPr>
+          <p:cNvPr id="8" name="四角形: 角を丸くする 7">
+            <a:extLst>
+              <a:ext uri="{FF2B5EF4-FFF2-40B4-BE49-F238E27FC236}">
+                <a16:creationId xmlns:a16="http://schemas.microsoft.com/office/drawing/2014/main" id="{71317749-1F72-25FE-73D1-01C917EE31D2}"/>
+              </a:ext>
+            </a:extLst>
+          </p:cNvPr>
+          <p:cNvSpPr/>
+          <p:nvPr/>
+        </p:nvSpPr>
+        <p:spPr>
+          <a:xfrm>
+            <a:off x="3620852" y="4454825"/>
+            <a:ext cx="1520706" cy="432048"/>
+          </a:xfrm>
+          <a:prstGeom prst="roundRect">
+            <a:avLst/>
+          </a:prstGeom>
+          <a:noFill/>
+          <a:ln w="19050" cap="flat" cmpd="sng" algn="ctr">
+            <a:solidFill>
+              <a:srgbClr val="FDD000"/>
+            </a:solidFill>
+            <a:prstDash val="solid"/>
+            <a:round/>
+            <a:headEnd type="none" w="med" len="med"/>
+            <a:tailEnd type="none" w="med" len="med"/>
+          </a:ln>
+        </p:spPr>
+        <p:style>
+          <a:lnRef idx="0">
+            <a:scrgbClr r="0" g="0" b="0"/>
+          </a:lnRef>
+          <a:fillRef idx="0">
+            <a:scrgbClr r="0" g="0" b="0"/>
+          </a:fillRef>
+          <a:effectRef idx="0">
+            <a:scrgbClr r="0" g="0" b="0"/>
+          </a:effectRef>
+          <a:fontRef idx="minor">
+            <a:schemeClr val="accent1"/>
+          </a:fontRef>
+        </p:style>
+        <p:txBody>
+          <a:bodyPr rtlCol="0" anchor="ctr"/>
+          <a:lstStyle/>
+          <a:p>
+            <a:pPr algn="ctr"/>
+            <a:endParaRPr kumimoji="1" lang="ja-JP" altLang="en-US"/>
+          </a:p>
+        </p:txBody>
+      </p:sp>
+      <p:sp>
+        <p:nvSpPr>
+          <p:cNvPr id="9" name="四角形: 角を丸くする 8">
+            <a:extLst>
+              <a:ext uri="{FF2B5EF4-FFF2-40B4-BE49-F238E27FC236}">
+                <a16:creationId xmlns:a16="http://schemas.microsoft.com/office/drawing/2014/main" id="{08AA5CE4-83D4-328C-3E4E-55A78DCEA00F}"/>
+              </a:ext>
+            </a:extLst>
+          </p:cNvPr>
+          <p:cNvSpPr/>
+          <p:nvPr/>
+        </p:nvSpPr>
+        <p:spPr>
+          <a:xfrm>
+            <a:off x="1424608" y="5509544"/>
+            <a:ext cx="1520706" cy="547747"/>
+          </a:xfrm>
+          <a:prstGeom prst="roundRect">
+            <a:avLst/>
+          </a:prstGeom>
+          <a:noFill/>
+          <a:ln w="19050" cap="flat" cmpd="sng" algn="ctr">
+            <a:solidFill>
+              <a:srgbClr val="FDD000"/>
+            </a:solidFill>
+            <a:prstDash val="solid"/>
+            <a:round/>
+            <a:headEnd type="none" w="med" len="med"/>
+            <a:tailEnd type="none" w="med" len="med"/>
+          </a:ln>
+        </p:spPr>
+        <p:style>
+          <a:lnRef idx="0">
+            <a:scrgbClr r="0" g="0" b="0"/>
+          </a:lnRef>
+          <a:fillRef idx="0">
+            <a:scrgbClr r="0" g="0" b="0"/>
+          </a:fillRef>
+          <a:effectRef idx="0">
+            <a:scrgbClr r="0" g="0" b="0"/>
+          </a:effectRef>
+          <a:fontRef idx="minor">
+            <a:schemeClr val="accent1"/>
+          </a:fontRef>
+        </p:style>
+        <p:txBody>
+          <a:bodyPr rtlCol="0" anchor="ctr"/>
+          <a:lstStyle/>
+          <a:p>
+            <a:pPr algn="ctr"/>
+            <a:endParaRPr kumimoji="1" lang="ja-JP" altLang="en-US"/>
+          </a:p>
+        </p:txBody>
+      </p:sp>
     </p:spTree>
     <p:extLst>
       <p:ext uri="{BB962C8B-B14F-4D97-AF65-F5344CB8AC3E}">
@@ -12985,10 +14751,272 @@
   <p:clrMapOvr>
     <a:masterClrMapping/>
   </p:clrMapOvr>
+  <p:timing>
+    <p:tnLst>
+      <p:par>
+        <p:cTn id="1" dur="indefinite" restart="never" nodeType="tmRoot">
+          <p:childTnLst>
+            <p:seq concurrent="1" nextAc="seek">
+              <p:cTn id="2" dur="indefinite" nodeType="mainSeq">
+                <p:childTnLst>
+                  <p:par>
+                    <p:cTn id="3" fill="hold">
+                      <p:stCondLst>
+                        <p:cond delay="indefinite"/>
+                      </p:stCondLst>
+                      <p:childTnLst>
+                        <p:par>
+                          <p:cTn id="4" fill="hold">
+                            <p:stCondLst>
+                              <p:cond delay="0"/>
+                            </p:stCondLst>
+                            <p:childTnLst>
+                              <p:par>
+                                <p:cTn id="5" presetID="1" presetClass="entr" presetSubtype="0" fill="hold" grpId="0" nodeType="clickEffect">
+                                  <p:stCondLst>
+                                    <p:cond delay="0"/>
+                                  </p:stCondLst>
+                                  <p:childTnLst>
+                                    <p:set>
+                                      <p:cBhvr>
+                                        <p:cTn id="6" dur="1" fill="hold">
+                                          <p:stCondLst>
+                                            <p:cond delay="0"/>
+                                          </p:stCondLst>
+                                        </p:cTn>
+                                        <p:tgtEl>
+                                          <p:spTgt spid="2"/>
+                                        </p:tgtEl>
+                                        <p:attrNameLst>
+                                          <p:attrName>style.visibility</p:attrName>
+                                        </p:attrNameLst>
+                                      </p:cBhvr>
+                                      <p:to>
+                                        <p:strVal val="visible"/>
+                                      </p:to>
+                                    </p:set>
+                                  </p:childTnLst>
+                                </p:cTn>
+                              </p:par>
+                            </p:childTnLst>
+                          </p:cTn>
+                        </p:par>
+                      </p:childTnLst>
+                    </p:cTn>
+                  </p:par>
+                  <p:par>
+                    <p:cTn id="7" fill="hold">
+                      <p:stCondLst>
+                        <p:cond delay="indefinite"/>
+                      </p:stCondLst>
+                      <p:childTnLst>
+                        <p:par>
+                          <p:cTn id="8" fill="hold">
+                            <p:stCondLst>
+                              <p:cond delay="0"/>
+                            </p:stCondLst>
+                            <p:childTnLst>
+                              <p:par>
+                                <p:cTn id="9" presetID="1" presetClass="entr" presetSubtype="0" fill="hold" grpId="0" nodeType="clickEffect">
+                                  <p:stCondLst>
+                                    <p:cond delay="0"/>
+                                  </p:stCondLst>
+                                  <p:childTnLst>
+                                    <p:set>
+                                      <p:cBhvr>
+                                        <p:cTn id="10" dur="1" fill="hold">
+                                          <p:stCondLst>
+                                            <p:cond delay="0"/>
+                                          </p:stCondLst>
+                                        </p:cTn>
+                                        <p:tgtEl>
+                                          <p:spTgt spid="4"/>
+                                        </p:tgtEl>
+                                        <p:attrNameLst>
+                                          <p:attrName>style.visibility</p:attrName>
+                                        </p:attrNameLst>
+                                      </p:cBhvr>
+                                      <p:to>
+                                        <p:strVal val="visible"/>
+                                      </p:to>
+                                    </p:set>
+                                  </p:childTnLst>
+                                </p:cTn>
+                              </p:par>
+                            </p:childTnLst>
+                          </p:cTn>
+                        </p:par>
+                      </p:childTnLst>
+                    </p:cTn>
+                  </p:par>
+                  <p:par>
+                    <p:cTn id="11" fill="hold">
+                      <p:stCondLst>
+                        <p:cond delay="indefinite"/>
+                      </p:stCondLst>
+                      <p:childTnLst>
+                        <p:par>
+                          <p:cTn id="12" fill="hold">
+                            <p:stCondLst>
+                              <p:cond delay="0"/>
+                            </p:stCondLst>
+                            <p:childTnLst>
+                              <p:par>
+                                <p:cTn id="13" presetID="1" presetClass="entr" presetSubtype="0" fill="hold" grpId="0" nodeType="clickEffect">
+                                  <p:stCondLst>
+                                    <p:cond delay="0"/>
+                                  </p:stCondLst>
+                                  <p:childTnLst>
+                                    <p:set>
+                                      <p:cBhvr>
+                                        <p:cTn id="14" dur="1" fill="hold">
+                                          <p:stCondLst>
+                                            <p:cond delay="0"/>
+                                          </p:stCondLst>
+                                        </p:cTn>
+                                        <p:tgtEl>
+                                          <p:spTgt spid="6"/>
+                                        </p:tgtEl>
+                                        <p:attrNameLst>
+                                          <p:attrName>style.visibility</p:attrName>
+                                        </p:attrNameLst>
+                                      </p:cBhvr>
+                                      <p:to>
+                                        <p:strVal val="visible"/>
+                                      </p:to>
+                                    </p:set>
+                                  </p:childTnLst>
+                                </p:cTn>
+                              </p:par>
+                            </p:childTnLst>
+                          </p:cTn>
+                        </p:par>
+                      </p:childTnLst>
+                    </p:cTn>
+                  </p:par>
+                  <p:par>
+                    <p:cTn id="15" fill="hold">
+                      <p:stCondLst>
+                        <p:cond delay="indefinite"/>
+                      </p:stCondLst>
+                      <p:childTnLst>
+                        <p:par>
+                          <p:cTn id="16" fill="hold">
+                            <p:stCondLst>
+                              <p:cond delay="0"/>
+                            </p:stCondLst>
+                            <p:childTnLst>
+                              <p:par>
+                                <p:cTn id="17" presetID="1" presetClass="entr" presetSubtype="0" fill="hold" grpId="0" nodeType="clickEffect">
+                                  <p:stCondLst>
+                                    <p:cond delay="0"/>
+                                  </p:stCondLst>
+                                  <p:childTnLst>
+                                    <p:set>
+                                      <p:cBhvr>
+                                        <p:cTn id="18" dur="1" fill="hold">
+                                          <p:stCondLst>
+                                            <p:cond delay="0"/>
+                                          </p:stCondLst>
+                                        </p:cTn>
+                                        <p:tgtEl>
+                                          <p:spTgt spid="8"/>
+                                        </p:tgtEl>
+                                        <p:attrNameLst>
+                                          <p:attrName>style.visibility</p:attrName>
+                                        </p:attrNameLst>
+                                      </p:cBhvr>
+                                      <p:to>
+                                        <p:strVal val="visible"/>
+                                      </p:to>
+                                    </p:set>
+                                  </p:childTnLst>
+                                </p:cTn>
+                              </p:par>
+                            </p:childTnLst>
+                          </p:cTn>
+                        </p:par>
+                      </p:childTnLst>
+                    </p:cTn>
+                  </p:par>
+                  <p:par>
+                    <p:cTn id="19" fill="hold">
+                      <p:stCondLst>
+                        <p:cond delay="indefinite"/>
+                      </p:stCondLst>
+                      <p:childTnLst>
+                        <p:par>
+                          <p:cTn id="20" fill="hold">
+                            <p:stCondLst>
+                              <p:cond delay="0"/>
+                            </p:stCondLst>
+                            <p:childTnLst>
+                              <p:par>
+                                <p:cTn id="21" presetID="1" presetClass="entr" presetSubtype="0" fill="hold" grpId="0" nodeType="clickEffect">
+                                  <p:stCondLst>
+                                    <p:cond delay="0"/>
+                                  </p:stCondLst>
+                                  <p:childTnLst>
+                                    <p:set>
+                                      <p:cBhvr>
+                                        <p:cTn id="22" dur="1" fill="hold">
+                                          <p:stCondLst>
+                                            <p:cond delay="0"/>
+                                          </p:stCondLst>
+                                        </p:cTn>
+                                        <p:tgtEl>
+                                          <p:spTgt spid="9"/>
+                                        </p:tgtEl>
+                                        <p:attrNameLst>
+                                          <p:attrName>style.visibility</p:attrName>
+                                        </p:attrNameLst>
+                                      </p:cBhvr>
+                                      <p:to>
+                                        <p:strVal val="visible"/>
+                                      </p:to>
+                                    </p:set>
+                                  </p:childTnLst>
+                                </p:cTn>
+                              </p:par>
+                            </p:childTnLst>
+                          </p:cTn>
+                        </p:par>
+                      </p:childTnLst>
+                    </p:cTn>
+                  </p:par>
+                </p:childTnLst>
+              </p:cTn>
+              <p:prevCondLst>
+                <p:cond evt="onPrev" delay="0">
+                  <p:tgtEl>
+                    <p:sldTgt/>
+                  </p:tgtEl>
+                </p:cond>
+              </p:prevCondLst>
+              <p:nextCondLst>
+                <p:cond evt="onNext" delay="0">
+                  <p:tgtEl>
+                    <p:sldTgt/>
+                  </p:tgtEl>
+                </p:cond>
+              </p:nextCondLst>
+            </p:seq>
+          </p:childTnLst>
+        </p:cTn>
+      </p:par>
+    </p:tnLst>
+    <p:bldLst>
+      <p:bldP spid="2" grpId="0" animBg="1"/>
+      <p:bldP spid="4" grpId="0" animBg="1"/>
+      <p:bldP spid="6" grpId="0" animBg="1"/>
+      <p:bldP spid="8" grpId="0" animBg="1"/>
+      <p:bldP spid="9" grpId="0" animBg="1"/>
+    </p:bldLst>
+  </p:timing>
 </p:sld>
 </file>
 
-<file path=ppt/slides/slide7.xml><?xml version="1.0" encoding="utf-8"?>
+<file path=ppt/slides/slide8.xml><?xml version="1.0" encoding="utf-8"?>
 <p:sld xmlns:a="http://schemas.openxmlformats.org/drawingml/2006/main" xmlns:r="http://schemas.openxmlformats.org/officeDocument/2006/relationships" xmlns:p="http://schemas.openxmlformats.org/presentationml/2006/main">
   <p:cSld>
     <p:spTree>
@@ -13027,7 +15055,12 @@
             <p:ph idx="1"/>
           </p:nvPr>
         </p:nvSpPr>
-        <p:spPr/>
+        <p:spPr>
+          <a:xfrm>
+            <a:off x="704850" y="1282426"/>
+            <a:ext cx="8496300" cy="5371113"/>
+          </a:xfrm>
+        </p:spPr>
         <p:txBody>
           <a:bodyPr>
             <a:normAutofit/>
@@ -13065,24 +15098,18 @@
             <a:br>
               <a:rPr kumimoji="1" lang="en-US" altLang="ja-JP" sz="1800" dirty="0"/>
             </a:br>
+            <a:endParaRPr kumimoji="1" lang="ja-JP" altLang="en-US" sz="1800" dirty="0"/>
+          </a:p>
+          <a:p>
+            <a:pPr lvl="1"/>
             <a:r>
               <a:rPr kumimoji="1" lang="ja-JP" altLang="en-US" sz="1800" dirty="0"/>
-              <a:t>→ selfhost ランナー</a:t>
-            </a:r>
-          </a:p>
-          <a:p>
-            <a:pPr lvl="1"/>
-            <a:r>
-              <a:rPr kumimoji="1" lang="ja-JP" altLang="en-US" sz="1800" dirty="0"/>
-              <a:t>Git 画像でリポジトリが重い   </a:t>
+              <a:t>Git 画像でリポジトリが重くなる   </a:t>
             </a:r>
             <a:br>
               <a:rPr kumimoji="1" lang="en-US" altLang="ja-JP" sz="1800" dirty="0"/>
             </a:br>
-            <a:r>
-              <a:rPr kumimoji="1" lang="ja-JP" altLang="en-US" sz="1800" dirty="0"/>
-              <a:t>→ Azure Blob ストレージに保存してリンクを張る</a:t>
-            </a:r>
+            <a:endParaRPr kumimoji="1" lang="ja-JP" altLang="en-US" sz="1800" dirty="0"/>
           </a:p>
           <a:p>
             <a:pPr lvl="1"/>
@@ -13093,10 +15120,10 @@
             <a:br>
               <a:rPr kumimoji="1" lang="en-US" altLang="ja-JP" sz="1800" dirty="0"/>
             </a:br>
-            <a:r>
-              <a:rPr kumimoji="1" lang="ja-JP" altLang="en-US" sz="1800" dirty="0"/>
-              <a:t>→ CLI スクリプト + ショートカットで実行</a:t>
-            </a:r>
+            <a:endParaRPr lang="en-US" altLang="ja-JP" sz="1800" dirty="0"/>
+          </a:p>
+          <a:p>
+            <a:pPr lvl="1"/>
             <a:endParaRPr kumimoji="1" lang="en-US" altLang="ja-JP" sz="1800" dirty="0"/>
           </a:p>
           <a:p>
@@ -13116,18 +15143,6 @@
             <a:br>
               <a:rPr lang="en-US" altLang="ja-JP" sz="1800" dirty="0"/>
             </a:br>
-            <a:r>
-              <a:rPr lang="ja-JP" altLang="en-US" sz="1800" dirty="0"/>
-              <a:t>→ </a:t>
-            </a:r>
-            <a:r>
-              <a:rPr lang="en-US" altLang="ja-JP" sz="1800" dirty="0" err="1"/>
-              <a:t>Growi</a:t>
-            </a:r>
-            <a:r>
-              <a:rPr lang="ja-JP" altLang="en-US" sz="1800" dirty="0"/>
-              <a:t>からリポジトリへのの取り込み機能</a:t>
-            </a:r>
             <a:endParaRPr lang="en-US" altLang="ja-JP" sz="1800" dirty="0"/>
           </a:p>
           <a:p>
@@ -13140,19 +15155,7 @@
             <a:pPr marL="257173" lvl="1" indent="0">
               <a:buNone/>
             </a:pPr>
-            <a:r>
-              <a:rPr lang="ja-JP" altLang="en-US" sz="1800" dirty="0"/>
-              <a:t>仕組みを決めてしまえば、</a:t>
-            </a:r>
-            <a:r>
-              <a:rPr lang="en-US" altLang="ja-JP" sz="1800" dirty="0"/>
-              <a:t>AI</a:t>
-            </a:r>
-            <a:r>
-              <a:rPr lang="ja-JP" altLang="en-US" sz="1800" dirty="0"/>
-              <a:t>🤖がサクッと実装してくれる</a:t>
-            </a:r>
-            <a:endParaRPr kumimoji="1" lang="en-US" altLang="ja-JP" sz="1600" dirty="0"/>
+            <a:endParaRPr lang="en-US" altLang="ja-JP" sz="1800" dirty="0"/>
           </a:p>
         </p:txBody>
       </p:sp>
@@ -13184,6 +15187,328 @@
           </a:p>
         </p:txBody>
       </p:sp>
+      <p:sp>
+        <p:nvSpPr>
+          <p:cNvPr id="4" name="吹き出し: 四角形 3">
+            <a:extLst>
+              <a:ext uri="{FF2B5EF4-FFF2-40B4-BE49-F238E27FC236}">
+                <a16:creationId xmlns:a16="http://schemas.microsoft.com/office/drawing/2014/main" id="{9540A863-1177-CF01-189A-8FCE7188CCD9}"/>
+              </a:ext>
+            </a:extLst>
+          </p:cNvPr>
+          <p:cNvSpPr/>
+          <p:nvPr/>
+        </p:nvSpPr>
+        <p:spPr>
+          <a:xfrm>
+            <a:off x="5169024" y="2276872"/>
+            <a:ext cx="2808312" cy="468052"/>
+          </a:xfrm>
+          <a:prstGeom prst="wedgeRectCallout">
+            <a:avLst>
+              <a:gd name="adj1" fmla="val -38958"/>
+              <a:gd name="adj2" fmla="val -95147"/>
+            </a:avLst>
+          </a:prstGeom>
+          <a:solidFill>
+            <a:schemeClr val="accent6">
+              <a:alpha val="50000"/>
+            </a:schemeClr>
+          </a:solidFill>
+          <a:ln>
+            <a:noFill/>
+          </a:ln>
+        </p:spPr>
+        <p:style>
+          <a:lnRef idx="0">
+            <a:scrgbClr r="0" g="0" b="0"/>
+          </a:lnRef>
+          <a:fillRef idx="0">
+            <a:scrgbClr r="0" g="0" b="0"/>
+          </a:fillRef>
+          <a:effectRef idx="0">
+            <a:scrgbClr r="0" g="0" b="0"/>
+          </a:effectRef>
+          <a:fontRef idx="minor">
+            <a:schemeClr val="lt1"/>
+          </a:fontRef>
+        </p:style>
+        <p:txBody>
+          <a:bodyPr rtlCol="0" anchor="ctr"/>
+          <a:lstStyle/>
+          <a:p>
+            <a:pPr lvl="1"/>
+            <a:r>
+              <a:rPr lang="ja-JP" altLang="en-US" dirty="0"/>
+              <a:t>selfhost ランナー</a:t>
+            </a:r>
+          </a:p>
+        </p:txBody>
+      </p:sp>
+      <p:sp>
+        <p:nvSpPr>
+          <p:cNvPr id="5" name="吹き出し: 四角形 4">
+            <a:extLst>
+              <a:ext uri="{FF2B5EF4-FFF2-40B4-BE49-F238E27FC236}">
+                <a16:creationId xmlns:a16="http://schemas.microsoft.com/office/drawing/2014/main" id="{BEE6FA36-D461-1B8F-13B0-81FACDC1A0B7}"/>
+              </a:ext>
+            </a:extLst>
+          </p:cNvPr>
+          <p:cNvSpPr/>
+          <p:nvPr/>
+        </p:nvSpPr>
+        <p:spPr>
+          <a:xfrm>
+            <a:off x="4340932" y="3105779"/>
+            <a:ext cx="3456384" cy="654615"/>
+          </a:xfrm>
+          <a:prstGeom prst="wedgeRectCallout">
+            <a:avLst>
+              <a:gd name="adj1" fmla="val -46061"/>
+              <a:gd name="adj2" fmla="val -86766"/>
+            </a:avLst>
+          </a:prstGeom>
+          <a:solidFill>
+            <a:schemeClr val="accent6">
+              <a:alpha val="50000"/>
+            </a:schemeClr>
+          </a:solidFill>
+          <a:ln>
+            <a:noFill/>
+          </a:ln>
+        </p:spPr>
+        <p:style>
+          <a:lnRef idx="0">
+            <a:scrgbClr r="0" g="0" b="0"/>
+          </a:lnRef>
+          <a:fillRef idx="0">
+            <a:scrgbClr r="0" g="0" b="0"/>
+          </a:fillRef>
+          <a:effectRef idx="0">
+            <a:scrgbClr r="0" g="0" b="0"/>
+          </a:effectRef>
+          <a:fontRef idx="minor">
+            <a:schemeClr val="lt1"/>
+          </a:fontRef>
+        </p:style>
+        <p:txBody>
+          <a:bodyPr rtlCol="0" anchor="ctr"/>
+          <a:lstStyle/>
+          <a:p>
+            <a:pPr lvl="1"/>
+            <a:r>
+              <a:rPr lang="ja-JP" altLang="en-US" dirty="0"/>
+              <a:t>Azure Blob ストレージに</a:t>
+            </a:r>
+            <a:br>
+              <a:rPr lang="en-US" altLang="ja-JP" dirty="0"/>
+            </a:br>
+            <a:r>
+              <a:rPr lang="ja-JP" altLang="en-US" dirty="0"/>
+              <a:t>保存してリンクを張る</a:t>
+            </a:r>
+          </a:p>
+        </p:txBody>
+      </p:sp>
+      <p:sp>
+        <p:nvSpPr>
+          <p:cNvPr id="6" name="吹き出し: 四角形 5">
+            <a:extLst>
+              <a:ext uri="{FF2B5EF4-FFF2-40B4-BE49-F238E27FC236}">
+                <a16:creationId xmlns:a16="http://schemas.microsoft.com/office/drawing/2014/main" id="{BBF654A3-3036-F8AC-A16E-4520E0072BA0}"/>
+              </a:ext>
+            </a:extLst>
+          </p:cNvPr>
+          <p:cNvSpPr/>
+          <p:nvPr/>
+        </p:nvSpPr>
+        <p:spPr>
+          <a:xfrm>
+            <a:off x="2972780" y="3967982"/>
+            <a:ext cx="3456384" cy="654615"/>
+          </a:xfrm>
+          <a:prstGeom prst="wedgeRectCallout">
+            <a:avLst>
+              <a:gd name="adj1" fmla="val -31775"/>
+              <a:gd name="adj2" fmla="val -92353"/>
+            </a:avLst>
+          </a:prstGeom>
+          <a:solidFill>
+            <a:schemeClr val="accent6">
+              <a:alpha val="50000"/>
+            </a:schemeClr>
+          </a:solidFill>
+          <a:ln>
+            <a:noFill/>
+          </a:ln>
+        </p:spPr>
+        <p:style>
+          <a:lnRef idx="0">
+            <a:scrgbClr r="0" g="0" b="0"/>
+          </a:lnRef>
+          <a:fillRef idx="0">
+            <a:scrgbClr r="0" g="0" b="0"/>
+          </a:fillRef>
+          <a:effectRef idx="0">
+            <a:scrgbClr r="0" g="0" b="0"/>
+          </a:effectRef>
+          <a:fontRef idx="minor">
+            <a:schemeClr val="lt1"/>
+          </a:fontRef>
+        </p:style>
+        <p:txBody>
+          <a:bodyPr rtlCol="0" anchor="ctr"/>
+          <a:lstStyle/>
+          <a:p>
+            <a:pPr lvl="1"/>
+            <a:r>
+              <a:rPr lang="ja-JP" altLang="en-US" dirty="0"/>
+              <a:t>CLI スクリプト </a:t>
+            </a:r>
+            <a:br>
+              <a:rPr lang="en-US" altLang="ja-JP" dirty="0"/>
+            </a:br>
+            <a:r>
+              <a:rPr lang="ja-JP" altLang="en-US" dirty="0"/>
+              <a:t>+ ショートカットで実行</a:t>
+            </a:r>
+          </a:p>
+        </p:txBody>
+      </p:sp>
+      <p:sp>
+        <p:nvSpPr>
+          <p:cNvPr id="7" name="吹き出し: 四角形 6">
+            <a:extLst>
+              <a:ext uri="{FF2B5EF4-FFF2-40B4-BE49-F238E27FC236}">
+                <a16:creationId xmlns:a16="http://schemas.microsoft.com/office/drawing/2014/main" id="{727F26EB-507B-D8E8-8B66-38959370A888}"/>
+              </a:ext>
+            </a:extLst>
+          </p:cNvPr>
+          <p:cNvSpPr/>
+          <p:nvPr/>
+        </p:nvSpPr>
+        <p:spPr>
+          <a:xfrm>
+            <a:off x="1964668" y="5301208"/>
+            <a:ext cx="3852106" cy="853559"/>
+          </a:xfrm>
+          <a:prstGeom prst="wedgeRectCallout">
+            <a:avLst>
+              <a:gd name="adj1" fmla="val -34431"/>
+              <a:gd name="adj2" fmla="val -93330"/>
+            </a:avLst>
+          </a:prstGeom>
+          <a:solidFill>
+            <a:schemeClr val="accent6">
+              <a:alpha val="50000"/>
+            </a:schemeClr>
+          </a:solidFill>
+          <a:ln>
+            <a:noFill/>
+          </a:ln>
+        </p:spPr>
+        <p:style>
+          <a:lnRef idx="0">
+            <a:scrgbClr r="0" g="0" b="0"/>
+          </a:lnRef>
+          <a:fillRef idx="0">
+            <a:scrgbClr r="0" g="0" b="0"/>
+          </a:fillRef>
+          <a:effectRef idx="0">
+            <a:scrgbClr r="0" g="0" b="0"/>
+          </a:effectRef>
+          <a:fontRef idx="minor">
+            <a:schemeClr val="lt1"/>
+          </a:fontRef>
+        </p:style>
+        <p:txBody>
+          <a:bodyPr rtlCol="0" anchor="ctr"/>
+          <a:lstStyle/>
+          <a:p>
+            <a:pPr lvl="1"/>
+            <a:r>
+              <a:rPr lang="en-US" altLang="ja-JP" dirty="0" err="1"/>
+              <a:t>Growi</a:t>
+            </a:r>
+            <a:r>
+              <a:rPr lang="ja-JP" altLang="en-US" dirty="0"/>
+              <a:t>からリポジトリへのの取り込み機能</a:t>
+            </a:r>
+          </a:p>
+        </p:txBody>
+      </p:sp>
+      <p:sp>
+        <p:nvSpPr>
+          <p:cNvPr id="8" name="吹き出し: 四角形 7">
+            <a:extLst>
+              <a:ext uri="{FF2B5EF4-FFF2-40B4-BE49-F238E27FC236}">
+                <a16:creationId xmlns:a16="http://schemas.microsoft.com/office/drawing/2014/main" id="{3BDD8B27-C3DA-BA08-1C19-5573ECACAE25}"/>
+              </a:ext>
+            </a:extLst>
+          </p:cNvPr>
+          <p:cNvSpPr/>
+          <p:nvPr/>
+        </p:nvSpPr>
+        <p:spPr>
+          <a:xfrm>
+            <a:off x="6064892" y="5799980"/>
+            <a:ext cx="3726253" cy="853559"/>
+          </a:xfrm>
+          <a:prstGeom prst="wedgeRectCallout">
+            <a:avLst>
+              <a:gd name="adj1" fmla="val -37621"/>
+              <a:gd name="adj2" fmla="val -122255"/>
+            </a:avLst>
+          </a:prstGeom>
+          <a:solidFill>
+            <a:schemeClr val="accent6">
+              <a:alpha val="50000"/>
+            </a:schemeClr>
+          </a:solidFill>
+          <a:ln>
+            <a:noFill/>
+          </a:ln>
+        </p:spPr>
+        <p:style>
+          <a:lnRef idx="0">
+            <a:scrgbClr r="0" g="0" b="0"/>
+          </a:lnRef>
+          <a:fillRef idx="0">
+            <a:scrgbClr r="0" g="0" b="0"/>
+          </a:fillRef>
+          <a:effectRef idx="0">
+            <a:scrgbClr r="0" g="0" b="0"/>
+          </a:effectRef>
+          <a:fontRef idx="minor">
+            <a:schemeClr val="lt1"/>
+          </a:fontRef>
+        </p:style>
+        <p:txBody>
+          <a:bodyPr rtlCol="0" anchor="ctr"/>
+          <a:lstStyle/>
+          <a:p>
+            <a:pPr marL="257173" lvl="1" indent="0">
+              <a:buNone/>
+            </a:pPr>
+            <a:r>
+              <a:rPr lang="ja-JP" altLang="en-US" dirty="0"/>
+              <a:t>仕組みを決めてしまえば、</a:t>
+            </a:r>
+            <a:br>
+              <a:rPr lang="en-US" altLang="ja-JP" dirty="0"/>
+            </a:br>
+            <a:r>
+              <a:rPr lang="en-US" altLang="ja-JP" dirty="0"/>
+              <a:t>AI</a:t>
+            </a:r>
+            <a:r>
+              <a:rPr lang="ja-JP" altLang="en-US" dirty="0"/>
+              <a:t>🤖がサクッと実装してくれる</a:t>
+            </a:r>
+            <a:endParaRPr lang="en-US" altLang="ja-JP" sz="1600" dirty="0"/>
+          </a:p>
+        </p:txBody>
+      </p:sp>
     </p:spTree>
     <p:extLst>
       <p:ext uri="{BB962C8B-B14F-4D97-AF65-F5344CB8AC3E}">
@@ -13194,10 +15519,272 @@
   <p:clrMapOvr>
     <a:masterClrMapping/>
   </p:clrMapOvr>
+  <p:timing>
+    <p:tnLst>
+      <p:par>
+        <p:cTn id="1" dur="indefinite" restart="never" nodeType="tmRoot">
+          <p:childTnLst>
+            <p:seq concurrent="1" nextAc="seek">
+              <p:cTn id="2" dur="indefinite" nodeType="mainSeq">
+                <p:childTnLst>
+                  <p:par>
+                    <p:cTn id="3" fill="hold">
+                      <p:stCondLst>
+                        <p:cond delay="indefinite"/>
+                      </p:stCondLst>
+                      <p:childTnLst>
+                        <p:par>
+                          <p:cTn id="4" fill="hold">
+                            <p:stCondLst>
+                              <p:cond delay="0"/>
+                            </p:stCondLst>
+                            <p:childTnLst>
+                              <p:par>
+                                <p:cTn id="5" presetID="1" presetClass="entr" presetSubtype="0" fill="hold" grpId="0" nodeType="clickEffect">
+                                  <p:stCondLst>
+                                    <p:cond delay="0"/>
+                                  </p:stCondLst>
+                                  <p:childTnLst>
+                                    <p:set>
+                                      <p:cBhvr>
+                                        <p:cTn id="6" dur="1" fill="hold">
+                                          <p:stCondLst>
+                                            <p:cond delay="0"/>
+                                          </p:stCondLst>
+                                        </p:cTn>
+                                        <p:tgtEl>
+                                          <p:spTgt spid="4"/>
+                                        </p:tgtEl>
+                                        <p:attrNameLst>
+                                          <p:attrName>style.visibility</p:attrName>
+                                        </p:attrNameLst>
+                                      </p:cBhvr>
+                                      <p:to>
+                                        <p:strVal val="visible"/>
+                                      </p:to>
+                                    </p:set>
+                                  </p:childTnLst>
+                                </p:cTn>
+                              </p:par>
+                            </p:childTnLst>
+                          </p:cTn>
+                        </p:par>
+                      </p:childTnLst>
+                    </p:cTn>
+                  </p:par>
+                  <p:par>
+                    <p:cTn id="7" fill="hold">
+                      <p:stCondLst>
+                        <p:cond delay="indefinite"/>
+                      </p:stCondLst>
+                      <p:childTnLst>
+                        <p:par>
+                          <p:cTn id="8" fill="hold">
+                            <p:stCondLst>
+                              <p:cond delay="0"/>
+                            </p:stCondLst>
+                            <p:childTnLst>
+                              <p:par>
+                                <p:cTn id="9" presetID="1" presetClass="entr" presetSubtype="0" fill="hold" grpId="0" nodeType="clickEffect">
+                                  <p:stCondLst>
+                                    <p:cond delay="0"/>
+                                  </p:stCondLst>
+                                  <p:childTnLst>
+                                    <p:set>
+                                      <p:cBhvr>
+                                        <p:cTn id="10" dur="1" fill="hold">
+                                          <p:stCondLst>
+                                            <p:cond delay="0"/>
+                                          </p:stCondLst>
+                                        </p:cTn>
+                                        <p:tgtEl>
+                                          <p:spTgt spid="5"/>
+                                        </p:tgtEl>
+                                        <p:attrNameLst>
+                                          <p:attrName>style.visibility</p:attrName>
+                                        </p:attrNameLst>
+                                      </p:cBhvr>
+                                      <p:to>
+                                        <p:strVal val="visible"/>
+                                      </p:to>
+                                    </p:set>
+                                  </p:childTnLst>
+                                </p:cTn>
+                              </p:par>
+                            </p:childTnLst>
+                          </p:cTn>
+                        </p:par>
+                      </p:childTnLst>
+                    </p:cTn>
+                  </p:par>
+                  <p:par>
+                    <p:cTn id="11" fill="hold">
+                      <p:stCondLst>
+                        <p:cond delay="indefinite"/>
+                      </p:stCondLst>
+                      <p:childTnLst>
+                        <p:par>
+                          <p:cTn id="12" fill="hold">
+                            <p:stCondLst>
+                              <p:cond delay="0"/>
+                            </p:stCondLst>
+                            <p:childTnLst>
+                              <p:par>
+                                <p:cTn id="13" presetID="1" presetClass="entr" presetSubtype="0" fill="hold" grpId="0" nodeType="clickEffect">
+                                  <p:stCondLst>
+                                    <p:cond delay="0"/>
+                                  </p:stCondLst>
+                                  <p:childTnLst>
+                                    <p:set>
+                                      <p:cBhvr>
+                                        <p:cTn id="14" dur="1" fill="hold">
+                                          <p:stCondLst>
+                                            <p:cond delay="0"/>
+                                          </p:stCondLst>
+                                        </p:cTn>
+                                        <p:tgtEl>
+                                          <p:spTgt spid="6"/>
+                                        </p:tgtEl>
+                                        <p:attrNameLst>
+                                          <p:attrName>style.visibility</p:attrName>
+                                        </p:attrNameLst>
+                                      </p:cBhvr>
+                                      <p:to>
+                                        <p:strVal val="visible"/>
+                                      </p:to>
+                                    </p:set>
+                                  </p:childTnLst>
+                                </p:cTn>
+                              </p:par>
+                            </p:childTnLst>
+                          </p:cTn>
+                        </p:par>
+                      </p:childTnLst>
+                    </p:cTn>
+                  </p:par>
+                  <p:par>
+                    <p:cTn id="15" fill="hold">
+                      <p:stCondLst>
+                        <p:cond delay="indefinite"/>
+                      </p:stCondLst>
+                      <p:childTnLst>
+                        <p:par>
+                          <p:cTn id="16" fill="hold">
+                            <p:stCondLst>
+                              <p:cond delay="0"/>
+                            </p:stCondLst>
+                            <p:childTnLst>
+                              <p:par>
+                                <p:cTn id="17" presetID="1" presetClass="entr" presetSubtype="0" fill="hold" grpId="0" nodeType="clickEffect">
+                                  <p:stCondLst>
+                                    <p:cond delay="0"/>
+                                  </p:stCondLst>
+                                  <p:childTnLst>
+                                    <p:set>
+                                      <p:cBhvr>
+                                        <p:cTn id="18" dur="1" fill="hold">
+                                          <p:stCondLst>
+                                            <p:cond delay="0"/>
+                                          </p:stCondLst>
+                                        </p:cTn>
+                                        <p:tgtEl>
+                                          <p:spTgt spid="7"/>
+                                        </p:tgtEl>
+                                        <p:attrNameLst>
+                                          <p:attrName>style.visibility</p:attrName>
+                                        </p:attrNameLst>
+                                      </p:cBhvr>
+                                      <p:to>
+                                        <p:strVal val="visible"/>
+                                      </p:to>
+                                    </p:set>
+                                  </p:childTnLst>
+                                </p:cTn>
+                              </p:par>
+                            </p:childTnLst>
+                          </p:cTn>
+                        </p:par>
+                      </p:childTnLst>
+                    </p:cTn>
+                  </p:par>
+                  <p:par>
+                    <p:cTn id="19" fill="hold">
+                      <p:stCondLst>
+                        <p:cond delay="indefinite"/>
+                      </p:stCondLst>
+                      <p:childTnLst>
+                        <p:par>
+                          <p:cTn id="20" fill="hold">
+                            <p:stCondLst>
+                              <p:cond delay="0"/>
+                            </p:stCondLst>
+                            <p:childTnLst>
+                              <p:par>
+                                <p:cTn id="21" presetID="1" presetClass="entr" presetSubtype="0" fill="hold" grpId="0" nodeType="clickEffect">
+                                  <p:stCondLst>
+                                    <p:cond delay="0"/>
+                                  </p:stCondLst>
+                                  <p:childTnLst>
+                                    <p:set>
+                                      <p:cBhvr>
+                                        <p:cTn id="22" dur="1" fill="hold">
+                                          <p:stCondLst>
+                                            <p:cond delay="0"/>
+                                          </p:stCondLst>
+                                        </p:cTn>
+                                        <p:tgtEl>
+                                          <p:spTgt spid="8"/>
+                                        </p:tgtEl>
+                                        <p:attrNameLst>
+                                          <p:attrName>style.visibility</p:attrName>
+                                        </p:attrNameLst>
+                                      </p:cBhvr>
+                                      <p:to>
+                                        <p:strVal val="visible"/>
+                                      </p:to>
+                                    </p:set>
+                                  </p:childTnLst>
+                                </p:cTn>
+                              </p:par>
+                            </p:childTnLst>
+                          </p:cTn>
+                        </p:par>
+                      </p:childTnLst>
+                    </p:cTn>
+                  </p:par>
+                </p:childTnLst>
+              </p:cTn>
+              <p:prevCondLst>
+                <p:cond evt="onPrev" delay="0">
+                  <p:tgtEl>
+                    <p:sldTgt/>
+                  </p:tgtEl>
+                </p:cond>
+              </p:prevCondLst>
+              <p:nextCondLst>
+                <p:cond evt="onNext" delay="0">
+                  <p:tgtEl>
+                    <p:sldTgt/>
+                  </p:tgtEl>
+                </p:cond>
+              </p:nextCondLst>
+            </p:seq>
+          </p:childTnLst>
+        </p:cTn>
+      </p:par>
+    </p:tnLst>
+    <p:bldLst>
+      <p:bldP spid="4" grpId="0" animBg="1"/>
+      <p:bldP spid="5" grpId="0" animBg="1"/>
+      <p:bldP spid="6" grpId="0" animBg="1"/>
+      <p:bldP spid="7" grpId="0" animBg="1"/>
+      <p:bldP spid="8" grpId="0" animBg="1"/>
+    </p:bldLst>
+  </p:timing>
 </p:sld>
 </file>
 
-<file path=ppt/slides/slide8.xml><?xml version="1.0" encoding="utf-8"?>
+<file path=ppt/slides/slide9.xml><?xml version="1.0" encoding="utf-8"?>
 <p:sld xmlns:a="http://schemas.openxmlformats.org/drawingml/2006/main" xmlns:r="http://schemas.openxmlformats.org/officeDocument/2006/relationships" xmlns:p="http://schemas.openxmlformats.org/presentationml/2006/main">
   <p:cSld>
     <p:spTree>
@@ -13605,7 +16192,7 @@
         </p:nvSpPr>
         <p:spPr>
           <a:xfrm>
-            <a:off x="888740" y="6392219"/>
+            <a:off x="748916" y="3500648"/>
             <a:ext cx="8128520" cy="369332"/>
           </a:xfrm>
           <a:prstGeom prst="rect">
@@ -13625,12 +16212,8 @@
               <a:buNone/>
             </a:pPr>
             <a:r>
-              <a:rPr lang="ja-JP" altLang="en-US" sz="1800" dirty="0"/>
-              <a:t>↑</a:t>
-            </a:r>
-            <a:r>
               <a:rPr lang="ja-JP" altLang="en-US" dirty="0"/>
-              <a:t>課題</a:t>
+              <a:t>↓課題</a:t>
             </a:r>
             <a:r>
               <a:rPr lang="ja-JP" altLang="en-US" sz="1800" dirty="0"/>
@@ -13738,92 +16321,6 @@
       <p:bldP spid="7" grpId="0" animBg="1"/>
     </p:bldLst>
   </p:timing>
-</p:sld>
-</file>
-
-<file path=ppt/slides/slide9.xml><?xml version="1.0" encoding="utf-8"?>
-<p:sld xmlns:a="http://schemas.openxmlformats.org/drawingml/2006/main" xmlns:r="http://schemas.openxmlformats.org/officeDocument/2006/relationships" xmlns:p="http://schemas.openxmlformats.org/presentationml/2006/main">
-  <p:cSld>
-    <p:spTree>
-      <p:nvGrpSpPr>
-        <p:cNvPr id="1" name=""/>
-        <p:cNvGrpSpPr/>
-        <p:nvPr/>
-      </p:nvGrpSpPr>
-      <p:grpSpPr>
-        <a:xfrm>
-          <a:off x="0" y="0"/>
-          <a:ext cx="0" cy="0"/>
-          <a:chOff x="0" y="0"/>
-          <a:chExt cx="0" cy="0"/>
-        </a:xfrm>
-      </p:grpSpPr>
-      <p:sp>
-        <p:nvSpPr>
-          <p:cNvPr id="2" name="タイトル 1"/>
-          <p:cNvSpPr>
-            <a:spLocks noGrp="1"/>
-          </p:cNvSpPr>
-          <p:nvPr>
-            <p:ph type="ctrTitle"/>
-          </p:nvPr>
-        </p:nvSpPr>
-        <p:spPr/>
-        <p:txBody>
-          <a:bodyPr>
-            <a:normAutofit fontScale="90000"/>
-          </a:bodyPr>
-          <a:lstStyle/>
-          <a:p>
-            <a:r>
-              <a:rPr kumimoji="1" lang="ja-JP" altLang="en-US" sz="2600" dirty="0"/>
-              <a:t>事例2　AIレビューワークフロー</a:t>
-            </a:r>
-          </a:p>
-        </p:txBody>
-      </p:sp>
-      <p:sp>
-        <p:nvSpPr>
-          <p:cNvPr id="3" name="字幕 2"/>
-          <p:cNvSpPr>
-            <a:spLocks noGrp="1"/>
-          </p:cNvSpPr>
-          <p:nvPr>
-            <p:ph type="subTitle" idx="1"/>
-          </p:nvPr>
-        </p:nvSpPr>
-        <p:spPr/>
-        <p:txBody>
-          <a:bodyPr>
-            <a:normAutofit fontScale="77500" lnSpcReduction="20000"/>
-          </a:bodyPr>
-          <a:lstStyle/>
-          <a:p>
-            <a:r>
-              <a:rPr kumimoji="1" lang="ja-JP" altLang="en-US" sz="1300" dirty="0"/>
-              <a:t>「</a:t>
-            </a:r>
-            <a:r>
-              <a:rPr lang="ja-JP" altLang="en-US" sz="1400" dirty="0"/>
-              <a:t>育て方を作る</a:t>
-            </a:r>
-            <a:r>
-              <a:rPr kumimoji="1" lang="ja-JP" altLang="en-US" sz="1300" dirty="0"/>
-              <a:t>」</a:t>
-            </a:r>
-            <a:r>
-              <a:rPr lang="ja-JP" altLang="en-US" dirty="0"/>
-              <a:t>エンジニアリング エンジニアリング エンジニアリング</a:t>
-            </a:r>
-            <a:endParaRPr kumimoji="1" lang="ja-JP" altLang="en-US" sz="1300" dirty="0"/>
-          </a:p>
-        </p:txBody>
-      </p:sp>
-    </p:spTree>
-  </p:cSld>
-  <p:clrMapOvr>
-    <a:masterClrMapping/>
-  </p:clrMapOvr>
 </p:sld>
 </file>
 

--- a/TechMeeting202604/techmeeting20260406.pptx
+++ b/TechMeeting202604/techmeeting20260406.pptx
@@ -4125,8 +4125,8 @@
         </p:nvSpPr>
         <p:spPr>
           <a:xfrm>
-            <a:off x="512501" y="5883307"/>
-            <a:ext cx="5792540" cy="665664"/>
+            <a:off x="190072" y="5883307"/>
+            <a:ext cx="6114969" cy="665664"/>
           </a:xfrm>
           <a:prstGeom prst="wedgeRectCallout">
             <a:avLst>
@@ -4184,7 +4184,7 @@
             </a:br>
             <a:r>
               <a:rPr lang="ja-JP" altLang="en-US" b="1" dirty="0"/>
-              <a:t>決定性が高い操作</a:t>
+              <a:t>決定論的処理</a:t>
             </a:r>
             <a:r>
               <a:rPr lang="ja-JP" altLang="en-US" dirty="0"/>
@@ -4196,7 +4196,7 @@
             </a:r>
             <a:r>
               <a:rPr lang="ja-JP" altLang="en-US" dirty="0"/>
-              <a:t>より</a:t>
+              <a:t>🤖ではなく</a:t>
             </a:r>
             <a:r>
               <a:rPr lang="ja-JP" altLang="en-US" b="1" dirty="0"/>
@@ -4644,42 +4644,6 @@
           </a:p>
         </p:txBody>
       </p:sp>
-      <p:pic>
-        <p:nvPicPr>
-          <p:cNvPr id="5" name="図 4">
-            <a:extLst>
-              <a:ext uri="{FF2B5EF4-FFF2-40B4-BE49-F238E27FC236}">
-                <a16:creationId xmlns:a16="http://schemas.microsoft.com/office/drawing/2014/main" id="{F200AD8B-5949-1603-DA30-0D9DB036B0D3}"/>
-              </a:ext>
-            </a:extLst>
-          </p:cNvPr>
-          <p:cNvPicPr>
-            <a:picLocks noChangeAspect="1"/>
-          </p:cNvPicPr>
-          <p:nvPr/>
-        </p:nvPicPr>
-        <p:blipFill>
-          <a:blip r:embed="rId2">
-            <a:extLst>
-              <a:ext uri="{28A0092B-C50C-407E-A947-70E740481C1C}">
-                <a14:useLocalDpi xmlns:a14="http://schemas.microsoft.com/office/drawing/2010/main" val="0"/>
-              </a:ext>
-            </a:extLst>
-          </a:blip>
-          <a:stretch>
-            <a:fillRect/>
-          </a:stretch>
-        </p:blipFill>
-        <p:spPr>
-          <a:xfrm>
-            <a:off x="416496" y="3897052"/>
-            <a:ext cx="4685682" cy="2875837"/>
-          </a:xfrm>
-          <a:prstGeom prst="rect">
-            <a:avLst/>
-          </a:prstGeom>
-        </p:spPr>
-      </p:pic>
     </p:spTree>
   </p:cSld>
   <p:clrMapOvr>
@@ -15153,13 +15117,13 @@
         <p:spPr/>
         <p:txBody>
           <a:bodyPr>
-            <a:normAutofit fontScale="90000"/>
+            <a:normAutofit/>
           </a:bodyPr>
           <a:lstStyle/>
           <a:p>
             <a:r>
-              <a:rPr kumimoji="1" lang="ja-JP" altLang="en-US" sz="2600" dirty="0"/>
-              <a:t>事例1 ドキュメントパイプライン</a:t>
+              <a:rPr kumimoji="1" lang="ja-JP" altLang="en-US" sz="2000" dirty="0"/>
+              <a:t>事例1 ドキュメント同期パイプライン</a:t>
             </a:r>
           </a:p>
         </p:txBody>
@@ -15744,11 +15708,24 @@
             </a:r>
             <a:r>
               <a:rPr lang="ja-JP" altLang="en-US" sz="1800" dirty="0"/>
-              <a:t>編集したい場合は？ </a:t>
-            </a:r>
-            <a:br>
+              <a:t>編集したい場合は？</a:t>
+            </a:r>
+            <a:endParaRPr lang="en-US" altLang="ja-JP" sz="1800" dirty="0"/>
+          </a:p>
+          <a:p>
+            <a:pPr lvl="1"/>
+            <a:r>
+              <a:rPr lang="ja-JP" altLang="en-US" sz="1800" dirty="0"/>
+              <a:t>仕様ページ（</a:t>
+            </a:r>
+            <a:r>
               <a:rPr lang="en-US" altLang="ja-JP" sz="1800" dirty="0"/>
-            </a:br>
+              <a:t>193</a:t>
+            </a:r>
+            <a:r>
+              <a:rPr lang="ja-JP" altLang="en-US" sz="1800" dirty="0"/>
+              <a:t>ページ） の移行はどうする？</a:t>
+            </a:r>
             <a:endParaRPr lang="en-US" altLang="ja-JP" sz="1800" dirty="0"/>
           </a:p>
           <a:p>
@@ -15998,8 +15975,8 @@
         </p:nvSpPr>
         <p:spPr>
           <a:xfrm>
-            <a:off x="1964668" y="5301209"/>
-            <a:ext cx="3726253" cy="720080"/>
+            <a:off x="2021009" y="5650486"/>
+            <a:ext cx="3557956" cy="576273"/>
           </a:xfrm>
           <a:prstGeom prst="wedgeRectCallout">
             <a:avLst>
@@ -16049,7 +16026,7 @@
             </a:br>
             <a:r>
               <a:rPr lang="ja-JP" altLang="en-US" dirty="0"/>
-              <a:t>取り込み機能</a:t>
+              <a:t>取り込みツール</a:t>
             </a:r>
           </a:p>
         </p:txBody>
@@ -16068,13 +16045,13 @@
         </p:nvSpPr>
         <p:spPr>
           <a:xfrm>
-            <a:off x="6064892" y="5799980"/>
+            <a:off x="6084316" y="5840919"/>
             <a:ext cx="3726253" cy="853559"/>
           </a:xfrm>
           <a:prstGeom prst="wedgeRectCallout">
             <a:avLst>
-              <a:gd name="adj1" fmla="val -37621"/>
-              <a:gd name="adj2" fmla="val -122255"/>
+              <a:gd name="adj1" fmla="val -35657"/>
+              <a:gd name="adj2" fmla="val -97615"/>
             </a:avLst>
           </a:prstGeom>
           <a:solidFill>
@@ -17494,13 +17471,47 @@
         </p:nvSpPr>
         <p:spPr/>
         <p:txBody>
-          <a:bodyPr/>
+          <a:bodyPr>
+            <a:normAutofit fontScale="90000"/>
+          </a:bodyPr>
           <a:lstStyle/>
           <a:p>
             <a:r>
               <a:rPr kumimoji="1" lang="ja-JP" altLang="en-US" dirty="0"/>
-              <a:t>何を作った？　</a:t>
-            </a:r>
+              <a:t>何を作った？</a:t>
+            </a:r>
+            <a:br>
+              <a:rPr kumimoji="1" lang="en-US" altLang="ja-JP" dirty="0"/>
+            </a:br>
+            <a:r>
+              <a:rPr kumimoji="1" lang="ja-JP" altLang="en-US" dirty="0"/>
+              <a:t>②</a:t>
+            </a:r>
+            <a:r>
+              <a:rPr lang="en-US" altLang="ja-JP" dirty="0"/>
+              <a:t>PUSH</a:t>
+            </a:r>
+            <a:r>
+              <a:rPr lang="ja-JP" altLang="en-US" dirty="0"/>
+              <a:t>したら</a:t>
+            </a:r>
+            <a:r>
+              <a:rPr lang="en-US" altLang="ja-JP" dirty="0" err="1"/>
+              <a:t>Growi</a:t>
+            </a:r>
+            <a:r>
+              <a:rPr lang="ja-JP" altLang="en-US" dirty="0"/>
+              <a:t>に同期する </a:t>
+            </a:r>
+            <a:r>
+              <a:rPr lang="en-US" altLang="ja-JP" dirty="0" err="1"/>
+              <a:t>Github</a:t>
+            </a:r>
+            <a:r>
+              <a:rPr lang="en-US" altLang="ja-JP" dirty="0"/>
+              <a:t> Actions</a:t>
+            </a:r>
+            <a:endParaRPr kumimoji="1" lang="ja-JP" altLang="en-US" dirty="0"/>
           </a:p>
         </p:txBody>
       </p:sp>
@@ -18138,8 +18149,8 @@
         </p:nvSpPr>
         <p:spPr>
           <a:xfrm>
-            <a:off x="712670" y="1916832"/>
-            <a:ext cx="8619082" cy="3231654"/>
+            <a:off x="581142" y="1353809"/>
+            <a:ext cx="8619082" cy="3847207"/>
           </a:xfrm>
           <a:prstGeom prst="rect">
             <a:avLst/>
@@ -18181,7 +18192,24 @@
               <a:buFont typeface="Arial" panose="020B0604020202020204" pitchFamily="34" charset="0"/>
               <a:buChar char="•"/>
             </a:pPr>
-            <a:endParaRPr lang="ja-JP" altLang="en-US" sz="2000" dirty="0"/>
+            <a:endParaRPr lang="en-US" altLang="ja-JP" sz="2000" dirty="0"/>
+          </a:p>
+          <a:p>
+            <a:pPr marL="742950" lvl="1" indent="-285750">
+              <a:buFont typeface="Arial" panose="020B0604020202020204" pitchFamily="34" charset="0"/>
+              <a:buChar char="•"/>
+            </a:pPr>
+            <a:r>
+              <a:rPr lang="ja-JP" altLang="en-US" sz="2000" dirty="0"/>
+              <a:t>移行作業はほぼ一瞬</a:t>
+            </a:r>
+          </a:p>
+          <a:p>
+            <a:pPr marL="742950" lvl="1" indent="-285750">
+              <a:buFont typeface="Arial" panose="020B0604020202020204" pitchFamily="34" charset="0"/>
+              <a:buChar char="•"/>
+            </a:pPr>
+            <a:endParaRPr lang="en-US" altLang="ja-JP" sz="2000" b="1" dirty="0"/>
           </a:p>
           <a:p>
             <a:pPr marL="742950" lvl="1" indent="-285750">
@@ -18253,13 +18281,13 @@
         </p:nvSpPr>
         <p:spPr>
           <a:xfrm>
-            <a:off x="4412940" y="2752206"/>
-            <a:ext cx="5051788" cy="525207"/>
+            <a:off x="3799187" y="2932045"/>
+            <a:ext cx="4178149" cy="525207"/>
           </a:xfrm>
           <a:prstGeom prst="wedgeRectCallout">
             <a:avLst>
-              <a:gd name="adj1" fmla="val -39180"/>
-              <a:gd name="adj2" fmla="val -82777"/>
+              <a:gd name="adj1" fmla="val -43886"/>
+              <a:gd name="adj2" fmla="val -74072"/>
             </a:avLst>
           </a:prstGeom>
           <a:solidFill>
@@ -18293,23 +18321,7 @@
             <a:pPr algn="ctr"/>
             <a:r>
               <a:rPr lang="ja-JP" altLang="en-US" dirty="0"/>
-              <a:t> ツール作成含め</a:t>
-            </a:r>
-            <a:endParaRPr lang="en-US" altLang="ja-JP" dirty="0"/>
-          </a:p>
-          <a:p>
-            <a:pPr algn="ctr"/>
-            <a:r>
-              <a:rPr lang="ja-JP" altLang="en-US" dirty="0"/>
-              <a:t>193 ファイルの移行が約３人日</a:t>
-            </a:r>
-            <a:r>
-              <a:rPr lang="ja-JP" altLang="en-US" sz="1400" dirty="0"/>
-              <a:t>（片手間）</a:t>
-            </a:r>
-            <a:r>
-              <a:rPr lang="ja-JP" altLang="en-US" dirty="0"/>
-              <a:t>で完了</a:t>
+              <a:t>193 ファイルの移行が一瞬で完了</a:t>
             </a:r>
             <a:endParaRPr kumimoji="1" lang="ja-JP" altLang="en-US" dirty="0"/>
           </a:p>
@@ -18466,6 +18478,66 @@
             <a:r>
               <a:rPr lang="ja-JP" altLang="en-US" b="1" dirty="0"/>
               <a:t>エンジニアの心得：小さなことに感謝する</a:t>
+            </a:r>
+            <a:endParaRPr kumimoji="1" lang="ja-JP" altLang="en-US" dirty="0"/>
+          </a:p>
+        </p:txBody>
+      </p:sp>
+      <p:sp>
+        <p:nvSpPr>
+          <p:cNvPr id="13" name="吹き出し: 四角形 12">
+            <a:extLst>
+              <a:ext uri="{FF2B5EF4-FFF2-40B4-BE49-F238E27FC236}">
+                <a16:creationId xmlns:a16="http://schemas.microsoft.com/office/drawing/2014/main" id="{2B72902B-5C0F-2045-CCF6-BC852865D506}"/>
+              </a:ext>
+            </a:extLst>
+          </p:cNvPr>
+          <p:cNvSpPr/>
+          <p:nvPr/>
+        </p:nvSpPr>
+        <p:spPr>
+          <a:xfrm>
+            <a:off x="4580378" y="2102587"/>
+            <a:ext cx="4178149" cy="525207"/>
+          </a:xfrm>
+          <a:prstGeom prst="wedgeRectCallout">
+            <a:avLst>
+              <a:gd name="adj1" fmla="val -43886"/>
+              <a:gd name="adj2" fmla="val -74072"/>
+            </a:avLst>
+          </a:prstGeom>
+          <a:solidFill>
+            <a:schemeClr val="accent6">
+              <a:lumMod val="75000"/>
+              <a:alpha val="50000"/>
+            </a:schemeClr>
+          </a:solidFill>
+          <a:ln>
+            <a:noFill/>
+          </a:ln>
+        </p:spPr>
+        <p:style>
+          <a:lnRef idx="0">
+            <a:scrgbClr r="0" g="0" b="0"/>
+          </a:lnRef>
+          <a:fillRef idx="0">
+            <a:scrgbClr r="0" g="0" b="0"/>
+          </a:fillRef>
+          <a:effectRef idx="0">
+            <a:scrgbClr r="0" g="0" b="0"/>
+          </a:effectRef>
+          <a:fontRef idx="minor">
+            <a:schemeClr val="lt1"/>
+          </a:fontRef>
+        </p:style>
+        <p:txBody>
+          <a:bodyPr rtlCol="0" anchor="ctr"/>
+          <a:lstStyle/>
+          <a:p>
+            <a:pPr algn="ctr"/>
+            <a:r>
+              <a:rPr lang="ja-JP" altLang="en-US" dirty="0"/>
+              <a:t>コード↔ドキュメントの連携が可能に</a:t>
             </a:r>
             <a:endParaRPr kumimoji="1" lang="ja-JP" altLang="en-US" dirty="0"/>
           </a:p>
@@ -18664,6 +18736,51 @@
                       </p:childTnLst>
                     </p:cTn>
                   </p:par>
+                  <p:par>
+                    <p:cTn id="19" fill="hold">
+                      <p:stCondLst>
+                        <p:cond delay="indefinite"/>
+                      </p:stCondLst>
+                      <p:childTnLst>
+                        <p:par>
+                          <p:cTn id="20" fill="hold">
+                            <p:stCondLst>
+                              <p:cond delay="0"/>
+                            </p:stCondLst>
+                            <p:childTnLst>
+                              <p:par>
+                                <p:cTn id="21" presetID="1" presetClass="entr" presetSubtype="0" fill="hold" grpId="0" nodeType="clickEffect">
+                                  <p:stCondLst>
+                                    <p:cond delay="0"/>
+                                  </p:stCondLst>
+                                  <p:childTnLst>
+                                    <p:set>
+                                      <p:cBhvr>
+                                        <p:cTn id="22" dur="1" fill="hold">
+                                          <p:stCondLst>
+                                            <p:cond delay="0"/>
+                                          </p:stCondLst>
+                                        </p:cTn>
+                                        <p:tgtEl>
+                                          <p:spTgt spid="13"/>
+                                        </p:tgtEl>
+                                        <p:attrNameLst>
+                                          <p:attrName>style.visibility</p:attrName>
+                                        </p:attrNameLst>
+                                      </p:cBhvr>
+                                      <p:to>
+                                        <p:strVal val="visible"/>
+                                      </p:to>
+                                    </p:set>
+                                  </p:childTnLst>
+                                </p:cTn>
+                              </p:par>
+                            </p:childTnLst>
+                          </p:cTn>
+                        </p:par>
+                      </p:childTnLst>
+                    </p:cTn>
+                  </p:par>
                 </p:childTnLst>
               </p:cTn>
               <p:prevCondLst>
@@ -18690,6 +18807,7 @@
       <p:bldP spid="8" grpId="0" animBg="1"/>
       <p:bldP spid="9" grpId="0" animBg="1"/>
       <p:bldP spid="10" grpId="0" animBg="1"/>
+      <p:bldP spid="13" grpId="0" animBg="1"/>
     </p:bldLst>
   </p:timing>
 </p:sld>

--- a/TechMeeting202604/techmeeting20260406.pptx
+++ b/TechMeeting202604/techmeeting20260406.pptx
@@ -29,24 +29,24 @@
     <p:sldId id="366" r:id="rId17"/>
     <p:sldId id="368" r:id="rId18"/>
     <p:sldId id="367" r:id="rId19"/>
-    <p:sldId id="369" r:id="rId20"/>
-    <p:sldId id="370" r:id="rId21"/>
-    <p:sldId id="371" r:id="rId22"/>
-    <p:sldId id="372" r:id="rId23"/>
-    <p:sldId id="348" r:id="rId24"/>
-    <p:sldId id="346" r:id="rId25"/>
-    <p:sldId id="344" r:id="rId26"/>
-    <p:sldId id="359" r:id="rId27"/>
-    <p:sldId id="349" r:id="rId28"/>
-    <p:sldId id="350" r:id="rId29"/>
-    <p:sldId id="332" r:id="rId30"/>
-    <p:sldId id="343" r:id="rId31"/>
-    <p:sldId id="342" r:id="rId32"/>
-    <p:sldId id="337" r:id="rId33"/>
+    <p:sldId id="370" r:id="rId20"/>
+    <p:sldId id="371" r:id="rId21"/>
+    <p:sldId id="372" r:id="rId22"/>
+    <p:sldId id="348" r:id="rId23"/>
+    <p:sldId id="346" r:id="rId24"/>
+    <p:sldId id="344" r:id="rId25"/>
+    <p:sldId id="359" r:id="rId26"/>
+    <p:sldId id="349" r:id="rId27"/>
+    <p:sldId id="350" r:id="rId28"/>
+    <p:sldId id="332" r:id="rId29"/>
+    <p:sldId id="343" r:id="rId30"/>
+    <p:sldId id="342" r:id="rId31"/>
+    <p:sldId id="337" r:id="rId32"/>
+    <p:sldId id="334" r:id="rId33"/>
     <p:sldId id="312" r:id="rId34"/>
-    <p:sldId id="334" r:id="rId35"/>
-    <p:sldId id="339" r:id="rId36"/>
-    <p:sldId id="319" r:id="rId37"/>
+    <p:sldId id="339" r:id="rId35"/>
+    <p:sldId id="319" r:id="rId36"/>
+    <p:sldId id="374" r:id="rId37"/>
     <p:sldId id="341" r:id="rId38"/>
   </p:sldIdLst>
   <p:sldSz cx="9906000" cy="6858000" type="A4"/>
@@ -1764,7 +1764,7 @@
           <a:p>
             <a:fld id="{8104881A-4257-43F8-A557-80103A5A893D}" type="slidenum">
               <a:rPr kumimoji="1" lang="ja-JP" altLang="en-US" smtClean="0"/>
-              <a:t>22</a:t>
+              <a:t>21</a:t>
             </a:fld>
             <a:endParaRPr kumimoji="1" lang="ja-JP" altLang="en-US"/>
           </a:p>
@@ -9164,7 +9164,7 @@
         <p:cNvPr id="1" name="">
           <a:extLst>
             <a:ext uri="{FF2B5EF4-FFF2-40B4-BE49-F238E27FC236}">
-              <a16:creationId xmlns:a16="http://schemas.microsoft.com/office/drawing/2014/main" id="{54F65F6C-0D08-A3A1-1A8D-5D451B6B06A5}"/>
+              <a16:creationId xmlns:a16="http://schemas.microsoft.com/office/drawing/2014/main" id="{6DB2CC36-B5DD-F011-68D3-CB8E5920B064}"/>
             </a:ext>
           </a:extLst>
         </p:cNvPr>
@@ -9184,7 +9184,7 @@
           <p:cNvPr id="5" name="コンテンツ プレースホルダー 4">
             <a:extLst>
               <a:ext uri="{FF2B5EF4-FFF2-40B4-BE49-F238E27FC236}">
-                <a16:creationId xmlns:a16="http://schemas.microsoft.com/office/drawing/2014/main" id="{E1B25C55-F47C-0189-C5C1-06F24F39F884}"/>
+                <a16:creationId xmlns:a16="http://schemas.microsoft.com/office/drawing/2014/main" id="{AD42ECD8-6FAC-73F7-A86D-2EBAC57A4D2A}"/>
               </a:ext>
             </a:extLst>
           </p:cNvPr>
@@ -9217,7 +9217,7 @@
           <p:cNvPr id="3" name="タイトル 2">
             <a:extLst>
               <a:ext uri="{FF2B5EF4-FFF2-40B4-BE49-F238E27FC236}">
-                <a16:creationId xmlns:a16="http://schemas.microsoft.com/office/drawing/2014/main" id="{03013C73-8542-C08B-4BD4-2F0FAE3D5024}"/>
+                <a16:creationId xmlns:a16="http://schemas.microsoft.com/office/drawing/2014/main" id="{4F4532FB-C405-AE80-39D5-9F4B1E6C6182}"/>
               </a:ext>
             </a:extLst>
           </p:cNvPr>
@@ -9248,7 +9248,7 @@
           <p:cNvPr id="6" name="コンテンツ プレースホルダー 3">
             <a:extLst>
               <a:ext uri="{FF2B5EF4-FFF2-40B4-BE49-F238E27FC236}">
-                <a16:creationId xmlns:a16="http://schemas.microsoft.com/office/drawing/2014/main" id="{51E5A694-EABA-8BA5-A330-FD7E57B58FA2}"/>
+                <a16:creationId xmlns:a16="http://schemas.microsoft.com/office/drawing/2014/main" id="{3CA2372B-7033-F8AB-EADE-CDDF44D39880}"/>
               </a:ext>
             </a:extLst>
           </p:cNvPr>
@@ -9460,7 +9460,7 @@
           <p:cNvPr id="4" name="テキスト ボックス 3">
             <a:extLst>
               <a:ext uri="{FF2B5EF4-FFF2-40B4-BE49-F238E27FC236}">
-                <a16:creationId xmlns:a16="http://schemas.microsoft.com/office/drawing/2014/main" id="{5A861C9D-FD75-5F5C-28CA-F6C316656AB7}"/>
+                <a16:creationId xmlns:a16="http://schemas.microsoft.com/office/drawing/2014/main" id="{46C589CC-1E13-8B88-C364-2B171A407EC4}"/>
               </a:ext>
             </a:extLst>
           </p:cNvPr>
@@ -9515,7 +9515,7 @@
           <p:cNvPr id="7" name="図 6">
             <a:extLst>
               <a:ext uri="{FF2B5EF4-FFF2-40B4-BE49-F238E27FC236}">
-                <a16:creationId xmlns:a16="http://schemas.microsoft.com/office/drawing/2014/main" id="{69769D21-4FF7-04DB-C610-13F7A8EB263B}"/>
+                <a16:creationId xmlns:a16="http://schemas.microsoft.com/office/drawing/2014/main" id="{AE4AD566-A38B-91D7-66C7-BD1A06EB5837}"/>
               </a:ext>
             </a:extLst>
           </p:cNvPr>
@@ -9545,7 +9545,7 @@
           <p:cNvPr id="9" name="吹き出し: 四角形 8">
             <a:extLst>
               <a:ext uri="{FF2B5EF4-FFF2-40B4-BE49-F238E27FC236}">
-                <a16:creationId xmlns:a16="http://schemas.microsoft.com/office/drawing/2014/main" id="{759AB3B9-63A5-4741-2DAD-464542BCCD99}"/>
+                <a16:creationId xmlns:a16="http://schemas.microsoft.com/office/drawing/2014/main" id="{DA093BB5-0DE3-39BC-E7CE-1396F7E68112}"/>
               </a:ext>
             </a:extLst>
           </p:cNvPr>
@@ -9611,7 +9611,7 @@
     </p:spTree>
     <p:extLst>
       <p:ext uri="{BB962C8B-B14F-4D97-AF65-F5344CB8AC3E}">
-        <p14:creationId xmlns:p14="http://schemas.microsoft.com/office/powerpoint/2010/main" val="136360202"/>
+        <p14:creationId xmlns:p14="http://schemas.microsoft.com/office/powerpoint/2010/main" val="4128276960"/>
       </p:ext>
     </p:extLst>
   </p:cSld>
@@ -9879,598 +9879,6 @@
         <p:cNvPr id="1" name="">
           <a:extLst>
             <a:ext uri="{FF2B5EF4-FFF2-40B4-BE49-F238E27FC236}">
-              <a16:creationId xmlns:a16="http://schemas.microsoft.com/office/drawing/2014/main" id="{6DB2CC36-B5DD-F011-68D3-CB8E5920B064}"/>
-            </a:ext>
-          </a:extLst>
-        </p:cNvPr>
-        <p:cNvGrpSpPr/>
-        <p:nvPr/>
-      </p:nvGrpSpPr>
-      <p:grpSpPr>
-        <a:xfrm>
-          <a:off x="0" y="0"/>
-          <a:ext cx="0" cy="0"/>
-          <a:chOff x="0" y="0"/>
-          <a:chExt cx="0" cy="0"/>
-        </a:xfrm>
-      </p:grpSpPr>
-      <p:pic>
-        <p:nvPicPr>
-          <p:cNvPr id="5" name="コンテンツ プレースホルダー 4">
-            <a:extLst>
-              <a:ext uri="{FF2B5EF4-FFF2-40B4-BE49-F238E27FC236}">
-                <a16:creationId xmlns:a16="http://schemas.microsoft.com/office/drawing/2014/main" id="{AD42ECD8-6FAC-73F7-A86D-2EBAC57A4D2A}"/>
-              </a:ext>
-            </a:extLst>
-          </p:cNvPr>
-          <p:cNvPicPr>
-            <a:picLocks noGrp="1" noChangeAspect="1"/>
-          </p:cNvPicPr>
-          <p:nvPr>
-            <p:ph idx="1"/>
-          </p:nvPr>
-        </p:nvPicPr>
-        <p:blipFill>
-          <a:blip r:embed="rId2"/>
-          <a:srcRect b="15260"/>
-          <a:stretch>
-            <a:fillRect/>
-          </a:stretch>
-        </p:blipFill>
-        <p:spPr>
-          <a:xfrm>
-            <a:off x="780948" y="1772816"/>
-            <a:ext cx="7859222" cy="1800200"/>
-          </a:xfrm>
-          <a:prstGeom prst="rect">
-            <a:avLst/>
-          </a:prstGeom>
-        </p:spPr>
-      </p:pic>
-      <p:sp>
-        <p:nvSpPr>
-          <p:cNvPr id="3" name="タイトル 2">
-            <a:extLst>
-              <a:ext uri="{FF2B5EF4-FFF2-40B4-BE49-F238E27FC236}">
-                <a16:creationId xmlns:a16="http://schemas.microsoft.com/office/drawing/2014/main" id="{4F4532FB-C405-AE80-39D5-9F4B1E6C6182}"/>
-              </a:ext>
-            </a:extLst>
-          </p:cNvPr>
-          <p:cNvSpPr>
-            <a:spLocks noGrp="1"/>
-          </p:cNvSpPr>
-          <p:nvPr>
-            <p:ph type="title"/>
-          </p:nvPr>
-        </p:nvSpPr>
-        <p:spPr/>
-        <p:txBody>
-          <a:bodyPr>
-            <a:normAutofit/>
-          </a:bodyPr>
-          <a:lstStyle/>
-          <a:p>
-            <a:r>
-              <a:rPr lang="ja-JP" altLang="en-US" dirty="0"/>
-              <a:t>実践例：レビュー</a:t>
-            </a:r>
-            <a:endParaRPr kumimoji="1" lang="ja-JP" altLang="en-US" dirty="0"/>
-          </a:p>
-        </p:txBody>
-      </p:sp>
-      <p:sp>
-        <p:nvSpPr>
-          <p:cNvPr id="6" name="コンテンツ プレースホルダー 3">
-            <a:extLst>
-              <a:ext uri="{FF2B5EF4-FFF2-40B4-BE49-F238E27FC236}">
-                <a16:creationId xmlns:a16="http://schemas.microsoft.com/office/drawing/2014/main" id="{3CA2372B-7033-F8AB-EADE-CDDF44D39880}"/>
-              </a:ext>
-            </a:extLst>
-          </p:cNvPr>
-          <p:cNvSpPr txBox="1">
-            <a:spLocks/>
-          </p:cNvSpPr>
-          <p:nvPr/>
-        </p:nvSpPr>
-        <p:spPr>
-          <a:xfrm>
-            <a:off x="704850" y="1282427"/>
-            <a:ext cx="8496300" cy="4894536"/>
-          </a:xfrm>
-          <a:prstGeom prst="rect">
-            <a:avLst/>
-          </a:prstGeom>
-        </p:spPr>
-        <p:txBody>
-          <a:bodyPr vert="horz" lIns="91440" tIns="45720" rIns="91440" bIns="45720" rtlCol="0">
-            <a:normAutofit/>
-          </a:bodyPr>
-          <a:lstStyle>
-            <a:lvl1pPr marL="0" indent="0" algn="l" defTabSz="514346" rtl="0" eaLnBrk="1" latinLnBrk="0" hangingPunct="1">
-              <a:lnSpc>
-                <a:spcPct val="140000"/>
-              </a:lnSpc>
-              <a:spcBef>
-                <a:spcPts val="563"/>
-              </a:spcBef>
-              <a:buFontTx/>
-              <a:buNone/>
-              <a:defRPr kumimoji="1" sz="1600" kern="1200">
-                <a:solidFill>
-                  <a:schemeClr val="tx1"/>
-                </a:solidFill>
-                <a:latin typeface="+mn-ea"/>
-                <a:ea typeface="+mn-ea"/>
-                <a:cs typeface="+mn-cs"/>
-              </a:defRPr>
-            </a:lvl1pPr>
-            <a:lvl2pPr marL="385760" indent="-128587" algn="l" defTabSz="514346" rtl="0" eaLnBrk="1" latinLnBrk="0" hangingPunct="1">
-              <a:lnSpc>
-                <a:spcPct val="140000"/>
-              </a:lnSpc>
-              <a:spcBef>
-                <a:spcPts val="281"/>
-              </a:spcBef>
-              <a:buFont typeface="Arial" panose="020B0604020202020204" pitchFamily="34" charset="0"/>
-              <a:buChar char="•"/>
-              <a:defRPr kumimoji="1" sz="1108" kern="1200">
-                <a:solidFill>
-                  <a:schemeClr val="tx1"/>
-                </a:solidFill>
-                <a:latin typeface="+mn-ea"/>
-                <a:ea typeface="+mn-ea"/>
-                <a:cs typeface="+mn-cs"/>
-              </a:defRPr>
-            </a:lvl2pPr>
-            <a:lvl3pPr marL="642932" indent="-128587" algn="l" defTabSz="514346" rtl="0" eaLnBrk="1" latinLnBrk="0" hangingPunct="1">
-              <a:lnSpc>
-                <a:spcPct val="140000"/>
-              </a:lnSpc>
-              <a:spcBef>
-                <a:spcPts val="281"/>
-              </a:spcBef>
-              <a:buFont typeface="Arial" panose="020B0604020202020204" pitchFamily="34" charset="0"/>
-              <a:buChar char="•"/>
-              <a:defRPr kumimoji="1" sz="1108" kern="1200">
-                <a:solidFill>
-                  <a:schemeClr val="tx1"/>
-                </a:solidFill>
-                <a:latin typeface="+mn-ea"/>
-                <a:ea typeface="+mn-ea"/>
-                <a:cs typeface="+mn-cs"/>
-              </a:defRPr>
-            </a:lvl3pPr>
-            <a:lvl4pPr marL="900105" indent="-128587" algn="l" defTabSz="514346" rtl="0" eaLnBrk="1" latinLnBrk="0" hangingPunct="1">
-              <a:lnSpc>
-                <a:spcPct val="140000"/>
-              </a:lnSpc>
-              <a:spcBef>
-                <a:spcPts val="281"/>
-              </a:spcBef>
-              <a:buFont typeface="Arial" panose="020B0604020202020204" pitchFamily="34" charset="0"/>
-              <a:buChar char="•"/>
-              <a:defRPr kumimoji="1" sz="1108" kern="1200">
-                <a:solidFill>
-                  <a:schemeClr val="tx1"/>
-                </a:solidFill>
-                <a:latin typeface="+mn-ea"/>
-                <a:ea typeface="+mn-ea"/>
-                <a:cs typeface="+mn-cs"/>
-              </a:defRPr>
-            </a:lvl4pPr>
-            <a:lvl5pPr marL="1157279" indent="-128587" algn="l" defTabSz="514346" rtl="0" eaLnBrk="1" latinLnBrk="0" hangingPunct="1">
-              <a:lnSpc>
-                <a:spcPct val="140000"/>
-              </a:lnSpc>
-              <a:spcBef>
-                <a:spcPts val="281"/>
-              </a:spcBef>
-              <a:buFont typeface="Arial" panose="020B0604020202020204" pitchFamily="34" charset="0"/>
-              <a:buChar char="•"/>
-              <a:defRPr kumimoji="1" sz="1108" kern="1200">
-                <a:solidFill>
-                  <a:schemeClr val="tx1"/>
-                </a:solidFill>
-                <a:latin typeface="+mn-ea"/>
-                <a:ea typeface="+mn-ea"/>
-                <a:cs typeface="+mn-cs"/>
-              </a:defRPr>
-            </a:lvl5pPr>
-            <a:lvl6pPr marL="1414451" indent="-128587" algn="l" defTabSz="514346" rtl="0" eaLnBrk="1" latinLnBrk="0" hangingPunct="1">
-              <a:lnSpc>
-                <a:spcPct val="90000"/>
-              </a:lnSpc>
-              <a:spcBef>
-                <a:spcPts val="281"/>
-              </a:spcBef>
-              <a:buFont typeface="Arial" panose="020B0604020202020204" pitchFamily="34" charset="0"/>
-              <a:buChar char="•"/>
-              <a:defRPr kumimoji="1" sz="1013" kern="1200">
-                <a:solidFill>
-                  <a:schemeClr val="tx1"/>
-                </a:solidFill>
-                <a:latin typeface="+mn-lt"/>
-                <a:ea typeface="+mn-ea"/>
-                <a:cs typeface="+mn-cs"/>
-              </a:defRPr>
-            </a:lvl6pPr>
-            <a:lvl7pPr marL="1671625" indent="-128587" algn="l" defTabSz="514346" rtl="0" eaLnBrk="1" latinLnBrk="0" hangingPunct="1">
-              <a:lnSpc>
-                <a:spcPct val="90000"/>
-              </a:lnSpc>
-              <a:spcBef>
-                <a:spcPts val="281"/>
-              </a:spcBef>
-              <a:buFont typeface="Arial" panose="020B0604020202020204" pitchFamily="34" charset="0"/>
-              <a:buChar char="•"/>
-              <a:defRPr kumimoji="1" sz="1013" kern="1200">
-                <a:solidFill>
-                  <a:schemeClr val="tx1"/>
-                </a:solidFill>
-                <a:latin typeface="+mn-lt"/>
-                <a:ea typeface="+mn-ea"/>
-                <a:cs typeface="+mn-cs"/>
-              </a:defRPr>
-            </a:lvl7pPr>
-            <a:lvl8pPr marL="1928797" indent="-128587" algn="l" defTabSz="514346" rtl="0" eaLnBrk="1" latinLnBrk="0" hangingPunct="1">
-              <a:lnSpc>
-                <a:spcPct val="90000"/>
-              </a:lnSpc>
-              <a:spcBef>
-                <a:spcPts val="281"/>
-              </a:spcBef>
-              <a:buFont typeface="Arial" panose="020B0604020202020204" pitchFamily="34" charset="0"/>
-              <a:buChar char="•"/>
-              <a:defRPr kumimoji="1" sz="1013" kern="1200">
-                <a:solidFill>
-                  <a:schemeClr val="tx1"/>
-                </a:solidFill>
-                <a:latin typeface="+mn-lt"/>
-                <a:ea typeface="+mn-ea"/>
-                <a:cs typeface="+mn-cs"/>
-              </a:defRPr>
-            </a:lvl8pPr>
-            <a:lvl9pPr marL="2185969" indent="-128587" algn="l" defTabSz="514346" rtl="0" eaLnBrk="1" latinLnBrk="0" hangingPunct="1">
-              <a:lnSpc>
-                <a:spcPct val="90000"/>
-              </a:lnSpc>
-              <a:spcBef>
-                <a:spcPts val="281"/>
-              </a:spcBef>
-              <a:buFont typeface="Arial" panose="020B0604020202020204" pitchFamily="34" charset="0"/>
-              <a:buChar char="•"/>
-              <a:defRPr kumimoji="1" sz="1013" kern="1200">
-                <a:solidFill>
-                  <a:schemeClr val="tx1"/>
-                </a:solidFill>
-                <a:latin typeface="+mn-lt"/>
-                <a:ea typeface="+mn-ea"/>
-                <a:cs typeface="+mn-cs"/>
-              </a:defRPr>
-            </a:lvl9pPr>
-          </a:lstStyle>
-          <a:p>
-            <a:r>
-              <a:rPr lang="en-US" altLang="ja-JP" dirty="0"/>
-              <a:t>Copilot CLI</a:t>
-            </a:r>
-            <a:r>
-              <a:rPr lang="ja-JP" altLang="en-US" dirty="0"/>
-              <a:t>を起動（</a:t>
-            </a:r>
-            <a:r>
-              <a:rPr lang="en-US" altLang="ja-JP" dirty="0"/>
-              <a:t>Claude Code</a:t>
-            </a:r>
-            <a:r>
-              <a:rPr lang="ja-JP" altLang="en-US" dirty="0"/>
-              <a:t>でも可）</a:t>
-            </a:r>
-            <a:endParaRPr lang="en-US" altLang="ja-JP" dirty="0"/>
-          </a:p>
-        </p:txBody>
-      </p:sp>
-      <p:sp>
-        <p:nvSpPr>
-          <p:cNvPr id="4" name="テキスト ボックス 3">
-            <a:extLst>
-              <a:ext uri="{FF2B5EF4-FFF2-40B4-BE49-F238E27FC236}">
-                <a16:creationId xmlns:a16="http://schemas.microsoft.com/office/drawing/2014/main" id="{46C589CC-1E13-8B88-C364-2B171A407EC4}"/>
-              </a:ext>
-            </a:extLst>
-          </p:cNvPr>
-          <p:cNvSpPr txBox="1"/>
-          <p:nvPr/>
-        </p:nvSpPr>
-        <p:spPr>
-          <a:xfrm>
-            <a:off x="780948" y="3813855"/>
-            <a:ext cx="7772452" cy="369332"/>
-          </a:xfrm>
-          <a:prstGeom prst="rect">
-            <a:avLst/>
-          </a:prstGeom>
-          <a:noFill/>
-        </p:spPr>
-        <p:txBody>
-          <a:bodyPr wrap="square">
-            <a:spAutoFit/>
-          </a:bodyPr>
-          <a:lstStyle/>
-          <a:p>
-            <a:r>
-              <a:rPr lang="en-US" altLang="ja-JP" dirty="0"/>
-              <a:t># </a:t>
-            </a:r>
-            <a:r>
-              <a:rPr lang="ja-JP" altLang="en-US" dirty="0"/>
-              <a:t>スキル実行</a:t>
-            </a:r>
-            <a:r>
-              <a:rPr lang="en-US" altLang="ja-JP" dirty="0"/>
-              <a:t> </a:t>
-            </a:r>
-            <a:r>
-              <a:rPr lang="en-US" altLang="ja-JP" dirty="0">
-                <a:highlight>
-                  <a:srgbClr val="FDD000"/>
-                </a:highlight>
-              </a:rPr>
-              <a:t>/peer-review</a:t>
-            </a:r>
-            <a:r>
-              <a:rPr lang="ja-JP" altLang="en-US" dirty="0"/>
-              <a:t>　→　エージェント🤖がレビューを開始</a:t>
-            </a:r>
-          </a:p>
-        </p:txBody>
-      </p:sp>
-      <p:pic>
-        <p:nvPicPr>
-          <p:cNvPr id="7" name="図 6">
-            <a:extLst>
-              <a:ext uri="{FF2B5EF4-FFF2-40B4-BE49-F238E27FC236}">
-                <a16:creationId xmlns:a16="http://schemas.microsoft.com/office/drawing/2014/main" id="{AE4AD566-A38B-91D7-66C7-BD1A06EB5837}"/>
-              </a:ext>
-            </a:extLst>
-          </p:cNvPr>
-          <p:cNvPicPr>
-            <a:picLocks noChangeAspect="1"/>
-          </p:cNvPicPr>
-          <p:nvPr/>
-        </p:nvPicPr>
-        <p:blipFill>
-          <a:blip r:embed="rId3"/>
-          <a:stretch>
-            <a:fillRect/>
-          </a:stretch>
-        </p:blipFill>
-        <p:spPr>
-          <a:xfrm>
-            <a:off x="848544" y="4242814"/>
-            <a:ext cx="6468871" cy="1754081"/>
-          </a:xfrm>
-          <a:prstGeom prst="rect">
-            <a:avLst/>
-          </a:prstGeom>
-        </p:spPr>
-      </p:pic>
-      <p:sp>
-        <p:nvSpPr>
-          <p:cNvPr id="9" name="吹き出し: 四角形 8">
-            <a:extLst>
-              <a:ext uri="{FF2B5EF4-FFF2-40B4-BE49-F238E27FC236}">
-                <a16:creationId xmlns:a16="http://schemas.microsoft.com/office/drawing/2014/main" id="{DA093BB5-0DE3-39BC-E7CE-1396F7E68112}"/>
-              </a:ext>
-            </a:extLst>
-          </p:cNvPr>
-          <p:cNvSpPr/>
-          <p:nvPr/>
-        </p:nvSpPr>
-        <p:spPr>
-          <a:xfrm>
-            <a:off x="3584848" y="6107058"/>
-            <a:ext cx="5897886" cy="621487"/>
-          </a:xfrm>
-          <a:prstGeom prst="wedgeRectCallout">
-            <a:avLst>
-              <a:gd name="adj1" fmla="val -33260"/>
-              <a:gd name="adj2" fmla="val -130326"/>
-            </a:avLst>
-          </a:prstGeom>
-          <a:solidFill>
-            <a:schemeClr val="accent6">
-              <a:lumMod val="75000"/>
-              <a:alpha val="50000"/>
-            </a:schemeClr>
-          </a:solidFill>
-          <a:ln>
-            <a:noFill/>
-          </a:ln>
-        </p:spPr>
-        <p:style>
-          <a:lnRef idx="0">
-            <a:scrgbClr r="0" g="0" b="0"/>
-          </a:lnRef>
-          <a:fillRef idx="0">
-            <a:scrgbClr r="0" g="0" b="0"/>
-          </a:fillRef>
-          <a:effectRef idx="0">
-            <a:scrgbClr r="0" g="0" b="0"/>
-          </a:effectRef>
-          <a:fontRef idx="minor">
-            <a:schemeClr val="lt1"/>
-          </a:fontRef>
-        </p:style>
-        <p:txBody>
-          <a:bodyPr rtlCol="0" anchor="ctr"/>
-          <a:lstStyle/>
-          <a:p>
-            <a:pPr algn="ctr"/>
-            <a:r>
-              <a:rPr kumimoji="1" lang="ja-JP" altLang="en-US" dirty="0"/>
-              <a:t>別セッションで開始した場合も、</a:t>
-            </a:r>
-            <a:endParaRPr kumimoji="1" lang="en-US" altLang="ja-JP" dirty="0"/>
-          </a:p>
-          <a:p>
-            <a:pPr algn="ctr"/>
-            <a:r>
-              <a:rPr lang="ja-JP" altLang="en-US" dirty="0"/>
-              <a:t>ワークスペースのコンテキストを拾って再開可能</a:t>
-            </a:r>
-            <a:endParaRPr kumimoji="1" lang="ja-JP" altLang="en-US" dirty="0"/>
-          </a:p>
-        </p:txBody>
-      </p:sp>
-    </p:spTree>
-    <p:extLst>
-      <p:ext uri="{BB962C8B-B14F-4D97-AF65-F5344CB8AC3E}">
-        <p14:creationId xmlns:p14="http://schemas.microsoft.com/office/powerpoint/2010/main" val="4128276960"/>
-      </p:ext>
-    </p:extLst>
-  </p:cSld>
-  <p:clrMapOvr>
-    <a:masterClrMapping/>
-  </p:clrMapOvr>
-  <p:timing>
-    <p:tnLst>
-      <p:par>
-        <p:cTn id="1" dur="indefinite" restart="never" nodeType="tmRoot">
-          <p:childTnLst>
-            <p:seq concurrent="1" nextAc="seek">
-              <p:cTn id="2" dur="indefinite" nodeType="mainSeq">
-                <p:childTnLst>
-                  <p:par>
-                    <p:cTn id="3" fill="hold">
-                      <p:stCondLst>
-                        <p:cond delay="indefinite"/>
-                        <p:cond evt="onBegin" delay="0">
-                          <p:tn val="2"/>
-                        </p:cond>
-                      </p:stCondLst>
-                      <p:childTnLst>
-                        <p:par>
-                          <p:cTn id="4" fill="hold">
-                            <p:stCondLst>
-                              <p:cond delay="0"/>
-                            </p:stCondLst>
-                            <p:childTnLst>
-                              <p:par>
-                                <p:cTn id="5" presetID="1" presetClass="entr" presetSubtype="0" fill="hold" grpId="0" nodeType="withEffect">
-                                  <p:stCondLst>
-                                    <p:cond delay="0"/>
-                                  </p:stCondLst>
-                                  <p:childTnLst>
-                                    <p:set>
-                                      <p:cBhvr>
-                                        <p:cTn id="6" dur="1" fill="hold">
-                                          <p:stCondLst>
-                                            <p:cond delay="0"/>
-                                          </p:stCondLst>
-                                        </p:cTn>
-                                        <p:tgtEl>
-                                          <p:spTgt spid="4"/>
-                                        </p:tgtEl>
-                                        <p:attrNameLst>
-                                          <p:attrName>style.visibility</p:attrName>
-                                        </p:attrNameLst>
-                                      </p:cBhvr>
-                                      <p:to>
-                                        <p:strVal val="visible"/>
-                                      </p:to>
-                                    </p:set>
-                                  </p:childTnLst>
-                                </p:cTn>
-                              </p:par>
-                            </p:childTnLst>
-                          </p:cTn>
-                        </p:par>
-                      </p:childTnLst>
-                    </p:cTn>
-                  </p:par>
-                  <p:par>
-                    <p:cTn id="7" fill="hold">
-                      <p:stCondLst>
-                        <p:cond delay="indefinite"/>
-                      </p:stCondLst>
-                      <p:childTnLst>
-                        <p:par>
-                          <p:cTn id="8" fill="hold">
-                            <p:stCondLst>
-                              <p:cond delay="0"/>
-                            </p:stCondLst>
-                            <p:childTnLst>
-                              <p:par>
-                                <p:cTn id="9" presetID="1" presetClass="entr" presetSubtype="0" fill="hold" grpId="0" nodeType="clickEffect">
-                                  <p:stCondLst>
-                                    <p:cond delay="0"/>
-                                  </p:stCondLst>
-                                  <p:childTnLst>
-                                    <p:set>
-                                      <p:cBhvr>
-                                        <p:cTn id="10" dur="1" fill="hold">
-                                          <p:stCondLst>
-                                            <p:cond delay="0"/>
-                                          </p:stCondLst>
-                                        </p:cTn>
-                                        <p:tgtEl>
-                                          <p:spTgt spid="9"/>
-                                        </p:tgtEl>
-                                        <p:attrNameLst>
-                                          <p:attrName>style.visibility</p:attrName>
-                                        </p:attrNameLst>
-                                      </p:cBhvr>
-                                      <p:to>
-                                        <p:strVal val="visible"/>
-                                      </p:to>
-                                    </p:set>
-                                  </p:childTnLst>
-                                </p:cTn>
-                              </p:par>
-                            </p:childTnLst>
-                          </p:cTn>
-                        </p:par>
-                      </p:childTnLst>
-                    </p:cTn>
-                  </p:par>
-                </p:childTnLst>
-              </p:cTn>
-              <p:prevCondLst>
-                <p:cond evt="onPrev" delay="0">
-                  <p:tgtEl>
-                    <p:sldTgt/>
-                  </p:tgtEl>
-                </p:cond>
-              </p:prevCondLst>
-              <p:nextCondLst>
-                <p:cond evt="onNext" delay="0">
-                  <p:tgtEl>
-                    <p:sldTgt/>
-                  </p:tgtEl>
-                </p:cond>
-              </p:nextCondLst>
-            </p:seq>
-          </p:childTnLst>
-        </p:cTn>
-      </p:par>
-    </p:tnLst>
-    <p:bldLst>
-      <p:bldP spid="4" grpId="0"/>
-      <p:bldP spid="9" grpId="0" animBg="1"/>
-    </p:bldLst>
-  </p:timing>
-</p:sld>
-</file>
-
-<file path=ppt/slides/slide21.xml><?xml version="1.0" encoding="utf-8"?>
-<p:sld xmlns:a="http://schemas.openxmlformats.org/drawingml/2006/main" xmlns:r="http://schemas.openxmlformats.org/officeDocument/2006/relationships" xmlns:p="http://schemas.openxmlformats.org/presentationml/2006/main">
-  <p:cSld>
-    <p:spTree>
-      <p:nvGrpSpPr>
-        <p:cNvPr id="1" name="">
-          <a:extLst>
-            <a:ext uri="{FF2B5EF4-FFF2-40B4-BE49-F238E27FC236}">
               <a16:creationId xmlns:a16="http://schemas.microsoft.com/office/drawing/2014/main" id="{57AD75D9-EBEB-560B-FAE7-CADD8AD2D4C6}"/>
             </a:ext>
           </a:extLst>
@@ -10814,7 +10222,7 @@
 </p:sld>
 </file>
 
-<file path=ppt/slides/slide22.xml><?xml version="1.0" encoding="utf-8"?>
+<file path=ppt/slides/slide21.xml><?xml version="1.0" encoding="utf-8"?>
 <p:sld xmlns:a="http://schemas.openxmlformats.org/drawingml/2006/main" xmlns:r="http://schemas.openxmlformats.org/officeDocument/2006/relationships" xmlns:p="http://schemas.openxmlformats.org/presentationml/2006/main">
   <p:cSld>
     <p:spTree>
@@ -11291,7 +10699,7 @@
 </p:sld>
 </file>
 
-<file path=ppt/slides/slide23.xml><?xml version="1.0" encoding="utf-8"?>
+<file path=ppt/slides/slide22.xml><?xml version="1.0" encoding="utf-8"?>
 <p:sld xmlns:a="http://schemas.openxmlformats.org/drawingml/2006/main" xmlns:r="http://schemas.openxmlformats.org/officeDocument/2006/relationships" xmlns:p="http://schemas.openxmlformats.org/presentationml/2006/main">
   <p:cSld>
     <p:spTree>
@@ -12268,7 +11676,7 @@
 </p:sld>
 </file>
 
-<file path=ppt/slides/slide24.xml><?xml version="1.0" encoding="utf-8"?>
+<file path=ppt/slides/slide23.xml><?xml version="1.0" encoding="utf-8"?>
 <p:sld xmlns:a="http://schemas.openxmlformats.org/drawingml/2006/main" xmlns:r="http://schemas.openxmlformats.org/officeDocument/2006/relationships" xmlns:p="http://schemas.openxmlformats.org/presentationml/2006/main">
   <p:cSld>
     <p:spTree>
@@ -12997,7 +12405,7 @@
 </p:sld>
 </file>
 
-<file path=ppt/slides/slide25.xml><?xml version="1.0" encoding="utf-8"?>
+<file path=ppt/slides/slide24.xml><?xml version="1.0" encoding="utf-8"?>
 <p:sld xmlns:a="http://schemas.openxmlformats.org/drawingml/2006/main" xmlns:r="http://schemas.openxmlformats.org/officeDocument/2006/relationships" xmlns:p="http://schemas.openxmlformats.org/presentationml/2006/main">
   <p:cSld>
     <p:spTree>
@@ -13360,7 +12768,7 @@
 </p:sld>
 </file>
 
-<file path=ppt/slides/slide26.xml><?xml version="1.0" encoding="utf-8"?>
+<file path=ppt/slides/slide25.xml><?xml version="1.0" encoding="utf-8"?>
 <p:sld xmlns:a="http://schemas.openxmlformats.org/drawingml/2006/main" xmlns:r="http://schemas.openxmlformats.org/officeDocument/2006/relationships" xmlns:p="http://schemas.openxmlformats.org/presentationml/2006/main">
   <p:cSld>
     <p:spTree>
@@ -13756,7 +13164,7 @@
 </p:sld>
 </file>
 
-<file path=ppt/slides/slide27.xml><?xml version="1.0" encoding="utf-8"?>
+<file path=ppt/slides/slide26.xml><?xml version="1.0" encoding="utf-8"?>
 <p:sld xmlns:a="http://schemas.openxmlformats.org/drawingml/2006/main" xmlns:r="http://schemas.openxmlformats.org/officeDocument/2006/relationships" xmlns:p="http://schemas.openxmlformats.org/presentationml/2006/main">
   <p:cSld>
     <p:spTree>
@@ -14260,7 +13668,7 @@
 </p:sld>
 </file>
 
-<file path=ppt/slides/slide28.xml><?xml version="1.0" encoding="utf-8"?>
+<file path=ppt/slides/slide27.xml><?xml version="1.0" encoding="utf-8"?>
 <p:sld xmlns:a="http://schemas.openxmlformats.org/drawingml/2006/main" xmlns:r="http://schemas.openxmlformats.org/officeDocument/2006/relationships" xmlns:p="http://schemas.openxmlformats.org/presentationml/2006/main">
   <p:cSld>
     <p:spTree>
@@ -14333,7 +13741,7 @@
             <a:fld id="{C314D315-6C69-40BF-98D6-60239DAB9584}" type="slidenum">
               <a:rPr lang="ja-JP" altLang="en-US" smtClean="0"/>
               <a:pPr/>
-              <a:t>27</a:t>
+              <a:t>26</a:t>
             </a:fld>
             <a:r>
               <a:rPr lang="ja-JP" altLang="en-US"/>
@@ -14834,7 +14242,7 @@
         <p:spPr>
           <a:xfrm>
             <a:off x="2523122" y="5797902"/>
-            <a:ext cx="2645902" cy="369332"/>
+            <a:ext cx="3582006" cy="369332"/>
           </a:xfrm>
           <a:prstGeom prst="rect">
             <a:avLst/>
@@ -15348,7 +14756,7 @@
 </p:sld>
 </file>
 
-<file path=ppt/slides/slide29.xml><?xml version="1.0" encoding="utf-8"?>
+<file path=ppt/slides/slide28.xml><?xml version="1.0" encoding="utf-8"?>
 <p:sld xmlns:a="http://schemas.openxmlformats.org/drawingml/2006/main" xmlns:r="http://schemas.openxmlformats.org/officeDocument/2006/relationships" xmlns:p="http://schemas.openxmlformats.org/presentationml/2006/main">
   <p:cSld>
     <p:spTree>
@@ -15953,128 +15361,7 @@
 </p:sld>
 </file>
 
-<file path=ppt/slides/slide3.xml><?xml version="1.0" encoding="utf-8"?>
-<p:sld xmlns:a="http://schemas.openxmlformats.org/drawingml/2006/main" xmlns:r="http://schemas.openxmlformats.org/officeDocument/2006/relationships" xmlns:p="http://schemas.openxmlformats.org/presentationml/2006/main">
-  <p:cSld>
-    <p:spTree>
-      <p:nvGrpSpPr>
-        <p:cNvPr id="1" name="">
-          <a:extLst>
-            <a:ext uri="{FF2B5EF4-FFF2-40B4-BE49-F238E27FC236}">
-              <a16:creationId xmlns:a16="http://schemas.microsoft.com/office/drawing/2014/main" id="{E2B807AA-1893-685C-58DA-275050603BF7}"/>
-            </a:ext>
-          </a:extLst>
-        </p:cNvPr>
-        <p:cNvGrpSpPr/>
-        <p:nvPr/>
-      </p:nvGrpSpPr>
-      <p:grpSpPr>
-        <a:xfrm>
-          <a:off x="0" y="0"/>
-          <a:ext cx="0" cy="0"/>
-          <a:chOff x="0" y="0"/>
-          <a:chExt cx="0" cy="0"/>
-        </a:xfrm>
-      </p:grpSpPr>
-      <p:sp>
-        <p:nvSpPr>
-          <p:cNvPr id="2" name="コンテンツ 1">
-            <a:extLst>
-              <a:ext uri="{FF2B5EF4-FFF2-40B4-BE49-F238E27FC236}">
-                <a16:creationId xmlns:a16="http://schemas.microsoft.com/office/drawing/2014/main" id="{541267B1-6604-BF94-782E-4ECE098B8A6F}"/>
-              </a:ext>
-            </a:extLst>
-          </p:cNvPr>
-          <p:cNvSpPr txBox="1">
-            <a:spLocks/>
-          </p:cNvSpPr>
-          <p:nvPr/>
-        </p:nvSpPr>
-        <p:spPr>
-          <a:xfrm>
-            <a:off x="0" y="1000000"/>
-            <a:ext cx="9906000" cy="4800000"/>
-          </a:xfrm>
-          <a:prstGeom prst="rect">
-            <a:avLst/>
-          </a:prstGeom>
-        </p:spPr>
-        <p:txBody>
-          <a:bodyPr vert="horz" lIns="91440" tIns="91440" rIns="91440" bIns="91440" rtlCol="0" anchor="ctr">
-            <a:normAutofit/>
-          </a:bodyPr>
-          <a:lstStyle>
-            <a:lvl1pPr algn="ctr">
-              <a:defRPr kumimoji="1" sz="2400">
-                <a:solidFill>
-                  <a:schemeClr val="tx1"/>
-                </a:solidFill>
-                <a:latin typeface="+mn-ea"/>
-              </a:defRPr>
-            </a:lvl1pPr>
-          </a:lstStyle>
-          <a:p>
-            <a:pPr lvl="1"/>
-            <a:r>
-              <a:rPr lang="ja-JP" altLang="en-US" sz="3600" dirty="0"/>
-              <a:t>　　　　　　　　設計🧑‍💻</a:t>
-            </a:r>
-            <a:endParaRPr lang="en-US" altLang="ja-JP" sz="3600" dirty="0"/>
-          </a:p>
-          <a:p>
-            <a:pPr lvl="1"/>
-            <a:endParaRPr lang="en-US" altLang="ja-JP" sz="3600" dirty="0"/>
-          </a:p>
-          <a:p>
-            <a:pPr lvl="1"/>
-            <a:r>
-              <a:rPr lang="ja-JP" altLang="en-US" sz="3600" dirty="0"/>
-              <a:t>　　　　　　　　↓</a:t>
-            </a:r>
-            <a:r>
-              <a:rPr lang="ja-JP" altLang="en-US" sz="2800" dirty="0"/>
-              <a:t>判断</a:t>
-            </a:r>
-            <a:r>
-              <a:rPr lang="ja-JP" altLang="en-US" sz="3600" dirty="0"/>
-              <a:t>↓</a:t>
-            </a:r>
-            <a:br>
-              <a:rPr lang="en-US" altLang="ja-JP" sz="3600" dirty="0"/>
-            </a:br>
-            <a:endParaRPr lang="en-US" altLang="ja-JP" sz="3600" dirty="0"/>
-          </a:p>
-          <a:p>
-            <a:pPr lvl="1"/>
-            <a:r>
-              <a:rPr lang="ja-JP" altLang="en-US" sz="3600" dirty="0"/>
-              <a:t>「</a:t>
-            </a:r>
-            <a:r>
-              <a:rPr lang="ja-JP" altLang="en-US" sz="2800" dirty="0"/>
-              <a:t>判断 🙆→ 演算 🤖→ 判断🙅 → 演算🤖→判断 🙆」</a:t>
-            </a:r>
-            <a:br>
-              <a:rPr lang="en-US" altLang="ja-JP" dirty="0"/>
-            </a:br>
-            <a:endParaRPr lang="ja-JP" altLang="en-US" sz="2800" dirty="0"/>
-          </a:p>
-        </p:txBody>
-      </p:sp>
-    </p:spTree>
-    <p:extLst>
-      <p:ext uri="{BB962C8B-B14F-4D97-AF65-F5344CB8AC3E}">
-        <p14:creationId xmlns:p14="http://schemas.microsoft.com/office/powerpoint/2010/main" val="1957738102"/>
-      </p:ext>
-    </p:extLst>
-  </p:cSld>
-  <p:clrMapOvr>
-    <a:masterClrMapping/>
-  </p:clrMapOvr>
-</p:sld>
-</file>
-
-<file path=ppt/slides/slide30.xml><?xml version="1.0" encoding="utf-8"?>
+<file path=ppt/slides/slide29.xml><?xml version="1.0" encoding="utf-8"?>
 <p:sld xmlns:a="http://schemas.openxmlformats.org/drawingml/2006/main" xmlns:r="http://schemas.openxmlformats.org/officeDocument/2006/relationships" xmlns:p="http://schemas.openxmlformats.org/presentationml/2006/main">
   <p:cSld>
     <p:spTree>
@@ -16436,7 +15723,128 @@
 </p:sld>
 </file>
 
-<file path=ppt/slides/slide31.xml><?xml version="1.0" encoding="utf-8"?>
+<file path=ppt/slides/slide3.xml><?xml version="1.0" encoding="utf-8"?>
+<p:sld xmlns:a="http://schemas.openxmlformats.org/drawingml/2006/main" xmlns:r="http://schemas.openxmlformats.org/officeDocument/2006/relationships" xmlns:p="http://schemas.openxmlformats.org/presentationml/2006/main">
+  <p:cSld>
+    <p:spTree>
+      <p:nvGrpSpPr>
+        <p:cNvPr id="1" name="">
+          <a:extLst>
+            <a:ext uri="{FF2B5EF4-FFF2-40B4-BE49-F238E27FC236}">
+              <a16:creationId xmlns:a16="http://schemas.microsoft.com/office/drawing/2014/main" id="{E2B807AA-1893-685C-58DA-275050603BF7}"/>
+            </a:ext>
+          </a:extLst>
+        </p:cNvPr>
+        <p:cNvGrpSpPr/>
+        <p:nvPr/>
+      </p:nvGrpSpPr>
+      <p:grpSpPr>
+        <a:xfrm>
+          <a:off x="0" y="0"/>
+          <a:ext cx="0" cy="0"/>
+          <a:chOff x="0" y="0"/>
+          <a:chExt cx="0" cy="0"/>
+        </a:xfrm>
+      </p:grpSpPr>
+      <p:sp>
+        <p:nvSpPr>
+          <p:cNvPr id="2" name="コンテンツ 1">
+            <a:extLst>
+              <a:ext uri="{FF2B5EF4-FFF2-40B4-BE49-F238E27FC236}">
+                <a16:creationId xmlns:a16="http://schemas.microsoft.com/office/drawing/2014/main" id="{541267B1-6604-BF94-782E-4ECE098B8A6F}"/>
+              </a:ext>
+            </a:extLst>
+          </p:cNvPr>
+          <p:cNvSpPr txBox="1">
+            <a:spLocks/>
+          </p:cNvSpPr>
+          <p:nvPr/>
+        </p:nvSpPr>
+        <p:spPr>
+          <a:xfrm>
+            <a:off x="0" y="1000000"/>
+            <a:ext cx="9906000" cy="4800000"/>
+          </a:xfrm>
+          <a:prstGeom prst="rect">
+            <a:avLst/>
+          </a:prstGeom>
+        </p:spPr>
+        <p:txBody>
+          <a:bodyPr vert="horz" lIns="91440" tIns="91440" rIns="91440" bIns="91440" rtlCol="0" anchor="ctr">
+            <a:normAutofit/>
+          </a:bodyPr>
+          <a:lstStyle>
+            <a:lvl1pPr algn="ctr">
+              <a:defRPr kumimoji="1" sz="2400">
+                <a:solidFill>
+                  <a:schemeClr val="tx1"/>
+                </a:solidFill>
+                <a:latin typeface="+mn-ea"/>
+              </a:defRPr>
+            </a:lvl1pPr>
+          </a:lstStyle>
+          <a:p>
+            <a:pPr lvl="1"/>
+            <a:r>
+              <a:rPr lang="ja-JP" altLang="en-US" sz="3600" dirty="0"/>
+              <a:t>　　　　　　　　設計🧑‍💻</a:t>
+            </a:r>
+            <a:endParaRPr lang="en-US" altLang="ja-JP" sz="3600" dirty="0"/>
+          </a:p>
+          <a:p>
+            <a:pPr lvl="1"/>
+            <a:endParaRPr lang="en-US" altLang="ja-JP" sz="3600" dirty="0"/>
+          </a:p>
+          <a:p>
+            <a:pPr lvl="1"/>
+            <a:r>
+              <a:rPr lang="ja-JP" altLang="en-US" sz="3600" dirty="0"/>
+              <a:t>　　　　　　　　↓</a:t>
+            </a:r>
+            <a:r>
+              <a:rPr lang="ja-JP" altLang="en-US" sz="2800" dirty="0"/>
+              <a:t>判断</a:t>
+            </a:r>
+            <a:r>
+              <a:rPr lang="ja-JP" altLang="en-US" sz="3600" dirty="0"/>
+              <a:t>↓</a:t>
+            </a:r>
+            <a:br>
+              <a:rPr lang="en-US" altLang="ja-JP" sz="3600" dirty="0"/>
+            </a:br>
+            <a:endParaRPr lang="en-US" altLang="ja-JP" sz="3600" dirty="0"/>
+          </a:p>
+          <a:p>
+            <a:pPr lvl="1"/>
+            <a:r>
+              <a:rPr lang="ja-JP" altLang="en-US" sz="3600" dirty="0"/>
+              <a:t>「</a:t>
+            </a:r>
+            <a:r>
+              <a:rPr lang="ja-JP" altLang="en-US" sz="2800" dirty="0"/>
+              <a:t>判断 🙆→ 演算 🤖→ 判断🙅 → 演算🤖→判断 🙆」</a:t>
+            </a:r>
+            <a:br>
+              <a:rPr lang="en-US" altLang="ja-JP" dirty="0"/>
+            </a:br>
+            <a:endParaRPr lang="ja-JP" altLang="en-US" sz="2800" dirty="0"/>
+          </a:p>
+        </p:txBody>
+      </p:sp>
+    </p:spTree>
+    <p:extLst>
+      <p:ext uri="{BB962C8B-B14F-4D97-AF65-F5344CB8AC3E}">
+        <p14:creationId xmlns:p14="http://schemas.microsoft.com/office/powerpoint/2010/main" val="1957738102"/>
+      </p:ext>
+    </p:extLst>
+  </p:cSld>
+  <p:clrMapOvr>
+    <a:masterClrMapping/>
+  </p:clrMapOvr>
+</p:sld>
+</file>
+
+<file path=ppt/slides/slide30.xml><?xml version="1.0" encoding="utf-8"?>
 <p:sld xmlns:a="http://schemas.openxmlformats.org/drawingml/2006/main" xmlns:r="http://schemas.openxmlformats.org/officeDocument/2006/relationships" xmlns:p="http://schemas.openxmlformats.org/presentationml/2006/main">
   <p:cSld>
     <p:spTree>
@@ -16582,7 +15990,7 @@
 </p:sld>
 </file>
 
-<file path=ppt/slides/slide32.xml><?xml version="1.0" encoding="utf-8"?>
+<file path=ppt/slides/slide31.xml><?xml version="1.0" encoding="utf-8"?>
 <p:sld xmlns:a="http://schemas.openxmlformats.org/drawingml/2006/main" xmlns:r="http://schemas.openxmlformats.org/officeDocument/2006/relationships" xmlns:p="http://schemas.openxmlformats.org/presentationml/2006/main">
   <p:cSld>
     <p:spTree>
@@ -16849,7 +16257,757 @@
 </p:sld>
 </file>
 
+<file path=ppt/slides/slide32.xml><?xml version="1.0" encoding="utf-8"?>
+<p:sld xmlns:a="http://schemas.openxmlformats.org/drawingml/2006/main" xmlns:r="http://schemas.openxmlformats.org/officeDocument/2006/relationships" xmlns:p="http://schemas.openxmlformats.org/presentationml/2006/main">
+  <p:cSld>
+    <p:spTree>
+      <p:nvGrpSpPr>
+        <p:cNvPr id="1" name=""/>
+        <p:cNvGrpSpPr/>
+        <p:nvPr/>
+      </p:nvGrpSpPr>
+      <p:grpSpPr>
+        <a:xfrm>
+          <a:off x="0" y="0"/>
+          <a:ext cx="0" cy="0"/>
+          <a:chOff x="0" y="0"/>
+          <a:chExt cx="0" cy="0"/>
+        </a:xfrm>
+      </p:grpSpPr>
+      <p:pic>
+        <p:nvPicPr>
+          <p:cNvPr id="5" name="図 4">
+            <a:extLst>
+              <a:ext uri="{FF2B5EF4-FFF2-40B4-BE49-F238E27FC236}">
+                <a16:creationId xmlns:a16="http://schemas.microsoft.com/office/drawing/2014/main" id="{F3A4DDC3-AA62-96D7-A3A9-1B19B9C73312}"/>
+              </a:ext>
+            </a:extLst>
+          </p:cNvPr>
+          <p:cNvPicPr>
+            <a:picLocks noChangeAspect="1"/>
+          </p:cNvPicPr>
+          <p:nvPr/>
+        </p:nvPicPr>
+        <p:blipFill>
+          <a:blip r:embed="rId2">
+            <a:alphaModFix amt="70000"/>
+            <a:extLst>
+              <a:ext uri="{28A0092B-C50C-407E-A947-70E740481C1C}">
+                <a14:useLocalDpi xmlns:a14="http://schemas.microsoft.com/office/drawing/2010/main" val="0"/>
+              </a:ext>
+            </a:extLst>
+          </a:blip>
+          <a:stretch>
+            <a:fillRect/>
+          </a:stretch>
+        </p:blipFill>
+        <p:spPr>
+          <a:xfrm>
+            <a:off x="7617296" y="3501008"/>
+            <a:ext cx="2184251" cy="3232398"/>
+          </a:xfrm>
+          <a:prstGeom prst="rect">
+            <a:avLst/>
+          </a:prstGeom>
+        </p:spPr>
+      </p:pic>
+      <p:sp>
+        <p:nvSpPr>
+          <p:cNvPr id="2" name="コンテンツ プレースホルダー 1"/>
+          <p:cNvSpPr>
+            <a:spLocks noGrp="1"/>
+          </p:cNvSpPr>
+          <p:nvPr>
+            <p:ph idx="1"/>
+          </p:nvPr>
+        </p:nvSpPr>
+        <p:spPr>
+          <a:xfrm>
+            <a:off x="104453" y="1550499"/>
+            <a:ext cx="7187336" cy="5314925"/>
+          </a:xfrm>
+        </p:spPr>
+        <p:txBody>
+          <a:bodyPr>
+            <a:normAutofit fontScale="92500" lnSpcReduction="10000"/>
+          </a:bodyPr>
+          <a:lstStyle/>
+          <a:p>
+            <a:pPr marL="257173" lvl="1" indent="0">
+              <a:buNone/>
+            </a:pPr>
+            <a:r>
+              <a:rPr lang="en-US" altLang="ja-JP" sz="2000" b="1" dirty="0"/>
+              <a:t>Judgement</a:t>
+            </a:r>
+            <a:r>
+              <a:rPr lang="ja-JP" altLang="en-US" sz="2000" b="1" dirty="0"/>
+              <a:t> （判断）の定義</a:t>
+            </a:r>
+            <a:endParaRPr lang="en-US" altLang="ja-JP" sz="2000" b="1" dirty="0"/>
+          </a:p>
+          <a:p>
+            <a:pPr lvl="1"/>
+            <a:r>
+              <a:rPr lang="en-US" altLang="ja-JP" sz="1800" b="1" dirty="0"/>
+              <a:t>&gt; </a:t>
+            </a:r>
+            <a:r>
+              <a:rPr lang="en-US" altLang="ja-JP" sz="1800" dirty="0"/>
+              <a:t>a form of dispassionate deliberative thought, grounded in ethical commitment and responsible action, appropriate to the situation in which it is deployed</a:t>
+            </a:r>
+          </a:p>
+          <a:p>
+            <a:pPr lvl="2"/>
+            <a:r>
+              <a:rPr lang="ja-JP" altLang="en-US" sz="2000" dirty="0"/>
+              <a:t>訳：倫理的な</a:t>
+            </a:r>
+            <a:r>
+              <a:rPr lang="ja-JP" altLang="en-US" sz="2000" b="1" dirty="0"/>
+              <a:t>責任</a:t>
+            </a:r>
+            <a:r>
+              <a:rPr lang="ja-JP" altLang="en-US" sz="2000" dirty="0"/>
+              <a:t>と誠実な行動に基づき、その場の状況にふさわしい形で発揮される、冷静で慎重な思考のあり方。</a:t>
+            </a:r>
+            <a:endParaRPr lang="en-US" altLang="ja-JP" sz="2000" dirty="0"/>
+          </a:p>
+          <a:p>
+            <a:pPr marL="257173" lvl="1" indent="0">
+              <a:buNone/>
+            </a:pPr>
+            <a:endParaRPr lang="en-US" altLang="ja-JP" sz="2000" b="1" dirty="0"/>
+          </a:p>
+          <a:p>
+            <a:pPr marL="257173" lvl="1" indent="0">
+              <a:buNone/>
+            </a:pPr>
+            <a:r>
+              <a:rPr lang="ja-JP" altLang="en-US" sz="2000" b="1" dirty="0"/>
+              <a:t>Reckoning （演算）の定義</a:t>
+            </a:r>
+            <a:endParaRPr lang="en-US" altLang="ja-JP" sz="2000" b="1" dirty="0"/>
+          </a:p>
+          <a:p>
+            <a:pPr lvl="1"/>
+            <a:r>
+              <a:rPr lang="en-US" altLang="ja-JP" sz="2000" dirty="0"/>
+              <a:t>&gt;the ability to manipulate symbolic representations without a commitment to whether the world is the way it is represented</a:t>
+            </a:r>
+          </a:p>
+          <a:p>
+            <a:pPr lvl="2"/>
+            <a:r>
+              <a:rPr lang="ja-JP" altLang="en-US" sz="2000" dirty="0"/>
+              <a:t>訳：その世界が実際に表現されている通りであるかどうかを問わず、象徴的な表現を操作する能力</a:t>
+            </a:r>
+            <a:endParaRPr lang="en-US" altLang="ja-JP" sz="2000" dirty="0"/>
+          </a:p>
+          <a:p>
+            <a:pPr lvl="1"/>
+            <a:endParaRPr lang="en-US" altLang="ja-JP" sz="2400" b="1" dirty="0"/>
+          </a:p>
+        </p:txBody>
+      </p:sp>
+      <p:sp>
+        <p:nvSpPr>
+          <p:cNvPr id="3" name="タイトル 2"/>
+          <p:cNvSpPr>
+            <a:spLocks noGrp="1"/>
+          </p:cNvSpPr>
+          <p:nvPr>
+            <p:ph type="title"/>
+          </p:nvPr>
+        </p:nvSpPr>
+        <p:spPr/>
+        <p:txBody>
+          <a:bodyPr>
+            <a:normAutofit fontScale="90000"/>
+          </a:bodyPr>
+          <a:lstStyle/>
+          <a:p>
+            <a:r>
+              <a:rPr lang="ja-JP" altLang="en-US" dirty="0"/>
+              <a:t>枠組み: 判断（Judgment）と演算（Reckoning）</a:t>
+            </a:r>
+            <a:endParaRPr kumimoji="1" lang="ja-JP" altLang="en-US" dirty="0"/>
+          </a:p>
+        </p:txBody>
+      </p:sp>
+      <p:sp>
+        <p:nvSpPr>
+          <p:cNvPr id="7" name="テキスト ボックス 6">
+            <a:extLst>
+              <a:ext uri="{FF2B5EF4-FFF2-40B4-BE49-F238E27FC236}">
+                <a16:creationId xmlns:a16="http://schemas.microsoft.com/office/drawing/2014/main" id="{C989AD3A-E721-1CB0-3F2B-77055866CDF7}"/>
+              </a:ext>
+            </a:extLst>
+          </p:cNvPr>
+          <p:cNvSpPr txBox="1"/>
+          <p:nvPr/>
+        </p:nvSpPr>
+        <p:spPr>
+          <a:xfrm>
+            <a:off x="236476" y="1013981"/>
+            <a:ext cx="6503260" cy="434799"/>
+          </a:xfrm>
+          <a:prstGeom prst="rect">
+            <a:avLst/>
+          </a:prstGeom>
+          <a:noFill/>
+        </p:spPr>
+        <p:txBody>
+          <a:bodyPr wrap="square">
+            <a:spAutoFit/>
+          </a:bodyPr>
+          <a:lstStyle/>
+          <a:p>
+            <a:pPr algn="l">
+              <a:lnSpc>
+                <a:spcPts val="2850"/>
+              </a:lnSpc>
+              <a:spcAft>
+                <a:spcPts val="375"/>
+              </a:spcAft>
+              <a:buNone/>
+            </a:pPr>
+            <a:r>
+              <a:rPr lang="en-US" altLang="ja-JP" b="1" i="0" dirty="0">
+                <a:solidFill>
+                  <a:srgbClr val="000000"/>
+                </a:solidFill>
+                <a:effectLst/>
+                <a:latin typeface="neue-haas-grotesk-display"/>
+              </a:rPr>
+              <a:t>The Promise of Artificial Intelligence</a:t>
+            </a:r>
+            <a:r>
+              <a:rPr lang="ja-JP" altLang="en-US" b="1" dirty="0">
+                <a:solidFill>
+                  <a:srgbClr val="000000"/>
+                </a:solidFill>
+                <a:latin typeface="neue-haas-grotesk-display"/>
+              </a:rPr>
+              <a:t> </a:t>
+            </a:r>
+            <a:r>
+              <a:rPr lang="en-US" altLang="ja-JP" b="1" i="0" dirty="0">
+                <a:solidFill>
+                  <a:srgbClr val="000000"/>
+                </a:solidFill>
+                <a:effectLst/>
+                <a:latin typeface="neue-haas-grotesk-display"/>
+              </a:rPr>
+              <a:t>Reckoning and Judgment </a:t>
+            </a:r>
+          </a:p>
+        </p:txBody>
+      </p:sp>
+    </p:spTree>
+  </p:cSld>
+  <p:clrMapOvr>
+    <a:masterClrMapping/>
+  </p:clrMapOvr>
+</p:sld>
+</file>
+
 <file path=ppt/slides/slide33.xml><?xml version="1.0" encoding="utf-8"?>
+<p:sld xmlns:a="http://schemas.openxmlformats.org/drawingml/2006/main" xmlns:r="http://schemas.openxmlformats.org/officeDocument/2006/relationships" xmlns:p="http://schemas.openxmlformats.org/presentationml/2006/main">
+  <p:cSld>
+    <p:spTree>
+      <p:nvGrpSpPr>
+        <p:cNvPr id="1" name=""/>
+        <p:cNvGrpSpPr/>
+        <p:nvPr/>
+      </p:nvGrpSpPr>
+      <p:grpSpPr>
+        <a:xfrm>
+          <a:off x="0" y="0"/>
+          <a:ext cx="0" cy="0"/>
+          <a:chOff x="0" y="0"/>
+          <a:chExt cx="0" cy="0"/>
+        </a:xfrm>
+      </p:grpSpPr>
+      <p:sp>
+        <p:nvSpPr>
+          <p:cNvPr id="2" name="コンテンツ プレースホルダー 1"/>
+          <p:cNvSpPr>
+            <a:spLocks noGrp="1"/>
+          </p:cNvSpPr>
+          <p:nvPr>
+            <p:ph idx="1"/>
+          </p:nvPr>
+        </p:nvSpPr>
+        <p:spPr>
+          <a:xfrm>
+            <a:off x="704850" y="1282426"/>
+            <a:ext cx="8496300" cy="5371113"/>
+          </a:xfrm>
+        </p:spPr>
+        <p:txBody>
+          <a:bodyPr>
+            <a:normAutofit lnSpcReduction="10000"/>
+          </a:bodyPr>
+          <a:lstStyle/>
+          <a:p>
+            <a:r>
+              <a:rPr kumimoji="1" lang="ja-JP" altLang="en-US" sz="2800" b="1" dirty="0"/>
+              <a:t>Judgment（判断）</a:t>
+            </a:r>
+            <a:r>
+              <a:rPr lang="ja-JP" altLang="en-US" sz="2800" dirty="0"/>
+              <a:t>🧑‍💻</a:t>
+            </a:r>
+            <a:endParaRPr kumimoji="1" lang="ja-JP" altLang="en-US" sz="2800" b="1" dirty="0"/>
+          </a:p>
+          <a:p>
+            <a:pPr lvl="1"/>
+            <a:r>
+              <a:rPr kumimoji="1" lang="ja-JP" altLang="en-US" sz="2800" dirty="0"/>
+              <a:t>何を問うか・何を採るかを引き受けること</a:t>
+            </a:r>
+            <a:endParaRPr kumimoji="1" lang="en-US" altLang="ja-JP" sz="2800" dirty="0"/>
+          </a:p>
+          <a:p>
+            <a:pPr lvl="2"/>
+            <a:r>
+              <a:rPr lang="en-US" altLang="ja-JP" sz="2000" dirty="0"/>
+              <a:t>Ex </a:t>
+            </a:r>
+            <a:r>
+              <a:rPr lang="ja-JP" altLang="en-US" sz="2000" dirty="0"/>
+              <a:t>トレードオフの判断</a:t>
+            </a:r>
+            <a:endParaRPr lang="en-US" altLang="ja-JP" sz="2000" dirty="0"/>
+          </a:p>
+          <a:p>
+            <a:pPr lvl="2"/>
+            <a:r>
+              <a:rPr kumimoji="1" lang="en-US" altLang="ja-JP" sz="2000" dirty="0"/>
+              <a:t>Ex </a:t>
+            </a:r>
+            <a:r>
+              <a:rPr kumimoji="1" lang="ja-JP" altLang="en-US" sz="2000" dirty="0"/>
+              <a:t>何を解決するかの判断</a:t>
+            </a:r>
+            <a:endParaRPr lang="ja-JP" altLang="en-US" sz="1400" dirty="0"/>
+          </a:p>
+          <a:p>
+            <a:r>
+              <a:rPr kumimoji="1" lang="ja-JP" altLang="en-US" sz="2800" b="1" dirty="0"/>
+              <a:t>Reckoning（演算）</a:t>
+            </a:r>
+            <a:r>
+              <a:rPr lang="ja-JP" altLang="en-US" sz="2800" dirty="0"/>
+              <a:t>🤖🛠️</a:t>
+            </a:r>
+            <a:endParaRPr kumimoji="1" lang="ja-JP" altLang="en-US" sz="2800" b="1" dirty="0"/>
+          </a:p>
+          <a:p>
+            <a:pPr lvl="1"/>
+            <a:r>
+              <a:rPr kumimoji="1" lang="ja-JP" altLang="en-US" sz="2800" dirty="0"/>
+              <a:t>与えられた条件で広く計算すること</a:t>
+            </a:r>
+            <a:endParaRPr kumimoji="1" lang="en-US" altLang="ja-JP" sz="2800" dirty="0"/>
+          </a:p>
+          <a:p>
+            <a:pPr lvl="2"/>
+            <a:r>
+              <a:rPr kumimoji="1" lang="en-US" altLang="ja-JP" sz="2000" dirty="0"/>
+              <a:t>Ex </a:t>
+            </a:r>
+            <a:r>
+              <a:rPr kumimoji="1" lang="ja-JP" altLang="en-US" sz="2000" dirty="0"/>
+              <a:t>コンテキストに従って生成すること</a:t>
+            </a:r>
+            <a:endParaRPr kumimoji="1" lang="en-US" altLang="ja-JP" sz="2000" dirty="0"/>
+          </a:p>
+          <a:p>
+            <a:pPr lvl="2"/>
+            <a:r>
+              <a:rPr lang="en-US" altLang="ja-JP" sz="2000" dirty="0"/>
+              <a:t>Ex </a:t>
+            </a:r>
+            <a:r>
+              <a:rPr lang="ja-JP" altLang="en-US" sz="2000" dirty="0"/>
+              <a:t>ツールを使って処理すること</a:t>
+            </a:r>
+            <a:endParaRPr lang="en-US" altLang="ja-JP" sz="2000" dirty="0"/>
+          </a:p>
+          <a:p>
+            <a:pPr lvl="2"/>
+            <a:endParaRPr kumimoji="1" lang="en-US" altLang="ja-JP" sz="2000" dirty="0"/>
+          </a:p>
+          <a:p>
+            <a:pPr marL="514345" lvl="2" indent="0">
+              <a:buNone/>
+            </a:pPr>
+            <a:r>
+              <a:rPr lang="en-US" altLang="ja-JP" sz="2000" dirty="0"/>
+              <a:t>※</a:t>
+            </a:r>
+            <a:r>
+              <a:rPr lang="ja-JP" altLang="en-US" sz="2000" dirty="0"/>
+              <a:t>俺流解釈です</a:t>
+            </a:r>
+            <a:endParaRPr kumimoji="1" lang="ja-JP" altLang="en-US" sz="2000" dirty="0"/>
+          </a:p>
+        </p:txBody>
+      </p:sp>
+      <p:sp>
+        <p:nvSpPr>
+          <p:cNvPr id="3" name="タイトル 2"/>
+          <p:cNvSpPr>
+            <a:spLocks noGrp="1"/>
+          </p:cNvSpPr>
+          <p:nvPr>
+            <p:ph type="title"/>
+          </p:nvPr>
+        </p:nvSpPr>
+        <p:spPr/>
+        <p:txBody>
+          <a:bodyPr>
+            <a:normAutofit fontScale="90000"/>
+          </a:bodyPr>
+          <a:lstStyle/>
+          <a:p>
+            <a:r>
+              <a:rPr kumimoji="1" lang="ja-JP" altLang="en-US" dirty="0"/>
+              <a:t>システム開発における</a:t>
+            </a:r>
+            <a:br>
+              <a:rPr kumimoji="1" lang="en-US" altLang="ja-JP" dirty="0"/>
+            </a:br>
+            <a:r>
+              <a:rPr kumimoji="1" lang="ja-JP" altLang="en-US" dirty="0"/>
+              <a:t>判断（Judgment）と演算（Reckoning）</a:t>
+            </a:r>
+          </a:p>
+        </p:txBody>
+      </p:sp>
+    </p:spTree>
+    <p:extLst>
+      <p:ext uri="{BB962C8B-B14F-4D97-AF65-F5344CB8AC3E}">
+        <p14:creationId xmlns:p14="http://schemas.microsoft.com/office/powerpoint/2010/main" val="3989734313"/>
+      </p:ext>
+    </p:extLst>
+  </p:cSld>
+  <p:clrMapOvr>
+    <a:masterClrMapping/>
+  </p:clrMapOvr>
+</p:sld>
+</file>
+
+<file path=ppt/slides/slide34.xml><?xml version="1.0" encoding="utf-8"?>
+<p:sld xmlns:a="http://schemas.openxmlformats.org/drawingml/2006/main" xmlns:r="http://schemas.openxmlformats.org/officeDocument/2006/relationships" xmlns:p="http://schemas.openxmlformats.org/presentationml/2006/main">
+  <p:cSld>
+    <p:spTree>
+      <p:nvGrpSpPr>
+        <p:cNvPr id="1" name="">
+          <a:extLst>
+            <a:ext uri="{FF2B5EF4-FFF2-40B4-BE49-F238E27FC236}">
+              <a16:creationId xmlns:a16="http://schemas.microsoft.com/office/drawing/2014/main" id="{DEB019F2-1916-EC49-C447-6CFB51CD0B9A}"/>
+            </a:ext>
+          </a:extLst>
+        </p:cNvPr>
+        <p:cNvGrpSpPr/>
+        <p:nvPr/>
+      </p:nvGrpSpPr>
+      <p:grpSpPr>
+        <a:xfrm>
+          <a:off x="0" y="0"/>
+          <a:ext cx="0" cy="0"/>
+          <a:chOff x="0" y="0"/>
+          <a:chExt cx="0" cy="0"/>
+        </a:xfrm>
+      </p:grpSpPr>
+      <p:sp>
+        <p:nvSpPr>
+          <p:cNvPr id="2" name="コンテンツ プレースホルダー 1">
+            <a:extLst>
+              <a:ext uri="{FF2B5EF4-FFF2-40B4-BE49-F238E27FC236}">
+                <a16:creationId xmlns:a16="http://schemas.microsoft.com/office/drawing/2014/main" id="{5C34B18D-6E76-2900-D135-3A71908B83E8}"/>
+              </a:ext>
+            </a:extLst>
+          </p:cNvPr>
+          <p:cNvSpPr>
+            <a:spLocks noGrp="1"/>
+          </p:cNvSpPr>
+          <p:nvPr>
+            <p:ph idx="1"/>
+          </p:nvPr>
+        </p:nvSpPr>
+        <p:spPr/>
+        <p:txBody>
+          <a:bodyPr>
+            <a:normAutofit/>
+          </a:bodyPr>
+          <a:lstStyle/>
+          <a:p>
+            <a:r>
+              <a:rPr kumimoji="1" lang="ja-JP" altLang="en-US" sz="1600" dirty="0"/>
+              <a:t>現行 LLM の得意領域は Reckoning</a:t>
+            </a:r>
+            <a:r>
+              <a:rPr lang="ja-JP" altLang="en-US" b="1" dirty="0"/>
+              <a:t>（演算）</a:t>
+            </a:r>
+            <a:endParaRPr kumimoji="1" lang="ja-JP" altLang="en-US" sz="1600" dirty="0"/>
+          </a:p>
+          <a:p>
+            <a:pPr lvl="1"/>
+            <a:r>
+              <a:rPr kumimoji="1" lang="ja-JP" altLang="en-US" sz="1600" dirty="0"/>
+              <a:t>人間が与えた判断基準（</a:t>
+            </a:r>
+            <a:r>
+              <a:rPr kumimoji="1" lang="en-US" altLang="ja-JP" sz="1600" b="1" dirty="0"/>
+              <a:t>Context</a:t>
+            </a:r>
+            <a:r>
+              <a:rPr kumimoji="1" lang="ja-JP" altLang="en-US" sz="1600" dirty="0"/>
+              <a:t>）あるいは事前学習に沿って</a:t>
+            </a:r>
+            <a:br>
+              <a:rPr kumimoji="1" lang="en-US" altLang="ja-JP" sz="1600" dirty="0"/>
+            </a:br>
+            <a:r>
+              <a:rPr kumimoji="1" lang="ja-JP" altLang="en-US" sz="1600" b="1" dirty="0"/>
+              <a:t>演算</a:t>
+            </a:r>
+            <a:r>
+              <a:rPr lang="ja-JP" altLang="en-US" sz="1600" dirty="0"/>
+              <a:t>させているに過ぎない　（自然言語的計算機？）</a:t>
+            </a:r>
+            <a:endParaRPr kumimoji="1" lang="en-US" altLang="ja-JP" sz="1600" dirty="0"/>
+          </a:p>
+          <a:p>
+            <a:pPr lvl="1"/>
+            <a:endParaRPr lang="en-US" altLang="ja-JP" sz="1600" dirty="0"/>
+          </a:p>
+          <a:p>
+            <a:pPr marL="257173" lvl="1" indent="0">
+              <a:buNone/>
+            </a:pPr>
+            <a:r>
+              <a:rPr lang="ja-JP" altLang="en-US" sz="1600" dirty="0"/>
+              <a:t>晩年の</a:t>
+            </a:r>
+            <a:r>
+              <a:rPr lang="en-US" altLang="ja-JP" sz="1600" dirty="0"/>
+              <a:t>Smith</a:t>
+            </a:r>
+            <a:r>
+              <a:rPr lang="ja-JP" altLang="en-US" sz="1600" dirty="0"/>
+              <a:t>は、「</a:t>
+            </a:r>
+            <a:r>
+              <a:rPr lang="en-US" altLang="ja-JP" sz="1600" b="1" dirty="0"/>
+              <a:t>AI</a:t>
+            </a:r>
+            <a:r>
+              <a:rPr lang="ja-JP" altLang="en-US" sz="1600" b="1" dirty="0"/>
+              <a:t>の圧倒的な演算力を前に、人間が判断の重要性を見失う</a:t>
+            </a:r>
+            <a:r>
+              <a:rPr lang="ja-JP" altLang="en-US" sz="1600" dirty="0"/>
+              <a:t>」</a:t>
+            </a:r>
+            <a:br>
+              <a:rPr lang="en-US" altLang="ja-JP" sz="1600" dirty="0"/>
+            </a:br>
+            <a:r>
+              <a:rPr lang="ja-JP" altLang="en-US" sz="1600" dirty="0"/>
+              <a:t>ことを危惧していたそう</a:t>
+            </a:r>
+            <a:endParaRPr lang="en-US" altLang="ja-JP" sz="1600" dirty="0"/>
+          </a:p>
+          <a:p>
+            <a:pPr lvl="2"/>
+            <a:r>
+              <a:rPr lang="en-US" altLang="ja-JP" sz="1600" dirty="0">
+                <a:hlinkClick r:id="rId2"/>
+              </a:rPr>
+              <a:t>On Brian Cantwell Smith and the Promise of AI</a:t>
+            </a:r>
+            <a:endParaRPr lang="ja-JP" altLang="en-US" sz="1600" dirty="0"/>
+          </a:p>
+          <a:p>
+            <a:pPr marL="257173" lvl="1" indent="0">
+              <a:buNone/>
+            </a:pPr>
+            <a:endParaRPr kumimoji="1" lang="en-US" altLang="ja-JP" sz="1600" dirty="0"/>
+          </a:p>
+        </p:txBody>
+      </p:sp>
+      <p:sp>
+        <p:nvSpPr>
+          <p:cNvPr id="3" name="タイトル 2">
+            <a:extLst>
+              <a:ext uri="{FF2B5EF4-FFF2-40B4-BE49-F238E27FC236}">
+                <a16:creationId xmlns:a16="http://schemas.microsoft.com/office/drawing/2014/main" id="{4A4BDA9A-4807-9063-214E-28E79A1055C0}"/>
+              </a:ext>
+            </a:extLst>
+          </p:cNvPr>
+          <p:cNvSpPr>
+            <a:spLocks noGrp="1"/>
+          </p:cNvSpPr>
+          <p:nvPr>
+            <p:ph type="title"/>
+          </p:nvPr>
+        </p:nvSpPr>
+        <p:spPr/>
+        <p:txBody>
+          <a:bodyPr>
+            <a:normAutofit fontScale="90000"/>
+          </a:bodyPr>
+          <a:lstStyle/>
+          <a:p>
+            <a:r>
+              <a:rPr kumimoji="1" lang="ja-JP" altLang="en-US" dirty="0"/>
+              <a:t>枠組み: 判断（Judgment）と演算（Reckoning）</a:t>
+            </a:r>
+          </a:p>
+        </p:txBody>
+      </p:sp>
+      <p:pic>
+        <p:nvPicPr>
+          <p:cNvPr id="7" name="図 6">
+            <a:extLst>
+              <a:ext uri="{FF2B5EF4-FFF2-40B4-BE49-F238E27FC236}">
+                <a16:creationId xmlns:a16="http://schemas.microsoft.com/office/drawing/2014/main" id="{4A22153F-3E1F-BA1D-0DF0-6F902F1C1553}"/>
+              </a:ext>
+            </a:extLst>
+          </p:cNvPr>
+          <p:cNvPicPr>
+            <a:picLocks noChangeAspect="1"/>
+          </p:cNvPicPr>
+          <p:nvPr/>
+        </p:nvPicPr>
+        <p:blipFill>
+          <a:blip r:embed="rId3">
+            <a:extLst>
+              <a:ext uri="{28A0092B-C50C-407E-A947-70E740481C1C}">
+                <a14:useLocalDpi xmlns:a14="http://schemas.microsoft.com/office/drawing/2010/main" val="0"/>
+              </a:ext>
+            </a:extLst>
+          </a:blip>
+          <a:stretch>
+            <a:fillRect/>
+          </a:stretch>
+        </p:blipFill>
+        <p:spPr>
+          <a:xfrm>
+            <a:off x="7293260" y="3609020"/>
+            <a:ext cx="2324708" cy="2905885"/>
+          </a:xfrm>
+          <a:prstGeom prst="rect">
+            <a:avLst/>
+          </a:prstGeom>
+        </p:spPr>
+      </p:pic>
+      <p:pic>
+        <p:nvPicPr>
+          <p:cNvPr id="4" name="図 3">
+            <a:extLst>
+              <a:ext uri="{FF2B5EF4-FFF2-40B4-BE49-F238E27FC236}">
+                <a16:creationId xmlns:a16="http://schemas.microsoft.com/office/drawing/2014/main" id="{97E8E0FE-A1EE-EE3F-5136-A143700A85CC}"/>
+              </a:ext>
+            </a:extLst>
+          </p:cNvPr>
+          <p:cNvPicPr>
+            <a:picLocks noChangeAspect="1"/>
+          </p:cNvPicPr>
+          <p:nvPr/>
+        </p:nvPicPr>
+        <p:blipFill>
+          <a:blip r:embed="rId4">
+            <a:alphaModFix amt="70000"/>
+            <a:extLst>
+              <a:ext uri="{28A0092B-C50C-407E-A947-70E740481C1C}">
+                <a14:useLocalDpi xmlns:a14="http://schemas.microsoft.com/office/drawing/2010/main" val="0"/>
+              </a:ext>
+            </a:extLst>
+          </a:blip>
+          <a:stretch>
+            <a:fillRect/>
+          </a:stretch>
+        </p:blipFill>
+        <p:spPr>
+          <a:xfrm>
+            <a:off x="3944888" y="4322495"/>
+            <a:ext cx="1476164" cy="2184524"/>
+          </a:xfrm>
+          <a:prstGeom prst="rect">
+            <a:avLst/>
+          </a:prstGeom>
+        </p:spPr>
+      </p:pic>
+      <p:sp>
+        <p:nvSpPr>
+          <p:cNvPr id="5" name="矢印: 右 4">
+            <a:extLst>
+              <a:ext uri="{FF2B5EF4-FFF2-40B4-BE49-F238E27FC236}">
+                <a16:creationId xmlns:a16="http://schemas.microsoft.com/office/drawing/2014/main" id="{58FB9665-3304-A36C-3187-582B693C078A}"/>
+              </a:ext>
+            </a:extLst>
+          </p:cNvPr>
+          <p:cNvSpPr/>
+          <p:nvPr/>
+        </p:nvSpPr>
+        <p:spPr>
+          <a:xfrm>
+            <a:off x="5673080" y="5061962"/>
+            <a:ext cx="1296144" cy="635290"/>
+          </a:xfrm>
+          <a:prstGeom prst="rightArrow">
+            <a:avLst/>
+          </a:prstGeom>
+        </p:spPr>
+        <p:style>
+          <a:lnRef idx="2">
+            <a:schemeClr val="accent6">
+              <a:shade val="15000"/>
+            </a:schemeClr>
+          </a:lnRef>
+          <a:fillRef idx="1">
+            <a:schemeClr val="accent6"/>
+          </a:fillRef>
+          <a:effectRef idx="0">
+            <a:schemeClr val="accent6"/>
+          </a:effectRef>
+          <a:fontRef idx="minor">
+            <a:schemeClr val="lt1"/>
+          </a:fontRef>
+        </p:style>
+        <p:txBody>
+          <a:bodyPr rtlCol="0" anchor="ctr"/>
+          <a:lstStyle/>
+          <a:p>
+            <a:pPr algn="ctr"/>
+            <a:r>
+              <a:rPr kumimoji="1" lang="ja-JP" altLang="en-US" dirty="0"/>
+              <a:t>邦訳版</a:t>
+            </a:r>
+          </a:p>
+        </p:txBody>
+      </p:sp>
+    </p:spTree>
+    <p:extLst>
+      <p:ext uri="{BB962C8B-B14F-4D97-AF65-F5344CB8AC3E}">
+        <p14:creationId xmlns:p14="http://schemas.microsoft.com/office/powerpoint/2010/main" val="594510954"/>
+      </p:ext>
+    </p:extLst>
+  </p:cSld>
+  <p:clrMapOvr>
+    <a:masterClrMapping/>
+  </p:clrMapOvr>
+</p:sld>
+</file>
+
+<file path=ppt/slides/slide35.xml><?xml version="1.0" encoding="utf-8"?>
 <p:sld xmlns:a="http://schemas.openxmlformats.org/drawingml/2006/main" xmlns:r="http://schemas.openxmlformats.org/officeDocument/2006/relationships" xmlns:p="http://schemas.openxmlformats.org/presentationml/2006/main">
   <p:cSld>
     <p:spTree>
@@ -16884,89 +17042,148 @@
           <a:lstStyle/>
           <a:p>
             <a:r>
-              <a:rPr kumimoji="1" lang="ja-JP" altLang="en-US" sz="2800" b="1" dirty="0"/>
-              <a:t>Judgment（判断）</a:t>
-            </a:r>
-            <a:r>
-              <a:rPr lang="ja-JP" altLang="en-US" sz="2800" dirty="0"/>
+              <a:rPr kumimoji="1" lang="ja-JP" altLang="en-US" sz="1800" b="1" dirty="0"/>
+              <a:t>事例1: ドキュメントパイプライン</a:t>
+            </a:r>
+          </a:p>
+          <a:p>
+            <a:pPr lvl="1"/>
+            <a:r>
+              <a:rPr lang="ja-JP" altLang="en-US" sz="1800" dirty="0"/>
               <a:t>🧑‍💻</a:t>
             </a:r>
-            <a:endParaRPr kumimoji="1" lang="ja-JP" altLang="en-US" sz="2800" b="1" dirty="0"/>
+            <a:r>
+              <a:rPr kumimoji="1" lang="ja-JP" altLang="en-US" sz="1800" dirty="0"/>
+              <a:t>「</a:t>
+            </a:r>
+            <a:r>
+              <a:rPr lang="ja-JP" altLang="en-US" sz="1800" dirty="0"/>
+              <a:t>作業の進め方」「成果物の作り方」</a:t>
+            </a:r>
+            <a:r>
+              <a:rPr kumimoji="1" lang="ja-JP" altLang="en-US" sz="1800" dirty="0"/>
+              <a:t>を設計した</a:t>
+            </a:r>
+            <a:endParaRPr kumimoji="1" lang="en-US" altLang="ja-JP" sz="1800" dirty="0"/>
+          </a:p>
+          <a:p>
+            <a:pPr lvl="2"/>
+            <a:r>
+              <a:rPr lang="en-US" altLang="ja-JP" sz="1800" dirty="0"/>
+              <a:t>AI</a:t>
+            </a:r>
+            <a:r>
+              <a:rPr lang="ja-JP" altLang="en-US" sz="1800" dirty="0"/>
+              <a:t>🤖は設計に基づいてツール🛠️を作成した</a:t>
+            </a:r>
+            <a:endParaRPr kumimoji="1" lang="en-US" altLang="ja-JP" sz="1800" dirty="0"/>
+          </a:p>
+          <a:p>
+            <a:r>
+              <a:rPr kumimoji="1" lang="ja-JP" altLang="en-US" sz="1800" b="1" dirty="0"/>
+              <a:t>事例2: AIレビューワークフロー</a:t>
+            </a:r>
           </a:p>
           <a:p>
             <a:pPr lvl="1"/>
             <a:r>
-              <a:rPr kumimoji="1" lang="ja-JP" altLang="en-US" sz="2800" dirty="0"/>
-              <a:t>何を問うか・何を採るかを引き受けること</a:t>
-            </a:r>
-            <a:endParaRPr kumimoji="1" lang="en-US" altLang="ja-JP" sz="2800" dirty="0"/>
+              <a:rPr lang="ja-JP" altLang="en-US" sz="1600" dirty="0"/>
+              <a:t>🧑‍💻</a:t>
+            </a:r>
+            <a:r>
+              <a:rPr kumimoji="1" lang="ja-JP" altLang="en-US" sz="1600" dirty="0"/>
+              <a:t>「人間・</a:t>
+            </a:r>
+            <a:r>
+              <a:rPr kumimoji="1" lang="en-US" altLang="ja-JP" sz="1600" dirty="0"/>
+              <a:t>AI</a:t>
+            </a:r>
+            <a:r>
+              <a:rPr kumimoji="1" lang="ja-JP" altLang="en-US" sz="1600" dirty="0"/>
+              <a:t>・ツールの役割分担」「判断力を持続可能にする仕組み」を設計した</a:t>
+            </a:r>
+            <a:endParaRPr kumimoji="1" lang="en-US" altLang="ja-JP" sz="1600" dirty="0"/>
           </a:p>
           <a:p>
             <a:pPr lvl="2"/>
             <a:r>
-              <a:rPr lang="en-US" altLang="ja-JP" sz="2000" dirty="0"/>
-              <a:t>Ex </a:t>
+              <a:rPr lang="ja-JP" altLang="en-US" sz="1600" dirty="0"/>
+              <a:t>人間が判断するべき領域🧑‍💻</a:t>
+            </a:r>
+            <a:endParaRPr lang="en-US" altLang="ja-JP" sz="1600" dirty="0"/>
+          </a:p>
+          <a:p>
+            <a:pPr lvl="2"/>
+            <a:r>
+              <a:rPr lang="en-US" altLang="ja-JP" sz="1600" dirty="0"/>
+              <a:t>AI</a:t>
+            </a:r>
+            <a:r>
+              <a:rPr lang="ja-JP" altLang="en-US" sz="1600" dirty="0"/>
+              <a:t>がスケールさせる領域🤖</a:t>
+            </a:r>
+            <a:endParaRPr lang="en-US" altLang="ja-JP" sz="1600" dirty="0"/>
+          </a:p>
+          <a:p>
+            <a:pPr lvl="2"/>
+            <a:r>
+              <a:rPr lang="ja-JP" altLang="en-US" sz="1600" dirty="0"/>
+              <a:t>必要な決定論的作業🛠️</a:t>
+            </a:r>
+            <a:endParaRPr kumimoji="1" lang="en-US" altLang="ja-JP" sz="2000" b="1" dirty="0"/>
+          </a:p>
+          <a:p>
+            <a:r>
+              <a:rPr kumimoji="1" lang="ja-JP" altLang="en-US" sz="2000" b="1" dirty="0"/>
+              <a:t>共通パターン:</a:t>
+            </a:r>
+          </a:p>
+          <a:p>
+            <a:pPr lvl="1"/>
+            <a:r>
+              <a:rPr kumimoji="1" lang="ja-JP" altLang="en-US" sz="2000" dirty="0"/>
+              <a:t>人間</a:t>
             </a:r>
             <a:r>
               <a:rPr lang="ja-JP" altLang="en-US" sz="2000" dirty="0"/>
-              <a:t>トレードオフの判断</a:t>
-            </a:r>
-            <a:endParaRPr lang="en-US" altLang="ja-JP" sz="2000" dirty="0"/>
-          </a:p>
-          <a:p>
-            <a:pPr lvl="2"/>
+              <a:t>🧑‍💻</a:t>
+            </a:r>
+            <a:r>
+              <a:rPr kumimoji="1" lang="ja-JP" altLang="en-US" sz="2000" dirty="0"/>
+              <a:t>が判断（</a:t>
+            </a:r>
             <a:r>
               <a:rPr kumimoji="1" lang="en-US" altLang="ja-JP" sz="2000" dirty="0"/>
-              <a:t>Ex </a:t>
+              <a:t>Judgement</a:t>
             </a:r>
             <a:r>
               <a:rPr kumimoji="1" lang="ja-JP" altLang="en-US" sz="2000" dirty="0"/>
-              <a:t>何を解決するかの判断</a:t>
-            </a:r>
-            <a:endParaRPr lang="ja-JP" altLang="en-US" sz="1400" dirty="0"/>
-          </a:p>
-          <a:p>
-            <a:r>
-              <a:rPr kumimoji="1" lang="ja-JP" altLang="en-US" sz="2800" b="1" dirty="0"/>
-              <a:t>Reckoning（演算）</a:t>
-            </a:r>
-            <a:r>
-              <a:rPr lang="ja-JP" altLang="en-US" sz="2800" dirty="0"/>
-              <a:t>🤖🛠️</a:t>
-            </a:r>
-            <a:endParaRPr kumimoji="1" lang="ja-JP" altLang="en-US" sz="2800" b="1" dirty="0"/>
+              <a:t>）の枠組みを作り</a:t>
+            </a:r>
+            <a:endParaRPr kumimoji="1" lang="en-US" altLang="ja-JP" sz="2000" dirty="0"/>
           </a:p>
           <a:p>
             <a:pPr lvl="1"/>
             <a:r>
-              <a:rPr kumimoji="1" lang="ja-JP" altLang="en-US" sz="2800" dirty="0"/>
-              <a:t>与えられた条件で広く計算すること</a:t>
-            </a:r>
-            <a:endParaRPr kumimoji="1" lang="en-US" altLang="ja-JP" sz="2800" dirty="0"/>
-          </a:p>
-          <a:p>
-            <a:pPr lvl="2"/>
+              <a:rPr kumimoji="1" lang="ja-JP" altLang="en-US" sz="2000" dirty="0"/>
+              <a:t>AI</a:t>
+            </a:r>
+            <a:r>
+              <a:rPr lang="ja-JP" altLang="en-US" sz="2000" dirty="0"/>
+              <a:t>🤖</a:t>
+            </a:r>
+            <a:r>
+              <a:rPr kumimoji="1" lang="ja-JP" altLang="en-US" sz="2000" dirty="0"/>
+              <a:t>が演算（</a:t>
+            </a:r>
             <a:r>
               <a:rPr kumimoji="1" lang="en-US" altLang="ja-JP" sz="2000" dirty="0"/>
-              <a:t>Ex </a:t>
+              <a:t>Reckoning</a:t>
             </a:r>
             <a:r>
               <a:rPr kumimoji="1" lang="ja-JP" altLang="en-US" sz="2000" dirty="0"/>
-              <a:t>コンテキストに従って生成すること</a:t>
-            </a:r>
-            <a:endParaRPr kumimoji="1" lang="en-US" altLang="ja-JP" sz="2000" dirty="0"/>
-          </a:p>
-          <a:p>
-            <a:pPr lvl="2"/>
-            <a:r>
-              <a:rPr lang="en-US" altLang="ja-JP" sz="2000" dirty="0"/>
-              <a:t>Ex </a:t>
-            </a:r>
-            <a:r>
-              <a:rPr lang="ja-JP" altLang="en-US" sz="2000" dirty="0"/>
-              <a:t>ツールを使って処理すること</a:t>
-            </a:r>
-            <a:endParaRPr kumimoji="1" lang="ja-JP" altLang="en-US" sz="2000" dirty="0"/>
+              <a:t>）を担う</a:t>
+            </a:r>
           </a:p>
         </p:txBody>
       </p:sp>
@@ -16982,14 +17199,12 @@
         </p:nvSpPr>
         <p:spPr/>
         <p:txBody>
-          <a:bodyPr>
-            <a:normAutofit fontScale="90000"/>
-          </a:bodyPr>
+          <a:bodyPr/>
           <a:lstStyle/>
           <a:p>
             <a:r>
               <a:rPr kumimoji="1" lang="ja-JP" altLang="en-US" dirty="0"/>
-              <a:t>枠組み: 判断（Judgment）と演算（Reckoning）</a:t>
+              <a:t>今日話した2つの仕組み</a:t>
             </a:r>
           </a:p>
         </p:txBody>
@@ -16997,7 +17212,7 @@
     </p:spTree>
     <p:extLst>
       <p:ext uri="{BB962C8B-B14F-4D97-AF65-F5344CB8AC3E}">
-        <p14:creationId xmlns:p14="http://schemas.microsoft.com/office/powerpoint/2010/main" val="3989734313"/>
+        <p14:creationId xmlns:p14="http://schemas.microsoft.com/office/powerpoint/2010/main" val="1825818896"/>
       </p:ext>
     </p:extLst>
   </p:cSld>
@@ -17007,12 +17222,18 @@
 </p:sld>
 </file>
 
-<file path=ppt/slides/slide34.xml><?xml version="1.0" encoding="utf-8"?>
+<file path=ppt/slides/slide36.xml><?xml version="1.0" encoding="utf-8"?>
 <p:sld xmlns:a="http://schemas.openxmlformats.org/drawingml/2006/main" xmlns:r="http://schemas.openxmlformats.org/officeDocument/2006/relationships" xmlns:p="http://schemas.openxmlformats.org/presentationml/2006/main">
   <p:cSld>
     <p:spTree>
       <p:nvGrpSpPr>
-        <p:cNvPr id="1" name=""/>
+        <p:cNvPr id="1" name="">
+          <a:extLst>
+            <a:ext uri="{FF2B5EF4-FFF2-40B4-BE49-F238E27FC236}">
+              <a16:creationId xmlns:a16="http://schemas.microsoft.com/office/drawing/2014/main" id="{330426AE-354B-61BB-359D-F2716F77D51B}"/>
+            </a:ext>
+          </a:extLst>
+        </p:cNvPr>
         <p:cNvGrpSpPr/>
         <p:nvPr/>
       </p:nvGrpSpPr>
@@ -17026,7 +17247,13 @@
       </p:grpSpPr>
       <p:sp>
         <p:nvSpPr>
-          <p:cNvPr id="2" name="コンテンツ プレースホルダー 1"/>
+          <p:cNvPr id="2" name="コンテンツ プレースホルダー 1">
+            <a:extLst>
+              <a:ext uri="{FF2B5EF4-FFF2-40B4-BE49-F238E27FC236}">
+                <a16:creationId xmlns:a16="http://schemas.microsoft.com/office/drawing/2014/main" id="{7CA35C5E-0EA1-31E3-E66C-2C2B07901F51}"/>
+              </a:ext>
+            </a:extLst>
+          </p:cNvPr>
           <p:cNvSpPr>
             <a:spLocks noGrp="1"/>
           </p:cNvSpPr>
@@ -17091,20 +17318,26 @@
             <a:endParaRPr lang="en-US" altLang="ja-JP" sz="2400" b="1" dirty="0"/>
           </a:p>
           <a:p>
-            <a:pPr lvl="1"/>
-            <a:r>
-              <a:rPr lang="ja-JP" altLang="en-US" sz="2400" dirty="0"/>
+            <a:pPr marL="257173" lvl="1" indent="0">
+              <a:buNone/>
+            </a:pPr>
+            <a:r>
+              <a:rPr lang="ja-JP" altLang="en-US" sz="3000" dirty="0"/>
               <a:t>人間：</a:t>
             </a:r>
             <a:r>
-              <a:rPr lang="ja-JP" altLang="en-US" sz="2400" b="1" dirty="0"/>
+              <a:rPr lang="ja-JP" altLang="en-US" sz="3000" b="1" dirty="0"/>
               <a:t>掛け金</a:t>
             </a:r>
             <a:r>
-              <a:rPr lang="ja-JP" altLang="en-US" sz="2400" dirty="0"/>
+              <a:rPr lang="ja-JP" altLang="en-US" sz="1900" dirty="0"/>
+              <a:t>（責任）</a:t>
+            </a:r>
+            <a:r>
+              <a:rPr lang="ja-JP" altLang="en-US" sz="3000" dirty="0"/>
               <a:t>を持つ主体として生きる</a:t>
             </a:r>
-            <a:endParaRPr kumimoji="1" lang="en-US" altLang="ja-JP" sz="2400" dirty="0"/>
+            <a:endParaRPr kumimoji="1" lang="en-US" altLang="ja-JP" sz="3000" dirty="0"/>
           </a:p>
           <a:p>
             <a:pPr lvl="2"/>
@@ -17134,7 +17367,13 @@
       </p:sp>
       <p:sp>
         <p:nvSpPr>
-          <p:cNvPr id="3" name="タイトル 2"/>
+          <p:cNvPr id="3" name="タイトル 2">
+            <a:extLst>
+              <a:ext uri="{FF2B5EF4-FFF2-40B4-BE49-F238E27FC236}">
+                <a16:creationId xmlns:a16="http://schemas.microsoft.com/office/drawing/2014/main" id="{7BB5D441-033F-EAD4-002E-E743ED554A57}"/>
+              </a:ext>
+            </a:extLst>
+          </p:cNvPr>
           <p:cNvSpPr>
             <a:spLocks noGrp="1"/>
           </p:cNvSpPr>
@@ -17149,438 +17388,7 @@
           <a:p>
             <a:r>
               <a:rPr kumimoji="1" lang="ja-JP" altLang="en-US" dirty="0"/>
-              <a:t>結び: 人間が引き受けるべきこと</a:t>
-            </a:r>
-          </a:p>
-        </p:txBody>
-      </p:sp>
-    </p:spTree>
-  </p:cSld>
-  <p:clrMapOvr>
-    <a:masterClrMapping/>
-  </p:clrMapOvr>
-</p:sld>
-</file>
-
-<file path=ppt/slides/slide35.xml><?xml version="1.0" encoding="utf-8"?>
-<p:sld xmlns:a="http://schemas.openxmlformats.org/drawingml/2006/main" xmlns:r="http://schemas.openxmlformats.org/officeDocument/2006/relationships" xmlns:p="http://schemas.openxmlformats.org/presentationml/2006/main">
-  <p:cSld>
-    <p:spTree>
-      <p:nvGrpSpPr>
-        <p:cNvPr id="1" name="">
-          <a:extLst>
-            <a:ext uri="{FF2B5EF4-FFF2-40B4-BE49-F238E27FC236}">
-              <a16:creationId xmlns:a16="http://schemas.microsoft.com/office/drawing/2014/main" id="{DEB019F2-1916-EC49-C447-6CFB51CD0B9A}"/>
-            </a:ext>
-          </a:extLst>
-        </p:cNvPr>
-        <p:cNvGrpSpPr/>
-        <p:nvPr/>
-      </p:nvGrpSpPr>
-      <p:grpSpPr>
-        <a:xfrm>
-          <a:off x="0" y="0"/>
-          <a:ext cx="0" cy="0"/>
-          <a:chOff x="0" y="0"/>
-          <a:chExt cx="0" cy="0"/>
-        </a:xfrm>
-      </p:grpSpPr>
-      <p:sp>
-        <p:nvSpPr>
-          <p:cNvPr id="2" name="コンテンツ プレースホルダー 1">
-            <a:extLst>
-              <a:ext uri="{FF2B5EF4-FFF2-40B4-BE49-F238E27FC236}">
-                <a16:creationId xmlns:a16="http://schemas.microsoft.com/office/drawing/2014/main" id="{5C34B18D-6E76-2900-D135-3A71908B83E8}"/>
-              </a:ext>
-            </a:extLst>
-          </p:cNvPr>
-          <p:cNvSpPr>
-            <a:spLocks noGrp="1"/>
-          </p:cNvSpPr>
-          <p:nvPr>
-            <p:ph idx="1"/>
-          </p:nvPr>
-        </p:nvSpPr>
-        <p:spPr/>
-        <p:txBody>
-          <a:bodyPr>
-            <a:normAutofit/>
-          </a:bodyPr>
-          <a:lstStyle/>
-          <a:p>
-            <a:r>
-              <a:rPr kumimoji="1" lang="ja-JP" altLang="en-US" sz="1600" dirty="0"/>
-              <a:t>現行 LLM の得意領域は Reckoning</a:t>
-            </a:r>
-            <a:r>
-              <a:rPr lang="ja-JP" altLang="en-US" b="1" dirty="0"/>
-              <a:t>（演算）</a:t>
-            </a:r>
-            <a:endParaRPr kumimoji="1" lang="ja-JP" altLang="en-US" sz="1600" dirty="0"/>
-          </a:p>
-          <a:p>
-            <a:pPr lvl="1"/>
-            <a:r>
-              <a:rPr kumimoji="1" lang="ja-JP" altLang="en-US" sz="1600" dirty="0"/>
-              <a:t>人間が与えた判断基準（</a:t>
-            </a:r>
-            <a:r>
-              <a:rPr kumimoji="1" lang="en-US" altLang="ja-JP" sz="1600" b="1" dirty="0"/>
-              <a:t>Context</a:t>
-            </a:r>
-            <a:r>
-              <a:rPr kumimoji="1" lang="ja-JP" altLang="en-US" sz="1600" dirty="0"/>
-              <a:t>）あるいは事前学習に沿って</a:t>
-            </a:r>
-            <a:br>
-              <a:rPr kumimoji="1" lang="en-US" altLang="ja-JP" sz="1600" dirty="0"/>
-            </a:br>
-            <a:r>
-              <a:rPr kumimoji="1" lang="ja-JP" altLang="en-US" sz="1600" b="1" dirty="0"/>
-              <a:t>演算</a:t>
-            </a:r>
-            <a:r>
-              <a:rPr lang="ja-JP" altLang="en-US" sz="1600" dirty="0"/>
-              <a:t>させているに過ぎない　（自然言語的計算機？）</a:t>
-            </a:r>
-            <a:endParaRPr kumimoji="1" lang="en-US" altLang="ja-JP" sz="1600" dirty="0"/>
-          </a:p>
-          <a:p>
-            <a:pPr lvl="1"/>
-            <a:endParaRPr lang="en-US" altLang="ja-JP" sz="1600" dirty="0"/>
-          </a:p>
-          <a:p>
-            <a:pPr marL="257173" lvl="1" indent="0">
-              <a:buNone/>
-            </a:pPr>
-            <a:r>
-              <a:rPr lang="ja-JP" altLang="en-US" sz="1600" dirty="0"/>
-              <a:t>晩年の</a:t>
-            </a:r>
-            <a:r>
-              <a:rPr lang="en-US" altLang="ja-JP" sz="1600" dirty="0"/>
-              <a:t>Smith</a:t>
-            </a:r>
-            <a:r>
-              <a:rPr lang="ja-JP" altLang="en-US" sz="1600" dirty="0"/>
-              <a:t>は、「</a:t>
-            </a:r>
-            <a:r>
-              <a:rPr lang="en-US" altLang="ja-JP" sz="1600" b="1" dirty="0"/>
-              <a:t>AI</a:t>
-            </a:r>
-            <a:r>
-              <a:rPr lang="ja-JP" altLang="en-US" sz="1600" b="1" dirty="0"/>
-              <a:t>の圧倒的な演算力を前に、人間が判断の重要性を見失う</a:t>
-            </a:r>
-            <a:r>
-              <a:rPr lang="ja-JP" altLang="en-US" sz="1600" dirty="0"/>
-              <a:t>」</a:t>
-            </a:r>
-            <a:br>
-              <a:rPr lang="en-US" altLang="ja-JP" sz="1600" dirty="0"/>
-            </a:br>
-            <a:r>
-              <a:rPr lang="ja-JP" altLang="en-US" sz="1600" dirty="0"/>
-              <a:t>ことを危惧していたそう</a:t>
-            </a:r>
-            <a:endParaRPr lang="en-US" altLang="ja-JP" sz="1600" dirty="0"/>
-          </a:p>
-          <a:p>
-            <a:pPr lvl="2"/>
-            <a:r>
-              <a:rPr lang="en-US" altLang="ja-JP" sz="1600" dirty="0">
-                <a:hlinkClick r:id="rId2"/>
-              </a:rPr>
-              <a:t>On Brian Cantwell Smith and the Promise of AI</a:t>
-            </a:r>
-            <a:endParaRPr lang="ja-JP" altLang="en-US" sz="1600" dirty="0"/>
-          </a:p>
-          <a:p>
-            <a:pPr marL="257173" lvl="1" indent="0">
-              <a:buNone/>
-            </a:pPr>
-            <a:endParaRPr kumimoji="1" lang="en-US" altLang="ja-JP" sz="1600" dirty="0"/>
-          </a:p>
-        </p:txBody>
-      </p:sp>
-      <p:sp>
-        <p:nvSpPr>
-          <p:cNvPr id="3" name="タイトル 2">
-            <a:extLst>
-              <a:ext uri="{FF2B5EF4-FFF2-40B4-BE49-F238E27FC236}">
-                <a16:creationId xmlns:a16="http://schemas.microsoft.com/office/drawing/2014/main" id="{4A4BDA9A-4807-9063-214E-28E79A1055C0}"/>
-              </a:ext>
-            </a:extLst>
-          </p:cNvPr>
-          <p:cNvSpPr>
-            <a:spLocks noGrp="1"/>
-          </p:cNvSpPr>
-          <p:nvPr>
-            <p:ph type="title"/>
-          </p:nvPr>
-        </p:nvSpPr>
-        <p:spPr/>
-        <p:txBody>
-          <a:bodyPr>
-            <a:normAutofit fontScale="90000"/>
-          </a:bodyPr>
-          <a:lstStyle/>
-          <a:p>
-            <a:r>
-              <a:rPr kumimoji="1" lang="ja-JP" altLang="en-US" dirty="0"/>
-              <a:t>枠組み: 判断（Judgment）と演算（Reckoning）</a:t>
-            </a:r>
-          </a:p>
-        </p:txBody>
-      </p:sp>
-      <p:pic>
-        <p:nvPicPr>
-          <p:cNvPr id="7" name="図 6">
-            <a:extLst>
-              <a:ext uri="{FF2B5EF4-FFF2-40B4-BE49-F238E27FC236}">
-                <a16:creationId xmlns:a16="http://schemas.microsoft.com/office/drawing/2014/main" id="{4A22153F-3E1F-BA1D-0DF0-6F902F1C1553}"/>
-              </a:ext>
-            </a:extLst>
-          </p:cNvPr>
-          <p:cNvPicPr>
-            <a:picLocks noChangeAspect="1"/>
-          </p:cNvPicPr>
-          <p:nvPr/>
-        </p:nvPicPr>
-        <p:blipFill>
-          <a:blip r:embed="rId3">
-            <a:extLst>
-              <a:ext uri="{28A0092B-C50C-407E-A947-70E740481C1C}">
-                <a14:useLocalDpi xmlns:a14="http://schemas.microsoft.com/office/drawing/2010/main" val="0"/>
-              </a:ext>
-            </a:extLst>
-          </a:blip>
-          <a:stretch>
-            <a:fillRect/>
-          </a:stretch>
-        </p:blipFill>
-        <p:spPr>
-          <a:xfrm>
-            <a:off x="7293260" y="3609020"/>
-            <a:ext cx="2324708" cy="2905885"/>
-          </a:xfrm>
-          <a:prstGeom prst="rect">
-            <a:avLst/>
-          </a:prstGeom>
-        </p:spPr>
-      </p:pic>
-    </p:spTree>
-    <p:extLst>
-      <p:ext uri="{BB962C8B-B14F-4D97-AF65-F5344CB8AC3E}">
-        <p14:creationId xmlns:p14="http://schemas.microsoft.com/office/powerpoint/2010/main" val="594510954"/>
-      </p:ext>
-    </p:extLst>
-  </p:cSld>
-  <p:clrMapOvr>
-    <a:masterClrMapping/>
-  </p:clrMapOvr>
-</p:sld>
-</file>
-
-<file path=ppt/slides/slide36.xml><?xml version="1.0" encoding="utf-8"?>
-<p:sld xmlns:a="http://schemas.openxmlformats.org/drawingml/2006/main" xmlns:r="http://schemas.openxmlformats.org/officeDocument/2006/relationships" xmlns:p="http://schemas.openxmlformats.org/presentationml/2006/main">
-  <p:cSld>
-    <p:spTree>
-      <p:nvGrpSpPr>
-        <p:cNvPr id="1" name=""/>
-        <p:cNvGrpSpPr/>
-        <p:nvPr/>
-      </p:nvGrpSpPr>
-      <p:grpSpPr>
-        <a:xfrm>
-          <a:off x="0" y="0"/>
-          <a:ext cx="0" cy="0"/>
-          <a:chOff x="0" y="0"/>
-          <a:chExt cx="0" cy="0"/>
-        </a:xfrm>
-      </p:grpSpPr>
-      <p:sp>
-        <p:nvSpPr>
-          <p:cNvPr id="2" name="コンテンツ プレースホルダー 1"/>
-          <p:cNvSpPr>
-            <a:spLocks noGrp="1"/>
-          </p:cNvSpPr>
-          <p:nvPr>
-            <p:ph idx="1"/>
-          </p:nvPr>
-        </p:nvSpPr>
-        <p:spPr/>
-        <p:txBody>
-          <a:bodyPr>
-            <a:normAutofit/>
-          </a:bodyPr>
-          <a:lstStyle/>
-          <a:p>
-            <a:r>
-              <a:rPr kumimoji="1" lang="ja-JP" altLang="en-US" sz="1800" b="1" dirty="0"/>
-              <a:t>事例1: ドキュメントパイプライン</a:t>
-            </a:r>
-          </a:p>
-          <a:p>
-            <a:pPr lvl="1"/>
-            <a:r>
-              <a:rPr lang="ja-JP" altLang="en-US" sz="1800" dirty="0"/>
-              <a:t>🧑‍💻</a:t>
-            </a:r>
-            <a:r>
-              <a:rPr kumimoji="1" lang="ja-JP" altLang="en-US" sz="1800" dirty="0"/>
-              <a:t>「</a:t>
-            </a:r>
-            <a:r>
-              <a:rPr lang="ja-JP" altLang="en-US" sz="1800" dirty="0"/>
-              <a:t>作業の進め方」「成果物の作り方」</a:t>
-            </a:r>
-            <a:r>
-              <a:rPr kumimoji="1" lang="ja-JP" altLang="en-US" sz="1800" dirty="0"/>
-              <a:t>を設計した</a:t>
-            </a:r>
-            <a:endParaRPr kumimoji="1" lang="en-US" altLang="ja-JP" sz="1800" dirty="0"/>
-          </a:p>
-          <a:p>
-            <a:pPr lvl="2"/>
-            <a:r>
-              <a:rPr lang="en-US" altLang="ja-JP" sz="1800" dirty="0"/>
-              <a:t>AI</a:t>
-            </a:r>
-            <a:r>
-              <a:rPr lang="ja-JP" altLang="en-US" sz="1800" dirty="0"/>
-              <a:t>🤖は設計に基づいてツール🛠️を作成した</a:t>
-            </a:r>
-            <a:endParaRPr kumimoji="1" lang="en-US" altLang="ja-JP" sz="1800" dirty="0"/>
-          </a:p>
-          <a:p>
-            <a:r>
-              <a:rPr kumimoji="1" lang="ja-JP" altLang="en-US" sz="1800" b="1" dirty="0"/>
-              <a:t>事例2: AIレビューワークフロー</a:t>
-            </a:r>
-          </a:p>
-          <a:p>
-            <a:pPr lvl="1"/>
-            <a:r>
-              <a:rPr lang="ja-JP" altLang="en-US" sz="1600" dirty="0"/>
-              <a:t>🧑‍💻</a:t>
-            </a:r>
-            <a:r>
-              <a:rPr kumimoji="1" lang="ja-JP" altLang="en-US" sz="1600" dirty="0"/>
-              <a:t>「人間・</a:t>
-            </a:r>
-            <a:r>
-              <a:rPr kumimoji="1" lang="en-US" altLang="ja-JP" sz="1600" dirty="0"/>
-              <a:t>AI</a:t>
-            </a:r>
-            <a:r>
-              <a:rPr kumimoji="1" lang="ja-JP" altLang="en-US" sz="1600" dirty="0"/>
-              <a:t>・ツールの役割分担」「判断力を持続可能にする仕組み」を設計した</a:t>
-            </a:r>
-            <a:endParaRPr kumimoji="1" lang="en-US" altLang="ja-JP" sz="1600" dirty="0"/>
-          </a:p>
-          <a:p>
-            <a:pPr lvl="2"/>
-            <a:r>
-              <a:rPr lang="ja-JP" altLang="en-US" sz="1600" dirty="0"/>
-              <a:t>人間が判断するべき領域🧑‍💻</a:t>
-            </a:r>
-            <a:endParaRPr lang="en-US" altLang="ja-JP" sz="1600" dirty="0"/>
-          </a:p>
-          <a:p>
-            <a:pPr lvl="2"/>
-            <a:r>
-              <a:rPr lang="en-US" altLang="ja-JP" sz="1600" dirty="0"/>
-              <a:t>AI</a:t>
-            </a:r>
-            <a:r>
-              <a:rPr lang="ja-JP" altLang="en-US" sz="1600" dirty="0"/>
-              <a:t>がスケールさせる領域🤖</a:t>
-            </a:r>
-            <a:endParaRPr lang="en-US" altLang="ja-JP" sz="1600" dirty="0"/>
-          </a:p>
-          <a:p>
-            <a:pPr lvl="2"/>
-            <a:r>
-              <a:rPr lang="ja-JP" altLang="en-US" sz="1600" dirty="0"/>
-              <a:t>必要な決定論的作業🛠️</a:t>
-            </a:r>
-            <a:endParaRPr kumimoji="1" lang="en-US" altLang="ja-JP" sz="2000" b="1" dirty="0"/>
-          </a:p>
-          <a:p>
-            <a:r>
-              <a:rPr kumimoji="1" lang="ja-JP" altLang="en-US" sz="2000" b="1" dirty="0"/>
-              <a:t>共通パターン:</a:t>
-            </a:r>
-          </a:p>
-          <a:p>
-            <a:pPr lvl="1"/>
-            <a:r>
-              <a:rPr kumimoji="1" lang="ja-JP" altLang="en-US" sz="2000" dirty="0"/>
-              <a:t>人間</a:t>
-            </a:r>
-            <a:r>
-              <a:rPr lang="ja-JP" altLang="en-US" sz="2000" dirty="0"/>
-              <a:t>🧑‍💻</a:t>
-            </a:r>
-            <a:r>
-              <a:rPr kumimoji="1" lang="ja-JP" altLang="en-US" sz="2000" dirty="0"/>
-              <a:t>が判断（</a:t>
-            </a:r>
-            <a:r>
-              <a:rPr kumimoji="1" lang="en-US" altLang="ja-JP" sz="2000" dirty="0"/>
-              <a:t>Judgement</a:t>
-            </a:r>
-            <a:r>
-              <a:rPr kumimoji="1" lang="ja-JP" altLang="en-US" sz="2000" dirty="0"/>
-              <a:t>）の枠組みを作り</a:t>
-            </a:r>
-            <a:endParaRPr kumimoji="1" lang="en-US" altLang="ja-JP" sz="2000" dirty="0"/>
-          </a:p>
-          <a:p>
-            <a:pPr lvl="1"/>
-            <a:r>
-              <a:rPr kumimoji="1" lang="ja-JP" altLang="en-US" sz="2000" dirty="0"/>
-              <a:t>AI</a:t>
-            </a:r>
-            <a:r>
-              <a:rPr lang="ja-JP" altLang="en-US" sz="2000" dirty="0"/>
-              <a:t>🤖</a:t>
-            </a:r>
-            <a:r>
-              <a:rPr kumimoji="1" lang="ja-JP" altLang="en-US" sz="2000" dirty="0"/>
-              <a:t>が演算（</a:t>
-            </a:r>
-            <a:r>
-              <a:rPr kumimoji="1" lang="en-US" altLang="ja-JP" sz="2000" dirty="0"/>
-              <a:t>Reckoning</a:t>
-            </a:r>
-            <a:r>
-              <a:rPr kumimoji="1" lang="ja-JP" altLang="en-US" sz="2000" dirty="0"/>
-              <a:t>）を担う</a:t>
-            </a:r>
-          </a:p>
-        </p:txBody>
-      </p:sp>
-      <p:sp>
-        <p:nvSpPr>
-          <p:cNvPr id="3" name="タイトル 2"/>
-          <p:cNvSpPr>
-            <a:spLocks noGrp="1"/>
-          </p:cNvSpPr>
-          <p:nvPr>
-            <p:ph type="title"/>
-          </p:nvPr>
-        </p:nvSpPr>
-        <p:spPr/>
-        <p:txBody>
-          <a:bodyPr/>
-          <a:lstStyle/>
-          <a:p>
-            <a:r>
-              <a:rPr kumimoji="1" lang="ja-JP" altLang="en-US" dirty="0"/>
-              <a:t>今日話した2つの仕組み</a:t>
+              <a:t>人間が引き受けるべきこと</a:t>
             </a:r>
           </a:p>
         </p:txBody>
@@ -17588,7 +17396,7 @@
     </p:spTree>
     <p:extLst>
       <p:ext uri="{BB962C8B-B14F-4D97-AF65-F5344CB8AC3E}">
-        <p14:creationId xmlns:p14="http://schemas.microsoft.com/office/powerpoint/2010/main" val="1825818896"/>
+        <p14:creationId xmlns:p14="http://schemas.microsoft.com/office/powerpoint/2010/main" val="2211096304"/>
       </p:ext>
     </p:extLst>
   </p:cSld>

--- a/TechMeeting202604/techmeeting20260406.pptx
+++ b/TechMeeting202604/techmeeting20260406.pptx
@@ -5,10 +5,10 @@
     <p:sldMasterId id="2147483660" r:id="rId1"/>
   </p:sldMasterIdLst>
   <p:notesMasterIdLst>
-    <p:notesMasterId r:id="rId39"/>
+    <p:notesMasterId r:id="rId40"/>
   </p:notesMasterIdLst>
   <p:handoutMasterIdLst>
-    <p:handoutMasterId r:id="rId40"/>
+    <p:handoutMasterId r:id="rId41"/>
   </p:handoutMasterIdLst>
   <p:sldIdLst>
     <p:sldId id="318" r:id="rId2"/>
@@ -17,37 +17,38 @@
     <p:sldId id="321" r:id="rId5"/>
     <p:sldId id="364" r:id="rId6"/>
     <p:sldId id="356" r:id="rId7"/>
-    <p:sldId id="355" r:id="rId8"/>
-    <p:sldId id="340" r:id="rId9"/>
-    <p:sldId id="323" r:id="rId10"/>
-    <p:sldId id="326" r:id="rId11"/>
-    <p:sldId id="327" r:id="rId12"/>
-    <p:sldId id="360" r:id="rId13"/>
-    <p:sldId id="363" r:id="rId14"/>
-    <p:sldId id="373" r:id="rId15"/>
-    <p:sldId id="330" r:id="rId16"/>
-    <p:sldId id="366" r:id="rId17"/>
-    <p:sldId id="368" r:id="rId18"/>
-    <p:sldId id="367" r:id="rId19"/>
-    <p:sldId id="370" r:id="rId20"/>
-    <p:sldId id="371" r:id="rId21"/>
-    <p:sldId id="372" r:id="rId22"/>
-    <p:sldId id="348" r:id="rId23"/>
-    <p:sldId id="346" r:id="rId24"/>
-    <p:sldId id="344" r:id="rId25"/>
-    <p:sldId id="359" r:id="rId26"/>
-    <p:sldId id="349" r:id="rId27"/>
-    <p:sldId id="350" r:id="rId28"/>
-    <p:sldId id="332" r:id="rId29"/>
-    <p:sldId id="343" r:id="rId30"/>
-    <p:sldId id="342" r:id="rId31"/>
-    <p:sldId id="337" r:id="rId32"/>
-    <p:sldId id="334" r:id="rId33"/>
-    <p:sldId id="312" r:id="rId34"/>
-    <p:sldId id="339" r:id="rId35"/>
-    <p:sldId id="319" r:id="rId36"/>
-    <p:sldId id="374" r:id="rId37"/>
-    <p:sldId id="341" r:id="rId38"/>
+    <p:sldId id="375" r:id="rId8"/>
+    <p:sldId id="355" r:id="rId9"/>
+    <p:sldId id="340" r:id="rId10"/>
+    <p:sldId id="323" r:id="rId11"/>
+    <p:sldId id="326" r:id="rId12"/>
+    <p:sldId id="327" r:id="rId13"/>
+    <p:sldId id="360" r:id="rId14"/>
+    <p:sldId id="363" r:id="rId15"/>
+    <p:sldId id="373" r:id="rId16"/>
+    <p:sldId id="330" r:id="rId17"/>
+    <p:sldId id="366" r:id="rId18"/>
+    <p:sldId id="368" r:id="rId19"/>
+    <p:sldId id="367" r:id="rId20"/>
+    <p:sldId id="370" r:id="rId21"/>
+    <p:sldId id="371" r:id="rId22"/>
+    <p:sldId id="372" r:id="rId23"/>
+    <p:sldId id="348" r:id="rId24"/>
+    <p:sldId id="346" r:id="rId25"/>
+    <p:sldId id="344" r:id="rId26"/>
+    <p:sldId id="359" r:id="rId27"/>
+    <p:sldId id="349" r:id="rId28"/>
+    <p:sldId id="350" r:id="rId29"/>
+    <p:sldId id="332" r:id="rId30"/>
+    <p:sldId id="343" r:id="rId31"/>
+    <p:sldId id="342" r:id="rId32"/>
+    <p:sldId id="337" r:id="rId33"/>
+    <p:sldId id="334" r:id="rId34"/>
+    <p:sldId id="312" r:id="rId35"/>
+    <p:sldId id="339" r:id="rId36"/>
+    <p:sldId id="319" r:id="rId37"/>
+    <p:sldId id="374" r:id="rId38"/>
+    <p:sldId id="341" r:id="rId39"/>
   </p:sldIdLst>
   <p:sldSz cx="9906000" cy="6858000" type="A4"/>
   <p:notesSz cx="6735763" cy="9866313"/>
@@ -1356,7 +1357,7 @@
           <a:p>
             <a:fld id="{8104881A-4257-43F8-A557-80103A5A893D}" type="slidenum">
               <a:rPr kumimoji="1" lang="ja-JP" altLang="en-US" smtClean="0"/>
-              <a:t>14</a:t>
+              <a:t>15</a:t>
             </a:fld>
             <a:endParaRPr kumimoji="1" lang="ja-JP" altLang="en-US"/>
           </a:p>
@@ -1464,7 +1465,7 @@
           <a:p>
             <a:fld id="{8104881A-4257-43F8-A557-80103A5A893D}" type="slidenum">
               <a:rPr kumimoji="1" lang="ja-JP" altLang="en-US" smtClean="0"/>
-              <a:t>15</a:t>
+              <a:t>16</a:t>
             </a:fld>
             <a:endParaRPr kumimoji="1" lang="ja-JP" altLang="en-US"/>
           </a:p>
@@ -1572,7 +1573,7 @@
           <a:p>
             <a:fld id="{8104881A-4257-43F8-A557-80103A5A893D}" type="slidenum">
               <a:rPr kumimoji="1" lang="ja-JP" altLang="en-US" smtClean="0"/>
-              <a:t>16</a:t>
+              <a:t>17</a:t>
             </a:fld>
             <a:endParaRPr kumimoji="1" lang="ja-JP" altLang="en-US"/>
           </a:p>
@@ -1680,7 +1681,7 @@
           <a:p>
             <a:fld id="{8104881A-4257-43F8-A557-80103A5A893D}" type="slidenum">
               <a:rPr kumimoji="1" lang="ja-JP" altLang="en-US" smtClean="0"/>
-              <a:t>17</a:t>
+              <a:t>18</a:t>
             </a:fld>
             <a:endParaRPr kumimoji="1" lang="ja-JP" altLang="en-US"/>
           </a:p>
@@ -1764,7 +1765,7 @@
           <a:p>
             <a:fld id="{8104881A-4257-43F8-A557-80103A5A893D}" type="slidenum">
               <a:rPr kumimoji="1" lang="ja-JP" altLang="en-US" smtClean="0"/>
-              <a:t>21</a:t>
+              <a:t>22</a:t>
             </a:fld>
             <a:endParaRPr kumimoji="1" lang="ja-JP" altLang="en-US"/>
           </a:p>
@@ -4208,6 +4209,677 @@
       </p:grpSpPr>
       <p:sp>
         <p:nvSpPr>
+          <p:cNvPr id="3" name="タイトル 2"/>
+          <p:cNvSpPr>
+            <a:spLocks noGrp="1"/>
+          </p:cNvSpPr>
+          <p:nvPr>
+            <p:ph type="title"/>
+          </p:nvPr>
+        </p:nvSpPr>
+        <p:spPr/>
+        <p:txBody>
+          <a:bodyPr/>
+          <a:lstStyle/>
+          <a:p>
+            <a:r>
+              <a:rPr kumimoji="1" lang="ja-JP" altLang="en-US" dirty="0"/>
+              <a:t>何が良かったか？</a:t>
+            </a:r>
+          </a:p>
+        </p:txBody>
+      </p:sp>
+      <p:sp>
+        <p:nvSpPr>
+          <p:cNvPr id="7" name="テキスト ボックス 6">
+            <a:extLst>
+              <a:ext uri="{FF2B5EF4-FFF2-40B4-BE49-F238E27FC236}">
+                <a16:creationId xmlns:a16="http://schemas.microsoft.com/office/drawing/2014/main" id="{22685930-C837-0D54-8400-06198893FC92}"/>
+              </a:ext>
+            </a:extLst>
+          </p:cNvPr>
+          <p:cNvSpPr txBox="1"/>
+          <p:nvPr/>
+        </p:nvSpPr>
+        <p:spPr>
+          <a:xfrm>
+            <a:off x="581142" y="1353809"/>
+            <a:ext cx="8619082" cy="3847207"/>
+          </a:xfrm>
+          <a:prstGeom prst="rect">
+            <a:avLst/>
+          </a:prstGeom>
+          <a:noFill/>
+        </p:spPr>
+        <p:txBody>
+          <a:bodyPr wrap="square">
+            <a:spAutoFit/>
+          </a:bodyPr>
+          <a:lstStyle/>
+          <a:p>
+            <a:endParaRPr lang="ja-JP" altLang="en-US" sz="2400" b="1" dirty="0"/>
+          </a:p>
+          <a:p>
+            <a:pPr marL="742950" lvl="1" indent="-285750">
+              <a:buFont typeface="Arial" panose="020B0604020202020204" pitchFamily="34" charset="0"/>
+              <a:buChar char="•"/>
+            </a:pPr>
+            <a:r>
+              <a:rPr lang="ja-JP" altLang="en-US" sz="2000" dirty="0"/>
+              <a:t>仕様</a:t>
+            </a:r>
+            <a:r>
+              <a:rPr lang="ja-JP" altLang="en-US" sz="2000" b="1" dirty="0"/>
+              <a:t>ドキュメントを Git 管理</a:t>
+            </a:r>
+            <a:endParaRPr lang="en-US" altLang="ja-JP" sz="2000" b="1" dirty="0"/>
+          </a:p>
+          <a:p>
+            <a:pPr marL="742950" lvl="1" indent="-285750">
+              <a:buFont typeface="Arial" panose="020B0604020202020204" pitchFamily="34" charset="0"/>
+              <a:buChar char="•"/>
+            </a:pPr>
+            <a:endParaRPr lang="en-US" altLang="ja-JP" sz="2000" dirty="0"/>
+          </a:p>
+          <a:p>
+            <a:pPr marL="742950" lvl="1" indent="-285750">
+              <a:buFont typeface="Arial" panose="020B0604020202020204" pitchFamily="34" charset="0"/>
+              <a:buChar char="•"/>
+            </a:pPr>
+            <a:endParaRPr lang="en-US" altLang="ja-JP" sz="2000" dirty="0"/>
+          </a:p>
+          <a:p>
+            <a:pPr marL="742950" lvl="1" indent="-285750">
+              <a:buFont typeface="Arial" panose="020B0604020202020204" pitchFamily="34" charset="0"/>
+              <a:buChar char="•"/>
+            </a:pPr>
+            <a:r>
+              <a:rPr lang="ja-JP" altLang="en-US" sz="2000" dirty="0"/>
+              <a:t>移行作業はほぼ一瞬</a:t>
+            </a:r>
+          </a:p>
+          <a:p>
+            <a:pPr marL="742950" lvl="1" indent="-285750">
+              <a:buFont typeface="Arial" panose="020B0604020202020204" pitchFamily="34" charset="0"/>
+              <a:buChar char="•"/>
+            </a:pPr>
+            <a:endParaRPr lang="en-US" altLang="ja-JP" sz="2000" b="1" dirty="0"/>
+          </a:p>
+          <a:p>
+            <a:pPr marL="742950" lvl="1" indent="-285750">
+              <a:buFont typeface="Arial" panose="020B0604020202020204" pitchFamily="34" charset="0"/>
+              <a:buChar char="•"/>
+            </a:pPr>
+            <a:endParaRPr lang="en-US" altLang="ja-JP" sz="2000" b="1" dirty="0"/>
+          </a:p>
+          <a:p>
+            <a:pPr marL="742950" lvl="1" indent="-285750">
+              <a:buFont typeface="Arial" panose="020B0604020202020204" pitchFamily="34" charset="0"/>
+              <a:buChar char="•"/>
+            </a:pPr>
+            <a:r>
+              <a:rPr lang="ja-JP" altLang="en-US" sz="2000" b="1" dirty="0"/>
+              <a:t>仕様をコードから AI で生成 </a:t>
+            </a:r>
+            <a:endParaRPr lang="en-US" altLang="ja-JP" sz="2000" b="1" dirty="0"/>
+          </a:p>
+          <a:p>
+            <a:pPr marL="1200150" lvl="2" indent="-285750">
+              <a:buFont typeface="Arial" panose="020B0604020202020204" pitchFamily="34" charset="0"/>
+              <a:buChar char="•"/>
+            </a:pPr>
+            <a:r>
+              <a:rPr lang="ja-JP" altLang="en-US" sz="2000" b="1" dirty="0"/>
+              <a:t>→ 過程でバグも発見</a:t>
+            </a:r>
+            <a:endParaRPr lang="en-US" altLang="ja-JP" sz="2000" b="1" dirty="0"/>
+          </a:p>
+          <a:p>
+            <a:pPr marL="742950" lvl="1" indent="-285750">
+              <a:buFont typeface="Arial" panose="020B0604020202020204" pitchFamily="34" charset="0"/>
+              <a:buChar char="•"/>
+            </a:pPr>
+            <a:endParaRPr lang="en-US" altLang="ja-JP" sz="2000" dirty="0"/>
+          </a:p>
+          <a:p>
+            <a:pPr marL="742950" lvl="1" indent="-285750">
+              <a:buFont typeface="Arial" panose="020B0604020202020204" pitchFamily="34" charset="0"/>
+              <a:buChar char="•"/>
+            </a:pPr>
+            <a:endParaRPr lang="ja-JP" altLang="en-US" sz="2000" dirty="0"/>
+          </a:p>
+          <a:p>
+            <a:pPr marL="742950" lvl="1" indent="-285750">
+              <a:buFont typeface="Arial" panose="020B0604020202020204" pitchFamily="34" charset="0"/>
+              <a:buChar char="•"/>
+            </a:pPr>
+            <a:r>
+              <a:rPr lang="ja-JP" altLang="en-US" sz="2000" dirty="0"/>
+              <a:t>コミット履歴で貢献が見える</a:t>
+            </a:r>
+            <a:endParaRPr lang="en-US" altLang="ja-JP" sz="2000" dirty="0"/>
+          </a:p>
+        </p:txBody>
+      </p:sp>
+      <p:sp>
+        <p:nvSpPr>
+          <p:cNvPr id="8" name="吹き出し: 四角形 7">
+            <a:extLst>
+              <a:ext uri="{FF2B5EF4-FFF2-40B4-BE49-F238E27FC236}">
+                <a16:creationId xmlns:a16="http://schemas.microsoft.com/office/drawing/2014/main" id="{8957AAA6-B194-7F8F-8665-2C8B4FF4A582}"/>
+              </a:ext>
+            </a:extLst>
+          </p:cNvPr>
+          <p:cNvSpPr/>
+          <p:nvPr/>
+        </p:nvSpPr>
+        <p:spPr>
+          <a:xfrm>
+            <a:off x="3799187" y="2932045"/>
+            <a:ext cx="4178149" cy="525207"/>
+          </a:xfrm>
+          <a:prstGeom prst="wedgeRectCallout">
+            <a:avLst>
+              <a:gd name="adj1" fmla="val -43886"/>
+              <a:gd name="adj2" fmla="val -74072"/>
+            </a:avLst>
+          </a:prstGeom>
+          <a:solidFill>
+            <a:schemeClr val="accent6">
+              <a:lumMod val="75000"/>
+              <a:alpha val="50000"/>
+            </a:schemeClr>
+          </a:solidFill>
+          <a:ln>
+            <a:noFill/>
+          </a:ln>
+        </p:spPr>
+        <p:style>
+          <a:lnRef idx="0">
+            <a:scrgbClr r="0" g="0" b="0"/>
+          </a:lnRef>
+          <a:fillRef idx="0">
+            <a:scrgbClr r="0" g="0" b="0"/>
+          </a:fillRef>
+          <a:effectRef idx="0">
+            <a:scrgbClr r="0" g="0" b="0"/>
+          </a:effectRef>
+          <a:fontRef idx="minor">
+            <a:schemeClr val="lt1"/>
+          </a:fontRef>
+        </p:style>
+        <p:txBody>
+          <a:bodyPr rtlCol="0" anchor="ctr"/>
+          <a:lstStyle/>
+          <a:p>
+            <a:pPr algn="ctr"/>
+            <a:r>
+              <a:rPr lang="ja-JP" altLang="en-US" dirty="0"/>
+              <a:t>193 ファイルの移行が一瞬で完了</a:t>
+            </a:r>
+            <a:endParaRPr kumimoji="1" lang="ja-JP" altLang="en-US" dirty="0"/>
+          </a:p>
+        </p:txBody>
+      </p:sp>
+      <p:sp>
+        <p:nvSpPr>
+          <p:cNvPr id="9" name="吹き出し: 四角形 8">
+            <a:extLst>
+              <a:ext uri="{FF2B5EF4-FFF2-40B4-BE49-F238E27FC236}">
+                <a16:creationId xmlns:a16="http://schemas.microsoft.com/office/drawing/2014/main" id="{F760B43F-9B03-FBD1-5433-B2DB7E4C89A0}"/>
+              </a:ext>
+            </a:extLst>
+          </p:cNvPr>
+          <p:cNvSpPr/>
+          <p:nvPr/>
+        </p:nvSpPr>
+        <p:spPr>
+          <a:xfrm>
+            <a:off x="4890683" y="3925955"/>
+            <a:ext cx="3557541" cy="621138"/>
+          </a:xfrm>
+          <a:prstGeom prst="wedgeRectCallout">
+            <a:avLst>
+              <a:gd name="adj1" fmla="val -62716"/>
+              <a:gd name="adj2" fmla="val -25833"/>
+            </a:avLst>
+          </a:prstGeom>
+          <a:solidFill>
+            <a:schemeClr val="accent6">
+              <a:lumMod val="75000"/>
+              <a:alpha val="50000"/>
+            </a:schemeClr>
+          </a:solidFill>
+          <a:ln>
+            <a:noFill/>
+          </a:ln>
+        </p:spPr>
+        <p:style>
+          <a:lnRef idx="0">
+            <a:scrgbClr r="0" g="0" b="0"/>
+          </a:lnRef>
+          <a:fillRef idx="0">
+            <a:scrgbClr r="0" g="0" b="0"/>
+          </a:fillRef>
+          <a:effectRef idx="0">
+            <a:scrgbClr r="0" g="0" b="0"/>
+          </a:effectRef>
+          <a:fontRef idx="minor">
+            <a:schemeClr val="lt1"/>
+          </a:fontRef>
+        </p:style>
+        <p:txBody>
+          <a:bodyPr rtlCol="0" anchor="ctr"/>
+          <a:lstStyle/>
+          <a:p>
+            <a:pPr algn="ctr"/>
+            <a:r>
+              <a:rPr lang="ja-JP" altLang="en-US" dirty="0"/>
+              <a:t>S</a:t>
+            </a:r>
+            <a:r>
+              <a:rPr lang="en-US" altLang="ja-JP" dirty="0"/>
+              <a:t>ingle </a:t>
+            </a:r>
+            <a:r>
+              <a:rPr lang="ja-JP" altLang="en-US" dirty="0"/>
+              <a:t>S</a:t>
+            </a:r>
+            <a:r>
+              <a:rPr lang="en-US" altLang="ja-JP" dirty="0" err="1"/>
+              <a:t>ourse</a:t>
+            </a:r>
+            <a:r>
+              <a:rPr lang="en-US" altLang="ja-JP" dirty="0"/>
+              <a:t> </a:t>
+            </a:r>
+            <a:r>
+              <a:rPr lang="ja-JP" altLang="en-US" dirty="0"/>
+              <a:t>O</a:t>
+            </a:r>
+            <a:r>
+              <a:rPr lang="en-US" altLang="ja-JP" dirty="0"/>
+              <a:t>f </a:t>
+            </a:r>
+            <a:r>
+              <a:rPr lang="ja-JP" altLang="en-US" dirty="0"/>
+              <a:t>T</a:t>
+            </a:r>
+            <a:r>
+              <a:rPr lang="en-US" altLang="ja-JP" dirty="0" err="1"/>
+              <a:t>rueth</a:t>
+            </a:r>
+            <a:r>
+              <a:rPr lang="ja-JP" altLang="en-US" dirty="0"/>
+              <a:t> の恩恵</a:t>
+            </a:r>
+            <a:endParaRPr kumimoji="1" lang="ja-JP" altLang="en-US" dirty="0"/>
+          </a:p>
+        </p:txBody>
+      </p:sp>
+      <p:sp>
+        <p:nvSpPr>
+          <p:cNvPr id="10" name="吹き出し: 四角形 9">
+            <a:extLst>
+              <a:ext uri="{FF2B5EF4-FFF2-40B4-BE49-F238E27FC236}">
+                <a16:creationId xmlns:a16="http://schemas.microsoft.com/office/drawing/2014/main" id="{F834D801-626B-6896-86CD-78A50E36DCA8}"/>
+              </a:ext>
+            </a:extLst>
+          </p:cNvPr>
+          <p:cNvSpPr/>
+          <p:nvPr/>
+        </p:nvSpPr>
+        <p:spPr>
+          <a:xfrm>
+            <a:off x="3799187" y="5505267"/>
+            <a:ext cx="4649038" cy="494013"/>
+          </a:xfrm>
+          <a:prstGeom prst="wedgeRectCallout">
+            <a:avLst>
+              <a:gd name="adj1" fmla="val -37515"/>
+              <a:gd name="adj2" fmla="val -119721"/>
+            </a:avLst>
+          </a:prstGeom>
+          <a:solidFill>
+            <a:schemeClr val="accent6">
+              <a:lumMod val="75000"/>
+              <a:alpha val="50000"/>
+            </a:schemeClr>
+          </a:solidFill>
+          <a:ln>
+            <a:noFill/>
+          </a:ln>
+        </p:spPr>
+        <p:style>
+          <a:lnRef idx="0">
+            <a:scrgbClr r="0" g="0" b="0"/>
+          </a:lnRef>
+          <a:fillRef idx="0">
+            <a:scrgbClr r="0" g="0" b="0"/>
+          </a:fillRef>
+          <a:effectRef idx="0">
+            <a:scrgbClr r="0" g="0" b="0"/>
+          </a:effectRef>
+          <a:fontRef idx="minor">
+            <a:schemeClr val="lt1"/>
+          </a:fontRef>
+        </p:style>
+        <p:txBody>
+          <a:bodyPr rtlCol="0" anchor="ctr"/>
+          <a:lstStyle/>
+          <a:p>
+            <a:pPr algn="ctr"/>
+            <a:r>
+              <a:rPr lang="ja-JP" altLang="en-US" b="1" dirty="0"/>
+              <a:t>エンジニアの心得：小さなことに感謝する</a:t>
+            </a:r>
+            <a:endParaRPr kumimoji="1" lang="ja-JP" altLang="en-US" dirty="0"/>
+          </a:p>
+        </p:txBody>
+      </p:sp>
+      <p:sp>
+        <p:nvSpPr>
+          <p:cNvPr id="13" name="吹き出し: 四角形 12">
+            <a:extLst>
+              <a:ext uri="{FF2B5EF4-FFF2-40B4-BE49-F238E27FC236}">
+                <a16:creationId xmlns:a16="http://schemas.microsoft.com/office/drawing/2014/main" id="{2B72902B-5C0F-2045-CCF6-BC852865D506}"/>
+              </a:ext>
+            </a:extLst>
+          </p:cNvPr>
+          <p:cNvSpPr/>
+          <p:nvPr/>
+        </p:nvSpPr>
+        <p:spPr>
+          <a:xfrm>
+            <a:off x="4580378" y="2102587"/>
+            <a:ext cx="4178149" cy="525207"/>
+          </a:xfrm>
+          <a:prstGeom prst="wedgeRectCallout">
+            <a:avLst>
+              <a:gd name="adj1" fmla="val -43886"/>
+              <a:gd name="adj2" fmla="val -74072"/>
+            </a:avLst>
+          </a:prstGeom>
+          <a:solidFill>
+            <a:schemeClr val="accent6">
+              <a:lumMod val="75000"/>
+              <a:alpha val="50000"/>
+            </a:schemeClr>
+          </a:solidFill>
+          <a:ln>
+            <a:noFill/>
+          </a:ln>
+        </p:spPr>
+        <p:style>
+          <a:lnRef idx="0">
+            <a:scrgbClr r="0" g="0" b="0"/>
+          </a:lnRef>
+          <a:fillRef idx="0">
+            <a:scrgbClr r="0" g="0" b="0"/>
+          </a:fillRef>
+          <a:effectRef idx="0">
+            <a:scrgbClr r="0" g="0" b="0"/>
+          </a:effectRef>
+          <a:fontRef idx="minor">
+            <a:schemeClr val="lt1"/>
+          </a:fontRef>
+        </p:style>
+        <p:txBody>
+          <a:bodyPr rtlCol="0" anchor="ctr"/>
+          <a:lstStyle/>
+          <a:p>
+            <a:pPr algn="ctr"/>
+            <a:r>
+              <a:rPr lang="ja-JP" altLang="en-US" dirty="0"/>
+              <a:t>コード↔ドキュメントの連携が可能に</a:t>
+            </a:r>
+            <a:endParaRPr kumimoji="1" lang="ja-JP" altLang="en-US" dirty="0"/>
+          </a:p>
+        </p:txBody>
+      </p:sp>
+    </p:spTree>
+  </p:cSld>
+  <p:clrMapOvr>
+    <a:masterClrMapping/>
+  </p:clrMapOvr>
+  <p:timing>
+    <p:tnLst>
+      <p:par>
+        <p:cTn id="1" dur="indefinite" restart="never" nodeType="tmRoot">
+          <p:childTnLst>
+            <p:seq concurrent="1" nextAc="seek">
+              <p:cTn id="2" dur="indefinite" nodeType="mainSeq">
+                <p:childTnLst>
+                  <p:par>
+                    <p:cTn id="3" fill="hold">
+                      <p:stCondLst>
+                        <p:cond delay="indefinite"/>
+                      </p:stCondLst>
+                      <p:childTnLst>
+                        <p:par>
+                          <p:cTn id="4" fill="hold">
+                            <p:stCondLst>
+                              <p:cond delay="0"/>
+                            </p:stCondLst>
+                            <p:childTnLst>
+                              <p:par>
+                                <p:cTn id="5" presetID="1" presetClass="entr" presetSubtype="0" fill="hold" grpId="0" nodeType="clickEffect">
+                                  <p:stCondLst>
+                                    <p:cond delay="0"/>
+                                  </p:stCondLst>
+                                  <p:childTnLst>
+                                    <p:set>
+                                      <p:cBhvr>
+                                        <p:cTn id="6" dur="1" fill="hold">
+                                          <p:stCondLst>
+                                            <p:cond delay="0"/>
+                                          </p:stCondLst>
+                                        </p:cTn>
+                                        <p:tgtEl>
+                                          <p:spTgt spid="13"/>
+                                        </p:tgtEl>
+                                        <p:attrNameLst>
+                                          <p:attrName>style.visibility</p:attrName>
+                                        </p:attrNameLst>
+                                      </p:cBhvr>
+                                      <p:to>
+                                        <p:strVal val="visible"/>
+                                      </p:to>
+                                    </p:set>
+                                  </p:childTnLst>
+                                </p:cTn>
+                              </p:par>
+                            </p:childTnLst>
+                          </p:cTn>
+                        </p:par>
+                      </p:childTnLst>
+                    </p:cTn>
+                  </p:par>
+                  <p:par>
+                    <p:cTn id="7" fill="hold">
+                      <p:stCondLst>
+                        <p:cond delay="indefinite"/>
+                      </p:stCondLst>
+                      <p:childTnLst>
+                        <p:par>
+                          <p:cTn id="8" fill="hold">
+                            <p:stCondLst>
+                              <p:cond delay="0"/>
+                            </p:stCondLst>
+                            <p:childTnLst>
+                              <p:par>
+                                <p:cTn id="9" presetID="1" presetClass="entr" presetSubtype="0" fill="hold" grpId="0" nodeType="clickEffect">
+                                  <p:stCondLst>
+                                    <p:cond delay="0"/>
+                                  </p:stCondLst>
+                                  <p:childTnLst>
+                                    <p:set>
+                                      <p:cBhvr>
+                                        <p:cTn id="10" dur="1" fill="hold">
+                                          <p:stCondLst>
+                                            <p:cond delay="0"/>
+                                          </p:stCondLst>
+                                        </p:cTn>
+                                        <p:tgtEl>
+                                          <p:spTgt spid="8"/>
+                                        </p:tgtEl>
+                                        <p:attrNameLst>
+                                          <p:attrName>style.visibility</p:attrName>
+                                        </p:attrNameLst>
+                                      </p:cBhvr>
+                                      <p:to>
+                                        <p:strVal val="visible"/>
+                                      </p:to>
+                                    </p:set>
+                                  </p:childTnLst>
+                                </p:cTn>
+                              </p:par>
+                            </p:childTnLst>
+                          </p:cTn>
+                        </p:par>
+                      </p:childTnLst>
+                    </p:cTn>
+                  </p:par>
+                  <p:par>
+                    <p:cTn id="11" fill="hold">
+                      <p:stCondLst>
+                        <p:cond delay="indefinite"/>
+                      </p:stCondLst>
+                      <p:childTnLst>
+                        <p:par>
+                          <p:cTn id="12" fill="hold">
+                            <p:stCondLst>
+                              <p:cond delay="0"/>
+                            </p:stCondLst>
+                            <p:childTnLst>
+                              <p:par>
+                                <p:cTn id="13" presetID="1" presetClass="entr" presetSubtype="0" fill="hold" grpId="0" nodeType="clickEffect">
+                                  <p:stCondLst>
+                                    <p:cond delay="0"/>
+                                  </p:stCondLst>
+                                  <p:childTnLst>
+                                    <p:set>
+                                      <p:cBhvr>
+                                        <p:cTn id="14" dur="1" fill="hold">
+                                          <p:stCondLst>
+                                            <p:cond delay="0"/>
+                                          </p:stCondLst>
+                                        </p:cTn>
+                                        <p:tgtEl>
+                                          <p:spTgt spid="9"/>
+                                        </p:tgtEl>
+                                        <p:attrNameLst>
+                                          <p:attrName>style.visibility</p:attrName>
+                                        </p:attrNameLst>
+                                      </p:cBhvr>
+                                      <p:to>
+                                        <p:strVal val="visible"/>
+                                      </p:to>
+                                    </p:set>
+                                  </p:childTnLst>
+                                </p:cTn>
+                              </p:par>
+                            </p:childTnLst>
+                          </p:cTn>
+                        </p:par>
+                      </p:childTnLst>
+                    </p:cTn>
+                  </p:par>
+                  <p:par>
+                    <p:cTn id="15" fill="hold">
+                      <p:stCondLst>
+                        <p:cond delay="indefinite"/>
+                      </p:stCondLst>
+                      <p:childTnLst>
+                        <p:par>
+                          <p:cTn id="16" fill="hold">
+                            <p:stCondLst>
+                              <p:cond delay="0"/>
+                            </p:stCondLst>
+                            <p:childTnLst>
+                              <p:par>
+                                <p:cTn id="17" presetID="1" presetClass="entr" presetSubtype="0" fill="hold" grpId="0" nodeType="clickEffect">
+                                  <p:stCondLst>
+                                    <p:cond delay="0"/>
+                                  </p:stCondLst>
+                                  <p:childTnLst>
+                                    <p:set>
+                                      <p:cBhvr>
+                                        <p:cTn id="18" dur="1" fill="hold">
+                                          <p:stCondLst>
+                                            <p:cond delay="0"/>
+                                          </p:stCondLst>
+                                        </p:cTn>
+                                        <p:tgtEl>
+                                          <p:spTgt spid="10"/>
+                                        </p:tgtEl>
+                                        <p:attrNameLst>
+                                          <p:attrName>style.visibility</p:attrName>
+                                        </p:attrNameLst>
+                                      </p:cBhvr>
+                                      <p:to>
+                                        <p:strVal val="visible"/>
+                                      </p:to>
+                                    </p:set>
+                                  </p:childTnLst>
+                                </p:cTn>
+                              </p:par>
+                            </p:childTnLst>
+                          </p:cTn>
+                        </p:par>
+                      </p:childTnLst>
+                    </p:cTn>
+                  </p:par>
+                </p:childTnLst>
+              </p:cTn>
+              <p:prevCondLst>
+                <p:cond evt="onPrev" delay="0">
+                  <p:tgtEl>
+                    <p:sldTgt/>
+                  </p:tgtEl>
+                </p:cond>
+              </p:prevCondLst>
+              <p:nextCondLst>
+                <p:cond evt="onNext" delay="0">
+                  <p:tgtEl>
+                    <p:sldTgt/>
+                  </p:tgtEl>
+                </p:cond>
+              </p:nextCondLst>
+            </p:seq>
+          </p:childTnLst>
+        </p:cTn>
+      </p:par>
+    </p:tnLst>
+    <p:bldLst>
+      <p:bldP spid="8" grpId="0" animBg="1"/>
+      <p:bldP spid="9" grpId="0" animBg="1"/>
+      <p:bldP spid="10" grpId="0" animBg="1"/>
+      <p:bldP spid="13" grpId="0" animBg="1"/>
+    </p:bldLst>
+  </p:timing>
+</p:sld>
+</file>
+
+<file path=ppt/slides/slide11.xml><?xml version="1.0" encoding="utf-8"?>
+<p:sld xmlns:a="http://schemas.openxmlformats.org/drawingml/2006/main" xmlns:r="http://schemas.openxmlformats.org/officeDocument/2006/relationships" xmlns:p="http://schemas.openxmlformats.org/presentationml/2006/main">
+  <p:cSld>
+    <p:spTree>
+      <p:nvGrpSpPr>
+        <p:cNvPr id="1" name=""/>
+        <p:cNvGrpSpPr/>
+        <p:nvPr/>
+      </p:nvGrpSpPr>
+      <p:grpSpPr>
+        <a:xfrm>
+          <a:off x="0" y="0"/>
+          <a:ext cx="0" cy="0"/>
+          <a:chOff x="0" y="0"/>
+          <a:chExt cx="0" cy="0"/>
+        </a:xfrm>
+      </p:grpSpPr>
+      <p:sp>
+        <p:nvSpPr>
           <p:cNvPr id="2" name="コンテンツ プレースホルダー 1"/>
           <p:cNvSpPr>
             <a:spLocks noGrp="1"/>
@@ -5078,7 +5750,7 @@
 </p:sld>
 </file>
 
-<file path=ppt/slides/slide11.xml><?xml version="1.0" encoding="utf-8"?>
+<file path=ppt/slides/slide12.xml><?xml version="1.0" encoding="utf-8"?>
 <p:sld xmlns:a="http://schemas.openxmlformats.org/drawingml/2006/main" xmlns:r="http://schemas.openxmlformats.org/officeDocument/2006/relationships" xmlns:p="http://schemas.openxmlformats.org/presentationml/2006/main">
   <p:cSld>
     <p:spTree>
@@ -5156,7 +5828,7 @@
 </p:sld>
 </file>
 
-<file path=ppt/slides/slide12.xml><?xml version="1.0" encoding="utf-8"?>
+<file path=ppt/slides/slide13.xml><?xml version="1.0" encoding="utf-8"?>
 <p:sld xmlns:a="http://schemas.openxmlformats.org/drawingml/2006/main" xmlns:r="http://schemas.openxmlformats.org/officeDocument/2006/relationships" xmlns:p="http://schemas.openxmlformats.org/presentationml/2006/main">
   <p:cSld>
     <p:spTree>
@@ -6145,7 +6817,7 @@
 </p:sld>
 </file>
 
-<file path=ppt/slides/slide13.xml><?xml version="1.0" encoding="utf-8"?>
+<file path=ppt/slides/slide14.xml><?xml version="1.0" encoding="utf-8"?>
 <p:sld xmlns:a="http://schemas.openxmlformats.org/drawingml/2006/main" xmlns:r="http://schemas.openxmlformats.org/officeDocument/2006/relationships" xmlns:p="http://schemas.openxmlformats.org/presentationml/2006/main">
   <p:cSld>
     <p:spTree>
@@ -7146,7 +7818,7 @@
 </p:sld>
 </file>
 
-<file path=ppt/slides/slide14.xml><?xml version="1.0" encoding="utf-8"?>
+<file path=ppt/slides/slide15.xml><?xml version="1.0" encoding="utf-8"?>
 <p:sld xmlns:a="http://schemas.openxmlformats.org/drawingml/2006/main" xmlns:r="http://schemas.openxmlformats.org/officeDocument/2006/relationships" xmlns:p="http://schemas.openxmlformats.org/presentationml/2006/main">
   <p:cSld>
     <p:spTree>
@@ -7225,7 +7897,7 @@
             <a:fld id="{C314D315-6C69-40BF-98D6-60239DAB9584}" type="slidenum">
               <a:rPr lang="ja-JP" altLang="en-US" smtClean="0"/>
               <a:pPr/>
-              <a:t>13</a:t>
+              <a:t>14</a:t>
             </a:fld>
             <a:r>
               <a:rPr lang="ja-JP" altLang="en-US"/>
@@ -7318,7 +7990,7 @@
 </p:sld>
 </file>
 
-<file path=ppt/slides/slide15.xml><?xml version="1.0" encoding="utf-8"?>
+<file path=ppt/slides/slide16.xml><?xml version="1.0" encoding="utf-8"?>
 <p:sld xmlns:a="http://schemas.openxmlformats.org/drawingml/2006/main" xmlns:r="http://schemas.openxmlformats.org/officeDocument/2006/relationships" xmlns:p="http://schemas.openxmlformats.org/presentationml/2006/main">
   <p:cSld>
     <p:spTree>
@@ -8249,7 +8921,7 @@
 </p:sld>
 </file>
 
-<file path=ppt/slides/slide16.xml><?xml version="1.0" encoding="utf-8"?>
+<file path=ppt/slides/slide17.xml><?xml version="1.0" encoding="utf-8"?>
 <p:sld xmlns:a="http://schemas.openxmlformats.org/drawingml/2006/main" xmlns:r="http://schemas.openxmlformats.org/officeDocument/2006/relationships" xmlns:p="http://schemas.openxmlformats.org/presentationml/2006/main">
   <p:cSld>
     <p:spTree>
@@ -8726,7 +9398,7 @@
 </p:sld>
 </file>
 
-<file path=ppt/slides/slide17.xml><?xml version="1.0" encoding="utf-8"?>
+<file path=ppt/slides/slide18.xml><?xml version="1.0" encoding="utf-8"?>
 <p:sld xmlns:a="http://schemas.openxmlformats.org/drawingml/2006/main" xmlns:r="http://schemas.openxmlformats.org/officeDocument/2006/relationships" xmlns:p="http://schemas.openxmlformats.org/presentationml/2006/main">
   <p:cSld>
     <p:spTree>
@@ -8897,7 +9569,7 @@
 </p:sld>
 </file>
 
-<file path=ppt/slides/slide18.xml><?xml version="1.0" encoding="utf-8"?>
+<file path=ppt/slides/slide19.xml><?xml version="1.0" encoding="utf-8"?>
 <p:sld xmlns:a="http://schemas.openxmlformats.org/drawingml/2006/main" xmlns:r="http://schemas.openxmlformats.org/officeDocument/2006/relationships" xmlns:p="http://schemas.openxmlformats.org/presentationml/2006/main">
   <p:cSld>
     <p:spTree>
@@ -9156,7 +9828,130 @@
 </p:sld>
 </file>
 
-<file path=ppt/slides/slide19.xml><?xml version="1.0" encoding="utf-8"?>
+<file path=ppt/slides/slide2.xml><?xml version="1.0" encoding="utf-8"?>
+<p:sld xmlns:a="http://schemas.openxmlformats.org/drawingml/2006/main" xmlns:r="http://schemas.openxmlformats.org/officeDocument/2006/relationships" xmlns:p="http://schemas.openxmlformats.org/presentationml/2006/main">
+  <p:cSld>
+    <p:spTree>
+      <p:nvGrpSpPr>
+        <p:cNvPr id="1" name=""/>
+        <p:cNvGrpSpPr/>
+        <p:nvPr/>
+      </p:nvGrpSpPr>
+      <p:grpSpPr>
+        <a:xfrm>
+          <a:off x="0" y="0"/>
+          <a:ext cx="0" cy="0"/>
+          <a:chOff x="0" y="0"/>
+          <a:chExt cx="0" cy="0"/>
+        </a:xfrm>
+      </p:grpSpPr>
+      <p:sp>
+        <p:nvSpPr>
+          <p:cNvPr id="2" name="コンテンツ 1"/>
+          <p:cNvSpPr txBox="1">
+            <a:spLocks/>
+          </p:cNvSpPr>
+          <p:nvPr/>
+        </p:nvSpPr>
+        <p:spPr>
+          <a:xfrm>
+            <a:off x="697186" y="1000000"/>
+            <a:ext cx="8496300" cy="4800000"/>
+          </a:xfrm>
+          <a:prstGeom prst="rect">
+            <a:avLst/>
+          </a:prstGeom>
+        </p:spPr>
+        <p:txBody>
+          <a:bodyPr vert="horz" lIns="91440" tIns="91440" rIns="91440" bIns="91440" rtlCol="0" anchor="ctr">
+            <a:normAutofit/>
+          </a:bodyPr>
+          <a:lstStyle>
+            <a:lvl1pPr algn="ctr">
+              <a:defRPr kumimoji="1" sz="2400">
+                <a:solidFill>
+                  <a:schemeClr val="tx1"/>
+                </a:solidFill>
+                <a:latin typeface="+mn-ea"/>
+              </a:defRPr>
+            </a:lvl1pPr>
+          </a:lstStyle>
+          <a:p>
+            <a:r>
+              <a:rPr kumimoji="1" lang="ja-JP" altLang="en-US" sz="2800" dirty="0"/>
+              <a:t>AI</a:t>
+            </a:r>
+            <a:r>
+              <a:rPr lang="ja-JP" altLang="en-US" sz="2800" dirty="0"/>
+              <a:t>に</a:t>
+            </a:r>
+            <a:r>
+              <a:rPr kumimoji="1" lang="ja-JP" altLang="en-US" sz="2800" dirty="0"/>
+              <a:t>「何ができて、何をやらせるべき」か？</a:t>
+            </a:r>
+          </a:p>
+          <a:p>
+            <a:endParaRPr lang="ja-JP" altLang="en-US" dirty="0"/>
+          </a:p>
+          <a:p>
+            <a:endParaRPr lang="ja-JP" altLang="en-US" dirty="0"/>
+          </a:p>
+          <a:p>
+            <a:r>
+              <a:rPr kumimoji="1" lang="ja-JP" altLang="en-US" sz="3200" b="1" dirty="0"/>
+              <a:t>AI時代に仕事をどう設計するか</a:t>
+            </a:r>
+            <a:endParaRPr kumimoji="1" lang="en-US" altLang="ja-JP" sz="3200" b="1" dirty="0"/>
+          </a:p>
+        </p:txBody>
+      </p:sp>
+      <p:pic>
+        <p:nvPicPr>
+          <p:cNvPr id="4" name="図 3">
+            <a:extLst>
+              <a:ext uri="{FF2B5EF4-FFF2-40B4-BE49-F238E27FC236}">
+                <a16:creationId xmlns:a16="http://schemas.microsoft.com/office/drawing/2014/main" id="{54AAFD6A-8F69-762F-CC68-F02F57101B33}"/>
+              </a:ext>
+            </a:extLst>
+          </p:cNvPr>
+          <p:cNvPicPr>
+            <a:picLocks noChangeAspect="1"/>
+          </p:cNvPicPr>
+          <p:nvPr/>
+        </p:nvPicPr>
+        <p:blipFill>
+          <a:blip r:embed="rId2">
+            <a:alphaModFix amt="35000"/>
+            <a:extLst>
+              <a:ext uri="{28A0092B-C50C-407E-A947-70E740481C1C}">
+                <a14:useLocalDpi xmlns:a14="http://schemas.microsoft.com/office/drawing/2010/main" val="0"/>
+              </a:ext>
+            </a:extLst>
+          </a:blip>
+          <a:srcRect l="14905" t="2673" r="15827"/>
+          <a:stretch>
+            <a:fillRect/>
+          </a:stretch>
+        </p:blipFill>
+        <p:spPr>
+          <a:xfrm>
+            <a:off x="7653300" y="4365104"/>
+            <a:ext cx="2146032" cy="2412268"/>
+          </a:xfrm>
+          <a:prstGeom prst="rect">
+            <a:avLst/>
+          </a:prstGeom>
+        </p:spPr>
+      </p:pic>
+    </p:spTree>
+  </p:cSld>
+  <p:clrMapOvr>
+    <a:masterClrMapping/>
+  </p:clrMapOvr>
+</p:sld>
+</file>
+
+<file path=ppt/slides/slide20.xml><?xml version="1.0" encoding="utf-8"?>
 <p:sld xmlns:a="http://schemas.openxmlformats.org/drawingml/2006/main" xmlns:r="http://schemas.openxmlformats.org/officeDocument/2006/relationships" xmlns:p="http://schemas.openxmlformats.org/presentationml/2006/main">
   <p:cSld>
     <p:spTree>
@@ -9748,130 +10543,7 @@
 </p:sld>
 </file>
 
-<file path=ppt/slides/slide2.xml><?xml version="1.0" encoding="utf-8"?>
-<p:sld xmlns:a="http://schemas.openxmlformats.org/drawingml/2006/main" xmlns:r="http://schemas.openxmlformats.org/officeDocument/2006/relationships" xmlns:p="http://schemas.openxmlformats.org/presentationml/2006/main">
-  <p:cSld>
-    <p:spTree>
-      <p:nvGrpSpPr>
-        <p:cNvPr id="1" name=""/>
-        <p:cNvGrpSpPr/>
-        <p:nvPr/>
-      </p:nvGrpSpPr>
-      <p:grpSpPr>
-        <a:xfrm>
-          <a:off x="0" y="0"/>
-          <a:ext cx="0" cy="0"/>
-          <a:chOff x="0" y="0"/>
-          <a:chExt cx="0" cy="0"/>
-        </a:xfrm>
-      </p:grpSpPr>
-      <p:sp>
-        <p:nvSpPr>
-          <p:cNvPr id="2" name="コンテンツ 1"/>
-          <p:cNvSpPr txBox="1">
-            <a:spLocks/>
-          </p:cNvSpPr>
-          <p:nvPr/>
-        </p:nvSpPr>
-        <p:spPr>
-          <a:xfrm>
-            <a:off x="697186" y="1000000"/>
-            <a:ext cx="8496300" cy="4800000"/>
-          </a:xfrm>
-          <a:prstGeom prst="rect">
-            <a:avLst/>
-          </a:prstGeom>
-        </p:spPr>
-        <p:txBody>
-          <a:bodyPr vert="horz" lIns="91440" tIns="91440" rIns="91440" bIns="91440" rtlCol="0" anchor="ctr">
-            <a:normAutofit/>
-          </a:bodyPr>
-          <a:lstStyle>
-            <a:lvl1pPr algn="ctr">
-              <a:defRPr kumimoji="1" sz="2400">
-                <a:solidFill>
-                  <a:schemeClr val="tx1"/>
-                </a:solidFill>
-                <a:latin typeface="+mn-ea"/>
-              </a:defRPr>
-            </a:lvl1pPr>
-          </a:lstStyle>
-          <a:p>
-            <a:r>
-              <a:rPr kumimoji="1" lang="ja-JP" altLang="en-US" sz="2800" dirty="0"/>
-              <a:t>AI</a:t>
-            </a:r>
-            <a:r>
-              <a:rPr lang="ja-JP" altLang="en-US" sz="2800" dirty="0"/>
-              <a:t>に</a:t>
-            </a:r>
-            <a:r>
-              <a:rPr kumimoji="1" lang="ja-JP" altLang="en-US" sz="2800" dirty="0"/>
-              <a:t>「何ができて、何をやらせるべき」か？</a:t>
-            </a:r>
-          </a:p>
-          <a:p>
-            <a:endParaRPr lang="ja-JP" altLang="en-US" dirty="0"/>
-          </a:p>
-          <a:p>
-            <a:endParaRPr lang="ja-JP" altLang="en-US" dirty="0"/>
-          </a:p>
-          <a:p>
-            <a:r>
-              <a:rPr kumimoji="1" lang="ja-JP" altLang="en-US" sz="3200" b="1" dirty="0"/>
-              <a:t>AI時代に仕事をどう設計するか</a:t>
-            </a:r>
-            <a:endParaRPr kumimoji="1" lang="en-US" altLang="ja-JP" sz="3200" b="1" dirty="0"/>
-          </a:p>
-        </p:txBody>
-      </p:sp>
-      <p:pic>
-        <p:nvPicPr>
-          <p:cNvPr id="4" name="図 3">
-            <a:extLst>
-              <a:ext uri="{FF2B5EF4-FFF2-40B4-BE49-F238E27FC236}">
-                <a16:creationId xmlns:a16="http://schemas.microsoft.com/office/drawing/2014/main" id="{54AAFD6A-8F69-762F-CC68-F02F57101B33}"/>
-              </a:ext>
-            </a:extLst>
-          </p:cNvPr>
-          <p:cNvPicPr>
-            <a:picLocks noChangeAspect="1"/>
-          </p:cNvPicPr>
-          <p:nvPr/>
-        </p:nvPicPr>
-        <p:blipFill>
-          <a:blip r:embed="rId2">
-            <a:alphaModFix amt="35000"/>
-            <a:extLst>
-              <a:ext uri="{28A0092B-C50C-407E-A947-70E740481C1C}">
-                <a14:useLocalDpi xmlns:a14="http://schemas.microsoft.com/office/drawing/2010/main" val="0"/>
-              </a:ext>
-            </a:extLst>
-          </a:blip>
-          <a:srcRect l="14905" t="2673" r="15827"/>
-          <a:stretch>
-            <a:fillRect/>
-          </a:stretch>
-        </p:blipFill>
-        <p:spPr>
-          <a:xfrm>
-            <a:off x="7653300" y="4365104"/>
-            <a:ext cx="2146032" cy="2412268"/>
-          </a:xfrm>
-          <a:prstGeom prst="rect">
-            <a:avLst/>
-          </a:prstGeom>
-        </p:spPr>
-      </p:pic>
-    </p:spTree>
-  </p:cSld>
-  <p:clrMapOvr>
-    <a:masterClrMapping/>
-  </p:clrMapOvr>
-</p:sld>
-</file>
-
-<file path=ppt/slides/slide20.xml><?xml version="1.0" encoding="utf-8"?>
+<file path=ppt/slides/slide21.xml><?xml version="1.0" encoding="utf-8"?>
 <p:sld xmlns:a="http://schemas.openxmlformats.org/drawingml/2006/main" xmlns:r="http://schemas.openxmlformats.org/officeDocument/2006/relationships" xmlns:p="http://schemas.openxmlformats.org/presentationml/2006/main">
   <p:cSld>
     <p:spTree>
@@ -10222,7 +10894,7 @@
 </p:sld>
 </file>
 
-<file path=ppt/slides/slide21.xml><?xml version="1.0" encoding="utf-8"?>
+<file path=ppt/slides/slide22.xml><?xml version="1.0" encoding="utf-8"?>
 <p:sld xmlns:a="http://schemas.openxmlformats.org/drawingml/2006/main" xmlns:r="http://schemas.openxmlformats.org/officeDocument/2006/relationships" xmlns:p="http://schemas.openxmlformats.org/presentationml/2006/main">
   <p:cSld>
     <p:spTree>
@@ -10699,7 +11371,7 @@
 </p:sld>
 </file>
 
-<file path=ppt/slides/slide22.xml><?xml version="1.0" encoding="utf-8"?>
+<file path=ppt/slides/slide23.xml><?xml version="1.0" encoding="utf-8"?>
 <p:sld xmlns:a="http://schemas.openxmlformats.org/drawingml/2006/main" xmlns:r="http://schemas.openxmlformats.org/officeDocument/2006/relationships" xmlns:p="http://schemas.openxmlformats.org/presentationml/2006/main">
   <p:cSld>
     <p:spTree>
@@ -11676,7 +12348,7 @@
 </p:sld>
 </file>
 
-<file path=ppt/slides/slide23.xml><?xml version="1.0" encoding="utf-8"?>
+<file path=ppt/slides/slide24.xml><?xml version="1.0" encoding="utf-8"?>
 <p:sld xmlns:a="http://schemas.openxmlformats.org/drawingml/2006/main" xmlns:r="http://schemas.openxmlformats.org/officeDocument/2006/relationships" xmlns:p="http://schemas.openxmlformats.org/presentationml/2006/main">
   <p:cSld>
     <p:spTree>
@@ -12405,7 +13077,7 @@
 </p:sld>
 </file>
 
-<file path=ppt/slides/slide24.xml><?xml version="1.0" encoding="utf-8"?>
+<file path=ppt/slides/slide25.xml><?xml version="1.0" encoding="utf-8"?>
 <p:sld xmlns:a="http://schemas.openxmlformats.org/drawingml/2006/main" xmlns:r="http://schemas.openxmlformats.org/officeDocument/2006/relationships" xmlns:p="http://schemas.openxmlformats.org/presentationml/2006/main">
   <p:cSld>
     <p:spTree>
@@ -12768,7 +13440,7 @@
 </p:sld>
 </file>
 
-<file path=ppt/slides/slide25.xml><?xml version="1.0" encoding="utf-8"?>
+<file path=ppt/slides/slide26.xml><?xml version="1.0" encoding="utf-8"?>
 <p:sld xmlns:a="http://schemas.openxmlformats.org/drawingml/2006/main" xmlns:r="http://schemas.openxmlformats.org/officeDocument/2006/relationships" xmlns:p="http://schemas.openxmlformats.org/presentationml/2006/main">
   <p:cSld>
     <p:spTree>
@@ -12852,6 +13524,9 @@
           <a:bodyPr/>
           <a:lstStyle/>
           <a:p>
+            <a:endParaRPr lang="en-US" altLang="ja-JP" dirty="0"/>
+          </a:p>
+          <a:p>
             <a:endParaRPr lang="ja-JP" altLang="en-US" dirty="0"/>
           </a:p>
         </p:txBody>
@@ -12900,7 +13575,7 @@
         </p:nvSpPr>
         <p:spPr>
           <a:xfrm>
-            <a:off x="428088" y="3140968"/>
+            <a:off x="308484" y="4293096"/>
             <a:ext cx="2839798" cy="864096"/>
           </a:xfrm>
           <a:prstGeom prst="wedgeRectCallout">
@@ -12969,7 +13644,7 @@
         </p:nvSpPr>
         <p:spPr>
           <a:xfrm>
-            <a:off x="428088" y="4129874"/>
+            <a:off x="308484" y="5282002"/>
             <a:ext cx="2839798" cy="864096"/>
           </a:xfrm>
           <a:prstGeom prst="wedgeRectCallout">
@@ -13164,7 +13839,7 @@
 </p:sld>
 </file>
 
-<file path=ppt/slides/slide26.xml><?xml version="1.0" encoding="utf-8"?>
+<file path=ppt/slides/slide27.xml><?xml version="1.0" encoding="utf-8"?>
 <p:sld xmlns:a="http://schemas.openxmlformats.org/drawingml/2006/main" xmlns:r="http://schemas.openxmlformats.org/officeDocument/2006/relationships" xmlns:p="http://schemas.openxmlformats.org/presentationml/2006/main">
   <p:cSld>
     <p:spTree>
@@ -13668,7 +14343,7 @@
 </p:sld>
 </file>
 
-<file path=ppt/slides/slide27.xml><?xml version="1.0" encoding="utf-8"?>
+<file path=ppt/slides/slide28.xml><?xml version="1.0" encoding="utf-8"?>
 <p:sld xmlns:a="http://schemas.openxmlformats.org/drawingml/2006/main" xmlns:r="http://schemas.openxmlformats.org/officeDocument/2006/relationships" xmlns:p="http://schemas.openxmlformats.org/presentationml/2006/main">
   <p:cSld>
     <p:spTree>
@@ -13741,7 +14416,7 @@
             <a:fld id="{C314D315-6C69-40BF-98D6-60239DAB9584}" type="slidenum">
               <a:rPr lang="ja-JP" altLang="en-US" smtClean="0"/>
               <a:pPr/>
-              <a:t>26</a:t>
+              <a:t>27</a:t>
             </a:fld>
             <a:r>
               <a:rPr lang="ja-JP" altLang="en-US"/>
@@ -14756,7 +15431,7 @@
 </p:sld>
 </file>
 
-<file path=ppt/slides/slide28.xml><?xml version="1.0" encoding="utf-8"?>
+<file path=ppt/slides/slide29.xml><?xml version="1.0" encoding="utf-8"?>
 <p:sld xmlns:a="http://schemas.openxmlformats.org/drawingml/2006/main" xmlns:r="http://schemas.openxmlformats.org/officeDocument/2006/relationships" xmlns:p="http://schemas.openxmlformats.org/presentationml/2006/main">
   <p:cSld>
     <p:spTree>
@@ -15361,7 +16036,128 @@
 </p:sld>
 </file>
 
-<file path=ppt/slides/slide29.xml><?xml version="1.0" encoding="utf-8"?>
+<file path=ppt/slides/slide3.xml><?xml version="1.0" encoding="utf-8"?>
+<p:sld xmlns:a="http://schemas.openxmlformats.org/drawingml/2006/main" xmlns:r="http://schemas.openxmlformats.org/officeDocument/2006/relationships" xmlns:p="http://schemas.openxmlformats.org/presentationml/2006/main">
+  <p:cSld>
+    <p:spTree>
+      <p:nvGrpSpPr>
+        <p:cNvPr id="1" name="">
+          <a:extLst>
+            <a:ext uri="{FF2B5EF4-FFF2-40B4-BE49-F238E27FC236}">
+              <a16:creationId xmlns:a16="http://schemas.microsoft.com/office/drawing/2014/main" id="{E2B807AA-1893-685C-58DA-275050603BF7}"/>
+            </a:ext>
+          </a:extLst>
+        </p:cNvPr>
+        <p:cNvGrpSpPr/>
+        <p:nvPr/>
+      </p:nvGrpSpPr>
+      <p:grpSpPr>
+        <a:xfrm>
+          <a:off x="0" y="0"/>
+          <a:ext cx="0" cy="0"/>
+          <a:chOff x="0" y="0"/>
+          <a:chExt cx="0" cy="0"/>
+        </a:xfrm>
+      </p:grpSpPr>
+      <p:sp>
+        <p:nvSpPr>
+          <p:cNvPr id="2" name="コンテンツ 1">
+            <a:extLst>
+              <a:ext uri="{FF2B5EF4-FFF2-40B4-BE49-F238E27FC236}">
+                <a16:creationId xmlns:a16="http://schemas.microsoft.com/office/drawing/2014/main" id="{541267B1-6604-BF94-782E-4ECE098B8A6F}"/>
+              </a:ext>
+            </a:extLst>
+          </p:cNvPr>
+          <p:cNvSpPr txBox="1">
+            <a:spLocks/>
+          </p:cNvSpPr>
+          <p:nvPr/>
+        </p:nvSpPr>
+        <p:spPr>
+          <a:xfrm>
+            <a:off x="0" y="1000000"/>
+            <a:ext cx="9906000" cy="4800000"/>
+          </a:xfrm>
+          <a:prstGeom prst="rect">
+            <a:avLst/>
+          </a:prstGeom>
+        </p:spPr>
+        <p:txBody>
+          <a:bodyPr vert="horz" lIns="91440" tIns="91440" rIns="91440" bIns="91440" rtlCol="0" anchor="ctr">
+            <a:normAutofit/>
+          </a:bodyPr>
+          <a:lstStyle>
+            <a:lvl1pPr algn="ctr">
+              <a:defRPr kumimoji="1" sz="2400">
+                <a:solidFill>
+                  <a:schemeClr val="tx1"/>
+                </a:solidFill>
+                <a:latin typeface="+mn-ea"/>
+              </a:defRPr>
+            </a:lvl1pPr>
+          </a:lstStyle>
+          <a:p>
+            <a:pPr lvl="1"/>
+            <a:r>
+              <a:rPr lang="ja-JP" altLang="en-US" sz="3600" dirty="0"/>
+              <a:t>　　　　　　　　設計🧑‍💻</a:t>
+            </a:r>
+            <a:endParaRPr lang="en-US" altLang="ja-JP" sz="3600" dirty="0"/>
+          </a:p>
+          <a:p>
+            <a:pPr lvl="1"/>
+            <a:endParaRPr lang="en-US" altLang="ja-JP" sz="3600" dirty="0"/>
+          </a:p>
+          <a:p>
+            <a:pPr lvl="1"/>
+            <a:r>
+              <a:rPr lang="ja-JP" altLang="en-US" sz="3600" dirty="0"/>
+              <a:t>　　　　　　　　↓</a:t>
+            </a:r>
+            <a:r>
+              <a:rPr lang="ja-JP" altLang="en-US" sz="2800" dirty="0"/>
+              <a:t>判断</a:t>
+            </a:r>
+            <a:r>
+              <a:rPr lang="ja-JP" altLang="en-US" sz="3600" dirty="0"/>
+              <a:t>↓</a:t>
+            </a:r>
+            <a:br>
+              <a:rPr lang="en-US" altLang="ja-JP" sz="3600" dirty="0"/>
+            </a:br>
+            <a:endParaRPr lang="en-US" altLang="ja-JP" sz="3600" dirty="0"/>
+          </a:p>
+          <a:p>
+            <a:pPr lvl="1"/>
+            <a:r>
+              <a:rPr lang="ja-JP" altLang="en-US" sz="3600" dirty="0"/>
+              <a:t>「</a:t>
+            </a:r>
+            <a:r>
+              <a:rPr lang="ja-JP" altLang="en-US" sz="2800" dirty="0"/>
+              <a:t>判断 🙆→ 演算 🤖→ 判断🙅 → 演算🤖→判断 🙆」</a:t>
+            </a:r>
+            <a:br>
+              <a:rPr lang="en-US" altLang="ja-JP" dirty="0"/>
+            </a:br>
+            <a:endParaRPr lang="ja-JP" altLang="en-US" sz="2800" dirty="0"/>
+          </a:p>
+        </p:txBody>
+      </p:sp>
+    </p:spTree>
+    <p:extLst>
+      <p:ext uri="{BB962C8B-B14F-4D97-AF65-F5344CB8AC3E}">
+        <p14:creationId xmlns:p14="http://schemas.microsoft.com/office/powerpoint/2010/main" val="1957738102"/>
+      </p:ext>
+    </p:extLst>
+  </p:cSld>
+  <p:clrMapOvr>
+    <a:masterClrMapping/>
+  </p:clrMapOvr>
+</p:sld>
+</file>
+
+<file path=ppt/slides/slide30.xml><?xml version="1.0" encoding="utf-8"?>
 <p:sld xmlns:a="http://schemas.openxmlformats.org/drawingml/2006/main" xmlns:r="http://schemas.openxmlformats.org/officeDocument/2006/relationships" xmlns:p="http://schemas.openxmlformats.org/presentationml/2006/main">
   <p:cSld>
     <p:spTree>
@@ -15723,128 +16519,7 @@
 </p:sld>
 </file>
 
-<file path=ppt/slides/slide3.xml><?xml version="1.0" encoding="utf-8"?>
-<p:sld xmlns:a="http://schemas.openxmlformats.org/drawingml/2006/main" xmlns:r="http://schemas.openxmlformats.org/officeDocument/2006/relationships" xmlns:p="http://schemas.openxmlformats.org/presentationml/2006/main">
-  <p:cSld>
-    <p:spTree>
-      <p:nvGrpSpPr>
-        <p:cNvPr id="1" name="">
-          <a:extLst>
-            <a:ext uri="{FF2B5EF4-FFF2-40B4-BE49-F238E27FC236}">
-              <a16:creationId xmlns:a16="http://schemas.microsoft.com/office/drawing/2014/main" id="{E2B807AA-1893-685C-58DA-275050603BF7}"/>
-            </a:ext>
-          </a:extLst>
-        </p:cNvPr>
-        <p:cNvGrpSpPr/>
-        <p:nvPr/>
-      </p:nvGrpSpPr>
-      <p:grpSpPr>
-        <a:xfrm>
-          <a:off x="0" y="0"/>
-          <a:ext cx="0" cy="0"/>
-          <a:chOff x="0" y="0"/>
-          <a:chExt cx="0" cy="0"/>
-        </a:xfrm>
-      </p:grpSpPr>
-      <p:sp>
-        <p:nvSpPr>
-          <p:cNvPr id="2" name="コンテンツ 1">
-            <a:extLst>
-              <a:ext uri="{FF2B5EF4-FFF2-40B4-BE49-F238E27FC236}">
-                <a16:creationId xmlns:a16="http://schemas.microsoft.com/office/drawing/2014/main" id="{541267B1-6604-BF94-782E-4ECE098B8A6F}"/>
-              </a:ext>
-            </a:extLst>
-          </p:cNvPr>
-          <p:cNvSpPr txBox="1">
-            <a:spLocks/>
-          </p:cNvSpPr>
-          <p:nvPr/>
-        </p:nvSpPr>
-        <p:spPr>
-          <a:xfrm>
-            <a:off x="0" y="1000000"/>
-            <a:ext cx="9906000" cy="4800000"/>
-          </a:xfrm>
-          <a:prstGeom prst="rect">
-            <a:avLst/>
-          </a:prstGeom>
-        </p:spPr>
-        <p:txBody>
-          <a:bodyPr vert="horz" lIns="91440" tIns="91440" rIns="91440" bIns="91440" rtlCol="0" anchor="ctr">
-            <a:normAutofit/>
-          </a:bodyPr>
-          <a:lstStyle>
-            <a:lvl1pPr algn="ctr">
-              <a:defRPr kumimoji="1" sz="2400">
-                <a:solidFill>
-                  <a:schemeClr val="tx1"/>
-                </a:solidFill>
-                <a:latin typeface="+mn-ea"/>
-              </a:defRPr>
-            </a:lvl1pPr>
-          </a:lstStyle>
-          <a:p>
-            <a:pPr lvl="1"/>
-            <a:r>
-              <a:rPr lang="ja-JP" altLang="en-US" sz="3600" dirty="0"/>
-              <a:t>　　　　　　　　設計🧑‍💻</a:t>
-            </a:r>
-            <a:endParaRPr lang="en-US" altLang="ja-JP" sz="3600" dirty="0"/>
-          </a:p>
-          <a:p>
-            <a:pPr lvl="1"/>
-            <a:endParaRPr lang="en-US" altLang="ja-JP" sz="3600" dirty="0"/>
-          </a:p>
-          <a:p>
-            <a:pPr lvl="1"/>
-            <a:r>
-              <a:rPr lang="ja-JP" altLang="en-US" sz="3600" dirty="0"/>
-              <a:t>　　　　　　　　↓</a:t>
-            </a:r>
-            <a:r>
-              <a:rPr lang="ja-JP" altLang="en-US" sz="2800" dirty="0"/>
-              <a:t>判断</a:t>
-            </a:r>
-            <a:r>
-              <a:rPr lang="ja-JP" altLang="en-US" sz="3600" dirty="0"/>
-              <a:t>↓</a:t>
-            </a:r>
-            <a:br>
-              <a:rPr lang="en-US" altLang="ja-JP" sz="3600" dirty="0"/>
-            </a:br>
-            <a:endParaRPr lang="en-US" altLang="ja-JP" sz="3600" dirty="0"/>
-          </a:p>
-          <a:p>
-            <a:pPr lvl="1"/>
-            <a:r>
-              <a:rPr lang="ja-JP" altLang="en-US" sz="3600" dirty="0"/>
-              <a:t>「</a:t>
-            </a:r>
-            <a:r>
-              <a:rPr lang="ja-JP" altLang="en-US" sz="2800" dirty="0"/>
-              <a:t>判断 🙆→ 演算 🤖→ 判断🙅 → 演算🤖→判断 🙆」</a:t>
-            </a:r>
-            <a:br>
-              <a:rPr lang="en-US" altLang="ja-JP" dirty="0"/>
-            </a:br>
-            <a:endParaRPr lang="ja-JP" altLang="en-US" sz="2800" dirty="0"/>
-          </a:p>
-        </p:txBody>
-      </p:sp>
-    </p:spTree>
-    <p:extLst>
-      <p:ext uri="{BB962C8B-B14F-4D97-AF65-F5344CB8AC3E}">
-        <p14:creationId xmlns:p14="http://schemas.microsoft.com/office/powerpoint/2010/main" val="1957738102"/>
-      </p:ext>
-    </p:extLst>
-  </p:cSld>
-  <p:clrMapOvr>
-    <a:masterClrMapping/>
-  </p:clrMapOvr>
-</p:sld>
-</file>
-
-<file path=ppt/slides/slide30.xml><?xml version="1.0" encoding="utf-8"?>
+<file path=ppt/slides/slide31.xml><?xml version="1.0" encoding="utf-8"?>
 <p:sld xmlns:a="http://schemas.openxmlformats.org/drawingml/2006/main" xmlns:r="http://schemas.openxmlformats.org/officeDocument/2006/relationships" xmlns:p="http://schemas.openxmlformats.org/presentationml/2006/main">
   <p:cSld>
     <p:spTree>
@@ -15883,13 +16558,29 @@
             <p:ph type="ctrTitle"/>
           </p:nvPr>
         </p:nvSpPr>
-        <p:spPr/>
+        <p:spPr>
+          <a:xfrm>
+            <a:off x="744068" y="2312876"/>
+            <a:ext cx="4532968" cy="1358413"/>
+          </a:xfrm>
+        </p:spPr>
         <p:txBody>
           <a:bodyPr>
             <a:normAutofit fontScale="90000"/>
           </a:bodyPr>
           <a:lstStyle/>
           <a:p>
+            <a:r>
+              <a:rPr lang="en-US" altLang="ja-JP" dirty="0"/>
+              <a:t>AI</a:t>
+            </a:r>
+            <a:r>
+              <a:rPr lang="ja-JP" altLang="en-US" dirty="0"/>
+              <a:t>時代も変わらないもの</a:t>
+            </a:r>
+            <a:br>
+              <a:rPr lang="en-US" altLang="ja-JP" dirty="0"/>
+            </a:br>
             <a:r>
               <a:rPr lang="ja-JP" altLang="en-US" dirty="0"/>
               <a:t>判断（Judgment）と</a:t>
@@ -15921,7 +16612,12 @@
             <p:ph type="subTitle" idx="1"/>
           </p:nvPr>
         </p:nvSpPr>
-        <p:spPr/>
+        <p:spPr>
+          <a:xfrm>
+            <a:off x="693457" y="3731566"/>
+            <a:ext cx="4529652" cy="465137"/>
+          </a:xfrm>
+        </p:spPr>
         <p:txBody>
           <a:bodyPr>
             <a:normAutofit/>
@@ -15930,7 +16626,7 @@
           <a:p>
             <a:r>
               <a:rPr lang="ja-JP" altLang="en-US" dirty="0"/>
-              <a:t>偉大なる哲学者であり科学者：</a:t>
+              <a:t>偉大なる計算機哲学者：</a:t>
             </a:r>
             <a:r>
               <a:rPr lang="en-US" altLang="ja-JP" dirty="0"/>
@@ -15990,7 +16686,7 @@
 </p:sld>
 </file>
 
-<file path=ppt/slides/slide31.xml><?xml version="1.0" encoding="utf-8"?>
+<file path=ppt/slides/slide32.xml><?xml version="1.0" encoding="utf-8"?>
 <p:sld xmlns:a="http://schemas.openxmlformats.org/drawingml/2006/main" xmlns:r="http://schemas.openxmlformats.org/officeDocument/2006/relationships" xmlns:p="http://schemas.openxmlformats.org/presentationml/2006/main">
   <p:cSld>
     <p:spTree>
@@ -16257,7 +16953,7 @@
 </p:sld>
 </file>
 
-<file path=ppt/slides/slide32.xml><?xml version="1.0" encoding="utf-8"?>
+<file path=ppt/slides/slide33.xml><?xml version="1.0" encoding="utf-8"?>
 <p:sld xmlns:a="http://schemas.openxmlformats.org/drawingml/2006/main" xmlns:r="http://schemas.openxmlformats.org/officeDocument/2006/relationships" xmlns:p="http://schemas.openxmlformats.org/presentationml/2006/main">
   <p:cSld>
     <p:spTree>
@@ -16512,7 +17208,7 @@
 </p:sld>
 </file>
 
-<file path=ppt/slides/slide33.xml><?xml version="1.0" encoding="utf-8"?>
+<file path=ppt/slides/slide34.xml><?xml version="1.0" encoding="utf-8"?>
 <p:sld xmlns:a="http://schemas.openxmlformats.org/drawingml/2006/main" xmlns:r="http://schemas.openxmlformats.org/officeDocument/2006/relationships" xmlns:p="http://schemas.openxmlformats.org/presentationml/2006/main">
   <p:cSld>
     <p:spTree>
@@ -16700,7 +17396,7 @@
 </p:sld>
 </file>
 
-<file path=ppt/slides/slide34.xml><?xml version="1.0" encoding="utf-8"?>
+<file path=ppt/slides/slide35.xml><?xml version="1.0" encoding="utf-8"?>
 <p:sld xmlns:a="http://schemas.openxmlformats.org/drawingml/2006/main" xmlns:r="http://schemas.openxmlformats.org/officeDocument/2006/relationships" xmlns:p="http://schemas.openxmlformats.org/presentationml/2006/main">
   <p:cSld>
     <p:spTree>
@@ -17007,7 +17703,7 @@
 </p:sld>
 </file>
 
-<file path=ppt/slides/slide35.xml><?xml version="1.0" encoding="utf-8"?>
+<file path=ppt/slides/slide36.xml><?xml version="1.0" encoding="utf-8"?>
 <p:sld xmlns:a="http://schemas.openxmlformats.org/drawingml/2006/main" xmlns:r="http://schemas.openxmlformats.org/officeDocument/2006/relationships" xmlns:p="http://schemas.openxmlformats.org/presentationml/2006/main">
   <p:cSld>
     <p:spTree>
@@ -17222,7 +17918,7 @@
 </p:sld>
 </file>
 
-<file path=ppt/slides/slide36.xml><?xml version="1.0" encoding="utf-8"?>
+<file path=ppt/slides/slide37.xml><?xml version="1.0" encoding="utf-8"?>
 <p:sld xmlns:a="http://schemas.openxmlformats.org/drawingml/2006/main" xmlns:r="http://schemas.openxmlformats.org/officeDocument/2006/relationships" xmlns:p="http://schemas.openxmlformats.org/presentationml/2006/main">
   <p:cSld>
     <p:spTree>
@@ -17406,7 +18102,7 @@
 </p:sld>
 </file>
 
-<file path=ppt/slides/slide37.xml><?xml version="1.0" encoding="utf-8"?>
+<file path=ppt/slides/slide38.xml><?xml version="1.0" encoding="utf-8"?>
 <p:sld xmlns:a="http://schemas.openxmlformats.org/drawingml/2006/main" xmlns:r="http://schemas.openxmlformats.org/officeDocument/2006/relationships" xmlns:p="http://schemas.openxmlformats.org/presentationml/2006/main">
   <p:cSld>
     <p:spTree>
@@ -17671,8 +18367,20 @@
           <a:p>
             <a:pPr lvl="1"/>
             <a:r>
+              <a:rPr kumimoji="1" lang="en-US" altLang="ja-JP" sz="1600" dirty="0"/>
+              <a:t>AI</a:t>
+            </a:r>
+            <a:r>
               <a:rPr kumimoji="1" lang="ja-JP" altLang="en-US" sz="1600" dirty="0"/>
-              <a:t>Wiki を読んで既存仕様との整合性チェックができる</a:t>
+              <a:t>にWiki を読</a:t>
+            </a:r>
+            <a:r>
+              <a:rPr lang="ja-JP" altLang="en-US" sz="1600" dirty="0"/>
+              <a:t>ませて</a:t>
+            </a:r>
+            <a:r>
+              <a:rPr kumimoji="1" lang="ja-JP" altLang="en-US" sz="1600" dirty="0"/>
+              <a:t>既存仕様との整合性チェックができる</a:t>
             </a:r>
           </a:p>
           <a:p>
@@ -17775,7 +18483,7 @@
         </p:nvSpPr>
         <p:spPr>
           <a:xfrm>
-            <a:off x="6033120" y="2983285"/>
+            <a:off x="6537176" y="3150219"/>
             <a:ext cx="2448272" cy="864096"/>
           </a:xfrm>
           <a:prstGeom prst="wedgeRectCallout">
@@ -18118,7 +18826,15 @@
             <a:pPr lvl="1"/>
             <a:r>
               <a:rPr kumimoji="1" lang="ja-JP" altLang="en-US" sz="1800" dirty="0"/>
-              <a:t>Git 画像でリポジトリが重くなる   </a:t>
+              <a:t>画像を置くと</a:t>
+            </a:r>
+            <a:r>
+              <a:rPr lang="en-US" altLang="ja-JP" sz="1800" dirty="0"/>
+              <a:t>Git</a:t>
+            </a:r>
+            <a:r>
+              <a:rPr kumimoji="1" lang="ja-JP" altLang="en-US" sz="1800" dirty="0"/>
+              <a:t>が重くなる   </a:t>
             </a:r>
             <a:br>
               <a:rPr kumimoji="1" lang="en-US" altLang="ja-JP" sz="1800" dirty="0"/>
@@ -18160,7 +18876,7 @@
             <a:pPr lvl="1"/>
             <a:r>
               <a:rPr lang="ja-JP" altLang="en-US" sz="1800" dirty="0"/>
-              <a:t>仕様ページ（</a:t>
+              <a:t>既存ページ（</a:t>
             </a:r>
             <a:r>
               <a:rPr lang="en-US" altLang="ja-JP" sz="1800" dirty="0"/>
@@ -18292,8 +19008,8 @@
           </a:xfrm>
           <a:prstGeom prst="wedgeRectCallout">
             <a:avLst>
-              <a:gd name="adj1" fmla="val -46061"/>
-              <a:gd name="adj2" fmla="val -86766"/>
+              <a:gd name="adj1" fmla="val -61934"/>
+              <a:gd name="adj2" fmla="val -97941"/>
             </a:avLst>
           </a:prstGeom>
           <a:solidFill>
@@ -18824,6 +19540,102 @@
 </file>
 
 <file path=ppt/slides/slide7.xml><?xml version="1.0" encoding="utf-8"?>
+<p:sld xmlns:a="http://schemas.openxmlformats.org/drawingml/2006/main" xmlns:r="http://schemas.openxmlformats.org/officeDocument/2006/relationships" xmlns:p="http://schemas.openxmlformats.org/presentationml/2006/main">
+  <p:cSld>
+    <p:spTree>
+      <p:nvGrpSpPr>
+        <p:cNvPr id="1" name="">
+          <a:extLst>
+            <a:ext uri="{FF2B5EF4-FFF2-40B4-BE49-F238E27FC236}">
+              <a16:creationId xmlns:a16="http://schemas.microsoft.com/office/drawing/2014/main" id="{21D846F0-F65F-0787-A5D2-F94F252D97D6}"/>
+            </a:ext>
+          </a:extLst>
+        </p:cNvPr>
+        <p:cNvGrpSpPr/>
+        <p:nvPr/>
+      </p:nvGrpSpPr>
+      <p:grpSpPr>
+        <a:xfrm>
+          <a:off x="0" y="0"/>
+          <a:ext cx="0" cy="0"/>
+          <a:chOff x="0" y="0"/>
+          <a:chExt cx="0" cy="0"/>
+        </a:xfrm>
+      </p:grpSpPr>
+      <p:sp>
+        <p:nvSpPr>
+          <p:cNvPr id="3" name="タイトル 2">
+            <a:extLst>
+              <a:ext uri="{FF2B5EF4-FFF2-40B4-BE49-F238E27FC236}">
+                <a16:creationId xmlns:a16="http://schemas.microsoft.com/office/drawing/2014/main" id="{43784E62-F4D4-3BDA-3746-B5552D3C3F03}"/>
+              </a:ext>
+            </a:extLst>
+          </p:cNvPr>
+          <p:cNvSpPr>
+            <a:spLocks noGrp="1"/>
+          </p:cNvSpPr>
+          <p:nvPr>
+            <p:ph type="title"/>
+          </p:nvPr>
+        </p:nvSpPr>
+        <p:spPr/>
+        <p:txBody>
+          <a:bodyPr>
+            <a:normAutofit/>
+          </a:bodyPr>
+          <a:lstStyle/>
+          <a:p>
+            <a:r>
+              <a:rPr kumimoji="1" lang="ja-JP" altLang="en-US" dirty="0"/>
+              <a:t>できた</a:t>
+            </a:r>
+          </a:p>
+        </p:txBody>
+      </p:sp>
+      <p:pic>
+        <p:nvPicPr>
+          <p:cNvPr id="16" name="図 15">
+            <a:extLst>
+              <a:ext uri="{FF2B5EF4-FFF2-40B4-BE49-F238E27FC236}">
+                <a16:creationId xmlns:a16="http://schemas.microsoft.com/office/drawing/2014/main" id="{23BC8E6C-CAD7-8DBD-6F01-43B8F500BD53}"/>
+              </a:ext>
+            </a:extLst>
+          </p:cNvPr>
+          <p:cNvPicPr>
+            <a:picLocks noChangeAspect="1"/>
+          </p:cNvPicPr>
+          <p:nvPr/>
+        </p:nvPicPr>
+        <p:blipFill>
+          <a:blip r:embed="rId2"/>
+          <a:stretch>
+            <a:fillRect/>
+          </a:stretch>
+        </p:blipFill>
+        <p:spPr>
+          <a:xfrm>
+            <a:off x="0" y="1203724"/>
+            <a:ext cx="9906000" cy="5321620"/>
+          </a:xfrm>
+          <a:prstGeom prst="rect">
+            <a:avLst/>
+          </a:prstGeom>
+        </p:spPr>
+      </p:pic>
+    </p:spTree>
+    <p:extLst>
+      <p:ext uri="{BB962C8B-B14F-4D97-AF65-F5344CB8AC3E}">
+        <p14:creationId xmlns:p14="http://schemas.microsoft.com/office/powerpoint/2010/main" val="665860407"/>
+      </p:ext>
+    </p:extLst>
+  </p:cSld>
+  <p:clrMapOvr>
+    <a:masterClrMapping/>
+  </p:clrMapOvr>
+</p:sld>
+</file>
+
+<file path=ppt/slides/slide8.xml><?xml version="1.0" encoding="utf-8"?>
 <p:sld xmlns:a="http://schemas.openxmlformats.org/drawingml/2006/main" xmlns:r="http://schemas.openxmlformats.org/officeDocument/2006/relationships" xmlns:p="http://schemas.openxmlformats.org/presentationml/2006/main">
   <p:cSld>
     <p:spTree>
@@ -19842,7 +20654,7 @@
 </p:sld>
 </file>
 
-<file path=ppt/slides/slide8.xml><?xml version="1.0" encoding="utf-8"?>
+<file path=ppt/slides/slide9.xml><?xml version="1.0" encoding="utf-8"?>
 <p:sld xmlns:a="http://schemas.openxmlformats.org/drawingml/2006/main" xmlns:r="http://schemas.openxmlformats.org/officeDocument/2006/relationships" xmlns:p="http://schemas.openxmlformats.org/presentationml/2006/main">
   <p:cSld>
     <p:spTree>
@@ -20535,723 +21347,6 @@
       <p:bldP spid="6" grpId="0" animBg="1"/>
       <p:bldP spid="8" grpId="0" animBg="1"/>
       <p:bldP spid="9" grpId="0" animBg="1"/>
-    </p:bldLst>
-  </p:timing>
-</p:sld>
-</file>
-
-<file path=ppt/slides/slide9.xml><?xml version="1.0" encoding="utf-8"?>
-<p:sld xmlns:a="http://schemas.openxmlformats.org/drawingml/2006/main" xmlns:r="http://schemas.openxmlformats.org/officeDocument/2006/relationships" xmlns:p="http://schemas.openxmlformats.org/presentationml/2006/main">
-  <p:cSld>
-    <p:spTree>
-      <p:nvGrpSpPr>
-        <p:cNvPr id="1" name=""/>
-        <p:cNvGrpSpPr/>
-        <p:nvPr/>
-      </p:nvGrpSpPr>
-      <p:grpSpPr>
-        <a:xfrm>
-          <a:off x="0" y="0"/>
-          <a:ext cx="0" cy="0"/>
-          <a:chOff x="0" y="0"/>
-          <a:chExt cx="0" cy="0"/>
-        </a:xfrm>
-      </p:grpSpPr>
-      <p:sp>
-        <p:nvSpPr>
-          <p:cNvPr id="3" name="タイトル 2"/>
-          <p:cNvSpPr>
-            <a:spLocks noGrp="1"/>
-          </p:cNvSpPr>
-          <p:nvPr>
-            <p:ph type="title"/>
-          </p:nvPr>
-        </p:nvSpPr>
-        <p:spPr/>
-        <p:txBody>
-          <a:bodyPr/>
-          <a:lstStyle/>
-          <a:p>
-            <a:r>
-              <a:rPr kumimoji="1" lang="ja-JP" altLang="en-US" dirty="0"/>
-              <a:t>何が良かったか？</a:t>
-            </a:r>
-          </a:p>
-        </p:txBody>
-      </p:sp>
-      <p:sp>
-        <p:nvSpPr>
-          <p:cNvPr id="7" name="テキスト ボックス 6">
-            <a:extLst>
-              <a:ext uri="{FF2B5EF4-FFF2-40B4-BE49-F238E27FC236}">
-                <a16:creationId xmlns:a16="http://schemas.microsoft.com/office/drawing/2014/main" id="{22685930-C837-0D54-8400-06198893FC92}"/>
-              </a:ext>
-            </a:extLst>
-          </p:cNvPr>
-          <p:cNvSpPr txBox="1"/>
-          <p:nvPr/>
-        </p:nvSpPr>
-        <p:spPr>
-          <a:xfrm>
-            <a:off x="581142" y="1353809"/>
-            <a:ext cx="8619082" cy="3847207"/>
-          </a:xfrm>
-          <a:prstGeom prst="rect">
-            <a:avLst/>
-          </a:prstGeom>
-          <a:noFill/>
-        </p:spPr>
-        <p:txBody>
-          <a:bodyPr wrap="square">
-            <a:spAutoFit/>
-          </a:bodyPr>
-          <a:lstStyle/>
-          <a:p>
-            <a:endParaRPr lang="ja-JP" altLang="en-US" sz="2400" b="1" dirty="0"/>
-          </a:p>
-          <a:p>
-            <a:pPr marL="742950" lvl="1" indent="-285750">
-              <a:buFont typeface="Arial" panose="020B0604020202020204" pitchFamily="34" charset="0"/>
-              <a:buChar char="•"/>
-            </a:pPr>
-            <a:r>
-              <a:rPr lang="ja-JP" altLang="en-US" sz="2000" dirty="0"/>
-              <a:t>仕様</a:t>
-            </a:r>
-            <a:r>
-              <a:rPr lang="ja-JP" altLang="en-US" sz="2000" b="1" dirty="0"/>
-              <a:t>ドキュメントを Git 管理</a:t>
-            </a:r>
-            <a:endParaRPr lang="en-US" altLang="ja-JP" sz="2000" b="1" dirty="0"/>
-          </a:p>
-          <a:p>
-            <a:pPr marL="742950" lvl="1" indent="-285750">
-              <a:buFont typeface="Arial" panose="020B0604020202020204" pitchFamily="34" charset="0"/>
-              <a:buChar char="•"/>
-            </a:pPr>
-            <a:endParaRPr lang="en-US" altLang="ja-JP" sz="2000" dirty="0"/>
-          </a:p>
-          <a:p>
-            <a:pPr marL="742950" lvl="1" indent="-285750">
-              <a:buFont typeface="Arial" panose="020B0604020202020204" pitchFamily="34" charset="0"/>
-              <a:buChar char="•"/>
-            </a:pPr>
-            <a:endParaRPr lang="en-US" altLang="ja-JP" sz="2000" dirty="0"/>
-          </a:p>
-          <a:p>
-            <a:pPr marL="742950" lvl="1" indent="-285750">
-              <a:buFont typeface="Arial" panose="020B0604020202020204" pitchFamily="34" charset="0"/>
-              <a:buChar char="•"/>
-            </a:pPr>
-            <a:r>
-              <a:rPr lang="ja-JP" altLang="en-US" sz="2000" dirty="0"/>
-              <a:t>移行作業はほぼ一瞬</a:t>
-            </a:r>
-          </a:p>
-          <a:p>
-            <a:pPr marL="742950" lvl="1" indent="-285750">
-              <a:buFont typeface="Arial" panose="020B0604020202020204" pitchFamily="34" charset="0"/>
-              <a:buChar char="•"/>
-            </a:pPr>
-            <a:endParaRPr lang="en-US" altLang="ja-JP" sz="2000" b="1" dirty="0"/>
-          </a:p>
-          <a:p>
-            <a:pPr marL="742950" lvl="1" indent="-285750">
-              <a:buFont typeface="Arial" panose="020B0604020202020204" pitchFamily="34" charset="0"/>
-              <a:buChar char="•"/>
-            </a:pPr>
-            <a:endParaRPr lang="en-US" altLang="ja-JP" sz="2000" b="1" dirty="0"/>
-          </a:p>
-          <a:p>
-            <a:pPr marL="742950" lvl="1" indent="-285750">
-              <a:buFont typeface="Arial" panose="020B0604020202020204" pitchFamily="34" charset="0"/>
-              <a:buChar char="•"/>
-            </a:pPr>
-            <a:r>
-              <a:rPr lang="ja-JP" altLang="en-US" sz="2000" b="1" dirty="0"/>
-              <a:t>仕様をコードから AI で生成 </a:t>
-            </a:r>
-            <a:endParaRPr lang="en-US" altLang="ja-JP" sz="2000" b="1" dirty="0"/>
-          </a:p>
-          <a:p>
-            <a:pPr marL="1200150" lvl="2" indent="-285750">
-              <a:buFont typeface="Arial" panose="020B0604020202020204" pitchFamily="34" charset="0"/>
-              <a:buChar char="•"/>
-            </a:pPr>
-            <a:r>
-              <a:rPr lang="ja-JP" altLang="en-US" sz="2000" b="1" dirty="0"/>
-              <a:t>→ 過程でバグも発見</a:t>
-            </a:r>
-            <a:endParaRPr lang="en-US" altLang="ja-JP" sz="2000" b="1" dirty="0"/>
-          </a:p>
-          <a:p>
-            <a:pPr marL="742950" lvl="1" indent="-285750">
-              <a:buFont typeface="Arial" panose="020B0604020202020204" pitchFamily="34" charset="0"/>
-              <a:buChar char="•"/>
-            </a:pPr>
-            <a:endParaRPr lang="en-US" altLang="ja-JP" sz="2000" dirty="0"/>
-          </a:p>
-          <a:p>
-            <a:pPr marL="742950" lvl="1" indent="-285750">
-              <a:buFont typeface="Arial" panose="020B0604020202020204" pitchFamily="34" charset="0"/>
-              <a:buChar char="•"/>
-            </a:pPr>
-            <a:endParaRPr lang="ja-JP" altLang="en-US" sz="2000" dirty="0"/>
-          </a:p>
-          <a:p>
-            <a:pPr marL="742950" lvl="1" indent="-285750">
-              <a:buFont typeface="Arial" panose="020B0604020202020204" pitchFamily="34" charset="0"/>
-              <a:buChar char="•"/>
-            </a:pPr>
-            <a:r>
-              <a:rPr lang="ja-JP" altLang="en-US" sz="2000" dirty="0"/>
-              <a:t>コミット履歴で貢献が見える</a:t>
-            </a:r>
-            <a:endParaRPr lang="en-US" altLang="ja-JP" sz="2000" dirty="0"/>
-          </a:p>
-        </p:txBody>
-      </p:sp>
-      <p:sp>
-        <p:nvSpPr>
-          <p:cNvPr id="8" name="吹き出し: 四角形 7">
-            <a:extLst>
-              <a:ext uri="{FF2B5EF4-FFF2-40B4-BE49-F238E27FC236}">
-                <a16:creationId xmlns:a16="http://schemas.microsoft.com/office/drawing/2014/main" id="{8957AAA6-B194-7F8F-8665-2C8B4FF4A582}"/>
-              </a:ext>
-            </a:extLst>
-          </p:cNvPr>
-          <p:cNvSpPr/>
-          <p:nvPr/>
-        </p:nvSpPr>
-        <p:spPr>
-          <a:xfrm>
-            <a:off x="3799187" y="2932045"/>
-            <a:ext cx="4178149" cy="525207"/>
-          </a:xfrm>
-          <a:prstGeom prst="wedgeRectCallout">
-            <a:avLst>
-              <a:gd name="adj1" fmla="val -43886"/>
-              <a:gd name="adj2" fmla="val -74072"/>
-            </a:avLst>
-          </a:prstGeom>
-          <a:solidFill>
-            <a:schemeClr val="accent6">
-              <a:lumMod val="75000"/>
-              <a:alpha val="50000"/>
-            </a:schemeClr>
-          </a:solidFill>
-          <a:ln>
-            <a:noFill/>
-          </a:ln>
-        </p:spPr>
-        <p:style>
-          <a:lnRef idx="0">
-            <a:scrgbClr r="0" g="0" b="0"/>
-          </a:lnRef>
-          <a:fillRef idx="0">
-            <a:scrgbClr r="0" g="0" b="0"/>
-          </a:fillRef>
-          <a:effectRef idx="0">
-            <a:scrgbClr r="0" g="0" b="0"/>
-          </a:effectRef>
-          <a:fontRef idx="minor">
-            <a:schemeClr val="lt1"/>
-          </a:fontRef>
-        </p:style>
-        <p:txBody>
-          <a:bodyPr rtlCol="0" anchor="ctr"/>
-          <a:lstStyle/>
-          <a:p>
-            <a:pPr algn="ctr"/>
-            <a:r>
-              <a:rPr lang="ja-JP" altLang="en-US" dirty="0"/>
-              <a:t>193 ファイルの移行が一瞬で完了</a:t>
-            </a:r>
-            <a:endParaRPr kumimoji="1" lang="ja-JP" altLang="en-US" dirty="0"/>
-          </a:p>
-        </p:txBody>
-      </p:sp>
-      <p:sp>
-        <p:nvSpPr>
-          <p:cNvPr id="9" name="吹き出し: 四角形 8">
-            <a:extLst>
-              <a:ext uri="{FF2B5EF4-FFF2-40B4-BE49-F238E27FC236}">
-                <a16:creationId xmlns:a16="http://schemas.microsoft.com/office/drawing/2014/main" id="{F760B43F-9B03-FBD1-5433-B2DB7E4C89A0}"/>
-              </a:ext>
-            </a:extLst>
-          </p:cNvPr>
-          <p:cNvSpPr/>
-          <p:nvPr/>
-        </p:nvSpPr>
-        <p:spPr>
-          <a:xfrm>
-            <a:off x="4890683" y="3925955"/>
-            <a:ext cx="3557541" cy="621138"/>
-          </a:xfrm>
-          <a:prstGeom prst="wedgeRectCallout">
-            <a:avLst>
-              <a:gd name="adj1" fmla="val -62716"/>
-              <a:gd name="adj2" fmla="val -25833"/>
-            </a:avLst>
-          </a:prstGeom>
-          <a:solidFill>
-            <a:schemeClr val="accent6">
-              <a:lumMod val="75000"/>
-              <a:alpha val="50000"/>
-            </a:schemeClr>
-          </a:solidFill>
-          <a:ln>
-            <a:noFill/>
-          </a:ln>
-        </p:spPr>
-        <p:style>
-          <a:lnRef idx="0">
-            <a:scrgbClr r="0" g="0" b="0"/>
-          </a:lnRef>
-          <a:fillRef idx="0">
-            <a:scrgbClr r="0" g="0" b="0"/>
-          </a:fillRef>
-          <a:effectRef idx="0">
-            <a:scrgbClr r="0" g="0" b="0"/>
-          </a:effectRef>
-          <a:fontRef idx="minor">
-            <a:schemeClr val="lt1"/>
-          </a:fontRef>
-        </p:style>
-        <p:txBody>
-          <a:bodyPr rtlCol="0" anchor="ctr"/>
-          <a:lstStyle/>
-          <a:p>
-            <a:pPr algn="ctr"/>
-            <a:r>
-              <a:rPr lang="ja-JP" altLang="en-US" dirty="0"/>
-              <a:t>S</a:t>
-            </a:r>
-            <a:r>
-              <a:rPr lang="en-US" altLang="ja-JP" dirty="0"/>
-              <a:t>ingle </a:t>
-            </a:r>
-            <a:r>
-              <a:rPr lang="ja-JP" altLang="en-US" dirty="0"/>
-              <a:t>S</a:t>
-            </a:r>
-            <a:r>
-              <a:rPr lang="en-US" altLang="ja-JP" dirty="0" err="1"/>
-              <a:t>ourse</a:t>
-            </a:r>
-            <a:r>
-              <a:rPr lang="en-US" altLang="ja-JP" dirty="0"/>
-              <a:t> </a:t>
-            </a:r>
-            <a:r>
-              <a:rPr lang="ja-JP" altLang="en-US" dirty="0"/>
-              <a:t>O</a:t>
-            </a:r>
-            <a:r>
-              <a:rPr lang="en-US" altLang="ja-JP" dirty="0"/>
-              <a:t>f </a:t>
-            </a:r>
-            <a:r>
-              <a:rPr lang="ja-JP" altLang="en-US" dirty="0"/>
-              <a:t>T</a:t>
-            </a:r>
-            <a:r>
-              <a:rPr lang="en-US" altLang="ja-JP" dirty="0" err="1"/>
-              <a:t>rueth</a:t>
-            </a:r>
-            <a:r>
-              <a:rPr lang="ja-JP" altLang="en-US" dirty="0"/>
-              <a:t> の恩恵</a:t>
-            </a:r>
-            <a:endParaRPr kumimoji="1" lang="ja-JP" altLang="en-US" dirty="0"/>
-          </a:p>
-        </p:txBody>
-      </p:sp>
-      <p:sp>
-        <p:nvSpPr>
-          <p:cNvPr id="10" name="吹き出し: 四角形 9">
-            <a:extLst>
-              <a:ext uri="{FF2B5EF4-FFF2-40B4-BE49-F238E27FC236}">
-                <a16:creationId xmlns:a16="http://schemas.microsoft.com/office/drawing/2014/main" id="{F834D801-626B-6896-86CD-78A50E36DCA8}"/>
-              </a:ext>
-            </a:extLst>
-          </p:cNvPr>
-          <p:cNvSpPr/>
-          <p:nvPr/>
-        </p:nvSpPr>
-        <p:spPr>
-          <a:xfrm>
-            <a:off x="3799187" y="5505267"/>
-            <a:ext cx="4649038" cy="494013"/>
-          </a:xfrm>
-          <a:prstGeom prst="wedgeRectCallout">
-            <a:avLst>
-              <a:gd name="adj1" fmla="val -37515"/>
-              <a:gd name="adj2" fmla="val -119721"/>
-            </a:avLst>
-          </a:prstGeom>
-          <a:solidFill>
-            <a:schemeClr val="accent6">
-              <a:lumMod val="75000"/>
-              <a:alpha val="50000"/>
-            </a:schemeClr>
-          </a:solidFill>
-          <a:ln>
-            <a:noFill/>
-          </a:ln>
-        </p:spPr>
-        <p:style>
-          <a:lnRef idx="0">
-            <a:scrgbClr r="0" g="0" b="0"/>
-          </a:lnRef>
-          <a:fillRef idx="0">
-            <a:scrgbClr r="0" g="0" b="0"/>
-          </a:fillRef>
-          <a:effectRef idx="0">
-            <a:scrgbClr r="0" g="0" b="0"/>
-          </a:effectRef>
-          <a:fontRef idx="minor">
-            <a:schemeClr val="lt1"/>
-          </a:fontRef>
-        </p:style>
-        <p:txBody>
-          <a:bodyPr rtlCol="0" anchor="ctr"/>
-          <a:lstStyle/>
-          <a:p>
-            <a:pPr algn="ctr"/>
-            <a:r>
-              <a:rPr lang="ja-JP" altLang="en-US" b="1" dirty="0"/>
-              <a:t>エンジニアの心得：小さなことに感謝する</a:t>
-            </a:r>
-            <a:endParaRPr kumimoji="1" lang="ja-JP" altLang="en-US" dirty="0"/>
-          </a:p>
-        </p:txBody>
-      </p:sp>
-      <p:sp>
-        <p:nvSpPr>
-          <p:cNvPr id="13" name="吹き出し: 四角形 12">
-            <a:extLst>
-              <a:ext uri="{FF2B5EF4-FFF2-40B4-BE49-F238E27FC236}">
-                <a16:creationId xmlns:a16="http://schemas.microsoft.com/office/drawing/2014/main" id="{2B72902B-5C0F-2045-CCF6-BC852865D506}"/>
-              </a:ext>
-            </a:extLst>
-          </p:cNvPr>
-          <p:cNvSpPr/>
-          <p:nvPr/>
-        </p:nvSpPr>
-        <p:spPr>
-          <a:xfrm>
-            <a:off x="4580378" y="2102587"/>
-            <a:ext cx="4178149" cy="525207"/>
-          </a:xfrm>
-          <a:prstGeom prst="wedgeRectCallout">
-            <a:avLst>
-              <a:gd name="adj1" fmla="val -43886"/>
-              <a:gd name="adj2" fmla="val -74072"/>
-            </a:avLst>
-          </a:prstGeom>
-          <a:solidFill>
-            <a:schemeClr val="accent6">
-              <a:lumMod val="75000"/>
-              <a:alpha val="50000"/>
-            </a:schemeClr>
-          </a:solidFill>
-          <a:ln>
-            <a:noFill/>
-          </a:ln>
-        </p:spPr>
-        <p:style>
-          <a:lnRef idx="0">
-            <a:scrgbClr r="0" g="0" b="0"/>
-          </a:lnRef>
-          <a:fillRef idx="0">
-            <a:scrgbClr r="0" g="0" b="0"/>
-          </a:fillRef>
-          <a:effectRef idx="0">
-            <a:scrgbClr r="0" g="0" b="0"/>
-          </a:effectRef>
-          <a:fontRef idx="minor">
-            <a:schemeClr val="lt1"/>
-          </a:fontRef>
-        </p:style>
-        <p:txBody>
-          <a:bodyPr rtlCol="0" anchor="ctr"/>
-          <a:lstStyle/>
-          <a:p>
-            <a:pPr algn="ctr"/>
-            <a:r>
-              <a:rPr lang="ja-JP" altLang="en-US" dirty="0"/>
-              <a:t>コード↔ドキュメントの連携が可能に</a:t>
-            </a:r>
-            <a:endParaRPr kumimoji="1" lang="ja-JP" altLang="en-US" dirty="0"/>
-          </a:p>
-        </p:txBody>
-      </p:sp>
-    </p:spTree>
-  </p:cSld>
-  <p:clrMapOvr>
-    <a:masterClrMapping/>
-  </p:clrMapOvr>
-  <p:timing>
-    <p:tnLst>
-      <p:par>
-        <p:cTn id="1" dur="indefinite" restart="never" nodeType="tmRoot">
-          <p:childTnLst>
-            <p:seq concurrent="1" nextAc="seek">
-              <p:cTn id="2" dur="indefinite" nodeType="mainSeq">
-                <p:childTnLst>
-                  <p:par>
-                    <p:cTn id="3" fill="hold">
-                      <p:stCondLst>
-                        <p:cond delay="indefinite"/>
-                      </p:stCondLst>
-                      <p:childTnLst>
-                        <p:par>
-                          <p:cTn id="4" fill="hold">
-                            <p:stCondLst>
-                              <p:cond delay="0"/>
-                            </p:stCondLst>
-                            <p:childTnLst>
-                              <p:par>
-                                <p:cTn id="5" presetID="1" presetClass="entr" presetSubtype="0" fill="hold" grpId="0" nodeType="clickEffect">
-                                  <p:stCondLst>
-                                    <p:cond delay="0"/>
-                                  </p:stCondLst>
-                                  <p:childTnLst>
-                                    <p:set>
-                                      <p:cBhvr>
-                                        <p:cTn id="6" dur="1" fill="hold">
-                                          <p:stCondLst>
-                                            <p:cond delay="0"/>
-                                          </p:stCondLst>
-                                        </p:cTn>
-                                        <p:tgtEl>
-                                          <p:spTgt spid="7"/>
-                                        </p:tgtEl>
-                                        <p:attrNameLst>
-                                          <p:attrName>style.visibility</p:attrName>
-                                        </p:attrNameLst>
-                                      </p:cBhvr>
-                                      <p:to>
-                                        <p:strVal val="visible"/>
-                                      </p:to>
-                                    </p:set>
-                                  </p:childTnLst>
-                                </p:cTn>
-                              </p:par>
-                            </p:childTnLst>
-                          </p:cTn>
-                        </p:par>
-                      </p:childTnLst>
-                    </p:cTn>
-                  </p:par>
-                  <p:par>
-                    <p:cTn id="7" fill="hold">
-                      <p:stCondLst>
-                        <p:cond delay="indefinite"/>
-                      </p:stCondLst>
-                      <p:childTnLst>
-                        <p:par>
-                          <p:cTn id="8" fill="hold">
-                            <p:stCondLst>
-                              <p:cond delay="0"/>
-                            </p:stCondLst>
-                            <p:childTnLst>
-                              <p:par>
-                                <p:cTn id="9" presetID="1" presetClass="entr" presetSubtype="0" fill="hold" grpId="0" nodeType="clickEffect">
-                                  <p:stCondLst>
-                                    <p:cond delay="0"/>
-                                  </p:stCondLst>
-                                  <p:childTnLst>
-                                    <p:set>
-                                      <p:cBhvr>
-                                        <p:cTn id="10" dur="1" fill="hold">
-                                          <p:stCondLst>
-                                            <p:cond delay="0"/>
-                                          </p:stCondLst>
-                                        </p:cTn>
-                                        <p:tgtEl>
-                                          <p:spTgt spid="8"/>
-                                        </p:tgtEl>
-                                        <p:attrNameLst>
-                                          <p:attrName>style.visibility</p:attrName>
-                                        </p:attrNameLst>
-                                      </p:cBhvr>
-                                      <p:to>
-                                        <p:strVal val="visible"/>
-                                      </p:to>
-                                    </p:set>
-                                  </p:childTnLst>
-                                </p:cTn>
-                              </p:par>
-                            </p:childTnLst>
-                          </p:cTn>
-                        </p:par>
-                      </p:childTnLst>
-                    </p:cTn>
-                  </p:par>
-                  <p:par>
-                    <p:cTn id="11" fill="hold">
-                      <p:stCondLst>
-                        <p:cond delay="indefinite"/>
-                      </p:stCondLst>
-                      <p:childTnLst>
-                        <p:par>
-                          <p:cTn id="12" fill="hold">
-                            <p:stCondLst>
-                              <p:cond delay="0"/>
-                            </p:stCondLst>
-                            <p:childTnLst>
-                              <p:par>
-                                <p:cTn id="13" presetID="1" presetClass="entr" presetSubtype="0" fill="hold" grpId="0" nodeType="clickEffect">
-                                  <p:stCondLst>
-                                    <p:cond delay="0"/>
-                                  </p:stCondLst>
-                                  <p:childTnLst>
-                                    <p:set>
-                                      <p:cBhvr>
-                                        <p:cTn id="14" dur="1" fill="hold">
-                                          <p:stCondLst>
-                                            <p:cond delay="0"/>
-                                          </p:stCondLst>
-                                        </p:cTn>
-                                        <p:tgtEl>
-                                          <p:spTgt spid="9"/>
-                                        </p:tgtEl>
-                                        <p:attrNameLst>
-                                          <p:attrName>style.visibility</p:attrName>
-                                        </p:attrNameLst>
-                                      </p:cBhvr>
-                                      <p:to>
-                                        <p:strVal val="visible"/>
-                                      </p:to>
-                                    </p:set>
-                                  </p:childTnLst>
-                                </p:cTn>
-                              </p:par>
-                            </p:childTnLst>
-                          </p:cTn>
-                        </p:par>
-                      </p:childTnLst>
-                    </p:cTn>
-                  </p:par>
-                  <p:par>
-                    <p:cTn id="15" fill="hold">
-                      <p:stCondLst>
-                        <p:cond delay="indefinite"/>
-                      </p:stCondLst>
-                      <p:childTnLst>
-                        <p:par>
-                          <p:cTn id="16" fill="hold">
-                            <p:stCondLst>
-                              <p:cond delay="0"/>
-                            </p:stCondLst>
-                            <p:childTnLst>
-                              <p:par>
-                                <p:cTn id="17" presetID="1" presetClass="entr" presetSubtype="0" fill="hold" grpId="0" nodeType="clickEffect">
-                                  <p:stCondLst>
-                                    <p:cond delay="0"/>
-                                  </p:stCondLst>
-                                  <p:childTnLst>
-                                    <p:set>
-                                      <p:cBhvr>
-                                        <p:cTn id="18" dur="1" fill="hold">
-                                          <p:stCondLst>
-                                            <p:cond delay="0"/>
-                                          </p:stCondLst>
-                                        </p:cTn>
-                                        <p:tgtEl>
-                                          <p:spTgt spid="10"/>
-                                        </p:tgtEl>
-                                        <p:attrNameLst>
-                                          <p:attrName>style.visibility</p:attrName>
-                                        </p:attrNameLst>
-                                      </p:cBhvr>
-                                      <p:to>
-                                        <p:strVal val="visible"/>
-                                      </p:to>
-                                    </p:set>
-                                  </p:childTnLst>
-                                </p:cTn>
-                              </p:par>
-                            </p:childTnLst>
-                          </p:cTn>
-                        </p:par>
-                      </p:childTnLst>
-                    </p:cTn>
-                  </p:par>
-                  <p:par>
-                    <p:cTn id="19" fill="hold">
-                      <p:stCondLst>
-                        <p:cond delay="indefinite"/>
-                      </p:stCondLst>
-                      <p:childTnLst>
-                        <p:par>
-                          <p:cTn id="20" fill="hold">
-                            <p:stCondLst>
-                              <p:cond delay="0"/>
-                            </p:stCondLst>
-                            <p:childTnLst>
-                              <p:par>
-                                <p:cTn id="21" presetID="1" presetClass="entr" presetSubtype="0" fill="hold" grpId="0" nodeType="clickEffect">
-                                  <p:stCondLst>
-                                    <p:cond delay="0"/>
-                                  </p:stCondLst>
-                                  <p:childTnLst>
-                                    <p:set>
-                                      <p:cBhvr>
-                                        <p:cTn id="22" dur="1" fill="hold">
-                                          <p:stCondLst>
-                                            <p:cond delay="0"/>
-                                          </p:stCondLst>
-                                        </p:cTn>
-                                        <p:tgtEl>
-                                          <p:spTgt spid="13"/>
-                                        </p:tgtEl>
-                                        <p:attrNameLst>
-                                          <p:attrName>style.visibility</p:attrName>
-                                        </p:attrNameLst>
-                                      </p:cBhvr>
-                                      <p:to>
-                                        <p:strVal val="visible"/>
-                                      </p:to>
-                                    </p:set>
-                                  </p:childTnLst>
-                                </p:cTn>
-                              </p:par>
-                            </p:childTnLst>
-                          </p:cTn>
-                        </p:par>
-                      </p:childTnLst>
-                    </p:cTn>
-                  </p:par>
-                </p:childTnLst>
-              </p:cTn>
-              <p:prevCondLst>
-                <p:cond evt="onPrev" delay="0">
-                  <p:tgtEl>
-                    <p:sldTgt/>
-                  </p:tgtEl>
-                </p:cond>
-              </p:prevCondLst>
-              <p:nextCondLst>
-                <p:cond evt="onNext" delay="0">
-                  <p:tgtEl>
-                    <p:sldTgt/>
-                  </p:tgtEl>
-                </p:cond>
-              </p:nextCondLst>
-            </p:seq>
-          </p:childTnLst>
-        </p:cTn>
-      </p:par>
-    </p:tnLst>
-    <p:bldLst>
-      <p:bldP spid="7" grpId="0"/>
-      <p:bldP spid="8" grpId="0" animBg="1"/>
-      <p:bldP spid="9" grpId="0" animBg="1"/>
-      <p:bldP spid="10" grpId="0" animBg="1"/>
-      <p:bldP spid="13" grpId="0" animBg="1"/>
     </p:bldLst>
   </p:timing>
 </p:sld>
